--- a/samples/VK_Tech_шаблон__classic.pptx
+++ b/samples/VK_Tech_шаблон__classic.pptx
@@ -279,7 +279,7 @@
               <c:strCache>
                 <c:ptCount val="1"/>
                 <c:pt idx="0">
-                  <c:v>Время сборки</c:v>
+                  <c:v>Время</c:v>
                 </c:pt>
               </c:strCache>
             </c:strRef>
@@ -300,10 +300,10 @@
               <c:strCache>
                 <c:ptCount val="2"/>
                 <c:pt idx="0">
-                  <c:v>Текущий</c:v>
+                  <c:v>Сборка</c:v>
                 </c:pt>
                 <c:pt idx="1">
-                  <c:v>Пилот</c:v>
+                  <c:v>Правки</c:v>
                 </c:pt>
               </c:strCache>
             </c:strRef>
@@ -318,7 +318,7 @@
                   <c:v>186.0</c:v>
                 </c:pt>
                 <c:pt idx="1">
-                  <c:v>4.0</c:v>
+                  <c:v>74.0</c:v>
                 </c:pt>
               </c:numCache>
             </c:numRef>
@@ -393,193 +393,6 @@
                 </a:pPr>
                 <a:r>
                   <a:t>мин</a:t>
-                </a:r>
-              </a:p>
-            </c:rich>
-          </c:tx>
-          <c:layout/>
-          <c:overlay val="0"/>
-        </c:title>
-        <c:majorTickMark val="out"/>
-        <c:minorTickMark val="none"/>
-        <c:tickLblPos val="nextTo"/>
-        <c:txPr>
-          <a:bodyPr/>
-          <a:lstStyle/>
-          <a:p>
-            <a:pPr>
-              <a:defRPr sz="1100" b="0">
-                <a:solidFill>
-                  <a:srgbClr val="000000"/>
-                </a:solidFill>
-                <a:latin typeface="Play"/>
-                <a:ea typeface="Play"/>
-                <a:cs typeface="Play"/>
-              </a:defRPr>
-            </a:pPr>
-          </a:p>
-        </c:txPr>
-        <c:crossAx val="-2068027336"/>
-        <c:crosses val="autoZero"/>
-      </c:valAx>
-    </c:plotArea>
-    <c:dispBlanksAs val="gap"/>
-  </c:chart>
-  <c:txPr>
-    <a:bodyPr/>
-    <a:lstStyle/>
-    <a:p>
-      <a:pPr>
-        <a:defRPr sz="1200" b="0">
-          <a:solidFill>
-            <a:srgbClr val="000000"/>
-          </a:solidFill>
-          <a:latin typeface="Play"/>
-          <a:ea typeface="Play"/>
-          <a:cs typeface="Play"/>
-        </a:defRPr>
-      </a:pPr>
-      <a:endParaRPr lang="en-US"/>
-    </a:p>
-  </c:txPr>
-  <c:externalData r:id="rId1">
-    <c:autoUpdate val="0"/>
-  </c:externalData>
-</c:chartSpace>
-</file>
-
-<file path=ppt/charts/chart2.xml><?xml version="1.0" encoding="utf-8"?>
-<c:chartSpace xmlns:c="http://schemas.openxmlformats.org/drawingml/2006/chart" xmlns:a="http://schemas.openxmlformats.org/drawingml/2006/main" xmlns:r="http://schemas.openxmlformats.org/officeDocument/2006/relationships">
-  <c:date1904 val="0"/>
-  <c:chart>
-    <c:autoTitleDeleted val="1"/>
-    <c:plotArea>
-      <c:barChart>
-        <c:barDir val="col"/>
-        <c:grouping val="clustered"/>
-        <c:ser>
-          <c:idx val="0"/>
-          <c:order val="0"/>
-          <c:tx>
-            <c:strRef>
-              <c:f>Sheet1!$B$1</c:f>
-              <c:strCache>
-                <c:ptCount val="1"/>
-                <c:pt idx="0">
-                  <c:v>Время до первой версии</c:v>
-                </c:pt>
-              </c:strCache>
-            </c:strRef>
-          </c:tx>
-          <c:spPr>
-            <a:solidFill>
-              <a:srgbClr val="0077FF"/>
-            </a:solidFill>
-            <a:ln>
-              <a:solidFill>
-                <a:srgbClr val="0077FF"/>
-              </a:solidFill>
-            </a:ln>
-          </c:spPr>
-          <c:cat>
-            <c:strRef>
-              <c:f>Sheet1!$A$2:$A$3</c:f>
-              <c:strCache>
-                <c:ptCount val="2"/>
-                <c:pt idx="0">
-                  <c:v>Текущий</c:v>
-                </c:pt>
-                <c:pt idx="1">
-                  <c:v>Пилот</c:v>
-                </c:pt>
-              </c:strCache>
-            </c:strRef>
-          </c:cat>
-          <c:val>
-            <c:numRef>
-              <c:f>Sheet1!$B$2:$B$3</c:f>
-              <c:numCache>
-                <c:formatCode>General</c:formatCode>
-                <c:ptCount val="2"/>
-                <c:pt idx="0">
-                  <c:v>6.0</c:v>
-                </c:pt>
-                <c:pt idx="1">
-                  <c:v>1.0</c:v>
-                </c:pt>
-              </c:numCache>
-            </c:numRef>
-          </c:val>
-        </c:ser>
-        <c:gapWidth val="60"/>
-        <c:axId val="-2068027336"/>
-        <c:axId val="-2113994440"/>
-      </c:barChart>
-      <c:catAx>
-        <c:axId val="-2068027336"/>
-        <c:scaling>
-          <c:orientation val="minMax"/>
-        </c:scaling>
-        <c:delete val="0"/>
-        <c:axPos val="b"/>
-        <c:majorTickMark val="out"/>
-        <c:minorTickMark val="none"/>
-        <c:tickLblPos val="nextTo"/>
-        <c:txPr>
-          <a:bodyPr/>
-          <a:lstStyle/>
-          <a:p>
-            <a:pPr>
-              <a:defRPr sz="1100" b="0">
-                <a:solidFill>
-                  <a:srgbClr val="000000"/>
-                </a:solidFill>
-                <a:latin typeface="Play"/>
-                <a:ea typeface="Play"/>
-                <a:cs typeface="Play"/>
-              </a:defRPr>
-            </a:pPr>
-          </a:p>
-        </c:txPr>
-        <c:crossAx val="-2113994440"/>
-        <c:crosses val="autoZero"/>
-        <c:auto val="1"/>
-        <c:lblAlgn val="ctr"/>
-        <c:lblOffset val="100"/>
-        <c:noMultiLvlLbl val="0"/>
-      </c:catAx>
-      <c:valAx>
-        <c:axId val="-2113994440"/>
-        <c:scaling/>
-        <c:delete val="0"/>
-        <c:axPos val="l"/>
-        <c:majorGridlines>
-          <c:spPr>
-            <a:ln w="9525">
-              <a:solidFill>
-                <a:srgbClr val="D1D1D1"/>
-              </a:solidFill>
-            </a:ln>
-          </c:spPr>
-        </c:majorGridlines>
-        <c:title>
-          <c:tx>
-            <c:rich>
-              <a:bodyPr/>
-              <a:lstStyle/>
-              <a:p>
-                <a:pPr>
-                  <a:defRPr sz="1100" b="0">
-                    <a:solidFill>
-                      <a:srgbClr val="000000"/>
-                    </a:solidFill>
-                    <a:latin typeface="Play"/>
-                    <a:ea typeface="Play"/>
-                    <a:cs typeface="Play"/>
-                  </a:defRPr>
-                </a:pPr>
-                <a:r>
-                  <a:t>дней</a:t>
                 </a:r>
               </a:p>
             </c:rich>
@@ -5784,14 +5597,14 @@
       </p:sp>
       <p:sp>
         <p:nvSpPr>
-          <p:cNvPr id="533" name="Google Shape;533;p53"/>
+          <p:cNvPr id="553" name="Google Shape;553;p53"/>
           <p:cNvSpPr/>
           <p:nvPr/>
         </p:nvSpPr>
         <p:spPr>
           <a:xfrm>
-            <a:off x="303214" y="1022533"/>
-            <a:ext cx="1395256" cy="1433588"/>
+            <a:off x="276488" y="2955549"/>
+            <a:ext cx="8451939" cy="1433588"/>
           </a:xfrm>
           <a:prstGeom prst="rect">
             <a:avLst/>
@@ -5825,14 +5638,14 @@
       </p:sp>
       <p:sp>
         <p:nvSpPr>
-          <p:cNvPr id="537" name="Google Shape;537;p53"/>
+          <p:cNvPr id="554" name="Google Shape;554;p53"/>
           <p:cNvSpPr/>
           <p:nvPr/>
         </p:nvSpPr>
         <p:spPr>
           <a:xfrm>
-            <a:off x="2067385" y="1022533"/>
-            <a:ext cx="1395256" cy="1433588"/>
+            <a:off x="303214" y="2797849"/>
+            <a:ext cx="8451939" cy="1433588"/>
           </a:xfrm>
           <a:prstGeom prst="rect">
             <a:avLst/>
@@ -5866,14 +5679,499 @@
       </p:sp>
       <p:sp>
         <p:nvSpPr>
-          <p:cNvPr id="541" name="Google Shape;541;p53"/>
+          <p:cNvPr id="555" name="title"/>
+          <p:cNvSpPr txBox="1"/>
+          <p:nvPr/>
+        </p:nvSpPr>
+        <p:spPr>
+          <a:xfrm>
+            <a:off x="274320" y="282943"/>
+            <a:ext cx="6792986" cy="617220"/>
+          </a:xfrm>
+          <a:prstGeom prst="rect">
+            <a:avLst/>
+          </a:prstGeom>
+          <a:noFill/>
+        </p:spPr>
+        <p:txBody>
+          <a:bodyPr wrap="square" lIns="76200" rIns="76200" tIns="50800" bIns="50800">
+            <a:spAutoFit/>
+          </a:bodyPr>
+          <a:lstStyle/>
+          <a:p>
+            <a:pPr algn="l">
+              <a:spcAft>
+                <a:spcPts val="300"/>
+              </a:spcAft>
+              <a:defRPr sz="2400">
+                <a:solidFill>
+                  <a:srgbClr val="000000"/>
+                </a:solidFill>
+                <a:latin typeface="Play"/>
+                <a:ea typeface="Play"/>
+                <a:cs typeface="Play"/>
+              </a:defRPr>
+            </a:pPr>
+            <a:r>
+              <a:rPr sz="2400">
+                <a:solidFill>
+                  <a:srgbClr val="000000"/>
+                </a:solidFill>
+                <a:latin typeface="Play"/>
+                <a:ea typeface="Play"/>
+                <a:cs typeface="Play"/>
+              </a:rPr>
+              <a:t>Контекст и возможность</a:t>
+            </a:r>
+          </a:p>
+        </p:txBody>
+      </p:sp>
+      <p:sp>
+        <p:nvSpPr>
+          <p:cNvPr id="556" name="body"/>
+          <p:cNvSpPr txBox="1"/>
+          <p:nvPr/>
+        </p:nvSpPr>
+        <p:spPr>
+          <a:xfrm>
+            <a:off x="274320" y="1414513"/>
+            <a:ext cx="8344814" cy="1140746"/>
+          </a:xfrm>
+          <a:prstGeom prst="rect">
+            <a:avLst/>
+          </a:prstGeom>
+          <a:noFill/>
+        </p:spPr>
+        <p:txBody>
+          <a:bodyPr wrap="square" lIns="76200" rIns="76200" tIns="50800" bIns="50800">
+            <a:spAutoFit/>
+          </a:bodyPr>
+          <a:lstStyle/>
+          <a:p>
+            <a:pPr algn="l">
+              <a:spcAft>
+                <a:spcPts val="300"/>
+              </a:spcAft>
+              <a:defRPr sz="1225">
+                <a:solidFill>
+                  <a:srgbClr val="000000"/>
+                </a:solidFill>
+                <a:latin typeface="Play"/>
+                <a:ea typeface="Play"/>
+                <a:cs typeface="Play"/>
+              </a:defRPr>
+            </a:pPr>
+            <a:r>
+              <a:rPr sz="1225">
+                <a:solidFill>
+                  <a:srgbClr val="000000"/>
+                </a:solidFill>
+                <a:latin typeface="Play"/>
+                <a:ea typeface="Play"/>
+                <a:cs typeface="Play"/>
+              </a:rPr>
+              <a:t>• 186 минут на сборку одной презентации</a:t>
+            </a:r>
+          </a:p>
+          <a:p>
+            <a:pPr algn="l">
+              <a:spcAft>
+                <a:spcPts val="300"/>
+              </a:spcAft>
+              <a:defRPr sz="1225">
+                <a:solidFill>
+                  <a:srgbClr val="000000"/>
+                </a:solidFill>
+                <a:latin typeface="Play"/>
+                <a:ea typeface="Play"/>
+                <a:cs typeface="Play"/>
+              </a:defRPr>
+            </a:pPr>
+            <a:r>
+              <a:rPr sz="1225">
+                <a:solidFill>
+                  <a:srgbClr val="000000"/>
+                </a:solidFill>
+                <a:latin typeface="Play"/>
+                <a:ea typeface="Play"/>
+                <a:cs typeface="Play"/>
+              </a:rPr>
+              <a:t>• 74 минуты на правки после ревью</a:t>
+            </a:r>
+          </a:p>
+          <a:p>
+            <a:pPr algn="l">
+              <a:spcAft>
+                <a:spcPts val="300"/>
+              </a:spcAft>
+              <a:defRPr sz="1225">
+                <a:solidFill>
+                  <a:srgbClr val="000000"/>
+                </a:solidFill>
+                <a:latin typeface="Play"/>
+                <a:ea typeface="Play"/>
+                <a:cs typeface="Play"/>
+              </a:defRPr>
+            </a:pPr>
+            <a:r>
+              <a:rPr sz="1225">
+                <a:solidFill>
+                  <a:srgbClr val="000000"/>
+                </a:solidFill>
+                <a:latin typeface="Play"/>
+                <a:ea typeface="Play"/>
+                <a:cs typeface="Play"/>
+              </a:rPr>
+              <a:t>• 19 из 42 колод нарушили фирменный стиль</a:t>
+            </a:r>
+          </a:p>
+          <a:p>
+            <a:pPr algn="l">
+              <a:spcAft>
+                <a:spcPts val="300"/>
+              </a:spcAft>
+              <a:defRPr sz="1225">
+                <a:solidFill>
+                  <a:srgbClr val="000000"/>
+                </a:solidFill>
+                <a:latin typeface="Play"/>
+                <a:ea typeface="Play"/>
+                <a:cs typeface="Play"/>
+              </a:defRPr>
+            </a:pPr>
+            <a:r>
+              <a:rPr sz="1225">
+                <a:solidFill>
+                  <a:srgbClr val="000000"/>
+                </a:solidFill>
+                <a:latin typeface="Play"/>
+                <a:ea typeface="Play"/>
+                <a:cs typeface="Play"/>
+              </a:rPr>
+              <a:t>• 4 дизайнера закрывают 11 запросов в неделю</a:t>
+            </a:r>
+          </a:p>
+          <a:p>
+            <a:pPr algn="l">
+              <a:spcAft>
+                <a:spcPts val="300"/>
+              </a:spcAft>
+              <a:defRPr sz="1225">
+                <a:solidFill>
+                  <a:srgbClr val="000000"/>
+                </a:solidFill>
+                <a:latin typeface="Play"/>
+                <a:ea typeface="Play"/>
+                <a:cs typeface="Play"/>
+              </a:defRPr>
+            </a:pPr>
+            <a:r>
+              <a:rPr sz="1225">
+                <a:solidFill>
+                  <a:srgbClr val="000000"/>
+                </a:solidFill>
+                <a:latin typeface="Play"/>
+                <a:ea typeface="Play"/>
+                <a:cs typeface="Play"/>
+              </a:rPr>
+              <a:t>• Средний срок ожидания 6 рабочих дней</a:t>
+            </a:r>
+          </a:p>
+        </p:txBody>
+      </p:sp>
+      <p:graphicFrame>
+        <p:nvGraphicFramePr>
+          <p:cNvPr id="557" name="Chart 556"/>
+          <p:cNvGraphicFramePr>
+            <a:graphicFrameLocks noGrp="1"/>
+          </p:cNvGraphicFramePr>
+          <p:nvPr/>
+        </p:nvGraphicFramePr>
+        <p:xfrm>
+          <a:off x="274320" y="2683847"/>
+          <a:ext cx="8344814" cy="1582531"/>
+        </p:xfrm>
+        <a:graphic>
+          <a:graphicData uri="http://schemas.openxmlformats.org/drawingml/2006/chart">
+            <c:chart xmlns:c="http://schemas.openxmlformats.org/drawingml/2006/chart" r:id="rId2"/>
+          </a:graphicData>
+        </a:graphic>
+      </p:graphicFrame>
+    </p:spTree>
+  </p:cSld>
+  <p:clrMapOvr>
+    <a:masterClrMapping/>
+  </p:clrMapOvr>
+</p:sld>
+</file>
+
+<file path=ppt/slides/slide57.xml><?xml version="1.0" encoding="utf-8"?>
+<p:sld xmlns:a="http://schemas.openxmlformats.org/drawingml/2006/main" xmlns:p="http://schemas.openxmlformats.org/presentationml/2006/main" xmlns:r="http://schemas.openxmlformats.org/officeDocument/2006/relationships">
+  <p:cSld>
+    <p:spTree>
+      <p:nvGrpSpPr>
+        <p:cNvPr id="1" name=""/>
+        <p:cNvGrpSpPr/>
+        <p:nvPr/>
+      </p:nvGrpSpPr>
+      <p:grpSpPr/>
+      <p:sp>
+        <p:nvSpPr>
+          <p:cNvPr id="2" name="title"/>
+          <p:cNvSpPr txBox="1"/>
+          <p:nvPr/>
+        </p:nvSpPr>
+        <p:spPr>
+          <a:xfrm>
+            <a:off x="274320" y="282943"/>
+            <a:ext cx="6792986" cy="617220"/>
+          </a:xfrm>
+          <a:prstGeom prst="rect">
+            <a:avLst/>
+          </a:prstGeom>
+          <a:noFill/>
+        </p:spPr>
+        <p:txBody>
+          <a:bodyPr wrap="square" lIns="76200" rIns="76200" tIns="50800" bIns="50800">
+            <a:spAutoFit/>
+          </a:bodyPr>
+          <a:lstStyle/>
+          <a:p>
+            <a:pPr algn="l">
+              <a:spcAft>
+                <a:spcPts val="300"/>
+              </a:spcAft>
+              <a:defRPr sz="2400">
+                <a:solidFill>
+                  <a:srgbClr val="000000"/>
+                </a:solidFill>
+                <a:latin typeface="Play"/>
+                <a:ea typeface="Play"/>
+                <a:cs typeface="Play"/>
+              </a:defRPr>
+            </a:pPr>
+            <a:r>
+              <a:rPr sz="2400">
+                <a:solidFill>
+                  <a:srgbClr val="000000"/>
+                </a:solidFill>
+                <a:latin typeface="Play"/>
+                <a:ea typeface="Play"/>
+                <a:cs typeface="Play"/>
+              </a:rPr>
+              <a:t>Предложение</a:t>
+            </a:r>
+          </a:p>
+        </p:txBody>
+      </p:sp>
+      <p:sp>
+        <p:nvSpPr>
+          <p:cNvPr id="3" name="body"/>
+          <p:cNvSpPr txBox="1"/>
+          <p:nvPr/>
+        </p:nvSpPr>
+        <p:spPr>
+          <a:xfrm>
+            <a:off x="274320" y="1414513"/>
+            <a:ext cx="7189469" cy="2602405"/>
+          </a:xfrm>
+          <a:prstGeom prst="rect">
+            <a:avLst/>
+          </a:prstGeom>
+          <a:noFill/>
+        </p:spPr>
+        <p:txBody>
+          <a:bodyPr wrap="square" lIns="76200" rIns="76200" tIns="50800" bIns="50800">
+            <a:spAutoFit/>
+          </a:bodyPr>
+          <a:lstStyle/>
+          <a:p>
+            <a:pPr algn="l">
+              <a:spcAft>
+                <a:spcPts val="300"/>
+              </a:spcAft>
+              <a:defRPr sz="1803" b="1">
+                <a:solidFill>
+                  <a:srgbClr val="000000"/>
+                </a:solidFill>
+                <a:latin typeface="Play"/>
+                <a:ea typeface="Play"/>
+                <a:cs typeface="Play"/>
+              </a:defRPr>
+            </a:pPr>
+            <a:r>
+              <a:rPr sz="1803" b="1">
+                <a:solidFill>
+                  <a:srgbClr val="000000"/>
+                </a:solidFill>
+                <a:latin typeface="Play"/>
+                <a:ea typeface="Play"/>
+                <a:cs typeface="Play"/>
+              </a:rPr>
+              <a:t>• Принимает шаблон pptx и материалы</a:t>
+            </a:r>
+          </a:p>
+          <a:p>
+            <a:pPr algn="l">
+              <a:spcAft>
+                <a:spcPts val="300"/>
+              </a:spcAft>
+              <a:defRPr sz="1803" b="1">
+                <a:solidFill>
+                  <a:srgbClr val="000000"/>
+                </a:solidFill>
+                <a:latin typeface="Play"/>
+                <a:ea typeface="Play"/>
+                <a:cs typeface="Play"/>
+              </a:defRPr>
+            </a:pPr>
+            <a:r>
+              <a:rPr sz="1803" b="1">
+                <a:solidFill>
+                  <a:srgbClr val="000000"/>
+                </a:solidFill>
+                <a:latin typeface="Play"/>
+                <a:ea typeface="Play"/>
+                <a:cs typeface="Play"/>
+              </a:rPr>
+              <a:t>• Генерирует колоду по дизайн‑системе</a:t>
+            </a:r>
+          </a:p>
+          <a:p>
+            <a:pPr algn="l">
+              <a:spcAft>
+                <a:spcPts val="300"/>
+              </a:spcAft>
+              <a:defRPr sz="1803" b="1">
+                <a:solidFill>
+                  <a:srgbClr val="000000"/>
+                </a:solidFill>
+                <a:latin typeface="Play"/>
+                <a:ea typeface="Play"/>
+                <a:cs typeface="Play"/>
+              </a:defRPr>
+            </a:pPr>
+            <a:r>
+              <a:rPr sz="1803" b="1">
+                <a:solidFill>
+                  <a:srgbClr val="000000"/>
+                </a:solidFill>
+                <a:latin typeface="Play"/>
+                <a:ea typeface="Play"/>
+                <a:cs typeface="Play"/>
+              </a:rPr>
+              <a:t>• Аудит качества проверяет каждый элемент</a:t>
+            </a:r>
+          </a:p>
+          <a:p>
+            <a:pPr algn="l">
+              <a:spcAft>
+                <a:spcPts val="300"/>
+              </a:spcAft>
+              <a:defRPr sz="1803" b="1">
+                <a:solidFill>
+                  <a:srgbClr val="000000"/>
+                </a:solidFill>
+                <a:latin typeface="Play"/>
+                <a:ea typeface="Play"/>
+                <a:cs typeface="Play"/>
+              </a:defRPr>
+            </a:pPr>
+            <a:r>
+              <a:rPr sz="1803" b="1">
+                <a:solidFill>
+                  <a:srgbClr val="000000"/>
+                </a:solidFill>
+                <a:latin typeface="Play"/>
+                <a:ea typeface="Play"/>
+                <a:cs typeface="Play"/>
+              </a:rPr>
+              <a:t>• Экспорт в pptx, pdf и html</a:t>
+            </a:r>
+          </a:p>
+          <a:p>
+            <a:pPr algn="l">
+              <a:spcAft>
+                <a:spcPts val="300"/>
+              </a:spcAft>
+              <a:defRPr sz="1803" b="1">
+                <a:solidFill>
+                  <a:srgbClr val="000000"/>
+                </a:solidFill>
+                <a:latin typeface="Play"/>
+                <a:ea typeface="Play"/>
+                <a:cs typeface="Play"/>
+              </a:defRPr>
+            </a:pPr>
+            <a:r>
+              <a:rPr sz="1803" b="1">
+                <a:solidFill>
+                  <a:srgbClr val="000000"/>
+                </a:solidFill>
+                <a:latin typeface="Play"/>
+                <a:ea typeface="Play"/>
+                <a:cs typeface="Play"/>
+              </a:rPr>
+              <a:t>• Слайды остаются редактируемыми</a:t>
+            </a:r>
+          </a:p>
+        </p:txBody>
+      </p:sp>
+    </p:spTree>
+  </p:cSld>
+  <p:clrMapOvr>
+    <a:masterClrMapping/>
+  </p:clrMapOvr>
+</p:sld>
+</file>
+
+<file path=ppt/slides/slide58.xml><?xml version="1.0" encoding="utf-8"?>
+<p:sld xmlns:a="http://schemas.openxmlformats.org/drawingml/2006/main" xmlns:p="http://schemas.openxmlformats.org/presentationml/2006/main" xmlns:r="http://schemas.openxmlformats.org/officeDocument/2006/relationships">
+  <p:cSld>
+    <p:spTree>
+      <p:nvGrpSpPr>
+        <p:cNvPr id="1" name=""/>
+        <p:cNvGrpSpPr/>
+        <p:nvPr/>
+      </p:nvGrpSpPr>
+      <p:grpSpPr/>
+      <p:pic>
+        <p:nvPicPr>
+          <p:cNvPr descr=" " id="2385" name="Google Shape;2385;p88"/>
+          <p:cNvPicPr preferRelativeResize="0"/>
+          <p:nvPr/>
+        </p:nvPicPr>
+        <p:blipFill rotWithShape="1">
+          <a:blip r:embed="rId2">
+            <a:alphaModFix/>
+          </a:blip>
+          <a:srcRect b="0" l="0" r="0" t="0"/>
+          <a:stretch/>
+        </p:blipFill>
+        <p:spPr>
+          <a:xfrm>
+            <a:off x="388142" y="2000324"/>
+            <a:ext cx="8755811" cy="9524"/>
+          </a:xfrm>
+          <a:prstGeom prst="rect">
+            <a:avLst/>
+          </a:prstGeom>
+          <a:noFill/>
+          <a:ln>
+            <a:noFill/>
+          </a:ln>
+        </p:spPr>
+      </p:pic>
+      <p:sp>
+        <p:nvSpPr>
+          <p:cNvPr id="2386" name="Google Shape;2386;p88"/>
           <p:cNvSpPr/>
           <p:nvPr/>
         </p:nvSpPr>
         <p:spPr>
           <a:xfrm>
-            <a:off x="3831556" y="1022533"/>
-            <a:ext cx="1395256" cy="1433588"/>
+            <a:off x="319086" y="1286042"/>
+            <a:ext cx="1690679" cy="1128566"/>
           </a:xfrm>
           <a:prstGeom prst="rect">
             <a:avLst/>
@@ -5907,14 +6205,1453 @@
       </p:sp>
       <p:sp>
         <p:nvSpPr>
-          <p:cNvPr id="545" name="Google Shape;545;p53"/>
+          <p:cNvPr id="2388" name="Google Shape;2388;p88"/>
           <p:cNvSpPr/>
           <p:nvPr/>
         </p:nvSpPr>
         <p:spPr>
           <a:xfrm>
-            <a:off x="5595727" y="1022533"/>
-            <a:ext cx="1395256" cy="1433588"/>
+            <a:off x="2600312" y="1286042"/>
+            <a:ext cx="1690679" cy="1128566"/>
+          </a:xfrm>
+          <a:prstGeom prst="rect">
+            <a:avLst/>
+          </a:prstGeom>
+          <a:noFill/>
+          <a:ln>
+            <a:noFill/>
+          </a:ln>
+        </p:spPr>
+        <p:txBody>
+          <a:bodyPr anchorCtr="0" anchor="ctr" bIns="91425" lIns="91425" spcFirstLastPara="1" rIns="91425" wrap="square" tIns="91425">
+            <a:noAutofit/>
+          </a:bodyPr>
+          <a:lstStyle/>
+          <a:p>
+            <a:pPr indent="0" lvl="0" marL="0" rtl="0" algn="l">
+              <a:spcBef>
+                <a:spcPts val="0"/>
+              </a:spcBef>
+              <a:spcAft>
+                <a:spcPts val="0"/>
+              </a:spcAft>
+              <a:buNone/>
+            </a:pPr>
+            <a:r>
+              <a:t/>
+            </a:r>
+            <a:endParaRPr/>
+          </a:p>
+        </p:txBody>
+      </p:sp>
+      <p:sp>
+        <p:nvSpPr>
+          <p:cNvPr id="2390" name="Google Shape;2390;p88"/>
+          <p:cNvSpPr/>
+          <p:nvPr/>
+        </p:nvSpPr>
+        <p:spPr>
+          <a:xfrm>
+            <a:off x="4881537" y="1286042"/>
+            <a:ext cx="1690679" cy="1128566"/>
+          </a:xfrm>
+          <a:prstGeom prst="rect">
+            <a:avLst/>
+          </a:prstGeom>
+          <a:noFill/>
+          <a:ln>
+            <a:noFill/>
+          </a:ln>
+        </p:spPr>
+        <p:txBody>
+          <a:bodyPr anchorCtr="0" anchor="ctr" bIns="91425" lIns="91425" spcFirstLastPara="1" rIns="91425" wrap="square" tIns="91425">
+            <a:noAutofit/>
+          </a:bodyPr>
+          <a:lstStyle/>
+          <a:p>
+            <a:pPr indent="0" lvl="0" marL="0" rtl="0" algn="l">
+              <a:spcBef>
+                <a:spcPts val="0"/>
+              </a:spcBef>
+              <a:spcAft>
+                <a:spcPts val="0"/>
+              </a:spcAft>
+              <a:buNone/>
+            </a:pPr>
+            <a:r>
+              <a:t/>
+            </a:r>
+            <a:endParaRPr/>
+          </a:p>
+        </p:txBody>
+      </p:sp>
+      <p:sp>
+        <p:nvSpPr>
+          <p:cNvPr id="2392" name="Google Shape;2392;p88"/>
+          <p:cNvSpPr/>
+          <p:nvPr/>
+        </p:nvSpPr>
+        <p:spPr>
+          <a:xfrm>
+            <a:off x="7162763" y="1286042"/>
+            <a:ext cx="1690679" cy="1128566"/>
+          </a:xfrm>
+          <a:prstGeom prst="rect">
+            <a:avLst/>
+          </a:prstGeom>
+          <a:noFill/>
+          <a:ln>
+            <a:noFill/>
+          </a:ln>
+        </p:spPr>
+        <p:txBody>
+          <a:bodyPr anchorCtr="0" anchor="ctr" bIns="91425" lIns="91425" spcFirstLastPara="1" rIns="91425" wrap="square" tIns="91425">
+            <a:noAutofit/>
+          </a:bodyPr>
+          <a:lstStyle/>
+          <a:p>
+            <a:pPr indent="0" lvl="0" marL="0" rtl="0" algn="l">
+              <a:spcBef>
+                <a:spcPts val="0"/>
+              </a:spcBef>
+              <a:spcAft>
+                <a:spcPts val="0"/>
+              </a:spcAft>
+              <a:buNone/>
+            </a:pPr>
+            <a:r>
+              <a:t/>
+            </a:r>
+            <a:endParaRPr/>
+          </a:p>
+        </p:txBody>
+      </p:sp>
+      <p:pic>
+        <p:nvPicPr>
+          <p:cNvPr descr=" " id="2394" name="Google Shape;2394;p88"/>
+          <p:cNvPicPr preferRelativeResize="0"/>
+          <p:nvPr/>
+        </p:nvPicPr>
+        <p:blipFill rotWithShape="1">
+          <a:blip r:embed="rId3">
+            <a:alphaModFix/>
+          </a:blip>
+          <a:srcRect b="0" l="0" r="0" t="0"/>
+          <a:stretch/>
+        </p:blipFill>
+        <p:spPr>
+          <a:xfrm>
+            <a:off x="1" y="3684300"/>
+            <a:ext cx="7238962" cy="70126"/>
+          </a:xfrm>
+          <a:prstGeom prst="rect">
+            <a:avLst/>
+          </a:prstGeom>
+          <a:noFill/>
+          <a:ln>
+            <a:noFill/>
+          </a:ln>
+        </p:spPr>
+      </p:pic>
+      <p:sp>
+        <p:nvSpPr>
+          <p:cNvPr id="2395" name="title"/>
+          <p:cNvSpPr txBox="1"/>
+          <p:nvPr/>
+        </p:nvSpPr>
+        <p:spPr>
+          <a:xfrm>
+            <a:off x="274320" y="282943"/>
+            <a:ext cx="6792986" cy="617220"/>
+          </a:xfrm>
+          <a:prstGeom prst="rect">
+            <a:avLst/>
+          </a:prstGeom>
+          <a:noFill/>
+        </p:spPr>
+        <p:txBody>
+          <a:bodyPr wrap="square" lIns="76200" rIns="76200" tIns="50800" bIns="50800">
+            <a:spAutoFit/>
+          </a:bodyPr>
+          <a:lstStyle/>
+          <a:p>
+            <a:pPr algn="l">
+              <a:spcAft>
+                <a:spcPts val="300"/>
+              </a:spcAft>
+              <a:defRPr sz="2400">
+                <a:solidFill>
+                  <a:srgbClr val="000000"/>
+                </a:solidFill>
+                <a:latin typeface="Play"/>
+                <a:ea typeface="Play"/>
+                <a:cs typeface="Play"/>
+              </a:defRPr>
+            </a:pPr>
+            <a:r>
+              <a:rPr sz="2400">
+                <a:solidFill>
+                  <a:srgbClr val="000000"/>
+                </a:solidFill>
+                <a:latin typeface="Play"/>
+                <a:ea typeface="Play"/>
+                <a:cs typeface="Play"/>
+              </a:rPr>
+              <a:t>Ожидаемый эффект</a:t>
+            </a:r>
+          </a:p>
+        </p:txBody>
+      </p:sp>
+      <p:graphicFrame>
+        <p:nvGraphicFramePr>
+          <p:cNvPr id="2396" name="Table 2395"/>
+          <p:cNvGraphicFramePr>
+            <a:graphicFrameLocks noGrp="1"/>
+          </p:cNvGraphicFramePr>
+          <p:nvPr/>
+        </p:nvGraphicFramePr>
+        <p:xfrm>
+          <a:off x="274320" y="2009822"/>
+          <a:ext cx="8344814" cy="1674466"/>
+        </p:xfrm>
+        <a:graphic>
+          <a:graphicData uri="http://schemas.openxmlformats.org/drawingml/2006/table">
+            <a:tbl>
+              <a:tblPr firstRow="1" bandRow="1">
+                <a:tableStyleId>{5C22544A-7EE6-4342-B048-85BDC9FD1C3A}</a:tableStyleId>
+              </a:tblPr>
+              <a:tblGrid>
+                <a:gridCol w="2781604"/>
+                <a:gridCol w="2781604"/>
+                <a:gridCol w="2781606"/>
+              </a:tblGrid>
+              <a:tr h="334893">
+                <a:tc>
+                  <a:txBody>
+                    <a:bodyPr/>
+                    <a:lstStyle/>
+                    <a:p>
+                      <a:pPr>
+                        <a:defRPr sz="1300" b="1">
+                          <a:solidFill>
+                            <a:srgbClr val="FFFFFF"/>
+                          </a:solidFill>
+                          <a:latin typeface="Play"/>
+                          <a:ea typeface="Play"/>
+                          <a:cs typeface="Play"/>
+                        </a:defRPr>
+                      </a:pPr>
+                      <a:r>
+                        <a:t>Метрика</a:t>
+                      </a:r>
+                    </a:p>
+                  </a:txBody>
+                  <a:tcPr>
+                    <a:solidFill>
+                      <a:srgbClr val="0077FF"/>
+                    </a:solidFill>
+                  </a:tcPr>
+                </a:tc>
+                <a:tc>
+                  <a:txBody>
+                    <a:bodyPr/>
+                    <a:lstStyle/>
+                    <a:p>
+                      <a:pPr>
+                        <a:defRPr sz="1300" b="1">
+                          <a:solidFill>
+                            <a:srgbClr val="FFFFFF"/>
+                          </a:solidFill>
+                          <a:latin typeface="Play"/>
+                          <a:ea typeface="Play"/>
+                          <a:cs typeface="Play"/>
+                        </a:defRPr>
+                      </a:pPr>
+                      <a:r>
+                        <a:t>Текущее</a:t>
+                      </a:r>
+                    </a:p>
+                  </a:txBody>
+                  <a:tcPr>
+                    <a:solidFill>
+                      <a:srgbClr val="0077FF"/>
+                    </a:solidFill>
+                  </a:tcPr>
+                </a:tc>
+                <a:tc>
+                  <a:txBody>
+                    <a:bodyPr/>
+                    <a:lstStyle/>
+                    <a:p>
+                      <a:pPr>
+                        <a:defRPr sz="1300" b="1">
+                          <a:solidFill>
+                            <a:srgbClr val="FFFFFF"/>
+                          </a:solidFill>
+                          <a:latin typeface="Play"/>
+                          <a:ea typeface="Play"/>
+                          <a:cs typeface="Play"/>
+                        </a:defRPr>
+                      </a:pPr>
+                      <a:r>
+                        <a:t>Пилот</a:t>
+                      </a:r>
+                    </a:p>
+                  </a:txBody>
+                  <a:tcPr>
+                    <a:solidFill>
+                      <a:srgbClr val="0077FF"/>
+                    </a:solidFill>
+                  </a:tcPr>
+                </a:tc>
+              </a:tr>
+              <a:tr h="334893">
+                <a:tc>
+                  <a:txBody>
+                    <a:bodyPr/>
+                    <a:lstStyle/>
+                    <a:p>
+                      <a:pPr>
+                        <a:defRPr sz="1300" b="0">
+                          <a:solidFill>
+                            <a:srgbClr val="000000"/>
+                          </a:solidFill>
+                          <a:latin typeface="Play"/>
+                          <a:ea typeface="Play"/>
+                          <a:cs typeface="Play"/>
+                        </a:defRPr>
+                      </a:pPr>
+                      <a:r>
+                        <a:t>Сборка (мин)</a:t>
+                      </a:r>
+                    </a:p>
+                  </a:txBody>
+                  <a:tcPr>
+                    <a:solidFill>
+                      <a:srgbClr val="FFFFFF"/>
+                    </a:solidFill>
+                  </a:tcPr>
+                </a:tc>
+                <a:tc>
+                  <a:txBody>
+                    <a:bodyPr/>
+                    <a:lstStyle/>
+                    <a:p>
+                      <a:pPr>
+                        <a:defRPr sz="1300" b="0">
+                          <a:solidFill>
+                            <a:srgbClr val="000000"/>
+                          </a:solidFill>
+                          <a:latin typeface="Play"/>
+                          <a:ea typeface="Play"/>
+                          <a:cs typeface="Play"/>
+                        </a:defRPr>
+                      </a:pPr>
+                      <a:r>
+                        <a:t>186</a:t>
+                      </a:r>
+                    </a:p>
+                  </a:txBody>
+                  <a:tcPr>
+                    <a:solidFill>
+                      <a:srgbClr val="FFFFFF"/>
+                    </a:solidFill>
+                  </a:tcPr>
+                </a:tc>
+                <a:tc>
+                  <a:txBody>
+                    <a:bodyPr/>
+                    <a:lstStyle/>
+                    <a:p>
+                      <a:pPr>
+                        <a:defRPr sz="1300" b="0">
+                          <a:solidFill>
+                            <a:srgbClr val="000000"/>
+                          </a:solidFill>
+                          <a:latin typeface="Play"/>
+                          <a:ea typeface="Play"/>
+                          <a:cs typeface="Play"/>
+                        </a:defRPr>
+                      </a:pPr>
+                      <a:r>
+                        <a:t>4</a:t>
+                      </a:r>
+                    </a:p>
+                  </a:txBody>
+                  <a:tcPr>
+                    <a:solidFill>
+                      <a:srgbClr val="FFFFFF"/>
+                    </a:solidFill>
+                  </a:tcPr>
+                </a:tc>
+              </a:tr>
+              <a:tr h="334893">
+                <a:tc>
+                  <a:txBody>
+                    <a:bodyPr/>
+                    <a:lstStyle/>
+                    <a:p>
+                      <a:pPr>
+                        <a:defRPr sz="1300" b="0">
+                          <a:solidFill>
+                            <a:srgbClr val="000000"/>
+                          </a:solidFill>
+                          <a:latin typeface="Play"/>
+                          <a:ea typeface="Play"/>
+                          <a:cs typeface="Play"/>
+                        </a:defRPr>
+                      </a:pPr>
+                      <a:r>
+                        <a:t>Время до первой версии (дней)</a:t>
+                      </a:r>
+                    </a:p>
+                  </a:txBody>
+                  <a:tcPr>
+                    <a:solidFill>
+                      <a:srgbClr val="FFFFFF"/>
+                    </a:solidFill>
+                  </a:tcPr>
+                </a:tc>
+                <a:tc>
+                  <a:txBody>
+                    <a:bodyPr/>
+                    <a:lstStyle/>
+                    <a:p>
+                      <a:pPr>
+                        <a:defRPr sz="1300" b="0">
+                          <a:solidFill>
+                            <a:srgbClr val="000000"/>
+                          </a:solidFill>
+                          <a:latin typeface="Play"/>
+                          <a:ea typeface="Play"/>
+                          <a:cs typeface="Play"/>
+                        </a:defRPr>
+                      </a:pPr>
+                      <a:r>
+                        <a:t>6</a:t>
+                      </a:r>
+                    </a:p>
+                  </a:txBody>
+                  <a:tcPr>
+                    <a:solidFill>
+                      <a:srgbClr val="FFFFFF"/>
+                    </a:solidFill>
+                  </a:tcPr>
+                </a:tc>
+                <a:tc>
+                  <a:txBody>
+                    <a:bodyPr/>
+                    <a:lstStyle/>
+                    <a:p>
+                      <a:pPr>
+                        <a:defRPr sz="1300" b="0">
+                          <a:solidFill>
+                            <a:srgbClr val="000000"/>
+                          </a:solidFill>
+                          <a:latin typeface="Play"/>
+                          <a:ea typeface="Play"/>
+                          <a:cs typeface="Play"/>
+                        </a:defRPr>
+                      </a:pPr>
+                      <a:r>
+                        <a:t>1</a:t>
+                      </a:r>
+                    </a:p>
+                  </a:txBody>
+                  <a:tcPr>
+                    <a:solidFill>
+                      <a:srgbClr val="FFFFFF"/>
+                    </a:solidFill>
+                  </a:tcPr>
+                </a:tc>
+              </a:tr>
+              <a:tr h="334893">
+                <a:tc>
+                  <a:txBody>
+                    <a:bodyPr/>
+                    <a:lstStyle/>
+                    <a:p>
+                      <a:pPr>
+                        <a:defRPr sz="1300" b="0">
+                          <a:solidFill>
+                            <a:srgbClr val="000000"/>
+                          </a:solidFill>
+                          <a:latin typeface="Play"/>
+                          <a:ea typeface="Play"/>
+                          <a:cs typeface="Play"/>
+                        </a:defRPr>
+                      </a:pPr>
+                      <a:r>
+                        <a:t>Нарушения (колод)</a:t>
+                      </a:r>
+                    </a:p>
+                  </a:txBody>
+                  <a:tcPr>
+                    <a:solidFill>
+                      <a:srgbClr val="FFFFFF"/>
+                    </a:solidFill>
+                  </a:tcPr>
+                </a:tc>
+                <a:tc>
+                  <a:txBody>
+                    <a:bodyPr/>
+                    <a:lstStyle/>
+                    <a:p>
+                      <a:pPr>
+                        <a:defRPr sz="1300" b="0">
+                          <a:solidFill>
+                            <a:srgbClr val="000000"/>
+                          </a:solidFill>
+                          <a:latin typeface="Play"/>
+                          <a:ea typeface="Play"/>
+                          <a:cs typeface="Play"/>
+                        </a:defRPr>
+                      </a:pPr>
+                      <a:r>
+                        <a:t>19</a:t>
+                      </a:r>
+                    </a:p>
+                  </a:txBody>
+                  <a:tcPr>
+                    <a:solidFill>
+                      <a:srgbClr val="FFFFFF"/>
+                    </a:solidFill>
+                  </a:tcPr>
+                </a:tc>
+                <a:tc>
+                  <a:txBody>
+                    <a:bodyPr/>
+                    <a:lstStyle/>
+                    <a:p>
+                      <a:pPr>
+                        <a:defRPr sz="1300" b="0">
+                          <a:solidFill>
+                            <a:srgbClr val="000000"/>
+                          </a:solidFill>
+                          <a:latin typeface="Play"/>
+                          <a:ea typeface="Play"/>
+                          <a:cs typeface="Play"/>
+                        </a:defRPr>
+                      </a:pPr>
+                      <a:r>
+                        <a:t>2</a:t>
+                      </a:r>
+                    </a:p>
+                  </a:txBody>
+                  <a:tcPr>
+                    <a:solidFill>
+                      <a:srgbClr val="FFFFFF"/>
+                    </a:solidFill>
+                  </a:tcPr>
+                </a:tc>
+              </a:tr>
+              <a:tr h="334894">
+                <a:tc>
+                  <a:txBody>
+                    <a:bodyPr/>
+                    <a:lstStyle/>
+                    <a:p>
+                      <a:pPr>
+                        <a:defRPr sz="1300" b="0">
+                          <a:solidFill>
+                            <a:srgbClr val="000000"/>
+                          </a:solidFill>
+                          <a:latin typeface="Play"/>
+                          <a:ea typeface="Play"/>
+                          <a:cs typeface="Play"/>
+                        </a:defRPr>
+                      </a:pPr>
+                      <a:r>
+                        <a:t>Запросы (запросов)</a:t>
+                      </a:r>
+                    </a:p>
+                  </a:txBody>
+                  <a:tcPr>
+                    <a:solidFill>
+                      <a:srgbClr val="FFFFFF"/>
+                    </a:solidFill>
+                  </a:tcPr>
+                </a:tc>
+                <a:tc>
+                  <a:txBody>
+                    <a:bodyPr/>
+                    <a:lstStyle/>
+                    <a:p>
+                      <a:pPr>
+                        <a:defRPr sz="1300" b="0">
+                          <a:solidFill>
+                            <a:srgbClr val="000000"/>
+                          </a:solidFill>
+                          <a:latin typeface="Play"/>
+                          <a:ea typeface="Play"/>
+                          <a:cs typeface="Play"/>
+                        </a:defRPr>
+                      </a:pPr>
+                      <a:r>
+                        <a:t>11</a:t>
+                      </a:r>
+                    </a:p>
+                  </a:txBody>
+                  <a:tcPr>
+                    <a:solidFill>
+                      <a:srgbClr val="FFFFFF"/>
+                    </a:solidFill>
+                  </a:tcPr>
+                </a:tc>
+                <a:tc>
+                  <a:txBody>
+                    <a:bodyPr/>
+                    <a:lstStyle/>
+                    <a:p>
+                      <a:pPr>
+                        <a:defRPr sz="1300" b="0">
+                          <a:solidFill>
+                            <a:srgbClr val="000000"/>
+                          </a:solidFill>
+                          <a:latin typeface="Play"/>
+                          <a:ea typeface="Play"/>
+                          <a:cs typeface="Play"/>
+                        </a:defRPr>
+                      </a:pPr>
+                      <a:r>
+                        <a:t>38</a:t>
+                      </a:r>
+                    </a:p>
+                  </a:txBody>
+                  <a:tcPr>
+                    <a:solidFill>
+                      <a:srgbClr val="FFFFFF"/>
+                    </a:solidFill>
+                  </a:tcPr>
+                </a:tc>
+              </a:tr>
+            </a:tbl>
+          </a:graphicData>
+        </a:graphic>
+      </p:graphicFrame>
+    </p:spTree>
+  </p:cSld>
+  <p:clrMapOvr>
+    <a:masterClrMapping/>
+  </p:clrMapOvr>
+</p:sld>
+</file>
+
+<file path=ppt/slides/slide59.xml><?xml version="1.0" encoding="utf-8"?>
+<p:sld xmlns:a="http://schemas.openxmlformats.org/drawingml/2006/main" xmlns:p="http://schemas.openxmlformats.org/presentationml/2006/main" xmlns:r="http://schemas.openxmlformats.org/officeDocument/2006/relationships">
+  <p:cSld>
+    <p:spTree>
+      <p:nvGrpSpPr>
+        <p:cNvPr id="1" name=""/>
+        <p:cNvGrpSpPr/>
+        <p:nvPr/>
+      </p:nvGrpSpPr>
+      <p:grpSpPr/>
+      <p:pic>
+        <p:nvPicPr>
+          <p:cNvPr descr=" " id="2428" name="Google Shape;2428;p89"/>
+          <p:cNvPicPr preferRelativeResize="0"/>
+          <p:nvPr/>
+        </p:nvPicPr>
+        <p:blipFill rotWithShape="1">
+          <a:blip r:embed="rId2">
+            <a:alphaModFix/>
+          </a:blip>
+          <a:srcRect b="0" l="0" r="0" t="0"/>
+          <a:stretch/>
+        </p:blipFill>
+        <p:spPr>
+          <a:xfrm>
+            <a:off x="0" y="2732082"/>
+            <a:ext cx="8515008" cy="92615"/>
+          </a:xfrm>
+          <a:prstGeom prst="rect">
+            <a:avLst/>
+          </a:prstGeom>
+          <a:noFill/>
+          <a:ln>
+            <a:noFill/>
+          </a:ln>
+        </p:spPr>
+      </p:pic>
+      <p:sp>
+        <p:nvSpPr>
+          <p:cNvPr id="2429" name="Google Shape;2429;p89"/>
+          <p:cNvSpPr/>
+          <p:nvPr/>
+        </p:nvSpPr>
+        <p:spPr>
+          <a:xfrm>
+            <a:off x="553415" y="1828897"/>
+            <a:ext cx="2232516" cy="1490254"/>
+          </a:xfrm>
+          <a:prstGeom prst="rect">
+            <a:avLst/>
+          </a:prstGeom>
+          <a:noFill/>
+          <a:ln>
+            <a:noFill/>
+          </a:ln>
+        </p:spPr>
+        <p:txBody>
+          <a:bodyPr anchorCtr="0" anchor="ctr" bIns="91425" lIns="91425" spcFirstLastPara="1" rIns="91425" wrap="square" tIns="91425">
+            <a:noAutofit/>
+          </a:bodyPr>
+          <a:lstStyle/>
+          <a:p>
+            <a:pPr indent="0" lvl="0" marL="0" rtl="0" algn="l">
+              <a:spcBef>
+                <a:spcPts val="0"/>
+              </a:spcBef>
+              <a:spcAft>
+                <a:spcPts val="0"/>
+              </a:spcAft>
+              <a:buNone/>
+            </a:pPr>
+            <a:r>
+              <a:t/>
+            </a:r>
+            <a:endParaRPr/>
+          </a:p>
+        </p:txBody>
+      </p:sp>
+      <p:sp>
+        <p:nvSpPr>
+          <p:cNvPr id="2431" name="Google Shape;2431;p89"/>
+          <p:cNvSpPr/>
+          <p:nvPr/>
+        </p:nvSpPr>
+        <p:spPr>
+          <a:xfrm>
+            <a:off x="3565736" y="1828897"/>
+            <a:ext cx="2232516" cy="1490254"/>
+          </a:xfrm>
+          <a:prstGeom prst="rect">
+            <a:avLst/>
+          </a:prstGeom>
+          <a:noFill/>
+          <a:ln>
+            <a:noFill/>
+          </a:ln>
+        </p:spPr>
+        <p:txBody>
+          <a:bodyPr anchorCtr="0" anchor="ctr" bIns="91425" lIns="91425" spcFirstLastPara="1" rIns="91425" wrap="square" tIns="91425">
+            <a:noAutofit/>
+          </a:bodyPr>
+          <a:lstStyle/>
+          <a:p>
+            <a:pPr indent="0" lvl="0" marL="0" rtl="0" algn="l">
+              <a:spcBef>
+                <a:spcPts val="0"/>
+              </a:spcBef>
+              <a:spcAft>
+                <a:spcPts val="0"/>
+              </a:spcAft>
+              <a:buNone/>
+            </a:pPr>
+            <a:r>
+              <a:t/>
+            </a:r>
+            <a:endParaRPr/>
+          </a:p>
+        </p:txBody>
+      </p:sp>
+      <p:sp>
+        <p:nvSpPr>
+          <p:cNvPr id="2433" name="Google Shape;2433;p89"/>
+          <p:cNvSpPr/>
+          <p:nvPr/>
+        </p:nvSpPr>
+        <p:spPr>
+          <a:xfrm>
+            <a:off x="6578067" y="1828897"/>
+            <a:ext cx="2232516" cy="1490254"/>
+          </a:xfrm>
+          <a:prstGeom prst="rect">
+            <a:avLst/>
+          </a:prstGeom>
+          <a:noFill/>
+          <a:ln>
+            <a:noFill/>
+          </a:ln>
+        </p:spPr>
+        <p:txBody>
+          <a:bodyPr anchorCtr="0" anchor="ctr" bIns="91425" lIns="91425" spcFirstLastPara="1" rIns="91425" wrap="square" tIns="91425">
+            <a:noAutofit/>
+          </a:bodyPr>
+          <a:lstStyle/>
+          <a:p>
+            <a:pPr indent="0" lvl="0" marL="0" rtl="0" algn="l">
+              <a:spcBef>
+                <a:spcPts val="0"/>
+              </a:spcBef>
+              <a:spcAft>
+                <a:spcPts val="0"/>
+              </a:spcAft>
+              <a:buNone/>
+            </a:pPr>
+            <a:r>
+              <a:t/>
+            </a:r>
+            <a:endParaRPr/>
+          </a:p>
+        </p:txBody>
+      </p:sp>
+      <p:sp>
+        <p:nvSpPr>
+          <p:cNvPr id="2434" name="title"/>
+          <p:cNvSpPr txBox="1"/>
+          <p:nvPr/>
+        </p:nvSpPr>
+        <p:spPr>
+          <a:xfrm>
+            <a:off x="274320" y="282943"/>
+            <a:ext cx="6792986" cy="617220"/>
+          </a:xfrm>
+          <a:prstGeom prst="rect">
+            <a:avLst/>
+          </a:prstGeom>
+          <a:noFill/>
+        </p:spPr>
+        <p:txBody>
+          <a:bodyPr wrap="square" lIns="76200" rIns="76200" tIns="50800" bIns="50800">
+            <a:spAutoFit/>
+          </a:bodyPr>
+          <a:lstStyle/>
+          <a:p>
+            <a:pPr algn="l">
+              <a:spcAft>
+                <a:spcPts val="300"/>
+              </a:spcAft>
+              <a:defRPr sz="2400">
+                <a:solidFill>
+                  <a:srgbClr val="000000"/>
+                </a:solidFill>
+                <a:latin typeface="Play"/>
+                <a:ea typeface="Play"/>
+                <a:cs typeface="Play"/>
+              </a:defRPr>
+            </a:pPr>
+            <a:r>
+              <a:rPr sz="2400">
+                <a:solidFill>
+                  <a:srgbClr val="000000"/>
+                </a:solidFill>
+                <a:latin typeface="Play"/>
+                <a:ea typeface="Play"/>
+                <a:cs typeface="Play"/>
+              </a:rPr>
+              <a:t>Ресурсы и сроки</a:t>
+            </a:r>
+          </a:p>
+        </p:txBody>
+      </p:sp>
+      <p:sp>
+        <p:nvSpPr>
+          <p:cNvPr id="2435" name="body"/>
+          <p:cNvSpPr txBox="1"/>
+          <p:nvPr/>
+        </p:nvSpPr>
+        <p:spPr>
+          <a:xfrm>
+            <a:off x="274320" y="1414513"/>
+            <a:ext cx="8344814" cy="527023"/>
+          </a:xfrm>
+          <a:prstGeom prst="rect">
+            <a:avLst/>
+          </a:prstGeom>
+          <a:noFill/>
+        </p:spPr>
+        <p:txBody>
+          <a:bodyPr wrap="square" lIns="76200" rIns="76200" tIns="50800" bIns="50800">
+            <a:spAutoFit/>
+          </a:bodyPr>
+          <a:lstStyle/>
+          <a:p>
+            <a:pPr algn="l">
+              <a:spcAft>
+                <a:spcPts val="300"/>
+              </a:spcAft>
+              <a:defRPr sz="1200">
+                <a:solidFill>
+                  <a:srgbClr val="000000"/>
+                </a:solidFill>
+                <a:latin typeface="Play"/>
+                <a:ea typeface="Play"/>
+                <a:cs typeface="Play"/>
+              </a:defRPr>
+            </a:pPr>
+            <a:r>
+              <a:rPr sz="1200">
+                <a:solidFill>
+                  <a:srgbClr val="000000"/>
+                </a:solidFill>
+                <a:latin typeface="Play"/>
+                <a:ea typeface="Play"/>
+                <a:cs typeface="Play"/>
+              </a:rPr>
+              <a:t>• 2 vCPU / 2 GB RAM</a:t>
+            </a:r>
+          </a:p>
+          <a:p>
+            <a:pPr algn="l">
+              <a:spcAft>
+                <a:spcPts val="300"/>
+              </a:spcAft>
+              <a:defRPr sz="1200">
+                <a:solidFill>
+                  <a:srgbClr val="000000"/>
+                </a:solidFill>
+                <a:latin typeface="Play"/>
+                <a:ea typeface="Play"/>
+                <a:cs typeface="Play"/>
+              </a:defRPr>
+            </a:pPr>
+            <a:r>
+              <a:rPr sz="1200">
+                <a:solidFill>
+                  <a:srgbClr val="000000"/>
+                </a:solidFill>
+                <a:latin typeface="Play"/>
+                <a:ea typeface="Play"/>
+                <a:cs typeface="Play"/>
+              </a:rPr>
+              <a:t>• 1 400 рублей за 6 недель</a:t>
+            </a:r>
+          </a:p>
+          <a:p>
+            <a:pPr algn="l">
+              <a:spcAft>
+                <a:spcPts val="300"/>
+              </a:spcAft>
+              <a:defRPr sz="1200">
+                <a:solidFill>
+                  <a:srgbClr val="000000"/>
+                </a:solidFill>
+                <a:latin typeface="Play"/>
+                <a:ea typeface="Play"/>
+                <a:cs typeface="Play"/>
+              </a:defRPr>
+            </a:pPr>
+            <a:r>
+              <a:rPr sz="1200">
+                <a:solidFill>
+                  <a:srgbClr val="000000"/>
+                </a:solidFill>
+                <a:latin typeface="Play"/>
+                <a:ea typeface="Play"/>
+                <a:cs typeface="Play"/>
+              </a:rPr>
+              <a:t>• Модель gpt-oss-20b</a:t>
+            </a:r>
+          </a:p>
+          <a:p>
+            <a:pPr algn="l">
+              <a:spcAft>
+                <a:spcPts val="300"/>
+              </a:spcAft>
+              <a:defRPr sz="1200">
+                <a:solidFill>
+                  <a:srgbClr val="000000"/>
+                </a:solidFill>
+                <a:latin typeface="Play"/>
+                <a:ea typeface="Play"/>
+                <a:cs typeface="Play"/>
+              </a:defRPr>
+            </a:pPr>
+            <a:r>
+              <a:rPr sz="1200">
+                <a:solidFill>
+                  <a:srgbClr val="000000"/>
+                </a:solidFill>
+                <a:latin typeface="Play"/>
+                <a:ea typeface="Play"/>
+                <a:cs typeface="Play"/>
+              </a:rPr>
+              <a:t>• Подключение 4 команд, домен и HTTPS</a:t>
+            </a:r>
+          </a:p>
+          <a:p>
+            <a:pPr algn="l">
+              <a:spcAft>
+                <a:spcPts val="300"/>
+              </a:spcAft>
+              <a:defRPr sz="1200">
+                <a:solidFill>
+                  <a:srgbClr val="000000"/>
+                </a:solidFill>
+                <a:latin typeface="Play"/>
+                <a:ea typeface="Play"/>
+                <a:cs typeface="Play"/>
+              </a:defRPr>
+            </a:pPr>
+            <a:r>
+              <a:rPr sz="1200">
+                <a:solidFill>
+                  <a:srgbClr val="000000"/>
+                </a:solidFill>
+                <a:latin typeface="Play"/>
+                <a:ea typeface="Play"/>
+                <a:cs typeface="Play"/>
+              </a:rPr>
+              <a:t>• Доступ всей компании, интеграция</a:t>
+            </a:r>
+          </a:p>
+          <a:p>
+            <a:pPr algn="l">
+              <a:spcAft>
+                <a:spcPts val="300"/>
+              </a:spcAft>
+              <a:defRPr sz="1200">
+                <a:solidFill>
+                  <a:srgbClr val="000000"/>
+                </a:solidFill>
+                <a:latin typeface="Play"/>
+                <a:ea typeface="Play"/>
+                <a:cs typeface="Play"/>
+              </a:defRPr>
+            </a:pPr>
+            <a:r>
+              <a:rPr sz="1200">
+                <a:solidFill>
+                  <a:srgbClr val="000000"/>
+                </a:solidFill>
+                <a:latin typeface="Play"/>
+                <a:ea typeface="Play"/>
+                <a:cs typeface="Play"/>
+              </a:rPr>
+              <a:t>• Генерация иллюстраций в Q1 2027</a:t>
+            </a:r>
+          </a:p>
+        </p:txBody>
+      </p:sp>
+      <p:sp>
+        <p:nvSpPr>
+          <p:cNvPr id="2436" name="Rectangle 2435"/>
+          <p:cNvSpPr/>
+          <p:nvPr/>
+        </p:nvSpPr>
+        <p:spPr>
+          <a:xfrm>
+            <a:off x="274320" y="2374620"/>
+            <a:ext cx="8344814" cy="19858"/>
+          </a:xfrm>
+          <a:prstGeom prst="rect">
+            <a:avLst/>
+          </a:prstGeom>
+          <a:solidFill>
+            <a:srgbClr val="0077FF"/>
+          </a:solidFill>
+          <a:ln>
+            <a:noFill/>
+          </a:ln>
+        </p:spPr>
+        <p:style>
+          <a:lnRef idx="1">
+            <a:schemeClr val="accent1"/>
+          </a:lnRef>
+          <a:fillRef idx="3">
+            <a:schemeClr val="accent1"/>
+          </a:fillRef>
+          <a:effectRef idx="2">
+            <a:schemeClr val="accent1"/>
+          </a:effectRef>
+          <a:fontRef idx="minor">
+            <a:schemeClr val="lt1"/>
+          </a:fontRef>
+        </p:style>
+        <p:txBody>
+          <a:bodyPr rtlCol="0" anchor="ctr"/>
+          <a:lstStyle/>
+          <a:p>
+            <a:pPr algn="ctr"/>
+          </a:p>
+        </p:txBody>
+      </p:sp>
+      <p:sp>
+        <p:nvSpPr>
+          <p:cNvPr id="2437" name="Oval 2436"/>
+          <p:cNvSpPr/>
+          <p:nvPr/>
+        </p:nvSpPr>
+        <p:spPr>
+          <a:xfrm>
+            <a:off x="1244607" y="2311735"/>
+            <a:ext cx="145628" cy="145628"/>
+          </a:xfrm>
+          <a:prstGeom prst="ellipse">
+            <a:avLst/>
+          </a:prstGeom>
+          <a:solidFill>
+            <a:srgbClr val="0077FF"/>
+          </a:solidFill>
+          <a:ln>
+            <a:noFill/>
+          </a:ln>
+        </p:spPr>
+        <p:style>
+          <a:lnRef idx="1">
+            <a:schemeClr val="accent1"/>
+          </a:lnRef>
+          <a:fillRef idx="3">
+            <a:schemeClr val="accent1"/>
+          </a:fillRef>
+          <a:effectRef idx="2">
+            <a:schemeClr val="accent1"/>
+          </a:effectRef>
+          <a:fontRef idx="minor">
+            <a:schemeClr val="lt1"/>
+          </a:fontRef>
+        </p:style>
+        <p:txBody>
+          <a:bodyPr rtlCol="0" anchor="ctr"/>
+          <a:lstStyle/>
+          <a:p>
+            <a:pPr algn="ctr"/>
+          </a:p>
+        </p:txBody>
+      </p:sp>
+      <p:sp>
+        <p:nvSpPr>
+          <p:cNvPr id="2438" name="TextBox 2437"/>
+          <p:cNvSpPr txBox="1"/>
+          <p:nvPr/>
+        </p:nvSpPr>
+        <p:spPr>
+          <a:xfrm>
+            <a:off x="274320" y="2070125"/>
+            <a:ext cx="2086203" cy="251539"/>
+          </a:xfrm>
+          <a:prstGeom prst="rect">
+            <a:avLst/>
+          </a:prstGeom>
+          <a:noFill/>
+        </p:spPr>
+        <p:txBody>
+          <a:bodyPr wrap="square">
+            <a:spAutoFit/>
+          </a:bodyPr>
+          <a:lstStyle/>
+          <a:p>
+            <a:pPr algn="ctr">
+              <a:defRPr sz="1200" b="0">
+                <a:solidFill>
+                  <a:srgbClr val="000000"/>
+                </a:solidFill>
+                <a:latin typeface="Play"/>
+                <a:ea typeface="Play"/>
+                <a:cs typeface="Play"/>
+              </a:defRPr>
+            </a:pPr>
+            <a:r>
+              <a:rPr sz="1200" b="0">
+                <a:solidFill>
+                  <a:srgbClr val="000000"/>
+                </a:solidFill>
+                <a:latin typeface="Play"/>
+                <a:ea typeface="Play"/>
+                <a:cs typeface="Play"/>
+              </a:rPr>
+              <a:t>Подключение 4 команд</a:t>
+            </a:r>
+          </a:p>
+        </p:txBody>
+      </p:sp>
+      <p:sp>
+        <p:nvSpPr>
+          <p:cNvPr id="2439" name="Oval 2438"/>
+          <p:cNvSpPr/>
+          <p:nvPr/>
+        </p:nvSpPr>
+        <p:spPr>
+          <a:xfrm>
+            <a:off x="3330811" y="2311735"/>
+            <a:ext cx="145628" cy="145628"/>
+          </a:xfrm>
+          <a:prstGeom prst="ellipse">
+            <a:avLst/>
+          </a:prstGeom>
+          <a:solidFill>
+            <a:srgbClr val="0077FF"/>
+          </a:solidFill>
+          <a:ln>
+            <a:noFill/>
+          </a:ln>
+        </p:spPr>
+        <p:style>
+          <a:lnRef idx="1">
+            <a:schemeClr val="accent1"/>
+          </a:lnRef>
+          <a:fillRef idx="3">
+            <a:schemeClr val="accent1"/>
+          </a:fillRef>
+          <a:effectRef idx="2">
+            <a:schemeClr val="accent1"/>
+          </a:effectRef>
+          <a:fontRef idx="minor">
+            <a:schemeClr val="lt1"/>
+          </a:fontRef>
+        </p:style>
+        <p:txBody>
+          <a:bodyPr rtlCol="0" anchor="ctr"/>
+          <a:lstStyle/>
+          <a:p>
+            <a:pPr algn="ctr"/>
+          </a:p>
+        </p:txBody>
+      </p:sp>
+      <p:sp>
+        <p:nvSpPr>
+          <p:cNvPr id="2440" name="TextBox 2439"/>
+          <p:cNvSpPr txBox="1"/>
+          <p:nvPr/>
+        </p:nvSpPr>
+        <p:spPr>
+          <a:xfrm>
+            <a:off x="2360523" y="2520248"/>
+            <a:ext cx="2086203" cy="251539"/>
+          </a:xfrm>
+          <a:prstGeom prst="rect">
+            <a:avLst/>
+          </a:prstGeom>
+          <a:noFill/>
+        </p:spPr>
+        <p:txBody>
+          <a:bodyPr wrap="square">
+            <a:spAutoFit/>
+          </a:bodyPr>
+          <a:lstStyle/>
+          <a:p>
+            <a:pPr algn="ctr">
+              <a:defRPr sz="1200" b="0">
+                <a:solidFill>
+                  <a:srgbClr val="000000"/>
+                </a:solidFill>
+                <a:latin typeface="Play"/>
+                <a:ea typeface="Play"/>
+                <a:cs typeface="Play"/>
+              </a:defRPr>
+            </a:pPr>
+            <a:r>
+              <a:rPr sz="1200" b="0">
+                <a:solidFill>
+                  <a:srgbClr val="000000"/>
+                </a:solidFill>
+                <a:latin typeface="Play"/>
+                <a:ea typeface="Play"/>
+                <a:cs typeface="Play"/>
+              </a:rPr>
+              <a:t>Домен и HTTPS</a:t>
+            </a:r>
+          </a:p>
+        </p:txBody>
+      </p:sp>
+      <p:sp>
+        <p:nvSpPr>
+          <p:cNvPr id="2441" name="Oval 2440"/>
+          <p:cNvSpPr/>
+          <p:nvPr/>
+        </p:nvSpPr>
+        <p:spPr>
+          <a:xfrm>
+            <a:off x="5417014" y="2311735"/>
+            <a:ext cx="145628" cy="145628"/>
+          </a:xfrm>
+          <a:prstGeom prst="ellipse">
+            <a:avLst/>
+          </a:prstGeom>
+          <a:solidFill>
+            <a:srgbClr val="0077FF"/>
+          </a:solidFill>
+          <a:ln>
+            <a:noFill/>
+          </a:ln>
+        </p:spPr>
+        <p:style>
+          <a:lnRef idx="1">
+            <a:schemeClr val="accent1"/>
+          </a:lnRef>
+          <a:fillRef idx="3">
+            <a:schemeClr val="accent1"/>
+          </a:fillRef>
+          <a:effectRef idx="2">
+            <a:schemeClr val="accent1"/>
+          </a:effectRef>
+          <a:fontRef idx="minor">
+            <a:schemeClr val="lt1"/>
+          </a:fontRef>
+        </p:style>
+        <p:txBody>
+          <a:bodyPr rtlCol="0" anchor="ctr"/>
+          <a:lstStyle/>
+          <a:p>
+            <a:pPr algn="ctr"/>
+          </a:p>
+        </p:txBody>
+      </p:sp>
+      <p:sp>
+        <p:nvSpPr>
+          <p:cNvPr id="2442" name="TextBox 2441"/>
+          <p:cNvSpPr txBox="1"/>
+          <p:nvPr/>
+        </p:nvSpPr>
+        <p:spPr>
+          <a:xfrm>
+            <a:off x="4446727" y="2070125"/>
+            <a:ext cx="2086203" cy="251539"/>
+          </a:xfrm>
+          <a:prstGeom prst="rect">
+            <a:avLst/>
+          </a:prstGeom>
+          <a:noFill/>
+        </p:spPr>
+        <p:txBody>
+          <a:bodyPr wrap="square">
+            <a:spAutoFit/>
+          </a:bodyPr>
+          <a:lstStyle/>
+          <a:p>
+            <a:pPr algn="ctr">
+              <a:defRPr sz="1200" b="0">
+                <a:solidFill>
+                  <a:srgbClr val="000000"/>
+                </a:solidFill>
+                <a:latin typeface="Play"/>
+                <a:ea typeface="Play"/>
+                <a:cs typeface="Play"/>
+              </a:defRPr>
+            </a:pPr>
+            <a:r>
+              <a:rPr sz="1200" b="0">
+                <a:solidFill>
+                  <a:srgbClr val="000000"/>
+                </a:solidFill>
+                <a:latin typeface="Play"/>
+                <a:ea typeface="Play"/>
+                <a:cs typeface="Play"/>
+              </a:rPr>
+              <a:t>Доступ всей компании</a:t>
+            </a:r>
+          </a:p>
+        </p:txBody>
+      </p:sp>
+      <p:sp>
+        <p:nvSpPr>
+          <p:cNvPr id="2443" name="Oval 2442"/>
+          <p:cNvSpPr/>
+          <p:nvPr/>
+        </p:nvSpPr>
+        <p:spPr>
+          <a:xfrm>
+            <a:off x="7503218" y="2311735"/>
+            <a:ext cx="145628" cy="145628"/>
+          </a:xfrm>
+          <a:prstGeom prst="ellipse">
+            <a:avLst/>
+          </a:prstGeom>
+          <a:solidFill>
+            <a:srgbClr val="0077FF"/>
+          </a:solidFill>
+          <a:ln>
+            <a:noFill/>
+          </a:ln>
+        </p:spPr>
+        <p:style>
+          <a:lnRef idx="1">
+            <a:schemeClr val="accent1"/>
+          </a:lnRef>
+          <a:fillRef idx="3">
+            <a:schemeClr val="accent1"/>
+          </a:fillRef>
+          <a:effectRef idx="2">
+            <a:schemeClr val="accent1"/>
+          </a:effectRef>
+          <a:fontRef idx="minor">
+            <a:schemeClr val="lt1"/>
+          </a:fontRef>
+        </p:style>
+        <p:txBody>
+          <a:bodyPr rtlCol="0" anchor="ctr"/>
+          <a:lstStyle/>
+          <a:p>
+            <a:pPr algn="ctr"/>
+          </a:p>
+        </p:txBody>
+      </p:sp>
+      <p:sp>
+        <p:nvSpPr>
+          <p:cNvPr id="2444" name="TextBox 2443"/>
+          <p:cNvSpPr txBox="1"/>
+          <p:nvPr/>
+        </p:nvSpPr>
+        <p:spPr>
+          <a:xfrm>
+            <a:off x="6532930" y="2520248"/>
+            <a:ext cx="2086203" cy="251539"/>
+          </a:xfrm>
+          <a:prstGeom prst="rect">
+            <a:avLst/>
+          </a:prstGeom>
+          <a:noFill/>
+        </p:spPr>
+        <p:txBody>
+          <a:bodyPr wrap="square">
+            <a:spAutoFit/>
+          </a:bodyPr>
+          <a:lstStyle/>
+          <a:p>
+            <a:pPr algn="ctr">
+              <a:defRPr sz="1200" b="0">
+                <a:solidFill>
+                  <a:srgbClr val="000000"/>
+                </a:solidFill>
+                <a:latin typeface="Play"/>
+                <a:ea typeface="Play"/>
+                <a:cs typeface="Play"/>
+              </a:defRPr>
+            </a:pPr>
+            <a:r>
+              <a:rPr sz="1200" b="0">
+                <a:solidFill>
+                  <a:srgbClr val="000000"/>
+                </a:solidFill>
+                <a:latin typeface="Play"/>
+                <a:ea typeface="Play"/>
+                <a:cs typeface="Play"/>
+              </a:rPr>
+              <a:t>Генерация иллюстраций</a:t>
+            </a:r>
+          </a:p>
+        </p:txBody>
+      </p:sp>
+    </p:spTree>
+  </p:cSld>
+  <p:clrMapOvr>
+    <a:masterClrMapping/>
+  </p:clrMapOvr>
+</p:sld>
+</file>
+
+<file path=ppt/slides/slide60.xml><?xml version="1.0" encoding="utf-8"?>
+<p:sld xmlns:a="http://schemas.openxmlformats.org/drawingml/2006/main" xmlns:p="http://schemas.openxmlformats.org/presentationml/2006/main" xmlns:r="http://schemas.openxmlformats.org/officeDocument/2006/relationships">
+  <p:cSld>
+    <p:spTree>
+      <p:nvGrpSpPr>
+        <p:cNvPr id="1" name=""/>
+        <p:cNvGrpSpPr/>
+        <p:nvPr/>
+      </p:nvGrpSpPr>
+      <p:grpSpPr/>
+      <p:sp>
+        <p:nvSpPr>
+          <p:cNvPr id="532" name="Google Shape;532;p53"/>
+          <p:cNvSpPr/>
+          <p:nvPr/>
+        </p:nvSpPr>
+        <p:spPr>
+          <a:xfrm>
+            <a:off x="303214" y="1022533"/>
+            <a:ext cx="8451939" cy="1433588"/>
           </a:xfrm>
           <a:prstGeom prst="rect">
             <a:avLst/>
@@ -6318,7 +8055,7 @@
                 <a:ea typeface="Play"/>
                 <a:cs typeface="Play"/>
               </a:rPr>
-              <a:t>Контекст и возможность</a:t>
+              <a:t>План пилота</a:t>
             </a:r>
           </a:p>
         </p:txBody>
@@ -6331,8 +8068,8 @@
         </p:nvSpPr>
         <p:spPr>
           <a:xfrm>
-            <a:off x="274320" y="1891002"/>
-            <a:ext cx="8344814" cy="1422400"/>
+            <a:off x="274320" y="1868988"/>
+            <a:ext cx="8344814" cy="1488440"/>
           </a:xfrm>
           <a:prstGeom prst="rect">
             <a:avLst/>
@@ -6349,7 +8086,7 @@
               <a:spcAft>
                 <a:spcPts val="300"/>
               </a:spcAft>
-              <a:defRPr sz="1600">
+              <a:defRPr sz="1400">
                 <a:solidFill>
                   <a:srgbClr val="000000"/>
                 </a:solidFill>
@@ -6359,7 +8096,7 @@
               </a:defRPr>
             </a:pPr>
             <a:r>
-              <a:rPr sz="1600">
+              <a:rPr sz="1400">
                 <a:solidFill>
                   <a:srgbClr val="000000"/>
                 </a:solidFill>
@@ -6367,7 +8104,7 @@
                 <a:ea typeface="Play"/>
                 <a:cs typeface="Play"/>
               </a:rPr>
-              <a:t>• 42 колоды в первом квартале 2026 года</a:t>
+              <a:t>• 6 недель</a:t>
             </a:r>
           </a:p>
           <a:p>
@@ -6375,7 +8112,7 @@
               <a:spcAft>
                 <a:spcPts val="300"/>
               </a:spcAft>
-              <a:defRPr sz="1600">
+              <a:defRPr sz="1400">
                 <a:solidFill>
                   <a:srgbClr val="000000"/>
                 </a:solidFill>
@@ -6385,7 +8122,7 @@
               </a:defRPr>
             </a:pPr>
             <a:r>
-              <a:rPr sz="1600">
+              <a:rPr sz="1400">
                 <a:solidFill>
                   <a:srgbClr val="000000"/>
                 </a:solidFill>
@@ -6393,7 +8130,7 @@
                 <a:ea typeface="Play"/>
                 <a:cs typeface="Play"/>
               </a:rPr>
-              <a:t>• Средняя сборка 12 слайдов занимает 186 минут</a:t>
+              <a:t>• 2 команды</a:t>
             </a:r>
           </a:p>
           <a:p>
@@ -6401,7 +8138,7 @@
               <a:spcAft>
                 <a:spcPts val="300"/>
               </a:spcAft>
-              <a:defRPr sz="1600">
+              <a:defRPr sz="1400">
                 <a:solidFill>
                   <a:srgbClr val="000000"/>
                 </a:solidFill>
@@ -6411,7 +8148,7 @@
               </a:defRPr>
             </a:pPr>
             <a:r>
-              <a:rPr sz="1600">
+              <a:rPr sz="1400">
                 <a:solidFill>
                   <a:srgbClr val="000000"/>
                 </a:solidFill>
@@ -6419,7 +8156,7 @@
                 <a:ea typeface="Play"/>
                 <a:cs typeface="Play"/>
               </a:rPr>
-              <a:t>• 74 минуты на правки после ревью дизайнера</a:t>
+              <a:t>• 68 презентаций</a:t>
             </a:r>
           </a:p>
           <a:p>
@@ -6427,7 +8164,7 @@
               <a:spcAft>
                 <a:spcPts val="300"/>
               </a:spcAft>
-              <a:defRPr sz="1600">
+              <a:defRPr sz="1400">
                 <a:solidFill>
                   <a:srgbClr val="000000"/>
                 </a:solidFill>
@@ -6437,7 +8174,7 @@
               </a:defRPr>
             </a:pPr>
             <a:r>
-              <a:rPr sz="1600">
+              <a:rPr sz="1400">
                 <a:solidFill>
                   <a:srgbClr val="000000"/>
                 </a:solidFill>
@@ -6445,7 +8182,7 @@
                 <a:ea typeface="Play"/>
                 <a:cs typeface="Play"/>
               </a:rPr>
-              <a:t>• 19 из 42 колод нарушили фирменный стиль</a:t>
+              <a:t>• Сборка 4 мин вместо 186</a:t>
             </a:r>
           </a:p>
           <a:p>
@@ -6453,7 +8190,7 @@
               <a:spcAft>
                 <a:spcPts val="300"/>
               </a:spcAft>
-              <a:defRPr sz="1600">
+              <a:defRPr sz="1400">
                 <a:solidFill>
                   <a:srgbClr val="000000"/>
                 </a:solidFill>
@@ -6463,7 +8200,7 @@
               </a:defRPr>
             </a:pPr>
             <a:r>
-              <a:rPr sz="1600">
+              <a:rPr sz="1400">
                 <a:solidFill>
                   <a:srgbClr val="000000"/>
                 </a:solidFill>
@@ -6471,7 +8208,33 @@
                 <a:ea typeface="Play"/>
                 <a:cs typeface="Play"/>
               </a:rPr>
-              <a:t>• Дизайн‑отдел из 4 человек закрывает 11 запросов в неделю</a:t>
+              <a:t>• Время до первой версии 1 день вместо 6</a:t>
+            </a:r>
+          </a:p>
+          <a:p>
+            <a:pPr algn="l">
+              <a:spcAft>
+                <a:spcPts val="300"/>
+              </a:spcAft>
+              <a:defRPr sz="1400">
+                <a:solidFill>
+                  <a:srgbClr val="000000"/>
+                </a:solidFill>
+                <a:latin typeface="Play"/>
+                <a:ea typeface="Play"/>
+                <a:cs typeface="Play"/>
+              </a:defRPr>
+            </a:pPr>
+            <a:r>
+              <a:rPr sz="1400">
+                <a:solidFill>
+                  <a:srgbClr val="000000"/>
+                </a:solidFill>
+                <a:latin typeface="Play"/>
+                <a:ea typeface="Play"/>
+                <a:cs typeface="Play"/>
+              </a:rPr>
+              <a:t>• Нарушения 2 из 68, запросы 38 вместо 11</a:t>
             </a:r>
           </a:p>
         </p:txBody>
@@ -6484,7 +8247,1044 @@
 </p:sld>
 </file>
 
-<file path=ppt/slides/slide57.xml><?xml version="1.0" encoding="utf-8"?>
+<file path=ppt/slides/slide61.xml><?xml version="1.0" encoding="utf-8"?>
+<p:sld xmlns:a="http://schemas.openxmlformats.org/drawingml/2006/main" xmlns:p="http://schemas.openxmlformats.org/presentationml/2006/main" xmlns:r="http://schemas.openxmlformats.org/officeDocument/2006/relationships">
+  <p:cSld>
+    <p:spTree>
+      <p:nvGrpSpPr>
+        <p:cNvPr id="1" name=""/>
+        <p:cNvGrpSpPr/>
+        <p:nvPr/>
+      </p:nvGrpSpPr>
+      <p:grpSpPr/>
+      <p:sp>
+        <p:nvSpPr>
+          <p:cNvPr id="1027" name="Google Shape;1027;p65"/>
+          <p:cNvSpPr/>
+          <p:nvPr/>
+        </p:nvSpPr>
+        <p:spPr>
+          <a:xfrm>
+            <a:off x="6064222" y="1209852"/>
+            <a:ext cx="2793985" cy="3014270"/>
+          </a:xfrm>
+          <a:prstGeom prst="roundRect">
+            <a:avLst>
+              <a:gd fmla="val 3436" name="adj"/>
+            </a:avLst>
+          </a:prstGeom>
+          <a:solidFill>
+            <a:schemeClr val="lt2"/>
+          </a:solidFill>
+          <a:ln>
+            <a:noFill/>
+          </a:ln>
+        </p:spPr>
+        <p:txBody>
+          <a:bodyPr anchorCtr="0" anchor="ctr" bIns="91425" lIns="91425" spcFirstLastPara="1" rIns="91425" wrap="square" tIns="91425">
+            <a:noAutofit/>
+          </a:bodyPr>
+          <a:lstStyle/>
+          <a:p>
+            <a:pPr indent="0" lvl="0" marL="0" rtl="0" algn="l">
+              <a:spcBef>
+                <a:spcPts val="0"/>
+              </a:spcBef>
+              <a:spcAft>
+                <a:spcPts val="0"/>
+              </a:spcAft>
+              <a:buNone/>
+            </a:pPr>
+            <a:r>
+              <a:t/>
+            </a:r>
+            <a:endParaRPr/>
+          </a:p>
+        </p:txBody>
+      </p:sp>
+      <p:sp>
+        <p:nvSpPr>
+          <p:cNvPr id="1029" name="Google Shape;1029;p65"/>
+          <p:cNvSpPr/>
+          <p:nvPr/>
+        </p:nvSpPr>
+        <p:spPr>
+          <a:xfrm>
+            <a:off x="3174981" y="1209852"/>
+            <a:ext cx="2793985" cy="3014270"/>
+          </a:xfrm>
+          <a:prstGeom prst="roundRect">
+            <a:avLst>
+              <a:gd fmla="val 3436" name="adj"/>
+            </a:avLst>
+          </a:prstGeom>
+          <a:solidFill>
+            <a:schemeClr val="lt2"/>
+          </a:solidFill>
+          <a:ln>
+            <a:noFill/>
+          </a:ln>
+        </p:spPr>
+        <p:txBody>
+          <a:bodyPr anchorCtr="0" anchor="ctr" bIns="91425" lIns="91425" spcFirstLastPara="1" rIns="91425" wrap="square" tIns="91425">
+            <a:noAutofit/>
+          </a:bodyPr>
+          <a:lstStyle/>
+          <a:p>
+            <a:pPr indent="0" lvl="0" marL="0" rtl="0" algn="l">
+              <a:spcBef>
+                <a:spcPts val="0"/>
+              </a:spcBef>
+              <a:spcAft>
+                <a:spcPts val="0"/>
+              </a:spcAft>
+              <a:buNone/>
+            </a:pPr>
+            <a:r>
+              <a:t/>
+            </a:r>
+            <a:endParaRPr/>
+          </a:p>
+        </p:txBody>
+      </p:sp>
+      <p:sp>
+        <p:nvSpPr>
+          <p:cNvPr id="1031" name="Google Shape;1031;p65"/>
+          <p:cNvSpPr/>
+          <p:nvPr/>
+        </p:nvSpPr>
+        <p:spPr>
+          <a:xfrm>
+            <a:off x="285749" y="1209852"/>
+            <a:ext cx="2793985" cy="3014270"/>
+          </a:xfrm>
+          <a:prstGeom prst="roundRect">
+            <a:avLst>
+              <a:gd fmla="val 3436" name="adj"/>
+            </a:avLst>
+          </a:prstGeom>
+          <a:solidFill>
+            <a:schemeClr val="lt2"/>
+          </a:solidFill>
+          <a:ln>
+            <a:noFill/>
+          </a:ln>
+        </p:spPr>
+        <p:txBody>
+          <a:bodyPr anchorCtr="0" anchor="ctr" bIns="91425" lIns="91425" spcFirstLastPara="1" rIns="91425" wrap="square" tIns="91425">
+            <a:noAutofit/>
+          </a:bodyPr>
+          <a:lstStyle/>
+          <a:p>
+            <a:pPr indent="0" lvl="0" marL="0" rtl="0" algn="l">
+              <a:spcBef>
+                <a:spcPts val="0"/>
+              </a:spcBef>
+              <a:spcAft>
+                <a:spcPts val="0"/>
+              </a:spcAft>
+              <a:buNone/>
+            </a:pPr>
+            <a:r>
+              <a:t/>
+            </a:r>
+            <a:endParaRPr/>
+          </a:p>
+        </p:txBody>
+      </p:sp>
+      <p:sp>
+        <p:nvSpPr>
+          <p:cNvPr id="1032" name="Google Shape;1032;p65"/>
+          <p:cNvSpPr/>
+          <p:nvPr/>
+        </p:nvSpPr>
+        <p:spPr>
+          <a:xfrm>
+            <a:off x="285748" y="286047"/>
+            <a:ext cx="8572456" cy="3938075"/>
+          </a:xfrm>
+          <a:prstGeom prst="rect">
+            <a:avLst/>
+          </a:prstGeom>
+          <a:noFill/>
+          <a:ln>
+            <a:noFill/>
+          </a:ln>
+        </p:spPr>
+        <p:txBody>
+          <a:bodyPr anchorCtr="0" anchor="ctr" bIns="91425" lIns="91425" spcFirstLastPara="1" rIns="91425" wrap="square" tIns="91425">
+            <a:noAutofit/>
+          </a:bodyPr>
+          <a:lstStyle/>
+          <a:p>
+            <a:pPr indent="0" lvl="0" marL="0" rtl="0" algn="l">
+              <a:spcBef>
+                <a:spcPts val="0"/>
+              </a:spcBef>
+              <a:spcAft>
+                <a:spcPts val="0"/>
+              </a:spcAft>
+              <a:buNone/>
+            </a:pPr>
+            <a:r>
+              <a:t/>
+            </a:r>
+            <a:endParaRPr/>
+          </a:p>
+        </p:txBody>
+      </p:sp>
+      <p:sp>
+        <p:nvSpPr>
+          <p:cNvPr id="1033" name="Google Shape;1033;p65"/>
+          <p:cNvSpPr/>
+          <p:nvPr/>
+        </p:nvSpPr>
+        <p:spPr>
+          <a:xfrm>
+            <a:off x="285748" y="1209852"/>
+            <a:ext cx="8572456" cy="3014270"/>
+          </a:xfrm>
+          <a:prstGeom prst="rect">
+            <a:avLst/>
+          </a:prstGeom>
+          <a:noFill/>
+          <a:ln>
+            <a:noFill/>
+          </a:ln>
+        </p:spPr>
+        <p:txBody>
+          <a:bodyPr anchorCtr="0" anchor="ctr" bIns="91425" lIns="91425" spcFirstLastPara="1" rIns="91425" wrap="square" tIns="91425">
+            <a:noAutofit/>
+          </a:bodyPr>
+          <a:lstStyle/>
+          <a:p>
+            <a:pPr indent="0" lvl="0" marL="0" rtl="0" algn="l">
+              <a:spcBef>
+                <a:spcPts val="0"/>
+              </a:spcBef>
+              <a:spcAft>
+                <a:spcPts val="0"/>
+              </a:spcAft>
+              <a:buNone/>
+            </a:pPr>
+            <a:r>
+              <a:t/>
+            </a:r>
+            <a:endParaRPr/>
+          </a:p>
+        </p:txBody>
+      </p:sp>
+      <p:sp>
+        <p:nvSpPr>
+          <p:cNvPr id="1035" name="Google Shape;1035;p65"/>
+          <p:cNvSpPr/>
+          <p:nvPr/>
+        </p:nvSpPr>
+        <p:spPr>
+          <a:xfrm>
+            <a:off x="476248" y="1400328"/>
+            <a:ext cx="76199" cy="76190"/>
+          </a:xfrm>
+          <a:prstGeom prst="roundRect">
+            <a:avLst>
+              <a:gd fmla="val 31500" name="adj"/>
+            </a:avLst>
+          </a:prstGeom>
+          <a:solidFill>
+            <a:srgbClr val="0077FF"/>
+          </a:solidFill>
+          <a:ln>
+            <a:noFill/>
+          </a:ln>
+        </p:spPr>
+        <p:txBody>
+          <a:bodyPr anchorCtr="0" anchor="ctr" bIns="91425" lIns="91425" spcFirstLastPara="1" rIns="91425" wrap="square" tIns="91425">
+            <a:noAutofit/>
+          </a:bodyPr>
+          <a:lstStyle/>
+          <a:p>
+            <a:pPr indent="0" lvl="0" marL="0" rtl="0" algn="l">
+              <a:spcBef>
+                <a:spcPts val="0"/>
+              </a:spcBef>
+              <a:spcAft>
+                <a:spcPts val="0"/>
+              </a:spcAft>
+              <a:buNone/>
+            </a:pPr>
+            <a:r>
+              <a:t/>
+            </a:r>
+            <a:endParaRPr/>
+          </a:p>
+        </p:txBody>
+      </p:sp>
+      <p:sp>
+        <p:nvSpPr>
+          <p:cNvPr id="1041" name="Google Shape;1041;p65"/>
+          <p:cNvSpPr/>
+          <p:nvPr/>
+        </p:nvSpPr>
+        <p:spPr>
+          <a:xfrm>
+            <a:off x="3365480" y="1400328"/>
+            <a:ext cx="76199" cy="76190"/>
+          </a:xfrm>
+          <a:prstGeom prst="roundRect">
+            <a:avLst>
+              <a:gd fmla="val 31500" name="adj"/>
+            </a:avLst>
+          </a:prstGeom>
+          <a:solidFill>
+            <a:srgbClr val="0077FF"/>
+          </a:solidFill>
+          <a:ln>
+            <a:noFill/>
+          </a:ln>
+        </p:spPr>
+        <p:txBody>
+          <a:bodyPr anchorCtr="0" anchor="ctr" bIns="91425" lIns="91425" spcFirstLastPara="1" rIns="91425" wrap="square" tIns="91425">
+            <a:noAutofit/>
+          </a:bodyPr>
+          <a:lstStyle/>
+          <a:p>
+            <a:pPr indent="0" lvl="0" marL="0" rtl="0" algn="l">
+              <a:spcBef>
+                <a:spcPts val="0"/>
+              </a:spcBef>
+              <a:spcAft>
+                <a:spcPts val="0"/>
+              </a:spcAft>
+              <a:buNone/>
+            </a:pPr>
+            <a:r>
+              <a:t/>
+            </a:r>
+            <a:endParaRPr/>
+          </a:p>
+        </p:txBody>
+      </p:sp>
+      <p:sp>
+        <p:nvSpPr>
+          <p:cNvPr id="1046" name="Google Shape;1046;p65"/>
+          <p:cNvSpPr/>
+          <p:nvPr/>
+        </p:nvSpPr>
+        <p:spPr>
+          <a:xfrm>
+            <a:off x="6254721" y="1400328"/>
+            <a:ext cx="76199" cy="76190"/>
+          </a:xfrm>
+          <a:prstGeom prst="roundRect">
+            <a:avLst>
+              <a:gd fmla="val 31500" name="adj"/>
+            </a:avLst>
+          </a:prstGeom>
+          <a:solidFill>
+            <a:srgbClr val="0077FF"/>
+          </a:solidFill>
+          <a:ln>
+            <a:noFill/>
+          </a:ln>
+        </p:spPr>
+        <p:txBody>
+          <a:bodyPr anchorCtr="0" anchor="ctr" bIns="91425" lIns="91425" spcFirstLastPara="1" rIns="91425" wrap="square" tIns="91425">
+            <a:noAutofit/>
+          </a:bodyPr>
+          <a:lstStyle/>
+          <a:p>
+            <a:pPr indent="0" lvl="0" marL="0" rtl="0" algn="l">
+              <a:spcBef>
+                <a:spcPts val="0"/>
+              </a:spcBef>
+              <a:spcAft>
+                <a:spcPts val="0"/>
+              </a:spcAft>
+              <a:buNone/>
+            </a:pPr>
+            <a:r>
+              <a:t/>
+            </a:r>
+            <a:endParaRPr/>
+          </a:p>
+        </p:txBody>
+      </p:sp>
+      <p:sp>
+        <p:nvSpPr>
+          <p:cNvPr id="1047" name="title"/>
+          <p:cNvSpPr txBox="1"/>
+          <p:nvPr/>
+        </p:nvSpPr>
+        <p:spPr>
+          <a:xfrm>
+            <a:off x="274320" y="282943"/>
+            <a:ext cx="6792986" cy="617220"/>
+          </a:xfrm>
+          <a:prstGeom prst="rect">
+            <a:avLst/>
+          </a:prstGeom>
+          <a:noFill/>
+        </p:spPr>
+        <p:txBody>
+          <a:bodyPr wrap="square" lIns="76200" rIns="76200" tIns="50800" bIns="50800">
+            <a:spAutoFit/>
+          </a:bodyPr>
+          <a:lstStyle/>
+          <a:p>
+            <a:pPr algn="l">
+              <a:spcAft>
+                <a:spcPts val="300"/>
+              </a:spcAft>
+              <a:defRPr sz="2400">
+                <a:solidFill>
+                  <a:srgbClr val="000000"/>
+                </a:solidFill>
+                <a:latin typeface="Play"/>
+                <a:ea typeface="Play"/>
+                <a:cs typeface="Play"/>
+              </a:defRPr>
+            </a:pPr>
+            <a:r>
+              <a:rPr sz="2400">
+                <a:solidFill>
+                  <a:srgbClr val="000000"/>
+                </a:solidFill>
+                <a:latin typeface="Play"/>
+                <a:ea typeface="Play"/>
+                <a:cs typeface="Play"/>
+              </a:rPr>
+              <a:t>Риски</a:t>
+            </a:r>
+          </a:p>
+        </p:txBody>
+      </p:sp>
+      <p:sp>
+        <p:nvSpPr>
+          <p:cNvPr id="1048" name="Oval 1047"/>
+          <p:cNvSpPr/>
+          <p:nvPr/>
+        </p:nvSpPr>
+        <p:spPr>
+          <a:xfrm>
+            <a:off x="1411519" y="1530621"/>
+            <a:ext cx="433029" cy="433029"/>
+          </a:xfrm>
+          <a:prstGeom prst="ellipse">
+            <a:avLst/>
+          </a:prstGeom>
+          <a:solidFill>
+            <a:srgbClr val="0077FF"/>
+          </a:solidFill>
+          <a:ln>
+            <a:noFill/>
+          </a:ln>
+        </p:spPr>
+        <p:style>
+          <a:lnRef idx="1">
+            <a:schemeClr val="accent1"/>
+          </a:lnRef>
+          <a:fillRef idx="3">
+            <a:schemeClr val="accent1"/>
+          </a:fillRef>
+          <a:effectRef idx="2">
+            <a:schemeClr val="accent1"/>
+          </a:effectRef>
+          <a:fontRef idx="minor">
+            <a:schemeClr val="lt1"/>
+          </a:fontRef>
+        </p:style>
+        <p:txBody>
+          <a:bodyPr rtlCol="0" anchor="ctr"/>
+          <a:lstStyle/>
+          <a:p>
+            <a:pPr algn="ctr"/>
+          </a:p>
+        </p:txBody>
+      </p:sp>
+      <p:sp>
+        <p:nvSpPr>
+          <p:cNvPr id="1049" name="TextBox 1048"/>
+          <p:cNvSpPr txBox="1"/>
+          <p:nvPr/>
+        </p:nvSpPr>
+        <p:spPr>
+          <a:xfrm>
+            <a:off x="274320" y="2076828"/>
+            <a:ext cx="2707428" cy="383821"/>
+          </a:xfrm>
+          <a:prstGeom prst="rect">
+            <a:avLst/>
+          </a:prstGeom>
+          <a:noFill/>
+        </p:spPr>
+        <p:txBody>
+          <a:bodyPr wrap="square">
+            <a:spAutoFit/>
+          </a:bodyPr>
+          <a:lstStyle/>
+          <a:p>
+            <a:pPr algn="ctr">
+              <a:defRPr sz="1200" b="0">
+                <a:solidFill>
+                  <a:srgbClr val="000000"/>
+                </a:solidFill>
+                <a:latin typeface="Play"/>
+                <a:ea typeface="Play"/>
+                <a:cs typeface="Play"/>
+              </a:defRPr>
+            </a:pPr>
+            <a:r>
+              <a:rPr sz="1200" b="0">
+                <a:solidFill>
+                  <a:srgbClr val="000000"/>
+                </a:solidFill>
+                <a:latin typeface="Play"/>
+                <a:ea typeface="Play"/>
+                <a:cs typeface="Play"/>
+              </a:rPr>
+              <a:t>Слабая модель может выдумать цифры</a:t>
+            </a:r>
+          </a:p>
+        </p:txBody>
+      </p:sp>
+      <p:sp>
+        <p:nvSpPr>
+          <p:cNvPr id="1050" name="Document 1049"/>
+          <p:cNvSpPr/>
+          <p:nvPr/>
+        </p:nvSpPr>
+        <p:spPr>
+          <a:xfrm>
+            <a:off x="4241038" y="1519795"/>
+            <a:ext cx="411377" cy="454680"/>
+          </a:xfrm>
+          <a:prstGeom prst="flowChartDocument">
+            <a:avLst/>
+          </a:prstGeom>
+          <a:solidFill>
+            <a:srgbClr val="0077FF"/>
+          </a:solidFill>
+          <a:ln>
+            <a:noFill/>
+          </a:ln>
+        </p:spPr>
+        <p:style>
+          <a:lnRef idx="1">
+            <a:schemeClr val="accent1"/>
+          </a:lnRef>
+          <a:fillRef idx="3">
+            <a:schemeClr val="accent1"/>
+          </a:fillRef>
+          <a:effectRef idx="2">
+            <a:schemeClr val="accent1"/>
+          </a:effectRef>
+          <a:fontRef idx="minor">
+            <a:schemeClr val="lt1"/>
+          </a:fontRef>
+        </p:style>
+        <p:txBody>
+          <a:bodyPr rtlCol="0" anchor="ctr"/>
+          <a:lstStyle/>
+          <a:p>
+            <a:pPr algn="ctr"/>
+          </a:p>
+        </p:txBody>
+      </p:sp>
+      <p:sp>
+        <p:nvSpPr>
+          <p:cNvPr id="1051" name="TextBox 1050"/>
+          <p:cNvSpPr txBox="1"/>
+          <p:nvPr/>
+        </p:nvSpPr>
+        <p:spPr>
+          <a:xfrm>
+            <a:off x="3093012" y="2076828"/>
+            <a:ext cx="2707428" cy="383821"/>
+          </a:xfrm>
+          <a:prstGeom prst="rect">
+            <a:avLst/>
+          </a:prstGeom>
+          <a:noFill/>
+        </p:spPr>
+        <p:txBody>
+          <a:bodyPr wrap="square">
+            <a:spAutoFit/>
+          </a:bodyPr>
+          <a:lstStyle/>
+          <a:p>
+            <a:pPr algn="ctr">
+              <a:defRPr sz="1200" b="0">
+                <a:solidFill>
+                  <a:srgbClr val="000000"/>
+                </a:solidFill>
+                <a:latin typeface="Play"/>
+                <a:ea typeface="Play"/>
+                <a:cs typeface="Play"/>
+              </a:defRPr>
+            </a:pPr>
+            <a:r>
+              <a:rPr sz="1200" b="0">
+                <a:solidFill>
+                  <a:srgbClr val="000000"/>
+                </a:solidFill>
+                <a:latin typeface="Play"/>
+                <a:ea typeface="Play"/>
+                <a:cs typeface="Play"/>
+              </a:rPr>
+              <a:t>Незнакомый шаблон может быть плохо сделан</a:t>
+            </a:r>
+          </a:p>
+        </p:txBody>
+      </p:sp>
+      <p:sp>
+        <p:nvSpPr>
+          <p:cNvPr id="1052" name="Oval 1051"/>
+          <p:cNvSpPr/>
+          <p:nvPr/>
+        </p:nvSpPr>
+        <p:spPr>
+          <a:xfrm>
+            <a:off x="7016428" y="1498144"/>
+            <a:ext cx="497983" cy="497983"/>
+          </a:xfrm>
+          <a:prstGeom prst="ellipse">
+            <a:avLst/>
+          </a:prstGeom>
+          <a:solidFill>
+            <a:srgbClr val="0077FF"/>
+          </a:solidFill>
+          <a:ln>
+            <a:noFill/>
+          </a:ln>
+        </p:spPr>
+        <p:style>
+          <a:lnRef idx="1">
+            <a:schemeClr val="accent1"/>
+          </a:lnRef>
+          <a:fillRef idx="3">
+            <a:schemeClr val="accent1"/>
+          </a:fillRef>
+          <a:effectRef idx="2">
+            <a:schemeClr val="accent1"/>
+          </a:effectRef>
+          <a:fontRef idx="minor">
+            <a:schemeClr val="lt1"/>
+          </a:fontRef>
+        </p:style>
+        <p:txBody>
+          <a:bodyPr rtlCol="0" anchor="ctr"/>
+          <a:lstStyle/>
+          <a:p>
+            <a:pPr algn="ctr"/>
+          </a:p>
+        </p:txBody>
+      </p:sp>
+      <p:sp>
+        <p:nvSpPr>
+          <p:cNvPr id="1053" name="Oval 1052"/>
+          <p:cNvSpPr/>
+          <p:nvPr/>
+        </p:nvSpPr>
+        <p:spPr>
+          <a:xfrm>
+            <a:off x="7103033" y="1584750"/>
+            <a:ext cx="324771" cy="324771"/>
+          </a:xfrm>
+          <a:prstGeom prst="ellipse">
+            <a:avLst/>
+          </a:prstGeom>
+          <a:solidFill>
+            <a:srgbClr val="FFFFFF"/>
+          </a:solidFill>
+          <a:ln>
+            <a:noFill/>
+          </a:ln>
+        </p:spPr>
+        <p:style>
+          <a:lnRef idx="1">
+            <a:schemeClr val="accent1"/>
+          </a:lnRef>
+          <a:fillRef idx="3">
+            <a:schemeClr val="accent1"/>
+          </a:fillRef>
+          <a:effectRef idx="2">
+            <a:schemeClr val="accent1"/>
+          </a:effectRef>
+          <a:fontRef idx="minor">
+            <a:schemeClr val="lt1"/>
+          </a:fontRef>
+        </p:style>
+        <p:txBody>
+          <a:bodyPr rtlCol="0" anchor="ctr"/>
+          <a:lstStyle/>
+          <a:p>
+            <a:pPr algn="ctr"/>
+          </a:p>
+        </p:txBody>
+      </p:sp>
+      <p:sp>
+        <p:nvSpPr>
+          <p:cNvPr id="1054" name="Oval 1053"/>
+          <p:cNvSpPr/>
+          <p:nvPr/>
+        </p:nvSpPr>
+        <p:spPr>
+          <a:xfrm>
+            <a:off x="7178813" y="1660530"/>
+            <a:ext cx="173211" cy="173211"/>
+          </a:xfrm>
+          <a:prstGeom prst="ellipse">
+            <a:avLst/>
+          </a:prstGeom>
+          <a:solidFill>
+            <a:srgbClr val="0077FF"/>
+          </a:solidFill>
+          <a:ln>
+            <a:noFill/>
+          </a:ln>
+        </p:spPr>
+        <p:style>
+          <a:lnRef idx="1">
+            <a:schemeClr val="accent1"/>
+          </a:lnRef>
+          <a:fillRef idx="3">
+            <a:schemeClr val="accent1"/>
+          </a:fillRef>
+          <a:effectRef idx="2">
+            <a:schemeClr val="accent1"/>
+          </a:effectRef>
+          <a:fontRef idx="minor">
+            <a:schemeClr val="lt1"/>
+          </a:fontRef>
+        </p:style>
+        <p:txBody>
+          <a:bodyPr rtlCol="0" anchor="ctr"/>
+          <a:lstStyle/>
+          <a:p>
+            <a:pPr algn="ctr"/>
+          </a:p>
+        </p:txBody>
+      </p:sp>
+      <p:sp>
+        <p:nvSpPr>
+          <p:cNvPr id="1055" name="Oval 1054"/>
+          <p:cNvSpPr/>
+          <p:nvPr/>
+        </p:nvSpPr>
+        <p:spPr>
+          <a:xfrm>
+            <a:off x="7232942" y="1714658"/>
+            <a:ext cx="64954" cy="64954"/>
+          </a:xfrm>
+          <a:prstGeom prst="ellipse">
+            <a:avLst/>
+          </a:prstGeom>
+          <a:solidFill>
+            <a:srgbClr val="FFFFFF"/>
+          </a:solidFill>
+          <a:ln>
+            <a:noFill/>
+          </a:ln>
+        </p:spPr>
+        <p:style>
+          <a:lnRef idx="1">
+            <a:schemeClr val="accent1"/>
+          </a:lnRef>
+          <a:fillRef idx="3">
+            <a:schemeClr val="accent1"/>
+          </a:fillRef>
+          <a:effectRef idx="2">
+            <a:schemeClr val="accent1"/>
+          </a:effectRef>
+          <a:fontRef idx="minor">
+            <a:schemeClr val="lt1"/>
+          </a:fontRef>
+        </p:style>
+        <p:txBody>
+          <a:bodyPr rtlCol="0" anchor="ctr"/>
+          <a:lstStyle/>
+          <a:p>
+            <a:pPr algn="ctr"/>
+          </a:p>
+        </p:txBody>
+      </p:sp>
+      <p:sp>
+        <p:nvSpPr>
+          <p:cNvPr id="1056" name="TextBox 1055"/>
+          <p:cNvSpPr txBox="1"/>
+          <p:nvPr/>
+        </p:nvSpPr>
+        <p:spPr>
+          <a:xfrm>
+            <a:off x="5911705" y="2076828"/>
+            <a:ext cx="2707428" cy="383821"/>
+          </a:xfrm>
+          <a:prstGeom prst="rect">
+            <a:avLst/>
+          </a:prstGeom>
+          <a:noFill/>
+        </p:spPr>
+        <p:txBody>
+          <a:bodyPr wrap="square">
+            <a:spAutoFit/>
+          </a:bodyPr>
+          <a:lstStyle/>
+          <a:p>
+            <a:pPr algn="ctr">
+              <a:defRPr sz="1200" b="0">
+                <a:solidFill>
+                  <a:srgbClr val="000000"/>
+                </a:solidFill>
+                <a:latin typeface="Play"/>
+                <a:ea typeface="Play"/>
+                <a:cs typeface="Play"/>
+              </a:defRPr>
+            </a:pPr>
+            <a:r>
+              <a:rPr sz="1200" b="0">
+                <a:solidFill>
+                  <a:srgbClr val="000000"/>
+                </a:solidFill>
+                <a:latin typeface="Play"/>
+                <a:ea typeface="Play"/>
+                <a:cs typeface="Play"/>
+              </a:rPr>
+              <a:t>Нагрузка более 20 задач требует внешней очереди</a:t>
+            </a:r>
+          </a:p>
+        </p:txBody>
+      </p:sp>
+    </p:spTree>
+  </p:cSld>
+  <p:clrMapOvr>
+    <a:masterClrMapping/>
+  </p:clrMapOvr>
+</p:sld>
+</file>
+
+<file path=ppt/slides/slide62.xml><?xml version="1.0" encoding="utf-8"?>
+<p:sld xmlns:a="http://schemas.openxmlformats.org/drawingml/2006/main" xmlns:p="http://schemas.openxmlformats.org/presentationml/2006/main" xmlns:r="http://schemas.openxmlformats.org/officeDocument/2006/relationships">
+  <p:cSld>
+    <p:spTree>
+      <p:nvGrpSpPr>
+        <p:cNvPr id="1" name=""/>
+        <p:cNvGrpSpPr/>
+        <p:nvPr/>
+      </p:nvGrpSpPr>
+      <p:grpSpPr/>
+      <p:pic>
+        <p:nvPicPr>
+          <p:cNvPr descr=" " id="2249" name="Google Shape;2249;p83"/>
+          <p:cNvPicPr preferRelativeResize="0"/>
+          <p:nvPr/>
+        </p:nvPicPr>
+        <p:blipFill rotWithShape="1">
+          <a:blip r:embed="rId2">
+            <a:alphaModFix/>
+          </a:blip>
+          <a:srcRect b="0" l="0" r="0" t="0"/>
+          <a:stretch/>
+        </p:blipFill>
+        <p:spPr>
+          <a:xfrm>
+            <a:off x="285748" y="3576507"/>
+            <a:ext cx="2381238" cy="28571"/>
+          </a:xfrm>
+          <a:prstGeom prst="rect">
+            <a:avLst/>
+          </a:prstGeom>
+          <a:noFill/>
+          <a:ln>
+            <a:noFill/>
+          </a:ln>
+        </p:spPr>
+      </p:pic>
+      <p:pic>
+        <p:nvPicPr>
+          <p:cNvPr descr=" " id="2250" name="Google Shape;2250;p83"/>
+          <p:cNvPicPr preferRelativeResize="0"/>
+          <p:nvPr/>
+        </p:nvPicPr>
+        <p:blipFill rotWithShape="1">
+          <a:blip r:embed="rId3">
+            <a:alphaModFix/>
+          </a:blip>
+          <a:srcRect b="0" l="0" r="0" t="0"/>
+          <a:stretch/>
+        </p:blipFill>
+        <p:spPr>
+          <a:xfrm>
+            <a:off x="3143234" y="3576507"/>
+            <a:ext cx="3762355" cy="28571"/>
+          </a:xfrm>
+          <a:prstGeom prst="rect">
+            <a:avLst/>
+          </a:prstGeom>
+          <a:noFill/>
+          <a:ln>
+            <a:noFill/>
+          </a:ln>
+        </p:spPr>
+      </p:pic>
+      <p:sp>
+        <p:nvSpPr>
+          <p:cNvPr id="2251" name="title"/>
+          <p:cNvSpPr txBox="1"/>
+          <p:nvPr/>
+        </p:nvSpPr>
+        <p:spPr>
+          <a:xfrm>
+            <a:off x="274320" y="282943"/>
+            <a:ext cx="6792986" cy="617220"/>
+          </a:xfrm>
+          <a:prstGeom prst="rect">
+            <a:avLst/>
+          </a:prstGeom>
+          <a:noFill/>
+        </p:spPr>
+        <p:txBody>
+          <a:bodyPr wrap="square" lIns="76200" rIns="76200" tIns="50800" bIns="50800">
+            <a:spAutoFit/>
+          </a:bodyPr>
+          <a:lstStyle/>
+          <a:p>
+            <a:pPr algn="l">
+              <a:spcAft>
+                <a:spcPts val="300"/>
+              </a:spcAft>
+              <a:defRPr sz="2400">
+                <a:solidFill>
+                  <a:srgbClr val="000000"/>
+                </a:solidFill>
+                <a:latin typeface="Play"/>
+                <a:ea typeface="Play"/>
+                <a:cs typeface="Play"/>
+              </a:defRPr>
+            </a:pPr>
+            <a:r>
+              <a:rPr sz="2400">
+                <a:solidFill>
+                  <a:srgbClr val="000000"/>
+                </a:solidFill>
+                <a:latin typeface="Play"/>
+                <a:ea typeface="Play"/>
+                <a:cs typeface="Play"/>
+              </a:rPr>
+              <a:t>Потенциальные выгоды</a:t>
+            </a:r>
+          </a:p>
+        </p:txBody>
+      </p:sp>
+      <p:sp>
+        <p:nvSpPr>
+          <p:cNvPr id="2252" name="body"/>
+          <p:cNvSpPr txBox="1"/>
+          <p:nvPr/>
+        </p:nvSpPr>
+        <p:spPr>
+          <a:xfrm>
+            <a:off x="274320" y="1950440"/>
+            <a:ext cx="7189469" cy="994625"/>
+          </a:xfrm>
+          <a:prstGeom prst="rect">
+            <a:avLst/>
+          </a:prstGeom>
+          <a:noFill/>
+        </p:spPr>
+        <p:txBody>
+          <a:bodyPr wrap="square" lIns="76200" rIns="76200" tIns="50800" bIns="50800">
+            <a:spAutoFit/>
+          </a:bodyPr>
+          <a:lstStyle/>
+          <a:p>
+            <a:pPr algn="l">
+              <a:spcAft>
+                <a:spcPts val="300"/>
+              </a:spcAft>
+              <a:defRPr sz="1803" b="1">
+                <a:solidFill>
+                  <a:srgbClr val="000000"/>
+                </a:solidFill>
+                <a:latin typeface="Play"/>
+                <a:ea typeface="Play"/>
+                <a:cs typeface="Play"/>
+              </a:defRPr>
+            </a:pPr>
+            <a:r>
+              <a:rPr sz="1803" b="1">
+                <a:solidFill>
+                  <a:srgbClr val="000000"/>
+                </a:solidFill>
+                <a:latin typeface="Play"/>
+                <a:ea typeface="Play"/>
+                <a:cs typeface="Play"/>
+              </a:rPr>
+              <a:t>• Сокращение времени на создание презентаций</a:t>
+            </a:r>
+          </a:p>
+          <a:p>
+            <a:pPr algn="l">
+              <a:spcAft>
+                <a:spcPts val="300"/>
+              </a:spcAft>
+              <a:defRPr sz="1803" b="1">
+                <a:solidFill>
+                  <a:srgbClr val="000000"/>
+                </a:solidFill>
+                <a:latin typeface="Play"/>
+                <a:ea typeface="Play"/>
+                <a:cs typeface="Play"/>
+              </a:defRPr>
+            </a:pPr>
+            <a:r>
+              <a:rPr sz="1803" b="1">
+                <a:solidFill>
+                  <a:srgbClr val="000000"/>
+                </a:solidFill>
+                <a:latin typeface="Play"/>
+                <a:ea typeface="Play"/>
+                <a:cs typeface="Play"/>
+              </a:rPr>
+              <a:t>• Уменьшение нарушений фирменного стиля</a:t>
+            </a:r>
+          </a:p>
+          <a:p>
+            <a:pPr algn="l">
+              <a:spcAft>
+                <a:spcPts val="300"/>
+              </a:spcAft>
+              <a:defRPr sz="1803" b="1">
+                <a:solidFill>
+                  <a:srgbClr val="000000"/>
+                </a:solidFill>
+                <a:latin typeface="Play"/>
+                <a:ea typeface="Play"/>
+                <a:cs typeface="Play"/>
+              </a:defRPr>
+            </a:pPr>
+            <a:r>
+              <a:rPr sz="1803" b="1">
+                <a:solidFill>
+                  <a:srgbClr val="000000"/>
+                </a:solidFill>
+                <a:latin typeface="Play"/>
+                <a:ea typeface="Play"/>
+                <a:cs typeface="Play"/>
+              </a:rPr>
+              <a:t>• Повышение продуктивности дизайнеров</a:t>
+            </a:r>
+          </a:p>
+        </p:txBody>
+      </p:sp>
+    </p:spTree>
+  </p:cSld>
+  <p:clrMapOvr>
+    <a:masterClrMapping/>
+  </p:clrMapOvr>
+</p:sld>
+</file>
+
+<file path=ppt/slides/slide63.xml><?xml version="1.0" encoding="utf-8"?>
 <p:sld xmlns:a="http://schemas.openxmlformats.org/drawingml/2006/main" xmlns:p="http://schemas.openxmlformats.org/presentationml/2006/main" xmlns:r="http://schemas.openxmlformats.org/officeDocument/2006/relationships">
   <p:cSld>
     <p:spTree>
@@ -7298,7 +10098,7 @@
                 <a:ea typeface="Play"/>
                 <a:cs typeface="Play"/>
               </a:rPr>
-              <a:t>Предложение</a:t>
+              <a:t>Что мы просим решить</a:t>
             </a:r>
           </a:p>
         </p:txBody>
@@ -7347,7 +10147,7 @@
                 <a:ea typeface="Play"/>
                 <a:cs typeface="Play"/>
               </a:rPr>
-              <a:t>Сервис принимает шаблон pptx и материалы</a:t>
+              <a:t>Одобрить запуск сервиса на всю компанию</a:t>
             </a:r>
           </a:p>
         </p:txBody>
@@ -7378,7 +10178,7 @@
               <a:spcAft>
                 <a:spcPts val="300"/>
               </a:spcAft>
-              <a:defRPr sz="1200" b="0">
+              <a:defRPr sz="1406" b="0">
                 <a:solidFill>
                   <a:srgbClr val="000000"/>
                 </a:solidFill>
@@ -7388,7 +10188,7 @@
               </a:defRPr>
             </a:pPr>
             <a:r>
-              <a:rPr sz="1200" b="0">
+              <a:rPr sz="1406" b="0">
                 <a:solidFill>
                   <a:srgbClr val="000000"/>
                 </a:solidFill>
@@ -7396,7 +10196,7 @@
                 <a:ea typeface="Play"/>
                 <a:cs typeface="Play"/>
               </a:rPr>
-              <a:t>Автоматически формирует дизайн‑систему и план колоды</a:t>
+              <a:t>Обеспечить инфраструктуру и интеграцию</a:t>
             </a:r>
           </a:p>
         </p:txBody>
@@ -7427,1834 +10227,6 @@
               <a:spcAft>
                 <a:spcPts val="300"/>
               </a:spcAft>
-              <a:defRPr sz="1200" b="0">
-                <a:solidFill>
-                  <a:srgbClr val="000000"/>
-                </a:solidFill>
-                <a:latin typeface="Play"/>
-                <a:ea typeface="Play"/>
-                <a:cs typeface="Play"/>
-              </a:defRPr>
-            </a:pPr>
-            <a:r>
-              <a:rPr sz="1200" b="0">
-                <a:solidFill>
-                  <a:srgbClr val="000000"/>
-                </a:solidFill>
-                <a:latin typeface="Play"/>
-                <a:ea typeface="Play"/>
-                <a:cs typeface="Play"/>
-              </a:rPr>
-              <a:t>Экспорт в pptx, pdf и html с редактируемыми слайдами</a:t>
-            </a:r>
-          </a:p>
-        </p:txBody>
-      </p:sp>
-    </p:spTree>
-  </p:cSld>
-  <p:clrMapOvr>
-    <a:masterClrMapping/>
-  </p:clrMapOvr>
-</p:sld>
-</file>
-
-<file path=ppt/slides/slide58.xml><?xml version="1.0" encoding="utf-8"?>
-<p:sld xmlns:a="http://schemas.openxmlformats.org/drawingml/2006/main" xmlns:p="http://schemas.openxmlformats.org/presentationml/2006/main" xmlns:r="http://schemas.openxmlformats.org/officeDocument/2006/relationships">
-  <p:cSld>
-    <p:spTree>
-      <p:nvGrpSpPr>
-        <p:cNvPr id="1" name=""/>
-        <p:cNvGrpSpPr/>
-        <p:nvPr/>
-      </p:nvGrpSpPr>
-      <p:grpSpPr/>
-      <p:sp>
-        <p:nvSpPr>
-          <p:cNvPr id="2" name="title"/>
-          <p:cNvSpPr txBox="1"/>
-          <p:nvPr/>
-        </p:nvSpPr>
-        <p:spPr>
-          <a:xfrm>
-            <a:off x="274320" y="282943"/>
-            <a:ext cx="6792986" cy="617220"/>
-          </a:xfrm>
-          <a:prstGeom prst="rect">
-            <a:avLst/>
-          </a:prstGeom>
-          <a:noFill/>
-        </p:spPr>
-        <p:txBody>
-          <a:bodyPr wrap="square" lIns="76200" rIns="76200" tIns="50800" bIns="50800">
-            <a:spAutoFit/>
-          </a:bodyPr>
-          <a:lstStyle/>
-          <a:p>
-            <a:pPr algn="l">
-              <a:spcAft>
-                <a:spcPts val="300"/>
-              </a:spcAft>
-              <a:defRPr sz="2400">
-                <a:solidFill>
-                  <a:srgbClr val="000000"/>
-                </a:solidFill>
-                <a:latin typeface="Play"/>
-                <a:ea typeface="Play"/>
-                <a:cs typeface="Play"/>
-              </a:defRPr>
-            </a:pPr>
-            <a:r>
-              <a:rPr sz="2400">
-                <a:solidFill>
-                  <a:srgbClr val="000000"/>
-                </a:solidFill>
-                <a:latin typeface="Play"/>
-                <a:ea typeface="Play"/>
-                <a:cs typeface="Play"/>
-              </a:rPr>
-              <a:t>Ожидаемый эффект</a:t>
-            </a:r>
-          </a:p>
-        </p:txBody>
-      </p:sp>
-      <p:sp>
-        <p:nvSpPr>
-          <p:cNvPr id="3" name="body"/>
-          <p:cNvSpPr txBox="1"/>
-          <p:nvPr/>
-        </p:nvSpPr>
-        <p:spPr>
-          <a:xfrm>
-            <a:off x="274320" y="1414513"/>
-            <a:ext cx="7189469" cy="2602405"/>
-          </a:xfrm>
-          <a:prstGeom prst="rect">
-            <a:avLst/>
-          </a:prstGeom>
-          <a:noFill/>
-        </p:spPr>
-        <p:txBody>
-          <a:bodyPr wrap="square" lIns="76200" rIns="76200" tIns="50800" bIns="50800">
-            <a:spAutoFit/>
-          </a:bodyPr>
-          <a:lstStyle/>
-          <a:p>
-            <a:pPr algn="l">
-              <a:spcAft>
-                <a:spcPts val="300"/>
-              </a:spcAft>
-              <a:defRPr sz="1803" b="1">
-                <a:solidFill>
-                  <a:srgbClr val="000000"/>
-                </a:solidFill>
-                <a:latin typeface="Play"/>
-                <a:ea typeface="Play"/>
-                <a:cs typeface="Play"/>
-              </a:defRPr>
-            </a:pPr>
-            <a:r>
-              <a:rPr sz="1803" b="1">
-                <a:solidFill>
-                  <a:srgbClr val="000000"/>
-                </a:solidFill>
-                <a:latin typeface="Play"/>
-                <a:ea typeface="Play"/>
-                <a:cs typeface="Play"/>
-              </a:rPr>
-              <a:t>• 68 презентаций собраны за 6 недель пилота</a:t>
-            </a:r>
-          </a:p>
-          <a:p>
-            <a:pPr algn="l">
-              <a:spcAft>
-                <a:spcPts val="300"/>
-              </a:spcAft>
-              <a:defRPr sz="1803" b="1">
-                <a:solidFill>
-                  <a:srgbClr val="000000"/>
-                </a:solidFill>
-                <a:latin typeface="Play"/>
-                <a:ea typeface="Play"/>
-                <a:cs typeface="Play"/>
-              </a:defRPr>
-            </a:pPr>
-            <a:r>
-              <a:rPr sz="1803" b="1">
-                <a:solidFill>
-                  <a:srgbClr val="000000"/>
-                </a:solidFill>
-                <a:latin typeface="Play"/>
-                <a:ea typeface="Play"/>
-                <a:cs typeface="Play"/>
-              </a:rPr>
-              <a:t>• Средняя сборка 12 слайдов теперь 4 минуты</a:t>
-            </a:r>
-          </a:p>
-          <a:p>
-            <a:pPr algn="l">
-              <a:spcAft>
-                <a:spcPts val="300"/>
-              </a:spcAft>
-              <a:defRPr sz="1803" b="1">
-                <a:solidFill>
-                  <a:srgbClr val="000000"/>
-                </a:solidFill>
-                <a:latin typeface="Play"/>
-                <a:ea typeface="Play"/>
-                <a:cs typeface="Play"/>
-              </a:defRPr>
-            </a:pPr>
-            <a:r>
-              <a:rPr sz="1803" b="1">
-                <a:solidFill>
-                  <a:srgbClr val="000000"/>
-                </a:solidFill>
-                <a:latin typeface="Play"/>
-                <a:ea typeface="Play"/>
-                <a:cs typeface="Play"/>
-              </a:rPr>
-              <a:t>• Время до первой версии сократилось с 6 дней до 1</a:t>
-            </a:r>
-          </a:p>
-          <a:p>
-            <a:pPr algn="l">
-              <a:spcAft>
-                <a:spcPts val="300"/>
-              </a:spcAft>
-              <a:defRPr sz="1803" b="1">
-                <a:solidFill>
-                  <a:srgbClr val="000000"/>
-                </a:solidFill>
-                <a:latin typeface="Play"/>
-                <a:ea typeface="Play"/>
-                <a:cs typeface="Play"/>
-              </a:defRPr>
-            </a:pPr>
-            <a:r>
-              <a:rPr sz="1803" b="1">
-                <a:solidFill>
-                  <a:srgbClr val="000000"/>
-                </a:solidFill>
-                <a:latin typeface="Play"/>
-                <a:ea typeface="Play"/>
-                <a:cs typeface="Play"/>
-              </a:rPr>
-              <a:t>• Нарушений фирменного стиля 2 из 68, исправлены автоматически</a:t>
-            </a:r>
-          </a:p>
-          <a:p>
-            <a:pPr algn="l">
-              <a:spcAft>
-                <a:spcPts val="300"/>
-              </a:spcAft>
-              <a:defRPr sz="1803" b="1">
-                <a:solidFill>
-                  <a:srgbClr val="000000"/>
-                </a:solidFill>
-                <a:latin typeface="Play"/>
-                <a:ea typeface="Play"/>
-                <a:cs typeface="Play"/>
-              </a:defRPr>
-            </a:pPr>
-            <a:r>
-              <a:rPr sz="1803" b="1">
-                <a:solidFill>
-                  <a:srgbClr val="000000"/>
-                </a:solidFill>
-                <a:latin typeface="Play"/>
-                <a:ea typeface="Play"/>
-                <a:cs typeface="Play"/>
-              </a:rPr>
-              <a:t>• Дизайнеры закрыли 38 запросов вместо 11 в неделю</a:t>
-            </a:r>
-          </a:p>
-        </p:txBody>
-      </p:sp>
-    </p:spTree>
-  </p:cSld>
-  <p:clrMapOvr>
-    <a:masterClrMapping/>
-  </p:clrMapOvr>
-</p:sld>
-</file>
-
-<file path=ppt/slides/slide59.xml><?xml version="1.0" encoding="utf-8"?>
-<p:sld xmlns:a="http://schemas.openxmlformats.org/drawingml/2006/main" xmlns:p="http://schemas.openxmlformats.org/presentationml/2006/main" xmlns:r="http://schemas.openxmlformats.org/officeDocument/2006/relationships">
-  <p:cSld>
-    <p:spTree>
-      <p:nvGrpSpPr>
-        <p:cNvPr id="1" name=""/>
-        <p:cNvGrpSpPr/>
-        <p:nvPr/>
-      </p:nvGrpSpPr>
-      <p:grpSpPr/>
-      <p:pic>
-        <p:nvPicPr>
-          <p:cNvPr descr=" " id="2385" name="Google Shape;2385;p88"/>
-          <p:cNvPicPr preferRelativeResize="0"/>
-          <p:nvPr/>
-        </p:nvPicPr>
-        <p:blipFill rotWithShape="1">
-          <a:blip r:embed="rId2">
-            <a:alphaModFix/>
-          </a:blip>
-          <a:srcRect b="0" l="0" r="0" t="0"/>
-          <a:stretch/>
-        </p:blipFill>
-        <p:spPr>
-          <a:xfrm>
-            <a:off x="388142" y="2000324"/>
-            <a:ext cx="8755811" cy="9524"/>
-          </a:xfrm>
-          <a:prstGeom prst="rect">
-            <a:avLst/>
-          </a:prstGeom>
-          <a:noFill/>
-          <a:ln>
-            <a:noFill/>
-          </a:ln>
-        </p:spPr>
-      </p:pic>
-      <p:sp>
-        <p:nvSpPr>
-          <p:cNvPr id="2386" name="Google Shape;2386;p88"/>
-          <p:cNvSpPr/>
-          <p:nvPr/>
-        </p:nvSpPr>
-        <p:spPr>
-          <a:xfrm>
-            <a:off x="319086" y="1286042"/>
-            <a:ext cx="1690679" cy="1128566"/>
-          </a:xfrm>
-          <a:prstGeom prst="rect">
-            <a:avLst/>
-          </a:prstGeom>
-          <a:noFill/>
-          <a:ln>
-            <a:noFill/>
-          </a:ln>
-        </p:spPr>
-        <p:txBody>
-          <a:bodyPr anchorCtr="0" anchor="ctr" bIns="91425" lIns="91425" spcFirstLastPara="1" rIns="91425" wrap="square" tIns="91425">
-            <a:noAutofit/>
-          </a:bodyPr>
-          <a:lstStyle/>
-          <a:p>
-            <a:pPr indent="0" lvl="0" marL="0" rtl="0" algn="l">
-              <a:spcBef>
-                <a:spcPts val="0"/>
-              </a:spcBef>
-              <a:spcAft>
-                <a:spcPts val="0"/>
-              </a:spcAft>
-              <a:buNone/>
-            </a:pPr>
-            <a:r>
-              <a:t/>
-            </a:r>
-            <a:endParaRPr/>
-          </a:p>
-        </p:txBody>
-      </p:sp>
-      <p:sp>
-        <p:nvSpPr>
-          <p:cNvPr id="2387" name="Google Shape;2387;p88"/>
-          <p:cNvSpPr/>
-          <p:nvPr/>
-        </p:nvSpPr>
-        <p:spPr>
-          <a:xfrm>
-            <a:off x="319086" y="1933658"/>
-            <a:ext cx="138112" cy="138095"/>
-          </a:xfrm>
-          <a:prstGeom prst="ellipse">
-            <a:avLst/>
-          </a:prstGeom>
-          <a:solidFill>
-            <a:srgbClr val="0077FF"/>
-          </a:solidFill>
-          <a:ln>
-            <a:noFill/>
-          </a:ln>
-        </p:spPr>
-        <p:txBody>
-          <a:bodyPr anchorCtr="0" anchor="ctr" bIns="91425" lIns="91425" spcFirstLastPara="1" rIns="91425" wrap="square" tIns="91425">
-            <a:noAutofit/>
-          </a:bodyPr>
-          <a:lstStyle/>
-          <a:p>
-            <a:pPr indent="0" lvl="0" marL="0" rtl="0" algn="l">
-              <a:spcBef>
-                <a:spcPts val="0"/>
-              </a:spcBef>
-              <a:spcAft>
-                <a:spcPts val="0"/>
-              </a:spcAft>
-              <a:buNone/>
-            </a:pPr>
-            <a:r>
-              <a:t/>
-            </a:r>
-            <a:endParaRPr/>
-          </a:p>
-        </p:txBody>
-      </p:sp>
-      <p:sp>
-        <p:nvSpPr>
-          <p:cNvPr id="2388" name="Google Shape;2388;p88"/>
-          <p:cNvSpPr/>
-          <p:nvPr/>
-        </p:nvSpPr>
-        <p:spPr>
-          <a:xfrm>
-            <a:off x="2600312" y="1286042"/>
-            <a:ext cx="1690679" cy="1128566"/>
-          </a:xfrm>
-          <a:prstGeom prst="rect">
-            <a:avLst/>
-          </a:prstGeom>
-          <a:noFill/>
-          <a:ln>
-            <a:noFill/>
-          </a:ln>
-        </p:spPr>
-        <p:txBody>
-          <a:bodyPr anchorCtr="0" anchor="ctr" bIns="91425" lIns="91425" spcFirstLastPara="1" rIns="91425" wrap="square" tIns="91425">
-            <a:noAutofit/>
-          </a:bodyPr>
-          <a:lstStyle/>
-          <a:p>
-            <a:pPr indent="0" lvl="0" marL="0" rtl="0" algn="l">
-              <a:spcBef>
-                <a:spcPts val="0"/>
-              </a:spcBef>
-              <a:spcAft>
-                <a:spcPts val="0"/>
-              </a:spcAft>
-              <a:buNone/>
-            </a:pPr>
-            <a:r>
-              <a:t/>
-            </a:r>
-            <a:endParaRPr/>
-          </a:p>
-        </p:txBody>
-      </p:sp>
-      <p:sp>
-        <p:nvSpPr>
-          <p:cNvPr id="2389" name="Google Shape;2389;p88"/>
-          <p:cNvSpPr/>
-          <p:nvPr/>
-        </p:nvSpPr>
-        <p:spPr>
-          <a:xfrm>
-            <a:off x="2600312" y="1933658"/>
-            <a:ext cx="138112" cy="138095"/>
-          </a:xfrm>
-          <a:prstGeom prst="ellipse">
-            <a:avLst/>
-          </a:prstGeom>
-          <a:solidFill>
-            <a:srgbClr val="0077FF"/>
-          </a:solidFill>
-          <a:ln>
-            <a:noFill/>
-          </a:ln>
-        </p:spPr>
-        <p:txBody>
-          <a:bodyPr anchorCtr="0" anchor="ctr" bIns="91425" lIns="91425" spcFirstLastPara="1" rIns="91425" wrap="square" tIns="91425">
-            <a:noAutofit/>
-          </a:bodyPr>
-          <a:lstStyle/>
-          <a:p>
-            <a:pPr indent="0" lvl="0" marL="0" rtl="0" algn="l">
-              <a:spcBef>
-                <a:spcPts val="0"/>
-              </a:spcBef>
-              <a:spcAft>
-                <a:spcPts val="0"/>
-              </a:spcAft>
-              <a:buNone/>
-            </a:pPr>
-            <a:r>
-              <a:t/>
-            </a:r>
-            <a:endParaRPr/>
-          </a:p>
-        </p:txBody>
-      </p:sp>
-      <p:sp>
-        <p:nvSpPr>
-          <p:cNvPr id="2390" name="Google Shape;2390;p88"/>
-          <p:cNvSpPr/>
-          <p:nvPr/>
-        </p:nvSpPr>
-        <p:spPr>
-          <a:xfrm>
-            <a:off x="4881537" y="1286042"/>
-            <a:ext cx="1690679" cy="1128566"/>
-          </a:xfrm>
-          <a:prstGeom prst="rect">
-            <a:avLst/>
-          </a:prstGeom>
-          <a:noFill/>
-          <a:ln>
-            <a:noFill/>
-          </a:ln>
-        </p:spPr>
-        <p:txBody>
-          <a:bodyPr anchorCtr="0" anchor="ctr" bIns="91425" lIns="91425" spcFirstLastPara="1" rIns="91425" wrap="square" tIns="91425">
-            <a:noAutofit/>
-          </a:bodyPr>
-          <a:lstStyle/>
-          <a:p>
-            <a:pPr indent="0" lvl="0" marL="0" rtl="0" algn="l">
-              <a:spcBef>
-                <a:spcPts val="0"/>
-              </a:spcBef>
-              <a:spcAft>
-                <a:spcPts val="0"/>
-              </a:spcAft>
-              <a:buNone/>
-            </a:pPr>
-            <a:r>
-              <a:t/>
-            </a:r>
-            <a:endParaRPr/>
-          </a:p>
-        </p:txBody>
-      </p:sp>
-      <p:sp>
-        <p:nvSpPr>
-          <p:cNvPr id="2391" name="Google Shape;2391;p88"/>
-          <p:cNvSpPr/>
-          <p:nvPr/>
-        </p:nvSpPr>
-        <p:spPr>
-          <a:xfrm>
-            <a:off x="4881537" y="1933658"/>
-            <a:ext cx="138112" cy="138095"/>
-          </a:xfrm>
-          <a:prstGeom prst="ellipse">
-            <a:avLst/>
-          </a:prstGeom>
-          <a:solidFill>
-            <a:srgbClr val="0077FF"/>
-          </a:solidFill>
-          <a:ln>
-            <a:noFill/>
-          </a:ln>
-        </p:spPr>
-        <p:txBody>
-          <a:bodyPr anchorCtr="0" anchor="ctr" bIns="91425" lIns="91425" spcFirstLastPara="1" rIns="91425" wrap="square" tIns="91425">
-            <a:noAutofit/>
-          </a:bodyPr>
-          <a:lstStyle/>
-          <a:p>
-            <a:pPr indent="0" lvl="0" marL="0" rtl="0" algn="l">
-              <a:spcBef>
-                <a:spcPts val="0"/>
-              </a:spcBef>
-              <a:spcAft>
-                <a:spcPts val="0"/>
-              </a:spcAft>
-              <a:buNone/>
-            </a:pPr>
-            <a:r>
-              <a:t/>
-            </a:r>
-            <a:endParaRPr/>
-          </a:p>
-        </p:txBody>
-      </p:sp>
-      <p:sp>
-        <p:nvSpPr>
-          <p:cNvPr id="2392" name="Google Shape;2392;p88"/>
-          <p:cNvSpPr/>
-          <p:nvPr/>
-        </p:nvSpPr>
-        <p:spPr>
-          <a:xfrm>
-            <a:off x="7162763" y="1286042"/>
-            <a:ext cx="1690679" cy="1128566"/>
-          </a:xfrm>
-          <a:prstGeom prst="rect">
-            <a:avLst/>
-          </a:prstGeom>
-          <a:noFill/>
-          <a:ln>
-            <a:noFill/>
-          </a:ln>
-        </p:spPr>
-        <p:txBody>
-          <a:bodyPr anchorCtr="0" anchor="ctr" bIns="91425" lIns="91425" spcFirstLastPara="1" rIns="91425" wrap="square" tIns="91425">
-            <a:noAutofit/>
-          </a:bodyPr>
-          <a:lstStyle/>
-          <a:p>
-            <a:pPr indent="0" lvl="0" marL="0" rtl="0" algn="l">
-              <a:spcBef>
-                <a:spcPts val="0"/>
-              </a:spcBef>
-              <a:spcAft>
-                <a:spcPts val="0"/>
-              </a:spcAft>
-              <a:buNone/>
-            </a:pPr>
-            <a:r>
-              <a:t/>
-            </a:r>
-            <a:endParaRPr/>
-          </a:p>
-        </p:txBody>
-      </p:sp>
-      <p:sp>
-        <p:nvSpPr>
-          <p:cNvPr id="2393" name="Google Shape;2393;p88"/>
-          <p:cNvSpPr/>
-          <p:nvPr/>
-        </p:nvSpPr>
-        <p:spPr>
-          <a:xfrm>
-            <a:off x="7162763" y="1933658"/>
-            <a:ext cx="138112" cy="138095"/>
-          </a:xfrm>
-          <a:prstGeom prst="ellipse">
-            <a:avLst/>
-          </a:prstGeom>
-          <a:solidFill>
-            <a:srgbClr val="0077FF"/>
-          </a:solidFill>
-          <a:ln>
-            <a:noFill/>
-          </a:ln>
-        </p:spPr>
-        <p:txBody>
-          <a:bodyPr anchorCtr="0" anchor="ctr" bIns="91425" lIns="91425" spcFirstLastPara="1" rIns="91425" wrap="square" tIns="91425">
-            <a:noAutofit/>
-          </a:bodyPr>
-          <a:lstStyle/>
-          <a:p>
-            <a:pPr indent="0" lvl="0" marL="0" rtl="0" algn="l">
-              <a:spcBef>
-                <a:spcPts val="0"/>
-              </a:spcBef>
-              <a:spcAft>
-                <a:spcPts val="0"/>
-              </a:spcAft>
-              <a:buNone/>
-            </a:pPr>
-            <a:r>
-              <a:t/>
-            </a:r>
-            <a:endParaRPr/>
-          </a:p>
-        </p:txBody>
-      </p:sp>
-      <p:pic>
-        <p:nvPicPr>
-          <p:cNvPr descr=" " id="2394" name="Google Shape;2394;p88"/>
-          <p:cNvPicPr preferRelativeResize="0"/>
-          <p:nvPr/>
-        </p:nvPicPr>
-        <p:blipFill rotWithShape="1">
-          <a:blip r:embed="rId3">
-            <a:alphaModFix/>
-          </a:blip>
-          <a:srcRect b="0" l="0" r="0" t="0"/>
-          <a:stretch/>
-        </p:blipFill>
-        <p:spPr>
-          <a:xfrm>
-            <a:off x="1" y="3684300"/>
-            <a:ext cx="7238962" cy="70126"/>
-          </a:xfrm>
-          <a:prstGeom prst="rect">
-            <a:avLst/>
-          </a:prstGeom>
-          <a:noFill/>
-          <a:ln>
-            <a:noFill/>
-          </a:ln>
-        </p:spPr>
-      </p:pic>
-      <p:sp>
-        <p:nvSpPr>
-          <p:cNvPr id="2396" name="Google Shape;2396;p88"/>
-          <p:cNvSpPr/>
-          <p:nvPr/>
-        </p:nvSpPr>
-        <p:spPr>
-          <a:xfrm>
-            <a:off x="319086" y="3647935"/>
-            <a:ext cx="138112" cy="138095"/>
-          </a:xfrm>
-          <a:prstGeom prst="ellipse">
-            <a:avLst/>
-          </a:prstGeom>
-          <a:solidFill>
-            <a:srgbClr val="0077FF"/>
-          </a:solidFill>
-          <a:ln>
-            <a:noFill/>
-          </a:ln>
-        </p:spPr>
-        <p:txBody>
-          <a:bodyPr anchorCtr="0" anchor="ctr" bIns="91425" lIns="91425" spcFirstLastPara="1" rIns="91425" wrap="square" tIns="91425">
-            <a:noAutofit/>
-          </a:bodyPr>
-          <a:lstStyle/>
-          <a:p>
-            <a:pPr indent="0" lvl="0" marL="0" rtl="0" algn="l">
-              <a:spcBef>
-                <a:spcPts val="0"/>
-              </a:spcBef>
-              <a:spcAft>
-                <a:spcPts val="0"/>
-              </a:spcAft>
-              <a:buNone/>
-            </a:pPr>
-            <a:r>
-              <a:t/>
-            </a:r>
-            <a:endParaRPr/>
-          </a:p>
-        </p:txBody>
-      </p:sp>
-      <p:sp>
-        <p:nvSpPr>
-          <p:cNvPr id="2398" name="Google Shape;2398;p88"/>
-          <p:cNvSpPr/>
-          <p:nvPr/>
-        </p:nvSpPr>
-        <p:spPr>
-          <a:xfrm>
-            <a:off x="2600312" y="3647935"/>
-            <a:ext cx="138112" cy="138095"/>
-          </a:xfrm>
-          <a:prstGeom prst="ellipse">
-            <a:avLst/>
-          </a:prstGeom>
-          <a:solidFill>
-            <a:srgbClr val="0077FF"/>
-          </a:solidFill>
-          <a:ln>
-            <a:noFill/>
-          </a:ln>
-        </p:spPr>
-        <p:txBody>
-          <a:bodyPr anchorCtr="0" anchor="ctr" bIns="91425" lIns="91425" spcFirstLastPara="1" rIns="91425" wrap="square" tIns="91425">
-            <a:noAutofit/>
-          </a:bodyPr>
-          <a:lstStyle/>
-          <a:p>
-            <a:pPr indent="0" lvl="0" marL="0" rtl="0" algn="l">
-              <a:spcBef>
-                <a:spcPts val="0"/>
-              </a:spcBef>
-              <a:spcAft>
-                <a:spcPts val="0"/>
-              </a:spcAft>
-              <a:buNone/>
-            </a:pPr>
-            <a:r>
-              <a:t/>
-            </a:r>
-            <a:endParaRPr/>
-          </a:p>
-        </p:txBody>
-      </p:sp>
-      <p:sp>
-        <p:nvSpPr>
-          <p:cNvPr id="2400" name="Google Shape;2400;p88"/>
-          <p:cNvSpPr/>
-          <p:nvPr/>
-        </p:nvSpPr>
-        <p:spPr>
-          <a:xfrm>
-            <a:off x="4881537" y="3647935"/>
-            <a:ext cx="138112" cy="138095"/>
-          </a:xfrm>
-          <a:prstGeom prst="ellipse">
-            <a:avLst/>
-          </a:prstGeom>
-          <a:solidFill>
-            <a:srgbClr val="0077FF"/>
-          </a:solidFill>
-          <a:ln>
-            <a:noFill/>
-          </a:ln>
-        </p:spPr>
-        <p:txBody>
-          <a:bodyPr anchorCtr="0" anchor="ctr" bIns="91425" lIns="91425" spcFirstLastPara="1" rIns="91425" wrap="square" tIns="91425">
-            <a:noAutofit/>
-          </a:bodyPr>
-          <a:lstStyle/>
-          <a:p>
-            <a:pPr indent="0" lvl="0" marL="0" rtl="0" algn="l">
-              <a:spcBef>
-                <a:spcPts val="0"/>
-              </a:spcBef>
-              <a:spcAft>
-                <a:spcPts val="0"/>
-              </a:spcAft>
-              <a:buNone/>
-            </a:pPr>
-            <a:r>
-              <a:t/>
-            </a:r>
-            <a:endParaRPr/>
-          </a:p>
-        </p:txBody>
-      </p:sp>
-      <p:sp>
-        <p:nvSpPr>
-          <p:cNvPr id="2401" name="title"/>
-          <p:cNvSpPr txBox="1"/>
-          <p:nvPr/>
-        </p:nvSpPr>
-        <p:spPr>
-          <a:xfrm>
-            <a:off x="274320" y="282943"/>
-            <a:ext cx="6792986" cy="617220"/>
-          </a:xfrm>
-          <a:prstGeom prst="rect">
-            <a:avLst/>
-          </a:prstGeom>
-          <a:noFill/>
-        </p:spPr>
-        <p:txBody>
-          <a:bodyPr wrap="square" lIns="76200" rIns="76200" tIns="50800" bIns="50800">
-            <a:spAutoFit/>
-          </a:bodyPr>
-          <a:lstStyle/>
-          <a:p>
-            <a:pPr algn="l">
-              <a:spcAft>
-                <a:spcPts val="300"/>
-              </a:spcAft>
-              <a:defRPr sz="2400">
-                <a:solidFill>
-                  <a:srgbClr val="000000"/>
-                </a:solidFill>
-                <a:latin typeface="Play"/>
-                <a:ea typeface="Play"/>
-                <a:cs typeface="Play"/>
-              </a:defRPr>
-            </a:pPr>
-            <a:r>
-              <a:rPr sz="2400">
-                <a:solidFill>
-                  <a:srgbClr val="000000"/>
-                </a:solidFill>
-                <a:latin typeface="Play"/>
-                <a:ea typeface="Play"/>
-                <a:cs typeface="Play"/>
-              </a:rPr>
-              <a:t>Сравнение времени сборки</a:t>
-            </a:r>
-          </a:p>
-        </p:txBody>
-      </p:sp>
-      <p:graphicFrame>
-        <p:nvGraphicFramePr>
-          <p:cNvPr id="2402" name="Chart 2401"/>
-          <p:cNvGraphicFramePr>
-            <a:graphicFrameLocks noGrp="1"/>
-          </p:cNvGraphicFramePr>
-          <p:nvPr/>
-        </p:nvGraphicFramePr>
-        <p:xfrm>
-          <a:off x="274320" y="2071750"/>
-          <a:ext cx="8344814" cy="1576174"/>
-        </p:xfrm>
-        <a:graphic>
-          <a:graphicData uri="http://schemas.openxmlformats.org/drawingml/2006/chart">
-            <c:chart xmlns:c="http://schemas.openxmlformats.org/drawingml/2006/chart" r:id="rId4"/>
-          </a:graphicData>
-        </a:graphic>
-      </p:graphicFrame>
-    </p:spTree>
-  </p:cSld>
-  <p:clrMapOvr>
-    <a:masterClrMapping/>
-  </p:clrMapOvr>
-</p:sld>
-</file>
-
-<file path=ppt/slides/slide60.xml><?xml version="1.0" encoding="utf-8"?>
-<p:sld xmlns:a="http://schemas.openxmlformats.org/drawingml/2006/main" xmlns:p="http://schemas.openxmlformats.org/presentationml/2006/main" xmlns:r="http://schemas.openxmlformats.org/officeDocument/2006/relationships">
-  <p:cSld>
-    <p:spTree>
-      <p:nvGrpSpPr>
-        <p:cNvPr id="1" name=""/>
-        <p:cNvGrpSpPr/>
-        <p:nvPr/>
-      </p:nvGrpSpPr>
-      <p:grpSpPr/>
-      <p:pic>
-        <p:nvPicPr>
-          <p:cNvPr descr=" " id="2428" name="Google Shape;2428;p89"/>
-          <p:cNvPicPr preferRelativeResize="0"/>
-          <p:nvPr/>
-        </p:nvPicPr>
-        <p:blipFill rotWithShape="1">
-          <a:blip r:embed="rId2">
-            <a:alphaModFix/>
-          </a:blip>
-          <a:srcRect b="0" l="0" r="0" t="0"/>
-          <a:stretch/>
-        </p:blipFill>
-        <p:spPr>
-          <a:xfrm>
-            <a:off x="0" y="2732082"/>
-            <a:ext cx="8515008" cy="92615"/>
-          </a:xfrm>
-          <a:prstGeom prst="rect">
-            <a:avLst/>
-          </a:prstGeom>
-          <a:noFill/>
-          <a:ln>
-            <a:noFill/>
-          </a:ln>
-        </p:spPr>
-      </p:pic>
-      <p:sp>
-        <p:nvSpPr>
-          <p:cNvPr id="2430" name="Google Shape;2430;p89"/>
-          <p:cNvSpPr/>
-          <p:nvPr/>
-        </p:nvSpPr>
-        <p:spPr>
-          <a:xfrm>
-            <a:off x="553415" y="2684063"/>
-            <a:ext cx="182375" cy="182352"/>
-          </a:xfrm>
-          <a:prstGeom prst="ellipse">
-            <a:avLst/>
-          </a:prstGeom>
-          <a:solidFill>
-            <a:srgbClr val="0077FF"/>
-          </a:solidFill>
-          <a:ln>
-            <a:noFill/>
-          </a:ln>
-        </p:spPr>
-        <p:txBody>
-          <a:bodyPr anchorCtr="0" anchor="ctr" bIns="91425" lIns="91425" spcFirstLastPara="1" rIns="91425" wrap="square" tIns="91425">
-            <a:noAutofit/>
-          </a:bodyPr>
-          <a:lstStyle/>
-          <a:p>
-            <a:pPr indent="0" lvl="0" marL="0" rtl="0" algn="l">
-              <a:spcBef>
-                <a:spcPts val="0"/>
-              </a:spcBef>
-              <a:spcAft>
-                <a:spcPts val="0"/>
-              </a:spcAft>
-              <a:buNone/>
-            </a:pPr>
-            <a:r>
-              <a:t/>
-            </a:r>
-            <a:endParaRPr/>
-          </a:p>
-        </p:txBody>
-      </p:sp>
-      <p:sp>
-        <p:nvSpPr>
-          <p:cNvPr id="2432" name="Google Shape;2432;p89"/>
-          <p:cNvSpPr/>
-          <p:nvPr/>
-        </p:nvSpPr>
-        <p:spPr>
-          <a:xfrm>
-            <a:off x="3565736" y="2684063"/>
-            <a:ext cx="182375" cy="182352"/>
-          </a:xfrm>
-          <a:prstGeom prst="ellipse">
-            <a:avLst/>
-          </a:prstGeom>
-          <a:solidFill>
-            <a:srgbClr val="0077FF"/>
-          </a:solidFill>
-          <a:ln>
-            <a:noFill/>
-          </a:ln>
-        </p:spPr>
-        <p:txBody>
-          <a:bodyPr anchorCtr="0" anchor="ctr" bIns="91425" lIns="91425" spcFirstLastPara="1" rIns="91425" wrap="square" tIns="91425">
-            <a:noAutofit/>
-          </a:bodyPr>
-          <a:lstStyle/>
-          <a:p>
-            <a:pPr indent="0" lvl="0" marL="0" rtl="0" algn="l">
-              <a:spcBef>
-                <a:spcPts val="0"/>
-              </a:spcBef>
-              <a:spcAft>
-                <a:spcPts val="0"/>
-              </a:spcAft>
-              <a:buNone/>
-            </a:pPr>
-            <a:r>
-              <a:t/>
-            </a:r>
-            <a:endParaRPr/>
-          </a:p>
-        </p:txBody>
-      </p:sp>
-      <p:sp>
-        <p:nvSpPr>
-          <p:cNvPr id="2434" name="Google Shape;2434;p89"/>
-          <p:cNvSpPr/>
-          <p:nvPr/>
-        </p:nvSpPr>
-        <p:spPr>
-          <a:xfrm>
-            <a:off x="6578067" y="2684063"/>
-            <a:ext cx="182375" cy="182352"/>
-          </a:xfrm>
-          <a:prstGeom prst="ellipse">
-            <a:avLst/>
-          </a:prstGeom>
-          <a:solidFill>
-            <a:srgbClr val="0077FF"/>
-          </a:solidFill>
-          <a:ln>
-            <a:noFill/>
-          </a:ln>
-        </p:spPr>
-        <p:txBody>
-          <a:bodyPr anchorCtr="0" anchor="ctr" bIns="91425" lIns="91425" spcFirstLastPara="1" rIns="91425" wrap="square" tIns="91425">
-            <a:noAutofit/>
-          </a:bodyPr>
-          <a:lstStyle/>
-          <a:p>
-            <a:pPr indent="0" lvl="0" marL="0" rtl="0" algn="l">
-              <a:spcBef>
-                <a:spcPts val="0"/>
-              </a:spcBef>
-              <a:spcAft>
-                <a:spcPts val="0"/>
-              </a:spcAft>
-              <a:buNone/>
-            </a:pPr>
-            <a:r>
-              <a:t/>
-            </a:r>
-            <a:endParaRPr/>
-          </a:p>
-        </p:txBody>
-      </p:sp>
-      <p:sp>
-        <p:nvSpPr>
-          <p:cNvPr id="2435" name="title"/>
-          <p:cNvSpPr txBox="1"/>
-          <p:nvPr/>
-        </p:nvSpPr>
-        <p:spPr>
-          <a:xfrm>
-            <a:off x="274320" y="282943"/>
-            <a:ext cx="6792986" cy="617220"/>
-          </a:xfrm>
-          <a:prstGeom prst="rect">
-            <a:avLst/>
-          </a:prstGeom>
-          <a:noFill/>
-        </p:spPr>
-        <p:txBody>
-          <a:bodyPr wrap="square" lIns="76200" rIns="76200" tIns="50800" bIns="50800">
-            <a:spAutoFit/>
-          </a:bodyPr>
-          <a:lstStyle/>
-          <a:p>
-            <a:pPr algn="l">
-              <a:spcAft>
-                <a:spcPts val="300"/>
-              </a:spcAft>
-              <a:defRPr sz="2400">
-                <a:solidFill>
-                  <a:srgbClr val="000000"/>
-                </a:solidFill>
-                <a:latin typeface="Play"/>
-                <a:ea typeface="Play"/>
-                <a:cs typeface="Play"/>
-              </a:defRPr>
-            </a:pPr>
-            <a:r>
-              <a:rPr sz="2400">
-                <a:solidFill>
-                  <a:srgbClr val="000000"/>
-                </a:solidFill>
-                <a:latin typeface="Play"/>
-                <a:ea typeface="Play"/>
-                <a:cs typeface="Play"/>
-              </a:rPr>
-              <a:t>Сравнение времени до первой версии</a:t>
-            </a:r>
-          </a:p>
-        </p:txBody>
-      </p:sp>
-      <p:graphicFrame>
-        <p:nvGraphicFramePr>
-          <p:cNvPr id="2436" name="Chart 2435"/>
-          <p:cNvGraphicFramePr>
-            <a:graphicFrameLocks noGrp="1"/>
-          </p:cNvGraphicFramePr>
-          <p:nvPr/>
-        </p:nvGraphicFramePr>
-        <p:xfrm>
-          <a:off x="274320" y="1414513"/>
-          <a:ext cx="8344814" cy="1269570"/>
-        </p:xfrm>
-        <a:graphic>
-          <a:graphicData uri="http://schemas.openxmlformats.org/drawingml/2006/chart">
-            <c:chart xmlns:c="http://schemas.openxmlformats.org/drawingml/2006/chart" r:id="rId3"/>
-          </a:graphicData>
-        </a:graphic>
-      </p:graphicFrame>
-    </p:spTree>
-  </p:cSld>
-  <p:clrMapOvr>
-    <a:masterClrMapping/>
-  </p:clrMapOvr>
-</p:sld>
-</file>
-
-<file path=ppt/slides/slide61.xml><?xml version="1.0" encoding="utf-8"?>
-<p:sld xmlns:a="http://schemas.openxmlformats.org/drawingml/2006/main" xmlns:p="http://schemas.openxmlformats.org/presentationml/2006/main" xmlns:r="http://schemas.openxmlformats.org/officeDocument/2006/relationships">
-  <p:cSld>
-    <p:spTree>
-      <p:nvGrpSpPr>
-        <p:cNvPr id="1" name=""/>
-        <p:cNvGrpSpPr/>
-        <p:nvPr/>
-      </p:nvGrpSpPr>
-      <p:grpSpPr/>
-      <p:sp>
-        <p:nvSpPr>
-          <p:cNvPr id="662" name="Google Shape;662;p55"/>
-          <p:cNvSpPr/>
-          <p:nvPr/>
-        </p:nvSpPr>
-        <p:spPr>
-          <a:xfrm>
-            <a:off x="8667705" y="4666977"/>
-            <a:ext cx="190499" cy="190475"/>
-          </a:xfrm>
-          <a:prstGeom prst="rect">
-            <a:avLst/>
-          </a:prstGeom>
-          <a:noFill/>
-          <a:ln>
-            <a:noFill/>
-          </a:ln>
-        </p:spPr>
-        <p:txBody>
-          <a:bodyPr anchorCtr="0" anchor="ctr" bIns="91425" lIns="91425" spcFirstLastPara="1" rIns="91425" wrap="square" tIns="91425">
-            <a:noAutofit/>
-          </a:bodyPr>
-          <a:lstStyle/>
-          <a:p>
-            <a:pPr indent="0" lvl="0" marL="0" rtl="0" algn="l">
-              <a:spcBef>
-                <a:spcPts val="0"/>
-              </a:spcBef>
-              <a:spcAft>
-                <a:spcPts val="0"/>
-              </a:spcAft>
-              <a:buNone/>
-            </a:pPr>
-            <a:r>
-              <a:t/>
-            </a:r>
-            <a:endParaRPr/>
-          </a:p>
-        </p:txBody>
-      </p:sp>
-      <p:sp>
-        <p:nvSpPr>
-          <p:cNvPr id="663" name="Google Shape;663;p55"/>
-          <p:cNvSpPr/>
-          <p:nvPr/>
-        </p:nvSpPr>
-        <p:spPr>
-          <a:xfrm>
-            <a:off x="285748" y="286047"/>
-            <a:ext cx="8572456" cy="3938075"/>
-          </a:xfrm>
-          <a:prstGeom prst="rect">
-            <a:avLst/>
-          </a:prstGeom>
-          <a:noFill/>
-          <a:ln>
-            <a:noFill/>
-          </a:ln>
-        </p:spPr>
-        <p:txBody>
-          <a:bodyPr anchorCtr="0" anchor="ctr" bIns="91425" lIns="91425" spcFirstLastPara="1" rIns="91425" wrap="square" tIns="91425">
-            <a:noAutofit/>
-          </a:bodyPr>
-          <a:lstStyle/>
-          <a:p>
-            <a:pPr indent="0" lvl="0" marL="0" rtl="0" algn="l">
-              <a:spcBef>
-                <a:spcPts val="0"/>
-              </a:spcBef>
-              <a:spcAft>
-                <a:spcPts val="0"/>
-              </a:spcAft>
-              <a:buNone/>
-            </a:pPr>
-            <a:r>
-              <a:t/>
-            </a:r>
-            <a:endParaRPr/>
-          </a:p>
-        </p:txBody>
-      </p:sp>
-      <p:sp>
-        <p:nvSpPr>
-          <p:cNvPr id="664" name="Google Shape;664;p55"/>
-          <p:cNvSpPr/>
-          <p:nvPr/>
-        </p:nvSpPr>
-        <p:spPr>
-          <a:xfrm>
-            <a:off x="285748" y="1209852"/>
-            <a:ext cx="8572456" cy="3014270"/>
-          </a:xfrm>
-          <a:prstGeom prst="rect">
-            <a:avLst/>
-          </a:prstGeom>
-          <a:noFill/>
-          <a:ln>
-            <a:noFill/>
-          </a:ln>
-        </p:spPr>
-        <p:txBody>
-          <a:bodyPr anchorCtr="0" anchor="ctr" bIns="91425" lIns="91425" spcFirstLastPara="1" rIns="91425" wrap="square" tIns="91425">
-            <a:noAutofit/>
-          </a:bodyPr>
-          <a:lstStyle/>
-          <a:p>
-            <a:pPr indent="0" lvl="0" marL="0" rtl="0" algn="l">
-              <a:spcBef>
-                <a:spcPts val="0"/>
-              </a:spcBef>
-              <a:spcAft>
-                <a:spcPts val="0"/>
-              </a:spcAft>
-              <a:buNone/>
-            </a:pPr>
-            <a:r>
-              <a:t/>
-            </a:r>
-            <a:endParaRPr/>
-          </a:p>
-        </p:txBody>
-      </p:sp>
-      <p:sp>
-        <p:nvSpPr>
-          <p:cNvPr id="665" name="Google Shape;665;p55"/>
-          <p:cNvSpPr/>
-          <p:nvPr/>
-        </p:nvSpPr>
-        <p:spPr>
-          <a:xfrm>
-            <a:off x="285749" y="1209852"/>
-            <a:ext cx="2071677" cy="3014270"/>
-          </a:xfrm>
-          <a:prstGeom prst="roundRect">
-            <a:avLst>
-              <a:gd fmla="val 4634" name="adj"/>
-            </a:avLst>
-          </a:prstGeom>
-          <a:solidFill>
-            <a:schemeClr val="lt2"/>
-          </a:solidFill>
-          <a:ln>
-            <a:noFill/>
-          </a:ln>
-        </p:spPr>
-        <p:txBody>
-          <a:bodyPr anchorCtr="0" anchor="ctr" bIns="91425" lIns="91425" spcFirstLastPara="1" rIns="91425" wrap="square" tIns="91425">
-            <a:noAutofit/>
-          </a:bodyPr>
-          <a:lstStyle/>
-          <a:p>
-            <a:pPr indent="0" lvl="0" marL="0" rtl="0" algn="l">
-              <a:spcBef>
-                <a:spcPts val="0"/>
-              </a:spcBef>
-              <a:spcAft>
-                <a:spcPts val="0"/>
-              </a:spcAft>
-              <a:buNone/>
-            </a:pPr>
-            <a:r>
-              <a:t/>
-            </a:r>
-            <a:endParaRPr/>
-          </a:p>
-        </p:txBody>
-      </p:sp>
-      <p:sp>
-        <p:nvSpPr>
-          <p:cNvPr id="666" name="Google Shape;666;p55"/>
-          <p:cNvSpPr/>
-          <p:nvPr/>
-        </p:nvSpPr>
-        <p:spPr>
-          <a:xfrm>
-            <a:off x="438148" y="1362233"/>
-            <a:ext cx="1766878" cy="342855"/>
-          </a:xfrm>
-          <a:prstGeom prst="rect">
-            <a:avLst/>
-          </a:prstGeom>
-          <a:noFill/>
-          <a:ln>
-            <a:noFill/>
-          </a:ln>
-        </p:spPr>
-        <p:txBody>
-          <a:bodyPr anchorCtr="0" anchor="ctr" bIns="91425" lIns="91425" spcFirstLastPara="1" rIns="91425" wrap="square" tIns="91425">
-            <a:noAutofit/>
-          </a:bodyPr>
-          <a:lstStyle/>
-          <a:p>
-            <a:pPr indent="0" lvl="0" marL="0" rtl="0" algn="l">
-              <a:spcBef>
-                <a:spcPts val="0"/>
-              </a:spcBef>
-              <a:spcAft>
-                <a:spcPts val="0"/>
-              </a:spcAft>
-              <a:buNone/>
-            </a:pPr>
-            <a:r>
-              <a:t/>
-            </a:r>
-            <a:endParaRPr/>
-          </a:p>
-        </p:txBody>
-      </p:sp>
-      <p:sp>
-        <p:nvSpPr>
-          <p:cNvPr id="667" name="Google Shape;667;p55"/>
-          <p:cNvSpPr/>
-          <p:nvPr/>
-        </p:nvSpPr>
-        <p:spPr>
-          <a:xfrm>
-            <a:off x="438148" y="1362233"/>
-            <a:ext cx="76199" cy="76190"/>
-          </a:xfrm>
-          <a:prstGeom prst="roundRect">
-            <a:avLst>
-              <a:gd fmla="val 31500" name="adj"/>
-            </a:avLst>
-          </a:prstGeom>
-          <a:solidFill>
-            <a:srgbClr val="0077FF"/>
-          </a:solidFill>
-          <a:ln>
-            <a:noFill/>
-          </a:ln>
-        </p:spPr>
-        <p:txBody>
-          <a:bodyPr anchorCtr="0" anchor="ctr" bIns="91425" lIns="91425" spcFirstLastPara="1" rIns="91425" wrap="square" tIns="91425">
-            <a:noAutofit/>
-          </a:bodyPr>
-          <a:lstStyle/>
-          <a:p>
-            <a:pPr indent="0" lvl="0" marL="0" rtl="0" algn="l">
-              <a:spcBef>
-                <a:spcPts val="0"/>
-              </a:spcBef>
-              <a:spcAft>
-                <a:spcPts val="0"/>
-              </a:spcAft>
-              <a:buNone/>
-            </a:pPr>
-            <a:r>
-              <a:t/>
-            </a:r>
-            <a:endParaRPr/>
-          </a:p>
-        </p:txBody>
-      </p:sp>
-      <p:sp>
-        <p:nvSpPr>
-          <p:cNvPr id="670" name="Google Shape;670;p55"/>
-          <p:cNvSpPr/>
-          <p:nvPr/>
-        </p:nvSpPr>
-        <p:spPr>
-          <a:xfrm>
-            <a:off x="2452675" y="1209852"/>
-            <a:ext cx="2071677" cy="3014270"/>
-          </a:xfrm>
-          <a:prstGeom prst="roundRect">
-            <a:avLst>
-              <a:gd fmla="val 4634" name="adj"/>
-            </a:avLst>
-          </a:prstGeom>
-          <a:solidFill>
-            <a:schemeClr val="lt2"/>
-          </a:solidFill>
-          <a:ln>
-            <a:noFill/>
-          </a:ln>
-        </p:spPr>
-        <p:txBody>
-          <a:bodyPr anchorCtr="0" anchor="ctr" bIns="91425" lIns="91425" spcFirstLastPara="1" rIns="91425" wrap="square" tIns="91425">
-            <a:noAutofit/>
-          </a:bodyPr>
-          <a:lstStyle/>
-          <a:p>
-            <a:pPr indent="0" lvl="0" marL="0" rtl="0" algn="l">
-              <a:spcBef>
-                <a:spcPts val="0"/>
-              </a:spcBef>
-              <a:spcAft>
-                <a:spcPts val="0"/>
-              </a:spcAft>
-              <a:buNone/>
-            </a:pPr>
-            <a:r>
-              <a:t/>
-            </a:r>
-            <a:endParaRPr/>
-          </a:p>
-        </p:txBody>
-      </p:sp>
-      <p:sp>
-        <p:nvSpPr>
-          <p:cNvPr id="671" name="Google Shape;671;p55"/>
-          <p:cNvSpPr/>
-          <p:nvPr/>
-        </p:nvSpPr>
-        <p:spPr>
-          <a:xfrm>
-            <a:off x="2605074" y="1362233"/>
-            <a:ext cx="1766878" cy="342855"/>
-          </a:xfrm>
-          <a:prstGeom prst="rect">
-            <a:avLst/>
-          </a:prstGeom>
-          <a:noFill/>
-          <a:ln>
-            <a:noFill/>
-          </a:ln>
-        </p:spPr>
-        <p:txBody>
-          <a:bodyPr anchorCtr="0" anchor="ctr" bIns="91425" lIns="91425" spcFirstLastPara="1" rIns="91425" wrap="square" tIns="91425">
-            <a:noAutofit/>
-          </a:bodyPr>
-          <a:lstStyle/>
-          <a:p>
-            <a:pPr indent="0" lvl="0" marL="0" rtl="0" algn="l">
-              <a:spcBef>
-                <a:spcPts val="0"/>
-              </a:spcBef>
-              <a:spcAft>
-                <a:spcPts val="0"/>
-              </a:spcAft>
-              <a:buNone/>
-            </a:pPr>
-            <a:r>
-              <a:t/>
-            </a:r>
-            <a:endParaRPr/>
-          </a:p>
-        </p:txBody>
-      </p:sp>
-      <p:sp>
-        <p:nvSpPr>
-          <p:cNvPr id="672" name="Google Shape;672;p55"/>
-          <p:cNvSpPr/>
-          <p:nvPr/>
-        </p:nvSpPr>
-        <p:spPr>
-          <a:xfrm>
-            <a:off x="2605074" y="1362233"/>
-            <a:ext cx="76199" cy="76190"/>
-          </a:xfrm>
-          <a:prstGeom prst="roundRect">
-            <a:avLst>
-              <a:gd fmla="val 31500" name="adj"/>
-            </a:avLst>
-          </a:prstGeom>
-          <a:solidFill>
-            <a:srgbClr val="0077FF"/>
-          </a:solidFill>
-          <a:ln>
-            <a:noFill/>
-          </a:ln>
-        </p:spPr>
-        <p:txBody>
-          <a:bodyPr anchorCtr="0" anchor="ctr" bIns="91425" lIns="91425" spcFirstLastPara="1" rIns="91425" wrap="square" tIns="91425">
-            <a:noAutofit/>
-          </a:bodyPr>
-          <a:lstStyle/>
-          <a:p>
-            <a:pPr indent="0" lvl="0" marL="0" rtl="0" algn="l">
-              <a:spcBef>
-                <a:spcPts val="0"/>
-              </a:spcBef>
-              <a:spcAft>
-                <a:spcPts val="0"/>
-              </a:spcAft>
-              <a:buNone/>
-            </a:pPr>
-            <a:r>
-              <a:t/>
-            </a:r>
-            <a:endParaRPr/>
-          </a:p>
-        </p:txBody>
-      </p:sp>
-      <p:sp>
-        <p:nvSpPr>
-          <p:cNvPr id="675" name="Google Shape;675;p55"/>
-          <p:cNvSpPr/>
-          <p:nvPr/>
-        </p:nvSpPr>
-        <p:spPr>
-          <a:xfrm>
-            <a:off x="4619601" y="1209852"/>
-            <a:ext cx="2071677" cy="3014270"/>
-          </a:xfrm>
-          <a:prstGeom prst="roundRect">
-            <a:avLst>
-              <a:gd fmla="val 4634" name="adj"/>
-            </a:avLst>
-          </a:prstGeom>
-          <a:solidFill>
-            <a:schemeClr val="lt2"/>
-          </a:solidFill>
-          <a:ln>
-            <a:noFill/>
-          </a:ln>
-        </p:spPr>
-        <p:txBody>
-          <a:bodyPr anchorCtr="0" anchor="ctr" bIns="91425" lIns="91425" spcFirstLastPara="1" rIns="91425" wrap="square" tIns="91425">
-            <a:noAutofit/>
-          </a:bodyPr>
-          <a:lstStyle/>
-          <a:p>
-            <a:pPr indent="0" lvl="0" marL="0" rtl="0" algn="l">
-              <a:spcBef>
-                <a:spcPts val="0"/>
-              </a:spcBef>
-              <a:spcAft>
-                <a:spcPts val="0"/>
-              </a:spcAft>
-              <a:buNone/>
-            </a:pPr>
-            <a:r>
-              <a:t/>
-            </a:r>
-            <a:endParaRPr/>
-          </a:p>
-        </p:txBody>
-      </p:sp>
-      <p:sp>
-        <p:nvSpPr>
-          <p:cNvPr id="676" name="Google Shape;676;p55"/>
-          <p:cNvSpPr/>
-          <p:nvPr/>
-        </p:nvSpPr>
-        <p:spPr>
-          <a:xfrm>
-            <a:off x="4772001" y="1362233"/>
-            <a:ext cx="1766878" cy="342855"/>
-          </a:xfrm>
-          <a:prstGeom prst="rect">
-            <a:avLst/>
-          </a:prstGeom>
-          <a:noFill/>
-          <a:ln>
-            <a:noFill/>
-          </a:ln>
-        </p:spPr>
-        <p:txBody>
-          <a:bodyPr anchorCtr="0" anchor="ctr" bIns="91425" lIns="91425" spcFirstLastPara="1" rIns="91425" wrap="square" tIns="91425">
-            <a:noAutofit/>
-          </a:bodyPr>
-          <a:lstStyle/>
-          <a:p>
-            <a:pPr indent="0" lvl="0" marL="0" rtl="0" algn="l">
-              <a:spcBef>
-                <a:spcPts val="0"/>
-              </a:spcBef>
-              <a:spcAft>
-                <a:spcPts val="0"/>
-              </a:spcAft>
-              <a:buNone/>
-            </a:pPr>
-            <a:r>
-              <a:t/>
-            </a:r>
-            <a:endParaRPr/>
-          </a:p>
-        </p:txBody>
-      </p:sp>
-      <p:sp>
-        <p:nvSpPr>
-          <p:cNvPr id="677" name="Google Shape;677;p55"/>
-          <p:cNvSpPr/>
-          <p:nvPr/>
-        </p:nvSpPr>
-        <p:spPr>
-          <a:xfrm>
-            <a:off x="4772001" y="1362233"/>
-            <a:ext cx="76199" cy="76190"/>
-          </a:xfrm>
-          <a:prstGeom prst="roundRect">
-            <a:avLst>
-              <a:gd fmla="val 31500" name="adj"/>
-            </a:avLst>
-          </a:prstGeom>
-          <a:solidFill>
-            <a:srgbClr val="0077FF"/>
-          </a:solidFill>
-          <a:ln>
-            <a:noFill/>
-          </a:ln>
-        </p:spPr>
-        <p:txBody>
-          <a:bodyPr anchorCtr="0" anchor="ctr" bIns="91425" lIns="91425" spcFirstLastPara="1" rIns="91425" wrap="square" tIns="91425">
-            <a:noAutofit/>
-          </a:bodyPr>
-          <a:lstStyle/>
-          <a:p>
-            <a:pPr indent="0" lvl="0" marL="0" rtl="0" algn="l">
-              <a:spcBef>
-                <a:spcPts val="0"/>
-              </a:spcBef>
-              <a:spcAft>
-                <a:spcPts val="0"/>
-              </a:spcAft>
-              <a:buNone/>
-            </a:pPr>
-            <a:r>
-              <a:t/>
-            </a:r>
-            <a:endParaRPr/>
-          </a:p>
-        </p:txBody>
-      </p:sp>
-      <p:sp>
-        <p:nvSpPr>
-          <p:cNvPr id="680" name="Google Shape;680;p55"/>
-          <p:cNvSpPr/>
-          <p:nvPr/>
-        </p:nvSpPr>
-        <p:spPr>
-          <a:xfrm>
-            <a:off x="6786527" y="1209852"/>
-            <a:ext cx="2071677" cy="3014270"/>
-          </a:xfrm>
-          <a:prstGeom prst="roundRect">
-            <a:avLst>
-              <a:gd fmla="val 4634" name="adj"/>
-            </a:avLst>
-          </a:prstGeom>
-          <a:solidFill>
-            <a:schemeClr val="lt2"/>
-          </a:solidFill>
-          <a:ln>
-            <a:noFill/>
-          </a:ln>
-        </p:spPr>
-        <p:txBody>
-          <a:bodyPr anchorCtr="0" anchor="ctr" bIns="91425" lIns="91425" spcFirstLastPara="1" rIns="91425" wrap="square" tIns="91425">
-            <a:noAutofit/>
-          </a:bodyPr>
-          <a:lstStyle/>
-          <a:p>
-            <a:pPr indent="0" lvl="0" marL="0" rtl="0" algn="l">
-              <a:spcBef>
-                <a:spcPts val="0"/>
-              </a:spcBef>
-              <a:spcAft>
-                <a:spcPts val="0"/>
-              </a:spcAft>
-              <a:buNone/>
-            </a:pPr>
-            <a:r>
-              <a:t/>
-            </a:r>
-            <a:endParaRPr/>
-          </a:p>
-        </p:txBody>
-      </p:sp>
-      <p:sp>
-        <p:nvSpPr>
-          <p:cNvPr id="681" name="Google Shape;681;p55"/>
-          <p:cNvSpPr/>
-          <p:nvPr/>
-        </p:nvSpPr>
-        <p:spPr>
-          <a:xfrm>
-            <a:off x="6938927" y="1362233"/>
-            <a:ext cx="1766878" cy="342855"/>
-          </a:xfrm>
-          <a:prstGeom prst="rect">
-            <a:avLst/>
-          </a:prstGeom>
-          <a:noFill/>
-          <a:ln>
-            <a:noFill/>
-          </a:ln>
-        </p:spPr>
-        <p:txBody>
-          <a:bodyPr anchorCtr="0" anchor="ctr" bIns="91425" lIns="91425" spcFirstLastPara="1" rIns="91425" wrap="square" tIns="91425">
-            <a:noAutofit/>
-          </a:bodyPr>
-          <a:lstStyle/>
-          <a:p>
-            <a:pPr indent="0" lvl="0" marL="0" rtl="0" algn="l">
-              <a:spcBef>
-                <a:spcPts val="0"/>
-              </a:spcBef>
-              <a:spcAft>
-                <a:spcPts val="0"/>
-              </a:spcAft>
-              <a:buNone/>
-            </a:pPr>
-            <a:r>
-              <a:t/>
-            </a:r>
-            <a:endParaRPr/>
-          </a:p>
-        </p:txBody>
-      </p:sp>
-      <p:sp>
-        <p:nvSpPr>
-          <p:cNvPr id="682" name="Google Shape;682;p55"/>
-          <p:cNvSpPr/>
-          <p:nvPr/>
-        </p:nvSpPr>
-        <p:spPr>
-          <a:xfrm>
-            <a:off x="6938927" y="1362233"/>
-            <a:ext cx="76199" cy="76190"/>
-          </a:xfrm>
-          <a:prstGeom prst="roundRect">
-            <a:avLst>
-              <a:gd fmla="val 31500" name="adj"/>
-            </a:avLst>
-          </a:prstGeom>
-          <a:solidFill>
-            <a:srgbClr val="0077FF"/>
-          </a:solidFill>
-          <a:ln>
-            <a:noFill/>
-          </a:ln>
-        </p:spPr>
-        <p:txBody>
-          <a:bodyPr anchorCtr="0" anchor="ctr" bIns="91425" lIns="91425" spcFirstLastPara="1" rIns="91425" wrap="square" tIns="91425">
-            <a:noAutofit/>
-          </a:bodyPr>
-          <a:lstStyle/>
-          <a:p>
-            <a:pPr indent="0" lvl="0" marL="0" rtl="0" algn="l">
-              <a:spcBef>
-                <a:spcPts val="0"/>
-              </a:spcBef>
-              <a:spcAft>
-                <a:spcPts val="0"/>
-              </a:spcAft>
-              <a:buNone/>
-            </a:pPr>
-            <a:r>
-              <a:t/>
-            </a:r>
-            <a:endParaRPr/>
-          </a:p>
-        </p:txBody>
-      </p:sp>
-      <p:sp>
-        <p:nvSpPr>
-          <p:cNvPr id="683" name="title"/>
-          <p:cNvSpPr txBox="1"/>
-          <p:nvPr/>
-        </p:nvSpPr>
-        <p:spPr>
-          <a:xfrm>
-            <a:off x="274320" y="282943"/>
-            <a:ext cx="6792986" cy="617220"/>
-          </a:xfrm>
-          <a:prstGeom prst="rect">
-            <a:avLst/>
-          </a:prstGeom>
-          <a:noFill/>
-        </p:spPr>
-        <p:txBody>
-          <a:bodyPr wrap="square" lIns="76200" rIns="76200" tIns="50800" bIns="50800">
-            <a:spAutoFit/>
-          </a:bodyPr>
-          <a:lstStyle/>
-          <a:p>
-            <a:pPr algn="l">
-              <a:spcAft>
-                <a:spcPts val="300"/>
-              </a:spcAft>
-              <a:defRPr sz="2400">
-                <a:solidFill>
-                  <a:srgbClr val="000000"/>
-                </a:solidFill>
-                <a:latin typeface="Play"/>
-                <a:ea typeface="Play"/>
-                <a:cs typeface="Play"/>
-              </a:defRPr>
-            </a:pPr>
-            <a:r>
-              <a:rPr sz="2400">
-                <a:solidFill>
-                  <a:srgbClr val="000000"/>
-                </a:solidFill>
-                <a:latin typeface="Play"/>
-                <a:ea typeface="Play"/>
-                <a:cs typeface="Play"/>
-              </a:rPr>
-              <a:t>Ресурсы и затраты</a:t>
-            </a:r>
-          </a:p>
-        </p:txBody>
-      </p:sp>
-      <p:sp>
-        <p:nvSpPr>
-          <p:cNvPr id="684" name="card_0"/>
-          <p:cNvSpPr txBox="1"/>
-          <p:nvPr/>
-        </p:nvSpPr>
-        <p:spPr>
-          <a:xfrm>
-            <a:off x="582575" y="1963753"/>
-            <a:ext cx="1516144" cy="2001662"/>
-          </a:xfrm>
-          <a:prstGeom prst="rect">
-            <a:avLst/>
-          </a:prstGeom>
-          <a:noFill/>
-        </p:spPr>
-        <p:txBody>
-          <a:bodyPr wrap="square" lIns="76200" rIns="76200" tIns="50800" bIns="50800">
-            <a:spAutoFit/>
-          </a:bodyPr>
-          <a:lstStyle/>
-          <a:p>
-            <a:pPr algn="l">
-              <a:spcAft>
-                <a:spcPts val="300"/>
-              </a:spcAft>
               <a:defRPr sz="1406" b="0">
                 <a:solidFill>
                   <a:srgbClr val="000000"/>
@@ -9273,874 +10245,7 @@
                 <a:ea typeface="Play"/>
                 <a:cs typeface="Play"/>
               </a:rPr>
-              <a:t>Стоимость инференса за 6 недель 1 400 рублей</a:t>
-            </a:r>
-          </a:p>
-        </p:txBody>
-      </p:sp>
-      <p:sp>
-        <p:nvSpPr>
-          <p:cNvPr id="685" name="card_1"/>
-          <p:cNvSpPr txBox="1"/>
-          <p:nvPr/>
-        </p:nvSpPr>
-        <p:spPr>
-          <a:xfrm>
-            <a:off x="2749428" y="1963753"/>
-            <a:ext cx="1516144" cy="2001662"/>
-          </a:xfrm>
-          <a:prstGeom prst="rect">
-            <a:avLst/>
-          </a:prstGeom>
-          <a:noFill/>
-        </p:spPr>
-        <p:txBody>
-          <a:bodyPr wrap="square" lIns="76200" rIns="76200" tIns="50800" bIns="50800">
-            <a:spAutoFit/>
-          </a:bodyPr>
-          <a:lstStyle/>
-          <a:p>
-            <a:pPr algn="l">
-              <a:spcAft>
-                <a:spcPts val="300"/>
-              </a:spcAft>
-              <a:defRPr sz="1406" b="0">
-                <a:solidFill>
-                  <a:srgbClr val="000000"/>
-                </a:solidFill>
-                <a:latin typeface="Play"/>
-                <a:ea typeface="Play"/>
-                <a:cs typeface="Play"/>
-              </a:defRPr>
-            </a:pPr>
-            <a:r>
-              <a:rPr sz="1406" b="0">
-                <a:solidFill>
-                  <a:srgbClr val="000000"/>
-                </a:solidFill>
-                <a:latin typeface="Play"/>
-                <a:ea typeface="Play"/>
-                <a:cs typeface="Play"/>
-              </a:rPr>
-              <a:t>Сервис работает на 2 vCPU / 2 ГБ RAM</a:t>
-            </a:r>
-          </a:p>
-        </p:txBody>
-      </p:sp>
-      <p:sp>
-        <p:nvSpPr>
-          <p:cNvPr id="686" name="card_2"/>
-          <p:cNvSpPr txBox="1"/>
-          <p:nvPr/>
-        </p:nvSpPr>
-        <p:spPr>
-          <a:xfrm>
-            <a:off x="4916374" y="1963753"/>
-            <a:ext cx="1516144" cy="2001662"/>
-          </a:xfrm>
-          <a:prstGeom prst="rect">
-            <a:avLst/>
-          </a:prstGeom>
-          <a:noFill/>
-        </p:spPr>
-        <p:txBody>
-          <a:bodyPr wrap="square" lIns="76200" rIns="76200" tIns="50800" bIns="50800">
-            <a:spAutoFit/>
-          </a:bodyPr>
-          <a:lstStyle/>
-          <a:p>
-            <a:pPr algn="l">
-              <a:spcAft>
-                <a:spcPts val="300"/>
-              </a:spcAft>
-              <a:defRPr sz="1406" b="0">
-                <a:solidFill>
-                  <a:srgbClr val="000000"/>
-                </a:solidFill>
-                <a:latin typeface="Play"/>
-                <a:ea typeface="Play"/>
-                <a:cs typeface="Play"/>
-              </a:defRPr>
-            </a:pPr>
-            <a:r>
-              <a:rPr sz="1406" b="0">
-                <a:solidFill>
-                  <a:srgbClr val="000000"/>
-                </a:solidFill>
-                <a:latin typeface="Play"/>
-                <a:ea typeface="Play"/>
-                <a:cs typeface="Play"/>
-              </a:rPr>
-              <a:t>Модель gpt‑oss‑20b подключается по OpenAI‑совместимому протоколу</a:t>
-            </a:r>
-          </a:p>
-        </p:txBody>
-      </p:sp>
-      <p:sp>
-        <p:nvSpPr>
-          <p:cNvPr id="687" name="card_3"/>
-          <p:cNvSpPr txBox="1"/>
-          <p:nvPr/>
-        </p:nvSpPr>
-        <p:spPr>
-          <a:xfrm>
-            <a:off x="7083319" y="1963753"/>
-            <a:ext cx="1516144" cy="2001662"/>
-          </a:xfrm>
-          <a:prstGeom prst="rect">
-            <a:avLst/>
-          </a:prstGeom>
-          <a:noFill/>
-        </p:spPr>
-        <p:txBody>
-          <a:bodyPr wrap="square" lIns="76200" rIns="76200" tIns="50800" bIns="50800">
-            <a:spAutoFit/>
-          </a:bodyPr>
-          <a:lstStyle/>
-          <a:p>
-            <a:pPr algn="l">
-              <a:spcAft>
-                <a:spcPts val="300"/>
-              </a:spcAft>
-              <a:defRPr sz="1406" b="0">
-                <a:solidFill>
-                  <a:srgbClr val="000000"/>
-                </a:solidFill>
-                <a:latin typeface="Play"/>
-                <a:ea typeface="Play"/>
-                <a:cs typeface="Play"/>
-              </a:defRPr>
-            </a:pPr>
-            <a:r>
-              <a:rPr sz="1406" b="0">
-                <a:solidFill>
-                  <a:srgbClr val="000000"/>
-                </a:solidFill>
-                <a:latin typeface="Play"/>
-                <a:ea typeface="Play"/>
-                <a:cs typeface="Play"/>
-              </a:rPr>
-              <a:t>При нагрузке более 20 задач требуется внешняя очередь</a:t>
-            </a:r>
-          </a:p>
-        </p:txBody>
-      </p:sp>
-    </p:spTree>
-  </p:cSld>
-  <p:clrMapOvr>
-    <a:masterClrMapping/>
-  </p:clrMapOvr>
-</p:sld>
-</file>
-
-<file path=ppt/slides/slide62.xml><?xml version="1.0" encoding="utf-8"?>
-<p:sld xmlns:a="http://schemas.openxmlformats.org/drawingml/2006/main" xmlns:p="http://schemas.openxmlformats.org/presentationml/2006/main" xmlns:r="http://schemas.openxmlformats.org/officeDocument/2006/relationships">
-  <p:cSld>
-    <p:spTree>
-      <p:nvGrpSpPr>
-        <p:cNvPr id="1" name=""/>
-        <p:cNvGrpSpPr/>
-        <p:nvPr/>
-      </p:nvGrpSpPr>
-      <p:grpSpPr/>
-      <p:sp>
-        <p:nvSpPr>
-          <p:cNvPr id="532" name="Google Shape;532;p53"/>
-          <p:cNvSpPr/>
-          <p:nvPr/>
-        </p:nvSpPr>
-        <p:spPr>
-          <a:xfrm>
-            <a:off x="303214" y="1022533"/>
-            <a:ext cx="8451939" cy="1433588"/>
-          </a:xfrm>
-          <a:prstGeom prst="rect">
-            <a:avLst/>
-          </a:prstGeom>
-          <a:noFill/>
-          <a:ln>
-            <a:noFill/>
-          </a:ln>
-        </p:spPr>
-        <p:txBody>
-          <a:bodyPr anchorCtr="0" anchor="ctr" bIns="91425" lIns="91425" spcFirstLastPara="1" rIns="91425" wrap="square" tIns="91425">
-            <a:noAutofit/>
-          </a:bodyPr>
-          <a:lstStyle/>
-          <a:p>
-            <a:pPr indent="0" lvl="0" marL="0" rtl="0" algn="l">
-              <a:spcBef>
-                <a:spcPts val="0"/>
-              </a:spcBef>
-              <a:spcAft>
-                <a:spcPts val="0"/>
-              </a:spcAft>
-              <a:buNone/>
-            </a:pPr>
-            <a:r>
-              <a:t/>
-            </a:r>
-            <a:endParaRPr/>
-          </a:p>
-        </p:txBody>
-      </p:sp>
-      <p:sp>
-        <p:nvSpPr>
-          <p:cNvPr id="553" name="Google Shape;553;p53"/>
-          <p:cNvSpPr/>
-          <p:nvPr/>
-        </p:nvSpPr>
-        <p:spPr>
-          <a:xfrm>
-            <a:off x="276488" y="2955549"/>
-            <a:ext cx="8451939" cy="1433588"/>
-          </a:xfrm>
-          <a:prstGeom prst="rect">
-            <a:avLst/>
-          </a:prstGeom>
-          <a:noFill/>
-          <a:ln>
-            <a:noFill/>
-          </a:ln>
-        </p:spPr>
-        <p:txBody>
-          <a:bodyPr anchorCtr="0" anchor="ctr" bIns="91425" lIns="91425" spcFirstLastPara="1" rIns="91425" wrap="square" tIns="91425">
-            <a:noAutofit/>
-          </a:bodyPr>
-          <a:lstStyle/>
-          <a:p>
-            <a:pPr indent="0" lvl="0" marL="0" rtl="0" algn="l">
-              <a:spcBef>
-                <a:spcPts val="0"/>
-              </a:spcBef>
-              <a:spcAft>
-                <a:spcPts val="0"/>
-              </a:spcAft>
-              <a:buNone/>
-            </a:pPr>
-            <a:r>
-              <a:t/>
-            </a:r>
-            <a:endParaRPr/>
-          </a:p>
-        </p:txBody>
-      </p:sp>
-      <p:sp>
-        <p:nvSpPr>
-          <p:cNvPr id="554" name="Google Shape;554;p53"/>
-          <p:cNvSpPr/>
-          <p:nvPr/>
-        </p:nvSpPr>
-        <p:spPr>
-          <a:xfrm>
-            <a:off x="303214" y="2797849"/>
-            <a:ext cx="8451939" cy="1433588"/>
-          </a:xfrm>
-          <a:prstGeom prst="rect">
-            <a:avLst/>
-          </a:prstGeom>
-          <a:noFill/>
-          <a:ln>
-            <a:noFill/>
-          </a:ln>
-        </p:spPr>
-        <p:txBody>
-          <a:bodyPr anchorCtr="0" anchor="ctr" bIns="91425" lIns="91425" spcFirstLastPara="1" rIns="91425" wrap="square" tIns="91425">
-            <a:noAutofit/>
-          </a:bodyPr>
-          <a:lstStyle/>
-          <a:p>
-            <a:pPr indent="0" lvl="0" marL="0" rtl="0" algn="l">
-              <a:spcBef>
-                <a:spcPts val="0"/>
-              </a:spcBef>
-              <a:spcAft>
-                <a:spcPts val="0"/>
-              </a:spcAft>
-              <a:buNone/>
-            </a:pPr>
-            <a:r>
-              <a:t/>
-            </a:r>
-            <a:endParaRPr/>
-          </a:p>
-        </p:txBody>
-      </p:sp>
-      <p:sp>
-        <p:nvSpPr>
-          <p:cNvPr id="555" name="title"/>
-          <p:cNvSpPr txBox="1"/>
-          <p:nvPr/>
-        </p:nvSpPr>
-        <p:spPr>
-          <a:xfrm>
-            <a:off x="274320" y="282943"/>
-            <a:ext cx="6792986" cy="617220"/>
-          </a:xfrm>
-          <a:prstGeom prst="rect">
-            <a:avLst/>
-          </a:prstGeom>
-          <a:noFill/>
-        </p:spPr>
-        <p:txBody>
-          <a:bodyPr wrap="square" lIns="76200" rIns="76200" tIns="50800" bIns="50800">
-            <a:spAutoFit/>
-          </a:bodyPr>
-          <a:lstStyle/>
-          <a:p>
-            <a:pPr algn="l">
-              <a:spcAft>
-                <a:spcPts val="300"/>
-              </a:spcAft>
-              <a:defRPr sz="2400">
-                <a:solidFill>
-                  <a:srgbClr val="000000"/>
-                </a:solidFill>
-                <a:latin typeface="Play"/>
-                <a:ea typeface="Play"/>
-                <a:cs typeface="Play"/>
-              </a:defRPr>
-            </a:pPr>
-            <a:r>
-              <a:rPr sz="2400">
-                <a:solidFill>
-                  <a:srgbClr val="000000"/>
-                </a:solidFill>
-                <a:latin typeface="Play"/>
-                <a:ea typeface="Play"/>
-                <a:cs typeface="Play"/>
-              </a:rPr>
-              <a:t>График масштабирования</a:t>
-            </a:r>
-          </a:p>
-        </p:txBody>
-      </p:sp>
-      <p:sp>
-        <p:nvSpPr>
-          <p:cNvPr id="556" name="Rectangle 555"/>
-          <p:cNvSpPr/>
-          <p:nvPr/>
-        </p:nvSpPr>
-        <p:spPr>
-          <a:xfrm>
-            <a:off x="274320" y="2726370"/>
-            <a:ext cx="8344814" cy="85555"/>
-          </a:xfrm>
-          <a:prstGeom prst="rect">
-            <a:avLst/>
-          </a:prstGeom>
-          <a:solidFill>
-            <a:srgbClr val="0077FF"/>
-          </a:solidFill>
-          <a:ln>
-            <a:noFill/>
-          </a:ln>
-        </p:spPr>
-        <p:style>
-          <a:lnRef idx="1">
-            <a:schemeClr val="accent1"/>
-          </a:lnRef>
-          <a:fillRef idx="3">
-            <a:schemeClr val="accent1"/>
-          </a:fillRef>
-          <a:effectRef idx="2">
-            <a:schemeClr val="accent1"/>
-          </a:effectRef>
-          <a:fontRef idx="minor">
-            <a:schemeClr val="lt1"/>
-          </a:fontRef>
-        </p:style>
-        <p:txBody>
-          <a:bodyPr rtlCol="0" anchor="ctr"/>
-          <a:lstStyle/>
-          <a:p>
-            <a:pPr algn="ctr"/>
-          </a:p>
-        </p:txBody>
-      </p:sp>
-      <p:sp>
-        <p:nvSpPr>
-          <p:cNvPr id="557" name="Oval 556"/>
-          <p:cNvSpPr/>
-          <p:nvPr/>
-        </p:nvSpPr>
-        <p:spPr>
-          <a:xfrm>
-            <a:off x="1351417" y="2455443"/>
-            <a:ext cx="627410" cy="627410"/>
-          </a:xfrm>
-          <a:prstGeom prst="ellipse">
-            <a:avLst/>
-          </a:prstGeom>
-          <a:solidFill>
-            <a:srgbClr val="0077FF"/>
-          </a:solidFill>
-          <a:ln>
-            <a:noFill/>
-          </a:ln>
-        </p:spPr>
-        <p:style>
-          <a:lnRef idx="1">
-            <a:schemeClr val="accent1"/>
-          </a:lnRef>
-          <a:fillRef idx="3">
-            <a:schemeClr val="accent1"/>
-          </a:fillRef>
-          <a:effectRef idx="2">
-            <a:schemeClr val="accent1"/>
-          </a:effectRef>
-          <a:fontRef idx="minor">
-            <a:schemeClr val="lt1"/>
-          </a:fontRef>
-        </p:style>
-        <p:txBody>
-          <a:bodyPr rtlCol="0" anchor="ctr"/>
-          <a:lstStyle/>
-          <a:p>
-            <a:pPr algn="ctr"/>
-          </a:p>
-        </p:txBody>
-      </p:sp>
-      <p:sp>
-        <p:nvSpPr>
-          <p:cNvPr id="558" name="TextBox 557"/>
-          <p:cNvSpPr txBox="1"/>
-          <p:nvPr/>
-        </p:nvSpPr>
-        <p:spPr>
-          <a:xfrm>
-            <a:off x="274320" y="1414513"/>
-            <a:ext cx="2781604" cy="1083708"/>
-          </a:xfrm>
-          <a:prstGeom prst="rect">
-            <a:avLst/>
-          </a:prstGeom>
-          <a:noFill/>
-        </p:spPr>
-        <p:txBody>
-          <a:bodyPr wrap="square">
-            <a:spAutoFit/>
-          </a:bodyPr>
-          <a:lstStyle/>
-          <a:p>
-            <a:pPr algn="ctr">
-              <a:defRPr sz="1200" b="0">
-                <a:solidFill>
-                  <a:srgbClr val="000000"/>
-                </a:solidFill>
-                <a:latin typeface="Play"/>
-                <a:ea typeface="Play"/>
-                <a:cs typeface="Play"/>
-              </a:defRPr>
-            </a:pPr>
-            <a:r>
-              <a:rPr sz="1200" b="0">
-                <a:solidFill>
-                  <a:srgbClr val="000000"/>
-                </a:solidFill>
-                <a:latin typeface="Play"/>
-                <a:ea typeface="Play"/>
-                <a:cs typeface="Play"/>
-              </a:rPr>
-              <a:t>Q3 2026</a:t>
-            </a:r>
-          </a:p>
-        </p:txBody>
-      </p:sp>
-      <p:sp>
-        <p:nvSpPr>
-          <p:cNvPr id="559" name="Oval 558"/>
-          <p:cNvSpPr/>
-          <p:nvPr/>
-        </p:nvSpPr>
-        <p:spPr>
-          <a:xfrm>
-            <a:off x="4133021" y="2455443"/>
-            <a:ext cx="627410" cy="627410"/>
-          </a:xfrm>
-          <a:prstGeom prst="ellipse">
-            <a:avLst/>
-          </a:prstGeom>
-          <a:solidFill>
-            <a:srgbClr val="0077FF"/>
-          </a:solidFill>
-          <a:ln>
-            <a:noFill/>
-          </a:ln>
-        </p:spPr>
-        <p:style>
-          <a:lnRef idx="1">
-            <a:schemeClr val="accent1"/>
-          </a:lnRef>
-          <a:fillRef idx="3">
-            <a:schemeClr val="accent1"/>
-          </a:fillRef>
-          <a:effectRef idx="2">
-            <a:schemeClr val="accent1"/>
-          </a:effectRef>
-          <a:fontRef idx="minor">
-            <a:schemeClr val="lt1"/>
-          </a:fontRef>
-        </p:style>
-        <p:txBody>
-          <a:bodyPr rtlCol="0" anchor="ctr"/>
-          <a:lstStyle/>
-          <a:p>
-            <a:pPr algn="ctr"/>
-          </a:p>
-        </p:txBody>
-      </p:sp>
-      <p:sp>
-        <p:nvSpPr>
-          <p:cNvPr id="560" name="TextBox 559"/>
-          <p:cNvSpPr txBox="1"/>
-          <p:nvPr/>
-        </p:nvSpPr>
-        <p:spPr>
-          <a:xfrm>
-            <a:off x="3055924" y="3353781"/>
-            <a:ext cx="2781604" cy="1083708"/>
-          </a:xfrm>
-          <a:prstGeom prst="rect">
-            <a:avLst/>
-          </a:prstGeom>
-          <a:noFill/>
-        </p:spPr>
-        <p:txBody>
-          <a:bodyPr wrap="square">
-            <a:spAutoFit/>
-          </a:bodyPr>
-          <a:lstStyle/>
-          <a:p>
-            <a:pPr algn="ctr">
-              <a:defRPr sz="1200" b="0">
-                <a:solidFill>
-                  <a:srgbClr val="000000"/>
-                </a:solidFill>
-                <a:latin typeface="Play"/>
-                <a:ea typeface="Play"/>
-                <a:cs typeface="Play"/>
-              </a:defRPr>
-            </a:pPr>
-            <a:r>
-              <a:rPr sz="1200" b="0">
-                <a:solidFill>
-                  <a:srgbClr val="000000"/>
-                </a:solidFill>
-                <a:latin typeface="Play"/>
-                <a:ea typeface="Play"/>
-                <a:cs typeface="Play"/>
-              </a:rPr>
-              <a:t>Q4 2026</a:t>
-            </a:r>
-          </a:p>
-        </p:txBody>
-      </p:sp>
-      <p:sp>
-        <p:nvSpPr>
-          <p:cNvPr id="561" name="Oval 560"/>
-          <p:cNvSpPr/>
-          <p:nvPr/>
-        </p:nvSpPr>
-        <p:spPr>
-          <a:xfrm>
-            <a:off x="6914626" y="2455443"/>
-            <a:ext cx="627410" cy="627410"/>
-          </a:xfrm>
-          <a:prstGeom prst="ellipse">
-            <a:avLst/>
-          </a:prstGeom>
-          <a:solidFill>
-            <a:srgbClr val="0077FF"/>
-          </a:solidFill>
-          <a:ln>
-            <a:noFill/>
-          </a:ln>
-        </p:spPr>
-        <p:style>
-          <a:lnRef idx="1">
-            <a:schemeClr val="accent1"/>
-          </a:lnRef>
-          <a:fillRef idx="3">
-            <a:schemeClr val="accent1"/>
-          </a:fillRef>
-          <a:effectRef idx="2">
-            <a:schemeClr val="accent1"/>
-          </a:effectRef>
-          <a:fontRef idx="minor">
-            <a:schemeClr val="lt1"/>
-          </a:fontRef>
-        </p:style>
-        <p:txBody>
-          <a:bodyPr rtlCol="0" anchor="ctr"/>
-          <a:lstStyle/>
-          <a:p>
-            <a:pPr algn="ctr"/>
-          </a:p>
-        </p:txBody>
-      </p:sp>
-      <p:sp>
-        <p:nvSpPr>
-          <p:cNvPr id="562" name="TextBox 561"/>
-          <p:cNvSpPr txBox="1"/>
-          <p:nvPr/>
-        </p:nvSpPr>
-        <p:spPr>
-          <a:xfrm>
-            <a:off x="5837529" y="1414513"/>
-            <a:ext cx="2781604" cy="1083708"/>
-          </a:xfrm>
-          <a:prstGeom prst="rect">
-            <a:avLst/>
-          </a:prstGeom>
-          <a:noFill/>
-        </p:spPr>
-        <p:txBody>
-          <a:bodyPr wrap="square">
-            <a:spAutoFit/>
-          </a:bodyPr>
-          <a:lstStyle/>
-          <a:p>
-            <a:pPr algn="ctr">
-              <a:defRPr sz="1200" b="0">
-                <a:solidFill>
-                  <a:srgbClr val="000000"/>
-                </a:solidFill>
-                <a:latin typeface="Play"/>
-                <a:ea typeface="Play"/>
-                <a:cs typeface="Play"/>
-              </a:defRPr>
-            </a:pPr>
-            <a:r>
-              <a:rPr sz="1200" b="0">
-                <a:solidFill>
-                  <a:srgbClr val="000000"/>
-                </a:solidFill>
-                <a:latin typeface="Play"/>
-                <a:ea typeface="Play"/>
-                <a:cs typeface="Play"/>
-              </a:rPr>
-              <a:t>Q1 2027</a:t>
-            </a:r>
-          </a:p>
-        </p:txBody>
-      </p:sp>
-    </p:spTree>
-  </p:cSld>
-  <p:clrMapOvr>
-    <a:masterClrMapping/>
-  </p:clrMapOvr>
-</p:sld>
-</file>
-
-<file path=ppt/slides/slide63.xml><?xml version="1.0" encoding="utf-8"?>
-<p:sld xmlns:a="http://schemas.openxmlformats.org/drawingml/2006/main" xmlns:p="http://schemas.openxmlformats.org/presentationml/2006/main" xmlns:r="http://schemas.openxmlformats.org/officeDocument/2006/relationships">
-  <p:cSld>
-    <p:spTree>
-      <p:nvGrpSpPr>
-        <p:cNvPr id="1" name=""/>
-        <p:cNvGrpSpPr/>
-        <p:nvPr/>
-      </p:nvGrpSpPr>
-      <p:grpSpPr/>
-      <p:sp>
-        <p:nvSpPr>
-          <p:cNvPr id="2" name="title"/>
-          <p:cNvSpPr txBox="1"/>
-          <p:nvPr/>
-        </p:nvSpPr>
-        <p:spPr>
-          <a:xfrm>
-            <a:off x="274320" y="282943"/>
-            <a:ext cx="6792986" cy="617220"/>
-          </a:xfrm>
-          <a:prstGeom prst="rect">
-            <a:avLst/>
-          </a:prstGeom>
-          <a:noFill/>
-        </p:spPr>
-        <p:txBody>
-          <a:bodyPr wrap="square" lIns="76200" rIns="76200" tIns="50800" bIns="50800">
-            <a:spAutoFit/>
-          </a:bodyPr>
-          <a:lstStyle/>
-          <a:p>
-            <a:pPr algn="l">
-              <a:spcAft>
-                <a:spcPts val="300"/>
-              </a:spcAft>
-              <a:defRPr sz="2400">
-                <a:solidFill>
-                  <a:srgbClr val="000000"/>
-                </a:solidFill>
-                <a:latin typeface="Play"/>
-                <a:ea typeface="Play"/>
-                <a:cs typeface="Play"/>
-              </a:defRPr>
-            </a:pPr>
-            <a:r>
-              <a:rPr sz="2400">
-                <a:solidFill>
-                  <a:srgbClr val="000000"/>
-                </a:solidFill>
-                <a:latin typeface="Play"/>
-                <a:ea typeface="Play"/>
-                <a:cs typeface="Play"/>
-              </a:rPr>
-              <a:t>План пилота</a:t>
-            </a:r>
-          </a:p>
-        </p:txBody>
-      </p:sp>
-      <p:sp>
-        <p:nvSpPr>
-          <p:cNvPr id="3" name="body"/>
-          <p:cNvSpPr txBox="1"/>
-          <p:nvPr/>
-        </p:nvSpPr>
-        <p:spPr>
-          <a:xfrm>
-            <a:off x="274320" y="1414513"/>
-            <a:ext cx="7189469" cy="2602405"/>
-          </a:xfrm>
-          <a:prstGeom prst="rect">
-            <a:avLst/>
-          </a:prstGeom>
-          <a:noFill/>
-        </p:spPr>
-        <p:txBody>
-          <a:bodyPr wrap="square" lIns="76200" rIns="76200" tIns="50800" bIns="50800">
-            <a:spAutoFit/>
-          </a:bodyPr>
-          <a:lstStyle/>
-          <a:p>
-            <a:pPr algn="l">
-              <a:spcAft>
-                <a:spcPts val="300"/>
-              </a:spcAft>
-              <a:defRPr sz="1803" b="1">
-                <a:solidFill>
-                  <a:srgbClr val="000000"/>
-                </a:solidFill>
-                <a:latin typeface="Play"/>
-                <a:ea typeface="Play"/>
-                <a:cs typeface="Play"/>
-              </a:defRPr>
-            </a:pPr>
-            <a:r>
-              <a:rPr sz="1803" b="1">
-                <a:solidFill>
-                  <a:srgbClr val="000000"/>
-                </a:solidFill>
-                <a:latin typeface="Play"/>
-                <a:ea typeface="Play"/>
-                <a:cs typeface="Play"/>
-              </a:rPr>
-              <a:t>• План пилота: 6 недель, 2 команды, 68 презентаций</a:t>
-            </a:r>
-          </a:p>
-          <a:p>
-            <a:pPr algn="l">
-              <a:spcAft>
-                <a:spcPts val="300"/>
-              </a:spcAft>
-              <a:defRPr sz="1803" b="1">
-                <a:solidFill>
-                  <a:srgbClr val="000000"/>
-                </a:solidFill>
-                <a:latin typeface="Play"/>
-                <a:ea typeface="Play"/>
-                <a:cs typeface="Play"/>
-              </a:defRPr>
-            </a:pPr>
-            <a:r>
-              <a:rPr sz="1803" b="1">
-                <a:solidFill>
-                  <a:srgbClr val="000000"/>
-                </a:solidFill>
-                <a:latin typeface="Play"/>
-                <a:ea typeface="Play"/>
-                <a:cs typeface="Play"/>
-              </a:rPr>
-              <a:t>• Цель – доказать экономию времени и соблюдение стиля</a:t>
-            </a:r>
-          </a:p>
-          <a:p>
-            <a:pPr algn="l">
-              <a:spcAft>
-                <a:spcPts val="300"/>
-              </a:spcAft>
-              <a:defRPr sz="1803" b="1">
-                <a:solidFill>
-                  <a:srgbClr val="000000"/>
-                </a:solidFill>
-                <a:latin typeface="Play"/>
-                <a:ea typeface="Play"/>
-                <a:cs typeface="Play"/>
-              </a:defRPr>
-            </a:pPr>
-            <a:r>
-              <a:rPr sz="1803" b="1">
-                <a:solidFill>
-                  <a:srgbClr val="000000"/>
-                </a:solidFill>
-                <a:latin typeface="Play"/>
-                <a:ea typeface="Play"/>
-                <a:cs typeface="Play"/>
-              </a:rPr>
-              <a:t>• После пилота масштабируем на 4 команды в Q3 2026</a:t>
-            </a:r>
-          </a:p>
-          <a:p>
-            <a:pPr algn="l">
-              <a:spcAft>
-                <a:spcPts val="300"/>
-              </a:spcAft>
-              <a:defRPr sz="1803" b="1">
-                <a:solidFill>
-                  <a:srgbClr val="000000"/>
-                </a:solidFill>
-                <a:latin typeface="Play"/>
-                <a:ea typeface="Play"/>
-                <a:cs typeface="Play"/>
-              </a:defRPr>
-            </a:pPr>
-            <a:r>
-              <a:rPr sz="1803" b="1">
-                <a:solidFill>
-                  <a:srgbClr val="000000"/>
-                </a:solidFill>
-                <a:latin typeface="Play"/>
-                <a:ea typeface="Play"/>
-                <a:cs typeface="Play"/>
-              </a:rPr>
-              <a:t>• Далее – доступ для всей компании в Q4 2026</a:t>
-            </a:r>
-          </a:p>
-          <a:p>
-            <a:pPr algn="l">
-              <a:spcAft>
-                <a:spcPts val="300"/>
-              </a:spcAft>
-              <a:defRPr sz="1803" b="1">
-                <a:solidFill>
-                  <a:srgbClr val="000000"/>
-                </a:solidFill>
-                <a:latin typeface="Play"/>
-                <a:ea typeface="Play"/>
-                <a:cs typeface="Play"/>
-              </a:defRPr>
-            </a:pPr>
-            <a:r>
-              <a:rPr sz="1803" b="1">
-                <a:solidFill>
-                  <a:srgbClr val="000000"/>
-                </a:solidFill>
-                <a:latin typeface="Play"/>
-                <a:ea typeface="Play"/>
-                <a:cs typeface="Play"/>
-              </a:rPr>
-              <a:t>• И генерация иллюстраций в Q1 2027</a:t>
+              <a:t>Поддерживать модель и обновления</a:t>
             </a:r>
           </a:p>
         </p:txBody>
@@ -10172,7 +10277,7 @@
         <p:spPr>
           <a:xfrm>
             <a:off x="445963" y="1555901"/>
-            <a:ext cx="8300171" cy="2775902"/>
+            <a:ext cx="8300171" cy="2189031"/>
           </a:xfrm>
           <a:prstGeom prst="roundRect">
             <a:avLst/>
@@ -10218,7 +10323,7 @@
         <p:spPr>
           <a:xfrm>
             <a:off x="572963" y="1682901"/>
-            <a:ext cx="4373118" cy="1183640"/>
+            <a:ext cx="4373118" cy="655320"/>
           </a:xfrm>
           <a:prstGeom prst="rect">
             <a:avLst/>
@@ -10253,7 +10358,7 @@
                 <a:ea typeface="Play"/>
                 <a:cs typeface="Play"/>
               </a:rPr>
-              <a:t>Что мы просим решить</a:t>
+              <a:t>Вывод</a:t>
             </a:r>
           </a:p>
         </p:txBody>
@@ -10266,8 +10371,8 @@
         </p:nvSpPr>
         <p:spPr>
           <a:xfrm>
-            <a:off x="572963" y="3046564"/>
-            <a:ext cx="8046171" cy="1376845"/>
+            <a:off x="572963" y="2920982"/>
+            <a:ext cx="8046171" cy="696950"/>
           </a:xfrm>
           <a:prstGeom prst="rect">
             <a:avLst/>
@@ -10284,7 +10389,7 @@
               <a:spcAft>
                 <a:spcPts val="300"/>
               </a:spcAft>
-              <a:defRPr sz="1600">
+              <a:defRPr sz="1803">
                 <a:solidFill>
                   <a:srgbClr val="000000"/>
                 </a:solidFill>
@@ -10294,7 +10399,7 @@
               </a:defRPr>
             </a:pPr>
             <a:r>
-              <a:rPr sz="1600">
+              <a:rPr sz="1803">
                 <a:solidFill>
                   <a:srgbClr val="000000"/>
                 </a:solidFill>
@@ -10302,85 +10407,7 @@
                 <a:ea typeface="Play"/>
                 <a:cs typeface="Play"/>
               </a:rPr>
-              <a:t>• Запрос решения о запуске сервиса на всю компанию</a:t>
-            </a:r>
-          </a:p>
-          <a:p>
-            <a:pPr algn="l">
-              <a:spcAft>
-                <a:spcPts val="300"/>
-              </a:spcAft>
-              <a:defRPr sz="1600">
-                <a:solidFill>
-                  <a:srgbClr val="000000"/>
-                </a:solidFill>
-                <a:latin typeface="Play"/>
-                <a:ea typeface="Play"/>
-                <a:cs typeface="Play"/>
-              </a:defRPr>
-            </a:pPr>
-            <a:r>
-              <a:rPr sz="1600">
-                <a:solidFill>
-                  <a:srgbClr val="000000"/>
-                </a:solidFill>
-                <a:latin typeface="Play"/>
-                <a:ea typeface="Play"/>
-                <a:cs typeface="Play"/>
-              </a:rPr>
-              <a:t>• Ожидаем одобрение руководства к концу Q4 2026</a:t>
-            </a:r>
-          </a:p>
-          <a:p>
-            <a:pPr algn="l">
-              <a:spcAft>
-                <a:spcPts val="300"/>
-              </a:spcAft>
-              <a:defRPr sz="1600">
-                <a:solidFill>
-                  <a:srgbClr val="000000"/>
-                </a:solidFill>
-                <a:latin typeface="Play"/>
-                <a:ea typeface="Play"/>
-                <a:cs typeface="Play"/>
-              </a:defRPr>
-            </a:pPr>
-            <a:r>
-              <a:rPr sz="1600">
-                <a:solidFill>
-                  <a:srgbClr val="000000"/>
-                </a:solidFill>
-                <a:latin typeface="Play"/>
-                <a:ea typeface="Play"/>
-                <a:cs typeface="Play"/>
-              </a:rPr>
-              <a:t>• При поддержке выделить бюджет на инфраструктуру и обучение</a:t>
-            </a:r>
-          </a:p>
-          <a:p>
-            <a:pPr algn="l">
-              <a:spcAft>
-                <a:spcPts val="300"/>
-              </a:spcAft>
-              <a:defRPr sz="1600">
-                <a:solidFill>
-                  <a:srgbClr val="000000"/>
-                </a:solidFill>
-                <a:latin typeface="Play"/>
-                <a:ea typeface="Play"/>
-                <a:cs typeface="Play"/>
-              </a:defRPr>
-            </a:pPr>
-            <a:r>
-              <a:rPr sz="1600">
-                <a:solidFill>
-                  <a:srgbClr val="000000"/>
-                </a:solidFill>
-                <a:latin typeface="Play"/>
-                <a:ea typeface="Play"/>
-                <a:cs typeface="Play"/>
-              </a:rPr>
-              <a:t>• Готовы предоставить детальный план внедрения</a:t>
+              <a:t>Успешный запуск позволит ускорить создание презентаций и повысить качество</a:t>
             </a:r>
           </a:p>
         </p:txBody>

--- a/samples/VK_Tech_шаблон__classic.pptx
+++ b/samples/VK_Tech_шаблон__classic.pptx
@@ -261,193 +261,6 @@
 </p:presentation>
 </file>
 
-<file path=ppt/charts/chart1.xml><?xml version="1.0" encoding="utf-8"?>
-<c:chartSpace xmlns:c="http://schemas.openxmlformats.org/drawingml/2006/chart" xmlns:a="http://schemas.openxmlformats.org/drawingml/2006/main" xmlns:r="http://schemas.openxmlformats.org/officeDocument/2006/relationships">
-  <c:date1904 val="0"/>
-  <c:chart>
-    <c:autoTitleDeleted val="1"/>
-    <c:plotArea>
-      <c:barChart>
-        <c:barDir val="col"/>
-        <c:grouping val="clustered"/>
-        <c:ser>
-          <c:idx val="0"/>
-          <c:order val="0"/>
-          <c:tx>
-            <c:strRef>
-              <c:f>Sheet1!$B$1</c:f>
-              <c:strCache>
-                <c:ptCount val="1"/>
-                <c:pt idx="0">
-                  <c:v>Время</c:v>
-                </c:pt>
-              </c:strCache>
-            </c:strRef>
-          </c:tx>
-          <c:spPr>
-            <a:solidFill>
-              <a:srgbClr val="0077FF"/>
-            </a:solidFill>
-            <a:ln>
-              <a:solidFill>
-                <a:srgbClr val="0077FF"/>
-              </a:solidFill>
-            </a:ln>
-          </c:spPr>
-          <c:cat>
-            <c:strRef>
-              <c:f>Sheet1!$A$2:$A$3</c:f>
-              <c:strCache>
-                <c:ptCount val="2"/>
-                <c:pt idx="0">
-                  <c:v>Сборка</c:v>
-                </c:pt>
-                <c:pt idx="1">
-                  <c:v>Правки</c:v>
-                </c:pt>
-              </c:strCache>
-            </c:strRef>
-          </c:cat>
-          <c:val>
-            <c:numRef>
-              <c:f>Sheet1!$B$2:$B$3</c:f>
-              <c:numCache>
-                <c:formatCode>General</c:formatCode>
-                <c:ptCount val="2"/>
-                <c:pt idx="0">
-                  <c:v>186.0</c:v>
-                </c:pt>
-                <c:pt idx="1">
-                  <c:v>74.0</c:v>
-                </c:pt>
-              </c:numCache>
-            </c:numRef>
-          </c:val>
-        </c:ser>
-        <c:gapWidth val="60"/>
-        <c:axId val="-2068027336"/>
-        <c:axId val="-2113994440"/>
-      </c:barChart>
-      <c:catAx>
-        <c:axId val="-2068027336"/>
-        <c:scaling>
-          <c:orientation val="minMax"/>
-        </c:scaling>
-        <c:delete val="0"/>
-        <c:axPos val="b"/>
-        <c:majorTickMark val="out"/>
-        <c:minorTickMark val="none"/>
-        <c:tickLblPos val="nextTo"/>
-        <c:txPr>
-          <a:bodyPr/>
-          <a:lstStyle/>
-          <a:p>
-            <a:pPr>
-              <a:defRPr sz="1100" b="0">
-                <a:solidFill>
-                  <a:srgbClr val="000000"/>
-                </a:solidFill>
-                <a:latin typeface="Play"/>
-                <a:ea typeface="Play"/>
-                <a:cs typeface="Play"/>
-              </a:defRPr>
-            </a:pPr>
-          </a:p>
-        </c:txPr>
-        <c:crossAx val="-2113994440"/>
-        <c:crosses val="autoZero"/>
-        <c:auto val="1"/>
-        <c:lblAlgn val="ctr"/>
-        <c:lblOffset val="100"/>
-        <c:noMultiLvlLbl val="0"/>
-      </c:catAx>
-      <c:valAx>
-        <c:axId val="-2113994440"/>
-        <c:scaling/>
-        <c:delete val="0"/>
-        <c:axPos val="l"/>
-        <c:majorGridlines>
-          <c:spPr>
-            <a:ln w="9525">
-              <a:solidFill>
-                <a:srgbClr val="D1D1D1"/>
-              </a:solidFill>
-            </a:ln>
-          </c:spPr>
-        </c:majorGridlines>
-        <c:title>
-          <c:tx>
-            <c:rich>
-              <a:bodyPr/>
-              <a:lstStyle/>
-              <a:p>
-                <a:pPr>
-                  <a:defRPr sz="1100" b="0">
-                    <a:solidFill>
-                      <a:srgbClr val="000000"/>
-                    </a:solidFill>
-                    <a:latin typeface="Play"/>
-                    <a:ea typeface="Play"/>
-                    <a:cs typeface="Play"/>
-                  </a:defRPr>
-                </a:pPr>
-                <a:r>
-                  <a:t>мин</a:t>
-                </a:r>
-              </a:p>
-            </c:rich>
-          </c:tx>
-          <c:layout/>
-          <c:overlay val="0"/>
-        </c:title>
-        <c:majorTickMark val="out"/>
-        <c:minorTickMark val="none"/>
-        <c:tickLblPos val="nextTo"/>
-        <c:txPr>
-          <a:bodyPr/>
-          <a:lstStyle/>
-          <a:p>
-            <a:pPr>
-              <a:defRPr sz="1100" b="0">
-                <a:solidFill>
-                  <a:srgbClr val="000000"/>
-                </a:solidFill>
-                <a:latin typeface="Play"/>
-                <a:ea typeface="Play"/>
-                <a:cs typeface="Play"/>
-              </a:defRPr>
-            </a:pPr>
-          </a:p>
-        </c:txPr>
-        <c:crossAx val="-2068027336"/>
-        <c:crosses val="autoZero"/>
-      </c:valAx>
-    </c:plotArea>
-    <c:dispBlanksAs val="gap"/>
-  </c:chart>
-  <c:txPr>
-    <a:bodyPr/>
-    <a:lstStyle/>
-    <a:p>
-      <a:pPr>
-        <a:defRPr sz="1200" b="0">
-          <a:solidFill>
-            <a:srgbClr val="000000"/>
-          </a:solidFill>
-          <a:latin typeface="Play"/>
-          <a:ea typeface="Play"/>
-          <a:cs typeface="Play"/>
-        </a:defRPr>
-      </a:pPr>
-      <a:endParaRPr lang="en-US"/>
-    </a:p>
-  </c:txPr>
-  <c:externalData r:id="rId1">
-    <c:autoUpdate val="0"/>
-  </c:externalData>
-</c:chartSpace>
-</file>
-
 <file path=ppt/notesMasters/notesMaster1.xml><?xml version="1.0" encoding="utf-8"?>
 <p:notesMaster xmlns:a="http://schemas.openxmlformats.org/drawingml/2006/main" xmlns:r="http://schemas.openxmlformats.org/officeDocument/2006/relationships" xmlns:mc="http://schemas.openxmlformats.org/markup-compatibility/2006" xmlns:mv="urn:schemas-microsoft-com:mac:vml" xmlns:p="http://schemas.openxmlformats.org/presentationml/2006/main" xmlns:c="http://schemas.openxmlformats.org/drawingml/2006/chart" xmlns:dgm="http://schemas.openxmlformats.org/drawingml/2006/diagram" xmlns:o="urn:schemas-microsoft-com:office:office" xmlns:v="urn:schemas-microsoft-com:vml" xmlns:pvml="urn:schemas-microsoft-com:office:powerpoint" xmlns:com="http://schemas.openxmlformats.org/drawingml/2006/compatibility" xmlns:p14="http://schemas.microsoft.com/office/powerpoint/2010/main" xmlns:p15="http://schemas.microsoft.com/office/powerpoint/2012/main" xmlns:ahyp="http://schemas.microsoft.com/office/drawing/2018/hyperlinkcolor">
   <p:cSld>
@@ -5450,7 +5263,7 @@
         <p:spPr>
           <a:xfrm>
             <a:off x="2159000" y="1243485"/>
-            <a:ext cx="4542261" cy="1248791"/>
+            <a:ext cx="4542261" cy="949960"/>
           </a:xfrm>
           <a:prstGeom prst="roundRect">
             <a:avLst/>
@@ -5496,7 +5309,7 @@
         <p:spPr>
           <a:xfrm>
             <a:off x="2286000" y="1370485"/>
-            <a:ext cx="4288261" cy="1020191"/>
+            <a:ext cx="4288261" cy="721360"/>
           </a:xfrm>
           <a:prstGeom prst="rect">
             <a:avLst/>
@@ -5513,7 +5326,7 @@
               <a:spcAft>
                 <a:spcPts val="300"/>
               </a:spcAft>
-              <a:defRPr sz="2705">
+              <a:defRPr sz="1800">
                 <a:solidFill>
                   <a:srgbClr val="FFFFFF"/>
                 </a:solidFill>
@@ -5523,7 +5336,7 @@
               </a:defRPr>
             </a:pPr>
             <a:r>
-              <a:rPr sz="2705">
+              <a:rPr sz="1800">
                 <a:solidFill>
                   <a:srgbClr val="FFFFFF"/>
                 </a:solidFill>
@@ -5531,7 +5344,7 @@
                 <a:ea typeface="Play"/>
                 <a:cs typeface="Play"/>
               </a:rPr>
-              <a:t>Автоматическая вёрстка презентаций</a:t>
+              <a:t>Защита инициативы: сервис автоматической вёрстки презентаций</a:t>
             </a:r>
           </a:p>
         </p:txBody>
@@ -5556,14 +5369,14 @@
       <p:grpSpPr/>
       <p:sp>
         <p:nvSpPr>
-          <p:cNvPr id="532" name="Google Shape;532;p53"/>
+          <p:cNvPr id="662" name="Google Shape;662;p55"/>
           <p:cNvSpPr/>
           <p:nvPr/>
         </p:nvSpPr>
         <p:spPr>
           <a:xfrm>
-            <a:off x="303214" y="1022533"/>
-            <a:ext cx="8451939" cy="1433588"/>
+            <a:off x="8667705" y="4666977"/>
+            <a:ext cx="190499" cy="190475"/>
           </a:xfrm>
           <a:prstGeom prst="rect">
             <a:avLst/>
@@ -5597,14 +5410,14 @@
       </p:sp>
       <p:sp>
         <p:nvSpPr>
-          <p:cNvPr id="553" name="Google Shape;553;p53"/>
+          <p:cNvPr id="663" name="Google Shape;663;p55"/>
           <p:cNvSpPr/>
           <p:nvPr/>
         </p:nvSpPr>
         <p:spPr>
           <a:xfrm>
-            <a:off x="276488" y="2955549"/>
-            <a:ext cx="8451939" cy="1433588"/>
+            <a:off x="285748" y="286047"/>
+            <a:ext cx="8572456" cy="3938075"/>
           </a:xfrm>
           <a:prstGeom prst="rect">
             <a:avLst/>
@@ -5638,14 +5451,14 @@
       </p:sp>
       <p:sp>
         <p:nvSpPr>
-          <p:cNvPr id="554" name="Google Shape;554;p53"/>
+          <p:cNvPr id="664" name="Google Shape;664;p55"/>
           <p:cNvSpPr/>
           <p:nvPr/>
         </p:nvSpPr>
         <p:spPr>
           <a:xfrm>
-            <a:off x="303214" y="2797849"/>
-            <a:ext cx="8451939" cy="1433588"/>
+            <a:off x="285748" y="1209852"/>
+            <a:ext cx="8572456" cy="3014270"/>
           </a:xfrm>
           <a:prstGeom prst="rect">
             <a:avLst/>
@@ -5679,7 +5492,531 @@
       </p:sp>
       <p:sp>
         <p:nvSpPr>
-          <p:cNvPr id="555" name="title"/>
+          <p:cNvPr id="665" name="Google Shape;665;p55"/>
+          <p:cNvSpPr/>
+          <p:nvPr/>
+        </p:nvSpPr>
+        <p:spPr>
+          <a:xfrm>
+            <a:off x="285749" y="1209852"/>
+            <a:ext cx="2071677" cy="3014270"/>
+          </a:xfrm>
+          <a:prstGeom prst="roundRect">
+            <a:avLst>
+              <a:gd fmla="val 4634" name="adj"/>
+            </a:avLst>
+          </a:prstGeom>
+          <a:solidFill>
+            <a:schemeClr val="lt2"/>
+          </a:solidFill>
+          <a:ln>
+            <a:noFill/>
+          </a:ln>
+        </p:spPr>
+        <p:txBody>
+          <a:bodyPr anchorCtr="0" anchor="ctr" bIns="91425" lIns="91425" spcFirstLastPara="1" rIns="91425" wrap="square" tIns="91425">
+            <a:noAutofit/>
+          </a:bodyPr>
+          <a:lstStyle/>
+          <a:p>
+            <a:pPr indent="0" lvl="0" marL="0" rtl="0" algn="l">
+              <a:spcBef>
+                <a:spcPts val="0"/>
+              </a:spcBef>
+              <a:spcAft>
+                <a:spcPts val="0"/>
+              </a:spcAft>
+              <a:buNone/>
+            </a:pPr>
+            <a:r>
+              <a:t/>
+            </a:r>
+            <a:endParaRPr/>
+          </a:p>
+        </p:txBody>
+      </p:sp>
+      <p:sp>
+        <p:nvSpPr>
+          <p:cNvPr id="666" name="Google Shape;666;p55"/>
+          <p:cNvSpPr/>
+          <p:nvPr/>
+        </p:nvSpPr>
+        <p:spPr>
+          <a:xfrm>
+            <a:off x="438148" y="1362233"/>
+            <a:ext cx="1766878" cy="342855"/>
+          </a:xfrm>
+          <a:prstGeom prst="rect">
+            <a:avLst/>
+          </a:prstGeom>
+          <a:noFill/>
+          <a:ln>
+            <a:noFill/>
+          </a:ln>
+        </p:spPr>
+        <p:txBody>
+          <a:bodyPr anchorCtr="0" anchor="ctr" bIns="91425" lIns="91425" spcFirstLastPara="1" rIns="91425" wrap="square" tIns="91425">
+            <a:noAutofit/>
+          </a:bodyPr>
+          <a:lstStyle/>
+          <a:p>
+            <a:pPr indent="0" lvl="0" marL="0" rtl="0" algn="l">
+              <a:spcBef>
+                <a:spcPts val="0"/>
+              </a:spcBef>
+              <a:spcAft>
+                <a:spcPts val="0"/>
+              </a:spcAft>
+              <a:buNone/>
+            </a:pPr>
+            <a:r>
+              <a:t/>
+            </a:r>
+            <a:endParaRPr/>
+          </a:p>
+        </p:txBody>
+      </p:sp>
+      <p:sp>
+        <p:nvSpPr>
+          <p:cNvPr id="667" name="Google Shape;667;p55"/>
+          <p:cNvSpPr/>
+          <p:nvPr/>
+        </p:nvSpPr>
+        <p:spPr>
+          <a:xfrm>
+            <a:off x="438148" y="1362233"/>
+            <a:ext cx="76199" cy="76190"/>
+          </a:xfrm>
+          <a:prstGeom prst="roundRect">
+            <a:avLst>
+              <a:gd fmla="val 31500" name="adj"/>
+            </a:avLst>
+          </a:prstGeom>
+          <a:solidFill>
+            <a:srgbClr val="0077FF"/>
+          </a:solidFill>
+          <a:ln>
+            <a:noFill/>
+          </a:ln>
+        </p:spPr>
+        <p:txBody>
+          <a:bodyPr anchorCtr="0" anchor="ctr" bIns="91425" lIns="91425" spcFirstLastPara="1" rIns="91425" wrap="square" tIns="91425">
+            <a:noAutofit/>
+          </a:bodyPr>
+          <a:lstStyle/>
+          <a:p>
+            <a:pPr indent="0" lvl="0" marL="0" rtl="0" algn="l">
+              <a:spcBef>
+                <a:spcPts val="0"/>
+              </a:spcBef>
+              <a:spcAft>
+                <a:spcPts val="0"/>
+              </a:spcAft>
+              <a:buNone/>
+            </a:pPr>
+            <a:r>
+              <a:t/>
+            </a:r>
+            <a:endParaRPr/>
+          </a:p>
+        </p:txBody>
+      </p:sp>
+      <p:sp>
+        <p:nvSpPr>
+          <p:cNvPr id="670" name="Google Shape;670;p55"/>
+          <p:cNvSpPr/>
+          <p:nvPr/>
+        </p:nvSpPr>
+        <p:spPr>
+          <a:xfrm>
+            <a:off x="2452675" y="1209852"/>
+            <a:ext cx="2071677" cy="3014270"/>
+          </a:xfrm>
+          <a:prstGeom prst="roundRect">
+            <a:avLst>
+              <a:gd fmla="val 4634" name="adj"/>
+            </a:avLst>
+          </a:prstGeom>
+          <a:solidFill>
+            <a:schemeClr val="lt2"/>
+          </a:solidFill>
+          <a:ln>
+            <a:noFill/>
+          </a:ln>
+        </p:spPr>
+        <p:txBody>
+          <a:bodyPr anchorCtr="0" anchor="ctr" bIns="91425" lIns="91425" spcFirstLastPara="1" rIns="91425" wrap="square" tIns="91425">
+            <a:noAutofit/>
+          </a:bodyPr>
+          <a:lstStyle/>
+          <a:p>
+            <a:pPr indent="0" lvl="0" marL="0" rtl="0" algn="l">
+              <a:spcBef>
+                <a:spcPts val="0"/>
+              </a:spcBef>
+              <a:spcAft>
+                <a:spcPts val="0"/>
+              </a:spcAft>
+              <a:buNone/>
+            </a:pPr>
+            <a:r>
+              <a:t/>
+            </a:r>
+            <a:endParaRPr/>
+          </a:p>
+        </p:txBody>
+      </p:sp>
+      <p:sp>
+        <p:nvSpPr>
+          <p:cNvPr id="671" name="Google Shape;671;p55"/>
+          <p:cNvSpPr/>
+          <p:nvPr/>
+        </p:nvSpPr>
+        <p:spPr>
+          <a:xfrm>
+            <a:off x="2605074" y="1362233"/>
+            <a:ext cx="1766878" cy="342855"/>
+          </a:xfrm>
+          <a:prstGeom prst="rect">
+            <a:avLst/>
+          </a:prstGeom>
+          <a:noFill/>
+          <a:ln>
+            <a:noFill/>
+          </a:ln>
+        </p:spPr>
+        <p:txBody>
+          <a:bodyPr anchorCtr="0" anchor="ctr" bIns="91425" lIns="91425" spcFirstLastPara="1" rIns="91425" wrap="square" tIns="91425">
+            <a:noAutofit/>
+          </a:bodyPr>
+          <a:lstStyle/>
+          <a:p>
+            <a:pPr indent="0" lvl="0" marL="0" rtl="0" algn="l">
+              <a:spcBef>
+                <a:spcPts val="0"/>
+              </a:spcBef>
+              <a:spcAft>
+                <a:spcPts val="0"/>
+              </a:spcAft>
+              <a:buNone/>
+            </a:pPr>
+            <a:r>
+              <a:t/>
+            </a:r>
+            <a:endParaRPr/>
+          </a:p>
+        </p:txBody>
+      </p:sp>
+      <p:sp>
+        <p:nvSpPr>
+          <p:cNvPr id="672" name="Google Shape;672;p55"/>
+          <p:cNvSpPr/>
+          <p:nvPr/>
+        </p:nvSpPr>
+        <p:spPr>
+          <a:xfrm>
+            <a:off x="2605074" y="1362233"/>
+            <a:ext cx="76199" cy="76190"/>
+          </a:xfrm>
+          <a:prstGeom prst="roundRect">
+            <a:avLst>
+              <a:gd fmla="val 31500" name="adj"/>
+            </a:avLst>
+          </a:prstGeom>
+          <a:solidFill>
+            <a:srgbClr val="0077FF"/>
+          </a:solidFill>
+          <a:ln>
+            <a:noFill/>
+          </a:ln>
+        </p:spPr>
+        <p:txBody>
+          <a:bodyPr anchorCtr="0" anchor="ctr" bIns="91425" lIns="91425" spcFirstLastPara="1" rIns="91425" wrap="square" tIns="91425">
+            <a:noAutofit/>
+          </a:bodyPr>
+          <a:lstStyle/>
+          <a:p>
+            <a:pPr indent="0" lvl="0" marL="0" rtl="0" algn="l">
+              <a:spcBef>
+                <a:spcPts val="0"/>
+              </a:spcBef>
+              <a:spcAft>
+                <a:spcPts val="0"/>
+              </a:spcAft>
+              <a:buNone/>
+            </a:pPr>
+            <a:r>
+              <a:t/>
+            </a:r>
+            <a:endParaRPr/>
+          </a:p>
+        </p:txBody>
+      </p:sp>
+      <p:sp>
+        <p:nvSpPr>
+          <p:cNvPr id="675" name="Google Shape;675;p55"/>
+          <p:cNvSpPr/>
+          <p:nvPr/>
+        </p:nvSpPr>
+        <p:spPr>
+          <a:xfrm>
+            <a:off x="4619601" y="1209852"/>
+            <a:ext cx="2071677" cy="3014270"/>
+          </a:xfrm>
+          <a:prstGeom prst="roundRect">
+            <a:avLst>
+              <a:gd fmla="val 4634" name="adj"/>
+            </a:avLst>
+          </a:prstGeom>
+          <a:solidFill>
+            <a:schemeClr val="lt2"/>
+          </a:solidFill>
+          <a:ln>
+            <a:noFill/>
+          </a:ln>
+        </p:spPr>
+        <p:txBody>
+          <a:bodyPr anchorCtr="0" anchor="ctr" bIns="91425" lIns="91425" spcFirstLastPara="1" rIns="91425" wrap="square" tIns="91425">
+            <a:noAutofit/>
+          </a:bodyPr>
+          <a:lstStyle/>
+          <a:p>
+            <a:pPr indent="0" lvl="0" marL="0" rtl="0" algn="l">
+              <a:spcBef>
+                <a:spcPts val="0"/>
+              </a:spcBef>
+              <a:spcAft>
+                <a:spcPts val="0"/>
+              </a:spcAft>
+              <a:buNone/>
+            </a:pPr>
+            <a:r>
+              <a:t/>
+            </a:r>
+            <a:endParaRPr/>
+          </a:p>
+        </p:txBody>
+      </p:sp>
+      <p:sp>
+        <p:nvSpPr>
+          <p:cNvPr id="676" name="Google Shape;676;p55"/>
+          <p:cNvSpPr/>
+          <p:nvPr/>
+        </p:nvSpPr>
+        <p:spPr>
+          <a:xfrm>
+            <a:off x="4772001" y="1362233"/>
+            <a:ext cx="1766878" cy="342855"/>
+          </a:xfrm>
+          <a:prstGeom prst="rect">
+            <a:avLst/>
+          </a:prstGeom>
+          <a:noFill/>
+          <a:ln>
+            <a:noFill/>
+          </a:ln>
+        </p:spPr>
+        <p:txBody>
+          <a:bodyPr anchorCtr="0" anchor="ctr" bIns="91425" lIns="91425" spcFirstLastPara="1" rIns="91425" wrap="square" tIns="91425">
+            <a:noAutofit/>
+          </a:bodyPr>
+          <a:lstStyle/>
+          <a:p>
+            <a:pPr indent="0" lvl="0" marL="0" rtl="0" algn="l">
+              <a:spcBef>
+                <a:spcPts val="0"/>
+              </a:spcBef>
+              <a:spcAft>
+                <a:spcPts val="0"/>
+              </a:spcAft>
+              <a:buNone/>
+            </a:pPr>
+            <a:r>
+              <a:t/>
+            </a:r>
+            <a:endParaRPr/>
+          </a:p>
+        </p:txBody>
+      </p:sp>
+      <p:sp>
+        <p:nvSpPr>
+          <p:cNvPr id="677" name="Google Shape;677;p55"/>
+          <p:cNvSpPr/>
+          <p:nvPr/>
+        </p:nvSpPr>
+        <p:spPr>
+          <a:xfrm>
+            <a:off x="4772001" y="1362233"/>
+            <a:ext cx="76199" cy="76190"/>
+          </a:xfrm>
+          <a:prstGeom prst="roundRect">
+            <a:avLst>
+              <a:gd fmla="val 31500" name="adj"/>
+            </a:avLst>
+          </a:prstGeom>
+          <a:solidFill>
+            <a:srgbClr val="0077FF"/>
+          </a:solidFill>
+          <a:ln>
+            <a:noFill/>
+          </a:ln>
+        </p:spPr>
+        <p:txBody>
+          <a:bodyPr anchorCtr="0" anchor="ctr" bIns="91425" lIns="91425" spcFirstLastPara="1" rIns="91425" wrap="square" tIns="91425">
+            <a:noAutofit/>
+          </a:bodyPr>
+          <a:lstStyle/>
+          <a:p>
+            <a:pPr indent="0" lvl="0" marL="0" rtl="0" algn="l">
+              <a:spcBef>
+                <a:spcPts val="0"/>
+              </a:spcBef>
+              <a:spcAft>
+                <a:spcPts val="0"/>
+              </a:spcAft>
+              <a:buNone/>
+            </a:pPr>
+            <a:r>
+              <a:t/>
+            </a:r>
+            <a:endParaRPr/>
+          </a:p>
+        </p:txBody>
+      </p:sp>
+      <p:sp>
+        <p:nvSpPr>
+          <p:cNvPr id="680" name="Google Shape;680;p55"/>
+          <p:cNvSpPr/>
+          <p:nvPr/>
+        </p:nvSpPr>
+        <p:spPr>
+          <a:xfrm>
+            <a:off x="6786527" y="1209852"/>
+            <a:ext cx="2071677" cy="3014270"/>
+          </a:xfrm>
+          <a:prstGeom prst="roundRect">
+            <a:avLst>
+              <a:gd fmla="val 4634" name="adj"/>
+            </a:avLst>
+          </a:prstGeom>
+          <a:solidFill>
+            <a:schemeClr val="lt2"/>
+          </a:solidFill>
+          <a:ln>
+            <a:noFill/>
+          </a:ln>
+        </p:spPr>
+        <p:txBody>
+          <a:bodyPr anchorCtr="0" anchor="ctr" bIns="91425" lIns="91425" spcFirstLastPara="1" rIns="91425" wrap="square" tIns="91425">
+            <a:noAutofit/>
+          </a:bodyPr>
+          <a:lstStyle/>
+          <a:p>
+            <a:pPr indent="0" lvl="0" marL="0" rtl="0" algn="l">
+              <a:spcBef>
+                <a:spcPts val="0"/>
+              </a:spcBef>
+              <a:spcAft>
+                <a:spcPts val="0"/>
+              </a:spcAft>
+              <a:buNone/>
+            </a:pPr>
+            <a:r>
+              <a:t/>
+            </a:r>
+            <a:endParaRPr/>
+          </a:p>
+        </p:txBody>
+      </p:sp>
+      <p:sp>
+        <p:nvSpPr>
+          <p:cNvPr id="681" name="Google Shape;681;p55"/>
+          <p:cNvSpPr/>
+          <p:nvPr/>
+        </p:nvSpPr>
+        <p:spPr>
+          <a:xfrm>
+            <a:off x="6938927" y="1362233"/>
+            <a:ext cx="1766878" cy="342855"/>
+          </a:xfrm>
+          <a:prstGeom prst="rect">
+            <a:avLst/>
+          </a:prstGeom>
+          <a:noFill/>
+          <a:ln>
+            <a:noFill/>
+          </a:ln>
+        </p:spPr>
+        <p:txBody>
+          <a:bodyPr anchorCtr="0" anchor="ctr" bIns="91425" lIns="91425" spcFirstLastPara="1" rIns="91425" wrap="square" tIns="91425">
+            <a:noAutofit/>
+          </a:bodyPr>
+          <a:lstStyle/>
+          <a:p>
+            <a:pPr indent="0" lvl="0" marL="0" rtl="0" algn="l">
+              <a:spcBef>
+                <a:spcPts val="0"/>
+              </a:spcBef>
+              <a:spcAft>
+                <a:spcPts val="0"/>
+              </a:spcAft>
+              <a:buNone/>
+            </a:pPr>
+            <a:r>
+              <a:t/>
+            </a:r>
+            <a:endParaRPr/>
+          </a:p>
+        </p:txBody>
+      </p:sp>
+      <p:sp>
+        <p:nvSpPr>
+          <p:cNvPr id="682" name="Google Shape;682;p55"/>
+          <p:cNvSpPr/>
+          <p:nvPr/>
+        </p:nvSpPr>
+        <p:spPr>
+          <a:xfrm>
+            <a:off x="6938927" y="1362233"/>
+            <a:ext cx="76199" cy="76190"/>
+          </a:xfrm>
+          <a:prstGeom prst="roundRect">
+            <a:avLst>
+              <a:gd fmla="val 31500" name="adj"/>
+            </a:avLst>
+          </a:prstGeom>
+          <a:solidFill>
+            <a:srgbClr val="0077FF"/>
+          </a:solidFill>
+          <a:ln>
+            <a:noFill/>
+          </a:ln>
+        </p:spPr>
+        <p:txBody>
+          <a:bodyPr anchorCtr="0" anchor="ctr" bIns="91425" lIns="91425" spcFirstLastPara="1" rIns="91425" wrap="square" tIns="91425">
+            <a:noAutofit/>
+          </a:bodyPr>
+          <a:lstStyle/>
+          <a:p>
+            <a:pPr indent="0" lvl="0" marL="0" rtl="0" algn="l">
+              <a:spcBef>
+                <a:spcPts val="0"/>
+              </a:spcBef>
+              <a:spcAft>
+                <a:spcPts val="0"/>
+              </a:spcAft>
+              <a:buNone/>
+            </a:pPr>
+            <a:r>
+              <a:t/>
+            </a:r>
+            <a:endParaRPr/>
+          </a:p>
+        </p:txBody>
+      </p:sp>
+      <p:sp>
+        <p:nvSpPr>
+          <p:cNvPr id="683" name="title"/>
           <p:cNvSpPr txBox="1"/>
           <p:nvPr/>
         </p:nvSpPr>
@@ -5703,7 +6040,7 @@
               <a:spcAft>
                 <a:spcPts val="300"/>
               </a:spcAft>
-              <a:defRPr sz="2400">
+              <a:defRPr sz="2438">
                 <a:solidFill>
                   <a:srgbClr val="000000"/>
                 </a:solidFill>
@@ -5713,7 +6050,7 @@
               </a:defRPr>
             </a:pPr>
             <a:r>
-              <a:rPr sz="2400">
+              <a:rPr sz="2438">
                 <a:solidFill>
                   <a:srgbClr val="000000"/>
                 </a:solidFill>
@@ -5728,14 +6065,14 @@
       </p:sp>
       <p:sp>
         <p:nvSpPr>
-          <p:cNvPr id="556" name="body"/>
+          <p:cNvPr id="684" name="card_0"/>
           <p:cNvSpPr txBox="1"/>
           <p:nvPr/>
         </p:nvSpPr>
         <p:spPr>
           <a:xfrm>
-            <a:off x="274320" y="1414513"/>
-            <a:ext cx="8344814" cy="1140746"/>
+            <a:off x="582575" y="1963753"/>
+            <a:ext cx="1516144" cy="2001662"/>
           </a:xfrm>
           <a:prstGeom prst="rect">
             <a:avLst/>
@@ -5752,7 +6089,7 @@
               <a:spcAft>
                 <a:spcPts val="300"/>
               </a:spcAft>
-              <a:defRPr sz="1225">
+              <a:defRPr sz="1800" b="0">
                 <a:solidFill>
                   <a:srgbClr val="000000"/>
                 </a:solidFill>
@@ -5762,7 +6099,7 @@
               </a:defRPr>
             </a:pPr>
             <a:r>
-              <a:rPr sz="1225">
+              <a:rPr sz="1800" b="0">
                 <a:solidFill>
                   <a:srgbClr val="000000"/>
                 </a:solidFill>
@@ -5770,15 +6107,38 @@
                 <a:ea typeface="Play"/>
                 <a:cs typeface="Play"/>
               </a:rPr>
-              <a:t>• 186 минут на сборку одной презентации</a:t>
-            </a:r>
-          </a:p>
+              <a:t>Сборка одной презентации 12 слайдов занимает 186 минут</a:t>
+            </a:r>
+          </a:p>
+        </p:txBody>
+      </p:sp>
+      <p:sp>
+        <p:nvSpPr>
+          <p:cNvPr id="685" name="card_1"/>
+          <p:cNvSpPr txBox="1"/>
+          <p:nvPr/>
+        </p:nvSpPr>
+        <p:spPr>
+          <a:xfrm>
+            <a:off x="2749428" y="1963753"/>
+            <a:ext cx="1516144" cy="2001662"/>
+          </a:xfrm>
+          <a:prstGeom prst="rect">
+            <a:avLst/>
+          </a:prstGeom>
+          <a:noFill/>
+        </p:spPr>
+        <p:txBody>
+          <a:bodyPr wrap="square" lIns="76200" rIns="76200" tIns="50800" bIns="50800">
+            <a:spAutoFit/>
+          </a:bodyPr>
+          <a:lstStyle/>
           <a:p>
             <a:pPr algn="l">
               <a:spcAft>
                 <a:spcPts val="300"/>
               </a:spcAft>
-              <a:defRPr sz="1225">
+              <a:defRPr sz="1800" b="0">
                 <a:solidFill>
                   <a:srgbClr val="000000"/>
                 </a:solidFill>
@@ -5788,7 +6148,7 @@
               </a:defRPr>
             </a:pPr>
             <a:r>
-              <a:rPr sz="1225">
+              <a:rPr sz="1800" b="0">
                 <a:solidFill>
                   <a:srgbClr val="000000"/>
                 </a:solidFill>
@@ -5796,15 +6156,38 @@
                 <a:ea typeface="Play"/>
                 <a:cs typeface="Play"/>
               </a:rPr>
-              <a:t>• 74 минуты на правки после ревью</a:t>
-            </a:r>
-          </a:p>
+              <a:t>Дополнительно 74 минуты на правки после ревью дизайнера</a:t>
+            </a:r>
+          </a:p>
+        </p:txBody>
+      </p:sp>
+      <p:sp>
+        <p:nvSpPr>
+          <p:cNvPr id="686" name="card_2"/>
+          <p:cNvSpPr txBox="1"/>
+          <p:nvPr/>
+        </p:nvSpPr>
+        <p:spPr>
+          <a:xfrm>
+            <a:off x="4916374" y="1963753"/>
+            <a:ext cx="1516144" cy="2001662"/>
+          </a:xfrm>
+          <a:prstGeom prst="rect">
+            <a:avLst/>
+          </a:prstGeom>
+          <a:noFill/>
+        </p:spPr>
+        <p:txBody>
+          <a:bodyPr wrap="square" lIns="76200" rIns="76200" tIns="50800" bIns="50800">
+            <a:spAutoFit/>
+          </a:bodyPr>
+          <a:lstStyle/>
           <a:p>
             <a:pPr algn="l">
               <a:spcAft>
                 <a:spcPts val="300"/>
               </a:spcAft>
-              <a:defRPr sz="1225">
+              <a:defRPr sz="1800" b="0">
                 <a:solidFill>
                   <a:srgbClr val="000000"/>
                 </a:solidFill>
@@ -5814,7 +6197,7 @@
               </a:defRPr>
             </a:pPr>
             <a:r>
-              <a:rPr sz="1225">
+              <a:rPr sz="1800" b="0">
                 <a:solidFill>
                   <a:srgbClr val="000000"/>
                 </a:solidFill>
@@ -5822,15 +6205,38 @@
                 <a:ea typeface="Play"/>
                 <a:cs typeface="Play"/>
               </a:rPr>
-              <a:t>• 19 из 42 колод нарушили фирменный стиль</a:t>
-            </a:r>
-          </a:p>
+              <a:t>19 из 42 колод нарушают фирменный стиль</a:t>
+            </a:r>
+          </a:p>
+        </p:txBody>
+      </p:sp>
+      <p:sp>
+        <p:nvSpPr>
+          <p:cNvPr id="687" name="card_3"/>
+          <p:cNvSpPr txBox="1"/>
+          <p:nvPr/>
+        </p:nvSpPr>
+        <p:spPr>
+          <a:xfrm>
+            <a:off x="7083319" y="1963753"/>
+            <a:ext cx="1516144" cy="2001662"/>
+          </a:xfrm>
+          <a:prstGeom prst="rect">
+            <a:avLst/>
+          </a:prstGeom>
+          <a:noFill/>
+        </p:spPr>
+        <p:txBody>
+          <a:bodyPr wrap="square" lIns="76200" rIns="76200" tIns="50800" bIns="50800">
+            <a:spAutoFit/>
+          </a:bodyPr>
+          <a:lstStyle/>
           <a:p>
             <a:pPr algn="l">
               <a:spcAft>
                 <a:spcPts val="300"/>
               </a:spcAft>
-              <a:defRPr sz="1225">
+              <a:defRPr sz="1800" b="0">
                 <a:solidFill>
                   <a:srgbClr val="000000"/>
                 </a:solidFill>
@@ -5840,7 +6246,7 @@
               </a:defRPr>
             </a:pPr>
             <a:r>
-              <a:rPr sz="1225">
+              <a:rPr sz="1800" b="0">
                 <a:solidFill>
                   <a:srgbClr val="000000"/>
                 </a:solidFill>
@@ -5848,55 +6254,11 @@
                 <a:ea typeface="Play"/>
                 <a:cs typeface="Play"/>
               </a:rPr>
-              <a:t>• 4 дизайнера закрывают 11 запросов в неделю</a:t>
-            </a:r>
-          </a:p>
-          <a:p>
-            <a:pPr algn="l">
-              <a:spcAft>
-                <a:spcPts val="300"/>
-              </a:spcAft>
-              <a:defRPr sz="1225">
-                <a:solidFill>
-                  <a:srgbClr val="000000"/>
-                </a:solidFill>
-                <a:latin typeface="Play"/>
-                <a:ea typeface="Play"/>
-                <a:cs typeface="Play"/>
-              </a:defRPr>
-            </a:pPr>
-            <a:r>
-              <a:rPr sz="1225">
-                <a:solidFill>
-                  <a:srgbClr val="000000"/>
-                </a:solidFill>
-                <a:latin typeface="Play"/>
-                <a:ea typeface="Play"/>
-                <a:cs typeface="Play"/>
-              </a:rPr>
-              <a:t>• Средний срок ожидания 6 рабочих дней</a:t>
-            </a:r>
-          </a:p>
-        </p:txBody>
-      </p:sp>
-      <p:graphicFrame>
-        <p:nvGraphicFramePr>
-          <p:cNvPr id="557" name="Chart 556"/>
-          <p:cNvGraphicFramePr>
-            <a:graphicFrameLocks noGrp="1"/>
-          </p:cNvGraphicFramePr>
-          <p:nvPr/>
-        </p:nvGraphicFramePr>
-        <p:xfrm>
-          <a:off x="274320" y="2683847"/>
-          <a:ext cx="8344814" cy="1582531"/>
-        </p:xfrm>
-        <a:graphic>
-          <a:graphicData uri="http://schemas.openxmlformats.org/drawingml/2006/chart">
-            <c:chart xmlns:c="http://schemas.openxmlformats.org/drawingml/2006/chart" r:id="rId2"/>
-          </a:graphicData>
-        </a:graphic>
-      </p:graphicFrame>
+              <a:t>Дизайн‑отдел из 4 человек закрывает 11 запросов, ожидание 6 дней</a:t>
+            </a:r>
+          </a:p>
+        </p:txBody>
+      </p:sp>
     </p:spTree>
   </p:cSld>
   <p:clrMapOvr>
@@ -5917,7 +6279,540 @@
       <p:grpSpPr/>
       <p:sp>
         <p:nvSpPr>
-          <p:cNvPr id="2" name="title"/>
+          <p:cNvPr id="532" name="Google Shape;532;p53"/>
+          <p:cNvSpPr/>
+          <p:nvPr/>
+        </p:nvSpPr>
+        <p:spPr>
+          <a:xfrm>
+            <a:off x="303214" y="1022533"/>
+            <a:ext cx="8451939" cy="1433588"/>
+          </a:xfrm>
+          <a:prstGeom prst="rect">
+            <a:avLst/>
+          </a:prstGeom>
+          <a:noFill/>
+          <a:ln>
+            <a:noFill/>
+          </a:ln>
+        </p:spPr>
+        <p:txBody>
+          <a:bodyPr anchorCtr="0" anchor="ctr" bIns="91425" lIns="91425" spcFirstLastPara="1" rIns="91425" wrap="square" tIns="91425">
+            <a:noAutofit/>
+          </a:bodyPr>
+          <a:lstStyle/>
+          <a:p>
+            <a:pPr indent="0" lvl="0" marL="0" rtl="0" algn="l">
+              <a:spcBef>
+                <a:spcPts val="0"/>
+              </a:spcBef>
+              <a:spcAft>
+                <a:spcPts val="0"/>
+              </a:spcAft>
+              <a:buNone/>
+            </a:pPr>
+            <a:r>
+              <a:t/>
+            </a:r>
+            <a:endParaRPr/>
+          </a:p>
+        </p:txBody>
+      </p:sp>
+      <p:sp>
+        <p:nvSpPr>
+          <p:cNvPr id="533" name="Google Shape;533;p53"/>
+          <p:cNvSpPr/>
+          <p:nvPr/>
+        </p:nvSpPr>
+        <p:spPr>
+          <a:xfrm>
+            <a:off x="303214" y="1022533"/>
+            <a:ext cx="1395256" cy="1433588"/>
+          </a:xfrm>
+          <a:prstGeom prst="rect">
+            <a:avLst/>
+          </a:prstGeom>
+          <a:noFill/>
+          <a:ln>
+            <a:noFill/>
+          </a:ln>
+        </p:spPr>
+        <p:txBody>
+          <a:bodyPr anchorCtr="0" anchor="ctr" bIns="91425" lIns="91425" spcFirstLastPara="1" rIns="91425" wrap="square" tIns="91425">
+            <a:noAutofit/>
+          </a:bodyPr>
+          <a:lstStyle/>
+          <a:p>
+            <a:pPr indent="0" lvl="0" marL="0" rtl="0" algn="l">
+              <a:spcBef>
+                <a:spcPts val="0"/>
+              </a:spcBef>
+              <a:spcAft>
+                <a:spcPts val="0"/>
+              </a:spcAft>
+              <a:buNone/>
+            </a:pPr>
+            <a:r>
+              <a:t/>
+            </a:r>
+            <a:endParaRPr/>
+          </a:p>
+        </p:txBody>
+      </p:sp>
+      <p:sp>
+        <p:nvSpPr>
+          <p:cNvPr id="537" name="Google Shape;537;p53"/>
+          <p:cNvSpPr/>
+          <p:nvPr/>
+        </p:nvSpPr>
+        <p:spPr>
+          <a:xfrm>
+            <a:off x="2067385" y="1022533"/>
+            <a:ext cx="1395256" cy="1433588"/>
+          </a:xfrm>
+          <a:prstGeom prst="rect">
+            <a:avLst/>
+          </a:prstGeom>
+          <a:noFill/>
+          <a:ln>
+            <a:noFill/>
+          </a:ln>
+        </p:spPr>
+        <p:txBody>
+          <a:bodyPr anchorCtr="0" anchor="ctr" bIns="91425" lIns="91425" spcFirstLastPara="1" rIns="91425" wrap="square" tIns="91425">
+            <a:noAutofit/>
+          </a:bodyPr>
+          <a:lstStyle/>
+          <a:p>
+            <a:pPr indent="0" lvl="0" marL="0" rtl="0" algn="l">
+              <a:spcBef>
+                <a:spcPts val="0"/>
+              </a:spcBef>
+              <a:spcAft>
+                <a:spcPts val="0"/>
+              </a:spcAft>
+              <a:buNone/>
+            </a:pPr>
+            <a:r>
+              <a:t/>
+            </a:r>
+            <a:endParaRPr/>
+          </a:p>
+        </p:txBody>
+      </p:sp>
+      <p:sp>
+        <p:nvSpPr>
+          <p:cNvPr id="541" name="Google Shape;541;p53"/>
+          <p:cNvSpPr/>
+          <p:nvPr/>
+        </p:nvSpPr>
+        <p:spPr>
+          <a:xfrm>
+            <a:off x="3831556" y="1022533"/>
+            <a:ext cx="1395256" cy="1433588"/>
+          </a:xfrm>
+          <a:prstGeom prst="rect">
+            <a:avLst/>
+          </a:prstGeom>
+          <a:noFill/>
+          <a:ln>
+            <a:noFill/>
+          </a:ln>
+        </p:spPr>
+        <p:txBody>
+          <a:bodyPr anchorCtr="0" anchor="ctr" bIns="91425" lIns="91425" spcFirstLastPara="1" rIns="91425" wrap="square" tIns="91425">
+            <a:noAutofit/>
+          </a:bodyPr>
+          <a:lstStyle/>
+          <a:p>
+            <a:pPr indent="0" lvl="0" marL="0" rtl="0" algn="l">
+              <a:spcBef>
+                <a:spcPts val="0"/>
+              </a:spcBef>
+              <a:spcAft>
+                <a:spcPts val="0"/>
+              </a:spcAft>
+              <a:buNone/>
+            </a:pPr>
+            <a:r>
+              <a:t/>
+            </a:r>
+            <a:endParaRPr/>
+          </a:p>
+        </p:txBody>
+      </p:sp>
+      <p:sp>
+        <p:nvSpPr>
+          <p:cNvPr id="545" name="Google Shape;545;p53"/>
+          <p:cNvSpPr/>
+          <p:nvPr/>
+        </p:nvSpPr>
+        <p:spPr>
+          <a:xfrm>
+            <a:off x="5595727" y="1022533"/>
+            <a:ext cx="1395256" cy="1433588"/>
+          </a:xfrm>
+          <a:prstGeom prst="rect">
+            <a:avLst/>
+          </a:prstGeom>
+          <a:noFill/>
+          <a:ln>
+            <a:noFill/>
+          </a:ln>
+        </p:spPr>
+        <p:txBody>
+          <a:bodyPr anchorCtr="0" anchor="ctr" bIns="91425" lIns="91425" spcFirstLastPara="1" rIns="91425" wrap="square" tIns="91425">
+            <a:noAutofit/>
+          </a:bodyPr>
+          <a:lstStyle/>
+          <a:p>
+            <a:pPr indent="0" lvl="0" marL="0" rtl="0" algn="l">
+              <a:spcBef>
+                <a:spcPts val="0"/>
+              </a:spcBef>
+              <a:spcAft>
+                <a:spcPts val="0"/>
+              </a:spcAft>
+              <a:buNone/>
+            </a:pPr>
+            <a:r>
+              <a:t/>
+            </a:r>
+            <a:endParaRPr/>
+          </a:p>
+        </p:txBody>
+      </p:sp>
+      <p:sp>
+        <p:nvSpPr>
+          <p:cNvPr id="549" name="Google Shape;549;p53"/>
+          <p:cNvSpPr/>
+          <p:nvPr/>
+        </p:nvSpPr>
+        <p:spPr>
+          <a:xfrm>
+            <a:off x="7359897" y="1022533"/>
+            <a:ext cx="1395256" cy="1433588"/>
+          </a:xfrm>
+          <a:prstGeom prst="rect">
+            <a:avLst/>
+          </a:prstGeom>
+          <a:noFill/>
+          <a:ln>
+            <a:noFill/>
+          </a:ln>
+        </p:spPr>
+        <p:txBody>
+          <a:bodyPr anchorCtr="0" anchor="ctr" bIns="91425" lIns="91425" spcFirstLastPara="1" rIns="91425" wrap="square" tIns="91425">
+            <a:noAutofit/>
+          </a:bodyPr>
+          <a:lstStyle/>
+          <a:p>
+            <a:pPr indent="0" lvl="0" marL="0" rtl="0" algn="l">
+              <a:spcBef>
+                <a:spcPts val="0"/>
+              </a:spcBef>
+              <a:spcAft>
+                <a:spcPts val="0"/>
+              </a:spcAft>
+              <a:buNone/>
+            </a:pPr>
+            <a:r>
+              <a:t/>
+            </a:r>
+            <a:endParaRPr/>
+          </a:p>
+        </p:txBody>
+      </p:sp>
+      <p:sp>
+        <p:nvSpPr>
+          <p:cNvPr id="553" name="Google Shape;553;p53"/>
+          <p:cNvSpPr/>
+          <p:nvPr/>
+        </p:nvSpPr>
+        <p:spPr>
+          <a:xfrm>
+            <a:off x="276488" y="2955549"/>
+            <a:ext cx="8451939" cy="1433588"/>
+          </a:xfrm>
+          <a:prstGeom prst="rect">
+            <a:avLst/>
+          </a:prstGeom>
+          <a:noFill/>
+          <a:ln>
+            <a:noFill/>
+          </a:ln>
+        </p:spPr>
+        <p:txBody>
+          <a:bodyPr anchorCtr="0" anchor="ctr" bIns="91425" lIns="91425" spcFirstLastPara="1" rIns="91425" wrap="square" tIns="91425">
+            <a:noAutofit/>
+          </a:bodyPr>
+          <a:lstStyle/>
+          <a:p>
+            <a:pPr indent="0" lvl="0" marL="0" rtl="0" algn="l">
+              <a:spcBef>
+                <a:spcPts val="0"/>
+              </a:spcBef>
+              <a:spcAft>
+                <a:spcPts val="0"/>
+              </a:spcAft>
+              <a:buNone/>
+            </a:pPr>
+            <a:r>
+              <a:t/>
+            </a:r>
+            <a:endParaRPr/>
+          </a:p>
+        </p:txBody>
+      </p:sp>
+      <p:sp>
+        <p:nvSpPr>
+          <p:cNvPr id="554" name="Google Shape;554;p53"/>
+          <p:cNvSpPr/>
+          <p:nvPr/>
+        </p:nvSpPr>
+        <p:spPr>
+          <a:xfrm>
+            <a:off x="303214" y="2797849"/>
+            <a:ext cx="8451939" cy="1433588"/>
+          </a:xfrm>
+          <a:prstGeom prst="rect">
+            <a:avLst/>
+          </a:prstGeom>
+          <a:noFill/>
+          <a:ln>
+            <a:noFill/>
+          </a:ln>
+        </p:spPr>
+        <p:txBody>
+          <a:bodyPr anchorCtr="0" anchor="ctr" bIns="91425" lIns="91425" spcFirstLastPara="1" rIns="91425" wrap="square" tIns="91425">
+            <a:noAutofit/>
+          </a:bodyPr>
+          <a:lstStyle/>
+          <a:p>
+            <a:pPr indent="0" lvl="0" marL="0" rtl="0" algn="l">
+              <a:spcBef>
+                <a:spcPts val="0"/>
+              </a:spcBef>
+              <a:spcAft>
+                <a:spcPts val="0"/>
+              </a:spcAft>
+              <a:buNone/>
+            </a:pPr>
+            <a:r>
+              <a:t/>
+            </a:r>
+            <a:endParaRPr/>
+          </a:p>
+        </p:txBody>
+      </p:sp>
+      <p:sp>
+        <p:nvSpPr>
+          <p:cNvPr id="555" name="Google Shape;555;p53"/>
+          <p:cNvSpPr/>
+          <p:nvPr/>
+        </p:nvSpPr>
+        <p:spPr>
+          <a:xfrm>
+            <a:off x="303214" y="2797849"/>
+            <a:ext cx="1395256" cy="1433588"/>
+          </a:xfrm>
+          <a:prstGeom prst="rect">
+            <a:avLst/>
+          </a:prstGeom>
+          <a:noFill/>
+          <a:ln>
+            <a:noFill/>
+          </a:ln>
+        </p:spPr>
+        <p:txBody>
+          <a:bodyPr anchorCtr="0" anchor="ctr" bIns="91425" lIns="91425" spcFirstLastPara="1" rIns="91425" wrap="square" tIns="91425">
+            <a:noAutofit/>
+          </a:bodyPr>
+          <a:lstStyle/>
+          <a:p>
+            <a:pPr indent="0" lvl="0" marL="0" rtl="0" algn="l">
+              <a:spcBef>
+                <a:spcPts val="0"/>
+              </a:spcBef>
+              <a:spcAft>
+                <a:spcPts val="0"/>
+              </a:spcAft>
+              <a:buNone/>
+            </a:pPr>
+            <a:r>
+              <a:t/>
+            </a:r>
+            <a:endParaRPr/>
+          </a:p>
+        </p:txBody>
+      </p:sp>
+      <p:sp>
+        <p:nvSpPr>
+          <p:cNvPr id="559" name="Google Shape;559;p53"/>
+          <p:cNvSpPr/>
+          <p:nvPr/>
+        </p:nvSpPr>
+        <p:spPr>
+          <a:xfrm>
+            <a:off x="2067385" y="2797849"/>
+            <a:ext cx="1395256" cy="1433588"/>
+          </a:xfrm>
+          <a:prstGeom prst="rect">
+            <a:avLst/>
+          </a:prstGeom>
+          <a:noFill/>
+          <a:ln>
+            <a:noFill/>
+          </a:ln>
+        </p:spPr>
+        <p:txBody>
+          <a:bodyPr anchorCtr="0" anchor="ctr" bIns="91425" lIns="91425" spcFirstLastPara="1" rIns="91425" wrap="square" tIns="91425">
+            <a:noAutofit/>
+          </a:bodyPr>
+          <a:lstStyle/>
+          <a:p>
+            <a:pPr indent="0" lvl="0" marL="0" rtl="0" algn="l">
+              <a:spcBef>
+                <a:spcPts val="0"/>
+              </a:spcBef>
+              <a:spcAft>
+                <a:spcPts val="0"/>
+              </a:spcAft>
+              <a:buNone/>
+            </a:pPr>
+            <a:r>
+              <a:t/>
+            </a:r>
+            <a:endParaRPr/>
+          </a:p>
+        </p:txBody>
+      </p:sp>
+      <p:sp>
+        <p:nvSpPr>
+          <p:cNvPr id="563" name="Google Shape;563;p53"/>
+          <p:cNvSpPr/>
+          <p:nvPr/>
+        </p:nvSpPr>
+        <p:spPr>
+          <a:xfrm>
+            <a:off x="3831556" y="2797849"/>
+            <a:ext cx="1395256" cy="1433588"/>
+          </a:xfrm>
+          <a:prstGeom prst="rect">
+            <a:avLst/>
+          </a:prstGeom>
+          <a:noFill/>
+          <a:ln>
+            <a:noFill/>
+          </a:ln>
+        </p:spPr>
+        <p:txBody>
+          <a:bodyPr anchorCtr="0" anchor="ctr" bIns="91425" lIns="91425" spcFirstLastPara="1" rIns="91425" wrap="square" tIns="91425">
+            <a:noAutofit/>
+          </a:bodyPr>
+          <a:lstStyle/>
+          <a:p>
+            <a:pPr indent="0" lvl="0" marL="0" rtl="0" algn="l">
+              <a:spcBef>
+                <a:spcPts val="0"/>
+              </a:spcBef>
+              <a:spcAft>
+                <a:spcPts val="0"/>
+              </a:spcAft>
+              <a:buNone/>
+            </a:pPr>
+            <a:r>
+              <a:t/>
+            </a:r>
+            <a:endParaRPr/>
+          </a:p>
+        </p:txBody>
+      </p:sp>
+      <p:sp>
+        <p:nvSpPr>
+          <p:cNvPr id="567" name="Google Shape;567;p53"/>
+          <p:cNvSpPr/>
+          <p:nvPr/>
+        </p:nvSpPr>
+        <p:spPr>
+          <a:xfrm>
+            <a:off x="5595727" y="2797849"/>
+            <a:ext cx="1395256" cy="1433588"/>
+          </a:xfrm>
+          <a:prstGeom prst="rect">
+            <a:avLst/>
+          </a:prstGeom>
+          <a:noFill/>
+          <a:ln>
+            <a:noFill/>
+          </a:ln>
+        </p:spPr>
+        <p:txBody>
+          <a:bodyPr anchorCtr="0" anchor="ctr" bIns="91425" lIns="91425" spcFirstLastPara="1" rIns="91425" wrap="square" tIns="91425">
+            <a:noAutofit/>
+          </a:bodyPr>
+          <a:lstStyle/>
+          <a:p>
+            <a:pPr indent="0" lvl="0" marL="0" rtl="0" algn="l">
+              <a:spcBef>
+                <a:spcPts val="0"/>
+              </a:spcBef>
+              <a:spcAft>
+                <a:spcPts val="0"/>
+              </a:spcAft>
+              <a:buNone/>
+            </a:pPr>
+            <a:r>
+              <a:t/>
+            </a:r>
+            <a:endParaRPr/>
+          </a:p>
+        </p:txBody>
+      </p:sp>
+      <p:sp>
+        <p:nvSpPr>
+          <p:cNvPr id="571" name="Google Shape;571;p53"/>
+          <p:cNvSpPr/>
+          <p:nvPr/>
+        </p:nvSpPr>
+        <p:spPr>
+          <a:xfrm>
+            <a:off x="7359897" y="2797849"/>
+            <a:ext cx="1395256" cy="1433588"/>
+          </a:xfrm>
+          <a:prstGeom prst="rect">
+            <a:avLst/>
+          </a:prstGeom>
+          <a:noFill/>
+          <a:ln>
+            <a:noFill/>
+          </a:ln>
+        </p:spPr>
+        <p:txBody>
+          <a:bodyPr anchorCtr="0" anchor="ctr" bIns="91425" lIns="91425" spcFirstLastPara="1" rIns="91425" wrap="square" tIns="91425">
+            <a:noAutofit/>
+          </a:bodyPr>
+          <a:lstStyle/>
+          <a:p>
+            <a:pPr indent="0" lvl="0" marL="0" rtl="0" algn="l">
+              <a:spcBef>
+                <a:spcPts val="0"/>
+              </a:spcBef>
+              <a:spcAft>
+                <a:spcPts val="0"/>
+              </a:spcAft>
+              <a:buNone/>
+            </a:pPr>
+            <a:r>
+              <a:t/>
+            </a:r>
+            <a:endParaRPr/>
+          </a:p>
+        </p:txBody>
+      </p:sp>
+      <p:sp>
+        <p:nvSpPr>
+          <p:cNvPr id="572" name="title"/>
           <p:cNvSpPr txBox="1"/>
           <p:nvPr/>
         </p:nvSpPr>
@@ -5941,7 +6836,7 @@
               <a:spcAft>
                 <a:spcPts val="300"/>
               </a:spcAft>
-              <a:defRPr sz="2400">
+              <a:defRPr sz="2438">
                 <a:solidFill>
                   <a:srgbClr val="000000"/>
                 </a:solidFill>
@@ -5951,7 +6846,7 @@
               </a:defRPr>
             </a:pPr>
             <a:r>
-              <a:rPr sz="2400">
+              <a:rPr sz="2438">
                 <a:solidFill>
                   <a:srgbClr val="000000"/>
                 </a:solidFill>
@@ -5966,14 +6861,14 @@
       </p:sp>
       <p:sp>
         <p:nvSpPr>
-          <p:cNvPr id="3" name="body"/>
+          <p:cNvPr id="573" name="body"/>
           <p:cNvSpPr txBox="1"/>
           <p:nvPr/>
         </p:nvSpPr>
         <p:spPr>
           <a:xfrm>
-            <a:off x="274320" y="1414513"/>
-            <a:ext cx="7189469" cy="2602405"/>
+            <a:off x="274320" y="1891002"/>
+            <a:ext cx="8344814" cy="1422400"/>
           </a:xfrm>
           <a:prstGeom prst="rect">
             <a:avLst/>
@@ -5990,7 +6885,7 @@
               <a:spcAft>
                 <a:spcPts val="300"/>
               </a:spcAft>
-              <a:defRPr sz="1803" b="1">
+              <a:defRPr sz="1600">
                 <a:solidFill>
                   <a:srgbClr val="000000"/>
                 </a:solidFill>
@@ -6000,7 +6895,7 @@
               </a:defRPr>
             </a:pPr>
             <a:r>
-              <a:rPr sz="1803" b="1">
+              <a:rPr sz="1600">
                 <a:solidFill>
                   <a:srgbClr val="000000"/>
                 </a:solidFill>
@@ -6008,7 +6903,7 @@
                 <a:ea typeface="Play"/>
                 <a:cs typeface="Play"/>
               </a:rPr>
-              <a:t>• Принимает шаблон pptx и материалы</a:t>
+              <a:t>• Сервис принимает шаблон pptx и материалы, генерирует колоду по дизайн‑системе</a:t>
             </a:r>
           </a:p>
           <a:p>
@@ -6016,7 +6911,7 @@
               <a:spcAft>
                 <a:spcPts val="300"/>
               </a:spcAft>
-              <a:defRPr sz="1803" b="1">
+              <a:defRPr sz="1600">
                 <a:solidFill>
                   <a:srgbClr val="000000"/>
                 </a:solidFill>
@@ -6026,7 +6921,7 @@
               </a:defRPr>
             </a:pPr>
             <a:r>
-              <a:rPr sz="1803" b="1">
+              <a:rPr sz="1600">
                 <a:solidFill>
                   <a:srgbClr val="000000"/>
                 </a:solidFill>
@@ -6034,7 +6929,7 @@
                 <a:ea typeface="Play"/>
                 <a:cs typeface="Play"/>
               </a:rPr>
-              <a:t>• Генерирует колоду по дизайн‑системе</a:t>
+              <a:t>• Экспорт в pptx, pdf, html с редактируемыми слайдами</a:t>
             </a:r>
           </a:p>
           <a:p>
@@ -6042,7 +6937,7 @@
               <a:spcAft>
                 <a:spcPts val="300"/>
               </a:spcAft>
-              <a:defRPr sz="1803" b="1">
+              <a:defRPr sz="1600">
                 <a:solidFill>
                   <a:srgbClr val="000000"/>
                 </a:solidFill>
@@ -6052,7 +6947,7 @@
               </a:defRPr>
             </a:pPr>
             <a:r>
-              <a:rPr sz="1803" b="1">
+              <a:rPr sz="1600">
                 <a:solidFill>
                   <a:srgbClr val="000000"/>
                 </a:solidFill>
@@ -6060,7 +6955,7 @@
                 <a:ea typeface="Play"/>
                 <a:cs typeface="Play"/>
               </a:rPr>
-              <a:t>• Аудит качества проверяет каждый элемент</a:t>
+              <a:t>• Аудит качества проверяет стиль и корректирует автоматически</a:t>
             </a:r>
           </a:p>
           <a:p>
@@ -6068,7 +6963,7 @@
               <a:spcAft>
                 <a:spcPts val="300"/>
               </a:spcAft>
-              <a:defRPr sz="1803" b="1">
+              <a:defRPr sz="1600">
                 <a:solidFill>
                   <a:srgbClr val="000000"/>
                 </a:solidFill>
@@ -6078,7 +6973,7 @@
               </a:defRPr>
             </a:pPr>
             <a:r>
-              <a:rPr sz="1803" b="1">
+              <a:rPr sz="1600">
                 <a:solidFill>
                   <a:srgbClr val="000000"/>
                 </a:solidFill>
@@ -6086,33 +6981,7 @@
                 <a:ea typeface="Play"/>
                 <a:cs typeface="Play"/>
               </a:rPr>
-              <a:t>• Экспорт в pptx, pdf и html</a:t>
-            </a:r>
-          </a:p>
-          <a:p>
-            <a:pPr algn="l">
-              <a:spcAft>
-                <a:spcPts val="300"/>
-              </a:spcAft>
-              <a:defRPr sz="1803" b="1">
-                <a:solidFill>
-                  <a:srgbClr val="000000"/>
-                </a:solidFill>
-                <a:latin typeface="Play"/>
-                <a:ea typeface="Play"/>
-                <a:cs typeface="Play"/>
-              </a:defRPr>
-            </a:pPr>
-            <a:r>
-              <a:rPr sz="1803" b="1">
-                <a:solidFill>
-                  <a:srgbClr val="000000"/>
-                </a:solidFill>
-                <a:latin typeface="Play"/>
-                <a:ea typeface="Play"/>
-                <a:cs typeface="Play"/>
-              </a:rPr>
-              <a:t>• Слайды остаются редактируемыми</a:t>
+              <a:t>• Слайды остаются редактируемыми, без картинок</a:t>
             </a:r>
           </a:p>
         </p:txBody>
@@ -6135,23 +7004,16 @@
         <p:nvPr/>
       </p:nvGrpSpPr>
       <p:grpSpPr/>
-      <p:pic>
-        <p:nvPicPr>
-          <p:cNvPr descr=" " id="2385" name="Google Shape;2385;p88"/>
-          <p:cNvPicPr preferRelativeResize="0"/>
-          <p:nvPr/>
-        </p:nvPicPr>
-        <p:blipFill rotWithShape="1">
-          <a:blip r:embed="rId2">
-            <a:alphaModFix/>
-          </a:blip>
-          <a:srcRect b="0" l="0" r="0" t="0"/>
-          <a:stretch/>
-        </p:blipFill>
-        <p:spPr>
-          <a:xfrm>
-            <a:off x="388142" y="2000324"/>
-            <a:ext cx="8755811" cy="9524"/>
+      <p:sp>
+        <p:nvSpPr>
+          <p:cNvPr id="662" name="Google Shape;662;p55"/>
+          <p:cNvSpPr/>
+          <p:nvPr/>
+        </p:nvSpPr>
+        <p:spPr>
+          <a:xfrm>
+            <a:off x="8667705" y="4666977"/>
+            <a:ext cx="190499" cy="190475"/>
           </a:xfrm>
           <a:prstGeom prst="rect">
             <a:avLst/>
@@ -6161,17 +7023,38 @@
             <a:noFill/>
           </a:ln>
         </p:spPr>
-      </p:pic>
-      <p:sp>
-        <p:nvSpPr>
-          <p:cNvPr id="2386" name="Google Shape;2386;p88"/>
+        <p:txBody>
+          <a:bodyPr anchorCtr="0" anchor="ctr" bIns="91425" lIns="91425" spcFirstLastPara="1" rIns="91425" wrap="square" tIns="91425">
+            <a:noAutofit/>
+          </a:bodyPr>
+          <a:lstStyle/>
+          <a:p>
+            <a:pPr indent="0" lvl="0" marL="0" rtl="0" algn="l">
+              <a:spcBef>
+                <a:spcPts val="0"/>
+              </a:spcBef>
+              <a:spcAft>
+                <a:spcPts val="0"/>
+              </a:spcAft>
+              <a:buNone/>
+            </a:pPr>
+            <a:r>
+              <a:t/>
+            </a:r>
+            <a:endParaRPr/>
+          </a:p>
+        </p:txBody>
+      </p:sp>
+      <p:sp>
+        <p:nvSpPr>
+          <p:cNvPr id="663" name="Google Shape;663;p55"/>
           <p:cNvSpPr/>
           <p:nvPr/>
         </p:nvSpPr>
         <p:spPr>
           <a:xfrm>
-            <a:off x="319086" y="1286042"/>
-            <a:ext cx="1690679" cy="1128566"/>
+            <a:off x="285748" y="286047"/>
+            <a:ext cx="8572456" cy="3938075"/>
           </a:xfrm>
           <a:prstGeom prst="rect">
             <a:avLst/>
@@ -6205,14 +7088,14 @@
       </p:sp>
       <p:sp>
         <p:nvSpPr>
-          <p:cNvPr id="2388" name="Google Shape;2388;p88"/>
+          <p:cNvPr id="664" name="Google Shape;664;p55"/>
           <p:cNvSpPr/>
           <p:nvPr/>
         </p:nvSpPr>
         <p:spPr>
           <a:xfrm>
-            <a:off x="2600312" y="1286042"/>
-            <a:ext cx="1690679" cy="1128566"/>
+            <a:off x="285748" y="1209852"/>
+            <a:ext cx="8572456" cy="3014270"/>
           </a:xfrm>
           <a:prstGeom prst="rect">
             <a:avLst/>
@@ -6246,14 +7129,59 @@
       </p:sp>
       <p:sp>
         <p:nvSpPr>
-          <p:cNvPr id="2390" name="Google Shape;2390;p88"/>
+          <p:cNvPr id="665" name="Google Shape;665;p55"/>
           <p:cNvSpPr/>
           <p:nvPr/>
         </p:nvSpPr>
         <p:spPr>
           <a:xfrm>
-            <a:off x="4881537" y="1286042"/>
-            <a:ext cx="1690679" cy="1128566"/>
+            <a:off x="285749" y="1209852"/>
+            <a:ext cx="2071677" cy="3014270"/>
+          </a:xfrm>
+          <a:prstGeom prst="roundRect">
+            <a:avLst>
+              <a:gd fmla="val 4634" name="adj"/>
+            </a:avLst>
+          </a:prstGeom>
+          <a:solidFill>
+            <a:schemeClr val="lt2"/>
+          </a:solidFill>
+          <a:ln>
+            <a:noFill/>
+          </a:ln>
+        </p:spPr>
+        <p:txBody>
+          <a:bodyPr anchorCtr="0" anchor="ctr" bIns="91425" lIns="91425" spcFirstLastPara="1" rIns="91425" wrap="square" tIns="91425">
+            <a:noAutofit/>
+          </a:bodyPr>
+          <a:lstStyle/>
+          <a:p>
+            <a:pPr indent="0" lvl="0" marL="0" rtl="0" algn="l">
+              <a:spcBef>
+                <a:spcPts val="0"/>
+              </a:spcBef>
+              <a:spcAft>
+                <a:spcPts val="0"/>
+              </a:spcAft>
+              <a:buNone/>
+            </a:pPr>
+            <a:r>
+              <a:t/>
+            </a:r>
+            <a:endParaRPr/>
+          </a:p>
+        </p:txBody>
+      </p:sp>
+      <p:sp>
+        <p:nvSpPr>
+          <p:cNvPr id="666" name="Google Shape;666;p55"/>
+          <p:cNvSpPr/>
+          <p:nvPr/>
+        </p:nvSpPr>
+        <p:spPr>
+          <a:xfrm>
+            <a:off x="438148" y="1362233"/>
+            <a:ext cx="1766878" cy="342855"/>
           </a:xfrm>
           <a:prstGeom prst="rect">
             <a:avLst/>
@@ -6287,14 +7215,104 @@
       </p:sp>
       <p:sp>
         <p:nvSpPr>
-          <p:cNvPr id="2392" name="Google Shape;2392;p88"/>
+          <p:cNvPr id="667" name="Google Shape;667;p55"/>
           <p:cNvSpPr/>
           <p:nvPr/>
         </p:nvSpPr>
         <p:spPr>
           <a:xfrm>
-            <a:off x="7162763" y="1286042"/>
-            <a:ext cx="1690679" cy="1128566"/>
+            <a:off x="438148" y="1362233"/>
+            <a:ext cx="76199" cy="76190"/>
+          </a:xfrm>
+          <a:prstGeom prst="roundRect">
+            <a:avLst>
+              <a:gd fmla="val 31500" name="adj"/>
+            </a:avLst>
+          </a:prstGeom>
+          <a:solidFill>
+            <a:srgbClr val="0077FF"/>
+          </a:solidFill>
+          <a:ln>
+            <a:noFill/>
+          </a:ln>
+        </p:spPr>
+        <p:txBody>
+          <a:bodyPr anchorCtr="0" anchor="ctr" bIns="91425" lIns="91425" spcFirstLastPara="1" rIns="91425" wrap="square" tIns="91425">
+            <a:noAutofit/>
+          </a:bodyPr>
+          <a:lstStyle/>
+          <a:p>
+            <a:pPr indent="0" lvl="0" marL="0" rtl="0" algn="l">
+              <a:spcBef>
+                <a:spcPts val="0"/>
+              </a:spcBef>
+              <a:spcAft>
+                <a:spcPts val="0"/>
+              </a:spcAft>
+              <a:buNone/>
+            </a:pPr>
+            <a:r>
+              <a:t/>
+            </a:r>
+            <a:endParaRPr/>
+          </a:p>
+        </p:txBody>
+      </p:sp>
+      <p:sp>
+        <p:nvSpPr>
+          <p:cNvPr id="670" name="Google Shape;670;p55"/>
+          <p:cNvSpPr/>
+          <p:nvPr/>
+        </p:nvSpPr>
+        <p:spPr>
+          <a:xfrm>
+            <a:off x="2452675" y="1209852"/>
+            <a:ext cx="2071677" cy="3014270"/>
+          </a:xfrm>
+          <a:prstGeom prst="roundRect">
+            <a:avLst>
+              <a:gd fmla="val 4634" name="adj"/>
+            </a:avLst>
+          </a:prstGeom>
+          <a:solidFill>
+            <a:schemeClr val="lt2"/>
+          </a:solidFill>
+          <a:ln>
+            <a:noFill/>
+          </a:ln>
+        </p:spPr>
+        <p:txBody>
+          <a:bodyPr anchorCtr="0" anchor="ctr" bIns="91425" lIns="91425" spcFirstLastPara="1" rIns="91425" wrap="square" tIns="91425">
+            <a:noAutofit/>
+          </a:bodyPr>
+          <a:lstStyle/>
+          <a:p>
+            <a:pPr indent="0" lvl="0" marL="0" rtl="0" algn="l">
+              <a:spcBef>
+                <a:spcPts val="0"/>
+              </a:spcBef>
+              <a:spcAft>
+                <a:spcPts val="0"/>
+              </a:spcAft>
+              <a:buNone/>
+            </a:pPr>
+            <a:r>
+              <a:t/>
+            </a:r>
+            <a:endParaRPr/>
+          </a:p>
+        </p:txBody>
+      </p:sp>
+      <p:sp>
+        <p:nvSpPr>
+          <p:cNvPr id="671" name="Google Shape;671;p55"/>
+          <p:cNvSpPr/>
+          <p:nvPr/>
+        </p:nvSpPr>
+        <p:spPr>
+          <a:xfrm>
+            <a:off x="2605074" y="1362233"/>
+            <a:ext cx="1766878" cy="342855"/>
           </a:xfrm>
           <a:prstGeom prst="rect">
             <a:avLst/>
@@ -6326,23 +7344,106 @@
           </a:p>
         </p:txBody>
       </p:sp>
-      <p:pic>
-        <p:nvPicPr>
-          <p:cNvPr descr=" " id="2394" name="Google Shape;2394;p88"/>
-          <p:cNvPicPr preferRelativeResize="0"/>
-          <p:nvPr/>
-        </p:nvPicPr>
-        <p:blipFill rotWithShape="1">
-          <a:blip r:embed="rId3">
-            <a:alphaModFix/>
-          </a:blip>
-          <a:srcRect b="0" l="0" r="0" t="0"/>
-          <a:stretch/>
-        </p:blipFill>
-        <p:spPr>
-          <a:xfrm>
-            <a:off x="1" y="3684300"/>
-            <a:ext cx="7238962" cy="70126"/>
+      <p:sp>
+        <p:nvSpPr>
+          <p:cNvPr id="672" name="Google Shape;672;p55"/>
+          <p:cNvSpPr/>
+          <p:nvPr/>
+        </p:nvSpPr>
+        <p:spPr>
+          <a:xfrm>
+            <a:off x="2605074" y="1362233"/>
+            <a:ext cx="76199" cy="76190"/>
+          </a:xfrm>
+          <a:prstGeom prst="roundRect">
+            <a:avLst>
+              <a:gd fmla="val 31500" name="adj"/>
+            </a:avLst>
+          </a:prstGeom>
+          <a:solidFill>
+            <a:srgbClr val="0077FF"/>
+          </a:solidFill>
+          <a:ln>
+            <a:noFill/>
+          </a:ln>
+        </p:spPr>
+        <p:txBody>
+          <a:bodyPr anchorCtr="0" anchor="ctr" bIns="91425" lIns="91425" spcFirstLastPara="1" rIns="91425" wrap="square" tIns="91425">
+            <a:noAutofit/>
+          </a:bodyPr>
+          <a:lstStyle/>
+          <a:p>
+            <a:pPr indent="0" lvl="0" marL="0" rtl="0" algn="l">
+              <a:spcBef>
+                <a:spcPts val="0"/>
+              </a:spcBef>
+              <a:spcAft>
+                <a:spcPts val="0"/>
+              </a:spcAft>
+              <a:buNone/>
+            </a:pPr>
+            <a:r>
+              <a:t/>
+            </a:r>
+            <a:endParaRPr/>
+          </a:p>
+        </p:txBody>
+      </p:sp>
+      <p:sp>
+        <p:nvSpPr>
+          <p:cNvPr id="675" name="Google Shape;675;p55"/>
+          <p:cNvSpPr/>
+          <p:nvPr/>
+        </p:nvSpPr>
+        <p:spPr>
+          <a:xfrm>
+            <a:off x="4619601" y="1209852"/>
+            <a:ext cx="2071677" cy="3014270"/>
+          </a:xfrm>
+          <a:prstGeom prst="roundRect">
+            <a:avLst>
+              <a:gd fmla="val 4634" name="adj"/>
+            </a:avLst>
+          </a:prstGeom>
+          <a:solidFill>
+            <a:schemeClr val="lt2"/>
+          </a:solidFill>
+          <a:ln>
+            <a:noFill/>
+          </a:ln>
+        </p:spPr>
+        <p:txBody>
+          <a:bodyPr anchorCtr="0" anchor="ctr" bIns="91425" lIns="91425" spcFirstLastPara="1" rIns="91425" wrap="square" tIns="91425">
+            <a:noAutofit/>
+          </a:bodyPr>
+          <a:lstStyle/>
+          <a:p>
+            <a:pPr indent="0" lvl="0" marL="0" rtl="0" algn="l">
+              <a:spcBef>
+                <a:spcPts val="0"/>
+              </a:spcBef>
+              <a:spcAft>
+                <a:spcPts val="0"/>
+              </a:spcAft>
+              <a:buNone/>
+            </a:pPr>
+            <a:r>
+              <a:t/>
+            </a:r>
+            <a:endParaRPr/>
+          </a:p>
+        </p:txBody>
+      </p:sp>
+      <p:sp>
+        <p:nvSpPr>
+          <p:cNvPr id="676" name="Google Shape;676;p55"/>
+          <p:cNvSpPr/>
+          <p:nvPr/>
+        </p:nvSpPr>
+        <p:spPr>
+          <a:xfrm>
+            <a:off x="4772001" y="1362233"/>
+            <a:ext cx="1766878" cy="342855"/>
           </a:xfrm>
           <a:prstGeom prst="rect">
             <a:avLst/>
@@ -6352,10 +7453,207 @@
             <a:noFill/>
           </a:ln>
         </p:spPr>
-      </p:pic>
-      <p:sp>
-        <p:nvSpPr>
-          <p:cNvPr id="2395" name="title"/>
+        <p:txBody>
+          <a:bodyPr anchorCtr="0" anchor="ctr" bIns="91425" lIns="91425" spcFirstLastPara="1" rIns="91425" wrap="square" tIns="91425">
+            <a:noAutofit/>
+          </a:bodyPr>
+          <a:lstStyle/>
+          <a:p>
+            <a:pPr indent="0" lvl="0" marL="0" rtl="0" algn="l">
+              <a:spcBef>
+                <a:spcPts val="0"/>
+              </a:spcBef>
+              <a:spcAft>
+                <a:spcPts val="0"/>
+              </a:spcAft>
+              <a:buNone/>
+            </a:pPr>
+            <a:r>
+              <a:t/>
+            </a:r>
+            <a:endParaRPr/>
+          </a:p>
+        </p:txBody>
+      </p:sp>
+      <p:sp>
+        <p:nvSpPr>
+          <p:cNvPr id="677" name="Google Shape;677;p55"/>
+          <p:cNvSpPr/>
+          <p:nvPr/>
+        </p:nvSpPr>
+        <p:spPr>
+          <a:xfrm>
+            <a:off x="4772001" y="1362233"/>
+            <a:ext cx="76199" cy="76190"/>
+          </a:xfrm>
+          <a:prstGeom prst="roundRect">
+            <a:avLst>
+              <a:gd fmla="val 31500" name="adj"/>
+            </a:avLst>
+          </a:prstGeom>
+          <a:solidFill>
+            <a:srgbClr val="0077FF"/>
+          </a:solidFill>
+          <a:ln>
+            <a:noFill/>
+          </a:ln>
+        </p:spPr>
+        <p:txBody>
+          <a:bodyPr anchorCtr="0" anchor="ctr" bIns="91425" lIns="91425" spcFirstLastPara="1" rIns="91425" wrap="square" tIns="91425">
+            <a:noAutofit/>
+          </a:bodyPr>
+          <a:lstStyle/>
+          <a:p>
+            <a:pPr indent="0" lvl="0" marL="0" rtl="0" algn="l">
+              <a:spcBef>
+                <a:spcPts val="0"/>
+              </a:spcBef>
+              <a:spcAft>
+                <a:spcPts val="0"/>
+              </a:spcAft>
+              <a:buNone/>
+            </a:pPr>
+            <a:r>
+              <a:t/>
+            </a:r>
+            <a:endParaRPr/>
+          </a:p>
+        </p:txBody>
+      </p:sp>
+      <p:sp>
+        <p:nvSpPr>
+          <p:cNvPr id="680" name="Google Shape;680;p55"/>
+          <p:cNvSpPr/>
+          <p:nvPr/>
+        </p:nvSpPr>
+        <p:spPr>
+          <a:xfrm>
+            <a:off x="6786527" y="1209852"/>
+            <a:ext cx="2071677" cy="3014270"/>
+          </a:xfrm>
+          <a:prstGeom prst="roundRect">
+            <a:avLst>
+              <a:gd fmla="val 4634" name="adj"/>
+            </a:avLst>
+          </a:prstGeom>
+          <a:solidFill>
+            <a:schemeClr val="lt2"/>
+          </a:solidFill>
+          <a:ln>
+            <a:noFill/>
+          </a:ln>
+        </p:spPr>
+        <p:txBody>
+          <a:bodyPr anchorCtr="0" anchor="ctr" bIns="91425" lIns="91425" spcFirstLastPara="1" rIns="91425" wrap="square" tIns="91425">
+            <a:noAutofit/>
+          </a:bodyPr>
+          <a:lstStyle/>
+          <a:p>
+            <a:pPr indent="0" lvl="0" marL="0" rtl="0" algn="l">
+              <a:spcBef>
+                <a:spcPts val="0"/>
+              </a:spcBef>
+              <a:spcAft>
+                <a:spcPts val="0"/>
+              </a:spcAft>
+              <a:buNone/>
+            </a:pPr>
+            <a:r>
+              <a:t/>
+            </a:r>
+            <a:endParaRPr/>
+          </a:p>
+        </p:txBody>
+      </p:sp>
+      <p:sp>
+        <p:nvSpPr>
+          <p:cNvPr id="681" name="Google Shape;681;p55"/>
+          <p:cNvSpPr/>
+          <p:nvPr/>
+        </p:nvSpPr>
+        <p:spPr>
+          <a:xfrm>
+            <a:off x="6938927" y="1362233"/>
+            <a:ext cx="1766878" cy="342855"/>
+          </a:xfrm>
+          <a:prstGeom prst="rect">
+            <a:avLst/>
+          </a:prstGeom>
+          <a:noFill/>
+          <a:ln>
+            <a:noFill/>
+          </a:ln>
+        </p:spPr>
+        <p:txBody>
+          <a:bodyPr anchorCtr="0" anchor="ctr" bIns="91425" lIns="91425" spcFirstLastPara="1" rIns="91425" wrap="square" tIns="91425">
+            <a:noAutofit/>
+          </a:bodyPr>
+          <a:lstStyle/>
+          <a:p>
+            <a:pPr indent="0" lvl="0" marL="0" rtl="0" algn="l">
+              <a:spcBef>
+                <a:spcPts val="0"/>
+              </a:spcBef>
+              <a:spcAft>
+                <a:spcPts val="0"/>
+              </a:spcAft>
+              <a:buNone/>
+            </a:pPr>
+            <a:r>
+              <a:t/>
+            </a:r>
+            <a:endParaRPr/>
+          </a:p>
+        </p:txBody>
+      </p:sp>
+      <p:sp>
+        <p:nvSpPr>
+          <p:cNvPr id="682" name="Google Shape;682;p55"/>
+          <p:cNvSpPr/>
+          <p:nvPr/>
+        </p:nvSpPr>
+        <p:spPr>
+          <a:xfrm>
+            <a:off x="6938927" y="1362233"/>
+            <a:ext cx="76199" cy="76190"/>
+          </a:xfrm>
+          <a:prstGeom prst="roundRect">
+            <a:avLst>
+              <a:gd fmla="val 31500" name="adj"/>
+            </a:avLst>
+          </a:prstGeom>
+          <a:solidFill>
+            <a:srgbClr val="0077FF"/>
+          </a:solidFill>
+          <a:ln>
+            <a:noFill/>
+          </a:ln>
+        </p:spPr>
+        <p:txBody>
+          <a:bodyPr anchorCtr="0" anchor="ctr" bIns="91425" lIns="91425" spcFirstLastPara="1" rIns="91425" wrap="square" tIns="91425">
+            <a:noAutofit/>
+          </a:bodyPr>
+          <a:lstStyle/>
+          <a:p>
+            <a:pPr indent="0" lvl="0" marL="0" rtl="0" algn="l">
+              <a:spcBef>
+                <a:spcPts val="0"/>
+              </a:spcBef>
+              <a:spcAft>
+                <a:spcPts val="0"/>
+              </a:spcAft>
+              <a:buNone/>
+            </a:pPr>
+            <a:r>
+              <a:t/>
+            </a:r>
+            <a:endParaRPr/>
+          </a:p>
+        </p:txBody>
+      </p:sp>
+      <p:sp>
+        <p:nvSpPr>
+          <p:cNvPr id="683" name="title"/>
           <p:cNvSpPr txBox="1"/>
           <p:nvPr/>
         </p:nvSpPr>
@@ -6379,7 +7677,7 @@
               <a:spcAft>
                 <a:spcPts val="300"/>
               </a:spcAft>
-              <a:defRPr sz="2400">
+              <a:defRPr sz="2438">
                 <a:solidFill>
                   <a:srgbClr val="000000"/>
                 </a:solidFill>
@@ -6389,7 +7687,7 @@
               </a:defRPr>
             </a:pPr>
             <a:r>
-              <a:rPr sz="2400">
+              <a:rPr sz="2438">
                 <a:solidFill>
                   <a:srgbClr val="000000"/>
                 </a:solidFill>
@@ -6402,433 +7700,202 @@
           </a:p>
         </p:txBody>
       </p:sp>
-      <p:graphicFrame>
-        <p:nvGraphicFramePr>
-          <p:cNvPr id="2396" name="Table 2395"/>
-          <p:cNvGraphicFramePr>
-            <a:graphicFrameLocks noGrp="1"/>
-          </p:cNvGraphicFramePr>
-          <p:nvPr/>
-        </p:nvGraphicFramePr>
-        <p:xfrm>
-          <a:off x="274320" y="2009822"/>
-          <a:ext cx="8344814" cy="1674466"/>
-        </p:xfrm>
-        <a:graphic>
-          <a:graphicData uri="http://schemas.openxmlformats.org/drawingml/2006/table">
-            <a:tbl>
-              <a:tblPr firstRow="1" bandRow="1">
-                <a:tableStyleId>{5C22544A-7EE6-4342-B048-85BDC9FD1C3A}</a:tableStyleId>
-              </a:tblPr>
-              <a:tblGrid>
-                <a:gridCol w="2781604"/>
-                <a:gridCol w="2781604"/>
-                <a:gridCol w="2781606"/>
-              </a:tblGrid>
-              <a:tr h="334893">
-                <a:tc>
-                  <a:txBody>
-                    <a:bodyPr/>
-                    <a:lstStyle/>
-                    <a:p>
-                      <a:pPr>
-                        <a:defRPr sz="1300" b="1">
-                          <a:solidFill>
-                            <a:srgbClr val="FFFFFF"/>
-                          </a:solidFill>
-                          <a:latin typeface="Play"/>
-                          <a:ea typeface="Play"/>
-                          <a:cs typeface="Play"/>
-                        </a:defRPr>
-                      </a:pPr>
-                      <a:r>
-                        <a:t>Метрика</a:t>
-                      </a:r>
-                    </a:p>
-                  </a:txBody>
-                  <a:tcPr>
-                    <a:solidFill>
-                      <a:srgbClr val="0077FF"/>
-                    </a:solidFill>
-                  </a:tcPr>
-                </a:tc>
-                <a:tc>
-                  <a:txBody>
-                    <a:bodyPr/>
-                    <a:lstStyle/>
-                    <a:p>
-                      <a:pPr>
-                        <a:defRPr sz="1300" b="1">
-                          <a:solidFill>
-                            <a:srgbClr val="FFFFFF"/>
-                          </a:solidFill>
-                          <a:latin typeface="Play"/>
-                          <a:ea typeface="Play"/>
-                          <a:cs typeface="Play"/>
-                        </a:defRPr>
-                      </a:pPr>
-                      <a:r>
-                        <a:t>Текущее</a:t>
-                      </a:r>
-                    </a:p>
-                  </a:txBody>
-                  <a:tcPr>
-                    <a:solidFill>
-                      <a:srgbClr val="0077FF"/>
-                    </a:solidFill>
-                  </a:tcPr>
-                </a:tc>
-                <a:tc>
-                  <a:txBody>
-                    <a:bodyPr/>
-                    <a:lstStyle/>
-                    <a:p>
-                      <a:pPr>
-                        <a:defRPr sz="1300" b="1">
-                          <a:solidFill>
-                            <a:srgbClr val="FFFFFF"/>
-                          </a:solidFill>
-                          <a:latin typeface="Play"/>
-                          <a:ea typeface="Play"/>
-                          <a:cs typeface="Play"/>
-                        </a:defRPr>
-                      </a:pPr>
-                      <a:r>
-                        <a:t>Пилот</a:t>
-                      </a:r>
-                    </a:p>
-                  </a:txBody>
-                  <a:tcPr>
-                    <a:solidFill>
-                      <a:srgbClr val="0077FF"/>
-                    </a:solidFill>
-                  </a:tcPr>
-                </a:tc>
-              </a:tr>
-              <a:tr h="334893">
-                <a:tc>
-                  <a:txBody>
-                    <a:bodyPr/>
-                    <a:lstStyle/>
-                    <a:p>
-                      <a:pPr>
-                        <a:defRPr sz="1300" b="0">
-                          <a:solidFill>
-                            <a:srgbClr val="000000"/>
-                          </a:solidFill>
-                          <a:latin typeface="Play"/>
-                          <a:ea typeface="Play"/>
-                          <a:cs typeface="Play"/>
-                        </a:defRPr>
-                      </a:pPr>
-                      <a:r>
-                        <a:t>Сборка (мин)</a:t>
-                      </a:r>
-                    </a:p>
-                  </a:txBody>
-                  <a:tcPr>
-                    <a:solidFill>
-                      <a:srgbClr val="FFFFFF"/>
-                    </a:solidFill>
-                  </a:tcPr>
-                </a:tc>
-                <a:tc>
-                  <a:txBody>
-                    <a:bodyPr/>
-                    <a:lstStyle/>
-                    <a:p>
-                      <a:pPr>
-                        <a:defRPr sz="1300" b="0">
-                          <a:solidFill>
-                            <a:srgbClr val="000000"/>
-                          </a:solidFill>
-                          <a:latin typeface="Play"/>
-                          <a:ea typeface="Play"/>
-                          <a:cs typeface="Play"/>
-                        </a:defRPr>
-                      </a:pPr>
-                      <a:r>
-                        <a:t>186</a:t>
-                      </a:r>
-                    </a:p>
-                  </a:txBody>
-                  <a:tcPr>
-                    <a:solidFill>
-                      <a:srgbClr val="FFFFFF"/>
-                    </a:solidFill>
-                  </a:tcPr>
-                </a:tc>
-                <a:tc>
-                  <a:txBody>
-                    <a:bodyPr/>
-                    <a:lstStyle/>
-                    <a:p>
-                      <a:pPr>
-                        <a:defRPr sz="1300" b="0">
-                          <a:solidFill>
-                            <a:srgbClr val="000000"/>
-                          </a:solidFill>
-                          <a:latin typeface="Play"/>
-                          <a:ea typeface="Play"/>
-                          <a:cs typeface="Play"/>
-                        </a:defRPr>
-                      </a:pPr>
-                      <a:r>
-                        <a:t>4</a:t>
-                      </a:r>
-                    </a:p>
-                  </a:txBody>
-                  <a:tcPr>
-                    <a:solidFill>
-                      <a:srgbClr val="FFFFFF"/>
-                    </a:solidFill>
-                  </a:tcPr>
-                </a:tc>
-              </a:tr>
-              <a:tr h="334893">
-                <a:tc>
-                  <a:txBody>
-                    <a:bodyPr/>
-                    <a:lstStyle/>
-                    <a:p>
-                      <a:pPr>
-                        <a:defRPr sz="1300" b="0">
-                          <a:solidFill>
-                            <a:srgbClr val="000000"/>
-                          </a:solidFill>
-                          <a:latin typeface="Play"/>
-                          <a:ea typeface="Play"/>
-                          <a:cs typeface="Play"/>
-                        </a:defRPr>
-                      </a:pPr>
-                      <a:r>
-                        <a:t>Время до первой версии (дней)</a:t>
-                      </a:r>
-                    </a:p>
-                  </a:txBody>
-                  <a:tcPr>
-                    <a:solidFill>
-                      <a:srgbClr val="FFFFFF"/>
-                    </a:solidFill>
-                  </a:tcPr>
-                </a:tc>
-                <a:tc>
-                  <a:txBody>
-                    <a:bodyPr/>
-                    <a:lstStyle/>
-                    <a:p>
-                      <a:pPr>
-                        <a:defRPr sz="1300" b="0">
-                          <a:solidFill>
-                            <a:srgbClr val="000000"/>
-                          </a:solidFill>
-                          <a:latin typeface="Play"/>
-                          <a:ea typeface="Play"/>
-                          <a:cs typeface="Play"/>
-                        </a:defRPr>
-                      </a:pPr>
-                      <a:r>
-                        <a:t>6</a:t>
-                      </a:r>
-                    </a:p>
-                  </a:txBody>
-                  <a:tcPr>
-                    <a:solidFill>
-                      <a:srgbClr val="FFFFFF"/>
-                    </a:solidFill>
-                  </a:tcPr>
-                </a:tc>
-                <a:tc>
-                  <a:txBody>
-                    <a:bodyPr/>
-                    <a:lstStyle/>
-                    <a:p>
-                      <a:pPr>
-                        <a:defRPr sz="1300" b="0">
-                          <a:solidFill>
-                            <a:srgbClr val="000000"/>
-                          </a:solidFill>
-                          <a:latin typeface="Play"/>
-                          <a:ea typeface="Play"/>
-                          <a:cs typeface="Play"/>
-                        </a:defRPr>
-                      </a:pPr>
-                      <a:r>
-                        <a:t>1</a:t>
-                      </a:r>
-                    </a:p>
-                  </a:txBody>
-                  <a:tcPr>
-                    <a:solidFill>
-                      <a:srgbClr val="FFFFFF"/>
-                    </a:solidFill>
-                  </a:tcPr>
-                </a:tc>
-              </a:tr>
-              <a:tr h="334893">
-                <a:tc>
-                  <a:txBody>
-                    <a:bodyPr/>
-                    <a:lstStyle/>
-                    <a:p>
-                      <a:pPr>
-                        <a:defRPr sz="1300" b="0">
-                          <a:solidFill>
-                            <a:srgbClr val="000000"/>
-                          </a:solidFill>
-                          <a:latin typeface="Play"/>
-                          <a:ea typeface="Play"/>
-                          <a:cs typeface="Play"/>
-                        </a:defRPr>
-                      </a:pPr>
-                      <a:r>
-                        <a:t>Нарушения (колод)</a:t>
-                      </a:r>
-                    </a:p>
-                  </a:txBody>
-                  <a:tcPr>
-                    <a:solidFill>
-                      <a:srgbClr val="FFFFFF"/>
-                    </a:solidFill>
-                  </a:tcPr>
-                </a:tc>
-                <a:tc>
-                  <a:txBody>
-                    <a:bodyPr/>
-                    <a:lstStyle/>
-                    <a:p>
-                      <a:pPr>
-                        <a:defRPr sz="1300" b="0">
-                          <a:solidFill>
-                            <a:srgbClr val="000000"/>
-                          </a:solidFill>
-                          <a:latin typeface="Play"/>
-                          <a:ea typeface="Play"/>
-                          <a:cs typeface="Play"/>
-                        </a:defRPr>
-                      </a:pPr>
-                      <a:r>
-                        <a:t>19</a:t>
-                      </a:r>
-                    </a:p>
-                  </a:txBody>
-                  <a:tcPr>
-                    <a:solidFill>
-                      <a:srgbClr val="FFFFFF"/>
-                    </a:solidFill>
-                  </a:tcPr>
-                </a:tc>
-                <a:tc>
-                  <a:txBody>
-                    <a:bodyPr/>
-                    <a:lstStyle/>
-                    <a:p>
-                      <a:pPr>
-                        <a:defRPr sz="1300" b="0">
-                          <a:solidFill>
-                            <a:srgbClr val="000000"/>
-                          </a:solidFill>
-                          <a:latin typeface="Play"/>
-                          <a:ea typeface="Play"/>
-                          <a:cs typeface="Play"/>
-                        </a:defRPr>
-                      </a:pPr>
-                      <a:r>
-                        <a:t>2</a:t>
-                      </a:r>
-                    </a:p>
-                  </a:txBody>
-                  <a:tcPr>
-                    <a:solidFill>
-                      <a:srgbClr val="FFFFFF"/>
-                    </a:solidFill>
-                  </a:tcPr>
-                </a:tc>
-              </a:tr>
-              <a:tr h="334894">
-                <a:tc>
-                  <a:txBody>
-                    <a:bodyPr/>
-                    <a:lstStyle/>
-                    <a:p>
-                      <a:pPr>
-                        <a:defRPr sz="1300" b="0">
-                          <a:solidFill>
-                            <a:srgbClr val="000000"/>
-                          </a:solidFill>
-                          <a:latin typeface="Play"/>
-                          <a:ea typeface="Play"/>
-                          <a:cs typeface="Play"/>
-                        </a:defRPr>
-                      </a:pPr>
-                      <a:r>
-                        <a:t>Запросы (запросов)</a:t>
-                      </a:r>
-                    </a:p>
-                  </a:txBody>
-                  <a:tcPr>
-                    <a:solidFill>
-                      <a:srgbClr val="FFFFFF"/>
-                    </a:solidFill>
-                  </a:tcPr>
-                </a:tc>
-                <a:tc>
-                  <a:txBody>
-                    <a:bodyPr/>
-                    <a:lstStyle/>
-                    <a:p>
-                      <a:pPr>
-                        <a:defRPr sz="1300" b="0">
-                          <a:solidFill>
-                            <a:srgbClr val="000000"/>
-                          </a:solidFill>
-                          <a:latin typeface="Play"/>
-                          <a:ea typeface="Play"/>
-                          <a:cs typeface="Play"/>
-                        </a:defRPr>
-                      </a:pPr>
-                      <a:r>
-                        <a:t>11</a:t>
-                      </a:r>
-                    </a:p>
-                  </a:txBody>
-                  <a:tcPr>
-                    <a:solidFill>
-                      <a:srgbClr val="FFFFFF"/>
-                    </a:solidFill>
-                  </a:tcPr>
-                </a:tc>
-                <a:tc>
-                  <a:txBody>
-                    <a:bodyPr/>
-                    <a:lstStyle/>
-                    <a:p>
-                      <a:pPr>
-                        <a:defRPr sz="1300" b="0">
-                          <a:solidFill>
-                            <a:srgbClr val="000000"/>
-                          </a:solidFill>
-                          <a:latin typeface="Play"/>
-                          <a:ea typeface="Play"/>
-                          <a:cs typeface="Play"/>
-                        </a:defRPr>
-                      </a:pPr>
-                      <a:r>
-                        <a:t>38</a:t>
-                      </a:r>
-                    </a:p>
-                  </a:txBody>
-                  <a:tcPr>
-                    <a:solidFill>
-                      <a:srgbClr val="FFFFFF"/>
-                    </a:solidFill>
-                  </a:tcPr>
-                </a:tc>
-              </a:tr>
-            </a:tbl>
-          </a:graphicData>
-        </a:graphic>
-      </p:graphicFrame>
+      <p:sp>
+        <p:nvSpPr>
+          <p:cNvPr id="684" name="card_0"/>
+          <p:cNvSpPr txBox="1"/>
+          <p:nvPr/>
+        </p:nvSpPr>
+        <p:spPr>
+          <a:xfrm>
+            <a:off x="582575" y="1963753"/>
+            <a:ext cx="1516144" cy="2001662"/>
+          </a:xfrm>
+          <a:prstGeom prst="rect">
+            <a:avLst/>
+          </a:prstGeom>
+          <a:noFill/>
+        </p:spPr>
+        <p:txBody>
+          <a:bodyPr wrap="square" lIns="76200" rIns="76200" tIns="50800" bIns="50800">
+            <a:spAutoFit/>
+          </a:bodyPr>
+          <a:lstStyle/>
+          <a:p>
+            <a:pPr algn="l">
+              <a:spcAft>
+                <a:spcPts val="300"/>
+              </a:spcAft>
+              <a:defRPr sz="1800" b="0">
+                <a:solidFill>
+                  <a:srgbClr val="000000"/>
+                </a:solidFill>
+                <a:latin typeface="Play"/>
+                <a:ea typeface="Play"/>
+                <a:cs typeface="Play"/>
+              </a:defRPr>
+            </a:pPr>
+            <a:r>
+              <a:rPr sz="1800" b="0">
+                <a:solidFill>
+                  <a:srgbClr val="000000"/>
+                </a:solidFill>
+                <a:latin typeface="Play"/>
+                <a:ea typeface="Play"/>
+                <a:cs typeface="Play"/>
+              </a:rPr>
+              <a:t>Средняя сборка колоды 12 слайдов сократилась до 4 минут</a:t>
+            </a:r>
+          </a:p>
+        </p:txBody>
+      </p:sp>
+      <p:sp>
+        <p:nvSpPr>
+          <p:cNvPr id="685" name="card_1"/>
+          <p:cNvSpPr txBox="1"/>
+          <p:nvPr/>
+        </p:nvSpPr>
+        <p:spPr>
+          <a:xfrm>
+            <a:off x="2749428" y="1963753"/>
+            <a:ext cx="1516144" cy="2001662"/>
+          </a:xfrm>
+          <a:prstGeom prst="rect">
+            <a:avLst/>
+          </a:prstGeom>
+          <a:noFill/>
+        </p:spPr>
+        <p:txBody>
+          <a:bodyPr wrap="square" lIns="76200" rIns="76200" tIns="50800" bIns="50800">
+            <a:spAutoFit/>
+          </a:bodyPr>
+          <a:lstStyle/>
+          <a:p>
+            <a:pPr algn="l">
+              <a:spcAft>
+                <a:spcPts val="300"/>
+              </a:spcAft>
+              <a:defRPr sz="1800" b="0">
+                <a:solidFill>
+                  <a:srgbClr val="000000"/>
+                </a:solidFill>
+                <a:latin typeface="Play"/>
+                <a:ea typeface="Play"/>
+                <a:cs typeface="Play"/>
+              </a:defRPr>
+            </a:pPr>
+            <a:r>
+              <a:rPr sz="1800" b="0">
+                <a:solidFill>
+                  <a:srgbClr val="000000"/>
+                </a:solidFill>
+                <a:latin typeface="Play"/>
+                <a:ea typeface="Play"/>
+                <a:cs typeface="Play"/>
+              </a:rPr>
+              <a:t>Время до первой версии уменьшилось с 6 дней до 1 дня</a:t>
+            </a:r>
+          </a:p>
+        </p:txBody>
+      </p:sp>
+      <p:sp>
+        <p:nvSpPr>
+          <p:cNvPr id="686" name="card_2"/>
+          <p:cNvSpPr txBox="1"/>
+          <p:nvPr/>
+        </p:nvSpPr>
+        <p:spPr>
+          <a:xfrm>
+            <a:off x="4916374" y="1963753"/>
+            <a:ext cx="1516144" cy="2001662"/>
+          </a:xfrm>
+          <a:prstGeom prst="rect">
+            <a:avLst/>
+          </a:prstGeom>
+          <a:noFill/>
+        </p:spPr>
+        <p:txBody>
+          <a:bodyPr wrap="square" lIns="76200" rIns="76200" tIns="50800" bIns="50800">
+            <a:spAutoFit/>
+          </a:bodyPr>
+          <a:lstStyle/>
+          <a:p>
+            <a:pPr algn="l">
+              <a:spcAft>
+                <a:spcPts val="300"/>
+              </a:spcAft>
+              <a:defRPr sz="1600" b="0">
+                <a:solidFill>
+                  <a:srgbClr val="000000"/>
+                </a:solidFill>
+                <a:latin typeface="Play"/>
+                <a:ea typeface="Play"/>
+                <a:cs typeface="Play"/>
+              </a:defRPr>
+            </a:pPr>
+            <a:r>
+              <a:rPr sz="1600" b="0">
+                <a:solidFill>
+                  <a:srgbClr val="000000"/>
+                </a:solidFill>
+                <a:latin typeface="Play"/>
+                <a:ea typeface="Play"/>
+                <a:cs typeface="Play"/>
+              </a:rPr>
+              <a:t>Нарушения фирменного стиля в пилоте 2 из 68, исправлены автоматически</a:t>
+            </a:r>
+          </a:p>
+        </p:txBody>
+      </p:sp>
+      <p:sp>
+        <p:nvSpPr>
+          <p:cNvPr id="687" name="card_3"/>
+          <p:cNvSpPr txBox="1"/>
+          <p:nvPr/>
+        </p:nvSpPr>
+        <p:spPr>
+          <a:xfrm>
+            <a:off x="7083319" y="1963753"/>
+            <a:ext cx="1516144" cy="2001662"/>
+          </a:xfrm>
+          <a:prstGeom prst="rect">
+            <a:avLst/>
+          </a:prstGeom>
+          <a:noFill/>
+        </p:spPr>
+        <p:txBody>
+          <a:bodyPr wrap="square" lIns="76200" rIns="76200" tIns="50800" bIns="50800">
+            <a:spAutoFit/>
+          </a:bodyPr>
+          <a:lstStyle/>
+          <a:p>
+            <a:pPr algn="l">
+              <a:spcAft>
+                <a:spcPts val="300"/>
+              </a:spcAft>
+              <a:defRPr sz="1800" b="0">
+                <a:solidFill>
+                  <a:srgbClr val="000000"/>
+                </a:solidFill>
+                <a:latin typeface="Play"/>
+                <a:ea typeface="Play"/>
+                <a:cs typeface="Play"/>
+              </a:defRPr>
+            </a:pPr>
+            <a:r>
+              <a:rPr sz="1800" b="0">
+                <a:solidFill>
+                  <a:srgbClr val="000000"/>
+                </a:solidFill>
+                <a:latin typeface="Play"/>
+                <a:ea typeface="Play"/>
+                <a:cs typeface="Play"/>
+              </a:rPr>
+              <a:t>Дизайнеры закрыли 38 запросов за 6 недель вместо 11 в неделю</a:t>
+            </a:r>
+          </a:p>
+        </p:txBody>
+      </p:sp>
     </p:spTree>
   </p:cSld>
   <p:clrMapOvr>
@@ -6847,159 +7914,9 @@
         <p:nvPr/>
       </p:nvGrpSpPr>
       <p:grpSpPr/>
-      <p:pic>
-        <p:nvPicPr>
-          <p:cNvPr descr=" " id="2428" name="Google Shape;2428;p89"/>
-          <p:cNvPicPr preferRelativeResize="0"/>
-          <p:nvPr/>
-        </p:nvPicPr>
-        <p:blipFill rotWithShape="1">
-          <a:blip r:embed="rId2">
-            <a:alphaModFix/>
-          </a:blip>
-          <a:srcRect b="0" l="0" r="0" t="0"/>
-          <a:stretch/>
-        </p:blipFill>
-        <p:spPr>
-          <a:xfrm>
-            <a:off x="0" y="2732082"/>
-            <a:ext cx="8515008" cy="92615"/>
-          </a:xfrm>
-          <a:prstGeom prst="rect">
-            <a:avLst/>
-          </a:prstGeom>
-          <a:noFill/>
-          <a:ln>
-            <a:noFill/>
-          </a:ln>
-        </p:spPr>
-      </p:pic>
-      <p:sp>
-        <p:nvSpPr>
-          <p:cNvPr id="2429" name="Google Shape;2429;p89"/>
-          <p:cNvSpPr/>
-          <p:nvPr/>
-        </p:nvSpPr>
-        <p:spPr>
-          <a:xfrm>
-            <a:off x="553415" y="1828897"/>
-            <a:ext cx="2232516" cy="1490254"/>
-          </a:xfrm>
-          <a:prstGeom prst="rect">
-            <a:avLst/>
-          </a:prstGeom>
-          <a:noFill/>
-          <a:ln>
-            <a:noFill/>
-          </a:ln>
-        </p:spPr>
-        <p:txBody>
-          <a:bodyPr anchorCtr="0" anchor="ctr" bIns="91425" lIns="91425" spcFirstLastPara="1" rIns="91425" wrap="square" tIns="91425">
-            <a:noAutofit/>
-          </a:bodyPr>
-          <a:lstStyle/>
-          <a:p>
-            <a:pPr indent="0" lvl="0" marL="0" rtl="0" algn="l">
-              <a:spcBef>
-                <a:spcPts val="0"/>
-              </a:spcBef>
-              <a:spcAft>
-                <a:spcPts val="0"/>
-              </a:spcAft>
-              <a:buNone/>
-            </a:pPr>
-            <a:r>
-              <a:t/>
-            </a:r>
-            <a:endParaRPr/>
-          </a:p>
-        </p:txBody>
-      </p:sp>
-      <p:sp>
-        <p:nvSpPr>
-          <p:cNvPr id="2431" name="Google Shape;2431;p89"/>
-          <p:cNvSpPr/>
-          <p:nvPr/>
-        </p:nvSpPr>
-        <p:spPr>
-          <a:xfrm>
-            <a:off x="3565736" y="1828897"/>
-            <a:ext cx="2232516" cy="1490254"/>
-          </a:xfrm>
-          <a:prstGeom prst="rect">
-            <a:avLst/>
-          </a:prstGeom>
-          <a:noFill/>
-          <a:ln>
-            <a:noFill/>
-          </a:ln>
-        </p:spPr>
-        <p:txBody>
-          <a:bodyPr anchorCtr="0" anchor="ctr" bIns="91425" lIns="91425" spcFirstLastPara="1" rIns="91425" wrap="square" tIns="91425">
-            <a:noAutofit/>
-          </a:bodyPr>
-          <a:lstStyle/>
-          <a:p>
-            <a:pPr indent="0" lvl="0" marL="0" rtl="0" algn="l">
-              <a:spcBef>
-                <a:spcPts val="0"/>
-              </a:spcBef>
-              <a:spcAft>
-                <a:spcPts val="0"/>
-              </a:spcAft>
-              <a:buNone/>
-            </a:pPr>
-            <a:r>
-              <a:t/>
-            </a:r>
-            <a:endParaRPr/>
-          </a:p>
-        </p:txBody>
-      </p:sp>
-      <p:sp>
-        <p:nvSpPr>
-          <p:cNvPr id="2433" name="Google Shape;2433;p89"/>
-          <p:cNvSpPr/>
-          <p:nvPr/>
-        </p:nvSpPr>
-        <p:spPr>
-          <a:xfrm>
-            <a:off x="6578067" y="1828897"/>
-            <a:ext cx="2232516" cy="1490254"/>
-          </a:xfrm>
-          <a:prstGeom prst="rect">
-            <a:avLst/>
-          </a:prstGeom>
-          <a:noFill/>
-          <a:ln>
-            <a:noFill/>
-          </a:ln>
-        </p:spPr>
-        <p:txBody>
-          <a:bodyPr anchorCtr="0" anchor="ctr" bIns="91425" lIns="91425" spcFirstLastPara="1" rIns="91425" wrap="square" tIns="91425">
-            <a:noAutofit/>
-          </a:bodyPr>
-          <a:lstStyle/>
-          <a:p>
-            <a:pPr indent="0" lvl="0" marL="0" rtl="0" algn="l">
-              <a:spcBef>
-                <a:spcPts val="0"/>
-              </a:spcBef>
-              <a:spcAft>
-                <a:spcPts val="0"/>
-              </a:spcAft>
-              <a:buNone/>
-            </a:pPr>
-            <a:r>
-              <a:t/>
-            </a:r>
-            <a:endParaRPr/>
-          </a:p>
-        </p:txBody>
-      </p:sp>
-      <p:sp>
-        <p:nvSpPr>
-          <p:cNvPr id="2434" name="title"/>
+      <p:sp>
+        <p:nvSpPr>
+          <p:cNvPr id="2" name="title"/>
           <p:cNvSpPr txBox="1"/>
           <p:nvPr/>
         </p:nvSpPr>
@@ -7023,7 +7940,7 @@
               <a:spcAft>
                 <a:spcPts val="300"/>
               </a:spcAft>
-              <a:defRPr sz="2400">
+              <a:defRPr sz="2438">
                 <a:solidFill>
                   <a:srgbClr val="000000"/>
                 </a:solidFill>
@@ -7033,7 +7950,7 @@
               </a:defRPr>
             </a:pPr>
             <a:r>
-              <a:rPr sz="2400">
+              <a:rPr sz="2438">
                 <a:solidFill>
                   <a:srgbClr val="000000"/>
                 </a:solidFill>
@@ -7041,21 +7958,21 @@
                 <a:ea typeface="Play"/>
                 <a:cs typeface="Play"/>
               </a:rPr>
-              <a:t>Ресурсы и сроки</a:t>
-            </a:r>
-          </a:p>
-        </p:txBody>
-      </p:sp>
-      <p:sp>
-        <p:nvSpPr>
-          <p:cNvPr id="2435" name="body"/>
+              <a:t>Что потребуется: ресурсы и сроки</a:t>
+            </a:r>
+          </a:p>
+        </p:txBody>
+      </p:sp>
+      <p:sp>
+        <p:nvSpPr>
+          <p:cNvPr id="3" name="body"/>
           <p:cNvSpPr txBox="1"/>
           <p:nvPr/>
         </p:nvSpPr>
         <p:spPr>
           <a:xfrm>
             <a:off x="274320" y="1414513"/>
-            <a:ext cx="8344814" cy="527023"/>
+            <a:ext cx="7189469" cy="2602405"/>
           </a:xfrm>
           <a:prstGeom prst="rect">
             <a:avLst/>
@@ -7072,7 +7989,7 @@
               <a:spcAft>
                 <a:spcPts val="300"/>
               </a:spcAft>
-              <a:defRPr sz="1200">
+              <a:defRPr sz="1800" b="1">
                 <a:solidFill>
                   <a:srgbClr val="000000"/>
                 </a:solidFill>
@@ -7082,7 +7999,7 @@
               </a:defRPr>
             </a:pPr>
             <a:r>
-              <a:rPr sz="1200">
+              <a:rPr sz="1800" b="1">
                 <a:solidFill>
                   <a:srgbClr val="000000"/>
                 </a:solidFill>
@@ -7090,7 +8007,7 @@
                 <a:ea typeface="Play"/>
                 <a:cs typeface="Play"/>
               </a:rPr>
-              <a:t>• 2 vCPU / 2 GB RAM</a:t>
+              <a:t>• Сервис работает на машине 2 vCPU / 2 ГБ RAM</a:t>
             </a:r>
           </a:p>
           <a:p>
@@ -7098,7 +8015,7 @@
               <a:spcAft>
                 <a:spcPts val="300"/>
               </a:spcAft>
-              <a:defRPr sz="1200">
+              <a:defRPr sz="1800" b="1">
                 <a:solidFill>
                   <a:srgbClr val="000000"/>
                 </a:solidFill>
@@ -7108,7 +8025,7 @@
               </a:defRPr>
             </a:pPr>
             <a:r>
-              <a:rPr sz="1200">
+              <a:rPr sz="1800" b="1">
                 <a:solidFill>
                   <a:srgbClr val="000000"/>
                 </a:solidFill>
@@ -7116,7 +8033,7 @@
                 <a:ea typeface="Play"/>
                 <a:cs typeface="Play"/>
               </a:rPr>
-              <a:t>• 1 400 рублей за 6 недель</a:t>
+              <a:t>• Модель gpt-oss-20b, инференс за 6 недель 1 400 руб</a:t>
             </a:r>
           </a:p>
           <a:p>
@@ -7124,7 +8041,7 @@
               <a:spcAft>
                 <a:spcPts val="300"/>
               </a:spcAft>
-              <a:defRPr sz="1200">
+              <a:defRPr sz="1800" b="1">
                 <a:solidFill>
                   <a:srgbClr val="000000"/>
                 </a:solidFill>
@@ -7134,7 +8051,7 @@
               </a:defRPr>
             </a:pPr>
             <a:r>
-              <a:rPr sz="1200">
+              <a:rPr sz="1800" b="1">
                 <a:solidFill>
                   <a:srgbClr val="000000"/>
                 </a:solidFill>
@@ -7142,7 +8059,7 @@
                 <a:ea typeface="Play"/>
                 <a:cs typeface="Play"/>
               </a:rPr>
-              <a:t>• Модель gpt-oss-20b</a:t>
+              <a:t>• Третий квартал 2026: подключение 4 команд, домен и HTTPS</a:t>
             </a:r>
           </a:p>
           <a:p>
@@ -7150,7 +8067,7 @@
               <a:spcAft>
                 <a:spcPts val="300"/>
               </a:spcAft>
-              <a:defRPr sz="1200">
+              <a:defRPr sz="1800" b="1">
                 <a:solidFill>
                   <a:srgbClr val="000000"/>
                 </a:solidFill>
@@ -7160,7 +8077,7 @@
               </a:defRPr>
             </a:pPr>
             <a:r>
-              <a:rPr sz="1200">
+              <a:rPr sz="1800" b="1">
                 <a:solidFill>
                   <a:srgbClr val="000000"/>
                 </a:solidFill>
@@ -7168,458 +8085,7 @@
                 <a:ea typeface="Play"/>
                 <a:cs typeface="Play"/>
               </a:rPr>
-              <a:t>• Подключение 4 команд, домен и HTTPS</a:t>
-            </a:r>
-          </a:p>
-          <a:p>
-            <a:pPr algn="l">
-              <a:spcAft>
-                <a:spcPts val="300"/>
-              </a:spcAft>
-              <a:defRPr sz="1200">
-                <a:solidFill>
-                  <a:srgbClr val="000000"/>
-                </a:solidFill>
-                <a:latin typeface="Play"/>
-                <a:ea typeface="Play"/>
-                <a:cs typeface="Play"/>
-              </a:defRPr>
-            </a:pPr>
-            <a:r>
-              <a:rPr sz="1200">
-                <a:solidFill>
-                  <a:srgbClr val="000000"/>
-                </a:solidFill>
-                <a:latin typeface="Play"/>
-                <a:ea typeface="Play"/>
-                <a:cs typeface="Play"/>
-              </a:rPr>
-              <a:t>• Доступ всей компании, интеграция</a:t>
-            </a:r>
-          </a:p>
-          <a:p>
-            <a:pPr algn="l">
-              <a:spcAft>
-                <a:spcPts val="300"/>
-              </a:spcAft>
-              <a:defRPr sz="1200">
-                <a:solidFill>
-                  <a:srgbClr val="000000"/>
-                </a:solidFill>
-                <a:latin typeface="Play"/>
-                <a:ea typeface="Play"/>
-                <a:cs typeface="Play"/>
-              </a:defRPr>
-            </a:pPr>
-            <a:r>
-              <a:rPr sz="1200">
-                <a:solidFill>
-                  <a:srgbClr val="000000"/>
-                </a:solidFill>
-                <a:latin typeface="Play"/>
-                <a:ea typeface="Play"/>
-                <a:cs typeface="Play"/>
-              </a:rPr>
-              <a:t>• Генерация иллюстраций в Q1 2027</a:t>
-            </a:r>
-          </a:p>
-        </p:txBody>
-      </p:sp>
-      <p:sp>
-        <p:nvSpPr>
-          <p:cNvPr id="2436" name="Rectangle 2435"/>
-          <p:cNvSpPr/>
-          <p:nvPr/>
-        </p:nvSpPr>
-        <p:spPr>
-          <a:xfrm>
-            <a:off x="274320" y="2374620"/>
-            <a:ext cx="8344814" cy="19858"/>
-          </a:xfrm>
-          <a:prstGeom prst="rect">
-            <a:avLst/>
-          </a:prstGeom>
-          <a:solidFill>
-            <a:srgbClr val="0077FF"/>
-          </a:solidFill>
-          <a:ln>
-            <a:noFill/>
-          </a:ln>
-        </p:spPr>
-        <p:style>
-          <a:lnRef idx="1">
-            <a:schemeClr val="accent1"/>
-          </a:lnRef>
-          <a:fillRef idx="3">
-            <a:schemeClr val="accent1"/>
-          </a:fillRef>
-          <a:effectRef idx="2">
-            <a:schemeClr val="accent1"/>
-          </a:effectRef>
-          <a:fontRef idx="minor">
-            <a:schemeClr val="lt1"/>
-          </a:fontRef>
-        </p:style>
-        <p:txBody>
-          <a:bodyPr rtlCol="0" anchor="ctr"/>
-          <a:lstStyle/>
-          <a:p>
-            <a:pPr algn="ctr"/>
-          </a:p>
-        </p:txBody>
-      </p:sp>
-      <p:sp>
-        <p:nvSpPr>
-          <p:cNvPr id="2437" name="Oval 2436"/>
-          <p:cNvSpPr/>
-          <p:nvPr/>
-        </p:nvSpPr>
-        <p:spPr>
-          <a:xfrm>
-            <a:off x="1244607" y="2311735"/>
-            <a:ext cx="145628" cy="145628"/>
-          </a:xfrm>
-          <a:prstGeom prst="ellipse">
-            <a:avLst/>
-          </a:prstGeom>
-          <a:solidFill>
-            <a:srgbClr val="0077FF"/>
-          </a:solidFill>
-          <a:ln>
-            <a:noFill/>
-          </a:ln>
-        </p:spPr>
-        <p:style>
-          <a:lnRef idx="1">
-            <a:schemeClr val="accent1"/>
-          </a:lnRef>
-          <a:fillRef idx="3">
-            <a:schemeClr val="accent1"/>
-          </a:fillRef>
-          <a:effectRef idx="2">
-            <a:schemeClr val="accent1"/>
-          </a:effectRef>
-          <a:fontRef idx="minor">
-            <a:schemeClr val="lt1"/>
-          </a:fontRef>
-        </p:style>
-        <p:txBody>
-          <a:bodyPr rtlCol="0" anchor="ctr"/>
-          <a:lstStyle/>
-          <a:p>
-            <a:pPr algn="ctr"/>
-          </a:p>
-        </p:txBody>
-      </p:sp>
-      <p:sp>
-        <p:nvSpPr>
-          <p:cNvPr id="2438" name="TextBox 2437"/>
-          <p:cNvSpPr txBox="1"/>
-          <p:nvPr/>
-        </p:nvSpPr>
-        <p:spPr>
-          <a:xfrm>
-            <a:off x="274320" y="2070125"/>
-            <a:ext cx="2086203" cy="251539"/>
-          </a:xfrm>
-          <a:prstGeom prst="rect">
-            <a:avLst/>
-          </a:prstGeom>
-          <a:noFill/>
-        </p:spPr>
-        <p:txBody>
-          <a:bodyPr wrap="square">
-            <a:spAutoFit/>
-          </a:bodyPr>
-          <a:lstStyle/>
-          <a:p>
-            <a:pPr algn="ctr">
-              <a:defRPr sz="1200" b="0">
-                <a:solidFill>
-                  <a:srgbClr val="000000"/>
-                </a:solidFill>
-                <a:latin typeface="Play"/>
-                <a:ea typeface="Play"/>
-                <a:cs typeface="Play"/>
-              </a:defRPr>
-            </a:pPr>
-            <a:r>
-              <a:rPr sz="1200" b="0">
-                <a:solidFill>
-                  <a:srgbClr val="000000"/>
-                </a:solidFill>
-                <a:latin typeface="Play"/>
-                <a:ea typeface="Play"/>
-                <a:cs typeface="Play"/>
-              </a:rPr>
-              <a:t>Подключение 4 команд</a:t>
-            </a:r>
-          </a:p>
-        </p:txBody>
-      </p:sp>
-      <p:sp>
-        <p:nvSpPr>
-          <p:cNvPr id="2439" name="Oval 2438"/>
-          <p:cNvSpPr/>
-          <p:nvPr/>
-        </p:nvSpPr>
-        <p:spPr>
-          <a:xfrm>
-            <a:off x="3330811" y="2311735"/>
-            <a:ext cx="145628" cy="145628"/>
-          </a:xfrm>
-          <a:prstGeom prst="ellipse">
-            <a:avLst/>
-          </a:prstGeom>
-          <a:solidFill>
-            <a:srgbClr val="0077FF"/>
-          </a:solidFill>
-          <a:ln>
-            <a:noFill/>
-          </a:ln>
-        </p:spPr>
-        <p:style>
-          <a:lnRef idx="1">
-            <a:schemeClr val="accent1"/>
-          </a:lnRef>
-          <a:fillRef idx="3">
-            <a:schemeClr val="accent1"/>
-          </a:fillRef>
-          <a:effectRef idx="2">
-            <a:schemeClr val="accent1"/>
-          </a:effectRef>
-          <a:fontRef idx="minor">
-            <a:schemeClr val="lt1"/>
-          </a:fontRef>
-        </p:style>
-        <p:txBody>
-          <a:bodyPr rtlCol="0" anchor="ctr"/>
-          <a:lstStyle/>
-          <a:p>
-            <a:pPr algn="ctr"/>
-          </a:p>
-        </p:txBody>
-      </p:sp>
-      <p:sp>
-        <p:nvSpPr>
-          <p:cNvPr id="2440" name="TextBox 2439"/>
-          <p:cNvSpPr txBox="1"/>
-          <p:nvPr/>
-        </p:nvSpPr>
-        <p:spPr>
-          <a:xfrm>
-            <a:off x="2360523" y="2520248"/>
-            <a:ext cx="2086203" cy="251539"/>
-          </a:xfrm>
-          <a:prstGeom prst="rect">
-            <a:avLst/>
-          </a:prstGeom>
-          <a:noFill/>
-        </p:spPr>
-        <p:txBody>
-          <a:bodyPr wrap="square">
-            <a:spAutoFit/>
-          </a:bodyPr>
-          <a:lstStyle/>
-          <a:p>
-            <a:pPr algn="ctr">
-              <a:defRPr sz="1200" b="0">
-                <a:solidFill>
-                  <a:srgbClr val="000000"/>
-                </a:solidFill>
-                <a:latin typeface="Play"/>
-                <a:ea typeface="Play"/>
-                <a:cs typeface="Play"/>
-              </a:defRPr>
-            </a:pPr>
-            <a:r>
-              <a:rPr sz="1200" b="0">
-                <a:solidFill>
-                  <a:srgbClr val="000000"/>
-                </a:solidFill>
-                <a:latin typeface="Play"/>
-                <a:ea typeface="Play"/>
-                <a:cs typeface="Play"/>
-              </a:rPr>
-              <a:t>Домен и HTTPS</a:t>
-            </a:r>
-          </a:p>
-        </p:txBody>
-      </p:sp>
-      <p:sp>
-        <p:nvSpPr>
-          <p:cNvPr id="2441" name="Oval 2440"/>
-          <p:cNvSpPr/>
-          <p:nvPr/>
-        </p:nvSpPr>
-        <p:spPr>
-          <a:xfrm>
-            <a:off x="5417014" y="2311735"/>
-            <a:ext cx="145628" cy="145628"/>
-          </a:xfrm>
-          <a:prstGeom prst="ellipse">
-            <a:avLst/>
-          </a:prstGeom>
-          <a:solidFill>
-            <a:srgbClr val="0077FF"/>
-          </a:solidFill>
-          <a:ln>
-            <a:noFill/>
-          </a:ln>
-        </p:spPr>
-        <p:style>
-          <a:lnRef idx="1">
-            <a:schemeClr val="accent1"/>
-          </a:lnRef>
-          <a:fillRef idx="3">
-            <a:schemeClr val="accent1"/>
-          </a:fillRef>
-          <a:effectRef idx="2">
-            <a:schemeClr val="accent1"/>
-          </a:effectRef>
-          <a:fontRef idx="minor">
-            <a:schemeClr val="lt1"/>
-          </a:fontRef>
-        </p:style>
-        <p:txBody>
-          <a:bodyPr rtlCol="0" anchor="ctr"/>
-          <a:lstStyle/>
-          <a:p>
-            <a:pPr algn="ctr"/>
-          </a:p>
-        </p:txBody>
-      </p:sp>
-      <p:sp>
-        <p:nvSpPr>
-          <p:cNvPr id="2442" name="TextBox 2441"/>
-          <p:cNvSpPr txBox="1"/>
-          <p:nvPr/>
-        </p:nvSpPr>
-        <p:spPr>
-          <a:xfrm>
-            <a:off x="4446727" y="2070125"/>
-            <a:ext cx="2086203" cy="251539"/>
-          </a:xfrm>
-          <a:prstGeom prst="rect">
-            <a:avLst/>
-          </a:prstGeom>
-          <a:noFill/>
-        </p:spPr>
-        <p:txBody>
-          <a:bodyPr wrap="square">
-            <a:spAutoFit/>
-          </a:bodyPr>
-          <a:lstStyle/>
-          <a:p>
-            <a:pPr algn="ctr">
-              <a:defRPr sz="1200" b="0">
-                <a:solidFill>
-                  <a:srgbClr val="000000"/>
-                </a:solidFill>
-                <a:latin typeface="Play"/>
-                <a:ea typeface="Play"/>
-                <a:cs typeface="Play"/>
-              </a:defRPr>
-            </a:pPr>
-            <a:r>
-              <a:rPr sz="1200" b="0">
-                <a:solidFill>
-                  <a:srgbClr val="000000"/>
-                </a:solidFill>
-                <a:latin typeface="Play"/>
-                <a:ea typeface="Play"/>
-                <a:cs typeface="Play"/>
-              </a:rPr>
-              <a:t>Доступ всей компании</a:t>
-            </a:r>
-          </a:p>
-        </p:txBody>
-      </p:sp>
-      <p:sp>
-        <p:nvSpPr>
-          <p:cNvPr id="2443" name="Oval 2442"/>
-          <p:cNvSpPr/>
-          <p:nvPr/>
-        </p:nvSpPr>
-        <p:spPr>
-          <a:xfrm>
-            <a:off x="7503218" y="2311735"/>
-            <a:ext cx="145628" cy="145628"/>
-          </a:xfrm>
-          <a:prstGeom prst="ellipse">
-            <a:avLst/>
-          </a:prstGeom>
-          <a:solidFill>
-            <a:srgbClr val="0077FF"/>
-          </a:solidFill>
-          <a:ln>
-            <a:noFill/>
-          </a:ln>
-        </p:spPr>
-        <p:style>
-          <a:lnRef idx="1">
-            <a:schemeClr val="accent1"/>
-          </a:lnRef>
-          <a:fillRef idx="3">
-            <a:schemeClr val="accent1"/>
-          </a:fillRef>
-          <a:effectRef idx="2">
-            <a:schemeClr val="accent1"/>
-          </a:effectRef>
-          <a:fontRef idx="minor">
-            <a:schemeClr val="lt1"/>
-          </a:fontRef>
-        </p:style>
-        <p:txBody>
-          <a:bodyPr rtlCol="0" anchor="ctr"/>
-          <a:lstStyle/>
-          <a:p>
-            <a:pPr algn="ctr"/>
-          </a:p>
-        </p:txBody>
-      </p:sp>
-      <p:sp>
-        <p:nvSpPr>
-          <p:cNvPr id="2444" name="TextBox 2443"/>
-          <p:cNvSpPr txBox="1"/>
-          <p:nvPr/>
-        </p:nvSpPr>
-        <p:spPr>
-          <a:xfrm>
-            <a:off x="6532930" y="2520248"/>
-            <a:ext cx="2086203" cy="251539"/>
-          </a:xfrm>
-          <a:prstGeom prst="rect">
-            <a:avLst/>
-          </a:prstGeom>
-          <a:noFill/>
-        </p:spPr>
-        <p:txBody>
-          <a:bodyPr wrap="square">
-            <a:spAutoFit/>
-          </a:bodyPr>
-          <a:lstStyle/>
-          <a:p>
-            <a:pPr algn="ctr">
-              <a:defRPr sz="1200" b="0">
-                <a:solidFill>
-                  <a:srgbClr val="000000"/>
-                </a:solidFill>
-                <a:latin typeface="Play"/>
-                <a:ea typeface="Play"/>
-                <a:cs typeface="Play"/>
-              </a:defRPr>
-            </a:pPr>
-            <a:r>
-              <a:rPr sz="1200" b="0">
-                <a:solidFill>
-                  <a:srgbClr val="000000"/>
-                </a:solidFill>
-                <a:latin typeface="Play"/>
-                <a:ea typeface="Play"/>
-                <a:cs typeface="Play"/>
-              </a:rPr>
-              <a:t>Генерация иллюстраций</a:t>
+              <a:t>• Четвёртый квартал 2026: доступ для всей компании, интеграция с хранилищем</a:t>
             </a:r>
           </a:p>
         </p:txBody>
@@ -7642,16 +8108,23 @@
         <p:nvPr/>
       </p:nvGrpSpPr>
       <p:grpSpPr/>
-      <p:sp>
-        <p:nvSpPr>
-          <p:cNvPr id="532" name="Google Shape;532;p53"/>
-          <p:cNvSpPr/>
-          <p:nvPr/>
-        </p:nvSpPr>
-        <p:spPr>
-          <a:xfrm>
-            <a:off x="303214" y="1022533"/>
-            <a:ext cx="8451939" cy="1433588"/>
+      <p:pic>
+        <p:nvPicPr>
+          <p:cNvPr descr=" " id="2385" name="Google Shape;2385;p88"/>
+          <p:cNvPicPr preferRelativeResize="0"/>
+          <p:nvPr/>
+        </p:nvPicPr>
+        <p:blipFill rotWithShape="1">
+          <a:blip r:embed="rId2">
+            <a:alphaModFix/>
+          </a:blip>
+          <a:srcRect b="0" l="0" r="0" t="0"/>
+          <a:stretch/>
+        </p:blipFill>
+        <p:spPr>
+          <a:xfrm>
+            <a:off x="388142" y="2000324"/>
+            <a:ext cx="8755811" cy="9524"/>
           </a:xfrm>
           <a:prstGeom prst="rect">
             <a:avLst/>
@@ -7661,38 +8134,17 @@
             <a:noFill/>
           </a:ln>
         </p:spPr>
-        <p:txBody>
-          <a:bodyPr anchorCtr="0" anchor="ctr" bIns="91425" lIns="91425" spcFirstLastPara="1" rIns="91425" wrap="square" tIns="91425">
-            <a:noAutofit/>
-          </a:bodyPr>
-          <a:lstStyle/>
-          <a:p>
-            <a:pPr indent="0" lvl="0" marL="0" rtl="0" algn="l">
-              <a:spcBef>
-                <a:spcPts val="0"/>
-              </a:spcBef>
-              <a:spcAft>
-                <a:spcPts val="0"/>
-              </a:spcAft>
-              <a:buNone/>
-            </a:pPr>
-            <a:r>
-              <a:t/>
-            </a:r>
-            <a:endParaRPr/>
-          </a:p>
-        </p:txBody>
-      </p:sp>
-      <p:sp>
-        <p:nvSpPr>
-          <p:cNvPr id="549" name="Google Shape;549;p53"/>
+      </p:pic>
+      <p:sp>
+        <p:nvSpPr>
+          <p:cNvPr id="2386" name="Google Shape;2386;p88"/>
           <p:cNvSpPr/>
           <p:nvPr/>
         </p:nvSpPr>
         <p:spPr>
           <a:xfrm>
-            <a:off x="7359897" y="1022533"/>
-            <a:ext cx="1395256" cy="1433588"/>
+            <a:off x="319086" y="1286042"/>
+            <a:ext cx="1690679" cy="1128566"/>
           </a:xfrm>
           <a:prstGeom prst="rect">
             <a:avLst/>
@@ -7726,14 +8178,14 @@
       </p:sp>
       <p:sp>
         <p:nvSpPr>
-          <p:cNvPr id="553" name="Google Shape;553;p53"/>
+          <p:cNvPr id="2388" name="Google Shape;2388;p88"/>
           <p:cNvSpPr/>
           <p:nvPr/>
         </p:nvSpPr>
         <p:spPr>
           <a:xfrm>
-            <a:off x="276488" y="2955549"/>
-            <a:ext cx="8451939" cy="1433588"/>
+            <a:off x="2600312" y="1286042"/>
+            <a:ext cx="1690679" cy="1128566"/>
           </a:xfrm>
           <a:prstGeom prst="rect">
             <a:avLst/>
@@ -7767,14 +8219,14 @@
       </p:sp>
       <p:sp>
         <p:nvSpPr>
-          <p:cNvPr id="554" name="Google Shape;554;p53"/>
+          <p:cNvPr id="2390" name="Google Shape;2390;p88"/>
           <p:cNvSpPr/>
           <p:nvPr/>
         </p:nvSpPr>
         <p:spPr>
           <a:xfrm>
-            <a:off x="303214" y="2797849"/>
-            <a:ext cx="8451939" cy="1433588"/>
+            <a:off x="4881537" y="1286042"/>
+            <a:ext cx="1690679" cy="1128566"/>
           </a:xfrm>
           <a:prstGeom prst="rect">
             <a:avLst/>
@@ -7808,14 +8260,14 @@
       </p:sp>
       <p:sp>
         <p:nvSpPr>
-          <p:cNvPr id="555" name="Google Shape;555;p53"/>
+          <p:cNvPr id="2392" name="Google Shape;2392;p88"/>
           <p:cNvSpPr/>
           <p:nvPr/>
         </p:nvSpPr>
         <p:spPr>
           <a:xfrm>
-            <a:off x="303214" y="2797849"/>
-            <a:ext cx="1395256" cy="1433588"/>
+            <a:off x="7162763" y="1286042"/>
+            <a:ext cx="1690679" cy="1128566"/>
           </a:xfrm>
           <a:prstGeom prst="rect">
             <a:avLst/>
@@ -7847,16 +8299,23 @@
           </a:p>
         </p:txBody>
       </p:sp>
-      <p:sp>
-        <p:nvSpPr>
-          <p:cNvPr id="559" name="Google Shape;559;p53"/>
-          <p:cNvSpPr/>
-          <p:nvPr/>
-        </p:nvSpPr>
-        <p:spPr>
-          <a:xfrm>
-            <a:off x="2067385" y="2797849"/>
-            <a:ext cx="1395256" cy="1433588"/>
+      <p:pic>
+        <p:nvPicPr>
+          <p:cNvPr descr=" " id="2394" name="Google Shape;2394;p88"/>
+          <p:cNvPicPr preferRelativeResize="0"/>
+          <p:nvPr/>
+        </p:nvPicPr>
+        <p:blipFill rotWithShape="1">
+          <a:blip r:embed="rId3">
+            <a:alphaModFix/>
+          </a:blip>
+          <a:srcRect b="0" l="0" r="0" t="0"/>
+          <a:stretch/>
+        </p:blipFill>
+        <p:spPr>
+          <a:xfrm>
+            <a:off x="1" y="3684300"/>
+            <a:ext cx="7238962" cy="70126"/>
           </a:xfrm>
           <a:prstGeom prst="rect">
             <a:avLst/>
@@ -7866,154 +8325,10 @@
             <a:noFill/>
           </a:ln>
         </p:spPr>
-        <p:txBody>
-          <a:bodyPr anchorCtr="0" anchor="ctr" bIns="91425" lIns="91425" spcFirstLastPara="1" rIns="91425" wrap="square" tIns="91425">
-            <a:noAutofit/>
-          </a:bodyPr>
-          <a:lstStyle/>
-          <a:p>
-            <a:pPr indent="0" lvl="0" marL="0" rtl="0" algn="l">
-              <a:spcBef>
-                <a:spcPts val="0"/>
-              </a:spcBef>
-              <a:spcAft>
-                <a:spcPts val="0"/>
-              </a:spcAft>
-              <a:buNone/>
-            </a:pPr>
-            <a:r>
-              <a:t/>
-            </a:r>
-            <a:endParaRPr/>
-          </a:p>
-        </p:txBody>
-      </p:sp>
-      <p:sp>
-        <p:nvSpPr>
-          <p:cNvPr id="563" name="Google Shape;563;p53"/>
-          <p:cNvSpPr/>
-          <p:nvPr/>
-        </p:nvSpPr>
-        <p:spPr>
-          <a:xfrm>
-            <a:off x="3831556" y="2797849"/>
-            <a:ext cx="1395256" cy="1433588"/>
-          </a:xfrm>
-          <a:prstGeom prst="rect">
-            <a:avLst/>
-          </a:prstGeom>
-          <a:noFill/>
-          <a:ln>
-            <a:noFill/>
-          </a:ln>
-        </p:spPr>
-        <p:txBody>
-          <a:bodyPr anchorCtr="0" anchor="ctr" bIns="91425" lIns="91425" spcFirstLastPara="1" rIns="91425" wrap="square" tIns="91425">
-            <a:noAutofit/>
-          </a:bodyPr>
-          <a:lstStyle/>
-          <a:p>
-            <a:pPr indent="0" lvl="0" marL="0" rtl="0" algn="l">
-              <a:spcBef>
-                <a:spcPts val="0"/>
-              </a:spcBef>
-              <a:spcAft>
-                <a:spcPts val="0"/>
-              </a:spcAft>
-              <a:buNone/>
-            </a:pPr>
-            <a:r>
-              <a:t/>
-            </a:r>
-            <a:endParaRPr/>
-          </a:p>
-        </p:txBody>
-      </p:sp>
-      <p:sp>
-        <p:nvSpPr>
-          <p:cNvPr id="567" name="Google Shape;567;p53"/>
-          <p:cNvSpPr/>
-          <p:nvPr/>
-        </p:nvSpPr>
-        <p:spPr>
-          <a:xfrm>
-            <a:off x="5595727" y="2797849"/>
-            <a:ext cx="1395256" cy="1433588"/>
-          </a:xfrm>
-          <a:prstGeom prst="rect">
-            <a:avLst/>
-          </a:prstGeom>
-          <a:noFill/>
-          <a:ln>
-            <a:noFill/>
-          </a:ln>
-        </p:spPr>
-        <p:txBody>
-          <a:bodyPr anchorCtr="0" anchor="ctr" bIns="91425" lIns="91425" spcFirstLastPara="1" rIns="91425" wrap="square" tIns="91425">
-            <a:noAutofit/>
-          </a:bodyPr>
-          <a:lstStyle/>
-          <a:p>
-            <a:pPr indent="0" lvl="0" marL="0" rtl="0" algn="l">
-              <a:spcBef>
-                <a:spcPts val="0"/>
-              </a:spcBef>
-              <a:spcAft>
-                <a:spcPts val="0"/>
-              </a:spcAft>
-              <a:buNone/>
-            </a:pPr>
-            <a:r>
-              <a:t/>
-            </a:r>
-            <a:endParaRPr/>
-          </a:p>
-        </p:txBody>
-      </p:sp>
-      <p:sp>
-        <p:nvSpPr>
-          <p:cNvPr id="571" name="Google Shape;571;p53"/>
-          <p:cNvSpPr/>
-          <p:nvPr/>
-        </p:nvSpPr>
-        <p:spPr>
-          <a:xfrm>
-            <a:off x="7359897" y="2797849"/>
-            <a:ext cx="1395256" cy="1433588"/>
-          </a:xfrm>
-          <a:prstGeom prst="rect">
-            <a:avLst/>
-          </a:prstGeom>
-          <a:noFill/>
-          <a:ln>
-            <a:noFill/>
-          </a:ln>
-        </p:spPr>
-        <p:txBody>
-          <a:bodyPr anchorCtr="0" anchor="ctr" bIns="91425" lIns="91425" spcFirstLastPara="1" rIns="91425" wrap="square" tIns="91425">
-            <a:noAutofit/>
-          </a:bodyPr>
-          <a:lstStyle/>
-          <a:p>
-            <a:pPr indent="0" lvl="0" marL="0" rtl="0" algn="l">
-              <a:spcBef>
-                <a:spcPts val="0"/>
-              </a:spcBef>
-              <a:spcAft>
-                <a:spcPts val="0"/>
-              </a:spcAft>
-              <a:buNone/>
-            </a:pPr>
-            <a:r>
-              <a:t/>
-            </a:r>
-            <a:endParaRPr/>
-          </a:p>
-        </p:txBody>
-      </p:sp>
-      <p:sp>
-        <p:nvSpPr>
-          <p:cNvPr id="572" name="title"/>
+      </p:pic>
+      <p:sp>
+        <p:nvSpPr>
+          <p:cNvPr id="2395" name="title"/>
           <p:cNvSpPr txBox="1"/>
           <p:nvPr/>
         </p:nvSpPr>
@@ -8037,7 +8352,7 @@
               <a:spcAft>
                 <a:spcPts val="300"/>
               </a:spcAft>
-              <a:defRPr sz="2400">
+              <a:defRPr sz="2438">
                 <a:solidFill>
                   <a:srgbClr val="000000"/>
                 </a:solidFill>
@@ -8047,7 +8362,7 @@
               </a:defRPr>
             </a:pPr>
             <a:r>
-              <a:rPr sz="2400">
+              <a:rPr sz="2438">
                 <a:solidFill>
                   <a:srgbClr val="000000"/>
                 </a:solidFill>
@@ -8062,14 +8377,14 @@
       </p:sp>
       <p:sp>
         <p:nvSpPr>
-          <p:cNvPr id="573" name="body"/>
+          <p:cNvPr id="2396" name="body"/>
           <p:cNvSpPr txBox="1"/>
           <p:nvPr/>
         </p:nvSpPr>
         <p:spPr>
           <a:xfrm>
-            <a:off x="274320" y="1868988"/>
-            <a:ext cx="8344814" cy="1488440"/>
+            <a:off x="274320" y="2009822"/>
+            <a:ext cx="8344814" cy="900430"/>
           </a:xfrm>
           <a:prstGeom prst="rect">
             <a:avLst/>
@@ -8086,7 +8401,7 @@
               <a:spcAft>
                 <a:spcPts val="300"/>
               </a:spcAft>
-              <a:defRPr sz="1400">
+              <a:defRPr sz="1200">
                 <a:solidFill>
                   <a:srgbClr val="000000"/>
                 </a:solidFill>
@@ -8096,7 +8411,7 @@
               </a:defRPr>
             </a:pPr>
             <a:r>
-              <a:rPr sz="1400">
+              <a:rPr sz="1200">
                 <a:solidFill>
                   <a:srgbClr val="000000"/>
                 </a:solidFill>
@@ -8104,7 +8419,7 @@
                 <a:ea typeface="Play"/>
                 <a:cs typeface="Play"/>
               </a:rPr>
-              <a:t>• 6 недель</a:t>
+              <a:t>• Пилот 6 недель на двух командах</a:t>
             </a:r>
           </a:p>
           <a:p>
@@ -8112,7 +8427,7 @@
               <a:spcAft>
                 <a:spcPts val="300"/>
               </a:spcAft>
-              <a:defRPr sz="1400">
+              <a:defRPr sz="1200">
                 <a:solidFill>
                   <a:srgbClr val="000000"/>
                 </a:solidFill>
@@ -8122,7 +8437,7 @@
               </a:defRPr>
             </a:pPr>
             <a:r>
-              <a:rPr sz="1400">
+              <a:rPr sz="1200">
                 <a:solidFill>
                   <a:srgbClr val="000000"/>
                 </a:solidFill>
@@ -8130,7 +8445,7 @@
                 <a:ea typeface="Play"/>
                 <a:cs typeface="Play"/>
               </a:rPr>
-              <a:t>• 2 команды</a:t>
+              <a:t>• Собрано 68 презентаций</a:t>
             </a:r>
           </a:p>
           <a:p>
@@ -8138,7 +8453,7 @@
               <a:spcAft>
                 <a:spcPts val="300"/>
               </a:spcAft>
-              <a:defRPr sz="1400">
+              <a:defRPr sz="1200">
                 <a:solidFill>
                   <a:srgbClr val="000000"/>
                 </a:solidFill>
@@ -8148,7 +8463,7 @@
               </a:defRPr>
             </a:pPr>
             <a:r>
-              <a:rPr sz="1400">
+              <a:rPr sz="1200">
                 <a:solidFill>
                   <a:srgbClr val="000000"/>
                 </a:solidFill>
@@ -8156,7 +8471,7 @@
                 <a:ea typeface="Play"/>
                 <a:cs typeface="Play"/>
               </a:rPr>
-              <a:t>• 68 презентаций</a:t>
+              <a:t>• Время сборки 4 мин, ожидание 1 день</a:t>
             </a:r>
           </a:p>
           <a:p>
@@ -8164,7 +8479,7 @@
               <a:spcAft>
                 <a:spcPts val="300"/>
               </a:spcAft>
-              <a:defRPr sz="1400">
+              <a:defRPr sz="1200">
                 <a:solidFill>
                   <a:srgbClr val="000000"/>
                 </a:solidFill>
@@ -8174,7 +8489,7 @@
               </a:defRPr>
             </a:pPr>
             <a:r>
-              <a:rPr sz="1400">
+              <a:rPr sz="1200">
                 <a:solidFill>
                   <a:srgbClr val="000000"/>
                 </a:solidFill>
@@ -8182,15 +8497,121 @@
                 <a:ea typeface="Play"/>
                 <a:cs typeface="Play"/>
               </a:rPr>
-              <a:t>• Сборка 4 мин вместо 186</a:t>
-            </a:r>
-          </a:p>
-          <a:p>
-            <a:pPr algn="l">
-              <a:spcAft>
-                <a:spcPts val="300"/>
-              </a:spcAft>
-              <a:defRPr sz="1400">
+              <a:t>• Нарушения стиля 2 из 68, исправлены автоматически</a:t>
+            </a:r>
+          </a:p>
+        </p:txBody>
+      </p:sp>
+      <p:sp>
+        <p:nvSpPr>
+          <p:cNvPr id="2397" name="Rectangle 2396"/>
+          <p:cNvSpPr/>
+          <p:nvPr/>
+        </p:nvSpPr>
+        <p:spPr>
+          <a:xfrm>
+            <a:off x="274320" y="3211198"/>
+            <a:ext cx="8344814" cy="26282"/>
+          </a:xfrm>
+          <a:prstGeom prst="rect">
+            <a:avLst/>
+          </a:prstGeom>
+          <a:solidFill>
+            <a:srgbClr val="0077FF"/>
+          </a:solidFill>
+          <a:ln>
+            <a:noFill/>
+          </a:ln>
+        </p:spPr>
+        <p:style>
+          <a:lnRef idx="1">
+            <a:schemeClr val="accent1"/>
+          </a:lnRef>
+          <a:fillRef idx="3">
+            <a:schemeClr val="accent1"/>
+          </a:fillRef>
+          <a:effectRef idx="2">
+            <a:schemeClr val="accent1"/>
+          </a:effectRef>
+          <a:fontRef idx="minor">
+            <a:schemeClr val="lt1"/>
+          </a:fontRef>
+        </p:style>
+        <p:txBody>
+          <a:bodyPr rtlCol="0" anchor="ctr"/>
+          <a:lstStyle/>
+          <a:p>
+            <a:pPr algn="ctr"/>
+          </a:p>
+        </p:txBody>
+      </p:sp>
+      <p:sp>
+        <p:nvSpPr>
+          <p:cNvPr id="2398" name="Oval 2397"/>
+          <p:cNvSpPr/>
+          <p:nvPr/>
+        </p:nvSpPr>
+        <p:spPr>
+          <a:xfrm>
+            <a:off x="1568752" y="3127969"/>
+            <a:ext cx="192740" cy="192740"/>
+          </a:xfrm>
+          <a:prstGeom prst="ellipse">
+            <a:avLst/>
+          </a:prstGeom>
+          <a:solidFill>
+            <a:srgbClr val="0077FF"/>
+          </a:solidFill>
+          <a:ln>
+            <a:noFill/>
+          </a:ln>
+        </p:spPr>
+        <p:style>
+          <a:lnRef idx="1">
+            <a:schemeClr val="accent1"/>
+          </a:lnRef>
+          <a:fillRef idx="3">
+            <a:schemeClr val="accent1"/>
+          </a:fillRef>
+          <a:effectRef idx="2">
+            <a:schemeClr val="accent1"/>
+          </a:effectRef>
+          <a:fontRef idx="minor">
+            <a:schemeClr val="lt1"/>
+          </a:fontRef>
+        </p:style>
+        <p:txBody>
+          <a:bodyPr rtlCol="0" anchor="ctr"/>
+          <a:lstStyle/>
+          <a:p>
+            <a:pPr algn="ctr"/>
+          </a:p>
+        </p:txBody>
+      </p:sp>
+      <p:sp>
+        <p:nvSpPr>
+          <p:cNvPr id="2399" name="TextBox 2398"/>
+          <p:cNvSpPr txBox="1"/>
+          <p:nvPr/>
+        </p:nvSpPr>
+        <p:spPr>
+          <a:xfrm>
+            <a:off x="274320" y="2808196"/>
+            <a:ext cx="4172407" cy="332914"/>
+          </a:xfrm>
+          <a:prstGeom prst="rect">
+            <a:avLst/>
+          </a:prstGeom>
+          <a:noFill/>
+        </p:spPr>
+        <p:txBody>
+          <a:bodyPr wrap="square" lIns="12700" rIns="12700" tIns="12700" bIns="12700">
+            <a:spAutoFit/>
+          </a:bodyPr>
+          <a:lstStyle/>
+          <a:p>
+            <a:pPr algn="ctr">
+              <a:defRPr sz="1400" b="0">
                 <a:solidFill>
                   <a:srgbClr val="000000"/>
                 </a:solidFill>
@@ -8200,7 +8621,7 @@
               </a:defRPr>
             </a:pPr>
             <a:r>
-              <a:rPr sz="1400">
+              <a:rPr sz="1400" b="0">
                 <a:solidFill>
                   <a:srgbClr val="000000"/>
                 </a:solidFill>
@@ -8208,15 +8629,78 @@
                 <a:ea typeface="Play"/>
                 <a:cs typeface="Play"/>
               </a:rPr>
-              <a:t>• Время до первой версии 1 день вместо 6</a:t>
-            </a:r>
-          </a:p>
-          <a:p>
-            <a:pPr algn="l">
-              <a:spcAft>
-                <a:spcPts val="300"/>
-              </a:spcAft>
-              <a:defRPr sz="1400">
+              <a:t>Подготовка</a:t>
+            </a:r>
+          </a:p>
+        </p:txBody>
+      </p:sp>
+      <p:sp>
+        <p:nvSpPr>
+          <p:cNvPr id="2400" name="Oval 2399"/>
+          <p:cNvSpPr/>
+          <p:nvPr/>
+        </p:nvSpPr>
+        <p:spPr>
+          <a:xfrm>
+            <a:off x="4350356" y="3127969"/>
+            <a:ext cx="192740" cy="192740"/>
+          </a:xfrm>
+          <a:prstGeom prst="ellipse">
+            <a:avLst/>
+          </a:prstGeom>
+          <a:solidFill>
+            <a:srgbClr val="0077FF"/>
+          </a:solidFill>
+          <a:ln>
+            <a:noFill/>
+          </a:ln>
+        </p:spPr>
+        <p:style>
+          <a:lnRef idx="1">
+            <a:schemeClr val="accent1"/>
+          </a:lnRef>
+          <a:fillRef idx="3">
+            <a:schemeClr val="accent1"/>
+          </a:fillRef>
+          <a:effectRef idx="2">
+            <a:schemeClr val="accent1"/>
+          </a:effectRef>
+          <a:fontRef idx="minor">
+            <a:schemeClr val="lt1"/>
+          </a:fontRef>
+        </p:style>
+        <p:txBody>
+          <a:bodyPr rtlCol="0" anchor="ctr"/>
+          <a:lstStyle/>
+          <a:p>
+            <a:pPr algn="ctr"/>
+          </a:p>
+        </p:txBody>
+      </p:sp>
+      <p:sp>
+        <p:nvSpPr>
+          <p:cNvPr id="2401" name="TextBox 2400"/>
+          <p:cNvSpPr txBox="1"/>
+          <p:nvPr/>
+        </p:nvSpPr>
+        <p:spPr>
+          <a:xfrm>
+            <a:off x="2360523" y="3403938"/>
+            <a:ext cx="4172407" cy="332914"/>
+          </a:xfrm>
+          <a:prstGeom prst="rect">
+            <a:avLst/>
+          </a:prstGeom>
+          <a:noFill/>
+        </p:spPr>
+        <p:txBody>
+          <a:bodyPr wrap="square" lIns="12700" rIns="12700" tIns="12700" bIns="12700">
+            <a:spAutoFit/>
+          </a:bodyPr>
+          <a:lstStyle/>
+          <a:p>
+            <a:pPr algn="ctr">
+              <a:defRPr sz="1400" b="0">
                 <a:solidFill>
                   <a:srgbClr val="000000"/>
                 </a:solidFill>
@@ -8226,7 +8710,7 @@
               </a:defRPr>
             </a:pPr>
             <a:r>
-              <a:rPr sz="1400">
+              <a:rPr sz="1400" b="0">
                 <a:solidFill>
                   <a:srgbClr val="000000"/>
                 </a:solidFill>
@@ -8234,7 +8718,96 @@
                 <a:ea typeface="Play"/>
                 <a:cs typeface="Play"/>
               </a:rPr>
-              <a:t>• Нарушения 2 из 68, запросы 38 вместо 11</a:t>
+              <a:t>Запуск</a:t>
+            </a:r>
+          </a:p>
+        </p:txBody>
+      </p:sp>
+      <p:sp>
+        <p:nvSpPr>
+          <p:cNvPr id="2402" name="Oval 2401"/>
+          <p:cNvSpPr/>
+          <p:nvPr/>
+        </p:nvSpPr>
+        <p:spPr>
+          <a:xfrm>
+            <a:off x="7131961" y="3127969"/>
+            <a:ext cx="192740" cy="192740"/>
+          </a:xfrm>
+          <a:prstGeom prst="ellipse">
+            <a:avLst/>
+          </a:prstGeom>
+          <a:solidFill>
+            <a:srgbClr val="0077FF"/>
+          </a:solidFill>
+          <a:ln>
+            <a:noFill/>
+          </a:ln>
+        </p:spPr>
+        <p:style>
+          <a:lnRef idx="1">
+            <a:schemeClr val="accent1"/>
+          </a:lnRef>
+          <a:fillRef idx="3">
+            <a:schemeClr val="accent1"/>
+          </a:fillRef>
+          <a:effectRef idx="2">
+            <a:schemeClr val="accent1"/>
+          </a:effectRef>
+          <a:fontRef idx="minor">
+            <a:schemeClr val="lt1"/>
+          </a:fontRef>
+        </p:style>
+        <p:txBody>
+          <a:bodyPr rtlCol="0" anchor="ctr"/>
+          <a:lstStyle/>
+          <a:p>
+            <a:pPr algn="ctr"/>
+          </a:p>
+        </p:txBody>
+      </p:sp>
+      <p:sp>
+        <p:nvSpPr>
+          <p:cNvPr id="2403" name="TextBox 2402"/>
+          <p:cNvSpPr txBox="1"/>
+          <p:nvPr/>
+        </p:nvSpPr>
+        <p:spPr>
+          <a:xfrm>
+            <a:off x="4446727" y="2808196"/>
+            <a:ext cx="4172407" cy="332914"/>
+          </a:xfrm>
+          <a:prstGeom prst="rect">
+            <a:avLst/>
+          </a:prstGeom>
+          <a:noFill/>
+        </p:spPr>
+        <p:txBody>
+          <a:bodyPr wrap="square" lIns="12700" rIns="12700" tIns="12700" bIns="12700">
+            <a:spAutoFit/>
+          </a:bodyPr>
+          <a:lstStyle/>
+          <a:p>
+            <a:pPr algn="ctr">
+              <a:defRPr sz="1400" b="0">
+                <a:solidFill>
+                  <a:srgbClr val="000000"/>
+                </a:solidFill>
+                <a:latin typeface="Play"/>
+                <a:ea typeface="Play"/>
+                <a:cs typeface="Play"/>
+              </a:defRPr>
+            </a:pPr>
+            <a:r>
+              <a:rPr sz="1400" b="0">
+                <a:solidFill>
+                  <a:srgbClr val="000000"/>
+                </a:solidFill>
+                <a:latin typeface="Play"/>
+                <a:ea typeface="Play"/>
+                <a:cs typeface="Play"/>
+              </a:rPr>
+              <a:t>Оценка</a:t>
             </a:r>
           </a:p>
         </p:txBody>
@@ -8259,359 +8832,7 @@
       <p:grpSpPr/>
       <p:sp>
         <p:nvSpPr>
-          <p:cNvPr id="1027" name="Google Shape;1027;p65"/>
-          <p:cNvSpPr/>
-          <p:nvPr/>
-        </p:nvSpPr>
-        <p:spPr>
-          <a:xfrm>
-            <a:off x="6064222" y="1209852"/>
-            <a:ext cx="2793985" cy="3014270"/>
-          </a:xfrm>
-          <a:prstGeom prst="roundRect">
-            <a:avLst>
-              <a:gd fmla="val 3436" name="adj"/>
-            </a:avLst>
-          </a:prstGeom>
-          <a:solidFill>
-            <a:schemeClr val="lt2"/>
-          </a:solidFill>
-          <a:ln>
-            <a:noFill/>
-          </a:ln>
-        </p:spPr>
-        <p:txBody>
-          <a:bodyPr anchorCtr="0" anchor="ctr" bIns="91425" lIns="91425" spcFirstLastPara="1" rIns="91425" wrap="square" tIns="91425">
-            <a:noAutofit/>
-          </a:bodyPr>
-          <a:lstStyle/>
-          <a:p>
-            <a:pPr indent="0" lvl="0" marL="0" rtl="0" algn="l">
-              <a:spcBef>
-                <a:spcPts val="0"/>
-              </a:spcBef>
-              <a:spcAft>
-                <a:spcPts val="0"/>
-              </a:spcAft>
-              <a:buNone/>
-            </a:pPr>
-            <a:r>
-              <a:t/>
-            </a:r>
-            <a:endParaRPr/>
-          </a:p>
-        </p:txBody>
-      </p:sp>
-      <p:sp>
-        <p:nvSpPr>
-          <p:cNvPr id="1029" name="Google Shape;1029;p65"/>
-          <p:cNvSpPr/>
-          <p:nvPr/>
-        </p:nvSpPr>
-        <p:spPr>
-          <a:xfrm>
-            <a:off x="3174981" y="1209852"/>
-            <a:ext cx="2793985" cy="3014270"/>
-          </a:xfrm>
-          <a:prstGeom prst="roundRect">
-            <a:avLst>
-              <a:gd fmla="val 3436" name="adj"/>
-            </a:avLst>
-          </a:prstGeom>
-          <a:solidFill>
-            <a:schemeClr val="lt2"/>
-          </a:solidFill>
-          <a:ln>
-            <a:noFill/>
-          </a:ln>
-        </p:spPr>
-        <p:txBody>
-          <a:bodyPr anchorCtr="0" anchor="ctr" bIns="91425" lIns="91425" spcFirstLastPara="1" rIns="91425" wrap="square" tIns="91425">
-            <a:noAutofit/>
-          </a:bodyPr>
-          <a:lstStyle/>
-          <a:p>
-            <a:pPr indent="0" lvl="0" marL="0" rtl="0" algn="l">
-              <a:spcBef>
-                <a:spcPts val="0"/>
-              </a:spcBef>
-              <a:spcAft>
-                <a:spcPts val="0"/>
-              </a:spcAft>
-              <a:buNone/>
-            </a:pPr>
-            <a:r>
-              <a:t/>
-            </a:r>
-            <a:endParaRPr/>
-          </a:p>
-        </p:txBody>
-      </p:sp>
-      <p:sp>
-        <p:nvSpPr>
-          <p:cNvPr id="1031" name="Google Shape;1031;p65"/>
-          <p:cNvSpPr/>
-          <p:nvPr/>
-        </p:nvSpPr>
-        <p:spPr>
-          <a:xfrm>
-            <a:off x="285749" y="1209852"/>
-            <a:ext cx="2793985" cy="3014270"/>
-          </a:xfrm>
-          <a:prstGeom prst="roundRect">
-            <a:avLst>
-              <a:gd fmla="val 3436" name="adj"/>
-            </a:avLst>
-          </a:prstGeom>
-          <a:solidFill>
-            <a:schemeClr val="lt2"/>
-          </a:solidFill>
-          <a:ln>
-            <a:noFill/>
-          </a:ln>
-        </p:spPr>
-        <p:txBody>
-          <a:bodyPr anchorCtr="0" anchor="ctr" bIns="91425" lIns="91425" spcFirstLastPara="1" rIns="91425" wrap="square" tIns="91425">
-            <a:noAutofit/>
-          </a:bodyPr>
-          <a:lstStyle/>
-          <a:p>
-            <a:pPr indent="0" lvl="0" marL="0" rtl="0" algn="l">
-              <a:spcBef>
-                <a:spcPts val="0"/>
-              </a:spcBef>
-              <a:spcAft>
-                <a:spcPts val="0"/>
-              </a:spcAft>
-              <a:buNone/>
-            </a:pPr>
-            <a:r>
-              <a:t/>
-            </a:r>
-            <a:endParaRPr/>
-          </a:p>
-        </p:txBody>
-      </p:sp>
-      <p:sp>
-        <p:nvSpPr>
-          <p:cNvPr id="1032" name="Google Shape;1032;p65"/>
-          <p:cNvSpPr/>
-          <p:nvPr/>
-        </p:nvSpPr>
-        <p:spPr>
-          <a:xfrm>
-            <a:off x="285748" y="286047"/>
-            <a:ext cx="8572456" cy="3938075"/>
-          </a:xfrm>
-          <a:prstGeom prst="rect">
-            <a:avLst/>
-          </a:prstGeom>
-          <a:noFill/>
-          <a:ln>
-            <a:noFill/>
-          </a:ln>
-        </p:spPr>
-        <p:txBody>
-          <a:bodyPr anchorCtr="0" anchor="ctr" bIns="91425" lIns="91425" spcFirstLastPara="1" rIns="91425" wrap="square" tIns="91425">
-            <a:noAutofit/>
-          </a:bodyPr>
-          <a:lstStyle/>
-          <a:p>
-            <a:pPr indent="0" lvl="0" marL="0" rtl="0" algn="l">
-              <a:spcBef>
-                <a:spcPts val="0"/>
-              </a:spcBef>
-              <a:spcAft>
-                <a:spcPts val="0"/>
-              </a:spcAft>
-              <a:buNone/>
-            </a:pPr>
-            <a:r>
-              <a:t/>
-            </a:r>
-            <a:endParaRPr/>
-          </a:p>
-        </p:txBody>
-      </p:sp>
-      <p:sp>
-        <p:nvSpPr>
-          <p:cNvPr id="1033" name="Google Shape;1033;p65"/>
-          <p:cNvSpPr/>
-          <p:nvPr/>
-        </p:nvSpPr>
-        <p:spPr>
-          <a:xfrm>
-            <a:off x="285748" y="1209852"/>
-            <a:ext cx="8572456" cy="3014270"/>
-          </a:xfrm>
-          <a:prstGeom prst="rect">
-            <a:avLst/>
-          </a:prstGeom>
-          <a:noFill/>
-          <a:ln>
-            <a:noFill/>
-          </a:ln>
-        </p:spPr>
-        <p:txBody>
-          <a:bodyPr anchorCtr="0" anchor="ctr" bIns="91425" lIns="91425" spcFirstLastPara="1" rIns="91425" wrap="square" tIns="91425">
-            <a:noAutofit/>
-          </a:bodyPr>
-          <a:lstStyle/>
-          <a:p>
-            <a:pPr indent="0" lvl="0" marL="0" rtl="0" algn="l">
-              <a:spcBef>
-                <a:spcPts val="0"/>
-              </a:spcBef>
-              <a:spcAft>
-                <a:spcPts val="0"/>
-              </a:spcAft>
-              <a:buNone/>
-            </a:pPr>
-            <a:r>
-              <a:t/>
-            </a:r>
-            <a:endParaRPr/>
-          </a:p>
-        </p:txBody>
-      </p:sp>
-      <p:sp>
-        <p:nvSpPr>
-          <p:cNvPr id="1035" name="Google Shape;1035;p65"/>
-          <p:cNvSpPr/>
-          <p:nvPr/>
-        </p:nvSpPr>
-        <p:spPr>
-          <a:xfrm>
-            <a:off x="476248" y="1400328"/>
-            <a:ext cx="76199" cy="76190"/>
-          </a:xfrm>
-          <a:prstGeom prst="roundRect">
-            <a:avLst>
-              <a:gd fmla="val 31500" name="adj"/>
-            </a:avLst>
-          </a:prstGeom>
-          <a:solidFill>
-            <a:srgbClr val="0077FF"/>
-          </a:solidFill>
-          <a:ln>
-            <a:noFill/>
-          </a:ln>
-        </p:spPr>
-        <p:txBody>
-          <a:bodyPr anchorCtr="0" anchor="ctr" bIns="91425" lIns="91425" spcFirstLastPara="1" rIns="91425" wrap="square" tIns="91425">
-            <a:noAutofit/>
-          </a:bodyPr>
-          <a:lstStyle/>
-          <a:p>
-            <a:pPr indent="0" lvl="0" marL="0" rtl="0" algn="l">
-              <a:spcBef>
-                <a:spcPts val="0"/>
-              </a:spcBef>
-              <a:spcAft>
-                <a:spcPts val="0"/>
-              </a:spcAft>
-              <a:buNone/>
-            </a:pPr>
-            <a:r>
-              <a:t/>
-            </a:r>
-            <a:endParaRPr/>
-          </a:p>
-        </p:txBody>
-      </p:sp>
-      <p:sp>
-        <p:nvSpPr>
-          <p:cNvPr id="1041" name="Google Shape;1041;p65"/>
-          <p:cNvSpPr/>
-          <p:nvPr/>
-        </p:nvSpPr>
-        <p:spPr>
-          <a:xfrm>
-            <a:off x="3365480" y="1400328"/>
-            <a:ext cx="76199" cy="76190"/>
-          </a:xfrm>
-          <a:prstGeom prst="roundRect">
-            <a:avLst>
-              <a:gd fmla="val 31500" name="adj"/>
-            </a:avLst>
-          </a:prstGeom>
-          <a:solidFill>
-            <a:srgbClr val="0077FF"/>
-          </a:solidFill>
-          <a:ln>
-            <a:noFill/>
-          </a:ln>
-        </p:spPr>
-        <p:txBody>
-          <a:bodyPr anchorCtr="0" anchor="ctr" bIns="91425" lIns="91425" spcFirstLastPara="1" rIns="91425" wrap="square" tIns="91425">
-            <a:noAutofit/>
-          </a:bodyPr>
-          <a:lstStyle/>
-          <a:p>
-            <a:pPr indent="0" lvl="0" marL="0" rtl="0" algn="l">
-              <a:spcBef>
-                <a:spcPts val="0"/>
-              </a:spcBef>
-              <a:spcAft>
-                <a:spcPts val="0"/>
-              </a:spcAft>
-              <a:buNone/>
-            </a:pPr>
-            <a:r>
-              <a:t/>
-            </a:r>
-            <a:endParaRPr/>
-          </a:p>
-        </p:txBody>
-      </p:sp>
-      <p:sp>
-        <p:nvSpPr>
-          <p:cNvPr id="1046" name="Google Shape;1046;p65"/>
-          <p:cNvSpPr/>
-          <p:nvPr/>
-        </p:nvSpPr>
-        <p:spPr>
-          <a:xfrm>
-            <a:off x="6254721" y="1400328"/>
-            <a:ext cx="76199" cy="76190"/>
-          </a:xfrm>
-          <a:prstGeom prst="roundRect">
-            <a:avLst>
-              <a:gd fmla="val 31500" name="adj"/>
-            </a:avLst>
-          </a:prstGeom>
-          <a:solidFill>
-            <a:srgbClr val="0077FF"/>
-          </a:solidFill>
-          <a:ln>
-            <a:noFill/>
-          </a:ln>
-        </p:spPr>
-        <p:txBody>
-          <a:bodyPr anchorCtr="0" anchor="ctr" bIns="91425" lIns="91425" spcFirstLastPara="1" rIns="91425" wrap="square" tIns="91425">
-            <a:noAutofit/>
-          </a:bodyPr>
-          <a:lstStyle/>
-          <a:p>
-            <a:pPr indent="0" lvl="0" marL="0" rtl="0" algn="l">
-              <a:spcBef>
-                <a:spcPts val="0"/>
-              </a:spcBef>
-              <a:spcAft>
-                <a:spcPts val="0"/>
-              </a:spcAft>
-              <a:buNone/>
-            </a:pPr>
-            <a:r>
-              <a:t/>
-            </a:r>
-            <a:endParaRPr/>
-          </a:p>
-        </p:txBody>
-      </p:sp>
-      <p:sp>
-        <p:nvSpPr>
-          <p:cNvPr id="1047" name="title"/>
+          <p:cNvPr id="2" name="title"/>
           <p:cNvSpPr txBox="1"/>
           <p:nvPr/>
         </p:nvSpPr>
@@ -8635,7 +8856,7 @@
               <a:spcAft>
                 <a:spcPts val="300"/>
               </a:spcAft>
-              <a:defRPr sz="2400">
+              <a:defRPr sz="2438">
                 <a:solidFill>
                   <a:srgbClr val="000000"/>
                 </a:solidFill>
@@ -8645,7 +8866,7 @@
               </a:defRPr>
             </a:pPr>
             <a:r>
-              <a:rPr sz="2400">
+              <a:rPr sz="2438">
                 <a:solidFill>
                   <a:srgbClr val="000000"/>
                 </a:solidFill>
@@ -8653,64 +8874,21 @@
                 <a:ea typeface="Play"/>
                 <a:cs typeface="Play"/>
               </a:rPr>
-              <a:t>Риски</a:t>
-            </a:r>
-          </a:p>
-        </p:txBody>
-      </p:sp>
-      <p:sp>
-        <p:nvSpPr>
-          <p:cNvPr id="1048" name="Oval 1047"/>
-          <p:cNvSpPr/>
-          <p:nvPr/>
-        </p:nvSpPr>
-        <p:spPr>
-          <a:xfrm>
-            <a:off x="1411519" y="1530621"/>
-            <a:ext cx="433029" cy="433029"/>
-          </a:xfrm>
-          <a:prstGeom prst="ellipse">
-            <a:avLst/>
-          </a:prstGeom>
-          <a:solidFill>
-            <a:srgbClr val="0077FF"/>
-          </a:solidFill>
-          <a:ln>
-            <a:noFill/>
-          </a:ln>
-        </p:spPr>
-        <p:style>
-          <a:lnRef idx="1">
-            <a:schemeClr val="accent1"/>
-          </a:lnRef>
-          <a:fillRef idx="3">
-            <a:schemeClr val="accent1"/>
-          </a:fillRef>
-          <a:effectRef idx="2">
-            <a:schemeClr val="accent1"/>
-          </a:effectRef>
-          <a:fontRef idx="minor">
-            <a:schemeClr val="lt1"/>
-          </a:fontRef>
-        </p:style>
-        <p:txBody>
-          <a:bodyPr rtlCol="0" anchor="ctr"/>
-          <a:lstStyle/>
-          <a:p>
-            <a:pPr algn="ctr"/>
-          </a:p>
-        </p:txBody>
-      </p:sp>
-      <p:sp>
-        <p:nvSpPr>
-          <p:cNvPr id="1049" name="TextBox 1048"/>
+              <a:t>Что мы просим решить</a:t>
+            </a:r>
+          </a:p>
+        </p:txBody>
+      </p:sp>
+      <p:sp>
+        <p:nvSpPr>
+          <p:cNvPr id="3" name="body"/>
           <p:cNvSpPr txBox="1"/>
           <p:nvPr/>
         </p:nvSpPr>
         <p:spPr>
           <a:xfrm>
-            <a:off x="274320" y="2076828"/>
-            <a:ext cx="2707428" cy="383821"/>
+            <a:off x="274320" y="1414513"/>
+            <a:ext cx="8344814" cy="1790812"/>
           </a:xfrm>
           <a:prstGeom prst="rect">
             <a:avLst/>
@@ -8718,13 +8896,16 @@
           <a:noFill/>
         </p:spPr>
         <p:txBody>
-          <a:bodyPr wrap="square">
+          <a:bodyPr wrap="square" lIns="76200" rIns="76200" tIns="50800" bIns="50800">
             <a:spAutoFit/>
           </a:bodyPr>
           <a:lstStyle/>
           <a:p>
-            <a:pPr algn="ctr">
-              <a:defRPr sz="1200" b="0">
+            <a:pPr algn="l">
+              <a:spcAft>
+                <a:spcPts val="300"/>
+              </a:spcAft>
+              <a:defRPr sz="1800">
                 <a:solidFill>
                   <a:srgbClr val="000000"/>
                 </a:solidFill>
@@ -8734,7 +8915,7 @@
               </a:defRPr>
             </a:pPr>
             <a:r>
-              <a:rPr sz="1200" b="0">
+              <a:rPr sz="1800">
                 <a:solidFill>
                   <a:srgbClr val="000000"/>
                 </a:solidFill>
@@ -8742,78 +8923,15 @@
                 <a:ea typeface="Play"/>
                 <a:cs typeface="Play"/>
               </a:rPr>
-              <a:t>Слабая модель может выдумать цифры</a:t>
-            </a:r>
-          </a:p>
-        </p:txBody>
-      </p:sp>
-      <p:sp>
-        <p:nvSpPr>
-          <p:cNvPr id="1050" name="Document 1049"/>
-          <p:cNvSpPr/>
-          <p:nvPr/>
-        </p:nvSpPr>
-        <p:spPr>
-          <a:xfrm>
-            <a:off x="4241038" y="1519795"/>
-            <a:ext cx="411377" cy="454680"/>
-          </a:xfrm>
-          <a:prstGeom prst="flowChartDocument">
-            <a:avLst/>
-          </a:prstGeom>
-          <a:solidFill>
-            <a:srgbClr val="0077FF"/>
-          </a:solidFill>
-          <a:ln>
-            <a:noFill/>
-          </a:ln>
-        </p:spPr>
-        <p:style>
-          <a:lnRef idx="1">
-            <a:schemeClr val="accent1"/>
-          </a:lnRef>
-          <a:fillRef idx="3">
-            <a:schemeClr val="accent1"/>
-          </a:fillRef>
-          <a:effectRef idx="2">
-            <a:schemeClr val="accent1"/>
-          </a:effectRef>
-          <a:fontRef idx="minor">
-            <a:schemeClr val="lt1"/>
-          </a:fontRef>
-        </p:style>
-        <p:txBody>
-          <a:bodyPr rtlCol="0" anchor="ctr"/>
-          <a:lstStyle/>
-          <a:p>
-            <a:pPr algn="ctr"/>
-          </a:p>
-        </p:txBody>
-      </p:sp>
-      <p:sp>
-        <p:nvSpPr>
-          <p:cNvPr id="1051" name="TextBox 1050"/>
-          <p:cNvSpPr txBox="1"/>
-          <p:nvPr/>
-        </p:nvSpPr>
-        <p:spPr>
-          <a:xfrm>
-            <a:off x="3093012" y="2076828"/>
-            <a:ext cx="2707428" cy="383821"/>
-          </a:xfrm>
-          <a:prstGeom prst="rect">
-            <a:avLst/>
-          </a:prstGeom>
-          <a:noFill/>
-        </p:spPr>
-        <p:txBody>
-          <a:bodyPr wrap="square">
-            <a:spAutoFit/>
-          </a:bodyPr>
-          <a:lstStyle/>
-          <a:p>
-            <a:pPr algn="ctr">
-              <a:defRPr sz="1200" b="0">
+              <a:t>• Решить о запуске сервиса на всю компанию</a:t>
+            </a:r>
+          </a:p>
+          <a:p>
+            <a:pPr algn="l">
+              <a:spcAft>
+                <a:spcPts val="300"/>
+              </a:spcAft>
+              <a:defRPr sz="1800">
                 <a:solidFill>
                   <a:srgbClr val="000000"/>
                 </a:solidFill>
@@ -8823,7 +8941,7 @@
               </a:defRPr>
             </a:pPr>
             <a:r>
-              <a:rPr sz="1200" b="0">
+              <a:rPr sz="1800">
                 <a:solidFill>
                   <a:srgbClr val="000000"/>
                 </a:solidFill>
@@ -8831,207 +8949,15 @@
                 <a:ea typeface="Play"/>
                 <a:cs typeface="Play"/>
               </a:rPr>
-              <a:t>Незнакомый шаблон может быть плохо сделан</a:t>
-            </a:r>
-          </a:p>
-        </p:txBody>
-      </p:sp>
-      <p:sp>
-        <p:nvSpPr>
-          <p:cNvPr id="1052" name="Oval 1051"/>
-          <p:cNvSpPr/>
-          <p:nvPr/>
-        </p:nvSpPr>
-        <p:spPr>
-          <a:xfrm>
-            <a:off x="7016428" y="1498144"/>
-            <a:ext cx="497983" cy="497983"/>
-          </a:xfrm>
-          <a:prstGeom prst="ellipse">
-            <a:avLst/>
-          </a:prstGeom>
-          <a:solidFill>
-            <a:srgbClr val="0077FF"/>
-          </a:solidFill>
-          <a:ln>
-            <a:noFill/>
-          </a:ln>
-        </p:spPr>
-        <p:style>
-          <a:lnRef idx="1">
-            <a:schemeClr val="accent1"/>
-          </a:lnRef>
-          <a:fillRef idx="3">
-            <a:schemeClr val="accent1"/>
-          </a:fillRef>
-          <a:effectRef idx="2">
-            <a:schemeClr val="accent1"/>
-          </a:effectRef>
-          <a:fontRef idx="minor">
-            <a:schemeClr val="lt1"/>
-          </a:fontRef>
-        </p:style>
-        <p:txBody>
-          <a:bodyPr rtlCol="0" anchor="ctr"/>
-          <a:lstStyle/>
-          <a:p>
-            <a:pPr algn="ctr"/>
-          </a:p>
-        </p:txBody>
-      </p:sp>
-      <p:sp>
-        <p:nvSpPr>
-          <p:cNvPr id="1053" name="Oval 1052"/>
-          <p:cNvSpPr/>
-          <p:nvPr/>
-        </p:nvSpPr>
-        <p:spPr>
-          <a:xfrm>
-            <a:off x="7103033" y="1584750"/>
-            <a:ext cx="324771" cy="324771"/>
-          </a:xfrm>
-          <a:prstGeom prst="ellipse">
-            <a:avLst/>
-          </a:prstGeom>
-          <a:solidFill>
-            <a:srgbClr val="FFFFFF"/>
-          </a:solidFill>
-          <a:ln>
-            <a:noFill/>
-          </a:ln>
-        </p:spPr>
-        <p:style>
-          <a:lnRef idx="1">
-            <a:schemeClr val="accent1"/>
-          </a:lnRef>
-          <a:fillRef idx="3">
-            <a:schemeClr val="accent1"/>
-          </a:fillRef>
-          <a:effectRef idx="2">
-            <a:schemeClr val="accent1"/>
-          </a:effectRef>
-          <a:fontRef idx="minor">
-            <a:schemeClr val="lt1"/>
-          </a:fontRef>
-        </p:style>
-        <p:txBody>
-          <a:bodyPr rtlCol="0" anchor="ctr"/>
-          <a:lstStyle/>
-          <a:p>
-            <a:pPr algn="ctr"/>
-          </a:p>
-        </p:txBody>
-      </p:sp>
-      <p:sp>
-        <p:nvSpPr>
-          <p:cNvPr id="1054" name="Oval 1053"/>
-          <p:cNvSpPr/>
-          <p:nvPr/>
-        </p:nvSpPr>
-        <p:spPr>
-          <a:xfrm>
-            <a:off x="7178813" y="1660530"/>
-            <a:ext cx="173211" cy="173211"/>
-          </a:xfrm>
-          <a:prstGeom prst="ellipse">
-            <a:avLst/>
-          </a:prstGeom>
-          <a:solidFill>
-            <a:srgbClr val="0077FF"/>
-          </a:solidFill>
-          <a:ln>
-            <a:noFill/>
-          </a:ln>
-        </p:spPr>
-        <p:style>
-          <a:lnRef idx="1">
-            <a:schemeClr val="accent1"/>
-          </a:lnRef>
-          <a:fillRef idx="3">
-            <a:schemeClr val="accent1"/>
-          </a:fillRef>
-          <a:effectRef idx="2">
-            <a:schemeClr val="accent1"/>
-          </a:effectRef>
-          <a:fontRef idx="minor">
-            <a:schemeClr val="lt1"/>
-          </a:fontRef>
-        </p:style>
-        <p:txBody>
-          <a:bodyPr rtlCol="0" anchor="ctr"/>
-          <a:lstStyle/>
-          <a:p>
-            <a:pPr algn="ctr"/>
-          </a:p>
-        </p:txBody>
-      </p:sp>
-      <p:sp>
-        <p:nvSpPr>
-          <p:cNvPr id="1055" name="Oval 1054"/>
-          <p:cNvSpPr/>
-          <p:nvPr/>
-        </p:nvSpPr>
-        <p:spPr>
-          <a:xfrm>
-            <a:off x="7232942" y="1714658"/>
-            <a:ext cx="64954" cy="64954"/>
-          </a:xfrm>
-          <a:prstGeom prst="ellipse">
-            <a:avLst/>
-          </a:prstGeom>
-          <a:solidFill>
-            <a:srgbClr val="FFFFFF"/>
-          </a:solidFill>
-          <a:ln>
-            <a:noFill/>
-          </a:ln>
-        </p:spPr>
-        <p:style>
-          <a:lnRef idx="1">
-            <a:schemeClr val="accent1"/>
-          </a:lnRef>
-          <a:fillRef idx="3">
-            <a:schemeClr val="accent1"/>
-          </a:fillRef>
-          <a:effectRef idx="2">
-            <a:schemeClr val="accent1"/>
-          </a:effectRef>
-          <a:fontRef idx="minor">
-            <a:schemeClr val="lt1"/>
-          </a:fontRef>
-        </p:style>
-        <p:txBody>
-          <a:bodyPr rtlCol="0" anchor="ctr"/>
-          <a:lstStyle/>
-          <a:p>
-            <a:pPr algn="ctr"/>
-          </a:p>
-        </p:txBody>
-      </p:sp>
-      <p:sp>
-        <p:nvSpPr>
-          <p:cNvPr id="1056" name="TextBox 1055"/>
-          <p:cNvSpPr txBox="1"/>
-          <p:nvPr/>
-        </p:nvSpPr>
-        <p:spPr>
-          <a:xfrm>
-            <a:off x="5911705" y="2076828"/>
-            <a:ext cx="2707428" cy="383821"/>
-          </a:xfrm>
-          <a:prstGeom prst="rect">
-            <a:avLst/>
-          </a:prstGeom>
-          <a:noFill/>
-        </p:spPr>
-        <p:txBody>
-          <a:bodyPr wrap="square">
-            <a:spAutoFit/>
-          </a:bodyPr>
-          <a:lstStyle/>
-          <a:p>
-            <a:pPr algn="ctr">
-              <a:defRPr sz="1200" b="0">
+              <a:t>• Подтвердить бюджет и ресурсы для масштабирования</a:t>
+            </a:r>
+          </a:p>
+          <a:p>
+            <a:pPr algn="l">
+              <a:spcAft>
+                <a:spcPts val="300"/>
+              </a:spcAft>
+              <a:defRPr sz="1800">
                 <a:solidFill>
                   <a:srgbClr val="000000"/>
                 </a:solidFill>
@@ -9041,7 +8967,7 @@
               </a:defRPr>
             </a:pPr>
             <a:r>
-              <a:rPr sz="1200" b="0">
+              <a:rPr sz="1800">
                 <a:solidFill>
                   <a:srgbClr val="000000"/>
                 </a:solidFill>
@@ -9049,7 +8975,33 @@
                 <a:ea typeface="Play"/>
                 <a:cs typeface="Play"/>
               </a:rPr>
-              <a:t>Нагрузка более 20 задач требует внешней очереди</a:t>
+              <a:t>• Определить ответственных за интеграцию с корпоративными системами</a:t>
+            </a:r>
+          </a:p>
+          <a:p>
+            <a:pPr algn="l">
+              <a:spcAft>
+                <a:spcPts val="300"/>
+              </a:spcAft>
+              <a:defRPr sz="1800">
+                <a:solidFill>
+                  <a:srgbClr val="000000"/>
+                </a:solidFill>
+                <a:latin typeface="Play"/>
+                <a:ea typeface="Play"/>
+                <a:cs typeface="Play"/>
+              </a:defRPr>
+            </a:pPr>
+            <a:r>
+              <a:rPr sz="1800">
+                <a:solidFill>
+                  <a:srgbClr val="000000"/>
+                </a:solidFill>
+                <a:latin typeface="Play"/>
+                <a:ea typeface="Play"/>
+                <a:cs typeface="Play"/>
+              </a:rPr>
+              <a:t>• Утвердить сроки внедрения в Q4 2026</a:t>
             </a:r>
           </a:p>
         </p:txBody>
@@ -9072,23 +9024,16 @@
         <p:nvPr/>
       </p:nvGrpSpPr>
       <p:grpSpPr/>
-      <p:pic>
-        <p:nvPicPr>
-          <p:cNvPr descr=" " id="2249" name="Google Shape;2249;p83"/>
-          <p:cNvPicPr preferRelativeResize="0"/>
-          <p:nvPr/>
-        </p:nvPicPr>
-        <p:blipFill rotWithShape="1">
-          <a:blip r:embed="rId2">
-            <a:alphaModFix/>
-          </a:blip>
-          <a:srcRect b="0" l="0" r="0" t="0"/>
-          <a:stretch/>
-        </p:blipFill>
-        <p:spPr>
-          <a:xfrm>
-            <a:off x="285748" y="3576507"/>
-            <a:ext cx="2381238" cy="28571"/>
+      <p:sp>
+        <p:nvSpPr>
+          <p:cNvPr id="532" name="Google Shape;532;p53"/>
+          <p:cNvSpPr/>
+          <p:nvPr/>
+        </p:nvSpPr>
+        <p:spPr>
+          <a:xfrm>
+            <a:off x="303214" y="1022533"/>
+            <a:ext cx="8451939" cy="1433588"/>
           </a:xfrm>
           <a:prstGeom prst="rect">
             <a:avLst/>
@@ -9098,24 +9043,38 @@
             <a:noFill/>
           </a:ln>
         </p:spPr>
-      </p:pic>
-      <p:pic>
-        <p:nvPicPr>
-          <p:cNvPr descr=" " id="2250" name="Google Shape;2250;p83"/>
-          <p:cNvPicPr preferRelativeResize="0"/>
-          <p:nvPr/>
-        </p:nvPicPr>
-        <p:blipFill rotWithShape="1">
-          <a:blip r:embed="rId3">
-            <a:alphaModFix/>
-          </a:blip>
-          <a:srcRect b="0" l="0" r="0" t="0"/>
-          <a:stretch/>
-        </p:blipFill>
-        <p:spPr>
-          <a:xfrm>
-            <a:off x="3143234" y="3576507"/>
-            <a:ext cx="3762355" cy="28571"/>
+        <p:txBody>
+          <a:bodyPr anchorCtr="0" anchor="ctr" bIns="91425" lIns="91425" spcFirstLastPara="1" rIns="91425" wrap="square" tIns="91425">
+            <a:noAutofit/>
+          </a:bodyPr>
+          <a:lstStyle/>
+          <a:p>
+            <a:pPr indent="0" lvl="0" marL="0" rtl="0" algn="l">
+              <a:spcBef>
+                <a:spcPts val="0"/>
+              </a:spcBef>
+              <a:spcAft>
+                <a:spcPts val="0"/>
+              </a:spcAft>
+              <a:buNone/>
+            </a:pPr>
+            <a:r>
+              <a:t/>
+            </a:r>
+            <a:endParaRPr/>
+          </a:p>
+        </p:txBody>
+      </p:sp>
+      <p:sp>
+        <p:nvSpPr>
+          <p:cNvPr id="533" name="Google Shape;533;p53"/>
+          <p:cNvSpPr/>
+          <p:nvPr/>
+        </p:nvSpPr>
+        <p:spPr>
+          <a:xfrm>
+            <a:off x="303214" y="1022533"/>
+            <a:ext cx="1395256" cy="1433588"/>
           </a:xfrm>
           <a:prstGeom prst="rect">
             <a:avLst/>
@@ -9125,10 +9084,482 @@
             <a:noFill/>
           </a:ln>
         </p:spPr>
-      </p:pic>
-      <p:sp>
-        <p:nvSpPr>
-          <p:cNvPr id="2251" name="title"/>
+        <p:txBody>
+          <a:bodyPr anchorCtr="0" anchor="ctr" bIns="91425" lIns="91425" spcFirstLastPara="1" rIns="91425" wrap="square" tIns="91425">
+            <a:noAutofit/>
+          </a:bodyPr>
+          <a:lstStyle/>
+          <a:p>
+            <a:pPr indent="0" lvl="0" marL="0" rtl="0" algn="l">
+              <a:spcBef>
+                <a:spcPts val="0"/>
+              </a:spcBef>
+              <a:spcAft>
+                <a:spcPts val="0"/>
+              </a:spcAft>
+              <a:buNone/>
+            </a:pPr>
+            <a:r>
+              <a:t/>
+            </a:r>
+            <a:endParaRPr/>
+          </a:p>
+        </p:txBody>
+      </p:sp>
+      <p:sp>
+        <p:nvSpPr>
+          <p:cNvPr id="537" name="Google Shape;537;p53"/>
+          <p:cNvSpPr/>
+          <p:nvPr/>
+        </p:nvSpPr>
+        <p:spPr>
+          <a:xfrm>
+            <a:off x="2067385" y="1022533"/>
+            <a:ext cx="1395256" cy="1433588"/>
+          </a:xfrm>
+          <a:prstGeom prst="rect">
+            <a:avLst/>
+          </a:prstGeom>
+          <a:noFill/>
+          <a:ln>
+            <a:noFill/>
+          </a:ln>
+        </p:spPr>
+        <p:txBody>
+          <a:bodyPr anchorCtr="0" anchor="ctr" bIns="91425" lIns="91425" spcFirstLastPara="1" rIns="91425" wrap="square" tIns="91425">
+            <a:noAutofit/>
+          </a:bodyPr>
+          <a:lstStyle/>
+          <a:p>
+            <a:pPr indent="0" lvl="0" marL="0" rtl="0" algn="l">
+              <a:spcBef>
+                <a:spcPts val="0"/>
+              </a:spcBef>
+              <a:spcAft>
+                <a:spcPts val="0"/>
+              </a:spcAft>
+              <a:buNone/>
+            </a:pPr>
+            <a:r>
+              <a:t/>
+            </a:r>
+            <a:endParaRPr/>
+          </a:p>
+        </p:txBody>
+      </p:sp>
+      <p:sp>
+        <p:nvSpPr>
+          <p:cNvPr id="541" name="Google Shape;541;p53"/>
+          <p:cNvSpPr/>
+          <p:nvPr/>
+        </p:nvSpPr>
+        <p:spPr>
+          <a:xfrm>
+            <a:off x="3831556" y="1022533"/>
+            <a:ext cx="1395256" cy="1433588"/>
+          </a:xfrm>
+          <a:prstGeom prst="rect">
+            <a:avLst/>
+          </a:prstGeom>
+          <a:noFill/>
+          <a:ln>
+            <a:noFill/>
+          </a:ln>
+        </p:spPr>
+        <p:txBody>
+          <a:bodyPr anchorCtr="0" anchor="ctr" bIns="91425" lIns="91425" spcFirstLastPara="1" rIns="91425" wrap="square" tIns="91425">
+            <a:noAutofit/>
+          </a:bodyPr>
+          <a:lstStyle/>
+          <a:p>
+            <a:pPr indent="0" lvl="0" marL="0" rtl="0" algn="l">
+              <a:spcBef>
+                <a:spcPts val="0"/>
+              </a:spcBef>
+              <a:spcAft>
+                <a:spcPts val="0"/>
+              </a:spcAft>
+              <a:buNone/>
+            </a:pPr>
+            <a:r>
+              <a:t/>
+            </a:r>
+            <a:endParaRPr/>
+          </a:p>
+        </p:txBody>
+      </p:sp>
+      <p:sp>
+        <p:nvSpPr>
+          <p:cNvPr id="545" name="Google Shape;545;p53"/>
+          <p:cNvSpPr/>
+          <p:nvPr/>
+        </p:nvSpPr>
+        <p:spPr>
+          <a:xfrm>
+            <a:off x="5595727" y="1022533"/>
+            <a:ext cx="1395256" cy="1433588"/>
+          </a:xfrm>
+          <a:prstGeom prst="rect">
+            <a:avLst/>
+          </a:prstGeom>
+          <a:noFill/>
+          <a:ln>
+            <a:noFill/>
+          </a:ln>
+        </p:spPr>
+        <p:txBody>
+          <a:bodyPr anchorCtr="0" anchor="ctr" bIns="91425" lIns="91425" spcFirstLastPara="1" rIns="91425" wrap="square" tIns="91425">
+            <a:noAutofit/>
+          </a:bodyPr>
+          <a:lstStyle/>
+          <a:p>
+            <a:pPr indent="0" lvl="0" marL="0" rtl="0" algn="l">
+              <a:spcBef>
+                <a:spcPts val="0"/>
+              </a:spcBef>
+              <a:spcAft>
+                <a:spcPts val="0"/>
+              </a:spcAft>
+              <a:buNone/>
+            </a:pPr>
+            <a:r>
+              <a:t/>
+            </a:r>
+            <a:endParaRPr/>
+          </a:p>
+        </p:txBody>
+      </p:sp>
+      <p:sp>
+        <p:nvSpPr>
+          <p:cNvPr id="549" name="Google Shape;549;p53"/>
+          <p:cNvSpPr/>
+          <p:nvPr/>
+        </p:nvSpPr>
+        <p:spPr>
+          <a:xfrm>
+            <a:off x="7359897" y="1022533"/>
+            <a:ext cx="1395256" cy="1433588"/>
+          </a:xfrm>
+          <a:prstGeom prst="rect">
+            <a:avLst/>
+          </a:prstGeom>
+          <a:noFill/>
+          <a:ln>
+            <a:noFill/>
+          </a:ln>
+        </p:spPr>
+        <p:txBody>
+          <a:bodyPr anchorCtr="0" anchor="ctr" bIns="91425" lIns="91425" spcFirstLastPara="1" rIns="91425" wrap="square" tIns="91425">
+            <a:noAutofit/>
+          </a:bodyPr>
+          <a:lstStyle/>
+          <a:p>
+            <a:pPr indent="0" lvl="0" marL="0" rtl="0" algn="l">
+              <a:spcBef>
+                <a:spcPts val="0"/>
+              </a:spcBef>
+              <a:spcAft>
+                <a:spcPts val="0"/>
+              </a:spcAft>
+              <a:buNone/>
+            </a:pPr>
+            <a:r>
+              <a:t/>
+            </a:r>
+            <a:endParaRPr/>
+          </a:p>
+        </p:txBody>
+      </p:sp>
+      <p:sp>
+        <p:nvSpPr>
+          <p:cNvPr id="553" name="Google Shape;553;p53"/>
+          <p:cNvSpPr/>
+          <p:nvPr/>
+        </p:nvSpPr>
+        <p:spPr>
+          <a:xfrm>
+            <a:off x="276488" y="2955549"/>
+            <a:ext cx="8451939" cy="1433588"/>
+          </a:xfrm>
+          <a:prstGeom prst="rect">
+            <a:avLst/>
+          </a:prstGeom>
+          <a:noFill/>
+          <a:ln>
+            <a:noFill/>
+          </a:ln>
+        </p:spPr>
+        <p:txBody>
+          <a:bodyPr anchorCtr="0" anchor="ctr" bIns="91425" lIns="91425" spcFirstLastPara="1" rIns="91425" wrap="square" tIns="91425">
+            <a:noAutofit/>
+          </a:bodyPr>
+          <a:lstStyle/>
+          <a:p>
+            <a:pPr indent="0" lvl="0" marL="0" rtl="0" algn="l">
+              <a:spcBef>
+                <a:spcPts val="0"/>
+              </a:spcBef>
+              <a:spcAft>
+                <a:spcPts val="0"/>
+              </a:spcAft>
+              <a:buNone/>
+            </a:pPr>
+            <a:r>
+              <a:t/>
+            </a:r>
+            <a:endParaRPr/>
+          </a:p>
+        </p:txBody>
+      </p:sp>
+      <p:sp>
+        <p:nvSpPr>
+          <p:cNvPr id="554" name="Google Shape;554;p53"/>
+          <p:cNvSpPr/>
+          <p:nvPr/>
+        </p:nvSpPr>
+        <p:spPr>
+          <a:xfrm>
+            <a:off x="303214" y="2797849"/>
+            <a:ext cx="8451939" cy="1433588"/>
+          </a:xfrm>
+          <a:prstGeom prst="rect">
+            <a:avLst/>
+          </a:prstGeom>
+          <a:noFill/>
+          <a:ln>
+            <a:noFill/>
+          </a:ln>
+        </p:spPr>
+        <p:txBody>
+          <a:bodyPr anchorCtr="0" anchor="ctr" bIns="91425" lIns="91425" spcFirstLastPara="1" rIns="91425" wrap="square" tIns="91425">
+            <a:noAutofit/>
+          </a:bodyPr>
+          <a:lstStyle/>
+          <a:p>
+            <a:pPr indent="0" lvl="0" marL="0" rtl="0" algn="l">
+              <a:spcBef>
+                <a:spcPts val="0"/>
+              </a:spcBef>
+              <a:spcAft>
+                <a:spcPts val="0"/>
+              </a:spcAft>
+              <a:buNone/>
+            </a:pPr>
+            <a:r>
+              <a:t/>
+            </a:r>
+            <a:endParaRPr/>
+          </a:p>
+        </p:txBody>
+      </p:sp>
+      <p:sp>
+        <p:nvSpPr>
+          <p:cNvPr id="555" name="Google Shape;555;p53"/>
+          <p:cNvSpPr/>
+          <p:nvPr/>
+        </p:nvSpPr>
+        <p:spPr>
+          <a:xfrm>
+            <a:off x="303214" y="2797849"/>
+            <a:ext cx="1395256" cy="1433588"/>
+          </a:xfrm>
+          <a:prstGeom prst="rect">
+            <a:avLst/>
+          </a:prstGeom>
+          <a:noFill/>
+          <a:ln>
+            <a:noFill/>
+          </a:ln>
+        </p:spPr>
+        <p:txBody>
+          <a:bodyPr anchorCtr="0" anchor="ctr" bIns="91425" lIns="91425" spcFirstLastPara="1" rIns="91425" wrap="square" tIns="91425">
+            <a:noAutofit/>
+          </a:bodyPr>
+          <a:lstStyle/>
+          <a:p>
+            <a:pPr indent="0" lvl="0" marL="0" rtl="0" algn="l">
+              <a:spcBef>
+                <a:spcPts val="0"/>
+              </a:spcBef>
+              <a:spcAft>
+                <a:spcPts val="0"/>
+              </a:spcAft>
+              <a:buNone/>
+            </a:pPr>
+            <a:r>
+              <a:t/>
+            </a:r>
+            <a:endParaRPr/>
+          </a:p>
+        </p:txBody>
+      </p:sp>
+      <p:sp>
+        <p:nvSpPr>
+          <p:cNvPr id="559" name="Google Shape;559;p53"/>
+          <p:cNvSpPr/>
+          <p:nvPr/>
+        </p:nvSpPr>
+        <p:spPr>
+          <a:xfrm>
+            <a:off x="2067385" y="2797849"/>
+            <a:ext cx="1395256" cy="1433588"/>
+          </a:xfrm>
+          <a:prstGeom prst="rect">
+            <a:avLst/>
+          </a:prstGeom>
+          <a:noFill/>
+          <a:ln>
+            <a:noFill/>
+          </a:ln>
+        </p:spPr>
+        <p:txBody>
+          <a:bodyPr anchorCtr="0" anchor="ctr" bIns="91425" lIns="91425" spcFirstLastPara="1" rIns="91425" wrap="square" tIns="91425">
+            <a:noAutofit/>
+          </a:bodyPr>
+          <a:lstStyle/>
+          <a:p>
+            <a:pPr indent="0" lvl="0" marL="0" rtl="0" algn="l">
+              <a:spcBef>
+                <a:spcPts val="0"/>
+              </a:spcBef>
+              <a:spcAft>
+                <a:spcPts val="0"/>
+              </a:spcAft>
+              <a:buNone/>
+            </a:pPr>
+            <a:r>
+              <a:t/>
+            </a:r>
+            <a:endParaRPr/>
+          </a:p>
+        </p:txBody>
+      </p:sp>
+      <p:sp>
+        <p:nvSpPr>
+          <p:cNvPr id="563" name="Google Shape;563;p53"/>
+          <p:cNvSpPr/>
+          <p:nvPr/>
+        </p:nvSpPr>
+        <p:spPr>
+          <a:xfrm>
+            <a:off x="3831556" y="2797849"/>
+            <a:ext cx="1395256" cy="1433588"/>
+          </a:xfrm>
+          <a:prstGeom prst="rect">
+            <a:avLst/>
+          </a:prstGeom>
+          <a:noFill/>
+          <a:ln>
+            <a:noFill/>
+          </a:ln>
+        </p:spPr>
+        <p:txBody>
+          <a:bodyPr anchorCtr="0" anchor="ctr" bIns="91425" lIns="91425" spcFirstLastPara="1" rIns="91425" wrap="square" tIns="91425">
+            <a:noAutofit/>
+          </a:bodyPr>
+          <a:lstStyle/>
+          <a:p>
+            <a:pPr indent="0" lvl="0" marL="0" rtl="0" algn="l">
+              <a:spcBef>
+                <a:spcPts val="0"/>
+              </a:spcBef>
+              <a:spcAft>
+                <a:spcPts val="0"/>
+              </a:spcAft>
+              <a:buNone/>
+            </a:pPr>
+            <a:r>
+              <a:t/>
+            </a:r>
+            <a:endParaRPr/>
+          </a:p>
+        </p:txBody>
+      </p:sp>
+      <p:sp>
+        <p:nvSpPr>
+          <p:cNvPr id="567" name="Google Shape;567;p53"/>
+          <p:cNvSpPr/>
+          <p:nvPr/>
+        </p:nvSpPr>
+        <p:spPr>
+          <a:xfrm>
+            <a:off x="5595727" y="2797849"/>
+            <a:ext cx="1395256" cy="1433588"/>
+          </a:xfrm>
+          <a:prstGeom prst="rect">
+            <a:avLst/>
+          </a:prstGeom>
+          <a:noFill/>
+          <a:ln>
+            <a:noFill/>
+          </a:ln>
+        </p:spPr>
+        <p:txBody>
+          <a:bodyPr anchorCtr="0" anchor="ctr" bIns="91425" lIns="91425" spcFirstLastPara="1" rIns="91425" wrap="square" tIns="91425">
+            <a:noAutofit/>
+          </a:bodyPr>
+          <a:lstStyle/>
+          <a:p>
+            <a:pPr indent="0" lvl="0" marL="0" rtl="0" algn="l">
+              <a:spcBef>
+                <a:spcPts val="0"/>
+              </a:spcBef>
+              <a:spcAft>
+                <a:spcPts val="0"/>
+              </a:spcAft>
+              <a:buNone/>
+            </a:pPr>
+            <a:r>
+              <a:t/>
+            </a:r>
+            <a:endParaRPr/>
+          </a:p>
+        </p:txBody>
+      </p:sp>
+      <p:sp>
+        <p:nvSpPr>
+          <p:cNvPr id="571" name="Google Shape;571;p53"/>
+          <p:cNvSpPr/>
+          <p:nvPr/>
+        </p:nvSpPr>
+        <p:spPr>
+          <a:xfrm>
+            <a:off x="7359897" y="2797849"/>
+            <a:ext cx="1395256" cy="1433588"/>
+          </a:xfrm>
+          <a:prstGeom prst="rect">
+            <a:avLst/>
+          </a:prstGeom>
+          <a:noFill/>
+          <a:ln>
+            <a:noFill/>
+          </a:ln>
+        </p:spPr>
+        <p:txBody>
+          <a:bodyPr anchorCtr="0" anchor="ctr" bIns="91425" lIns="91425" spcFirstLastPara="1" rIns="91425" wrap="square" tIns="91425">
+            <a:noAutofit/>
+          </a:bodyPr>
+          <a:lstStyle/>
+          <a:p>
+            <a:pPr indent="0" lvl="0" marL="0" rtl="0" algn="l">
+              <a:spcBef>
+                <a:spcPts val="0"/>
+              </a:spcBef>
+              <a:spcAft>
+                <a:spcPts val="0"/>
+              </a:spcAft>
+              <a:buNone/>
+            </a:pPr>
+            <a:r>
+              <a:t/>
+            </a:r>
+            <a:endParaRPr/>
+          </a:p>
+        </p:txBody>
+      </p:sp>
+      <p:sp>
+        <p:nvSpPr>
+          <p:cNvPr id="572" name="title"/>
           <p:cNvSpPr txBox="1"/>
           <p:nvPr/>
         </p:nvSpPr>
@@ -9152,7 +9583,7 @@
               <a:spcAft>
                 <a:spcPts val="300"/>
               </a:spcAft>
-              <a:defRPr sz="2400">
+              <a:defRPr sz="2438">
                 <a:solidFill>
                   <a:srgbClr val="000000"/>
                 </a:solidFill>
@@ -9162,7 +9593,7 @@
               </a:defRPr>
             </a:pPr>
             <a:r>
-              <a:rPr sz="2400">
+              <a:rPr sz="2438">
                 <a:solidFill>
                   <a:srgbClr val="000000"/>
                 </a:solidFill>
@@ -9170,21 +9601,21 @@
                 <a:ea typeface="Play"/>
                 <a:cs typeface="Play"/>
               </a:rPr>
-              <a:t>Потенциальные выгоды</a:t>
-            </a:r>
-          </a:p>
-        </p:txBody>
-      </p:sp>
-      <p:sp>
-        <p:nvSpPr>
-          <p:cNvPr id="2252" name="body"/>
+              <a:t>Риски</a:t>
+            </a:r>
+          </a:p>
+        </p:txBody>
+      </p:sp>
+      <p:sp>
+        <p:nvSpPr>
+          <p:cNvPr id="573" name="body"/>
           <p:cNvSpPr txBox="1"/>
           <p:nvPr/>
         </p:nvSpPr>
         <p:spPr>
           <a:xfrm>
-            <a:off x="274320" y="1950440"/>
-            <a:ext cx="7189469" cy="994625"/>
+            <a:off x="274320" y="1891002"/>
+            <a:ext cx="8344814" cy="1422400"/>
           </a:xfrm>
           <a:prstGeom prst="rect">
             <a:avLst/>
@@ -9201,7 +9632,7 @@
               <a:spcAft>
                 <a:spcPts val="300"/>
               </a:spcAft>
-              <a:defRPr sz="1803" b="1">
+              <a:defRPr sz="1600">
                 <a:solidFill>
                   <a:srgbClr val="000000"/>
                 </a:solidFill>
@@ -9211,7 +9642,7 @@
               </a:defRPr>
             </a:pPr>
             <a:r>
-              <a:rPr sz="1803" b="1">
+              <a:rPr sz="1600">
                 <a:solidFill>
                   <a:srgbClr val="000000"/>
                 </a:solidFill>
@@ -9219,7 +9650,7 @@
                 <a:ea typeface="Play"/>
                 <a:cs typeface="Play"/>
               </a:rPr>
-              <a:t>• Сокращение времени на создание презентаций</a:t>
+              <a:t>• Слабая модель может выдумать цифры, аудит проверяет каждое число</a:t>
             </a:r>
           </a:p>
           <a:p>
@@ -9227,7 +9658,7 @@
               <a:spcAft>
                 <a:spcPts val="300"/>
               </a:spcAft>
-              <a:defRPr sz="1803" b="1">
+              <a:defRPr sz="1600">
                 <a:solidFill>
                   <a:srgbClr val="000000"/>
                 </a:solidFill>
@@ -9237,7 +9668,7 @@
               </a:defRPr>
             </a:pPr>
             <a:r>
-              <a:rPr sz="1803" b="1">
+              <a:rPr sz="1600">
                 <a:solidFill>
                   <a:srgbClr val="000000"/>
                 </a:solidFill>
@@ -9245,7 +9676,7 @@
                 <a:ea typeface="Play"/>
                 <a:cs typeface="Play"/>
               </a:rPr>
-              <a:t>• Уменьшение нарушений фирменного стиля</a:t>
+              <a:t>• Неправильный шаблон может привести к плохому дизайну, сервис использует рабочую область</a:t>
             </a:r>
           </a:p>
           <a:p>
@@ -9253,7 +9684,7 @@
               <a:spcAft>
                 <a:spcPts val="300"/>
               </a:spcAft>
-              <a:defRPr sz="1803" b="1">
+              <a:defRPr sz="1600">
                 <a:solidFill>
                   <a:srgbClr val="000000"/>
                 </a:solidFill>
@@ -9263,7 +9694,7 @@
               </a:defRPr>
             </a:pPr>
             <a:r>
-              <a:rPr sz="1803" b="1">
+              <a:rPr sz="1600">
                 <a:solidFill>
                   <a:srgbClr val="000000"/>
                 </a:solidFill>
@@ -9271,7 +9702,33 @@
                 <a:ea typeface="Play"/>
                 <a:cs typeface="Play"/>
               </a:rPr>
-              <a:t>• Повышение продуктивности дизайнеров</a:t>
+              <a:t>• Нагрузка выше 20 задач требует внешней очереди</a:t>
+            </a:r>
+          </a:p>
+          <a:p>
+            <a:pPr algn="l">
+              <a:spcAft>
+                <a:spcPts val="300"/>
+              </a:spcAft>
+              <a:defRPr sz="1600">
+                <a:solidFill>
+                  <a:srgbClr val="000000"/>
+                </a:solidFill>
+                <a:latin typeface="Play"/>
+                <a:ea typeface="Play"/>
+                <a:cs typeface="Play"/>
+              </a:defRPr>
+            </a:pPr>
+            <a:r>
+              <a:rPr sz="1600">
+                <a:solidFill>
+                  <a:srgbClr val="000000"/>
+                </a:solidFill>
+                <a:latin typeface="Play"/>
+                <a:ea typeface="Play"/>
+                <a:cs typeface="Play"/>
+              </a:rPr>
+              <a:t>• Зависимость от OpenAI‑совместимого протокола может ограничить масштаб</a:t>
             </a:r>
           </a:p>
         </p:txBody>
@@ -9296,18 +9753,141 @@
       <p:grpSpPr/>
       <p:sp>
         <p:nvSpPr>
-          <p:cNvPr id="1027" name="Google Shape;1027;p65"/>
+          <p:cNvPr id="662" name="Google Shape;662;p55"/>
           <p:cNvSpPr/>
           <p:nvPr/>
         </p:nvSpPr>
         <p:spPr>
           <a:xfrm>
-            <a:off x="6064222" y="1209852"/>
-            <a:ext cx="2793985" cy="3014270"/>
+            <a:off x="8667705" y="4666977"/>
+            <a:ext cx="190499" cy="190475"/>
+          </a:xfrm>
+          <a:prstGeom prst="rect">
+            <a:avLst/>
+          </a:prstGeom>
+          <a:noFill/>
+          <a:ln>
+            <a:noFill/>
+          </a:ln>
+        </p:spPr>
+        <p:txBody>
+          <a:bodyPr anchorCtr="0" anchor="ctr" bIns="91425" lIns="91425" spcFirstLastPara="1" rIns="91425" wrap="square" tIns="91425">
+            <a:noAutofit/>
+          </a:bodyPr>
+          <a:lstStyle/>
+          <a:p>
+            <a:pPr indent="0" lvl="0" marL="0" rtl="0" algn="l">
+              <a:spcBef>
+                <a:spcPts val="0"/>
+              </a:spcBef>
+              <a:spcAft>
+                <a:spcPts val="0"/>
+              </a:spcAft>
+              <a:buNone/>
+            </a:pPr>
+            <a:r>
+              <a:t/>
+            </a:r>
+            <a:endParaRPr/>
+          </a:p>
+        </p:txBody>
+      </p:sp>
+      <p:sp>
+        <p:nvSpPr>
+          <p:cNvPr id="663" name="Google Shape;663;p55"/>
+          <p:cNvSpPr/>
+          <p:nvPr/>
+        </p:nvSpPr>
+        <p:spPr>
+          <a:xfrm>
+            <a:off x="285748" y="286047"/>
+            <a:ext cx="8572456" cy="3938075"/>
+          </a:xfrm>
+          <a:prstGeom prst="rect">
+            <a:avLst/>
+          </a:prstGeom>
+          <a:noFill/>
+          <a:ln>
+            <a:noFill/>
+          </a:ln>
+        </p:spPr>
+        <p:txBody>
+          <a:bodyPr anchorCtr="0" anchor="ctr" bIns="91425" lIns="91425" spcFirstLastPara="1" rIns="91425" wrap="square" tIns="91425">
+            <a:noAutofit/>
+          </a:bodyPr>
+          <a:lstStyle/>
+          <a:p>
+            <a:pPr indent="0" lvl="0" marL="0" rtl="0" algn="l">
+              <a:spcBef>
+                <a:spcPts val="0"/>
+              </a:spcBef>
+              <a:spcAft>
+                <a:spcPts val="0"/>
+              </a:spcAft>
+              <a:buNone/>
+            </a:pPr>
+            <a:r>
+              <a:t/>
+            </a:r>
+            <a:endParaRPr/>
+          </a:p>
+        </p:txBody>
+      </p:sp>
+      <p:sp>
+        <p:nvSpPr>
+          <p:cNvPr id="664" name="Google Shape;664;p55"/>
+          <p:cNvSpPr/>
+          <p:nvPr/>
+        </p:nvSpPr>
+        <p:spPr>
+          <a:xfrm>
+            <a:off x="285748" y="1209852"/>
+            <a:ext cx="8572456" cy="3014270"/>
+          </a:xfrm>
+          <a:prstGeom prst="rect">
+            <a:avLst/>
+          </a:prstGeom>
+          <a:noFill/>
+          <a:ln>
+            <a:noFill/>
+          </a:ln>
+        </p:spPr>
+        <p:txBody>
+          <a:bodyPr anchorCtr="0" anchor="ctr" bIns="91425" lIns="91425" spcFirstLastPara="1" rIns="91425" wrap="square" tIns="91425">
+            <a:noAutofit/>
+          </a:bodyPr>
+          <a:lstStyle/>
+          <a:p>
+            <a:pPr indent="0" lvl="0" marL="0" rtl="0" algn="l">
+              <a:spcBef>
+                <a:spcPts val="0"/>
+              </a:spcBef>
+              <a:spcAft>
+                <a:spcPts val="0"/>
+              </a:spcAft>
+              <a:buNone/>
+            </a:pPr>
+            <a:r>
+              <a:t/>
+            </a:r>
+            <a:endParaRPr/>
+          </a:p>
+        </p:txBody>
+      </p:sp>
+      <p:sp>
+        <p:nvSpPr>
+          <p:cNvPr id="665" name="Google Shape;665;p55"/>
+          <p:cNvSpPr/>
+          <p:nvPr/>
+        </p:nvSpPr>
+        <p:spPr>
+          <a:xfrm>
+            <a:off x="285749" y="1209852"/>
+            <a:ext cx="2071677" cy="3014270"/>
           </a:xfrm>
           <a:prstGeom prst="roundRect">
             <a:avLst>
-              <a:gd fmla="val 3436" name="adj"/>
+              <a:gd fmla="val 4634" name="adj"/>
             </a:avLst>
           </a:prstGeom>
           <a:solidFill>
@@ -9339,23 +9919,16 @@
           </a:p>
         </p:txBody>
       </p:sp>
-      <p:pic>
-        <p:nvPicPr>
-          <p:cNvPr descr=" " id="1028" name="Google Shape;1028;p65"/>
-          <p:cNvPicPr preferRelativeResize="0"/>
-          <p:nvPr/>
-        </p:nvPicPr>
-        <p:blipFill rotWithShape="1">
-          <a:blip r:embed="rId2">
-            <a:alphaModFix/>
-          </a:blip>
-          <a:srcRect b="0" l="0" r="0" t="0"/>
-          <a:stretch/>
-        </p:blipFill>
-        <p:spPr>
-          <a:xfrm>
-            <a:off x="8203313" y="3566983"/>
-            <a:ext cx="466723" cy="466664"/>
+      <p:sp>
+        <p:nvSpPr>
+          <p:cNvPr id="666" name="Google Shape;666;p55"/>
+          <p:cNvSpPr/>
+          <p:nvPr/>
+        </p:nvSpPr>
+        <p:spPr>
+          <a:xfrm>
+            <a:off x="438148" y="1362233"/>
+            <a:ext cx="1766878" cy="342855"/>
           </a:xfrm>
           <a:prstGeom prst="rect">
             <a:avLst/>
@@ -9365,21 +9938,87 @@
             <a:noFill/>
           </a:ln>
         </p:spPr>
-      </p:pic>
-      <p:sp>
-        <p:nvSpPr>
-          <p:cNvPr id="1029" name="Google Shape;1029;p65"/>
+        <p:txBody>
+          <a:bodyPr anchorCtr="0" anchor="ctr" bIns="91425" lIns="91425" spcFirstLastPara="1" rIns="91425" wrap="square" tIns="91425">
+            <a:noAutofit/>
+          </a:bodyPr>
+          <a:lstStyle/>
+          <a:p>
+            <a:pPr indent="0" lvl="0" marL="0" rtl="0" algn="l">
+              <a:spcBef>
+                <a:spcPts val="0"/>
+              </a:spcBef>
+              <a:spcAft>
+                <a:spcPts val="0"/>
+              </a:spcAft>
+              <a:buNone/>
+            </a:pPr>
+            <a:r>
+              <a:t/>
+            </a:r>
+            <a:endParaRPr/>
+          </a:p>
+        </p:txBody>
+      </p:sp>
+      <p:sp>
+        <p:nvSpPr>
+          <p:cNvPr id="667" name="Google Shape;667;p55"/>
           <p:cNvSpPr/>
           <p:nvPr/>
         </p:nvSpPr>
         <p:spPr>
           <a:xfrm>
-            <a:off x="3174981" y="1209852"/>
-            <a:ext cx="2793985" cy="3014270"/>
+            <a:off x="438148" y="1362233"/>
+            <a:ext cx="76199" cy="76190"/>
           </a:xfrm>
           <a:prstGeom prst="roundRect">
             <a:avLst>
-              <a:gd fmla="val 3436" name="adj"/>
+              <a:gd fmla="val 31500" name="adj"/>
+            </a:avLst>
+          </a:prstGeom>
+          <a:solidFill>
+            <a:srgbClr val="0077FF"/>
+          </a:solidFill>
+          <a:ln>
+            <a:noFill/>
+          </a:ln>
+        </p:spPr>
+        <p:txBody>
+          <a:bodyPr anchorCtr="0" anchor="ctr" bIns="91425" lIns="91425" spcFirstLastPara="1" rIns="91425" wrap="square" tIns="91425">
+            <a:noAutofit/>
+          </a:bodyPr>
+          <a:lstStyle/>
+          <a:p>
+            <a:pPr indent="0" lvl="0" marL="0" rtl="0" algn="l">
+              <a:spcBef>
+                <a:spcPts val="0"/>
+              </a:spcBef>
+              <a:spcAft>
+                <a:spcPts val="0"/>
+              </a:spcAft>
+              <a:buNone/>
+            </a:pPr>
+            <a:r>
+              <a:t/>
+            </a:r>
+            <a:endParaRPr/>
+          </a:p>
+        </p:txBody>
+      </p:sp>
+      <p:sp>
+        <p:nvSpPr>
+          <p:cNvPr id="670" name="Google Shape;670;p55"/>
+          <p:cNvSpPr/>
+          <p:nvPr/>
+        </p:nvSpPr>
+        <p:spPr>
+          <a:xfrm>
+            <a:off x="2452675" y="1209852"/>
+            <a:ext cx="2071677" cy="3014270"/>
+          </a:xfrm>
+          <a:prstGeom prst="roundRect">
+            <a:avLst>
+              <a:gd fmla="val 4634" name="adj"/>
             </a:avLst>
           </a:prstGeom>
           <a:solidFill>
@@ -9411,23 +10050,16 @@
           </a:p>
         </p:txBody>
       </p:sp>
-      <p:pic>
-        <p:nvPicPr>
-          <p:cNvPr descr=" " id="1030" name="Google Shape;1030;p65"/>
-          <p:cNvPicPr preferRelativeResize="0"/>
-          <p:nvPr/>
-        </p:nvPicPr>
-        <p:blipFill rotWithShape="1">
-          <a:blip r:embed="rId2">
-            <a:alphaModFix/>
-          </a:blip>
-          <a:srcRect b="0" l="0" r="0" t="0"/>
-          <a:stretch/>
-        </p:blipFill>
-        <p:spPr>
-          <a:xfrm>
-            <a:off x="5310249" y="3566983"/>
-            <a:ext cx="466723" cy="466664"/>
+      <p:sp>
+        <p:nvSpPr>
+          <p:cNvPr id="671" name="Google Shape;671;p55"/>
+          <p:cNvSpPr/>
+          <p:nvPr/>
+        </p:nvSpPr>
+        <p:spPr>
+          <a:xfrm>
+            <a:off x="2605074" y="1362233"/>
+            <a:ext cx="1766878" cy="342855"/>
           </a:xfrm>
           <a:prstGeom prst="rect">
             <a:avLst/>
@@ -9437,21 +10069,87 @@
             <a:noFill/>
           </a:ln>
         </p:spPr>
-      </p:pic>
-      <p:sp>
-        <p:nvSpPr>
-          <p:cNvPr id="1031" name="Google Shape;1031;p65"/>
+        <p:txBody>
+          <a:bodyPr anchorCtr="0" anchor="ctr" bIns="91425" lIns="91425" spcFirstLastPara="1" rIns="91425" wrap="square" tIns="91425">
+            <a:noAutofit/>
+          </a:bodyPr>
+          <a:lstStyle/>
+          <a:p>
+            <a:pPr indent="0" lvl="0" marL="0" rtl="0" algn="l">
+              <a:spcBef>
+                <a:spcPts val="0"/>
+              </a:spcBef>
+              <a:spcAft>
+                <a:spcPts val="0"/>
+              </a:spcAft>
+              <a:buNone/>
+            </a:pPr>
+            <a:r>
+              <a:t/>
+            </a:r>
+            <a:endParaRPr/>
+          </a:p>
+        </p:txBody>
+      </p:sp>
+      <p:sp>
+        <p:nvSpPr>
+          <p:cNvPr id="672" name="Google Shape;672;p55"/>
           <p:cNvSpPr/>
           <p:nvPr/>
         </p:nvSpPr>
         <p:spPr>
           <a:xfrm>
-            <a:off x="285749" y="1209852"/>
-            <a:ext cx="2793985" cy="3014270"/>
+            <a:off x="2605074" y="1362233"/>
+            <a:ext cx="76199" cy="76190"/>
           </a:xfrm>
           <a:prstGeom prst="roundRect">
             <a:avLst>
-              <a:gd fmla="val 3436" name="adj"/>
+              <a:gd fmla="val 31500" name="adj"/>
+            </a:avLst>
+          </a:prstGeom>
+          <a:solidFill>
+            <a:srgbClr val="0077FF"/>
+          </a:solidFill>
+          <a:ln>
+            <a:noFill/>
+          </a:ln>
+        </p:spPr>
+        <p:txBody>
+          <a:bodyPr anchorCtr="0" anchor="ctr" bIns="91425" lIns="91425" spcFirstLastPara="1" rIns="91425" wrap="square" tIns="91425">
+            <a:noAutofit/>
+          </a:bodyPr>
+          <a:lstStyle/>
+          <a:p>
+            <a:pPr indent="0" lvl="0" marL="0" rtl="0" algn="l">
+              <a:spcBef>
+                <a:spcPts val="0"/>
+              </a:spcBef>
+              <a:spcAft>
+                <a:spcPts val="0"/>
+              </a:spcAft>
+              <a:buNone/>
+            </a:pPr>
+            <a:r>
+              <a:t/>
+            </a:r>
+            <a:endParaRPr/>
+          </a:p>
+        </p:txBody>
+      </p:sp>
+      <p:sp>
+        <p:nvSpPr>
+          <p:cNvPr id="675" name="Google Shape;675;p55"/>
+          <p:cNvSpPr/>
+          <p:nvPr/>
+        </p:nvSpPr>
+        <p:spPr>
+          <a:xfrm>
+            <a:off x="4619601" y="1209852"/>
+            <a:ext cx="2071677" cy="3014270"/>
+          </a:xfrm>
+          <a:prstGeom prst="roundRect">
+            <a:avLst>
+              <a:gd fmla="val 4634" name="adj"/>
             </a:avLst>
           </a:prstGeom>
           <a:solidFill>
@@ -9485,14 +10183,14 @@
       </p:sp>
       <p:sp>
         <p:nvSpPr>
-          <p:cNvPr id="1032" name="Google Shape;1032;p65"/>
+          <p:cNvPr id="676" name="Google Shape;676;p55"/>
           <p:cNvSpPr/>
           <p:nvPr/>
         </p:nvSpPr>
         <p:spPr>
           <a:xfrm>
-            <a:off x="285748" y="286047"/>
-            <a:ext cx="8572456" cy="3938075"/>
+            <a:off x="4772001" y="1362233"/>
+            <a:ext cx="1766878" cy="342855"/>
           </a:xfrm>
           <a:prstGeom prst="rect">
             <a:avLst/>
@@ -9526,95 +10224,13 @@
       </p:sp>
       <p:sp>
         <p:nvSpPr>
-          <p:cNvPr id="1033" name="Google Shape;1033;p65"/>
+          <p:cNvPr id="677" name="Google Shape;677;p55"/>
           <p:cNvSpPr/>
           <p:nvPr/>
         </p:nvSpPr>
         <p:spPr>
           <a:xfrm>
-            <a:off x="285748" y="1209852"/>
-            <a:ext cx="8572456" cy="3014270"/>
-          </a:xfrm>
-          <a:prstGeom prst="rect">
-            <a:avLst/>
-          </a:prstGeom>
-          <a:noFill/>
-          <a:ln>
-            <a:noFill/>
-          </a:ln>
-        </p:spPr>
-        <p:txBody>
-          <a:bodyPr anchorCtr="0" anchor="ctr" bIns="91425" lIns="91425" spcFirstLastPara="1" rIns="91425" wrap="square" tIns="91425">
-            <a:noAutofit/>
-          </a:bodyPr>
-          <a:lstStyle/>
-          <a:p>
-            <a:pPr indent="0" lvl="0" marL="0" rtl="0" algn="l">
-              <a:spcBef>
-                <a:spcPts val="0"/>
-              </a:spcBef>
-              <a:spcAft>
-                <a:spcPts val="0"/>
-              </a:spcAft>
-              <a:buNone/>
-            </a:pPr>
-            <a:r>
-              <a:t/>
-            </a:r>
-            <a:endParaRPr/>
-          </a:p>
-        </p:txBody>
-      </p:sp>
-      <p:sp>
-        <p:nvSpPr>
-          <p:cNvPr id="1034" name="Google Shape;1034;p65"/>
-          <p:cNvSpPr/>
-          <p:nvPr/>
-        </p:nvSpPr>
-        <p:spPr>
-          <a:xfrm>
-            <a:off x="476248" y="1400327"/>
-            <a:ext cx="2412987" cy="1009519"/>
-          </a:xfrm>
-          <a:prstGeom prst="rect">
-            <a:avLst/>
-          </a:prstGeom>
-          <a:noFill/>
-          <a:ln>
-            <a:noFill/>
-          </a:ln>
-        </p:spPr>
-        <p:txBody>
-          <a:bodyPr anchorCtr="0" anchor="ctr" bIns="91425" lIns="91425" spcFirstLastPara="1" rIns="91425" wrap="square" tIns="91425">
-            <a:noAutofit/>
-          </a:bodyPr>
-          <a:lstStyle/>
-          <a:p>
-            <a:pPr indent="0" lvl="0" marL="0" rtl="0" algn="l">
-              <a:spcBef>
-                <a:spcPts val="0"/>
-              </a:spcBef>
-              <a:spcAft>
-                <a:spcPts val="0"/>
-              </a:spcAft>
-              <a:buNone/>
-            </a:pPr>
-            <a:r>
-              <a:t/>
-            </a:r>
-            <a:endParaRPr/>
-          </a:p>
-        </p:txBody>
-      </p:sp>
-      <p:sp>
-        <p:nvSpPr>
-          <p:cNvPr id="1035" name="Google Shape;1035;p65"/>
-          <p:cNvSpPr/>
-          <p:nvPr/>
-        </p:nvSpPr>
-        <p:spPr>
-          <a:xfrm>
-            <a:off x="476248" y="1400328"/>
+            <a:off x="4772001" y="1362233"/>
             <a:ext cx="76199" cy="76190"/>
           </a:xfrm>
           <a:prstGeom prst="roundRect">
@@ -9653,14 +10269,59 @@
       </p:sp>
       <p:sp>
         <p:nvSpPr>
-          <p:cNvPr id="1037" name="Google Shape;1037;p65"/>
+          <p:cNvPr id="680" name="Google Shape;680;p55"/>
           <p:cNvSpPr/>
           <p:nvPr/>
         </p:nvSpPr>
         <p:spPr>
           <a:xfrm>
-            <a:off x="2422509" y="3566983"/>
-            <a:ext cx="466723" cy="466664"/>
+            <a:off x="6786527" y="1209852"/>
+            <a:ext cx="2071677" cy="3014270"/>
+          </a:xfrm>
+          <a:prstGeom prst="roundRect">
+            <a:avLst>
+              <a:gd fmla="val 4634" name="adj"/>
+            </a:avLst>
+          </a:prstGeom>
+          <a:solidFill>
+            <a:schemeClr val="lt2"/>
+          </a:solidFill>
+          <a:ln>
+            <a:noFill/>
+          </a:ln>
+        </p:spPr>
+        <p:txBody>
+          <a:bodyPr anchorCtr="0" anchor="ctr" bIns="91425" lIns="91425" spcFirstLastPara="1" rIns="91425" wrap="square" tIns="91425">
+            <a:noAutofit/>
+          </a:bodyPr>
+          <a:lstStyle/>
+          <a:p>
+            <a:pPr indent="0" lvl="0" marL="0" rtl="0" algn="l">
+              <a:spcBef>
+                <a:spcPts val="0"/>
+              </a:spcBef>
+              <a:spcAft>
+                <a:spcPts val="0"/>
+              </a:spcAft>
+              <a:buNone/>
+            </a:pPr>
+            <a:r>
+              <a:t/>
+            </a:r>
+            <a:endParaRPr/>
+          </a:p>
+        </p:txBody>
+      </p:sp>
+      <p:sp>
+        <p:nvSpPr>
+          <p:cNvPr id="681" name="Google Shape;681;p55"/>
+          <p:cNvSpPr/>
+          <p:nvPr/>
+        </p:nvSpPr>
+        <p:spPr>
+          <a:xfrm>
+            <a:off x="6938927" y="1362233"/>
+            <a:ext cx="1766878" cy="342855"/>
           </a:xfrm>
           <a:prstGeom prst="rect">
             <a:avLst/>
@@ -9692,110 +10353,15 @@
           </a:p>
         </p:txBody>
       </p:sp>
-      <p:pic>
-        <p:nvPicPr>
-          <p:cNvPr descr=" " id="1038" name="Google Shape;1038;p65"/>
-          <p:cNvPicPr preferRelativeResize="0"/>
-          <p:nvPr/>
-        </p:nvPicPr>
-        <p:blipFill rotWithShape="1">
-          <a:blip r:embed="rId2">
-            <a:alphaModFix/>
-          </a:blip>
-          <a:srcRect b="0" l="0" r="0" t="0"/>
-          <a:stretch/>
-        </p:blipFill>
-        <p:spPr>
-          <a:xfrm>
-            <a:off x="2422506" y="3566983"/>
-            <a:ext cx="466723" cy="466664"/>
-          </a:xfrm>
-          <a:prstGeom prst="rect">
-            <a:avLst/>
-          </a:prstGeom>
-          <a:noFill/>
-          <a:ln>
-            <a:noFill/>
-          </a:ln>
-        </p:spPr>
-      </p:pic>
-      <p:pic>
-        <p:nvPicPr>
-          <p:cNvPr descr=" " id="1039" name="Google Shape;1039;p65"/>
-          <p:cNvPicPr preferRelativeResize="0"/>
-          <p:nvPr/>
-        </p:nvPicPr>
-        <p:blipFill rotWithShape="1">
-          <a:blip r:embed="rId3">
-            <a:alphaModFix/>
-          </a:blip>
-          <a:srcRect b="0" l="0" r="0" t="0"/>
-          <a:stretch/>
-        </p:blipFill>
-        <p:spPr>
-          <a:xfrm>
-            <a:off x="2555859" y="3700316"/>
-            <a:ext cx="200024" cy="199999"/>
-          </a:xfrm>
-          <a:prstGeom prst="rect">
-            <a:avLst/>
-          </a:prstGeom>
-          <a:noFill/>
-          <a:ln>
-            <a:noFill/>
-          </a:ln>
-        </p:spPr>
-      </p:pic>
-      <p:sp>
-        <p:nvSpPr>
-          <p:cNvPr id="1040" name="Google Shape;1040;p65"/>
+      <p:sp>
+        <p:nvSpPr>
+          <p:cNvPr id="682" name="Google Shape;682;p55"/>
           <p:cNvSpPr/>
           <p:nvPr/>
         </p:nvSpPr>
         <p:spPr>
           <a:xfrm>
-            <a:off x="3365480" y="1400327"/>
-            <a:ext cx="2412987" cy="1009519"/>
-          </a:xfrm>
-          <a:prstGeom prst="rect">
-            <a:avLst/>
-          </a:prstGeom>
-          <a:noFill/>
-          <a:ln>
-            <a:noFill/>
-          </a:ln>
-        </p:spPr>
-        <p:txBody>
-          <a:bodyPr anchorCtr="0" anchor="ctr" bIns="91425" lIns="91425" spcFirstLastPara="1" rIns="91425" wrap="square" tIns="91425">
-            <a:noAutofit/>
-          </a:bodyPr>
-          <a:lstStyle/>
-          <a:p>
-            <a:pPr indent="0" lvl="0" marL="0" rtl="0" algn="l">
-              <a:spcBef>
-                <a:spcPts val="0"/>
-              </a:spcBef>
-              <a:spcAft>
-                <a:spcPts val="0"/>
-              </a:spcAft>
-              <a:buNone/>
-            </a:pPr>
-            <a:r>
-              <a:t/>
-            </a:r>
-            <a:endParaRPr/>
-          </a:p>
-        </p:txBody>
-      </p:sp>
-      <p:sp>
-        <p:nvSpPr>
-          <p:cNvPr id="1041" name="Google Shape;1041;p65"/>
-          <p:cNvSpPr/>
-          <p:nvPr/>
-        </p:nvSpPr>
-        <p:spPr>
-          <a:xfrm>
-            <a:off x="3365480" y="1400328"/>
+            <a:off x="6938927" y="1362233"/>
             <a:ext cx="76199" cy="76190"/>
           </a:xfrm>
           <a:prstGeom prst="roundRect">
@@ -9834,229 +10400,7 @@
       </p:sp>
       <p:sp>
         <p:nvSpPr>
-          <p:cNvPr id="1043" name="Google Shape;1043;p65"/>
-          <p:cNvSpPr/>
-          <p:nvPr/>
-        </p:nvSpPr>
-        <p:spPr>
-          <a:xfrm>
-            <a:off x="5311741" y="3566983"/>
-            <a:ext cx="466723" cy="466664"/>
-          </a:xfrm>
-          <a:prstGeom prst="rect">
-            <a:avLst/>
-          </a:prstGeom>
-          <a:noFill/>
-          <a:ln>
-            <a:noFill/>
-          </a:ln>
-        </p:spPr>
-        <p:txBody>
-          <a:bodyPr anchorCtr="0" anchor="ctr" bIns="91425" lIns="91425" spcFirstLastPara="1" rIns="91425" wrap="square" tIns="91425">
-            <a:noAutofit/>
-          </a:bodyPr>
-          <a:lstStyle/>
-          <a:p>
-            <a:pPr indent="0" lvl="0" marL="0" rtl="0" algn="l">
-              <a:spcBef>
-                <a:spcPts val="0"/>
-              </a:spcBef>
-              <a:spcAft>
-                <a:spcPts val="0"/>
-              </a:spcAft>
-              <a:buNone/>
-            </a:pPr>
-            <a:r>
-              <a:t/>
-            </a:r>
-            <a:endParaRPr/>
-          </a:p>
-        </p:txBody>
-      </p:sp>
-      <p:pic>
-        <p:nvPicPr>
-          <p:cNvPr descr=" " id="1044" name="Google Shape;1044;p65"/>
-          <p:cNvPicPr preferRelativeResize="0"/>
-          <p:nvPr/>
-        </p:nvPicPr>
-        <p:blipFill rotWithShape="1">
-          <a:blip r:embed="rId3">
-            <a:alphaModFix/>
-          </a:blip>
-          <a:srcRect b="0" l="0" r="0" t="0"/>
-          <a:stretch/>
-        </p:blipFill>
-        <p:spPr>
-          <a:xfrm>
-            <a:off x="5445091" y="3700316"/>
-            <a:ext cx="200024" cy="199999"/>
-          </a:xfrm>
-          <a:prstGeom prst="rect">
-            <a:avLst/>
-          </a:prstGeom>
-          <a:noFill/>
-          <a:ln>
-            <a:noFill/>
-          </a:ln>
-        </p:spPr>
-      </p:pic>
-      <p:sp>
-        <p:nvSpPr>
-          <p:cNvPr id="1045" name="Google Shape;1045;p65"/>
-          <p:cNvSpPr/>
-          <p:nvPr/>
-        </p:nvSpPr>
-        <p:spPr>
-          <a:xfrm>
-            <a:off x="6254721" y="1400327"/>
-            <a:ext cx="2412987" cy="1009519"/>
-          </a:xfrm>
-          <a:prstGeom prst="rect">
-            <a:avLst/>
-          </a:prstGeom>
-          <a:noFill/>
-          <a:ln>
-            <a:noFill/>
-          </a:ln>
-        </p:spPr>
-        <p:txBody>
-          <a:bodyPr anchorCtr="0" anchor="ctr" bIns="91425" lIns="91425" spcFirstLastPara="1" rIns="91425" wrap="square" tIns="91425">
-            <a:noAutofit/>
-          </a:bodyPr>
-          <a:lstStyle/>
-          <a:p>
-            <a:pPr indent="0" lvl="0" marL="0" rtl="0" algn="l">
-              <a:spcBef>
-                <a:spcPts val="0"/>
-              </a:spcBef>
-              <a:spcAft>
-                <a:spcPts val="0"/>
-              </a:spcAft>
-              <a:buNone/>
-            </a:pPr>
-            <a:r>
-              <a:t/>
-            </a:r>
-            <a:endParaRPr/>
-          </a:p>
-        </p:txBody>
-      </p:sp>
-      <p:sp>
-        <p:nvSpPr>
-          <p:cNvPr id="1046" name="Google Shape;1046;p65"/>
-          <p:cNvSpPr/>
-          <p:nvPr/>
-        </p:nvSpPr>
-        <p:spPr>
-          <a:xfrm>
-            <a:off x="6254721" y="1400328"/>
-            <a:ext cx="76199" cy="76190"/>
-          </a:xfrm>
-          <a:prstGeom prst="roundRect">
-            <a:avLst>
-              <a:gd fmla="val 31500" name="adj"/>
-            </a:avLst>
-          </a:prstGeom>
-          <a:solidFill>
-            <a:srgbClr val="0077FF"/>
-          </a:solidFill>
-          <a:ln>
-            <a:noFill/>
-          </a:ln>
-        </p:spPr>
-        <p:txBody>
-          <a:bodyPr anchorCtr="0" anchor="ctr" bIns="91425" lIns="91425" spcFirstLastPara="1" rIns="91425" wrap="square" tIns="91425">
-            <a:noAutofit/>
-          </a:bodyPr>
-          <a:lstStyle/>
-          <a:p>
-            <a:pPr indent="0" lvl="0" marL="0" rtl="0" algn="l">
-              <a:spcBef>
-                <a:spcPts val="0"/>
-              </a:spcBef>
-              <a:spcAft>
-                <a:spcPts val="0"/>
-              </a:spcAft>
-              <a:buNone/>
-            </a:pPr>
-            <a:r>
-              <a:t/>
-            </a:r>
-            <a:endParaRPr/>
-          </a:p>
-        </p:txBody>
-      </p:sp>
-      <p:sp>
-        <p:nvSpPr>
-          <p:cNvPr id="1048" name="Google Shape;1048;p65"/>
-          <p:cNvSpPr/>
-          <p:nvPr/>
-        </p:nvSpPr>
-        <p:spPr>
-          <a:xfrm>
-            <a:off x="8200982" y="3566983"/>
-            <a:ext cx="466723" cy="466664"/>
-          </a:xfrm>
-          <a:prstGeom prst="rect">
-            <a:avLst/>
-          </a:prstGeom>
-          <a:noFill/>
-          <a:ln>
-            <a:noFill/>
-          </a:ln>
-        </p:spPr>
-        <p:txBody>
-          <a:bodyPr anchorCtr="0" anchor="ctr" bIns="91425" lIns="91425" spcFirstLastPara="1" rIns="91425" wrap="square" tIns="91425">
-            <a:noAutofit/>
-          </a:bodyPr>
-          <a:lstStyle/>
-          <a:p>
-            <a:pPr indent="0" lvl="0" marL="0" rtl="0" algn="l">
-              <a:spcBef>
-                <a:spcPts val="0"/>
-              </a:spcBef>
-              <a:spcAft>
-                <a:spcPts val="0"/>
-              </a:spcAft>
-              <a:buNone/>
-            </a:pPr>
-            <a:r>
-              <a:t/>
-            </a:r>
-            <a:endParaRPr/>
-          </a:p>
-        </p:txBody>
-      </p:sp>
-      <p:pic>
-        <p:nvPicPr>
-          <p:cNvPr descr=" " id="1049" name="Google Shape;1049;p65"/>
-          <p:cNvPicPr preferRelativeResize="0"/>
-          <p:nvPr/>
-        </p:nvPicPr>
-        <p:blipFill rotWithShape="1">
-          <a:blip r:embed="rId3">
-            <a:alphaModFix/>
-          </a:blip>
-          <a:srcRect b="0" l="0" r="0" t="0"/>
-          <a:stretch/>
-        </p:blipFill>
-        <p:spPr>
-          <a:xfrm>
-            <a:off x="8334332" y="3700316"/>
-            <a:ext cx="200024" cy="199999"/>
-          </a:xfrm>
-          <a:prstGeom prst="rect">
-            <a:avLst/>
-          </a:prstGeom>
-          <a:noFill/>
-          <a:ln>
-            <a:noFill/>
-          </a:ln>
-        </p:spPr>
-      </p:pic>
-      <p:sp>
-        <p:nvSpPr>
-          <p:cNvPr id="1050" name="title"/>
+          <p:cNvPr id="683" name="title"/>
           <p:cNvSpPr txBox="1"/>
           <p:nvPr/>
         </p:nvSpPr>
@@ -10080,7 +10424,7 @@
               <a:spcAft>
                 <a:spcPts val="300"/>
               </a:spcAft>
-              <a:defRPr sz="2400">
+              <a:defRPr sz="2438">
                 <a:solidFill>
                   <a:srgbClr val="000000"/>
                 </a:solidFill>
@@ -10090,7 +10434,7 @@
               </a:defRPr>
             </a:pPr>
             <a:r>
-              <a:rPr sz="2400">
+              <a:rPr sz="2438">
                 <a:solidFill>
                   <a:srgbClr val="000000"/>
                 </a:solidFill>
@@ -10098,21 +10442,21 @@
                 <a:ea typeface="Play"/>
                 <a:cs typeface="Play"/>
               </a:rPr>
-              <a:t>Что мы просим решить</a:t>
-            </a:r>
-          </a:p>
-        </p:txBody>
-      </p:sp>
-      <p:sp>
-        <p:nvSpPr>
-          <p:cNvPr id="1051" name="card_0"/>
+              <a:t>Преимущества для компании</a:t>
+            </a:r>
+          </a:p>
+        </p:txBody>
+      </p:sp>
+      <p:sp>
+        <p:nvSpPr>
+          <p:cNvPr id="684" name="card_0"/>
           <p:cNvSpPr txBox="1"/>
           <p:nvPr/>
         </p:nvSpPr>
         <p:spPr>
           <a:xfrm>
-            <a:off x="576030" y="1728705"/>
-            <a:ext cx="2264138" cy="632134"/>
+            <a:off x="582575" y="1963753"/>
+            <a:ext cx="1516144" cy="2001662"/>
           </a:xfrm>
           <a:prstGeom prst="rect">
             <a:avLst/>
@@ -10129,7 +10473,7 @@
               <a:spcAft>
                 <a:spcPts val="300"/>
               </a:spcAft>
-              <a:defRPr sz="1406" b="0">
+              <a:defRPr sz="1800" b="0">
                 <a:solidFill>
                   <a:srgbClr val="000000"/>
                 </a:solidFill>
@@ -10139,7 +10483,7 @@
               </a:defRPr>
             </a:pPr>
             <a:r>
-              <a:rPr sz="1406" b="0">
+              <a:rPr sz="1800" b="0">
                 <a:solidFill>
                   <a:srgbClr val="000000"/>
                 </a:solidFill>
@@ -10147,21 +10491,21 @@
                 <a:ea typeface="Play"/>
                 <a:cs typeface="Play"/>
               </a:rPr>
-              <a:t>Одобрить запуск сервиса на всю компанию</a:t>
-            </a:r>
-          </a:p>
-        </p:txBody>
-      </p:sp>
-      <p:sp>
-        <p:nvSpPr>
-          <p:cNvPr id="1052" name="card_1"/>
+              <a:t>Сокращение времени создания презентаций до 4 мин</a:t>
+            </a:r>
+          </a:p>
+        </p:txBody>
+      </p:sp>
+      <p:sp>
+        <p:nvSpPr>
+          <p:cNvPr id="685" name="card_1"/>
           <p:cNvSpPr txBox="1"/>
           <p:nvPr/>
         </p:nvSpPr>
         <p:spPr>
           <a:xfrm>
-            <a:off x="3465259" y="1728705"/>
-            <a:ext cx="2264138" cy="632134"/>
+            <a:off x="2749428" y="1963753"/>
+            <a:ext cx="1516144" cy="2001662"/>
           </a:xfrm>
           <a:prstGeom prst="rect">
             <a:avLst/>
@@ -10178,7 +10522,7 @@
               <a:spcAft>
                 <a:spcPts val="300"/>
               </a:spcAft>
-              <a:defRPr sz="1406" b="0">
+              <a:defRPr sz="1800" b="0">
                 <a:solidFill>
                   <a:srgbClr val="000000"/>
                 </a:solidFill>
@@ -10188,7 +10532,7 @@
               </a:defRPr>
             </a:pPr>
             <a:r>
-              <a:rPr sz="1406" b="0">
+              <a:rPr sz="1800" b="0">
                 <a:solidFill>
                   <a:srgbClr val="000000"/>
                 </a:solidFill>
@@ -10196,21 +10540,21 @@
                 <a:ea typeface="Play"/>
                 <a:cs typeface="Play"/>
               </a:rPr>
-              <a:t>Обеспечить инфраструктуру и интеграцию</a:t>
-            </a:r>
-          </a:p>
-        </p:txBody>
-      </p:sp>
-      <p:sp>
-        <p:nvSpPr>
-          <p:cNvPr id="1053" name="card_2"/>
+              <a:t>Увеличение количества готовых колод за тот же период</a:t>
+            </a:r>
+          </a:p>
+        </p:txBody>
+      </p:sp>
+      <p:sp>
+        <p:nvSpPr>
+          <p:cNvPr id="686" name="card_2"/>
           <p:cNvSpPr txBox="1"/>
           <p:nvPr/>
         </p:nvSpPr>
         <p:spPr>
           <a:xfrm>
-            <a:off x="6354489" y="1728705"/>
-            <a:ext cx="2264138" cy="632134"/>
+            <a:off x="4916374" y="1963753"/>
+            <a:ext cx="1516144" cy="2001662"/>
           </a:xfrm>
           <a:prstGeom prst="rect">
             <a:avLst/>
@@ -10227,7 +10571,7 @@
               <a:spcAft>
                 <a:spcPts val="300"/>
               </a:spcAft>
-              <a:defRPr sz="1406" b="0">
+              <a:defRPr sz="1800" b="0">
                 <a:solidFill>
                   <a:srgbClr val="000000"/>
                 </a:solidFill>
@@ -10237,7 +10581,7 @@
               </a:defRPr>
             </a:pPr>
             <a:r>
-              <a:rPr sz="1406" b="0">
+              <a:rPr sz="1800" b="0">
                 <a:solidFill>
                   <a:srgbClr val="000000"/>
                 </a:solidFill>
@@ -10245,7 +10589,56 @@
                 <a:ea typeface="Play"/>
                 <a:cs typeface="Play"/>
               </a:rPr>
-              <a:t>Поддерживать модель и обновления</a:t>
+              <a:t>Снижение ошибок фирменного стиля до 3%</a:t>
+            </a:r>
+          </a:p>
+        </p:txBody>
+      </p:sp>
+      <p:sp>
+        <p:nvSpPr>
+          <p:cNvPr id="687" name="card_3"/>
+          <p:cNvSpPr txBox="1"/>
+          <p:nvPr/>
+        </p:nvSpPr>
+        <p:spPr>
+          <a:xfrm>
+            <a:off x="7083319" y="1963753"/>
+            <a:ext cx="1516144" cy="2001662"/>
+          </a:xfrm>
+          <a:prstGeom prst="rect">
+            <a:avLst/>
+          </a:prstGeom>
+          <a:noFill/>
+        </p:spPr>
+        <p:txBody>
+          <a:bodyPr wrap="square" lIns="76200" rIns="76200" tIns="50800" bIns="50800">
+            <a:spAutoFit/>
+          </a:bodyPr>
+          <a:lstStyle/>
+          <a:p>
+            <a:pPr algn="l">
+              <a:spcAft>
+                <a:spcPts val="300"/>
+              </a:spcAft>
+              <a:defRPr sz="1600" b="0">
+                <a:solidFill>
+                  <a:srgbClr val="000000"/>
+                </a:solidFill>
+                <a:latin typeface="Play"/>
+                <a:ea typeface="Play"/>
+                <a:cs typeface="Play"/>
+              </a:defRPr>
+            </a:pPr>
+            <a:r>
+              <a:rPr sz="1600" b="0">
+                <a:solidFill>
+                  <a:srgbClr val="000000"/>
+                </a:solidFill>
+                <a:latin typeface="Play"/>
+                <a:ea typeface="Play"/>
+                <a:cs typeface="Play"/>
+              </a:rPr>
+              <a:t>Повышение эффективности дизайнеров, освобождение от рутинных задач</a:t>
             </a:r>
           </a:p>
         </p:txBody>
@@ -10277,7 +10670,7 @@
         <p:spPr>
           <a:xfrm>
             <a:off x="445963" y="1555901"/>
-            <a:ext cx="8300171" cy="2189031"/>
+            <a:ext cx="8300171" cy="2676842"/>
           </a:xfrm>
           <a:prstGeom prst="roundRect">
             <a:avLst/>
@@ -10358,7 +10751,7 @@
                 <a:ea typeface="Play"/>
                 <a:cs typeface="Play"/>
               </a:rPr>
-              <a:t>Вывод</a:t>
+              <a:t>Итоги</a:t>
             </a:r>
           </a:p>
         </p:txBody>
@@ -10371,8 +10764,8 @@
         </p:nvSpPr>
         <p:spPr>
           <a:xfrm>
-            <a:off x="572963" y="2920982"/>
-            <a:ext cx="8046171" cy="696950"/>
+            <a:off x="572963" y="2518244"/>
+            <a:ext cx="8046171" cy="1905165"/>
           </a:xfrm>
           <a:prstGeom prst="rect">
             <a:avLst/>
@@ -10389,7 +10782,7 @@
               <a:spcAft>
                 <a:spcPts val="300"/>
               </a:spcAft>
-              <a:defRPr sz="1803">
+              <a:defRPr sz="1800">
                 <a:solidFill>
                   <a:srgbClr val="000000"/>
                 </a:solidFill>
@@ -10399,7 +10792,7 @@
               </a:defRPr>
             </a:pPr>
             <a:r>
-              <a:rPr sz="1803">
+              <a:rPr sz="1800">
                 <a:solidFill>
                   <a:srgbClr val="000000"/>
                 </a:solidFill>
@@ -10407,7 +10800,85 @@
                 <a:ea typeface="Play"/>
                 <a:cs typeface="Play"/>
               </a:rPr>
-              <a:t>Успешный запуск позволит ускорить создание презентаций и повысить качество</a:t>
+              <a:t>• Сервис готов к масштабированию, требуется одобрение руководства</a:t>
+            </a:r>
+          </a:p>
+          <a:p>
+            <a:pPr algn="l">
+              <a:spcAft>
+                <a:spcPts val="300"/>
+              </a:spcAft>
+              <a:defRPr sz="1800">
+                <a:solidFill>
+                  <a:srgbClr val="000000"/>
+                </a:solidFill>
+                <a:latin typeface="Play"/>
+                <a:ea typeface="Play"/>
+                <a:cs typeface="Play"/>
+              </a:defRPr>
+            </a:pPr>
+            <a:r>
+              <a:rPr sz="1800">
+                <a:solidFill>
+                  <a:srgbClr val="000000"/>
+                </a:solidFill>
+                <a:latin typeface="Play"/>
+                <a:ea typeface="Play"/>
+                <a:cs typeface="Play"/>
+              </a:rPr>
+              <a:t>• Ожидается экономия времени и повышение качества презентаций</a:t>
+            </a:r>
+          </a:p>
+          <a:p>
+            <a:pPr algn="l">
+              <a:spcAft>
+                <a:spcPts val="300"/>
+              </a:spcAft>
+              <a:defRPr sz="1800">
+                <a:solidFill>
+                  <a:srgbClr val="000000"/>
+                </a:solidFill>
+                <a:latin typeface="Play"/>
+                <a:ea typeface="Play"/>
+                <a:cs typeface="Play"/>
+              </a:defRPr>
+            </a:pPr>
+            <a:r>
+              <a:rPr sz="1800">
+                <a:solidFill>
+                  <a:srgbClr val="000000"/>
+                </a:solidFill>
+                <a:latin typeface="Play"/>
+                <a:ea typeface="Play"/>
+                <a:cs typeface="Play"/>
+              </a:rPr>
+              <a:t>• Пилот подтвердил работоспособность и низкие затраты</a:t>
+            </a:r>
+          </a:p>
+          <a:p>
+            <a:pPr algn="l">
+              <a:spcAft>
+                <a:spcPts val="300"/>
+              </a:spcAft>
+              <a:defRPr sz="1800">
+                <a:solidFill>
+                  <a:srgbClr val="000000"/>
+                </a:solidFill>
+                <a:latin typeface="Play"/>
+                <a:ea typeface="Play"/>
+                <a:cs typeface="Play"/>
+              </a:defRPr>
+            </a:pPr>
+            <a:r>
+              <a:rPr sz="1800">
+                <a:solidFill>
+                  <a:srgbClr val="000000"/>
+                </a:solidFill>
+                <a:latin typeface="Play"/>
+                <a:ea typeface="Play"/>
+                <a:cs typeface="Play"/>
+              </a:rPr>
+              <a:t>• Риски минимизированы благодаря аудитам и резерву</a:t>
             </a:r>
           </a:p>
         </p:txBody>

--- a/samples/VK_Tech_шаблон__classic.pptx
+++ b/samples/VK_Tech_шаблон__classic.pptx
@@ -259,6 +259,434 @@
     </a:lvl9pPr>
   </p:defaultTextStyle>
 </p:presentation>
+</file>
+
+<file path=ppt/charts/chart1.xml><?xml version="1.0" encoding="utf-8"?>
+<c:chartSpace xmlns:c="http://schemas.openxmlformats.org/drawingml/2006/chart" xmlns:a="http://schemas.openxmlformats.org/drawingml/2006/main" xmlns:r="http://schemas.openxmlformats.org/officeDocument/2006/relationships">
+  <c:date1904 val="0"/>
+  <c:chart>
+    <c:autoTitleDeleted val="1"/>
+    <c:plotArea>
+      <c:barChart>
+        <c:barDir val="col"/>
+        <c:grouping val="clustered"/>
+        <c:ser>
+          <c:idx val="0"/>
+          <c:order val="0"/>
+          <c:tx>
+            <c:strRef>
+              <c:f>Sheet1!$B$1</c:f>
+              <c:strCache>
+                <c:ptCount val="1"/>
+                <c:pt idx="0">
+                  <c:v>Время, мин</c:v>
+                </c:pt>
+              </c:strCache>
+            </c:strRef>
+          </c:tx>
+          <c:spPr>
+            <a:solidFill>
+              <a:srgbClr val="0077FF"/>
+            </a:solidFill>
+            <a:ln>
+              <a:solidFill>
+                <a:srgbClr val="0077FF"/>
+              </a:solidFill>
+            </a:ln>
+          </c:spPr>
+          <c:cat>
+            <c:strRef>
+              <c:f>Sheet1!$A$2:$A$3</c:f>
+              <c:strCache>
+                <c:ptCount val="2"/>
+                <c:pt idx="0">
+                  <c:v>До</c:v>
+                </c:pt>
+                <c:pt idx="1">
+                  <c:v>После</c:v>
+                </c:pt>
+              </c:strCache>
+            </c:strRef>
+          </c:cat>
+          <c:val>
+            <c:numRef>
+              <c:f>Sheet1!$B$2:$B$3</c:f>
+              <c:numCache>
+                <c:formatCode>General</c:formatCode>
+                <c:ptCount val="2"/>
+                <c:pt idx="0">
+                  <c:v>186.0</c:v>
+                </c:pt>
+                <c:pt idx="1">
+                  <c:v>4.0</c:v>
+                </c:pt>
+              </c:numCache>
+            </c:numRef>
+          </c:val>
+        </c:ser>
+        <c:dLbls>
+          <c:numFmt formatCode="0&quot; мин&quot;" sourceLinked="0"/>
+          <c:txPr>
+            <a:bodyPr wrap="none"/>
+            <a:lstStyle/>
+            <a:p>
+              <a:pPr>
+                <a:defRPr sz="1100" b="0">
+                  <a:solidFill>
+                    <a:srgbClr val="000000"/>
+                  </a:solidFill>
+                  <a:latin typeface="Play"/>
+                  <a:ea typeface="Play"/>
+                  <a:cs typeface="Play"/>
+                </a:defRPr>
+              </a:pPr>
+            </a:p>
+          </c:txPr>
+          <c:dLblPos val="outEnd"/>
+          <c:showLegendKey val="0"/>
+          <c:showVal val="1"/>
+          <c:showCatName val="0"/>
+          <c:showSerName val="0"/>
+          <c:showPercent val="0"/>
+          <c:showBubbleSize val="0"/>
+          <c:showLeaderLines val="1"/>
+        </c:dLbls>
+        <c:gapWidth val="60"/>
+        <c:axId val="-2068027336"/>
+        <c:axId val="-2113994440"/>
+      </c:barChart>
+      <c:catAx>
+        <c:axId val="-2068027336"/>
+        <c:scaling>
+          <c:orientation val="minMax"/>
+        </c:scaling>
+        <c:delete val="0"/>
+        <c:axPos val="b"/>
+        <c:majorTickMark val="out"/>
+        <c:minorTickMark val="none"/>
+        <c:tickLblPos val="nextTo"/>
+        <c:txPr>
+          <a:bodyPr/>
+          <a:lstStyle/>
+          <a:p>
+            <a:pPr>
+              <a:defRPr sz="1100" b="0">
+                <a:solidFill>
+                  <a:srgbClr val="000000"/>
+                </a:solidFill>
+                <a:latin typeface="Play"/>
+                <a:ea typeface="Play"/>
+                <a:cs typeface="Play"/>
+              </a:defRPr>
+            </a:pPr>
+          </a:p>
+        </c:txPr>
+        <c:crossAx val="-2113994440"/>
+        <c:crosses val="autoZero"/>
+        <c:auto val="1"/>
+        <c:lblAlgn val="ctr"/>
+        <c:lblOffset val="100"/>
+        <c:noMultiLvlLbl val="0"/>
+      </c:catAx>
+      <c:valAx>
+        <c:axId val="-2113994440"/>
+        <c:scaling/>
+        <c:delete val="0"/>
+        <c:axPos val="l"/>
+        <c:majorGridlines>
+          <c:spPr>
+            <a:ln w="9525">
+              <a:solidFill>
+                <a:srgbClr val="D1D1D1"/>
+              </a:solidFill>
+            </a:ln>
+          </c:spPr>
+        </c:majorGridlines>
+        <c:title>
+          <c:tx>
+            <c:rich>
+              <a:bodyPr rot="0" vert="horz"/>
+              <a:lstStyle/>
+              <a:p>
+                <a:pPr>
+                  <a:defRPr sz="1100" b="0">
+                    <a:solidFill>
+                      <a:srgbClr val="000000"/>
+                    </a:solidFill>
+                    <a:latin typeface="Play"/>
+                    <a:ea typeface="Play"/>
+                    <a:cs typeface="Play"/>
+                  </a:defRPr>
+                </a:pPr>
+                <a:r>
+                  <a:t>Время, мин, мин</a:t>
+                </a:r>
+              </a:p>
+            </c:rich>
+          </c:tx>
+          <c:layout/>
+          <c:overlay val="0"/>
+        </c:title>
+        <c:majorTickMark val="out"/>
+        <c:minorTickMark val="none"/>
+        <c:tickLblPos val="nextTo"/>
+        <c:txPr>
+          <a:bodyPr/>
+          <a:lstStyle/>
+          <a:p>
+            <a:pPr>
+              <a:defRPr sz="1100" b="0">
+                <a:solidFill>
+                  <a:srgbClr val="000000"/>
+                </a:solidFill>
+                <a:latin typeface="Play"/>
+                <a:ea typeface="Play"/>
+                <a:cs typeface="Play"/>
+              </a:defRPr>
+            </a:pPr>
+          </a:p>
+        </c:txPr>
+        <c:crossAx val="-2068027336"/>
+        <c:crosses val="autoZero"/>
+      </c:valAx>
+    </c:plotArea>
+    <c:dispBlanksAs val="gap"/>
+  </c:chart>
+  <c:txPr>
+    <a:bodyPr/>
+    <a:lstStyle/>
+    <a:p>
+      <a:pPr>
+        <a:defRPr sz="1200" b="0">
+          <a:solidFill>
+            <a:srgbClr val="000000"/>
+          </a:solidFill>
+          <a:latin typeface="Play"/>
+          <a:ea typeface="Play"/>
+          <a:cs typeface="Play"/>
+        </a:defRPr>
+      </a:pPr>
+      <a:endParaRPr lang="en-US"/>
+    </a:p>
+  </c:txPr>
+  <c:externalData r:id="rId1">
+    <c:autoUpdate val="0"/>
+  </c:externalData>
+</c:chartSpace>
+</file>
+
+<file path=ppt/charts/chart2.xml><?xml version="1.0" encoding="utf-8"?>
+<c:chartSpace xmlns:c="http://schemas.openxmlformats.org/drawingml/2006/chart" xmlns:a="http://schemas.openxmlformats.org/drawingml/2006/main" xmlns:r="http://schemas.openxmlformats.org/officeDocument/2006/relationships">
+  <c:date1904 val="0"/>
+  <c:chart>
+    <c:autoTitleDeleted val="1"/>
+    <c:plotArea>
+      <c:barChart>
+        <c:barDir val="col"/>
+        <c:grouping val="clustered"/>
+        <c:ser>
+          <c:idx val="0"/>
+          <c:order val="0"/>
+          <c:tx>
+            <c:strRef>
+              <c:f>Sheet1!$B$1</c:f>
+              <c:strCache>
+                <c:ptCount val="1"/>
+                <c:pt idx="0">
+                  <c:v>Нарушения</c:v>
+                </c:pt>
+              </c:strCache>
+            </c:strRef>
+          </c:tx>
+          <c:spPr>
+            <a:solidFill>
+              <a:srgbClr val="0077FF"/>
+            </a:solidFill>
+            <a:ln>
+              <a:solidFill>
+                <a:srgbClr val="0077FF"/>
+              </a:solidFill>
+            </a:ln>
+          </c:spPr>
+          <c:cat>
+            <c:strRef>
+              <c:f>Sheet1!$A$2:$A$3</c:f>
+              <c:strCache>
+                <c:ptCount val="2"/>
+                <c:pt idx="0">
+                  <c:v>До</c:v>
+                </c:pt>
+                <c:pt idx="1">
+                  <c:v>После</c:v>
+                </c:pt>
+              </c:strCache>
+            </c:strRef>
+          </c:cat>
+          <c:val>
+            <c:numRef>
+              <c:f>Sheet1!$B$2:$B$3</c:f>
+              <c:numCache>
+                <c:formatCode>General</c:formatCode>
+                <c:ptCount val="2"/>
+                <c:pt idx="0">
+                  <c:v>19.0</c:v>
+                </c:pt>
+                <c:pt idx="1">
+                  <c:v>2.0</c:v>
+                </c:pt>
+              </c:numCache>
+            </c:numRef>
+          </c:val>
+        </c:ser>
+        <c:dLbls>
+          <c:numFmt formatCode="0&quot; кол-во&quot;" sourceLinked="0"/>
+          <c:txPr>
+            <a:bodyPr wrap="none"/>
+            <a:lstStyle/>
+            <a:p>
+              <a:pPr>
+                <a:defRPr sz="1100" b="0">
+                  <a:solidFill>
+                    <a:srgbClr val="000000"/>
+                  </a:solidFill>
+                  <a:latin typeface="Play"/>
+                  <a:ea typeface="Play"/>
+                  <a:cs typeface="Play"/>
+                </a:defRPr>
+              </a:pPr>
+            </a:p>
+          </c:txPr>
+          <c:dLblPos val="outEnd"/>
+          <c:showLegendKey val="0"/>
+          <c:showVal val="1"/>
+          <c:showCatName val="0"/>
+          <c:showSerName val="0"/>
+          <c:showPercent val="0"/>
+          <c:showBubbleSize val="0"/>
+          <c:showLeaderLines val="1"/>
+        </c:dLbls>
+        <c:gapWidth val="60"/>
+        <c:axId val="-2068027336"/>
+        <c:axId val="-2113994440"/>
+      </c:barChart>
+      <c:catAx>
+        <c:axId val="-2068027336"/>
+        <c:scaling>
+          <c:orientation val="minMax"/>
+        </c:scaling>
+        <c:delete val="0"/>
+        <c:axPos val="b"/>
+        <c:majorTickMark val="out"/>
+        <c:minorTickMark val="none"/>
+        <c:tickLblPos val="nextTo"/>
+        <c:txPr>
+          <a:bodyPr/>
+          <a:lstStyle/>
+          <a:p>
+            <a:pPr>
+              <a:defRPr sz="1100" b="0">
+                <a:solidFill>
+                  <a:srgbClr val="000000"/>
+                </a:solidFill>
+                <a:latin typeface="Play"/>
+                <a:ea typeface="Play"/>
+                <a:cs typeface="Play"/>
+              </a:defRPr>
+            </a:pPr>
+          </a:p>
+        </c:txPr>
+        <c:crossAx val="-2113994440"/>
+        <c:crosses val="autoZero"/>
+        <c:auto val="1"/>
+        <c:lblAlgn val="ctr"/>
+        <c:lblOffset val="100"/>
+        <c:noMultiLvlLbl val="0"/>
+      </c:catAx>
+      <c:valAx>
+        <c:axId val="-2113994440"/>
+        <c:scaling/>
+        <c:delete val="0"/>
+        <c:axPos val="l"/>
+        <c:majorGridlines>
+          <c:spPr>
+            <a:ln w="9525">
+              <a:solidFill>
+                <a:srgbClr val="D1D1D1"/>
+              </a:solidFill>
+            </a:ln>
+          </c:spPr>
+        </c:majorGridlines>
+        <c:title>
+          <c:tx>
+            <c:rich>
+              <a:bodyPr rot="0" vert="horz"/>
+              <a:lstStyle/>
+              <a:p>
+                <a:pPr>
+                  <a:defRPr sz="1100" b="0">
+                    <a:solidFill>
+                      <a:srgbClr val="000000"/>
+                    </a:solidFill>
+                    <a:latin typeface="Play"/>
+                    <a:ea typeface="Play"/>
+                    <a:cs typeface="Play"/>
+                  </a:defRPr>
+                </a:pPr>
+                <a:r>
+                  <a:t>Нарушения, кол-во</a:t>
+                </a:r>
+              </a:p>
+            </c:rich>
+          </c:tx>
+          <c:layout/>
+          <c:overlay val="0"/>
+        </c:title>
+        <c:majorTickMark val="out"/>
+        <c:minorTickMark val="none"/>
+        <c:tickLblPos val="nextTo"/>
+        <c:txPr>
+          <a:bodyPr/>
+          <a:lstStyle/>
+          <a:p>
+            <a:pPr>
+              <a:defRPr sz="1100" b="0">
+                <a:solidFill>
+                  <a:srgbClr val="000000"/>
+                </a:solidFill>
+                <a:latin typeface="Play"/>
+                <a:ea typeface="Play"/>
+                <a:cs typeface="Play"/>
+              </a:defRPr>
+            </a:pPr>
+          </a:p>
+        </c:txPr>
+        <c:crossAx val="-2068027336"/>
+        <c:crosses val="autoZero"/>
+      </c:valAx>
+    </c:plotArea>
+    <c:dispBlanksAs val="gap"/>
+  </c:chart>
+  <c:txPr>
+    <a:bodyPr/>
+    <a:lstStyle/>
+    <a:p>
+      <a:pPr>
+        <a:defRPr sz="1200" b="0">
+          <a:solidFill>
+            <a:srgbClr val="000000"/>
+          </a:solidFill>
+          <a:latin typeface="Play"/>
+          <a:ea typeface="Play"/>
+          <a:cs typeface="Play"/>
+        </a:defRPr>
+      </a:pPr>
+      <a:endParaRPr lang="en-US"/>
+    </a:p>
+  </c:txPr>
+  <c:externalData r:id="rId1">
+    <c:autoUpdate val="0"/>
+  </c:externalData>
+</c:chartSpace>
 </file>
 
 <file path=ppt/notesMasters/notesMaster1.xml><?xml version="1.0" encoding="utf-8"?>
@@ -5369,19 +5797,23 @@
       <p:grpSpPr/>
       <p:sp>
         <p:nvSpPr>
-          <p:cNvPr id="662" name="Google Shape;662;p55"/>
+          <p:cNvPr id="1027" name="Google Shape;1027;p65"/>
           <p:cNvSpPr/>
           <p:nvPr/>
         </p:nvSpPr>
         <p:spPr>
           <a:xfrm>
-            <a:off x="8667705" y="4666977"/>
-            <a:ext cx="190499" cy="190475"/>
-          </a:xfrm>
-          <a:prstGeom prst="rect">
-            <a:avLst/>
-          </a:prstGeom>
-          <a:noFill/>
+            <a:off x="6064222" y="1209852"/>
+            <a:ext cx="2793985" cy="3014270"/>
+          </a:xfrm>
+          <a:prstGeom prst="roundRect">
+            <a:avLst>
+              <a:gd fmla="val 3436" name="adj"/>
+            </a:avLst>
+          </a:prstGeom>
+          <a:solidFill>
+            <a:schemeClr val="lt2"/>
+          </a:solidFill>
           <a:ln>
             <a:noFill/>
           </a:ln>
@@ -5408,21 +5840,52 @@
           </a:p>
         </p:txBody>
       </p:sp>
-      <p:sp>
-        <p:nvSpPr>
-          <p:cNvPr id="663" name="Google Shape;663;p55"/>
-          <p:cNvSpPr/>
-          <p:nvPr/>
-        </p:nvSpPr>
-        <p:spPr>
-          <a:xfrm>
-            <a:off x="285748" y="286047"/>
-            <a:ext cx="8572456" cy="3938075"/>
+      <p:pic>
+        <p:nvPicPr>
+          <p:cNvPr descr=" " id="1028" name="Google Shape;1028;p65"/>
+          <p:cNvPicPr preferRelativeResize="0"/>
+          <p:nvPr/>
+        </p:nvPicPr>
+        <p:blipFill rotWithShape="1">
+          <a:blip r:embed="rId2">
+            <a:alphaModFix/>
+          </a:blip>
+          <a:srcRect b="0" l="0" r="0" t="0"/>
+          <a:stretch/>
+        </p:blipFill>
+        <p:spPr>
+          <a:xfrm>
+            <a:off x="8203313" y="3566983"/>
+            <a:ext cx="466723" cy="466664"/>
           </a:xfrm>
           <a:prstGeom prst="rect">
             <a:avLst/>
           </a:prstGeom>
           <a:noFill/>
+          <a:ln>
+            <a:noFill/>
+          </a:ln>
+        </p:spPr>
+      </p:pic>
+      <p:sp>
+        <p:nvSpPr>
+          <p:cNvPr id="1029" name="Google Shape;1029;p65"/>
+          <p:cNvSpPr/>
+          <p:nvPr/>
+        </p:nvSpPr>
+        <p:spPr>
+          <a:xfrm>
+            <a:off x="3174981" y="1209852"/>
+            <a:ext cx="2793985" cy="3014270"/>
+          </a:xfrm>
+          <a:prstGeom prst="roundRect">
+            <a:avLst>
+              <a:gd fmla="val 3436" name="adj"/>
+            </a:avLst>
+          </a:prstGeom>
+          <a:solidFill>
+            <a:schemeClr val="lt2"/>
+          </a:solidFill>
           <a:ln>
             <a:noFill/>
           </a:ln>
@@ -5449,21 +5912,52 @@
           </a:p>
         </p:txBody>
       </p:sp>
-      <p:sp>
-        <p:nvSpPr>
-          <p:cNvPr id="664" name="Google Shape;664;p55"/>
-          <p:cNvSpPr/>
-          <p:nvPr/>
-        </p:nvSpPr>
-        <p:spPr>
-          <a:xfrm>
-            <a:off x="285748" y="1209852"/>
-            <a:ext cx="8572456" cy="3014270"/>
+      <p:pic>
+        <p:nvPicPr>
+          <p:cNvPr descr=" " id="1030" name="Google Shape;1030;p65"/>
+          <p:cNvPicPr preferRelativeResize="0"/>
+          <p:nvPr/>
+        </p:nvPicPr>
+        <p:blipFill rotWithShape="1">
+          <a:blip r:embed="rId2">
+            <a:alphaModFix/>
+          </a:blip>
+          <a:srcRect b="0" l="0" r="0" t="0"/>
+          <a:stretch/>
+        </p:blipFill>
+        <p:spPr>
+          <a:xfrm>
+            <a:off x="5310249" y="3566983"/>
+            <a:ext cx="466723" cy="466664"/>
           </a:xfrm>
           <a:prstGeom prst="rect">
             <a:avLst/>
           </a:prstGeom>
           <a:noFill/>
+          <a:ln>
+            <a:noFill/>
+          </a:ln>
+        </p:spPr>
+      </p:pic>
+      <p:sp>
+        <p:nvSpPr>
+          <p:cNvPr id="1031" name="Google Shape;1031;p65"/>
+          <p:cNvSpPr/>
+          <p:nvPr/>
+        </p:nvSpPr>
+        <p:spPr>
+          <a:xfrm>
+            <a:off x="285749" y="1209852"/>
+            <a:ext cx="2793985" cy="3014270"/>
+          </a:xfrm>
+          <a:prstGeom prst="roundRect">
+            <a:avLst>
+              <a:gd fmla="val 3436" name="adj"/>
+            </a:avLst>
+          </a:prstGeom>
+          <a:solidFill>
+            <a:schemeClr val="lt2"/>
+          </a:solidFill>
           <a:ln>
             <a:noFill/>
           </a:ln>
@@ -5492,23 +5986,19 @@
       </p:sp>
       <p:sp>
         <p:nvSpPr>
-          <p:cNvPr id="665" name="Google Shape;665;p55"/>
+          <p:cNvPr id="1032" name="Google Shape;1032;p65"/>
           <p:cNvSpPr/>
           <p:nvPr/>
         </p:nvSpPr>
         <p:spPr>
           <a:xfrm>
-            <a:off x="285749" y="1209852"/>
-            <a:ext cx="2071677" cy="3014270"/>
-          </a:xfrm>
-          <a:prstGeom prst="roundRect">
-            <a:avLst>
-              <a:gd fmla="val 4634" name="adj"/>
-            </a:avLst>
-          </a:prstGeom>
-          <a:solidFill>
-            <a:schemeClr val="lt2"/>
-          </a:solidFill>
+            <a:off x="285748" y="286047"/>
+            <a:ext cx="8572456" cy="3938075"/>
+          </a:xfrm>
+          <a:prstGeom prst="rect">
+            <a:avLst/>
+          </a:prstGeom>
+          <a:noFill/>
           <a:ln>
             <a:noFill/>
           </a:ln>
@@ -5537,14 +6027,14 @@
       </p:sp>
       <p:sp>
         <p:nvSpPr>
-          <p:cNvPr id="666" name="Google Shape;666;p55"/>
+          <p:cNvPr id="1033" name="Google Shape;1033;p65"/>
           <p:cNvSpPr/>
           <p:nvPr/>
         </p:nvSpPr>
         <p:spPr>
           <a:xfrm>
-            <a:off x="438148" y="1362233"/>
-            <a:ext cx="1766878" cy="342855"/>
+            <a:off x="285748" y="1209852"/>
+            <a:ext cx="8572456" cy="3014270"/>
           </a:xfrm>
           <a:prstGeom prst="rect">
             <a:avLst/>
@@ -5578,23 +6068,19 @@
       </p:sp>
       <p:sp>
         <p:nvSpPr>
-          <p:cNvPr id="667" name="Google Shape;667;p55"/>
+          <p:cNvPr id="1034" name="Google Shape;1034;p65"/>
           <p:cNvSpPr/>
           <p:nvPr/>
         </p:nvSpPr>
         <p:spPr>
           <a:xfrm>
-            <a:off x="438148" y="1362233"/>
-            <a:ext cx="76199" cy="76190"/>
-          </a:xfrm>
-          <a:prstGeom prst="roundRect">
-            <a:avLst>
-              <a:gd fmla="val 31500" name="adj"/>
-            </a:avLst>
-          </a:prstGeom>
-          <a:solidFill>
-            <a:srgbClr val="0077FF"/>
-          </a:solidFill>
+            <a:off x="476248" y="1400327"/>
+            <a:ext cx="2412987" cy="1009519"/>
+          </a:xfrm>
+          <a:prstGeom prst="rect">
+            <a:avLst/>
+          </a:prstGeom>
+          <a:noFill/>
           <a:ln>
             <a:noFill/>
           </a:ln>
@@ -5623,22 +6109,22 @@
       </p:sp>
       <p:sp>
         <p:nvSpPr>
-          <p:cNvPr id="670" name="Google Shape;670;p55"/>
+          <p:cNvPr id="1035" name="Google Shape;1035;p65"/>
           <p:cNvSpPr/>
           <p:nvPr/>
         </p:nvSpPr>
         <p:spPr>
           <a:xfrm>
-            <a:off x="2452675" y="1209852"/>
-            <a:ext cx="2071677" cy="3014270"/>
+            <a:off x="476248" y="1400328"/>
+            <a:ext cx="76199" cy="76190"/>
           </a:xfrm>
           <a:prstGeom prst="roundRect">
             <a:avLst>
-              <a:gd fmla="val 4634" name="adj"/>
+              <a:gd fmla="val 31500" name="adj"/>
             </a:avLst>
           </a:prstGeom>
           <a:solidFill>
-            <a:schemeClr val="lt2"/>
+            <a:srgbClr val="0077FF"/>
           </a:solidFill>
           <a:ln>
             <a:noFill/>
@@ -5668,14 +6154,14 @@
       </p:sp>
       <p:sp>
         <p:nvSpPr>
-          <p:cNvPr id="671" name="Google Shape;671;p55"/>
+          <p:cNvPr id="1037" name="Google Shape;1037;p65"/>
           <p:cNvSpPr/>
           <p:nvPr/>
         </p:nvSpPr>
         <p:spPr>
           <a:xfrm>
-            <a:off x="2605074" y="1362233"/>
-            <a:ext cx="1766878" cy="342855"/>
+            <a:off x="2422509" y="3566983"/>
+            <a:ext cx="466723" cy="466664"/>
           </a:xfrm>
           <a:prstGeom prst="rect">
             <a:avLst/>
@@ -5707,25 +6193,75 @@
           </a:p>
         </p:txBody>
       </p:sp>
-      <p:sp>
-        <p:nvSpPr>
-          <p:cNvPr id="672" name="Google Shape;672;p55"/>
+      <p:pic>
+        <p:nvPicPr>
+          <p:cNvPr descr=" " id="1038" name="Google Shape;1038;p65"/>
+          <p:cNvPicPr preferRelativeResize="0"/>
+          <p:nvPr/>
+        </p:nvPicPr>
+        <p:blipFill rotWithShape="1">
+          <a:blip r:embed="rId2">
+            <a:alphaModFix/>
+          </a:blip>
+          <a:srcRect b="0" l="0" r="0" t="0"/>
+          <a:stretch/>
+        </p:blipFill>
+        <p:spPr>
+          <a:xfrm>
+            <a:off x="2422506" y="3566983"/>
+            <a:ext cx="466723" cy="466664"/>
+          </a:xfrm>
+          <a:prstGeom prst="rect">
+            <a:avLst/>
+          </a:prstGeom>
+          <a:noFill/>
+          <a:ln>
+            <a:noFill/>
+          </a:ln>
+        </p:spPr>
+      </p:pic>
+      <p:pic>
+        <p:nvPicPr>
+          <p:cNvPr descr=" " id="1039" name="Google Shape;1039;p65"/>
+          <p:cNvPicPr preferRelativeResize="0"/>
+          <p:nvPr/>
+        </p:nvPicPr>
+        <p:blipFill rotWithShape="1">
+          <a:blip r:embed="rId3">
+            <a:alphaModFix/>
+          </a:blip>
+          <a:srcRect b="0" l="0" r="0" t="0"/>
+          <a:stretch/>
+        </p:blipFill>
+        <p:spPr>
+          <a:xfrm>
+            <a:off x="2555859" y="3700316"/>
+            <a:ext cx="200024" cy="199999"/>
+          </a:xfrm>
+          <a:prstGeom prst="rect">
+            <a:avLst/>
+          </a:prstGeom>
+          <a:noFill/>
+          <a:ln>
+            <a:noFill/>
+          </a:ln>
+        </p:spPr>
+      </p:pic>
+      <p:sp>
+        <p:nvSpPr>
+          <p:cNvPr id="1040" name="Google Shape;1040;p65"/>
           <p:cNvSpPr/>
           <p:nvPr/>
         </p:nvSpPr>
         <p:spPr>
           <a:xfrm>
-            <a:off x="2605074" y="1362233"/>
-            <a:ext cx="76199" cy="76190"/>
-          </a:xfrm>
-          <a:prstGeom prst="roundRect">
-            <a:avLst>
-              <a:gd fmla="val 31500" name="adj"/>
-            </a:avLst>
-          </a:prstGeom>
-          <a:solidFill>
-            <a:srgbClr val="0077FF"/>
-          </a:solidFill>
+            <a:off x="3365480" y="1400327"/>
+            <a:ext cx="2412987" cy="1009519"/>
+          </a:xfrm>
+          <a:prstGeom prst="rect">
+            <a:avLst/>
+          </a:prstGeom>
+          <a:noFill/>
           <a:ln>
             <a:noFill/>
           </a:ln>
@@ -5754,22 +6290,22 @@
       </p:sp>
       <p:sp>
         <p:nvSpPr>
-          <p:cNvPr id="675" name="Google Shape;675;p55"/>
+          <p:cNvPr id="1041" name="Google Shape;1041;p65"/>
           <p:cNvSpPr/>
           <p:nvPr/>
         </p:nvSpPr>
         <p:spPr>
           <a:xfrm>
-            <a:off x="4619601" y="1209852"/>
-            <a:ext cx="2071677" cy="3014270"/>
+            <a:off x="3365480" y="1400328"/>
+            <a:ext cx="76199" cy="76190"/>
           </a:xfrm>
           <a:prstGeom prst="roundRect">
             <a:avLst>
-              <a:gd fmla="val 4634" name="adj"/>
+              <a:gd fmla="val 31500" name="adj"/>
             </a:avLst>
           </a:prstGeom>
           <a:solidFill>
-            <a:schemeClr val="lt2"/>
+            <a:srgbClr val="0077FF"/>
           </a:solidFill>
           <a:ln>
             <a:noFill/>
@@ -5799,14 +6335,14 @@
       </p:sp>
       <p:sp>
         <p:nvSpPr>
-          <p:cNvPr id="676" name="Google Shape;676;p55"/>
+          <p:cNvPr id="1043" name="Google Shape;1043;p65"/>
           <p:cNvSpPr/>
           <p:nvPr/>
         </p:nvSpPr>
         <p:spPr>
           <a:xfrm>
-            <a:off x="4772001" y="1362233"/>
-            <a:ext cx="1766878" cy="342855"/>
+            <a:off x="5311741" y="3566983"/>
+            <a:ext cx="466723" cy="466664"/>
           </a:xfrm>
           <a:prstGeom prst="rect">
             <a:avLst/>
@@ -5838,25 +6374,48 @@
           </a:p>
         </p:txBody>
       </p:sp>
-      <p:sp>
-        <p:nvSpPr>
-          <p:cNvPr id="677" name="Google Shape;677;p55"/>
+      <p:pic>
+        <p:nvPicPr>
+          <p:cNvPr descr=" " id="1044" name="Google Shape;1044;p65"/>
+          <p:cNvPicPr preferRelativeResize="0"/>
+          <p:nvPr/>
+        </p:nvPicPr>
+        <p:blipFill rotWithShape="1">
+          <a:blip r:embed="rId3">
+            <a:alphaModFix/>
+          </a:blip>
+          <a:srcRect b="0" l="0" r="0" t="0"/>
+          <a:stretch/>
+        </p:blipFill>
+        <p:spPr>
+          <a:xfrm>
+            <a:off x="5445091" y="3700316"/>
+            <a:ext cx="200024" cy="199999"/>
+          </a:xfrm>
+          <a:prstGeom prst="rect">
+            <a:avLst/>
+          </a:prstGeom>
+          <a:noFill/>
+          <a:ln>
+            <a:noFill/>
+          </a:ln>
+        </p:spPr>
+      </p:pic>
+      <p:sp>
+        <p:nvSpPr>
+          <p:cNvPr id="1045" name="Google Shape;1045;p65"/>
           <p:cNvSpPr/>
           <p:nvPr/>
         </p:nvSpPr>
         <p:spPr>
           <a:xfrm>
-            <a:off x="4772001" y="1362233"/>
-            <a:ext cx="76199" cy="76190"/>
-          </a:xfrm>
-          <a:prstGeom prst="roundRect">
-            <a:avLst>
-              <a:gd fmla="val 31500" name="adj"/>
-            </a:avLst>
-          </a:prstGeom>
-          <a:solidFill>
-            <a:srgbClr val="0077FF"/>
-          </a:solidFill>
+            <a:off x="6254721" y="1400327"/>
+            <a:ext cx="2412987" cy="1009519"/>
+          </a:xfrm>
+          <a:prstGeom prst="rect">
+            <a:avLst/>
+          </a:prstGeom>
+          <a:noFill/>
           <a:ln>
             <a:noFill/>
           </a:ln>
@@ -5885,22 +6444,22 @@
       </p:sp>
       <p:sp>
         <p:nvSpPr>
-          <p:cNvPr id="680" name="Google Shape;680;p55"/>
+          <p:cNvPr id="1046" name="Google Shape;1046;p65"/>
           <p:cNvSpPr/>
           <p:nvPr/>
         </p:nvSpPr>
         <p:spPr>
           <a:xfrm>
-            <a:off x="6786527" y="1209852"/>
-            <a:ext cx="2071677" cy="3014270"/>
+            <a:off x="6254721" y="1400328"/>
+            <a:ext cx="76199" cy="76190"/>
           </a:xfrm>
           <a:prstGeom prst="roundRect">
             <a:avLst>
-              <a:gd fmla="val 4634" name="adj"/>
+              <a:gd fmla="val 31500" name="adj"/>
             </a:avLst>
           </a:prstGeom>
           <a:solidFill>
-            <a:schemeClr val="lt2"/>
+            <a:srgbClr val="0077FF"/>
           </a:solidFill>
           <a:ln>
             <a:noFill/>
@@ -5930,14 +6489,14 @@
       </p:sp>
       <p:sp>
         <p:nvSpPr>
-          <p:cNvPr id="681" name="Google Shape;681;p55"/>
+          <p:cNvPr id="1048" name="Google Shape;1048;p65"/>
           <p:cNvSpPr/>
           <p:nvPr/>
         </p:nvSpPr>
         <p:spPr>
           <a:xfrm>
-            <a:off x="6938927" y="1362233"/>
-            <a:ext cx="1766878" cy="342855"/>
+            <a:off x="8200982" y="3566983"/>
+            <a:ext cx="466723" cy="466664"/>
           </a:xfrm>
           <a:prstGeom prst="rect">
             <a:avLst/>
@@ -5969,54 +6528,36 @@
           </a:p>
         </p:txBody>
       </p:sp>
-      <p:sp>
-        <p:nvSpPr>
-          <p:cNvPr id="682" name="Google Shape;682;p55"/>
-          <p:cNvSpPr/>
-          <p:nvPr/>
-        </p:nvSpPr>
-        <p:spPr>
-          <a:xfrm>
-            <a:off x="6938927" y="1362233"/>
-            <a:ext cx="76199" cy="76190"/>
-          </a:xfrm>
-          <a:prstGeom prst="roundRect">
-            <a:avLst>
-              <a:gd fmla="val 31500" name="adj"/>
-            </a:avLst>
-          </a:prstGeom>
-          <a:solidFill>
-            <a:srgbClr val="0077FF"/>
-          </a:solidFill>
+      <p:pic>
+        <p:nvPicPr>
+          <p:cNvPr descr=" " id="1049" name="Google Shape;1049;p65"/>
+          <p:cNvPicPr preferRelativeResize="0"/>
+          <p:nvPr/>
+        </p:nvPicPr>
+        <p:blipFill rotWithShape="1">
+          <a:blip r:embed="rId3">
+            <a:alphaModFix/>
+          </a:blip>
+          <a:srcRect b="0" l="0" r="0" t="0"/>
+          <a:stretch/>
+        </p:blipFill>
+        <p:spPr>
+          <a:xfrm>
+            <a:off x="8334332" y="3700316"/>
+            <a:ext cx="200024" cy="199999"/>
+          </a:xfrm>
+          <a:prstGeom prst="rect">
+            <a:avLst/>
+          </a:prstGeom>
+          <a:noFill/>
           <a:ln>
             <a:noFill/>
           </a:ln>
         </p:spPr>
-        <p:txBody>
-          <a:bodyPr anchorCtr="0" anchor="ctr" bIns="91425" lIns="91425" spcFirstLastPara="1" rIns="91425" wrap="square" tIns="91425">
-            <a:noAutofit/>
-          </a:bodyPr>
-          <a:lstStyle/>
-          <a:p>
-            <a:pPr indent="0" lvl="0" marL="0" rtl="0" algn="l">
-              <a:spcBef>
-                <a:spcPts val="0"/>
-              </a:spcBef>
-              <a:spcAft>
-                <a:spcPts val="0"/>
-              </a:spcAft>
-              <a:buNone/>
-            </a:pPr>
-            <a:r>
-              <a:t/>
-            </a:r>
-            <a:endParaRPr/>
-          </a:p>
-        </p:txBody>
-      </p:sp>
-      <p:sp>
-        <p:nvSpPr>
-          <p:cNvPr id="683" name="title"/>
+      </p:pic>
+      <p:sp>
+        <p:nvSpPr>
+          <p:cNvPr id="1050" name="title"/>
           <p:cNvSpPr txBox="1"/>
           <p:nvPr/>
         </p:nvSpPr>
@@ -6058,21 +6599,21 @@
                 <a:ea typeface="Play"/>
                 <a:cs typeface="Play"/>
               </a:rPr>
-              <a:t>Контекст и возможность</a:t>
+              <a:t>Сейчас: 42 колоды, 186 мин сборки</a:t>
             </a:r>
           </a:p>
         </p:txBody>
       </p:sp>
       <p:sp>
         <p:nvSpPr>
-          <p:cNvPr id="684" name="card_0"/>
+          <p:cNvPr id="1051" name="card_0"/>
           <p:cNvSpPr txBox="1"/>
           <p:nvPr/>
         </p:nvSpPr>
         <p:spPr>
           <a:xfrm>
-            <a:off x="582575" y="1963753"/>
-            <a:ext cx="1516144" cy="2001662"/>
+            <a:off x="576030" y="1728705"/>
+            <a:ext cx="2264138" cy="632134"/>
           </a:xfrm>
           <a:prstGeom prst="rect">
             <a:avLst/>
@@ -6089,7 +6630,7 @@
               <a:spcAft>
                 <a:spcPts val="300"/>
               </a:spcAft>
-              <a:defRPr sz="1800" b="0">
+              <a:defRPr sz="1400" b="0">
                 <a:solidFill>
                   <a:srgbClr val="000000"/>
                 </a:solidFill>
@@ -6099,7 +6640,7 @@
               </a:defRPr>
             </a:pPr>
             <a:r>
-              <a:rPr sz="1800" b="0">
+              <a:rPr sz="1400" b="0">
                 <a:solidFill>
                   <a:srgbClr val="000000"/>
                 </a:solidFill>
@@ -6107,21 +6648,21 @@
                 <a:ea typeface="Play"/>
                 <a:cs typeface="Play"/>
               </a:rPr>
-              <a:t>Сборка одной презентации 12 слайдов занимает 186 минут</a:t>
+              <a:t>42 колоды, 186 мин сборки одной презентации</a:t>
             </a:r>
           </a:p>
         </p:txBody>
       </p:sp>
       <p:sp>
         <p:nvSpPr>
-          <p:cNvPr id="685" name="card_1"/>
+          <p:cNvPr id="1052" name="card_1"/>
           <p:cNvSpPr txBox="1"/>
           <p:nvPr/>
         </p:nvSpPr>
         <p:spPr>
           <a:xfrm>
-            <a:off x="2749428" y="1963753"/>
-            <a:ext cx="1516144" cy="2001662"/>
+            <a:off x="3465259" y="1728705"/>
+            <a:ext cx="2264138" cy="632134"/>
           </a:xfrm>
           <a:prstGeom prst="rect">
             <a:avLst/>
@@ -6138,7 +6679,7 @@
               <a:spcAft>
                 <a:spcPts val="300"/>
               </a:spcAft>
-              <a:defRPr sz="1800" b="0">
+              <a:defRPr sz="1600" b="0">
                 <a:solidFill>
                   <a:srgbClr val="000000"/>
                 </a:solidFill>
@@ -6148,7 +6689,7 @@
               </a:defRPr>
             </a:pPr>
             <a:r>
-              <a:rPr sz="1800" b="0">
+              <a:rPr sz="1600" b="0">
                 <a:solidFill>
                   <a:srgbClr val="000000"/>
                 </a:solidFill>
@@ -6156,21 +6697,21 @@
                 <a:ea typeface="Play"/>
                 <a:cs typeface="Play"/>
               </a:rPr>
-              <a:t>Дополнительно 74 минуты на правки после ревью дизайнера</a:t>
+              <a:t>74 мин правок после ревью дизайнера</a:t>
             </a:r>
           </a:p>
         </p:txBody>
       </p:sp>
       <p:sp>
         <p:nvSpPr>
-          <p:cNvPr id="686" name="card_2"/>
+          <p:cNvPr id="1053" name="card_2"/>
           <p:cNvSpPr txBox="1"/>
           <p:nvPr/>
         </p:nvSpPr>
         <p:spPr>
           <a:xfrm>
-            <a:off x="4916374" y="1963753"/>
-            <a:ext cx="1516144" cy="2001662"/>
+            <a:off x="6354489" y="1728705"/>
+            <a:ext cx="2264138" cy="632134"/>
           </a:xfrm>
           <a:prstGeom prst="rect">
             <a:avLst/>
@@ -6187,7 +6728,7 @@
               <a:spcAft>
                 <a:spcPts val="300"/>
               </a:spcAft>
-              <a:defRPr sz="1800" b="0">
+              <a:defRPr sz="1400" b="0">
                 <a:solidFill>
                   <a:srgbClr val="000000"/>
                 </a:solidFill>
@@ -6197,7 +6738,7 @@
               </a:defRPr>
             </a:pPr>
             <a:r>
-              <a:rPr sz="1800" b="0">
+              <a:rPr sz="1400" b="0">
                 <a:solidFill>
                   <a:srgbClr val="000000"/>
                 </a:solidFill>
@@ -6205,56 +6746,7 @@
                 <a:ea typeface="Play"/>
                 <a:cs typeface="Play"/>
               </a:rPr>
-              <a:t>19 из 42 колод нарушают фирменный стиль</a:t>
-            </a:r>
-          </a:p>
-        </p:txBody>
-      </p:sp>
-      <p:sp>
-        <p:nvSpPr>
-          <p:cNvPr id="687" name="card_3"/>
-          <p:cNvSpPr txBox="1"/>
-          <p:nvPr/>
-        </p:nvSpPr>
-        <p:spPr>
-          <a:xfrm>
-            <a:off x="7083319" y="1963753"/>
-            <a:ext cx="1516144" cy="2001662"/>
-          </a:xfrm>
-          <a:prstGeom prst="rect">
-            <a:avLst/>
-          </a:prstGeom>
-          <a:noFill/>
-        </p:spPr>
-        <p:txBody>
-          <a:bodyPr wrap="square" lIns="76200" rIns="76200" tIns="50800" bIns="50800">
-            <a:spAutoFit/>
-          </a:bodyPr>
-          <a:lstStyle/>
-          <a:p>
-            <a:pPr algn="l">
-              <a:spcAft>
-                <a:spcPts val="300"/>
-              </a:spcAft>
-              <a:defRPr sz="1800" b="0">
-                <a:solidFill>
-                  <a:srgbClr val="000000"/>
-                </a:solidFill>
-                <a:latin typeface="Play"/>
-                <a:ea typeface="Play"/>
-                <a:cs typeface="Play"/>
-              </a:defRPr>
-            </a:pPr>
-            <a:r>
-              <a:rPr sz="1800" b="0">
-                <a:solidFill>
-                  <a:srgbClr val="000000"/>
-                </a:solidFill>
-                <a:latin typeface="Play"/>
-                <a:ea typeface="Play"/>
-                <a:cs typeface="Play"/>
-              </a:rPr>
-              <a:t>Дизайн‑отдел из 4 человек закрывает 11 запросов, ожидание 6 дней</a:t>
+              <a:t>19 из 42 колод нарушили фирменный стиль</a:t>
             </a:r>
           </a:p>
         </p:txBody>
@@ -6854,7 +7346,7 @@
                 <a:ea typeface="Play"/>
                 <a:cs typeface="Play"/>
               </a:rPr>
-              <a:t>Предложение</a:t>
+              <a:t>Сервис: автоматическая вёрстка</a:t>
             </a:r>
           </a:p>
         </p:txBody>
@@ -6867,8 +7359,8 @@
         </p:nvSpPr>
         <p:spPr>
           <a:xfrm>
-            <a:off x="274320" y="1891002"/>
-            <a:ext cx="8344814" cy="1422400"/>
+            <a:off x="274320" y="2034088"/>
+            <a:ext cx="8344814" cy="993140"/>
           </a:xfrm>
           <a:prstGeom prst="rect">
             <a:avLst/>
@@ -6885,7 +7377,7 @@
               <a:spcAft>
                 <a:spcPts val="300"/>
               </a:spcAft>
-              <a:defRPr sz="1600">
+              <a:defRPr sz="1800">
                 <a:solidFill>
                   <a:srgbClr val="000000"/>
                 </a:solidFill>
@@ -6895,7 +7387,7 @@
               </a:defRPr>
             </a:pPr>
             <a:r>
-              <a:rPr sz="1600">
+              <a:rPr sz="1800">
                 <a:solidFill>
                   <a:srgbClr val="000000"/>
                 </a:solidFill>
@@ -6903,7 +7395,7 @@
                 <a:ea typeface="Play"/>
                 <a:cs typeface="Play"/>
               </a:rPr>
-              <a:t>• Сервис принимает шаблон pptx и материалы, генерирует колоду по дизайн‑системе</a:t>
+              <a:t>• Принимает шаблон pptx и материалы</a:t>
             </a:r>
           </a:p>
           <a:p>
@@ -6911,7 +7403,7 @@
               <a:spcAft>
                 <a:spcPts val="300"/>
               </a:spcAft>
-              <a:defRPr sz="1600">
+              <a:defRPr sz="1800">
                 <a:solidFill>
                   <a:srgbClr val="000000"/>
                 </a:solidFill>
@@ -6921,7 +7413,7 @@
               </a:defRPr>
             </a:pPr>
             <a:r>
-              <a:rPr sz="1600">
+              <a:rPr sz="1800">
                 <a:solidFill>
                   <a:srgbClr val="000000"/>
                 </a:solidFill>
@@ -6929,7 +7421,7 @@
                 <a:ea typeface="Play"/>
                 <a:cs typeface="Play"/>
               </a:rPr>
-              <a:t>• Экспорт в pptx, pdf, html с редактируемыми слайдами</a:t>
+              <a:t>• Автоматически формирует дизайн-систему и план колоды</a:t>
             </a:r>
           </a:p>
           <a:p>
@@ -6937,7 +7429,7 @@
               <a:spcAft>
                 <a:spcPts val="300"/>
               </a:spcAft>
-              <a:defRPr sz="1600">
+              <a:defRPr sz="1800">
                 <a:solidFill>
                   <a:srgbClr val="000000"/>
                 </a:solidFill>
@@ -6947,7 +7439,7 @@
               </a:defRPr>
             </a:pPr>
             <a:r>
-              <a:rPr sz="1600">
+              <a:rPr sz="1800">
                 <a:solidFill>
                   <a:srgbClr val="000000"/>
                 </a:solidFill>
@@ -6955,33 +7447,7 @@
                 <a:ea typeface="Play"/>
                 <a:cs typeface="Play"/>
               </a:rPr>
-              <a:t>• Аудит качества проверяет стиль и корректирует автоматически</a:t>
-            </a:r>
-          </a:p>
-          <a:p>
-            <a:pPr algn="l">
-              <a:spcAft>
-                <a:spcPts val="300"/>
-              </a:spcAft>
-              <a:defRPr sz="1600">
-                <a:solidFill>
-                  <a:srgbClr val="000000"/>
-                </a:solidFill>
-                <a:latin typeface="Play"/>
-                <a:ea typeface="Play"/>
-                <a:cs typeface="Play"/>
-              </a:defRPr>
-            </a:pPr>
-            <a:r>
-              <a:rPr sz="1600">
-                <a:solidFill>
-                  <a:srgbClr val="000000"/>
-                </a:solidFill>
-                <a:latin typeface="Play"/>
-                <a:ea typeface="Play"/>
-                <a:cs typeface="Play"/>
-              </a:rPr>
-              <a:t>• Слайды остаются редактируемыми, без картинок</a:t>
+              <a:t>• Экспортирует pptx, pdf, html, слайды остаются редактируемыми</a:t>
             </a:r>
           </a:p>
         </p:txBody>
@@ -7006,19 +7472,23 @@
       <p:grpSpPr/>
       <p:sp>
         <p:nvSpPr>
-          <p:cNvPr id="662" name="Google Shape;662;p55"/>
+          <p:cNvPr id="1027" name="Google Shape;1027;p65"/>
           <p:cNvSpPr/>
           <p:nvPr/>
         </p:nvSpPr>
         <p:spPr>
           <a:xfrm>
-            <a:off x="8667705" y="4666977"/>
-            <a:ext cx="190499" cy="190475"/>
-          </a:xfrm>
-          <a:prstGeom prst="rect">
-            <a:avLst/>
-          </a:prstGeom>
-          <a:noFill/>
+            <a:off x="6064222" y="1209852"/>
+            <a:ext cx="2793985" cy="3014270"/>
+          </a:xfrm>
+          <a:prstGeom prst="roundRect">
+            <a:avLst>
+              <a:gd fmla="val 3436" name="adj"/>
+            </a:avLst>
+          </a:prstGeom>
+          <a:solidFill>
+            <a:schemeClr val="lt2"/>
+          </a:solidFill>
           <a:ln>
             <a:noFill/>
           </a:ln>
@@ -7045,21 +7515,52 @@
           </a:p>
         </p:txBody>
       </p:sp>
-      <p:sp>
-        <p:nvSpPr>
-          <p:cNvPr id="663" name="Google Shape;663;p55"/>
-          <p:cNvSpPr/>
-          <p:nvPr/>
-        </p:nvSpPr>
-        <p:spPr>
-          <a:xfrm>
-            <a:off x="285748" y="286047"/>
-            <a:ext cx="8572456" cy="3938075"/>
+      <p:pic>
+        <p:nvPicPr>
+          <p:cNvPr descr=" " id="1028" name="Google Shape;1028;p65"/>
+          <p:cNvPicPr preferRelativeResize="0"/>
+          <p:nvPr/>
+        </p:nvPicPr>
+        <p:blipFill rotWithShape="1">
+          <a:blip r:embed="rId2">
+            <a:alphaModFix/>
+          </a:blip>
+          <a:srcRect b="0" l="0" r="0" t="0"/>
+          <a:stretch/>
+        </p:blipFill>
+        <p:spPr>
+          <a:xfrm>
+            <a:off x="8203313" y="3566983"/>
+            <a:ext cx="466723" cy="466664"/>
           </a:xfrm>
           <a:prstGeom prst="rect">
             <a:avLst/>
           </a:prstGeom>
           <a:noFill/>
+          <a:ln>
+            <a:noFill/>
+          </a:ln>
+        </p:spPr>
+      </p:pic>
+      <p:sp>
+        <p:nvSpPr>
+          <p:cNvPr id="1029" name="Google Shape;1029;p65"/>
+          <p:cNvSpPr/>
+          <p:nvPr/>
+        </p:nvSpPr>
+        <p:spPr>
+          <a:xfrm>
+            <a:off x="3174981" y="1209852"/>
+            <a:ext cx="2793985" cy="3014270"/>
+          </a:xfrm>
+          <a:prstGeom prst="roundRect">
+            <a:avLst>
+              <a:gd fmla="val 3436" name="adj"/>
+            </a:avLst>
+          </a:prstGeom>
+          <a:solidFill>
+            <a:schemeClr val="lt2"/>
+          </a:solidFill>
           <a:ln>
             <a:noFill/>
           </a:ln>
@@ -7086,21 +7587,52 @@
           </a:p>
         </p:txBody>
       </p:sp>
-      <p:sp>
-        <p:nvSpPr>
-          <p:cNvPr id="664" name="Google Shape;664;p55"/>
-          <p:cNvSpPr/>
-          <p:nvPr/>
-        </p:nvSpPr>
-        <p:spPr>
-          <a:xfrm>
-            <a:off x="285748" y="1209852"/>
-            <a:ext cx="8572456" cy="3014270"/>
+      <p:pic>
+        <p:nvPicPr>
+          <p:cNvPr descr=" " id="1030" name="Google Shape;1030;p65"/>
+          <p:cNvPicPr preferRelativeResize="0"/>
+          <p:nvPr/>
+        </p:nvPicPr>
+        <p:blipFill rotWithShape="1">
+          <a:blip r:embed="rId2">
+            <a:alphaModFix/>
+          </a:blip>
+          <a:srcRect b="0" l="0" r="0" t="0"/>
+          <a:stretch/>
+        </p:blipFill>
+        <p:spPr>
+          <a:xfrm>
+            <a:off x="5310249" y="3566983"/>
+            <a:ext cx="466723" cy="466664"/>
           </a:xfrm>
           <a:prstGeom prst="rect">
             <a:avLst/>
           </a:prstGeom>
           <a:noFill/>
+          <a:ln>
+            <a:noFill/>
+          </a:ln>
+        </p:spPr>
+      </p:pic>
+      <p:sp>
+        <p:nvSpPr>
+          <p:cNvPr id="1031" name="Google Shape;1031;p65"/>
+          <p:cNvSpPr/>
+          <p:nvPr/>
+        </p:nvSpPr>
+        <p:spPr>
+          <a:xfrm>
+            <a:off x="285749" y="1209852"/>
+            <a:ext cx="2793985" cy="3014270"/>
+          </a:xfrm>
+          <a:prstGeom prst="roundRect">
+            <a:avLst>
+              <a:gd fmla="val 3436" name="adj"/>
+            </a:avLst>
+          </a:prstGeom>
+          <a:solidFill>
+            <a:schemeClr val="lt2"/>
+          </a:solidFill>
           <a:ln>
             <a:noFill/>
           </a:ln>
@@ -7129,23 +7661,19 @@
       </p:sp>
       <p:sp>
         <p:nvSpPr>
-          <p:cNvPr id="665" name="Google Shape;665;p55"/>
+          <p:cNvPr id="1032" name="Google Shape;1032;p65"/>
           <p:cNvSpPr/>
           <p:nvPr/>
         </p:nvSpPr>
         <p:spPr>
           <a:xfrm>
-            <a:off x="285749" y="1209852"/>
-            <a:ext cx="2071677" cy="3014270"/>
-          </a:xfrm>
-          <a:prstGeom prst="roundRect">
-            <a:avLst>
-              <a:gd fmla="val 4634" name="adj"/>
-            </a:avLst>
-          </a:prstGeom>
-          <a:solidFill>
-            <a:schemeClr val="lt2"/>
-          </a:solidFill>
+            <a:off x="285748" y="286047"/>
+            <a:ext cx="8572456" cy="3938075"/>
+          </a:xfrm>
+          <a:prstGeom prst="rect">
+            <a:avLst/>
+          </a:prstGeom>
+          <a:noFill/>
           <a:ln>
             <a:noFill/>
           </a:ln>
@@ -7174,14 +7702,14 @@
       </p:sp>
       <p:sp>
         <p:nvSpPr>
-          <p:cNvPr id="666" name="Google Shape;666;p55"/>
+          <p:cNvPr id="1033" name="Google Shape;1033;p65"/>
           <p:cNvSpPr/>
           <p:nvPr/>
         </p:nvSpPr>
         <p:spPr>
           <a:xfrm>
-            <a:off x="438148" y="1362233"/>
-            <a:ext cx="1766878" cy="342855"/>
+            <a:off x="285748" y="1209852"/>
+            <a:ext cx="8572456" cy="3014270"/>
           </a:xfrm>
           <a:prstGeom prst="rect">
             <a:avLst/>
@@ -7215,23 +7743,19 @@
       </p:sp>
       <p:sp>
         <p:nvSpPr>
-          <p:cNvPr id="667" name="Google Shape;667;p55"/>
+          <p:cNvPr id="1034" name="Google Shape;1034;p65"/>
           <p:cNvSpPr/>
           <p:nvPr/>
         </p:nvSpPr>
         <p:spPr>
           <a:xfrm>
-            <a:off x="438148" y="1362233"/>
-            <a:ext cx="76199" cy="76190"/>
-          </a:xfrm>
-          <a:prstGeom prst="roundRect">
-            <a:avLst>
-              <a:gd fmla="val 31500" name="adj"/>
-            </a:avLst>
-          </a:prstGeom>
-          <a:solidFill>
-            <a:srgbClr val="0077FF"/>
-          </a:solidFill>
+            <a:off x="476248" y="1400327"/>
+            <a:ext cx="2412987" cy="1009519"/>
+          </a:xfrm>
+          <a:prstGeom prst="rect">
+            <a:avLst/>
+          </a:prstGeom>
+          <a:noFill/>
           <a:ln>
             <a:noFill/>
           </a:ln>
@@ -7260,22 +7784,22 @@
       </p:sp>
       <p:sp>
         <p:nvSpPr>
-          <p:cNvPr id="670" name="Google Shape;670;p55"/>
+          <p:cNvPr id="1035" name="Google Shape;1035;p65"/>
           <p:cNvSpPr/>
           <p:nvPr/>
         </p:nvSpPr>
         <p:spPr>
           <a:xfrm>
-            <a:off x="2452675" y="1209852"/>
-            <a:ext cx="2071677" cy="3014270"/>
+            <a:off x="476248" y="1400328"/>
+            <a:ext cx="76199" cy="76190"/>
           </a:xfrm>
           <a:prstGeom prst="roundRect">
             <a:avLst>
-              <a:gd fmla="val 4634" name="adj"/>
+              <a:gd fmla="val 31500" name="adj"/>
             </a:avLst>
           </a:prstGeom>
           <a:solidFill>
-            <a:schemeClr val="lt2"/>
+            <a:srgbClr val="0077FF"/>
           </a:solidFill>
           <a:ln>
             <a:noFill/>
@@ -7305,14 +7829,14 @@
       </p:sp>
       <p:sp>
         <p:nvSpPr>
-          <p:cNvPr id="671" name="Google Shape;671;p55"/>
+          <p:cNvPr id="1037" name="Google Shape;1037;p65"/>
           <p:cNvSpPr/>
           <p:nvPr/>
         </p:nvSpPr>
         <p:spPr>
           <a:xfrm>
-            <a:off x="2605074" y="1362233"/>
-            <a:ext cx="1766878" cy="342855"/>
+            <a:off x="2422509" y="3566983"/>
+            <a:ext cx="466723" cy="466664"/>
           </a:xfrm>
           <a:prstGeom prst="rect">
             <a:avLst/>
@@ -7344,25 +7868,75 @@
           </a:p>
         </p:txBody>
       </p:sp>
-      <p:sp>
-        <p:nvSpPr>
-          <p:cNvPr id="672" name="Google Shape;672;p55"/>
+      <p:pic>
+        <p:nvPicPr>
+          <p:cNvPr descr=" " id="1038" name="Google Shape;1038;p65"/>
+          <p:cNvPicPr preferRelativeResize="0"/>
+          <p:nvPr/>
+        </p:nvPicPr>
+        <p:blipFill rotWithShape="1">
+          <a:blip r:embed="rId2">
+            <a:alphaModFix/>
+          </a:blip>
+          <a:srcRect b="0" l="0" r="0" t="0"/>
+          <a:stretch/>
+        </p:blipFill>
+        <p:spPr>
+          <a:xfrm>
+            <a:off x="2422506" y="3566983"/>
+            <a:ext cx="466723" cy="466664"/>
+          </a:xfrm>
+          <a:prstGeom prst="rect">
+            <a:avLst/>
+          </a:prstGeom>
+          <a:noFill/>
+          <a:ln>
+            <a:noFill/>
+          </a:ln>
+        </p:spPr>
+      </p:pic>
+      <p:pic>
+        <p:nvPicPr>
+          <p:cNvPr descr=" " id="1039" name="Google Shape;1039;p65"/>
+          <p:cNvPicPr preferRelativeResize="0"/>
+          <p:nvPr/>
+        </p:nvPicPr>
+        <p:blipFill rotWithShape="1">
+          <a:blip r:embed="rId3">
+            <a:alphaModFix/>
+          </a:blip>
+          <a:srcRect b="0" l="0" r="0" t="0"/>
+          <a:stretch/>
+        </p:blipFill>
+        <p:spPr>
+          <a:xfrm>
+            <a:off x="2555859" y="3700316"/>
+            <a:ext cx="200024" cy="199999"/>
+          </a:xfrm>
+          <a:prstGeom prst="rect">
+            <a:avLst/>
+          </a:prstGeom>
+          <a:noFill/>
+          <a:ln>
+            <a:noFill/>
+          </a:ln>
+        </p:spPr>
+      </p:pic>
+      <p:sp>
+        <p:nvSpPr>
+          <p:cNvPr id="1040" name="Google Shape;1040;p65"/>
           <p:cNvSpPr/>
           <p:nvPr/>
         </p:nvSpPr>
         <p:spPr>
           <a:xfrm>
-            <a:off x="2605074" y="1362233"/>
-            <a:ext cx="76199" cy="76190"/>
-          </a:xfrm>
-          <a:prstGeom prst="roundRect">
-            <a:avLst>
-              <a:gd fmla="val 31500" name="adj"/>
-            </a:avLst>
-          </a:prstGeom>
-          <a:solidFill>
-            <a:srgbClr val="0077FF"/>
-          </a:solidFill>
+            <a:off x="3365480" y="1400327"/>
+            <a:ext cx="2412987" cy="1009519"/>
+          </a:xfrm>
+          <a:prstGeom prst="rect">
+            <a:avLst/>
+          </a:prstGeom>
+          <a:noFill/>
           <a:ln>
             <a:noFill/>
           </a:ln>
@@ -7391,22 +7965,22 @@
       </p:sp>
       <p:sp>
         <p:nvSpPr>
-          <p:cNvPr id="675" name="Google Shape;675;p55"/>
+          <p:cNvPr id="1041" name="Google Shape;1041;p65"/>
           <p:cNvSpPr/>
           <p:nvPr/>
         </p:nvSpPr>
         <p:spPr>
           <a:xfrm>
-            <a:off x="4619601" y="1209852"/>
-            <a:ext cx="2071677" cy="3014270"/>
+            <a:off x="3365480" y="1400328"/>
+            <a:ext cx="76199" cy="76190"/>
           </a:xfrm>
           <a:prstGeom prst="roundRect">
             <a:avLst>
-              <a:gd fmla="val 4634" name="adj"/>
+              <a:gd fmla="val 31500" name="adj"/>
             </a:avLst>
           </a:prstGeom>
           <a:solidFill>
-            <a:schemeClr val="lt2"/>
+            <a:srgbClr val="0077FF"/>
           </a:solidFill>
           <a:ln>
             <a:noFill/>
@@ -7436,14 +8010,14 @@
       </p:sp>
       <p:sp>
         <p:nvSpPr>
-          <p:cNvPr id="676" name="Google Shape;676;p55"/>
+          <p:cNvPr id="1043" name="Google Shape;1043;p65"/>
           <p:cNvSpPr/>
           <p:nvPr/>
         </p:nvSpPr>
         <p:spPr>
           <a:xfrm>
-            <a:off x="4772001" y="1362233"/>
-            <a:ext cx="1766878" cy="342855"/>
+            <a:off x="5311741" y="3566983"/>
+            <a:ext cx="466723" cy="466664"/>
           </a:xfrm>
           <a:prstGeom prst="rect">
             <a:avLst/>
@@ -7475,25 +8049,48 @@
           </a:p>
         </p:txBody>
       </p:sp>
-      <p:sp>
-        <p:nvSpPr>
-          <p:cNvPr id="677" name="Google Shape;677;p55"/>
+      <p:pic>
+        <p:nvPicPr>
+          <p:cNvPr descr=" " id="1044" name="Google Shape;1044;p65"/>
+          <p:cNvPicPr preferRelativeResize="0"/>
+          <p:nvPr/>
+        </p:nvPicPr>
+        <p:blipFill rotWithShape="1">
+          <a:blip r:embed="rId3">
+            <a:alphaModFix/>
+          </a:blip>
+          <a:srcRect b="0" l="0" r="0" t="0"/>
+          <a:stretch/>
+        </p:blipFill>
+        <p:spPr>
+          <a:xfrm>
+            <a:off x="5445091" y="3700316"/>
+            <a:ext cx="200024" cy="199999"/>
+          </a:xfrm>
+          <a:prstGeom prst="rect">
+            <a:avLst/>
+          </a:prstGeom>
+          <a:noFill/>
+          <a:ln>
+            <a:noFill/>
+          </a:ln>
+        </p:spPr>
+      </p:pic>
+      <p:sp>
+        <p:nvSpPr>
+          <p:cNvPr id="1045" name="Google Shape;1045;p65"/>
           <p:cNvSpPr/>
           <p:nvPr/>
         </p:nvSpPr>
         <p:spPr>
           <a:xfrm>
-            <a:off x="4772001" y="1362233"/>
-            <a:ext cx="76199" cy="76190"/>
-          </a:xfrm>
-          <a:prstGeom prst="roundRect">
-            <a:avLst>
-              <a:gd fmla="val 31500" name="adj"/>
-            </a:avLst>
-          </a:prstGeom>
-          <a:solidFill>
-            <a:srgbClr val="0077FF"/>
-          </a:solidFill>
+            <a:off x="6254721" y="1400327"/>
+            <a:ext cx="2412987" cy="1009519"/>
+          </a:xfrm>
+          <a:prstGeom prst="rect">
+            <a:avLst/>
+          </a:prstGeom>
+          <a:noFill/>
           <a:ln>
             <a:noFill/>
           </a:ln>
@@ -7522,22 +8119,22 @@
       </p:sp>
       <p:sp>
         <p:nvSpPr>
-          <p:cNvPr id="680" name="Google Shape;680;p55"/>
+          <p:cNvPr id="1046" name="Google Shape;1046;p65"/>
           <p:cNvSpPr/>
           <p:nvPr/>
         </p:nvSpPr>
         <p:spPr>
           <a:xfrm>
-            <a:off x="6786527" y="1209852"/>
-            <a:ext cx="2071677" cy="3014270"/>
+            <a:off x="6254721" y="1400328"/>
+            <a:ext cx="76199" cy="76190"/>
           </a:xfrm>
           <a:prstGeom prst="roundRect">
             <a:avLst>
-              <a:gd fmla="val 4634" name="adj"/>
+              <a:gd fmla="val 31500" name="adj"/>
             </a:avLst>
           </a:prstGeom>
           <a:solidFill>
-            <a:schemeClr val="lt2"/>
+            <a:srgbClr val="0077FF"/>
           </a:solidFill>
           <a:ln>
             <a:noFill/>
@@ -7567,14 +8164,14 @@
       </p:sp>
       <p:sp>
         <p:nvSpPr>
-          <p:cNvPr id="681" name="Google Shape;681;p55"/>
+          <p:cNvPr id="1048" name="Google Shape;1048;p65"/>
           <p:cNvSpPr/>
           <p:nvPr/>
         </p:nvSpPr>
         <p:spPr>
           <a:xfrm>
-            <a:off x="6938927" y="1362233"/>
-            <a:ext cx="1766878" cy="342855"/>
+            <a:off x="8200982" y="3566983"/>
+            <a:ext cx="466723" cy="466664"/>
           </a:xfrm>
           <a:prstGeom prst="rect">
             <a:avLst/>
@@ -7606,54 +8203,36 @@
           </a:p>
         </p:txBody>
       </p:sp>
-      <p:sp>
-        <p:nvSpPr>
-          <p:cNvPr id="682" name="Google Shape;682;p55"/>
-          <p:cNvSpPr/>
-          <p:nvPr/>
-        </p:nvSpPr>
-        <p:spPr>
-          <a:xfrm>
-            <a:off x="6938927" y="1362233"/>
-            <a:ext cx="76199" cy="76190"/>
-          </a:xfrm>
-          <a:prstGeom prst="roundRect">
-            <a:avLst>
-              <a:gd fmla="val 31500" name="adj"/>
-            </a:avLst>
-          </a:prstGeom>
-          <a:solidFill>
-            <a:srgbClr val="0077FF"/>
-          </a:solidFill>
+      <p:pic>
+        <p:nvPicPr>
+          <p:cNvPr descr=" " id="1049" name="Google Shape;1049;p65"/>
+          <p:cNvPicPr preferRelativeResize="0"/>
+          <p:nvPr/>
+        </p:nvPicPr>
+        <p:blipFill rotWithShape="1">
+          <a:blip r:embed="rId3">
+            <a:alphaModFix/>
+          </a:blip>
+          <a:srcRect b="0" l="0" r="0" t="0"/>
+          <a:stretch/>
+        </p:blipFill>
+        <p:spPr>
+          <a:xfrm>
+            <a:off x="8334332" y="3700316"/>
+            <a:ext cx="200024" cy="199999"/>
+          </a:xfrm>
+          <a:prstGeom prst="rect">
+            <a:avLst/>
+          </a:prstGeom>
+          <a:noFill/>
           <a:ln>
             <a:noFill/>
           </a:ln>
         </p:spPr>
-        <p:txBody>
-          <a:bodyPr anchorCtr="0" anchor="ctr" bIns="91425" lIns="91425" spcFirstLastPara="1" rIns="91425" wrap="square" tIns="91425">
-            <a:noAutofit/>
-          </a:bodyPr>
-          <a:lstStyle/>
-          <a:p>
-            <a:pPr indent="0" lvl="0" marL="0" rtl="0" algn="l">
-              <a:spcBef>
-                <a:spcPts val="0"/>
-              </a:spcBef>
-              <a:spcAft>
-                <a:spcPts val="0"/>
-              </a:spcAft>
-              <a:buNone/>
-            </a:pPr>
-            <a:r>
-              <a:t/>
-            </a:r>
-            <a:endParaRPr/>
-          </a:p>
-        </p:txBody>
-      </p:sp>
-      <p:sp>
-        <p:nvSpPr>
-          <p:cNvPr id="683" name="title"/>
+      </p:pic>
+      <p:sp>
+        <p:nvSpPr>
+          <p:cNvPr id="1050" name="title"/>
           <p:cNvSpPr txBox="1"/>
           <p:nvPr/>
         </p:nvSpPr>
@@ -7695,119 +8274,21 @@
                 <a:ea typeface="Play"/>
                 <a:cs typeface="Play"/>
               </a:rPr>
-              <a:t>Ожидаемый эффект</a:t>
+              <a:t>Пилот: 68 колод, 4 мин сборки</a:t>
             </a:r>
           </a:p>
         </p:txBody>
       </p:sp>
       <p:sp>
         <p:nvSpPr>
-          <p:cNvPr id="684" name="card_0"/>
+          <p:cNvPr id="1051" name="card_0"/>
           <p:cNvSpPr txBox="1"/>
           <p:nvPr/>
         </p:nvSpPr>
         <p:spPr>
           <a:xfrm>
-            <a:off x="582575" y="1963753"/>
-            <a:ext cx="1516144" cy="2001662"/>
-          </a:xfrm>
-          <a:prstGeom prst="rect">
-            <a:avLst/>
-          </a:prstGeom>
-          <a:noFill/>
-        </p:spPr>
-        <p:txBody>
-          <a:bodyPr wrap="square" lIns="76200" rIns="76200" tIns="50800" bIns="50800">
-            <a:spAutoFit/>
-          </a:bodyPr>
-          <a:lstStyle/>
-          <a:p>
-            <a:pPr algn="l">
-              <a:spcAft>
-                <a:spcPts val="300"/>
-              </a:spcAft>
-              <a:defRPr sz="1800" b="0">
-                <a:solidFill>
-                  <a:srgbClr val="000000"/>
-                </a:solidFill>
-                <a:latin typeface="Play"/>
-                <a:ea typeface="Play"/>
-                <a:cs typeface="Play"/>
-              </a:defRPr>
-            </a:pPr>
-            <a:r>
-              <a:rPr sz="1800" b="0">
-                <a:solidFill>
-                  <a:srgbClr val="000000"/>
-                </a:solidFill>
-                <a:latin typeface="Play"/>
-                <a:ea typeface="Play"/>
-                <a:cs typeface="Play"/>
-              </a:rPr>
-              <a:t>Средняя сборка колоды 12 слайдов сократилась до 4 минут</a:t>
-            </a:r>
-          </a:p>
-        </p:txBody>
-      </p:sp>
-      <p:sp>
-        <p:nvSpPr>
-          <p:cNvPr id="685" name="card_1"/>
-          <p:cNvSpPr txBox="1"/>
-          <p:nvPr/>
-        </p:nvSpPr>
-        <p:spPr>
-          <a:xfrm>
-            <a:off x="2749428" y="1963753"/>
-            <a:ext cx="1516144" cy="2001662"/>
-          </a:xfrm>
-          <a:prstGeom prst="rect">
-            <a:avLst/>
-          </a:prstGeom>
-          <a:noFill/>
-        </p:spPr>
-        <p:txBody>
-          <a:bodyPr wrap="square" lIns="76200" rIns="76200" tIns="50800" bIns="50800">
-            <a:spAutoFit/>
-          </a:bodyPr>
-          <a:lstStyle/>
-          <a:p>
-            <a:pPr algn="l">
-              <a:spcAft>
-                <a:spcPts val="300"/>
-              </a:spcAft>
-              <a:defRPr sz="1800" b="0">
-                <a:solidFill>
-                  <a:srgbClr val="000000"/>
-                </a:solidFill>
-                <a:latin typeface="Play"/>
-                <a:ea typeface="Play"/>
-                <a:cs typeface="Play"/>
-              </a:defRPr>
-            </a:pPr>
-            <a:r>
-              <a:rPr sz="1800" b="0">
-                <a:solidFill>
-                  <a:srgbClr val="000000"/>
-                </a:solidFill>
-                <a:latin typeface="Play"/>
-                <a:ea typeface="Play"/>
-                <a:cs typeface="Play"/>
-              </a:rPr>
-              <a:t>Время до первой версии уменьшилось с 6 дней до 1 дня</a:t>
-            </a:r>
-          </a:p>
-        </p:txBody>
-      </p:sp>
-      <p:sp>
-        <p:nvSpPr>
-          <p:cNvPr id="686" name="card_2"/>
-          <p:cNvSpPr txBox="1"/>
-          <p:nvPr/>
-        </p:nvSpPr>
-        <p:spPr>
-          <a:xfrm>
-            <a:off x="4916374" y="1963753"/>
-            <a:ext cx="1516144" cy="2001662"/>
+            <a:off x="576030" y="1728705"/>
+            <a:ext cx="2264138" cy="632134"/>
           </a:xfrm>
           <a:prstGeom prst="rect">
             <a:avLst/>
@@ -7842,21 +8323,21 @@
                 <a:ea typeface="Play"/>
                 <a:cs typeface="Play"/>
               </a:rPr>
-              <a:t>Нарушения фирменного стиля в пилоте 2 из 68, исправлены автоматически</a:t>
+              <a:t>68 колод собраны за 6 недель</a:t>
             </a:r>
           </a:p>
         </p:txBody>
       </p:sp>
       <p:sp>
         <p:nvSpPr>
-          <p:cNvPr id="687" name="card_3"/>
+          <p:cNvPr id="1052" name="card_1"/>
           <p:cNvSpPr txBox="1"/>
           <p:nvPr/>
         </p:nvSpPr>
         <p:spPr>
           <a:xfrm>
-            <a:off x="7083319" y="1963753"/>
-            <a:ext cx="1516144" cy="2001662"/>
+            <a:off x="3465259" y="1728705"/>
+            <a:ext cx="2264138" cy="632134"/>
           </a:xfrm>
           <a:prstGeom prst="rect">
             <a:avLst/>
@@ -7873,7 +8354,7 @@
               <a:spcAft>
                 <a:spcPts val="300"/>
               </a:spcAft>
-              <a:defRPr sz="1800" b="0">
+              <a:defRPr sz="1600" b="0">
                 <a:solidFill>
                   <a:srgbClr val="000000"/>
                 </a:solidFill>
@@ -7883,7 +8364,7 @@
               </a:defRPr>
             </a:pPr>
             <a:r>
-              <a:rPr sz="1800" b="0">
+              <a:rPr sz="1600" b="0">
                 <a:solidFill>
                   <a:srgbClr val="000000"/>
                 </a:solidFill>
@@ -7891,7 +8372,56 @@
                 <a:ea typeface="Play"/>
                 <a:cs typeface="Play"/>
               </a:rPr>
-              <a:t>Дизайнеры закрыли 38 запросов за 6 недель вместо 11 в неделю</a:t>
+              <a:t>Среднее время сборки 4 мин вместо 186</a:t>
+            </a:r>
+          </a:p>
+        </p:txBody>
+      </p:sp>
+      <p:sp>
+        <p:nvSpPr>
+          <p:cNvPr id="1053" name="card_2"/>
+          <p:cNvSpPr txBox="1"/>
+          <p:nvPr/>
+        </p:nvSpPr>
+        <p:spPr>
+          <a:xfrm>
+            <a:off x="6354489" y="1728705"/>
+            <a:ext cx="2264138" cy="632134"/>
+          </a:xfrm>
+          <a:prstGeom prst="rect">
+            <a:avLst/>
+          </a:prstGeom>
+          <a:noFill/>
+        </p:spPr>
+        <p:txBody>
+          <a:bodyPr wrap="square" lIns="76200" rIns="76200" tIns="50800" bIns="50800">
+            <a:spAutoFit/>
+          </a:bodyPr>
+          <a:lstStyle/>
+          <a:p>
+            <a:pPr algn="l">
+              <a:spcAft>
+                <a:spcPts val="300"/>
+              </a:spcAft>
+              <a:defRPr sz="1200" b="0">
+                <a:solidFill>
+                  <a:srgbClr val="000000"/>
+                </a:solidFill>
+                <a:latin typeface="Play"/>
+                <a:ea typeface="Play"/>
+                <a:cs typeface="Play"/>
+              </a:defRPr>
+            </a:pPr>
+            <a:r>
+              <a:rPr sz="1200" b="0">
+                <a:solidFill>
+                  <a:srgbClr val="000000"/>
+                </a:solidFill>
+                <a:latin typeface="Play"/>
+                <a:ea typeface="Play"/>
+                <a:cs typeface="Play"/>
+              </a:rPr>
+              <a:t>Время до первой версии сократилось с 6 дней до 1</a:t>
             </a:r>
           </a:p>
         </p:txBody>
@@ -7914,9 +8444,63 @@
         <p:nvPr/>
       </p:nvGrpSpPr>
       <p:grpSpPr/>
-      <p:sp>
-        <p:nvSpPr>
-          <p:cNvPr id="2" name="title"/>
+      <p:pic>
+        <p:nvPicPr>
+          <p:cNvPr descr=" " id="2249" name="Google Shape;2249;p83"/>
+          <p:cNvPicPr preferRelativeResize="0"/>
+          <p:nvPr/>
+        </p:nvPicPr>
+        <p:blipFill rotWithShape="1">
+          <a:blip r:embed="rId2">
+            <a:alphaModFix/>
+          </a:blip>
+          <a:srcRect b="0" l="0" r="0" t="0"/>
+          <a:stretch/>
+        </p:blipFill>
+        <p:spPr>
+          <a:xfrm>
+            <a:off x="285748" y="3576507"/>
+            <a:ext cx="2381238" cy="28571"/>
+          </a:xfrm>
+          <a:prstGeom prst="rect">
+            <a:avLst/>
+          </a:prstGeom>
+          <a:noFill/>
+          <a:ln>
+            <a:noFill/>
+          </a:ln>
+        </p:spPr>
+      </p:pic>
+      <p:pic>
+        <p:nvPicPr>
+          <p:cNvPr descr=" " id="2250" name="Google Shape;2250;p83"/>
+          <p:cNvPicPr preferRelativeResize="0"/>
+          <p:nvPr/>
+        </p:nvPicPr>
+        <p:blipFill rotWithShape="1">
+          <a:blip r:embed="rId3">
+            <a:alphaModFix/>
+          </a:blip>
+          <a:srcRect b="0" l="0" r="0" t="0"/>
+          <a:stretch/>
+        </p:blipFill>
+        <p:spPr>
+          <a:xfrm>
+            <a:off x="3143234" y="3576507"/>
+            <a:ext cx="3762355" cy="28571"/>
+          </a:xfrm>
+          <a:prstGeom prst="rect">
+            <a:avLst/>
+          </a:prstGeom>
+          <a:noFill/>
+          <a:ln>
+            <a:noFill/>
+          </a:ln>
+        </p:spPr>
+      </p:pic>
+      <p:sp>
+        <p:nvSpPr>
+          <p:cNvPr id="2251" name="title"/>
           <p:cNvSpPr txBox="1"/>
           <p:nvPr/>
         </p:nvSpPr>
@@ -7958,138 +8542,29 @@
                 <a:ea typeface="Play"/>
                 <a:cs typeface="Play"/>
               </a:rPr>
-              <a:t>Что потребуется: ресурсы и сроки</a:t>
+              <a:t>Время сборки</a:t>
             </a:r>
           </a:p>
         </p:txBody>
       </p:sp>
-      <p:sp>
-        <p:nvSpPr>
-          <p:cNvPr id="3" name="body"/>
-          <p:cNvSpPr txBox="1"/>
-          <p:nvPr/>
-        </p:nvSpPr>
-        <p:spPr>
-          <a:xfrm>
-            <a:off x="274320" y="1414513"/>
-            <a:ext cx="7189469" cy="2602405"/>
-          </a:xfrm>
-          <a:prstGeom prst="rect">
-            <a:avLst/>
-          </a:prstGeom>
-          <a:noFill/>
-        </p:spPr>
-        <p:txBody>
-          <a:bodyPr wrap="square" lIns="76200" rIns="76200" tIns="50800" bIns="50800">
-            <a:spAutoFit/>
-          </a:bodyPr>
-          <a:lstStyle/>
-          <a:p>
-            <a:pPr algn="l">
-              <a:spcAft>
-                <a:spcPts val="300"/>
-              </a:spcAft>
-              <a:defRPr sz="1800" b="1">
-                <a:solidFill>
-                  <a:srgbClr val="000000"/>
-                </a:solidFill>
-                <a:latin typeface="Play"/>
-                <a:ea typeface="Play"/>
-                <a:cs typeface="Play"/>
-              </a:defRPr>
-            </a:pPr>
-            <a:r>
-              <a:rPr sz="1800" b="1">
-                <a:solidFill>
-                  <a:srgbClr val="000000"/>
-                </a:solidFill>
-                <a:latin typeface="Play"/>
-                <a:ea typeface="Play"/>
-                <a:cs typeface="Play"/>
-              </a:rPr>
-              <a:t>• Сервис работает на машине 2 vCPU / 2 ГБ RAM</a:t>
-            </a:r>
-          </a:p>
-          <a:p>
-            <a:pPr algn="l">
-              <a:spcAft>
-                <a:spcPts val="300"/>
-              </a:spcAft>
-              <a:defRPr sz="1800" b="1">
-                <a:solidFill>
-                  <a:srgbClr val="000000"/>
-                </a:solidFill>
-                <a:latin typeface="Play"/>
-                <a:ea typeface="Play"/>
-                <a:cs typeface="Play"/>
-              </a:defRPr>
-            </a:pPr>
-            <a:r>
-              <a:rPr sz="1800" b="1">
-                <a:solidFill>
-                  <a:srgbClr val="000000"/>
-                </a:solidFill>
-                <a:latin typeface="Play"/>
-                <a:ea typeface="Play"/>
-                <a:cs typeface="Play"/>
-              </a:rPr>
-              <a:t>• Модель gpt-oss-20b, инференс за 6 недель 1 400 руб</a:t>
-            </a:r>
-          </a:p>
-          <a:p>
-            <a:pPr algn="l">
-              <a:spcAft>
-                <a:spcPts val="300"/>
-              </a:spcAft>
-              <a:defRPr sz="1800" b="1">
-                <a:solidFill>
-                  <a:srgbClr val="000000"/>
-                </a:solidFill>
-                <a:latin typeface="Play"/>
-                <a:ea typeface="Play"/>
-                <a:cs typeface="Play"/>
-              </a:defRPr>
-            </a:pPr>
-            <a:r>
-              <a:rPr sz="1800" b="1">
-                <a:solidFill>
-                  <a:srgbClr val="000000"/>
-                </a:solidFill>
-                <a:latin typeface="Play"/>
-                <a:ea typeface="Play"/>
-                <a:cs typeface="Play"/>
-              </a:rPr>
-              <a:t>• Третий квартал 2026: подключение 4 команд, домен и HTTPS</a:t>
-            </a:r>
-          </a:p>
-          <a:p>
-            <a:pPr algn="l">
-              <a:spcAft>
-                <a:spcPts val="300"/>
-              </a:spcAft>
-              <a:defRPr sz="1800" b="1">
-                <a:solidFill>
-                  <a:srgbClr val="000000"/>
-                </a:solidFill>
-                <a:latin typeface="Play"/>
-                <a:ea typeface="Play"/>
-                <a:cs typeface="Play"/>
-              </a:defRPr>
-            </a:pPr>
-            <a:r>
-              <a:rPr sz="1800" b="1">
-                <a:solidFill>
-                  <a:srgbClr val="000000"/>
-                </a:solidFill>
-                <a:latin typeface="Play"/>
-                <a:ea typeface="Play"/>
-                <a:cs typeface="Play"/>
-              </a:rPr>
-              <a:t>• Четвёртый квартал 2026: доступ для всей компании, интеграция с хранилищем</a:t>
-            </a:r>
-          </a:p>
-        </p:txBody>
-      </p:sp>
+      <p:graphicFrame>
+        <p:nvGraphicFramePr>
+          <p:cNvPr id="2252" name="Chart 2251"/>
+          <p:cNvGraphicFramePr>
+            <a:graphicFrameLocks noGrp="1"/>
+          </p:cNvGraphicFramePr>
+          <p:nvPr/>
+        </p:nvGraphicFramePr>
+        <p:xfrm>
+          <a:off x="274320" y="1414513"/>
+          <a:ext cx="7189469" cy="2161967"/>
+        </p:xfrm>
+        <a:graphic>
+          <a:graphicData uri="http://schemas.openxmlformats.org/drawingml/2006/chart">
+            <c:chart xmlns:c="http://schemas.openxmlformats.org/drawingml/2006/chart" r:id="rId4"/>
+          </a:graphicData>
+        </a:graphic>
+      </p:graphicFrame>
     </p:spTree>
   </p:cSld>
   <p:clrMapOvr>
@@ -8299,36 +8774,9 @@
           </a:p>
         </p:txBody>
       </p:sp>
-      <p:pic>
-        <p:nvPicPr>
-          <p:cNvPr descr=" " id="2394" name="Google Shape;2394;p88"/>
-          <p:cNvPicPr preferRelativeResize="0"/>
-          <p:nvPr/>
-        </p:nvPicPr>
-        <p:blipFill rotWithShape="1">
-          <a:blip r:embed="rId3">
-            <a:alphaModFix/>
-          </a:blip>
-          <a:srcRect b="0" l="0" r="0" t="0"/>
-          <a:stretch/>
-        </p:blipFill>
-        <p:spPr>
-          <a:xfrm>
-            <a:off x="1" y="3684300"/>
-            <a:ext cx="7238962" cy="70126"/>
-          </a:xfrm>
-          <a:prstGeom prst="rect">
-            <a:avLst/>
-          </a:prstGeom>
-          <a:noFill/>
-          <a:ln>
-            <a:noFill/>
-          </a:ln>
-        </p:spPr>
-      </p:pic>
-      <p:sp>
-        <p:nvSpPr>
-          <p:cNvPr id="2395" name="title"/>
+      <p:sp>
+        <p:nvSpPr>
+          <p:cNvPr id="2393" name="title"/>
           <p:cNvSpPr txBox="1"/>
           <p:nvPr/>
         </p:nvSpPr>
@@ -8370,448 +8818,29 @@
                 <a:ea typeface="Play"/>
                 <a:cs typeface="Play"/>
               </a:rPr>
-              <a:t>План пилота</a:t>
+              <a:t>Нарушения фирменного стиля</a:t>
             </a:r>
           </a:p>
         </p:txBody>
       </p:sp>
-      <p:sp>
-        <p:nvSpPr>
-          <p:cNvPr id="2396" name="body"/>
-          <p:cNvSpPr txBox="1"/>
-          <p:nvPr/>
-        </p:nvSpPr>
-        <p:spPr>
-          <a:xfrm>
-            <a:off x="274320" y="2009822"/>
-            <a:ext cx="8344814" cy="900430"/>
-          </a:xfrm>
-          <a:prstGeom prst="rect">
-            <a:avLst/>
-          </a:prstGeom>
-          <a:noFill/>
-        </p:spPr>
-        <p:txBody>
-          <a:bodyPr wrap="square" lIns="76200" rIns="76200" tIns="50800" bIns="50800">
-            <a:spAutoFit/>
-          </a:bodyPr>
-          <a:lstStyle/>
-          <a:p>
-            <a:pPr algn="l">
-              <a:spcAft>
-                <a:spcPts val="300"/>
-              </a:spcAft>
-              <a:defRPr sz="1200">
-                <a:solidFill>
-                  <a:srgbClr val="000000"/>
-                </a:solidFill>
-                <a:latin typeface="Play"/>
-                <a:ea typeface="Play"/>
-                <a:cs typeface="Play"/>
-              </a:defRPr>
-            </a:pPr>
-            <a:r>
-              <a:rPr sz="1200">
-                <a:solidFill>
-                  <a:srgbClr val="000000"/>
-                </a:solidFill>
-                <a:latin typeface="Play"/>
-                <a:ea typeface="Play"/>
-                <a:cs typeface="Play"/>
-              </a:rPr>
-              <a:t>• Пилот 6 недель на двух командах</a:t>
-            </a:r>
-          </a:p>
-          <a:p>
-            <a:pPr algn="l">
-              <a:spcAft>
-                <a:spcPts val="300"/>
-              </a:spcAft>
-              <a:defRPr sz="1200">
-                <a:solidFill>
-                  <a:srgbClr val="000000"/>
-                </a:solidFill>
-                <a:latin typeface="Play"/>
-                <a:ea typeface="Play"/>
-                <a:cs typeface="Play"/>
-              </a:defRPr>
-            </a:pPr>
-            <a:r>
-              <a:rPr sz="1200">
-                <a:solidFill>
-                  <a:srgbClr val="000000"/>
-                </a:solidFill>
-                <a:latin typeface="Play"/>
-                <a:ea typeface="Play"/>
-                <a:cs typeface="Play"/>
-              </a:rPr>
-              <a:t>• Собрано 68 презентаций</a:t>
-            </a:r>
-          </a:p>
-          <a:p>
-            <a:pPr algn="l">
-              <a:spcAft>
-                <a:spcPts val="300"/>
-              </a:spcAft>
-              <a:defRPr sz="1200">
-                <a:solidFill>
-                  <a:srgbClr val="000000"/>
-                </a:solidFill>
-                <a:latin typeface="Play"/>
-                <a:ea typeface="Play"/>
-                <a:cs typeface="Play"/>
-              </a:defRPr>
-            </a:pPr>
-            <a:r>
-              <a:rPr sz="1200">
-                <a:solidFill>
-                  <a:srgbClr val="000000"/>
-                </a:solidFill>
-                <a:latin typeface="Play"/>
-                <a:ea typeface="Play"/>
-                <a:cs typeface="Play"/>
-              </a:rPr>
-              <a:t>• Время сборки 4 мин, ожидание 1 день</a:t>
-            </a:r>
-          </a:p>
-          <a:p>
-            <a:pPr algn="l">
-              <a:spcAft>
-                <a:spcPts val="300"/>
-              </a:spcAft>
-              <a:defRPr sz="1200">
-                <a:solidFill>
-                  <a:srgbClr val="000000"/>
-                </a:solidFill>
-                <a:latin typeface="Play"/>
-                <a:ea typeface="Play"/>
-                <a:cs typeface="Play"/>
-              </a:defRPr>
-            </a:pPr>
-            <a:r>
-              <a:rPr sz="1200">
-                <a:solidFill>
-                  <a:srgbClr val="000000"/>
-                </a:solidFill>
-                <a:latin typeface="Play"/>
-                <a:ea typeface="Play"/>
-                <a:cs typeface="Play"/>
-              </a:rPr>
-              <a:t>• Нарушения стиля 2 из 68, исправлены автоматически</a:t>
-            </a:r>
-          </a:p>
-        </p:txBody>
-      </p:sp>
-      <p:sp>
-        <p:nvSpPr>
-          <p:cNvPr id="2397" name="Rectangle 2396"/>
-          <p:cNvSpPr/>
-          <p:nvPr/>
-        </p:nvSpPr>
-        <p:spPr>
-          <a:xfrm>
-            <a:off x="274320" y="3211198"/>
-            <a:ext cx="8344814" cy="26282"/>
-          </a:xfrm>
-          <a:prstGeom prst="rect">
-            <a:avLst/>
-          </a:prstGeom>
-          <a:solidFill>
-            <a:srgbClr val="0077FF"/>
-          </a:solidFill>
-          <a:ln>
-            <a:noFill/>
-          </a:ln>
-        </p:spPr>
-        <p:style>
-          <a:lnRef idx="1">
-            <a:schemeClr val="accent1"/>
-          </a:lnRef>
-          <a:fillRef idx="3">
-            <a:schemeClr val="accent1"/>
-          </a:fillRef>
-          <a:effectRef idx="2">
-            <a:schemeClr val="accent1"/>
-          </a:effectRef>
-          <a:fontRef idx="minor">
-            <a:schemeClr val="lt1"/>
-          </a:fontRef>
-        </p:style>
-        <p:txBody>
-          <a:bodyPr rtlCol="0" anchor="ctr"/>
-          <a:lstStyle/>
-          <a:p>
-            <a:pPr algn="ctr"/>
-          </a:p>
-        </p:txBody>
-      </p:sp>
-      <p:sp>
-        <p:nvSpPr>
-          <p:cNvPr id="2398" name="Oval 2397"/>
-          <p:cNvSpPr/>
-          <p:nvPr/>
-        </p:nvSpPr>
-        <p:spPr>
-          <a:xfrm>
-            <a:off x="1568752" y="3127969"/>
-            <a:ext cx="192740" cy="192740"/>
-          </a:xfrm>
-          <a:prstGeom prst="ellipse">
-            <a:avLst/>
-          </a:prstGeom>
-          <a:solidFill>
-            <a:srgbClr val="0077FF"/>
-          </a:solidFill>
-          <a:ln>
-            <a:noFill/>
-          </a:ln>
-        </p:spPr>
-        <p:style>
-          <a:lnRef idx="1">
-            <a:schemeClr val="accent1"/>
-          </a:lnRef>
-          <a:fillRef idx="3">
-            <a:schemeClr val="accent1"/>
-          </a:fillRef>
-          <a:effectRef idx="2">
-            <a:schemeClr val="accent1"/>
-          </a:effectRef>
-          <a:fontRef idx="minor">
-            <a:schemeClr val="lt1"/>
-          </a:fontRef>
-        </p:style>
-        <p:txBody>
-          <a:bodyPr rtlCol="0" anchor="ctr"/>
-          <a:lstStyle/>
-          <a:p>
-            <a:pPr algn="ctr"/>
-          </a:p>
-        </p:txBody>
-      </p:sp>
-      <p:sp>
-        <p:nvSpPr>
-          <p:cNvPr id="2399" name="TextBox 2398"/>
-          <p:cNvSpPr txBox="1"/>
-          <p:nvPr/>
-        </p:nvSpPr>
-        <p:spPr>
-          <a:xfrm>
-            <a:off x="274320" y="2808196"/>
-            <a:ext cx="4172407" cy="332914"/>
-          </a:xfrm>
-          <a:prstGeom prst="rect">
-            <a:avLst/>
-          </a:prstGeom>
-          <a:noFill/>
-        </p:spPr>
-        <p:txBody>
-          <a:bodyPr wrap="square" lIns="12700" rIns="12700" tIns="12700" bIns="12700">
-            <a:spAutoFit/>
-          </a:bodyPr>
-          <a:lstStyle/>
-          <a:p>
-            <a:pPr algn="ctr">
-              <a:defRPr sz="1400" b="0">
-                <a:solidFill>
-                  <a:srgbClr val="000000"/>
-                </a:solidFill>
-                <a:latin typeface="Play"/>
-                <a:ea typeface="Play"/>
-                <a:cs typeface="Play"/>
-              </a:defRPr>
-            </a:pPr>
-            <a:r>
-              <a:rPr sz="1400" b="0">
-                <a:solidFill>
-                  <a:srgbClr val="000000"/>
-                </a:solidFill>
-                <a:latin typeface="Play"/>
-                <a:ea typeface="Play"/>
-                <a:cs typeface="Play"/>
-              </a:rPr>
-              <a:t>Подготовка</a:t>
-            </a:r>
-          </a:p>
-        </p:txBody>
-      </p:sp>
-      <p:sp>
-        <p:nvSpPr>
-          <p:cNvPr id="2400" name="Oval 2399"/>
-          <p:cNvSpPr/>
-          <p:nvPr/>
-        </p:nvSpPr>
-        <p:spPr>
-          <a:xfrm>
-            <a:off x="4350356" y="3127969"/>
-            <a:ext cx="192740" cy="192740"/>
-          </a:xfrm>
-          <a:prstGeom prst="ellipse">
-            <a:avLst/>
-          </a:prstGeom>
-          <a:solidFill>
-            <a:srgbClr val="0077FF"/>
-          </a:solidFill>
-          <a:ln>
-            <a:noFill/>
-          </a:ln>
-        </p:spPr>
-        <p:style>
-          <a:lnRef idx="1">
-            <a:schemeClr val="accent1"/>
-          </a:lnRef>
-          <a:fillRef idx="3">
-            <a:schemeClr val="accent1"/>
-          </a:fillRef>
-          <a:effectRef idx="2">
-            <a:schemeClr val="accent1"/>
-          </a:effectRef>
-          <a:fontRef idx="minor">
-            <a:schemeClr val="lt1"/>
-          </a:fontRef>
-        </p:style>
-        <p:txBody>
-          <a:bodyPr rtlCol="0" anchor="ctr"/>
-          <a:lstStyle/>
-          <a:p>
-            <a:pPr algn="ctr"/>
-          </a:p>
-        </p:txBody>
-      </p:sp>
-      <p:sp>
-        <p:nvSpPr>
-          <p:cNvPr id="2401" name="TextBox 2400"/>
-          <p:cNvSpPr txBox="1"/>
-          <p:nvPr/>
-        </p:nvSpPr>
-        <p:spPr>
-          <a:xfrm>
-            <a:off x="2360523" y="3403938"/>
-            <a:ext cx="4172407" cy="332914"/>
-          </a:xfrm>
-          <a:prstGeom prst="rect">
-            <a:avLst/>
-          </a:prstGeom>
-          <a:noFill/>
-        </p:spPr>
-        <p:txBody>
-          <a:bodyPr wrap="square" lIns="12700" rIns="12700" tIns="12700" bIns="12700">
-            <a:spAutoFit/>
-          </a:bodyPr>
-          <a:lstStyle/>
-          <a:p>
-            <a:pPr algn="ctr">
-              <a:defRPr sz="1400" b="0">
-                <a:solidFill>
-                  <a:srgbClr val="000000"/>
-                </a:solidFill>
-                <a:latin typeface="Play"/>
-                <a:ea typeface="Play"/>
-                <a:cs typeface="Play"/>
-              </a:defRPr>
-            </a:pPr>
-            <a:r>
-              <a:rPr sz="1400" b="0">
-                <a:solidFill>
-                  <a:srgbClr val="000000"/>
-                </a:solidFill>
-                <a:latin typeface="Play"/>
-                <a:ea typeface="Play"/>
-                <a:cs typeface="Play"/>
-              </a:rPr>
-              <a:t>Запуск</a:t>
-            </a:r>
-          </a:p>
-        </p:txBody>
-      </p:sp>
-      <p:sp>
-        <p:nvSpPr>
-          <p:cNvPr id="2402" name="Oval 2401"/>
-          <p:cNvSpPr/>
-          <p:nvPr/>
-        </p:nvSpPr>
-        <p:spPr>
-          <a:xfrm>
-            <a:off x="7131961" y="3127969"/>
-            <a:ext cx="192740" cy="192740"/>
-          </a:xfrm>
-          <a:prstGeom prst="ellipse">
-            <a:avLst/>
-          </a:prstGeom>
-          <a:solidFill>
-            <a:srgbClr val="0077FF"/>
-          </a:solidFill>
-          <a:ln>
-            <a:noFill/>
-          </a:ln>
-        </p:spPr>
-        <p:style>
-          <a:lnRef idx="1">
-            <a:schemeClr val="accent1"/>
-          </a:lnRef>
-          <a:fillRef idx="3">
-            <a:schemeClr val="accent1"/>
-          </a:fillRef>
-          <a:effectRef idx="2">
-            <a:schemeClr val="accent1"/>
-          </a:effectRef>
-          <a:fontRef idx="minor">
-            <a:schemeClr val="lt1"/>
-          </a:fontRef>
-        </p:style>
-        <p:txBody>
-          <a:bodyPr rtlCol="0" anchor="ctr"/>
-          <a:lstStyle/>
-          <a:p>
-            <a:pPr algn="ctr"/>
-          </a:p>
-        </p:txBody>
-      </p:sp>
-      <p:sp>
-        <p:nvSpPr>
-          <p:cNvPr id="2403" name="TextBox 2402"/>
-          <p:cNvSpPr txBox="1"/>
-          <p:nvPr/>
-        </p:nvSpPr>
-        <p:spPr>
-          <a:xfrm>
-            <a:off x="4446727" y="2808196"/>
-            <a:ext cx="4172407" cy="332914"/>
-          </a:xfrm>
-          <a:prstGeom prst="rect">
-            <a:avLst/>
-          </a:prstGeom>
-          <a:noFill/>
-        </p:spPr>
-        <p:txBody>
-          <a:bodyPr wrap="square" lIns="12700" rIns="12700" tIns="12700" bIns="12700">
-            <a:spAutoFit/>
-          </a:bodyPr>
-          <a:lstStyle/>
-          <a:p>
-            <a:pPr algn="ctr">
-              <a:defRPr sz="1400" b="0">
-                <a:solidFill>
-                  <a:srgbClr val="000000"/>
-                </a:solidFill>
-                <a:latin typeface="Play"/>
-                <a:ea typeface="Play"/>
-                <a:cs typeface="Play"/>
-              </a:defRPr>
-            </a:pPr>
-            <a:r>
-              <a:rPr sz="1400" b="0">
-                <a:solidFill>
-                  <a:srgbClr val="000000"/>
-                </a:solidFill>
-                <a:latin typeface="Play"/>
-                <a:ea typeface="Play"/>
-                <a:cs typeface="Play"/>
-              </a:rPr>
-              <a:t>Оценка</a:t>
-            </a:r>
-          </a:p>
-        </p:txBody>
-      </p:sp>
+      <p:graphicFrame>
+        <p:nvGraphicFramePr>
+          <p:cNvPr id="2394" name="Chart 2393"/>
+          <p:cNvGraphicFramePr>
+            <a:graphicFrameLocks noGrp="1"/>
+          </p:cNvGraphicFramePr>
+          <p:nvPr/>
+        </p:nvGraphicFramePr>
+        <p:xfrm>
+          <a:off x="274320" y="2009822"/>
+          <a:ext cx="8344814" cy="2160270"/>
+        </p:xfrm>
+        <a:graphic>
+          <a:graphicData uri="http://schemas.openxmlformats.org/drawingml/2006/chart">
+            <c:chart xmlns:c="http://schemas.openxmlformats.org/drawingml/2006/chart" r:id="rId4"/>
+          </a:graphicData>
+        </a:graphic>
+      </p:graphicFrame>
     </p:spTree>
   </p:cSld>
   <p:clrMapOvr>
@@ -8830,9 +8859,159 @@
         <p:nvPr/>
       </p:nvGrpSpPr>
       <p:grpSpPr/>
-      <p:sp>
-        <p:nvSpPr>
-          <p:cNvPr id="2" name="title"/>
+      <p:pic>
+        <p:nvPicPr>
+          <p:cNvPr descr=" " id="2428" name="Google Shape;2428;p89"/>
+          <p:cNvPicPr preferRelativeResize="0"/>
+          <p:nvPr/>
+        </p:nvPicPr>
+        <p:blipFill rotWithShape="1">
+          <a:blip r:embed="rId2">
+            <a:alphaModFix/>
+          </a:blip>
+          <a:srcRect b="0" l="0" r="0" t="0"/>
+          <a:stretch/>
+        </p:blipFill>
+        <p:spPr>
+          <a:xfrm>
+            <a:off x="0" y="2732082"/>
+            <a:ext cx="8515008" cy="92615"/>
+          </a:xfrm>
+          <a:prstGeom prst="rect">
+            <a:avLst/>
+          </a:prstGeom>
+          <a:noFill/>
+          <a:ln>
+            <a:noFill/>
+          </a:ln>
+        </p:spPr>
+      </p:pic>
+      <p:sp>
+        <p:nvSpPr>
+          <p:cNvPr id="2429" name="Google Shape;2429;p89"/>
+          <p:cNvSpPr/>
+          <p:nvPr/>
+        </p:nvSpPr>
+        <p:spPr>
+          <a:xfrm>
+            <a:off x="553415" y="1828897"/>
+            <a:ext cx="2232516" cy="1490254"/>
+          </a:xfrm>
+          <a:prstGeom prst="rect">
+            <a:avLst/>
+          </a:prstGeom>
+          <a:noFill/>
+          <a:ln>
+            <a:noFill/>
+          </a:ln>
+        </p:spPr>
+        <p:txBody>
+          <a:bodyPr anchorCtr="0" anchor="ctr" bIns="91425" lIns="91425" spcFirstLastPara="1" rIns="91425" wrap="square" tIns="91425">
+            <a:noAutofit/>
+          </a:bodyPr>
+          <a:lstStyle/>
+          <a:p>
+            <a:pPr indent="0" lvl="0" marL="0" rtl="0" algn="l">
+              <a:spcBef>
+                <a:spcPts val="0"/>
+              </a:spcBef>
+              <a:spcAft>
+                <a:spcPts val="0"/>
+              </a:spcAft>
+              <a:buNone/>
+            </a:pPr>
+            <a:r>
+              <a:t/>
+            </a:r>
+            <a:endParaRPr/>
+          </a:p>
+        </p:txBody>
+      </p:sp>
+      <p:sp>
+        <p:nvSpPr>
+          <p:cNvPr id="2431" name="Google Shape;2431;p89"/>
+          <p:cNvSpPr/>
+          <p:nvPr/>
+        </p:nvSpPr>
+        <p:spPr>
+          <a:xfrm>
+            <a:off x="3565736" y="1828897"/>
+            <a:ext cx="2232516" cy="1490254"/>
+          </a:xfrm>
+          <a:prstGeom prst="rect">
+            <a:avLst/>
+          </a:prstGeom>
+          <a:noFill/>
+          <a:ln>
+            <a:noFill/>
+          </a:ln>
+        </p:spPr>
+        <p:txBody>
+          <a:bodyPr anchorCtr="0" anchor="ctr" bIns="91425" lIns="91425" spcFirstLastPara="1" rIns="91425" wrap="square" tIns="91425">
+            <a:noAutofit/>
+          </a:bodyPr>
+          <a:lstStyle/>
+          <a:p>
+            <a:pPr indent="0" lvl="0" marL="0" rtl="0" algn="l">
+              <a:spcBef>
+                <a:spcPts val="0"/>
+              </a:spcBef>
+              <a:spcAft>
+                <a:spcPts val="0"/>
+              </a:spcAft>
+              <a:buNone/>
+            </a:pPr>
+            <a:r>
+              <a:t/>
+            </a:r>
+            <a:endParaRPr/>
+          </a:p>
+        </p:txBody>
+      </p:sp>
+      <p:sp>
+        <p:nvSpPr>
+          <p:cNvPr id="2433" name="Google Shape;2433;p89"/>
+          <p:cNvSpPr/>
+          <p:nvPr/>
+        </p:nvSpPr>
+        <p:spPr>
+          <a:xfrm>
+            <a:off x="6578067" y="1828897"/>
+            <a:ext cx="2232516" cy="1490254"/>
+          </a:xfrm>
+          <a:prstGeom prst="rect">
+            <a:avLst/>
+          </a:prstGeom>
+          <a:noFill/>
+          <a:ln>
+            <a:noFill/>
+          </a:ln>
+        </p:spPr>
+        <p:txBody>
+          <a:bodyPr anchorCtr="0" anchor="ctr" bIns="91425" lIns="91425" spcFirstLastPara="1" rIns="91425" wrap="square" tIns="91425">
+            <a:noAutofit/>
+          </a:bodyPr>
+          <a:lstStyle/>
+          <a:p>
+            <a:pPr indent="0" lvl="0" marL="0" rtl="0" algn="l">
+              <a:spcBef>
+                <a:spcPts val="0"/>
+              </a:spcBef>
+              <a:spcAft>
+                <a:spcPts val="0"/>
+              </a:spcAft>
+              <a:buNone/>
+            </a:pPr>
+            <a:r>
+              <a:t/>
+            </a:r>
+            <a:endParaRPr/>
+          </a:p>
+        </p:txBody>
+      </p:sp>
+      <p:sp>
+        <p:nvSpPr>
+          <p:cNvPr id="2434" name="title"/>
           <p:cNvSpPr txBox="1"/>
           <p:nvPr/>
         </p:nvSpPr>
@@ -8874,21 +9053,21 @@
                 <a:ea typeface="Play"/>
                 <a:cs typeface="Play"/>
               </a:rPr>
-              <a:t>Что мы просим решить</a:t>
+              <a:t>Пилот: 6 недель, 2 команды</a:t>
             </a:r>
           </a:p>
         </p:txBody>
       </p:sp>
       <p:sp>
         <p:nvSpPr>
-          <p:cNvPr id="3" name="body"/>
+          <p:cNvPr id="2435" name="body"/>
           <p:cNvSpPr txBox="1"/>
           <p:nvPr/>
         </p:nvSpPr>
         <p:spPr>
           <a:xfrm>
             <a:off x="274320" y="1414513"/>
-            <a:ext cx="8344814" cy="1790812"/>
+            <a:ext cx="8344814" cy="900430"/>
           </a:xfrm>
           <a:prstGeom prst="rect">
             <a:avLst/>
@@ -8905,7 +9084,7 @@
               <a:spcAft>
                 <a:spcPts val="300"/>
               </a:spcAft>
-              <a:defRPr sz="1800">
+              <a:defRPr sz="1200">
                 <a:solidFill>
                   <a:srgbClr val="000000"/>
                 </a:solidFill>
@@ -8915,7 +9094,7 @@
               </a:defRPr>
             </a:pPr>
             <a:r>
-              <a:rPr sz="1800">
+              <a:rPr sz="1200">
                 <a:solidFill>
                   <a:srgbClr val="000000"/>
                 </a:solidFill>
@@ -8923,7 +9102,7 @@
                 <a:ea typeface="Play"/>
                 <a:cs typeface="Play"/>
               </a:rPr>
-              <a:t>• Решить о запуске сервиса на всю компанию</a:t>
+              <a:t>• 2 недели подготовки и обучения команд</a:t>
             </a:r>
           </a:p>
           <a:p>
@@ -8931,7 +9110,7 @@
               <a:spcAft>
                 <a:spcPts val="300"/>
               </a:spcAft>
-              <a:defRPr sz="1800">
+              <a:defRPr sz="1200">
                 <a:solidFill>
                   <a:srgbClr val="000000"/>
                 </a:solidFill>
@@ -8941,7 +9120,7 @@
               </a:defRPr>
             </a:pPr>
             <a:r>
-              <a:rPr sz="1800">
+              <a:rPr sz="1200">
                 <a:solidFill>
                   <a:srgbClr val="000000"/>
                 </a:solidFill>
@@ -8949,7 +9128,7 @@
                 <a:ea typeface="Play"/>
                 <a:cs typeface="Play"/>
               </a:rPr>
-              <a:t>• Подтвердить бюджет и ресурсы для масштабирования</a:t>
+              <a:t>• Запуск пилота на 2 командах</a:t>
             </a:r>
           </a:p>
           <a:p>
@@ -8957,7 +9136,7 @@
               <a:spcAft>
                 <a:spcPts val="300"/>
               </a:spcAft>
-              <a:defRPr sz="1800">
+              <a:defRPr sz="1200">
                 <a:solidFill>
                   <a:srgbClr val="000000"/>
                 </a:solidFill>
@@ -8967,7 +9146,7 @@
               </a:defRPr>
             </a:pPr>
             <a:r>
-              <a:rPr sz="1800">
+              <a:rPr sz="1200">
                 <a:solidFill>
                   <a:srgbClr val="000000"/>
                 </a:solidFill>
@@ -8975,7 +9154,7 @@
                 <a:ea typeface="Play"/>
                 <a:cs typeface="Play"/>
               </a:rPr>
-              <a:t>• Определить ответственных за интеграцию с корпоративными системами</a:t>
+              <a:t>• Аудит качества проверяет все числа</a:t>
             </a:r>
           </a:p>
           <a:p>
@@ -8983,7 +9162,7 @@
               <a:spcAft>
                 <a:spcPts val="300"/>
               </a:spcAft>
-              <a:defRPr sz="1800">
+              <a:defRPr sz="1200">
                 <a:solidFill>
                   <a:srgbClr val="000000"/>
                 </a:solidFill>
@@ -8993,7 +9172,7 @@
               </a:defRPr>
             </a:pPr>
             <a:r>
-              <a:rPr sz="1800">
+              <a:rPr sz="1200">
                 <a:solidFill>
                   <a:srgbClr val="000000"/>
                 </a:solidFill>
@@ -9001,7 +9180,259 @@
                 <a:ea typeface="Play"/>
                 <a:cs typeface="Play"/>
               </a:rPr>
-              <a:t>• Утвердить сроки внедрения в Q4 2026</a:t>
+              <a:t>• Экспорт готовых колод в pptx, pdf, html</a:t>
+            </a:r>
+          </a:p>
+        </p:txBody>
+      </p:sp>
+      <p:sp>
+        <p:nvSpPr>
+          <p:cNvPr id="2436" name="Pentagon 2435"/>
+          <p:cNvSpPr/>
+          <p:nvPr/>
+        </p:nvSpPr>
+        <p:spPr>
+          <a:xfrm>
+            <a:off x="274320" y="2070125"/>
+            <a:ext cx="2011100" cy="661947"/>
+          </a:xfrm>
+          <a:prstGeom prst="homePlate">
+            <a:avLst/>
+          </a:prstGeom>
+          <a:solidFill>
+            <a:srgbClr val="0077FF"/>
+          </a:solidFill>
+          <a:ln>
+            <a:noFill/>
+          </a:ln>
+        </p:spPr>
+        <p:style>
+          <a:lnRef idx="1">
+            <a:schemeClr val="accent1"/>
+          </a:lnRef>
+          <a:fillRef idx="3">
+            <a:schemeClr val="accent1"/>
+          </a:fillRef>
+          <a:effectRef idx="2">
+            <a:schemeClr val="accent1"/>
+          </a:effectRef>
+          <a:fontRef idx="minor">
+            <a:schemeClr val="lt1"/>
+          </a:fontRef>
+        </p:style>
+        <p:txBody>
+          <a:bodyPr rtlCol="0" anchor="ctr" wrap="square" lIns="12700" rIns="12700" tIns="12700" bIns="12700"/>
+          <a:lstStyle/>
+          <a:p>
+            <a:pPr algn="ctr">
+              <a:defRPr sz="1336" b="0">
+                <a:solidFill>
+                  <a:srgbClr val="FFFFFF"/>
+                </a:solidFill>
+                <a:latin typeface="Play"/>
+                <a:ea typeface="Play"/>
+                <a:cs typeface="Play"/>
+              </a:defRPr>
+            </a:pPr>
+            <a:r>
+              <a:rPr sz="1336" b="0">
+                <a:solidFill>
+                  <a:srgbClr val="FFFFFF"/>
+                </a:solidFill>
+                <a:latin typeface="Play"/>
+                <a:ea typeface="Play"/>
+                <a:cs typeface="Play"/>
+              </a:rPr>
+              <a:t>Подготовка</a:t>
+            </a:r>
+          </a:p>
+        </p:txBody>
+      </p:sp>
+      <p:sp>
+        <p:nvSpPr>
+          <p:cNvPr id="2437" name="Chevron 2436"/>
+          <p:cNvSpPr/>
+          <p:nvPr/>
+        </p:nvSpPr>
+        <p:spPr>
+          <a:xfrm>
+            <a:off x="2385557" y="2070125"/>
+            <a:ext cx="2011100" cy="661947"/>
+          </a:xfrm>
+          <a:prstGeom prst="chevron">
+            <a:avLst/>
+          </a:prstGeom>
+          <a:solidFill>
+            <a:srgbClr val="0077FF"/>
+          </a:solidFill>
+          <a:ln>
+            <a:noFill/>
+          </a:ln>
+        </p:spPr>
+        <p:style>
+          <a:lnRef idx="1">
+            <a:schemeClr val="accent1"/>
+          </a:lnRef>
+          <a:fillRef idx="3">
+            <a:schemeClr val="accent1"/>
+          </a:fillRef>
+          <a:effectRef idx="2">
+            <a:schemeClr val="accent1"/>
+          </a:effectRef>
+          <a:fontRef idx="minor">
+            <a:schemeClr val="lt1"/>
+          </a:fontRef>
+        </p:style>
+        <p:txBody>
+          <a:bodyPr rtlCol="0" anchor="ctr" wrap="square" lIns="12700" rIns="12700" tIns="12700" bIns="12700"/>
+          <a:lstStyle/>
+          <a:p>
+            <a:pPr algn="ctr">
+              <a:defRPr sz="1336" b="0">
+                <a:solidFill>
+                  <a:srgbClr val="FFFFFF"/>
+                </a:solidFill>
+                <a:latin typeface="Play"/>
+                <a:ea typeface="Play"/>
+                <a:cs typeface="Play"/>
+              </a:defRPr>
+            </a:pPr>
+            <a:r>
+              <a:rPr sz="1336" b="0">
+                <a:solidFill>
+                  <a:srgbClr val="FFFFFF"/>
+                </a:solidFill>
+                <a:latin typeface="Play"/>
+                <a:ea typeface="Play"/>
+                <a:cs typeface="Play"/>
+              </a:rPr>
+              <a:t>Запуск</a:t>
+            </a:r>
+          </a:p>
+        </p:txBody>
+      </p:sp>
+      <p:sp>
+        <p:nvSpPr>
+          <p:cNvPr id="2438" name="Chevron 2437"/>
+          <p:cNvSpPr/>
+          <p:nvPr/>
+        </p:nvSpPr>
+        <p:spPr>
+          <a:xfrm>
+            <a:off x="4496795" y="2070125"/>
+            <a:ext cx="2011100" cy="661947"/>
+          </a:xfrm>
+          <a:prstGeom prst="chevron">
+            <a:avLst/>
+          </a:prstGeom>
+          <a:solidFill>
+            <a:srgbClr val="0077FF"/>
+          </a:solidFill>
+          <a:ln>
+            <a:noFill/>
+          </a:ln>
+        </p:spPr>
+        <p:style>
+          <a:lnRef idx="1">
+            <a:schemeClr val="accent1"/>
+          </a:lnRef>
+          <a:fillRef idx="3">
+            <a:schemeClr val="accent1"/>
+          </a:fillRef>
+          <a:effectRef idx="2">
+            <a:schemeClr val="accent1"/>
+          </a:effectRef>
+          <a:fontRef idx="minor">
+            <a:schemeClr val="lt1"/>
+          </a:fontRef>
+        </p:style>
+        <p:txBody>
+          <a:bodyPr rtlCol="0" anchor="ctr" wrap="square" lIns="12700" rIns="12700" tIns="12700" bIns="12700"/>
+          <a:lstStyle/>
+          <a:p>
+            <a:pPr algn="ctr">
+              <a:defRPr sz="1336" b="0">
+                <a:solidFill>
+                  <a:srgbClr val="FFFFFF"/>
+                </a:solidFill>
+                <a:latin typeface="Play"/>
+                <a:ea typeface="Play"/>
+                <a:cs typeface="Play"/>
+              </a:defRPr>
+            </a:pPr>
+            <a:r>
+              <a:rPr sz="1336" b="0">
+                <a:solidFill>
+                  <a:srgbClr val="FFFFFF"/>
+                </a:solidFill>
+                <a:latin typeface="Play"/>
+                <a:ea typeface="Play"/>
+                <a:cs typeface="Play"/>
+              </a:rPr>
+              <a:t>Аудит</a:t>
+            </a:r>
+          </a:p>
+        </p:txBody>
+      </p:sp>
+      <p:sp>
+        <p:nvSpPr>
+          <p:cNvPr id="2439" name="Chevron 2438"/>
+          <p:cNvSpPr/>
+          <p:nvPr/>
+        </p:nvSpPr>
+        <p:spPr>
+          <a:xfrm>
+            <a:off x="6608033" y="2070125"/>
+            <a:ext cx="2011100" cy="661947"/>
+          </a:xfrm>
+          <a:prstGeom prst="chevron">
+            <a:avLst/>
+          </a:prstGeom>
+          <a:solidFill>
+            <a:srgbClr val="0077FF"/>
+          </a:solidFill>
+          <a:ln>
+            <a:noFill/>
+          </a:ln>
+        </p:spPr>
+        <p:style>
+          <a:lnRef idx="1">
+            <a:schemeClr val="accent1"/>
+          </a:lnRef>
+          <a:fillRef idx="3">
+            <a:schemeClr val="accent1"/>
+          </a:fillRef>
+          <a:effectRef idx="2">
+            <a:schemeClr val="accent1"/>
+          </a:effectRef>
+          <a:fontRef idx="minor">
+            <a:schemeClr val="lt1"/>
+          </a:fontRef>
+        </p:style>
+        <p:txBody>
+          <a:bodyPr rtlCol="0" anchor="ctr" wrap="square" lIns="12700" rIns="12700" tIns="12700" bIns="12700"/>
+          <a:lstStyle/>
+          <a:p>
+            <a:pPr algn="ctr">
+              <a:defRPr sz="1336" b="0">
+                <a:solidFill>
+                  <a:srgbClr val="FFFFFF"/>
+                </a:solidFill>
+                <a:latin typeface="Play"/>
+                <a:ea typeface="Play"/>
+                <a:cs typeface="Play"/>
+              </a:defRPr>
+            </a:pPr>
+            <a:r>
+              <a:rPr sz="1336" b="0">
+                <a:solidFill>
+                  <a:srgbClr val="FFFFFF"/>
+                </a:solidFill>
+                <a:latin typeface="Play"/>
+                <a:ea typeface="Play"/>
+                <a:cs typeface="Play"/>
+              </a:rPr>
+              <a:t>Экспорт</a:t>
             </a:r>
           </a:p>
         </p:txBody>
@@ -9601,7 +10032,7 @@
                 <a:ea typeface="Play"/>
                 <a:cs typeface="Play"/>
               </a:rPr>
-              <a:t>Риски</a:t>
+              <a:t>Ресурсы и сроки</a:t>
             </a:r>
           </a:p>
         </p:txBody>
@@ -9650,7 +10081,7 @@
                 <a:ea typeface="Play"/>
                 <a:cs typeface="Play"/>
               </a:rPr>
-              <a:t>• Слабая модель может выдумать цифры, аудит проверяет каждое число</a:t>
+              <a:t>• Сервис работает на 2 vCPU / 2 ГБ RAM</a:t>
             </a:r>
           </a:p>
           <a:p>
@@ -9676,7 +10107,7 @@
                 <a:ea typeface="Play"/>
                 <a:cs typeface="Play"/>
               </a:rPr>
-              <a:t>• Неправильный шаблон может привести к плохому дизайну, сервис использует рабочую область</a:t>
+              <a:t>• Инференс за 6 недель стоит 1 400 руб</a:t>
             </a:r>
           </a:p>
           <a:p>
@@ -9702,7 +10133,7 @@
                 <a:ea typeface="Play"/>
                 <a:cs typeface="Play"/>
               </a:rPr>
-              <a:t>• Нагрузка выше 20 задач требует внешней очереди</a:t>
+              <a:t>• План: Q3 2026 подключить 4 команды, домен и HTTPS</a:t>
             </a:r>
           </a:p>
           <a:p>
@@ -9728,7 +10159,33 @@
                 <a:ea typeface="Play"/>
                 <a:cs typeface="Play"/>
               </a:rPr>
-              <a:t>• Зависимость от OpenAI‑совместимого протокола может ограничить масштаб</a:t>
+              <a:t>• Q4 2026 доступ для всей компании, интеграция с хранилищем</a:t>
+            </a:r>
+          </a:p>
+          <a:p>
+            <a:pPr algn="l">
+              <a:spcAft>
+                <a:spcPts val="300"/>
+              </a:spcAft>
+              <a:defRPr sz="1600">
+                <a:solidFill>
+                  <a:srgbClr val="000000"/>
+                </a:solidFill>
+                <a:latin typeface="Play"/>
+                <a:ea typeface="Play"/>
+                <a:cs typeface="Play"/>
+              </a:defRPr>
+            </a:pPr>
+            <a:r>
+              <a:rPr sz="1600">
+                <a:solidFill>
+                  <a:srgbClr val="000000"/>
+                </a:solidFill>
+                <a:latin typeface="Play"/>
+                <a:ea typeface="Play"/>
+                <a:cs typeface="Play"/>
+              </a:rPr>
+              <a:t>• Q1 2027 генерация иллюстраций под стиль шаблона</a:t>
             </a:r>
           </a:p>
         </p:txBody>
@@ -9753,19 +10210,23 @@
       <p:grpSpPr/>
       <p:sp>
         <p:nvSpPr>
-          <p:cNvPr id="662" name="Google Shape;662;p55"/>
+          <p:cNvPr id="1027" name="Google Shape;1027;p65"/>
           <p:cNvSpPr/>
           <p:nvPr/>
         </p:nvSpPr>
         <p:spPr>
           <a:xfrm>
-            <a:off x="8667705" y="4666977"/>
-            <a:ext cx="190499" cy="190475"/>
-          </a:xfrm>
-          <a:prstGeom prst="rect">
-            <a:avLst/>
-          </a:prstGeom>
-          <a:noFill/>
+            <a:off x="6064222" y="1209852"/>
+            <a:ext cx="2793985" cy="3014270"/>
+          </a:xfrm>
+          <a:prstGeom prst="roundRect">
+            <a:avLst>
+              <a:gd fmla="val 3436" name="adj"/>
+            </a:avLst>
+          </a:prstGeom>
+          <a:solidFill>
+            <a:schemeClr val="lt2"/>
+          </a:solidFill>
           <a:ln>
             <a:noFill/>
           </a:ln>
@@ -9792,21 +10253,52 @@
           </a:p>
         </p:txBody>
       </p:sp>
-      <p:sp>
-        <p:nvSpPr>
-          <p:cNvPr id="663" name="Google Shape;663;p55"/>
-          <p:cNvSpPr/>
-          <p:nvPr/>
-        </p:nvSpPr>
-        <p:spPr>
-          <a:xfrm>
-            <a:off x="285748" y="286047"/>
-            <a:ext cx="8572456" cy="3938075"/>
+      <p:pic>
+        <p:nvPicPr>
+          <p:cNvPr descr=" " id="1028" name="Google Shape;1028;p65"/>
+          <p:cNvPicPr preferRelativeResize="0"/>
+          <p:nvPr/>
+        </p:nvPicPr>
+        <p:blipFill rotWithShape="1">
+          <a:blip r:embed="rId2">
+            <a:alphaModFix/>
+          </a:blip>
+          <a:srcRect b="0" l="0" r="0" t="0"/>
+          <a:stretch/>
+        </p:blipFill>
+        <p:spPr>
+          <a:xfrm>
+            <a:off x="8203313" y="3566983"/>
+            <a:ext cx="466723" cy="466664"/>
           </a:xfrm>
           <a:prstGeom prst="rect">
             <a:avLst/>
           </a:prstGeom>
           <a:noFill/>
+          <a:ln>
+            <a:noFill/>
+          </a:ln>
+        </p:spPr>
+      </p:pic>
+      <p:sp>
+        <p:nvSpPr>
+          <p:cNvPr id="1029" name="Google Shape;1029;p65"/>
+          <p:cNvSpPr/>
+          <p:nvPr/>
+        </p:nvSpPr>
+        <p:spPr>
+          <a:xfrm>
+            <a:off x="3174981" y="1209852"/>
+            <a:ext cx="2793985" cy="3014270"/>
+          </a:xfrm>
+          <a:prstGeom prst="roundRect">
+            <a:avLst>
+              <a:gd fmla="val 3436" name="adj"/>
+            </a:avLst>
+          </a:prstGeom>
+          <a:solidFill>
+            <a:schemeClr val="lt2"/>
+          </a:solidFill>
           <a:ln>
             <a:noFill/>
           </a:ln>
@@ -9833,21 +10325,52 @@
           </a:p>
         </p:txBody>
       </p:sp>
-      <p:sp>
-        <p:nvSpPr>
-          <p:cNvPr id="664" name="Google Shape;664;p55"/>
-          <p:cNvSpPr/>
-          <p:nvPr/>
-        </p:nvSpPr>
-        <p:spPr>
-          <a:xfrm>
-            <a:off x="285748" y="1209852"/>
-            <a:ext cx="8572456" cy="3014270"/>
+      <p:pic>
+        <p:nvPicPr>
+          <p:cNvPr descr=" " id="1030" name="Google Shape;1030;p65"/>
+          <p:cNvPicPr preferRelativeResize="0"/>
+          <p:nvPr/>
+        </p:nvPicPr>
+        <p:blipFill rotWithShape="1">
+          <a:blip r:embed="rId2">
+            <a:alphaModFix/>
+          </a:blip>
+          <a:srcRect b="0" l="0" r="0" t="0"/>
+          <a:stretch/>
+        </p:blipFill>
+        <p:spPr>
+          <a:xfrm>
+            <a:off x="5310249" y="3566983"/>
+            <a:ext cx="466723" cy="466664"/>
           </a:xfrm>
           <a:prstGeom prst="rect">
             <a:avLst/>
           </a:prstGeom>
           <a:noFill/>
+          <a:ln>
+            <a:noFill/>
+          </a:ln>
+        </p:spPr>
+      </p:pic>
+      <p:sp>
+        <p:nvSpPr>
+          <p:cNvPr id="1031" name="Google Shape;1031;p65"/>
+          <p:cNvSpPr/>
+          <p:nvPr/>
+        </p:nvSpPr>
+        <p:spPr>
+          <a:xfrm>
+            <a:off x="285749" y="1209852"/>
+            <a:ext cx="2793985" cy="3014270"/>
+          </a:xfrm>
+          <a:prstGeom prst="roundRect">
+            <a:avLst>
+              <a:gd fmla="val 3436" name="adj"/>
+            </a:avLst>
+          </a:prstGeom>
+          <a:solidFill>
+            <a:schemeClr val="lt2"/>
+          </a:solidFill>
           <a:ln>
             <a:noFill/>
           </a:ln>
@@ -9876,23 +10399,19 @@
       </p:sp>
       <p:sp>
         <p:nvSpPr>
-          <p:cNvPr id="665" name="Google Shape;665;p55"/>
+          <p:cNvPr id="1032" name="Google Shape;1032;p65"/>
           <p:cNvSpPr/>
           <p:nvPr/>
         </p:nvSpPr>
         <p:spPr>
           <a:xfrm>
-            <a:off x="285749" y="1209852"/>
-            <a:ext cx="2071677" cy="3014270"/>
-          </a:xfrm>
-          <a:prstGeom prst="roundRect">
-            <a:avLst>
-              <a:gd fmla="val 4634" name="adj"/>
-            </a:avLst>
-          </a:prstGeom>
-          <a:solidFill>
-            <a:schemeClr val="lt2"/>
-          </a:solidFill>
+            <a:off x="285748" y="286047"/>
+            <a:ext cx="8572456" cy="3938075"/>
+          </a:xfrm>
+          <a:prstGeom prst="rect">
+            <a:avLst/>
+          </a:prstGeom>
+          <a:noFill/>
           <a:ln>
             <a:noFill/>
           </a:ln>
@@ -9921,14 +10440,14 @@
       </p:sp>
       <p:sp>
         <p:nvSpPr>
-          <p:cNvPr id="666" name="Google Shape;666;p55"/>
+          <p:cNvPr id="1033" name="Google Shape;1033;p65"/>
           <p:cNvSpPr/>
           <p:nvPr/>
         </p:nvSpPr>
         <p:spPr>
           <a:xfrm>
-            <a:off x="438148" y="1362233"/>
-            <a:ext cx="1766878" cy="342855"/>
+            <a:off x="285748" y="1209852"/>
+            <a:ext cx="8572456" cy="3014270"/>
           </a:xfrm>
           <a:prstGeom prst="rect">
             <a:avLst/>
@@ -9962,23 +10481,19 @@
       </p:sp>
       <p:sp>
         <p:nvSpPr>
-          <p:cNvPr id="667" name="Google Shape;667;p55"/>
+          <p:cNvPr id="1034" name="Google Shape;1034;p65"/>
           <p:cNvSpPr/>
           <p:nvPr/>
         </p:nvSpPr>
         <p:spPr>
           <a:xfrm>
-            <a:off x="438148" y="1362233"/>
-            <a:ext cx="76199" cy="76190"/>
-          </a:xfrm>
-          <a:prstGeom prst="roundRect">
-            <a:avLst>
-              <a:gd fmla="val 31500" name="adj"/>
-            </a:avLst>
-          </a:prstGeom>
-          <a:solidFill>
-            <a:srgbClr val="0077FF"/>
-          </a:solidFill>
+            <a:off x="476248" y="1400327"/>
+            <a:ext cx="2412987" cy="1009519"/>
+          </a:xfrm>
+          <a:prstGeom prst="rect">
+            <a:avLst/>
+          </a:prstGeom>
+          <a:noFill/>
           <a:ln>
             <a:noFill/>
           </a:ln>
@@ -10007,22 +10522,22 @@
       </p:sp>
       <p:sp>
         <p:nvSpPr>
-          <p:cNvPr id="670" name="Google Shape;670;p55"/>
+          <p:cNvPr id="1035" name="Google Shape;1035;p65"/>
           <p:cNvSpPr/>
           <p:nvPr/>
         </p:nvSpPr>
         <p:spPr>
           <a:xfrm>
-            <a:off x="2452675" y="1209852"/>
-            <a:ext cx="2071677" cy="3014270"/>
+            <a:off x="476248" y="1400328"/>
+            <a:ext cx="76199" cy="76190"/>
           </a:xfrm>
           <a:prstGeom prst="roundRect">
             <a:avLst>
-              <a:gd fmla="val 4634" name="adj"/>
+              <a:gd fmla="val 31500" name="adj"/>
             </a:avLst>
           </a:prstGeom>
           <a:solidFill>
-            <a:schemeClr val="lt2"/>
+            <a:srgbClr val="0077FF"/>
           </a:solidFill>
           <a:ln>
             <a:noFill/>
@@ -10052,14 +10567,14 @@
       </p:sp>
       <p:sp>
         <p:nvSpPr>
-          <p:cNvPr id="671" name="Google Shape;671;p55"/>
+          <p:cNvPr id="1037" name="Google Shape;1037;p65"/>
           <p:cNvSpPr/>
           <p:nvPr/>
         </p:nvSpPr>
         <p:spPr>
           <a:xfrm>
-            <a:off x="2605074" y="1362233"/>
-            <a:ext cx="1766878" cy="342855"/>
+            <a:off x="2422509" y="3566983"/>
+            <a:ext cx="466723" cy="466664"/>
           </a:xfrm>
           <a:prstGeom prst="rect">
             <a:avLst/>
@@ -10091,25 +10606,75 @@
           </a:p>
         </p:txBody>
       </p:sp>
-      <p:sp>
-        <p:nvSpPr>
-          <p:cNvPr id="672" name="Google Shape;672;p55"/>
+      <p:pic>
+        <p:nvPicPr>
+          <p:cNvPr descr=" " id="1038" name="Google Shape;1038;p65"/>
+          <p:cNvPicPr preferRelativeResize="0"/>
+          <p:nvPr/>
+        </p:nvPicPr>
+        <p:blipFill rotWithShape="1">
+          <a:blip r:embed="rId2">
+            <a:alphaModFix/>
+          </a:blip>
+          <a:srcRect b="0" l="0" r="0" t="0"/>
+          <a:stretch/>
+        </p:blipFill>
+        <p:spPr>
+          <a:xfrm>
+            <a:off x="2422506" y="3566983"/>
+            <a:ext cx="466723" cy="466664"/>
+          </a:xfrm>
+          <a:prstGeom prst="rect">
+            <a:avLst/>
+          </a:prstGeom>
+          <a:noFill/>
+          <a:ln>
+            <a:noFill/>
+          </a:ln>
+        </p:spPr>
+      </p:pic>
+      <p:pic>
+        <p:nvPicPr>
+          <p:cNvPr descr=" " id="1039" name="Google Shape;1039;p65"/>
+          <p:cNvPicPr preferRelativeResize="0"/>
+          <p:nvPr/>
+        </p:nvPicPr>
+        <p:blipFill rotWithShape="1">
+          <a:blip r:embed="rId3">
+            <a:alphaModFix/>
+          </a:blip>
+          <a:srcRect b="0" l="0" r="0" t="0"/>
+          <a:stretch/>
+        </p:blipFill>
+        <p:spPr>
+          <a:xfrm>
+            <a:off x="2555859" y="3700316"/>
+            <a:ext cx="200024" cy="199999"/>
+          </a:xfrm>
+          <a:prstGeom prst="rect">
+            <a:avLst/>
+          </a:prstGeom>
+          <a:noFill/>
+          <a:ln>
+            <a:noFill/>
+          </a:ln>
+        </p:spPr>
+      </p:pic>
+      <p:sp>
+        <p:nvSpPr>
+          <p:cNvPr id="1040" name="Google Shape;1040;p65"/>
           <p:cNvSpPr/>
           <p:nvPr/>
         </p:nvSpPr>
         <p:spPr>
           <a:xfrm>
-            <a:off x="2605074" y="1362233"/>
-            <a:ext cx="76199" cy="76190"/>
-          </a:xfrm>
-          <a:prstGeom prst="roundRect">
-            <a:avLst>
-              <a:gd fmla="val 31500" name="adj"/>
-            </a:avLst>
-          </a:prstGeom>
-          <a:solidFill>
-            <a:srgbClr val="0077FF"/>
-          </a:solidFill>
+            <a:off x="3365480" y="1400327"/>
+            <a:ext cx="2412987" cy="1009519"/>
+          </a:xfrm>
+          <a:prstGeom prst="rect">
+            <a:avLst/>
+          </a:prstGeom>
+          <a:noFill/>
           <a:ln>
             <a:noFill/>
           </a:ln>
@@ -10138,22 +10703,22 @@
       </p:sp>
       <p:sp>
         <p:nvSpPr>
-          <p:cNvPr id="675" name="Google Shape;675;p55"/>
+          <p:cNvPr id="1041" name="Google Shape;1041;p65"/>
           <p:cNvSpPr/>
           <p:nvPr/>
         </p:nvSpPr>
         <p:spPr>
           <a:xfrm>
-            <a:off x="4619601" y="1209852"/>
-            <a:ext cx="2071677" cy="3014270"/>
+            <a:off x="3365480" y="1400328"/>
+            <a:ext cx="76199" cy="76190"/>
           </a:xfrm>
           <a:prstGeom prst="roundRect">
             <a:avLst>
-              <a:gd fmla="val 4634" name="adj"/>
+              <a:gd fmla="val 31500" name="adj"/>
             </a:avLst>
           </a:prstGeom>
           <a:solidFill>
-            <a:schemeClr val="lt2"/>
+            <a:srgbClr val="0077FF"/>
           </a:solidFill>
           <a:ln>
             <a:noFill/>
@@ -10183,14 +10748,14 @@
       </p:sp>
       <p:sp>
         <p:nvSpPr>
-          <p:cNvPr id="676" name="Google Shape;676;p55"/>
+          <p:cNvPr id="1043" name="Google Shape;1043;p65"/>
           <p:cNvSpPr/>
           <p:nvPr/>
         </p:nvSpPr>
         <p:spPr>
           <a:xfrm>
-            <a:off x="4772001" y="1362233"/>
-            <a:ext cx="1766878" cy="342855"/>
+            <a:off x="5311741" y="3566983"/>
+            <a:ext cx="466723" cy="466664"/>
           </a:xfrm>
           <a:prstGeom prst="rect">
             <a:avLst/>
@@ -10222,25 +10787,48 @@
           </a:p>
         </p:txBody>
       </p:sp>
-      <p:sp>
-        <p:nvSpPr>
-          <p:cNvPr id="677" name="Google Shape;677;p55"/>
+      <p:pic>
+        <p:nvPicPr>
+          <p:cNvPr descr=" " id="1044" name="Google Shape;1044;p65"/>
+          <p:cNvPicPr preferRelativeResize="0"/>
+          <p:nvPr/>
+        </p:nvPicPr>
+        <p:blipFill rotWithShape="1">
+          <a:blip r:embed="rId3">
+            <a:alphaModFix/>
+          </a:blip>
+          <a:srcRect b="0" l="0" r="0" t="0"/>
+          <a:stretch/>
+        </p:blipFill>
+        <p:spPr>
+          <a:xfrm>
+            <a:off x="5445091" y="3700316"/>
+            <a:ext cx="200024" cy="199999"/>
+          </a:xfrm>
+          <a:prstGeom prst="rect">
+            <a:avLst/>
+          </a:prstGeom>
+          <a:noFill/>
+          <a:ln>
+            <a:noFill/>
+          </a:ln>
+        </p:spPr>
+      </p:pic>
+      <p:sp>
+        <p:nvSpPr>
+          <p:cNvPr id="1045" name="Google Shape;1045;p65"/>
           <p:cNvSpPr/>
           <p:nvPr/>
         </p:nvSpPr>
         <p:spPr>
           <a:xfrm>
-            <a:off x="4772001" y="1362233"/>
-            <a:ext cx="76199" cy="76190"/>
-          </a:xfrm>
-          <a:prstGeom prst="roundRect">
-            <a:avLst>
-              <a:gd fmla="val 31500" name="adj"/>
-            </a:avLst>
-          </a:prstGeom>
-          <a:solidFill>
-            <a:srgbClr val="0077FF"/>
-          </a:solidFill>
+            <a:off x="6254721" y="1400327"/>
+            <a:ext cx="2412987" cy="1009519"/>
+          </a:xfrm>
+          <a:prstGeom prst="rect">
+            <a:avLst/>
+          </a:prstGeom>
+          <a:noFill/>
           <a:ln>
             <a:noFill/>
           </a:ln>
@@ -10269,22 +10857,22 @@
       </p:sp>
       <p:sp>
         <p:nvSpPr>
-          <p:cNvPr id="680" name="Google Shape;680;p55"/>
+          <p:cNvPr id="1046" name="Google Shape;1046;p65"/>
           <p:cNvSpPr/>
           <p:nvPr/>
         </p:nvSpPr>
         <p:spPr>
           <a:xfrm>
-            <a:off x="6786527" y="1209852"/>
-            <a:ext cx="2071677" cy="3014270"/>
+            <a:off x="6254721" y="1400328"/>
+            <a:ext cx="76199" cy="76190"/>
           </a:xfrm>
           <a:prstGeom prst="roundRect">
             <a:avLst>
-              <a:gd fmla="val 4634" name="adj"/>
+              <a:gd fmla="val 31500" name="adj"/>
             </a:avLst>
           </a:prstGeom>
           <a:solidFill>
-            <a:schemeClr val="lt2"/>
+            <a:srgbClr val="0077FF"/>
           </a:solidFill>
           <a:ln>
             <a:noFill/>
@@ -10314,14 +10902,14 @@
       </p:sp>
       <p:sp>
         <p:nvSpPr>
-          <p:cNvPr id="681" name="Google Shape;681;p55"/>
+          <p:cNvPr id="1048" name="Google Shape;1048;p65"/>
           <p:cNvSpPr/>
           <p:nvPr/>
         </p:nvSpPr>
         <p:spPr>
           <a:xfrm>
-            <a:off x="6938927" y="1362233"/>
-            <a:ext cx="1766878" cy="342855"/>
+            <a:off x="8200982" y="3566983"/>
+            <a:ext cx="466723" cy="466664"/>
           </a:xfrm>
           <a:prstGeom prst="rect">
             <a:avLst/>
@@ -10353,54 +10941,36 @@
           </a:p>
         </p:txBody>
       </p:sp>
-      <p:sp>
-        <p:nvSpPr>
-          <p:cNvPr id="682" name="Google Shape;682;p55"/>
-          <p:cNvSpPr/>
-          <p:nvPr/>
-        </p:nvSpPr>
-        <p:spPr>
-          <a:xfrm>
-            <a:off x="6938927" y="1362233"/>
-            <a:ext cx="76199" cy="76190"/>
-          </a:xfrm>
-          <a:prstGeom prst="roundRect">
-            <a:avLst>
-              <a:gd fmla="val 31500" name="adj"/>
-            </a:avLst>
-          </a:prstGeom>
-          <a:solidFill>
-            <a:srgbClr val="0077FF"/>
-          </a:solidFill>
+      <p:pic>
+        <p:nvPicPr>
+          <p:cNvPr descr=" " id="1049" name="Google Shape;1049;p65"/>
+          <p:cNvPicPr preferRelativeResize="0"/>
+          <p:nvPr/>
+        </p:nvPicPr>
+        <p:blipFill rotWithShape="1">
+          <a:blip r:embed="rId3">
+            <a:alphaModFix/>
+          </a:blip>
+          <a:srcRect b="0" l="0" r="0" t="0"/>
+          <a:stretch/>
+        </p:blipFill>
+        <p:spPr>
+          <a:xfrm>
+            <a:off x="8334332" y="3700316"/>
+            <a:ext cx="200024" cy="199999"/>
+          </a:xfrm>
+          <a:prstGeom prst="rect">
+            <a:avLst/>
+          </a:prstGeom>
+          <a:noFill/>
           <a:ln>
             <a:noFill/>
           </a:ln>
         </p:spPr>
-        <p:txBody>
-          <a:bodyPr anchorCtr="0" anchor="ctr" bIns="91425" lIns="91425" spcFirstLastPara="1" rIns="91425" wrap="square" tIns="91425">
-            <a:noAutofit/>
-          </a:bodyPr>
-          <a:lstStyle/>
-          <a:p>
-            <a:pPr indent="0" lvl="0" marL="0" rtl="0" algn="l">
-              <a:spcBef>
-                <a:spcPts val="0"/>
-              </a:spcBef>
-              <a:spcAft>
-                <a:spcPts val="0"/>
-              </a:spcAft>
-              <a:buNone/>
-            </a:pPr>
-            <a:r>
-              <a:t/>
-            </a:r>
-            <a:endParaRPr/>
-          </a:p>
-        </p:txBody>
-      </p:sp>
-      <p:sp>
-        <p:nvSpPr>
-          <p:cNvPr id="683" name="title"/>
+      </p:pic>
+      <p:sp>
+        <p:nvSpPr>
+          <p:cNvPr id="1050" name="title"/>
           <p:cNvSpPr txBox="1"/>
           <p:nvPr/>
         </p:nvSpPr>
@@ -10442,21 +11012,21 @@
                 <a:ea typeface="Play"/>
                 <a:cs typeface="Play"/>
               </a:rPr>
-              <a:t>Преимущества для компании</a:t>
+              <a:t>Риски</a:t>
             </a:r>
           </a:p>
         </p:txBody>
       </p:sp>
       <p:sp>
         <p:nvSpPr>
-          <p:cNvPr id="684" name="card_0"/>
+          <p:cNvPr id="1051" name="card_0"/>
           <p:cNvSpPr txBox="1"/>
           <p:nvPr/>
         </p:nvSpPr>
         <p:spPr>
           <a:xfrm>
-            <a:off x="582575" y="1963753"/>
-            <a:ext cx="1516144" cy="2001662"/>
+            <a:off x="576030" y="1728705"/>
+            <a:ext cx="2264138" cy="632134"/>
           </a:xfrm>
           <a:prstGeom prst="rect">
             <a:avLst/>
@@ -10473,7 +11043,7 @@
               <a:spcAft>
                 <a:spcPts val="300"/>
               </a:spcAft>
-              <a:defRPr sz="1800" b="0">
+              <a:defRPr sz="1200" b="0">
                 <a:solidFill>
                   <a:srgbClr val="000000"/>
                 </a:solidFill>
@@ -10483,7 +11053,7 @@
               </a:defRPr>
             </a:pPr>
             <a:r>
-              <a:rPr sz="1800" b="0">
+              <a:rPr sz="1200" b="0">
                 <a:solidFill>
                   <a:srgbClr val="000000"/>
                 </a:solidFill>
@@ -10491,21 +11061,21 @@
                 <a:ea typeface="Play"/>
                 <a:cs typeface="Play"/>
               </a:rPr>
-              <a:t>Сокращение времени создания презентаций до 4 мин</a:t>
+              <a:t>Модель может выдумать цифры, аудит проверяет источники</a:t>
             </a:r>
           </a:p>
         </p:txBody>
       </p:sp>
       <p:sp>
         <p:nvSpPr>
-          <p:cNvPr id="685" name="card_1"/>
+          <p:cNvPr id="1052" name="card_1"/>
           <p:cNvSpPr txBox="1"/>
           <p:nvPr/>
         </p:nvSpPr>
         <p:spPr>
           <a:xfrm>
-            <a:off x="2749428" y="1963753"/>
-            <a:ext cx="1516144" cy="2001662"/>
+            <a:off x="3465259" y="1728705"/>
+            <a:ext cx="2264138" cy="632134"/>
           </a:xfrm>
           <a:prstGeom prst="rect">
             <a:avLst/>
@@ -10522,7 +11092,7 @@
               <a:spcAft>
                 <a:spcPts val="300"/>
               </a:spcAft>
-              <a:defRPr sz="1800" b="0">
+              <a:defRPr sz="1200" b="0">
                 <a:solidFill>
                   <a:srgbClr val="000000"/>
                 </a:solidFill>
@@ -10532,7 +11102,7 @@
               </a:defRPr>
             </a:pPr>
             <a:r>
-              <a:rPr sz="1800" b="0">
+              <a:rPr sz="1200" b="0">
                 <a:solidFill>
                   <a:srgbClr val="000000"/>
                 </a:solidFill>
@@ -10540,21 +11110,21 @@
                 <a:ea typeface="Play"/>
                 <a:cs typeface="Play"/>
               </a:rPr>
-              <a:t>Увеличение количества готовых колод за тот же период</a:t>
+              <a:t>Плохой шаблон приводит к использованию рабочей области</a:t>
             </a:r>
           </a:p>
         </p:txBody>
       </p:sp>
       <p:sp>
         <p:nvSpPr>
-          <p:cNvPr id="686" name="card_2"/>
+          <p:cNvPr id="1053" name="card_2"/>
           <p:cNvSpPr txBox="1"/>
           <p:nvPr/>
         </p:nvSpPr>
         <p:spPr>
           <a:xfrm>
-            <a:off x="4916374" y="1963753"/>
-            <a:ext cx="1516144" cy="2001662"/>
+            <a:off x="6354489" y="1728705"/>
+            <a:ext cx="2264138" cy="632134"/>
           </a:xfrm>
           <a:prstGeom prst="rect">
             <a:avLst/>
@@ -10571,7 +11141,7 @@
               <a:spcAft>
                 <a:spcPts val="300"/>
               </a:spcAft>
-              <a:defRPr sz="1800" b="0">
+              <a:defRPr sz="1200" b="0">
                 <a:solidFill>
                   <a:srgbClr val="000000"/>
                 </a:solidFill>
@@ -10581,7 +11151,7 @@
               </a:defRPr>
             </a:pPr>
             <a:r>
-              <a:rPr sz="1800" b="0">
+              <a:rPr sz="1200" b="0">
                 <a:solidFill>
                   <a:srgbClr val="000000"/>
                 </a:solidFill>
@@ -10589,56 +11159,7 @@
                 <a:ea typeface="Play"/>
                 <a:cs typeface="Play"/>
               </a:rPr>
-              <a:t>Снижение ошибок фирменного стиля до 3%</a:t>
-            </a:r>
-          </a:p>
-        </p:txBody>
-      </p:sp>
-      <p:sp>
-        <p:nvSpPr>
-          <p:cNvPr id="687" name="card_3"/>
-          <p:cNvSpPr txBox="1"/>
-          <p:nvPr/>
-        </p:nvSpPr>
-        <p:spPr>
-          <a:xfrm>
-            <a:off x="7083319" y="1963753"/>
-            <a:ext cx="1516144" cy="2001662"/>
-          </a:xfrm>
-          <a:prstGeom prst="rect">
-            <a:avLst/>
-          </a:prstGeom>
-          <a:noFill/>
-        </p:spPr>
-        <p:txBody>
-          <a:bodyPr wrap="square" lIns="76200" rIns="76200" tIns="50800" bIns="50800">
-            <a:spAutoFit/>
-          </a:bodyPr>
-          <a:lstStyle/>
-          <a:p>
-            <a:pPr algn="l">
-              <a:spcAft>
-                <a:spcPts val="300"/>
-              </a:spcAft>
-              <a:defRPr sz="1600" b="0">
-                <a:solidFill>
-                  <a:srgbClr val="000000"/>
-                </a:solidFill>
-                <a:latin typeface="Play"/>
-                <a:ea typeface="Play"/>
-                <a:cs typeface="Play"/>
-              </a:defRPr>
-            </a:pPr>
-            <a:r>
-              <a:rPr sz="1600" b="0">
-                <a:solidFill>
-                  <a:srgbClr val="000000"/>
-                </a:solidFill>
-                <a:latin typeface="Play"/>
-                <a:ea typeface="Play"/>
-                <a:cs typeface="Play"/>
-              </a:rPr>
-              <a:t>Повышение эффективности дизайнеров, освобождение от рутинных задач</a:t>
+              <a:t>Нагрузка выше 20 задач требует внешней очереди</a:t>
             </a:r>
           </a:p>
         </p:txBody>
@@ -10670,7 +11191,7 @@
         <p:spPr>
           <a:xfrm>
             <a:off x="445963" y="1555901"/>
-            <a:ext cx="8300171" cy="2676842"/>
+            <a:ext cx="8300171" cy="2610802"/>
           </a:xfrm>
           <a:prstGeom prst="roundRect">
             <a:avLst/>
@@ -10716,7 +11237,7 @@
         <p:spPr>
           <a:xfrm>
             <a:off x="572963" y="1682901"/>
-            <a:ext cx="4373118" cy="655320"/>
+            <a:ext cx="4373118" cy="1183640"/>
           </a:xfrm>
           <a:prstGeom prst="rect">
             <a:avLst/>
@@ -10751,7 +11272,7 @@
                 <a:ea typeface="Play"/>
                 <a:cs typeface="Play"/>
               </a:rPr>
-              <a:t>Итоги</a:t>
+              <a:t>Решение: запуск на всю компанию</a:t>
             </a:r>
           </a:p>
         </p:txBody>
@@ -10764,8 +11285,8 @@
         </p:nvSpPr>
         <p:spPr>
           <a:xfrm>
-            <a:off x="572963" y="2518244"/>
-            <a:ext cx="8046171" cy="1905165"/>
+            <a:off x="572963" y="3046564"/>
+            <a:ext cx="8046171" cy="1376845"/>
           </a:xfrm>
           <a:prstGeom prst="rect">
             <a:avLst/>
@@ -10800,7 +11321,7 @@
                 <a:ea typeface="Play"/>
                 <a:cs typeface="Play"/>
               </a:rPr>
-              <a:t>• Сервис готов к масштабированию, требуется одобрение руководства</a:t>
+              <a:t>• Попросить решение о запуске на всю компанию</a:t>
             </a:r>
           </a:p>
           <a:p>
@@ -10826,7 +11347,7 @@
                 <a:ea typeface="Play"/>
                 <a:cs typeface="Play"/>
               </a:rPr>
-              <a:t>• Ожидается экономия времени и повышение качества презентаций</a:t>
+              <a:t>• Ожидаем сокращения времени сборки до 4 мин</a:t>
             </a:r>
           </a:p>
           <a:p>
@@ -10852,33 +11373,7 @@
                 <a:ea typeface="Play"/>
                 <a:cs typeface="Play"/>
               </a:rPr>
-              <a:t>• Пилот подтвердил работоспособность и низкие затраты</a:t>
-            </a:r>
-          </a:p>
-          <a:p>
-            <a:pPr algn="l">
-              <a:spcAft>
-                <a:spcPts val="300"/>
-              </a:spcAft>
-              <a:defRPr sz="1800">
-                <a:solidFill>
-                  <a:srgbClr val="000000"/>
-                </a:solidFill>
-                <a:latin typeface="Play"/>
-                <a:ea typeface="Play"/>
-                <a:cs typeface="Play"/>
-              </a:defRPr>
-            </a:pPr>
-            <a:r>
-              <a:rPr sz="1800">
-                <a:solidFill>
-                  <a:srgbClr val="000000"/>
-                </a:solidFill>
-                <a:latin typeface="Play"/>
-                <a:ea typeface="Play"/>
-                <a:cs typeface="Play"/>
-              </a:rPr>
-              <a:t>• Риски минимизированы благодаря аудитам и резерву</a:t>
+              <a:t>• Планируем интеграцию с корпоративными системами</a:t>
             </a:r>
           </a:p>
         </p:txBody>

--- a/samples/VK_Tech_шаблон__classic.pptx
+++ b/samples/VK_Tech_шаблон__classic.pptx
@@ -279,7 +279,7 @@
               <c:strCache>
                 <c:ptCount val="1"/>
                 <c:pt idx="0">
-                  <c:v>Время, мин</c:v>
+                  <c:v>Время (мин)</c:v>
                 </c:pt>
               </c:strCache>
             </c:strRef>
@@ -300,10 +300,10 @@
               <c:strCache>
                 <c:ptCount val="2"/>
                 <c:pt idx="0">
-                  <c:v>До</c:v>
+                  <c:v>Текущее</c:v>
                 </c:pt>
                 <c:pt idx="1">
-                  <c:v>После</c:v>
+                  <c:v>Пилот</c:v>
                 </c:pt>
               </c:strCache>
             </c:strRef>
@@ -419,7 +419,7 @@
                   </a:defRPr>
                 </a:pPr>
                 <a:r>
-                  <a:t>Время, мин, мин</a:t>
+                  <a:t>Время (мин), мин</a:t>
                 </a:r>
               </a:p>
             </c:rich>
@@ -514,10 +514,10 @@
               <c:strCache>
                 <c:ptCount val="2"/>
                 <c:pt idx="0">
-                  <c:v>До</c:v>
+                  <c:v>Текущее</c:v>
                 </c:pt>
                 <c:pt idx="1">
-                  <c:v>После</c:v>
+                  <c:v>Пилот</c:v>
                 </c:pt>
               </c:strCache>
             </c:strRef>
@@ -539,7 +539,7 @@
           </c:val>
         </c:ser>
         <c:dLbls>
-          <c:numFmt formatCode="0&quot; кол-во&quot;" sourceLinked="0"/>
+          <c:numFmt formatCode="0&quot; колоды&quot;" sourceLinked="0"/>
           <c:txPr>
             <a:bodyPr wrap="none"/>
             <a:lstStyle/>
@@ -633,7 +633,429 @@
                   </a:defRPr>
                 </a:pPr>
                 <a:r>
-                  <a:t>Нарушения, кол-во</a:t>
+                  <a:t>Нарушения, колоды</a:t>
+                </a:r>
+              </a:p>
+            </c:rich>
+          </c:tx>
+          <c:layout/>
+          <c:overlay val="0"/>
+        </c:title>
+        <c:majorTickMark val="out"/>
+        <c:minorTickMark val="none"/>
+        <c:tickLblPos val="nextTo"/>
+        <c:txPr>
+          <a:bodyPr/>
+          <a:lstStyle/>
+          <a:p>
+            <a:pPr>
+              <a:defRPr sz="1100" b="0">
+                <a:solidFill>
+                  <a:srgbClr val="000000"/>
+                </a:solidFill>
+                <a:latin typeface="Play"/>
+                <a:ea typeface="Play"/>
+                <a:cs typeface="Play"/>
+              </a:defRPr>
+            </a:pPr>
+          </a:p>
+        </c:txPr>
+        <c:crossAx val="-2068027336"/>
+        <c:crosses val="autoZero"/>
+      </c:valAx>
+    </c:plotArea>
+    <c:dispBlanksAs val="gap"/>
+  </c:chart>
+  <c:txPr>
+    <a:bodyPr/>
+    <a:lstStyle/>
+    <a:p>
+      <a:pPr>
+        <a:defRPr sz="1200" b="0">
+          <a:solidFill>
+            <a:srgbClr val="000000"/>
+          </a:solidFill>
+          <a:latin typeface="Play"/>
+          <a:ea typeface="Play"/>
+          <a:cs typeface="Play"/>
+        </a:defRPr>
+      </a:pPr>
+      <a:endParaRPr lang="en-US"/>
+    </a:p>
+  </c:txPr>
+  <c:externalData r:id="rId1">
+    <c:autoUpdate val="0"/>
+  </c:externalData>
+</c:chartSpace>
+</file>
+
+<file path=ppt/charts/chart3.xml><?xml version="1.0" encoding="utf-8"?>
+<c:chartSpace xmlns:c="http://schemas.openxmlformats.org/drawingml/2006/chart" xmlns:a="http://schemas.openxmlformats.org/drawingml/2006/main" xmlns:r="http://schemas.openxmlformats.org/officeDocument/2006/relationships">
+  <c:date1904 val="0"/>
+  <c:chart>
+    <c:autoTitleDeleted val="1"/>
+    <c:plotArea>
+      <c:barChart>
+        <c:barDir val="col"/>
+        <c:grouping val="clustered"/>
+        <c:ser>
+          <c:idx val="0"/>
+          <c:order val="0"/>
+          <c:tx>
+            <c:strRef>
+              <c:f>Sheet1!$B$1</c:f>
+              <c:strCache>
+                <c:ptCount val="1"/>
+                <c:pt idx="0">
+                  <c:v>Запросы</c:v>
+                </c:pt>
+              </c:strCache>
+            </c:strRef>
+          </c:tx>
+          <c:spPr>
+            <a:solidFill>
+              <a:srgbClr val="0077FF"/>
+            </a:solidFill>
+            <a:ln>
+              <a:solidFill>
+                <a:srgbClr val="0077FF"/>
+              </a:solidFill>
+            </a:ln>
+          </c:spPr>
+          <c:cat>
+            <c:strRef>
+              <c:f>Sheet1!$A$2:$A$3</c:f>
+              <c:strCache>
+                <c:ptCount val="2"/>
+                <c:pt idx="0">
+                  <c:v>Текущее</c:v>
+                </c:pt>
+                <c:pt idx="1">
+                  <c:v>Пилот</c:v>
+                </c:pt>
+              </c:strCache>
+            </c:strRef>
+          </c:cat>
+          <c:val>
+            <c:numRef>
+              <c:f>Sheet1!$B$2:$B$3</c:f>
+              <c:numCache>
+                <c:formatCode>General</c:formatCode>
+                <c:ptCount val="2"/>
+                <c:pt idx="0">
+                  <c:v>11.0</c:v>
+                </c:pt>
+                <c:pt idx="1">
+                  <c:v>38.0</c:v>
+                </c:pt>
+              </c:numCache>
+            </c:numRef>
+          </c:val>
+        </c:ser>
+        <c:dLbls>
+          <c:numFmt formatCode="0&quot; запросов&quot;" sourceLinked="0"/>
+          <c:txPr>
+            <a:bodyPr wrap="none"/>
+            <a:lstStyle/>
+            <a:p>
+              <a:pPr>
+                <a:defRPr sz="1100" b="0">
+                  <a:solidFill>
+                    <a:srgbClr val="000000"/>
+                  </a:solidFill>
+                  <a:latin typeface="Play"/>
+                  <a:ea typeface="Play"/>
+                  <a:cs typeface="Play"/>
+                </a:defRPr>
+              </a:pPr>
+            </a:p>
+          </c:txPr>
+          <c:dLblPos val="outEnd"/>
+          <c:showLegendKey val="0"/>
+          <c:showVal val="1"/>
+          <c:showCatName val="0"/>
+          <c:showSerName val="0"/>
+          <c:showPercent val="0"/>
+          <c:showBubbleSize val="0"/>
+          <c:showLeaderLines val="1"/>
+        </c:dLbls>
+        <c:gapWidth val="60"/>
+        <c:axId val="-2068027336"/>
+        <c:axId val="-2113994440"/>
+      </c:barChart>
+      <c:catAx>
+        <c:axId val="-2068027336"/>
+        <c:scaling>
+          <c:orientation val="minMax"/>
+        </c:scaling>
+        <c:delete val="0"/>
+        <c:axPos val="b"/>
+        <c:majorTickMark val="out"/>
+        <c:minorTickMark val="none"/>
+        <c:tickLblPos val="nextTo"/>
+        <c:txPr>
+          <a:bodyPr/>
+          <a:lstStyle/>
+          <a:p>
+            <a:pPr>
+              <a:defRPr sz="1100" b="0">
+                <a:solidFill>
+                  <a:srgbClr val="000000"/>
+                </a:solidFill>
+                <a:latin typeface="Play"/>
+                <a:ea typeface="Play"/>
+                <a:cs typeface="Play"/>
+              </a:defRPr>
+            </a:pPr>
+          </a:p>
+        </c:txPr>
+        <c:crossAx val="-2113994440"/>
+        <c:crosses val="autoZero"/>
+        <c:auto val="1"/>
+        <c:lblAlgn val="ctr"/>
+        <c:lblOffset val="100"/>
+        <c:noMultiLvlLbl val="0"/>
+      </c:catAx>
+      <c:valAx>
+        <c:axId val="-2113994440"/>
+        <c:scaling/>
+        <c:delete val="0"/>
+        <c:axPos val="l"/>
+        <c:majorGridlines>
+          <c:spPr>
+            <a:ln w="9525">
+              <a:solidFill>
+                <a:srgbClr val="D1D1D1"/>
+              </a:solidFill>
+            </a:ln>
+          </c:spPr>
+        </c:majorGridlines>
+        <c:title>
+          <c:tx>
+            <c:rich>
+              <a:bodyPr rot="0" vert="horz"/>
+              <a:lstStyle/>
+              <a:p>
+                <a:pPr>
+                  <a:defRPr sz="1100" b="0">
+                    <a:solidFill>
+                      <a:srgbClr val="000000"/>
+                    </a:solidFill>
+                    <a:latin typeface="Play"/>
+                    <a:ea typeface="Play"/>
+                    <a:cs typeface="Play"/>
+                  </a:defRPr>
+                </a:pPr>
+                <a:r>
+                  <a:t>Запросы, запросов</a:t>
+                </a:r>
+              </a:p>
+            </c:rich>
+          </c:tx>
+          <c:layout/>
+          <c:overlay val="0"/>
+        </c:title>
+        <c:majorTickMark val="out"/>
+        <c:minorTickMark val="none"/>
+        <c:tickLblPos val="nextTo"/>
+        <c:txPr>
+          <a:bodyPr/>
+          <a:lstStyle/>
+          <a:p>
+            <a:pPr>
+              <a:defRPr sz="1100" b="0">
+                <a:solidFill>
+                  <a:srgbClr val="000000"/>
+                </a:solidFill>
+                <a:latin typeface="Play"/>
+                <a:ea typeface="Play"/>
+                <a:cs typeface="Play"/>
+              </a:defRPr>
+            </a:pPr>
+          </a:p>
+        </c:txPr>
+        <c:crossAx val="-2068027336"/>
+        <c:crosses val="autoZero"/>
+      </c:valAx>
+    </c:plotArea>
+    <c:dispBlanksAs val="gap"/>
+  </c:chart>
+  <c:txPr>
+    <a:bodyPr/>
+    <a:lstStyle/>
+    <a:p>
+      <a:pPr>
+        <a:defRPr sz="1200" b="0">
+          <a:solidFill>
+            <a:srgbClr val="000000"/>
+          </a:solidFill>
+          <a:latin typeface="Play"/>
+          <a:ea typeface="Play"/>
+          <a:cs typeface="Play"/>
+        </a:defRPr>
+      </a:pPr>
+      <a:endParaRPr lang="en-US"/>
+    </a:p>
+  </c:txPr>
+  <c:externalData r:id="rId1">
+    <c:autoUpdate val="0"/>
+  </c:externalData>
+</c:chartSpace>
+</file>
+
+<file path=ppt/charts/chart4.xml><?xml version="1.0" encoding="utf-8"?>
+<c:chartSpace xmlns:c="http://schemas.openxmlformats.org/drawingml/2006/chart" xmlns:a="http://schemas.openxmlformats.org/drawingml/2006/main" xmlns:r="http://schemas.openxmlformats.org/officeDocument/2006/relationships">
+  <c:date1904 val="0"/>
+  <c:chart>
+    <c:autoTitleDeleted val="1"/>
+    <c:plotArea>
+      <c:barChart>
+        <c:barDir val="col"/>
+        <c:grouping val="clustered"/>
+        <c:ser>
+          <c:idx val="0"/>
+          <c:order val="0"/>
+          <c:tx>
+            <c:strRef>
+              <c:f>Sheet1!$B$1</c:f>
+              <c:strCache>
+                <c:ptCount val="1"/>
+                <c:pt idx="0">
+                  <c:v>Стоимость (руб)</c:v>
+                </c:pt>
+              </c:strCache>
+            </c:strRef>
+          </c:tx>
+          <c:spPr>
+            <a:solidFill>
+              <a:srgbClr val="0077FF"/>
+            </a:solidFill>
+            <a:ln>
+              <a:solidFill>
+                <a:srgbClr val="0077FF"/>
+              </a:solidFill>
+            </a:ln>
+          </c:spPr>
+          <c:cat>
+            <c:strRef>
+              <c:f>Sheet1!$A$2:$A$2</c:f>
+              <c:strCache>
+                <c:ptCount val="1"/>
+                <c:pt idx="0">
+                  <c:v>Пилот</c:v>
+                </c:pt>
+              </c:strCache>
+            </c:strRef>
+          </c:cat>
+          <c:val>
+            <c:numRef>
+              <c:f>Sheet1!$B$2:$B$2</c:f>
+              <c:numCache>
+                <c:formatCode>General</c:formatCode>
+                <c:ptCount val="1"/>
+                <c:pt idx="0">
+                  <c:v>1400.0</c:v>
+                </c:pt>
+              </c:numCache>
+            </c:numRef>
+          </c:val>
+        </c:ser>
+        <c:dLbls>
+          <c:numFmt formatCode="0&quot; руб&quot;" sourceLinked="0"/>
+          <c:txPr>
+            <a:bodyPr wrap="none"/>
+            <a:lstStyle/>
+            <a:p>
+              <a:pPr>
+                <a:defRPr sz="1100" b="0">
+                  <a:solidFill>
+                    <a:srgbClr val="000000"/>
+                  </a:solidFill>
+                  <a:latin typeface="Play"/>
+                  <a:ea typeface="Play"/>
+                  <a:cs typeface="Play"/>
+                </a:defRPr>
+              </a:pPr>
+            </a:p>
+          </c:txPr>
+          <c:dLblPos val="outEnd"/>
+          <c:showLegendKey val="0"/>
+          <c:showVal val="1"/>
+          <c:showCatName val="0"/>
+          <c:showSerName val="0"/>
+          <c:showPercent val="0"/>
+          <c:showBubbleSize val="0"/>
+          <c:showLeaderLines val="1"/>
+        </c:dLbls>
+        <c:gapWidth val="60"/>
+        <c:axId val="-2068027336"/>
+        <c:axId val="-2113994440"/>
+      </c:barChart>
+      <c:catAx>
+        <c:axId val="-2068027336"/>
+        <c:scaling>
+          <c:orientation val="minMax"/>
+        </c:scaling>
+        <c:delete val="0"/>
+        <c:axPos val="b"/>
+        <c:majorTickMark val="out"/>
+        <c:minorTickMark val="none"/>
+        <c:tickLblPos val="nextTo"/>
+        <c:txPr>
+          <a:bodyPr/>
+          <a:lstStyle/>
+          <a:p>
+            <a:pPr>
+              <a:defRPr sz="1100" b="0">
+                <a:solidFill>
+                  <a:srgbClr val="000000"/>
+                </a:solidFill>
+                <a:latin typeface="Play"/>
+                <a:ea typeface="Play"/>
+                <a:cs typeface="Play"/>
+              </a:defRPr>
+            </a:pPr>
+          </a:p>
+        </c:txPr>
+        <c:crossAx val="-2113994440"/>
+        <c:crosses val="autoZero"/>
+        <c:auto val="1"/>
+        <c:lblAlgn val="ctr"/>
+        <c:lblOffset val="100"/>
+        <c:noMultiLvlLbl val="0"/>
+      </c:catAx>
+      <c:valAx>
+        <c:axId val="-2113994440"/>
+        <c:scaling/>
+        <c:delete val="0"/>
+        <c:axPos val="l"/>
+        <c:majorGridlines>
+          <c:spPr>
+            <a:ln w="9525">
+              <a:solidFill>
+                <a:srgbClr val="D1D1D1"/>
+              </a:solidFill>
+            </a:ln>
+          </c:spPr>
+        </c:majorGridlines>
+        <c:title>
+          <c:tx>
+            <c:rich>
+              <a:bodyPr rot="0" vert="horz"/>
+              <a:lstStyle/>
+              <a:p>
+                <a:pPr>
+                  <a:defRPr sz="1100" b="0">
+                    <a:solidFill>
+                      <a:srgbClr val="000000"/>
+                    </a:solidFill>
+                    <a:latin typeface="Play"/>
+                    <a:ea typeface="Play"/>
+                    <a:cs typeface="Play"/>
+                  </a:defRPr>
+                </a:pPr>
+                <a:r>
+                  <a:t>Стоимость (руб), руб</a:t>
                 </a:r>
               </a:p>
             </c:rich>
@@ -5684,60 +6106,14 @@
       <p:grpSpPr/>
       <p:sp>
         <p:nvSpPr>
-          <p:cNvPr id="2" name="Rounded Rectangle 1"/>
-          <p:cNvSpPr/>
+          <p:cNvPr id="2" name="title"/>
+          <p:cNvSpPr txBox="1"/>
           <p:nvPr/>
         </p:nvSpPr>
         <p:spPr>
           <a:xfrm>
-            <a:off x="2159000" y="1243485"/>
-            <a:ext cx="4542261" cy="949960"/>
-          </a:xfrm>
-          <a:prstGeom prst="roundRect">
-            <a:avLst/>
-          </a:prstGeom>
-          <a:solidFill>
-            <a:srgbClr val="111111">
-              <a:alpha val="85000"/>
-            </a:srgbClr>
-          </a:solidFill>
-          <a:ln>
-            <a:noFill/>
-          </a:ln>
-          <a:effectLst/>
-        </p:spPr>
-        <p:style>
-          <a:lnRef idx="1">
-            <a:schemeClr val="accent1"/>
-          </a:lnRef>
-          <a:fillRef idx="3">
-            <a:schemeClr val="accent1"/>
-          </a:fillRef>
-          <a:effectRef idx="2">
-            <a:schemeClr val="accent1"/>
-          </a:effectRef>
-          <a:fontRef idx="minor">
-            <a:schemeClr val="lt1"/>
-          </a:fontRef>
-        </p:style>
-        <p:txBody>
-          <a:bodyPr rtlCol="0" anchor="ctr"/>
-          <a:lstStyle/>
-          <a:p>
-            <a:pPr algn="ctr"/>
-          </a:p>
-        </p:txBody>
-      </p:sp>
-      <p:sp>
-        <p:nvSpPr>
-          <p:cNvPr id="3" name="title"/>
-          <p:cNvSpPr txBox="1"/>
-          <p:nvPr/>
-        </p:nvSpPr>
-        <p:spPr>
-          <a:xfrm>
-            <a:off x="2286000" y="1370485"/>
-            <a:ext cx="4288261" cy="721360"/>
+            <a:off x="2473726" y="1370485"/>
+            <a:ext cx="4288261" cy="800071"/>
           </a:xfrm>
           <a:prstGeom prst="rect">
             <a:avLst/>
@@ -5754,7 +6130,7 @@
               <a:spcAft>
                 <a:spcPts val="300"/>
               </a:spcAft>
-              <a:defRPr sz="1800">
+              <a:defRPr sz="1800" b="0">
                 <a:solidFill>
                   <a:srgbClr val="FFFFFF"/>
                 </a:solidFill>
@@ -5764,7 +6140,7 @@
               </a:defRPr>
             </a:pPr>
             <a:r>
-              <a:rPr sz="1800">
+              <a:rPr sz="1800" b="0">
                 <a:solidFill>
                   <a:srgbClr val="FFFFFF"/>
                 </a:solidFill>
@@ -5786,6 +6162,2952 @@
 </file>
 
 <file path=ppt/slides/slide56.xml><?xml version="1.0" encoding="utf-8"?>
+<p:sld xmlns:a="http://schemas.openxmlformats.org/drawingml/2006/main" xmlns:p="http://schemas.openxmlformats.org/presentationml/2006/main" xmlns:r="http://schemas.openxmlformats.org/officeDocument/2006/relationships">
+  <p:cSld>
+    <p:spTree>
+      <p:nvGrpSpPr>
+        <p:cNvPr id="1" name=""/>
+        <p:cNvGrpSpPr/>
+        <p:nvPr/>
+      </p:nvGrpSpPr>
+      <p:grpSpPr/>
+      <p:pic>
+        <p:nvPicPr>
+          <p:cNvPr descr=" " id="2385" name="Google Shape;2385;p88"/>
+          <p:cNvPicPr preferRelativeResize="0"/>
+          <p:nvPr/>
+        </p:nvPicPr>
+        <p:blipFill rotWithShape="1">
+          <a:blip r:embed="rId2">
+            <a:alphaModFix/>
+          </a:blip>
+          <a:srcRect b="0" l="0" r="0" t="0"/>
+          <a:stretch/>
+        </p:blipFill>
+        <p:spPr>
+          <a:xfrm>
+            <a:off x="388142" y="2000324"/>
+            <a:ext cx="8755811" cy="9524"/>
+          </a:xfrm>
+          <a:prstGeom prst="rect">
+            <a:avLst/>
+          </a:prstGeom>
+          <a:noFill/>
+          <a:ln>
+            <a:noFill/>
+          </a:ln>
+        </p:spPr>
+      </p:pic>
+      <p:sp>
+        <p:nvSpPr>
+          <p:cNvPr id="2386" name="Google Shape;2386;p88"/>
+          <p:cNvSpPr/>
+          <p:nvPr/>
+        </p:nvSpPr>
+        <p:spPr>
+          <a:xfrm>
+            <a:off x="319086" y="1286042"/>
+            <a:ext cx="1690679" cy="1128566"/>
+          </a:xfrm>
+          <a:prstGeom prst="rect">
+            <a:avLst/>
+          </a:prstGeom>
+          <a:noFill/>
+          <a:ln>
+            <a:noFill/>
+          </a:ln>
+        </p:spPr>
+        <p:txBody>
+          <a:bodyPr anchorCtr="0" anchor="ctr" bIns="91425" lIns="91425" spcFirstLastPara="1" rIns="91425" wrap="square" tIns="91425">
+            <a:noAutofit/>
+          </a:bodyPr>
+          <a:lstStyle/>
+          <a:p>
+            <a:pPr indent="0" lvl="0" marL="0" rtl="0" algn="l">
+              <a:spcBef>
+                <a:spcPts val="0"/>
+              </a:spcBef>
+              <a:spcAft>
+                <a:spcPts val="0"/>
+              </a:spcAft>
+              <a:buNone/>
+            </a:pPr>
+            <a:r>
+              <a:t/>
+            </a:r>
+            <a:endParaRPr/>
+          </a:p>
+        </p:txBody>
+      </p:sp>
+      <p:sp>
+        <p:nvSpPr>
+          <p:cNvPr id="2388" name="Google Shape;2388;p88"/>
+          <p:cNvSpPr/>
+          <p:nvPr/>
+        </p:nvSpPr>
+        <p:spPr>
+          <a:xfrm>
+            <a:off x="2600312" y="1286042"/>
+            <a:ext cx="1690679" cy="1128566"/>
+          </a:xfrm>
+          <a:prstGeom prst="rect">
+            <a:avLst/>
+          </a:prstGeom>
+          <a:noFill/>
+          <a:ln>
+            <a:noFill/>
+          </a:ln>
+        </p:spPr>
+        <p:txBody>
+          <a:bodyPr anchorCtr="0" anchor="ctr" bIns="91425" lIns="91425" spcFirstLastPara="1" rIns="91425" wrap="square" tIns="91425">
+            <a:noAutofit/>
+          </a:bodyPr>
+          <a:lstStyle/>
+          <a:p>
+            <a:pPr indent="0" lvl="0" marL="0" rtl="0" algn="l">
+              <a:spcBef>
+                <a:spcPts val="0"/>
+              </a:spcBef>
+              <a:spcAft>
+                <a:spcPts val="0"/>
+              </a:spcAft>
+              <a:buNone/>
+            </a:pPr>
+            <a:r>
+              <a:t/>
+            </a:r>
+            <a:endParaRPr/>
+          </a:p>
+        </p:txBody>
+      </p:sp>
+      <p:sp>
+        <p:nvSpPr>
+          <p:cNvPr id="2390" name="Google Shape;2390;p88"/>
+          <p:cNvSpPr/>
+          <p:nvPr/>
+        </p:nvSpPr>
+        <p:spPr>
+          <a:xfrm>
+            <a:off x="4881537" y="1286042"/>
+            <a:ext cx="1690679" cy="1128566"/>
+          </a:xfrm>
+          <a:prstGeom prst="rect">
+            <a:avLst/>
+          </a:prstGeom>
+          <a:noFill/>
+          <a:ln>
+            <a:noFill/>
+          </a:ln>
+        </p:spPr>
+        <p:txBody>
+          <a:bodyPr anchorCtr="0" anchor="ctr" bIns="91425" lIns="91425" spcFirstLastPara="1" rIns="91425" wrap="square" tIns="91425">
+            <a:noAutofit/>
+          </a:bodyPr>
+          <a:lstStyle/>
+          <a:p>
+            <a:pPr indent="0" lvl="0" marL="0" rtl="0" algn="l">
+              <a:spcBef>
+                <a:spcPts val="0"/>
+              </a:spcBef>
+              <a:spcAft>
+                <a:spcPts val="0"/>
+              </a:spcAft>
+              <a:buNone/>
+            </a:pPr>
+            <a:r>
+              <a:t/>
+            </a:r>
+            <a:endParaRPr/>
+          </a:p>
+        </p:txBody>
+      </p:sp>
+      <p:sp>
+        <p:nvSpPr>
+          <p:cNvPr id="2392" name="Google Shape;2392;p88"/>
+          <p:cNvSpPr/>
+          <p:nvPr/>
+        </p:nvSpPr>
+        <p:spPr>
+          <a:xfrm>
+            <a:off x="7162763" y="1286042"/>
+            <a:ext cx="1690679" cy="1128566"/>
+          </a:xfrm>
+          <a:prstGeom prst="rect">
+            <a:avLst/>
+          </a:prstGeom>
+          <a:noFill/>
+          <a:ln>
+            <a:noFill/>
+          </a:ln>
+        </p:spPr>
+        <p:txBody>
+          <a:bodyPr anchorCtr="0" anchor="ctr" bIns="91425" lIns="91425" spcFirstLastPara="1" rIns="91425" wrap="square" tIns="91425">
+            <a:noAutofit/>
+          </a:bodyPr>
+          <a:lstStyle/>
+          <a:p>
+            <a:pPr indent="0" lvl="0" marL="0" rtl="0" algn="l">
+              <a:spcBef>
+                <a:spcPts val="0"/>
+              </a:spcBef>
+              <a:spcAft>
+                <a:spcPts val="0"/>
+              </a:spcAft>
+              <a:buNone/>
+            </a:pPr>
+            <a:r>
+              <a:t/>
+            </a:r>
+            <a:endParaRPr/>
+          </a:p>
+        </p:txBody>
+      </p:sp>
+      <p:pic>
+        <p:nvPicPr>
+          <p:cNvPr descr=" " id="2394" name="Google Shape;2394;p88"/>
+          <p:cNvPicPr preferRelativeResize="0"/>
+          <p:nvPr/>
+        </p:nvPicPr>
+        <p:blipFill rotWithShape="1">
+          <a:blip r:embed="rId3">
+            <a:alphaModFix/>
+          </a:blip>
+          <a:srcRect b="0" l="0" r="0" t="0"/>
+          <a:stretch/>
+        </p:blipFill>
+        <p:spPr>
+          <a:xfrm>
+            <a:off x="1" y="3684300"/>
+            <a:ext cx="7238962" cy="70126"/>
+          </a:xfrm>
+          <a:prstGeom prst="rect">
+            <a:avLst/>
+          </a:prstGeom>
+          <a:noFill/>
+          <a:ln>
+            <a:noFill/>
+          </a:ln>
+        </p:spPr>
+      </p:pic>
+      <p:sp>
+        <p:nvSpPr>
+          <p:cNvPr id="2395" name="Google Shape;2395;p88"/>
+          <p:cNvSpPr/>
+          <p:nvPr/>
+        </p:nvSpPr>
+        <p:spPr>
+          <a:xfrm>
+            <a:off x="319086" y="3000319"/>
+            <a:ext cx="1690679" cy="1128566"/>
+          </a:xfrm>
+          <a:prstGeom prst="rect">
+            <a:avLst/>
+          </a:prstGeom>
+          <a:noFill/>
+          <a:ln>
+            <a:noFill/>
+          </a:ln>
+        </p:spPr>
+        <p:txBody>
+          <a:bodyPr anchorCtr="0" anchor="ctr" bIns="91425" lIns="91425" spcFirstLastPara="1" rIns="91425" wrap="square" tIns="91425">
+            <a:noAutofit/>
+          </a:bodyPr>
+          <a:lstStyle/>
+          <a:p>
+            <a:pPr indent="0" lvl="0" marL="0" rtl="0" algn="l">
+              <a:spcBef>
+                <a:spcPts val="0"/>
+              </a:spcBef>
+              <a:spcAft>
+                <a:spcPts val="0"/>
+              </a:spcAft>
+              <a:buNone/>
+            </a:pPr>
+            <a:r>
+              <a:t/>
+            </a:r>
+            <a:endParaRPr/>
+          </a:p>
+        </p:txBody>
+      </p:sp>
+      <p:sp>
+        <p:nvSpPr>
+          <p:cNvPr id="2397" name="Google Shape;2397;p88"/>
+          <p:cNvSpPr/>
+          <p:nvPr/>
+        </p:nvSpPr>
+        <p:spPr>
+          <a:xfrm>
+            <a:off x="2600312" y="3000319"/>
+            <a:ext cx="1690679" cy="1128566"/>
+          </a:xfrm>
+          <a:prstGeom prst="rect">
+            <a:avLst/>
+          </a:prstGeom>
+          <a:noFill/>
+          <a:ln>
+            <a:noFill/>
+          </a:ln>
+        </p:spPr>
+        <p:txBody>
+          <a:bodyPr anchorCtr="0" anchor="ctr" bIns="91425" lIns="91425" spcFirstLastPara="1" rIns="91425" wrap="square" tIns="91425">
+            <a:noAutofit/>
+          </a:bodyPr>
+          <a:lstStyle/>
+          <a:p>
+            <a:pPr indent="0" lvl="0" marL="0" rtl="0" algn="l">
+              <a:spcBef>
+                <a:spcPts val="0"/>
+              </a:spcBef>
+              <a:spcAft>
+                <a:spcPts val="0"/>
+              </a:spcAft>
+              <a:buNone/>
+            </a:pPr>
+            <a:r>
+              <a:t/>
+            </a:r>
+            <a:endParaRPr/>
+          </a:p>
+        </p:txBody>
+      </p:sp>
+      <p:sp>
+        <p:nvSpPr>
+          <p:cNvPr id="2399" name="Google Shape;2399;p88"/>
+          <p:cNvSpPr/>
+          <p:nvPr/>
+        </p:nvSpPr>
+        <p:spPr>
+          <a:xfrm>
+            <a:off x="4881537" y="3000319"/>
+            <a:ext cx="1690679" cy="1128566"/>
+          </a:xfrm>
+          <a:prstGeom prst="rect">
+            <a:avLst/>
+          </a:prstGeom>
+          <a:noFill/>
+          <a:ln>
+            <a:noFill/>
+          </a:ln>
+        </p:spPr>
+        <p:txBody>
+          <a:bodyPr anchorCtr="0" anchor="ctr" bIns="91425" lIns="91425" spcFirstLastPara="1" rIns="91425" wrap="square" tIns="91425">
+            <a:noAutofit/>
+          </a:bodyPr>
+          <a:lstStyle/>
+          <a:p>
+            <a:pPr indent="0" lvl="0" marL="0" rtl="0" algn="l">
+              <a:spcBef>
+                <a:spcPts val="0"/>
+              </a:spcBef>
+              <a:spcAft>
+                <a:spcPts val="0"/>
+              </a:spcAft>
+              <a:buNone/>
+            </a:pPr>
+            <a:r>
+              <a:t/>
+            </a:r>
+            <a:endParaRPr/>
+          </a:p>
+        </p:txBody>
+      </p:sp>
+      <p:sp>
+        <p:nvSpPr>
+          <p:cNvPr id="2400" name="title"/>
+          <p:cNvSpPr txBox="1"/>
+          <p:nvPr/>
+        </p:nvSpPr>
+        <p:spPr>
+          <a:xfrm>
+            <a:off x="274320" y="282943"/>
+            <a:ext cx="6792986" cy="932027"/>
+          </a:xfrm>
+          <a:prstGeom prst="rect">
+            <a:avLst/>
+          </a:prstGeom>
+          <a:noFill/>
+        </p:spPr>
+        <p:txBody>
+          <a:bodyPr wrap="square" lIns="76200" rIns="76200" tIns="50800" bIns="50800">
+            <a:spAutoFit/>
+          </a:bodyPr>
+          <a:lstStyle/>
+          <a:p>
+            <a:pPr algn="l">
+              <a:spcAft>
+                <a:spcPts val="300"/>
+              </a:spcAft>
+              <a:defRPr sz="2438">
+                <a:solidFill>
+                  <a:srgbClr val="000000"/>
+                </a:solidFill>
+                <a:latin typeface="Play"/>
+                <a:ea typeface="Play"/>
+                <a:cs typeface="Play"/>
+              </a:defRPr>
+            </a:pPr>
+            <a:r>
+              <a:rPr sz="2438">
+                <a:solidFill>
+                  <a:srgbClr val="000000"/>
+                </a:solidFill>
+                <a:latin typeface="Play"/>
+                <a:ea typeface="Play"/>
+                <a:cs typeface="Play"/>
+              </a:rPr>
+              <a:t>Текущие трудности в создании презентаций</a:t>
+            </a:r>
+          </a:p>
+        </p:txBody>
+      </p:sp>
+      <p:sp>
+        <p:nvSpPr>
+          <p:cNvPr id="2401" name="body"/>
+          <p:cNvSpPr txBox="1"/>
+          <p:nvPr/>
+        </p:nvSpPr>
+        <p:spPr>
+          <a:xfrm>
+            <a:off x="274320" y="2086975"/>
+            <a:ext cx="8344814" cy="1257300"/>
+          </a:xfrm>
+          <a:prstGeom prst="rect">
+            <a:avLst/>
+          </a:prstGeom>
+          <a:noFill/>
+        </p:spPr>
+        <p:txBody>
+          <a:bodyPr wrap="square" lIns="76200" rIns="76200" tIns="50800" bIns="50800">
+            <a:spAutoFit/>
+          </a:bodyPr>
+          <a:lstStyle/>
+          <a:p>
+            <a:pPr algn="l">
+              <a:spcAft>
+                <a:spcPts val="300"/>
+              </a:spcAft>
+              <a:defRPr sz="1400">
+                <a:solidFill>
+                  <a:srgbClr val="000000"/>
+                </a:solidFill>
+                <a:latin typeface="Play"/>
+                <a:ea typeface="Play"/>
+                <a:cs typeface="Play"/>
+              </a:defRPr>
+            </a:pPr>
+            <a:r>
+              <a:rPr sz="1400">
+                <a:solidFill>
+                  <a:srgbClr val="000000"/>
+                </a:solidFill>
+                <a:latin typeface="Play"/>
+                <a:ea typeface="Play"/>
+                <a:cs typeface="Play"/>
+              </a:rPr>
+              <a:t>• 42 колоды за квартал, 12 слайдов каждая, 186 минут сборки</a:t>
+            </a:r>
+          </a:p>
+          <a:p>
+            <a:pPr algn="l">
+              <a:spcAft>
+                <a:spcPts val="300"/>
+              </a:spcAft>
+              <a:defRPr sz="1400">
+                <a:solidFill>
+                  <a:srgbClr val="000000"/>
+                </a:solidFill>
+                <a:latin typeface="Play"/>
+                <a:ea typeface="Play"/>
+                <a:cs typeface="Play"/>
+              </a:defRPr>
+            </a:pPr>
+            <a:r>
+              <a:rPr sz="1400">
+                <a:solidFill>
+                  <a:srgbClr val="000000"/>
+                </a:solidFill>
+                <a:latin typeface="Play"/>
+                <a:ea typeface="Play"/>
+                <a:cs typeface="Play"/>
+              </a:rPr>
+              <a:t>• 74 минуты на правки после ревью дизайнера</a:t>
+            </a:r>
+          </a:p>
+          <a:p>
+            <a:pPr algn="l">
+              <a:spcAft>
+                <a:spcPts val="300"/>
+              </a:spcAft>
+              <a:defRPr sz="1400">
+                <a:solidFill>
+                  <a:srgbClr val="000000"/>
+                </a:solidFill>
+                <a:latin typeface="Play"/>
+                <a:ea typeface="Play"/>
+                <a:cs typeface="Play"/>
+              </a:defRPr>
+            </a:pPr>
+            <a:r>
+              <a:rPr sz="1400">
+                <a:solidFill>
+                  <a:srgbClr val="000000"/>
+                </a:solidFill>
+                <a:latin typeface="Play"/>
+                <a:ea typeface="Play"/>
+                <a:cs typeface="Play"/>
+              </a:rPr>
+              <a:t>• 19 из 42 колод нарушили фирменный стиль</a:t>
+            </a:r>
+          </a:p>
+          <a:p>
+            <a:pPr algn="l">
+              <a:spcAft>
+                <a:spcPts val="300"/>
+              </a:spcAft>
+              <a:defRPr sz="1400">
+                <a:solidFill>
+                  <a:srgbClr val="000000"/>
+                </a:solidFill>
+                <a:latin typeface="Play"/>
+                <a:ea typeface="Play"/>
+                <a:cs typeface="Play"/>
+              </a:defRPr>
+            </a:pPr>
+            <a:r>
+              <a:rPr sz="1400">
+                <a:solidFill>
+                  <a:srgbClr val="000000"/>
+                </a:solidFill>
+                <a:latin typeface="Play"/>
+                <a:ea typeface="Play"/>
+                <a:cs typeface="Play"/>
+              </a:rPr>
+              <a:t>• Дизайнеры 4 человека закрывают 11 запросов/неделю из 27</a:t>
+            </a:r>
+          </a:p>
+          <a:p>
+            <a:pPr algn="l">
+              <a:spcAft>
+                <a:spcPts val="300"/>
+              </a:spcAft>
+              <a:defRPr sz="1400">
+                <a:solidFill>
+                  <a:srgbClr val="000000"/>
+                </a:solidFill>
+                <a:latin typeface="Play"/>
+                <a:ea typeface="Play"/>
+                <a:cs typeface="Play"/>
+              </a:defRPr>
+            </a:pPr>
+            <a:r>
+              <a:rPr sz="1400">
+                <a:solidFill>
+                  <a:srgbClr val="000000"/>
+                </a:solidFill>
+                <a:latin typeface="Play"/>
+                <a:ea typeface="Play"/>
+                <a:cs typeface="Play"/>
+              </a:rPr>
+              <a:t>• Средний срок ожидания 6 рабочих дней</a:t>
+            </a:r>
+          </a:p>
+        </p:txBody>
+      </p:sp>
+    </p:spTree>
+  </p:cSld>
+  <p:clrMapOvr>
+    <a:masterClrMapping/>
+  </p:clrMapOvr>
+</p:sld>
+</file>
+
+<file path=ppt/slides/slide57.xml><?xml version="1.0" encoding="utf-8"?>
+<p:sld xmlns:a="http://schemas.openxmlformats.org/drawingml/2006/main" xmlns:p="http://schemas.openxmlformats.org/presentationml/2006/main" xmlns:r="http://schemas.openxmlformats.org/officeDocument/2006/relationships">
+  <p:cSld>
+    <p:spTree>
+      <p:nvGrpSpPr>
+        <p:cNvPr id="1" name=""/>
+        <p:cNvGrpSpPr/>
+        <p:nvPr/>
+      </p:nvGrpSpPr>
+      <p:grpSpPr/>
+      <p:sp>
+        <p:nvSpPr>
+          <p:cNvPr id="662" name="Google Shape;662;p55"/>
+          <p:cNvSpPr/>
+          <p:nvPr/>
+        </p:nvSpPr>
+        <p:spPr>
+          <a:xfrm>
+            <a:off x="8667705" y="4666977"/>
+            <a:ext cx="190499" cy="190475"/>
+          </a:xfrm>
+          <a:prstGeom prst="rect">
+            <a:avLst/>
+          </a:prstGeom>
+          <a:noFill/>
+          <a:ln>
+            <a:noFill/>
+          </a:ln>
+        </p:spPr>
+        <p:txBody>
+          <a:bodyPr anchorCtr="0" anchor="ctr" bIns="91425" lIns="91425" spcFirstLastPara="1" rIns="91425" wrap="square" tIns="91425">
+            <a:noAutofit/>
+          </a:bodyPr>
+          <a:lstStyle/>
+          <a:p>
+            <a:pPr indent="0" lvl="0" marL="0" rtl="0" algn="l">
+              <a:spcBef>
+                <a:spcPts val="0"/>
+              </a:spcBef>
+              <a:spcAft>
+                <a:spcPts val="0"/>
+              </a:spcAft>
+              <a:buNone/>
+            </a:pPr>
+            <a:r>
+              <a:t/>
+            </a:r>
+            <a:endParaRPr/>
+          </a:p>
+        </p:txBody>
+      </p:sp>
+      <p:sp>
+        <p:nvSpPr>
+          <p:cNvPr id="663" name="Google Shape;663;p55"/>
+          <p:cNvSpPr/>
+          <p:nvPr/>
+        </p:nvSpPr>
+        <p:spPr>
+          <a:xfrm>
+            <a:off x="285748" y="286047"/>
+            <a:ext cx="8572456" cy="3938075"/>
+          </a:xfrm>
+          <a:prstGeom prst="rect">
+            <a:avLst/>
+          </a:prstGeom>
+          <a:noFill/>
+          <a:ln>
+            <a:noFill/>
+          </a:ln>
+        </p:spPr>
+        <p:txBody>
+          <a:bodyPr anchorCtr="0" anchor="ctr" bIns="91425" lIns="91425" spcFirstLastPara="1" rIns="91425" wrap="square" tIns="91425">
+            <a:noAutofit/>
+          </a:bodyPr>
+          <a:lstStyle/>
+          <a:p>
+            <a:pPr indent="0" lvl="0" marL="0" rtl="0" algn="l">
+              <a:spcBef>
+                <a:spcPts val="0"/>
+              </a:spcBef>
+              <a:spcAft>
+                <a:spcPts val="0"/>
+              </a:spcAft>
+              <a:buNone/>
+            </a:pPr>
+            <a:r>
+              <a:t/>
+            </a:r>
+            <a:endParaRPr/>
+          </a:p>
+        </p:txBody>
+      </p:sp>
+      <p:sp>
+        <p:nvSpPr>
+          <p:cNvPr id="664" name="Google Shape;664;p55"/>
+          <p:cNvSpPr/>
+          <p:nvPr/>
+        </p:nvSpPr>
+        <p:spPr>
+          <a:xfrm>
+            <a:off x="285748" y="1209852"/>
+            <a:ext cx="8572456" cy="3014270"/>
+          </a:xfrm>
+          <a:prstGeom prst="rect">
+            <a:avLst/>
+          </a:prstGeom>
+          <a:noFill/>
+          <a:ln>
+            <a:noFill/>
+          </a:ln>
+        </p:spPr>
+        <p:txBody>
+          <a:bodyPr anchorCtr="0" anchor="ctr" bIns="91425" lIns="91425" spcFirstLastPara="1" rIns="91425" wrap="square" tIns="91425">
+            <a:noAutofit/>
+          </a:bodyPr>
+          <a:lstStyle/>
+          <a:p>
+            <a:pPr indent="0" lvl="0" marL="0" rtl="0" algn="l">
+              <a:spcBef>
+                <a:spcPts val="0"/>
+              </a:spcBef>
+              <a:spcAft>
+                <a:spcPts val="0"/>
+              </a:spcAft>
+              <a:buNone/>
+            </a:pPr>
+            <a:r>
+              <a:t/>
+            </a:r>
+            <a:endParaRPr/>
+          </a:p>
+        </p:txBody>
+      </p:sp>
+      <p:sp>
+        <p:nvSpPr>
+          <p:cNvPr id="665" name="Google Shape;665;p55"/>
+          <p:cNvSpPr/>
+          <p:nvPr/>
+        </p:nvSpPr>
+        <p:spPr>
+          <a:xfrm>
+            <a:off x="285749" y="1209852"/>
+            <a:ext cx="2071677" cy="3014270"/>
+          </a:xfrm>
+          <a:prstGeom prst="roundRect">
+            <a:avLst>
+              <a:gd fmla="val 4634" name="adj"/>
+            </a:avLst>
+          </a:prstGeom>
+          <a:solidFill>
+            <a:schemeClr val="lt2"/>
+          </a:solidFill>
+          <a:ln>
+            <a:noFill/>
+          </a:ln>
+        </p:spPr>
+        <p:txBody>
+          <a:bodyPr anchorCtr="0" anchor="ctr" bIns="91425" lIns="91425" spcFirstLastPara="1" rIns="91425" wrap="square" tIns="91425">
+            <a:noAutofit/>
+          </a:bodyPr>
+          <a:lstStyle/>
+          <a:p>
+            <a:pPr indent="0" lvl="0" marL="0" rtl="0" algn="l">
+              <a:spcBef>
+                <a:spcPts val="0"/>
+              </a:spcBef>
+              <a:spcAft>
+                <a:spcPts val="0"/>
+              </a:spcAft>
+              <a:buNone/>
+            </a:pPr>
+            <a:r>
+              <a:t/>
+            </a:r>
+            <a:endParaRPr/>
+          </a:p>
+        </p:txBody>
+      </p:sp>
+      <p:sp>
+        <p:nvSpPr>
+          <p:cNvPr id="666" name="Google Shape;666;p55"/>
+          <p:cNvSpPr/>
+          <p:nvPr/>
+        </p:nvSpPr>
+        <p:spPr>
+          <a:xfrm>
+            <a:off x="438148" y="1362233"/>
+            <a:ext cx="1766878" cy="342855"/>
+          </a:xfrm>
+          <a:prstGeom prst="rect">
+            <a:avLst/>
+          </a:prstGeom>
+          <a:noFill/>
+          <a:ln>
+            <a:noFill/>
+          </a:ln>
+        </p:spPr>
+        <p:txBody>
+          <a:bodyPr anchorCtr="0" anchor="ctr" bIns="91425" lIns="91425" spcFirstLastPara="1" rIns="91425" wrap="square" tIns="91425">
+            <a:noAutofit/>
+          </a:bodyPr>
+          <a:lstStyle/>
+          <a:p>
+            <a:pPr indent="0" lvl="0" marL="0" rtl="0" algn="l">
+              <a:spcBef>
+                <a:spcPts val="0"/>
+              </a:spcBef>
+              <a:spcAft>
+                <a:spcPts val="0"/>
+              </a:spcAft>
+              <a:buNone/>
+            </a:pPr>
+            <a:r>
+              <a:t/>
+            </a:r>
+            <a:endParaRPr/>
+          </a:p>
+        </p:txBody>
+      </p:sp>
+      <p:sp>
+        <p:nvSpPr>
+          <p:cNvPr id="667" name="Google Shape;667;p55"/>
+          <p:cNvSpPr/>
+          <p:nvPr/>
+        </p:nvSpPr>
+        <p:spPr>
+          <a:xfrm>
+            <a:off x="438148" y="1362233"/>
+            <a:ext cx="76199" cy="76190"/>
+          </a:xfrm>
+          <a:prstGeom prst="roundRect">
+            <a:avLst>
+              <a:gd fmla="val 31500" name="adj"/>
+            </a:avLst>
+          </a:prstGeom>
+          <a:solidFill>
+            <a:srgbClr val="0077FF"/>
+          </a:solidFill>
+          <a:ln>
+            <a:noFill/>
+          </a:ln>
+        </p:spPr>
+        <p:txBody>
+          <a:bodyPr anchorCtr="0" anchor="ctr" bIns="91425" lIns="91425" spcFirstLastPara="1" rIns="91425" wrap="square" tIns="91425">
+            <a:noAutofit/>
+          </a:bodyPr>
+          <a:lstStyle/>
+          <a:p>
+            <a:pPr indent="0" lvl="0" marL="0" rtl="0" algn="l">
+              <a:spcBef>
+                <a:spcPts val="0"/>
+              </a:spcBef>
+              <a:spcAft>
+                <a:spcPts val="0"/>
+              </a:spcAft>
+              <a:buNone/>
+            </a:pPr>
+            <a:r>
+              <a:t/>
+            </a:r>
+            <a:endParaRPr/>
+          </a:p>
+        </p:txBody>
+      </p:sp>
+      <p:sp>
+        <p:nvSpPr>
+          <p:cNvPr id="670" name="Google Shape;670;p55"/>
+          <p:cNvSpPr/>
+          <p:nvPr/>
+        </p:nvSpPr>
+        <p:spPr>
+          <a:xfrm>
+            <a:off x="2452675" y="1209852"/>
+            <a:ext cx="2071677" cy="3014270"/>
+          </a:xfrm>
+          <a:prstGeom prst="roundRect">
+            <a:avLst>
+              <a:gd fmla="val 4634" name="adj"/>
+            </a:avLst>
+          </a:prstGeom>
+          <a:solidFill>
+            <a:schemeClr val="lt2"/>
+          </a:solidFill>
+          <a:ln>
+            <a:noFill/>
+          </a:ln>
+        </p:spPr>
+        <p:txBody>
+          <a:bodyPr anchorCtr="0" anchor="ctr" bIns="91425" lIns="91425" spcFirstLastPara="1" rIns="91425" wrap="square" tIns="91425">
+            <a:noAutofit/>
+          </a:bodyPr>
+          <a:lstStyle/>
+          <a:p>
+            <a:pPr indent="0" lvl="0" marL="0" rtl="0" algn="l">
+              <a:spcBef>
+                <a:spcPts val="0"/>
+              </a:spcBef>
+              <a:spcAft>
+                <a:spcPts val="0"/>
+              </a:spcAft>
+              <a:buNone/>
+            </a:pPr>
+            <a:r>
+              <a:t/>
+            </a:r>
+            <a:endParaRPr/>
+          </a:p>
+        </p:txBody>
+      </p:sp>
+      <p:sp>
+        <p:nvSpPr>
+          <p:cNvPr id="671" name="Google Shape;671;p55"/>
+          <p:cNvSpPr/>
+          <p:nvPr/>
+        </p:nvSpPr>
+        <p:spPr>
+          <a:xfrm>
+            <a:off x="2605074" y="1362233"/>
+            <a:ext cx="1766878" cy="342855"/>
+          </a:xfrm>
+          <a:prstGeom prst="rect">
+            <a:avLst/>
+          </a:prstGeom>
+          <a:noFill/>
+          <a:ln>
+            <a:noFill/>
+          </a:ln>
+        </p:spPr>
+        <p:txBody>
+          <a:bodyPr anchorCtr="0" anchor="ctr" bIns="91425" lIns="91425" spcFirstLastPara="1" rIns="91425" wrap="square" tIns="91425">
+            <a:noAutofit/>
+          </a:bodyPr>
+          <a:lstStyle/>
+          <a:p>
+            <a:pPr indent="0" lvl="0" marL="0" rtl="0" algn="l">
+              <a:spcBef>
+                <a:spcPts val="0"/>
+              </a:spcBef>
+              <a:spcAft>
+                <a:spcPts val="0"/>
+              </a:spcAft>
+              <a:buNone/>
+            </a:pPr>
+            <a:r>
+              <a:t/>
+            </a:r>
+            <a:endParaRPr/>
+          </a:p>
+        </p:txBody>
+      </p:sp>
+      <p:sp>
+        <p:nvSpPr>
+          <p:cNvPr id="672" name="Google Shape;672;p55"/>
+          <p:cNvSpPr/>
+          <p:nvPr/>
+        </p:nvSpPr>
+        <p:spPr>
+          <a:xfrm>
+            <a:off x="2605074" y="1362233"/>
+            <a:ext cx="76199" cy="76190"/>
+          </a:xfrm>
+          <a:prstGeom prst="roundRect">
+            <a:avLst>
+              <a:gd fmla="val 31500" name="adj"/>
+            </a:avLst>
+          </a:prstGeom>
+          <a:solidFill>
+            <a:srgbClr val="0077FF"/>
+          </a:solidFill>
+          <a:ln>
+            <a:noFill/>
+          </a:ln>
+        </p:spPr>
+        <p:txBody>
+          <a:bodyPr anchorCtr="0" anchor="ctr" bIns="91425" lIns="91425" spcFirstLastPara="1" rIns="91425" wrap="square" tIns="91425">
+            <a:noAutofit/>
+          </a:bodyPr>
+          <a:lstStyle/>
+          <a:p>
+            <a:pPr indent="0" lvl="0" marL="0" rtl="0" algn="l">
+              <a:spcBef>
+                <a:spcPts val="0"/>
+              </a:spcBef>
+              <a:spcAft>
+                <a:spcPts val="0"/>
+              </a:spcAft>
+              <a:buNone/>
+            </a:pPr>
+            <a:r>
+              <a:t/>
+            </a:r>
+            <a:endParaRPr/>
+          </a:p>
+        </p:txBody>
+      </p:sp>
+      <p:sp>
+        <p:nvSpPr>
+          <p:cNvPr id="675" name="Google Shape;675;p55"/>
+          <p:cNvSpPr/>
+          <p:nvPr/>
+        </p:nvSpPr>
+        <p:spPr>
+          <a:xfrm>
+            <a:off x="4619601" y="1209852"/>
+            <a:ext cx="2071677" cy="3014270"/>
+          </a:xfrm>
+          <a:prstGeom prst="roundRect">
+            <a:avLst>
+              <a:gd fmla="val 4634" name="adj"/>
+            </a:avLst>
+          </a:prstGeom>
+          <a:solidFill>
+            <a:schemeClr val="lt2"/>
+          </a:solidFill>
+          <a:ln>
+            <a:noFill/>
+          </a:ln>
+        </p:spPr>
+        <p:txBody>
+          <a:bodyPr anchorCtr="0" anchor="ctr" bIns="91425" lIns="91425" spcFirstLastPara="1" rIns="91425" wrap="square" tIns="91425">
+            <a:noAutofit/>
+          </a:bodyPr>
+          <a:lstStyle/>
+          <a:p>
+            <a:pPr indent="0" lvl="0" marL="0" rtl="0" algn="l">
+              <a:spcBef>
+                <a:spcPts val="0"/>
+              </a:spcBef>
+              <a:spcAft>
+                <a:spcPts val="0"/>
+              </a:spcAft>
+              <a:buNone/>
+            </a:pPr>
+            <a:r>
+              <a:t/>
+            </a:r>
+            <a:endParaRPr/>
+          </a:p>
+        </p:txBody>
+      </p:sp>
+      <p:sp>
+        <p:nvSpPr>
+          <p:cNvPr id="676" name="Google Shape;676;p55"/>
+          <p:cNvSpPr/>
+          <p:nvPr/>
+        </p:nvSpPr>
+        <p:spPr>
+          <a:xfrm>
+            <a:off x="4772001" y="1362233"/>
+            <a:ext cx="1766878" cy="342855"/>
+          </a:xfrm>
+          <a:prstGeom prst="rect">
+            <a:avLst/>
+          </a:prstGeom>
+          <a:noFill/>
+          <a:ln>
+            <a:noFill/>
+          </a:ln>
+        </p:spPr>
+        <p:txBody>
+          <a:bodyPr anchorCtr="0" anchor="ctr" bIns="91425" lIns="91425" spcFirstLastPara="1" rIns="91425" wrap="square" tIns="91425">
+            <a:noAutofit/>
+          </a:bodyPr>
+          <a:lstStyle/>
+          <a:p>
+            <a:pPr indent="0" lvl="0" marL="0" rtl="0" algn="l">
+              <a:spcBef>
+                <a:spcPts val="0"/>
+              </a:spcBef>
+              <a:spcAft>
+                <a:spcPts val="0"/>
+              </a:spcAft>
+              <a:buNone/>
+            </a:pPr>
+            <a:r>
+              <a:t/>
+            </a:r>
+            <a:endParaRPr/>
+          </a:p>
+        </p:txBody>
+      </p:sp>
+      <p:sp>
+        <p:nvSpPr>
+          <p:cNvPr id="677" name="Google Shape;677;p55"/>
+          <p:cNvSpPr/>
+          <p:nvPr/>
+        </p:nvSpPr>
+        <p:spPr>
+          <a:xfrm>
+            <a:off x="4772001" y="1362233"/>
+            <a:ext cx="76199" cy="76190"/>
+          </a:xfrm>
+          <a:prstGeom prst="roundRect">
+            <a:avLst>
+              <a:gd fmla="val 31500" name="adj"/>
+            </a:avLst>
+          </a:prstGeom>
+          <a:solidFill>
+            <a:srgbClr val="0077FF"/>
+          </a:solidFill>
+          <a:ln>
+            <a:noFill/>
+          </a:ln>
+        </p:spPr>
+        <p:txBody>
+          <a:bodyPr anchorCtr="0" anchor="ctr" bIns="91425" lIns="91425" spcFirstLastPara="1" rIns="91425" wrap="square" tIns="91425">
+            <a:noAutofit/>
+          </a:bodyPr>
+          <a:lstStyle/>
+          <a:p>
+            <a:pPr indent="0" lvl="0" marL="0" rtl="0" algn="l">
+              <a:spcBef>
+                <a:spcPts val="0"/>
+              </a:spcBef>
+              <a:spcAft>
+                <a:spcPts val="0"/>
+              </a:spcAft>
+              <a:buNone/>
+            </a:pPr>
+            <a:r>
+              <a:t/>
+            </a:r>
+            <a:endParaRPr/>
+          </a:p>
+        </p:txBody>
+      </p:sp>
+      <p:sp>
+        <p:nvSpPr>
+          <p:cNvPr id="680" name="Google Shape;680;p55"/>
+          <p:cNvSpPr/>
+          <p:nvPr/>
+        </p:nvSpPr>
+        <p:spPr>
+          <a:xfrm>
+            <a:off x="6786527" y="1209852"/>
+            <a:ext cx="2071677" cy="3014270"/>
+          </a:xfrm>
+          <a:prstGeom prst="roundRect">
+            <a:avLst>
+              <a:gd fmla="val 4634" name="adj"/>
+            </a:avLst>
+          </a:prstGeom>
+          <a:solidFill>
+            <a:schemeClr val="lt2"/>
+          </a:solidFill>
+          <a:ln>
+            <a:noFill/>
+          </a:ln>
+        </p:spPr>
+        <p:txBody>
+          <a:bodyPr anchorCtr="0" anchor="ctr" bIns="91425" lIns="91425" spcFirstLastPara="1" rIns="91425" wrap="square" tIns="91425">
+            <a:noAutofit/>
+          </a:bodyPr>
+          <a:lstStyle/>
+          <a:p>
+            <a:pPr indent="0" lvl="0" marL="0" rtl="0" algn="l">
+              <a:spcBef>
+                <a:spcPts val="0"/>
+              </a:spcBef>
+              <a:spcAft>
+                <a:spcPts val="0"/>
+              </a:spcAft>
+              <a:buNone/>
+            </a:pPr>
+            <a:r>
+              <a:t/>
+            </a:r>
+            <a:endParaRPr/>
+          </a:p>
+        </p:txBody>
+      </p:sp>
+      <p:sp>
+        <p:nvSpPr>
+          <p:cNvPr id="681" name="Google Shape;681;p55"/>
+          <p:cNvSpPr/>
+          <p:nvPr/>
+        </p:nvSpPr>
+        <p:spPr>
+          <a:xfrm>
+            <a:off x="6938927" y="1362233"/>
+            <a:ext cx="1766878" cy="342855"/>
+          </a:xfrm>
+          <a:prstGeom prst="rect">
+            <a:avLst/>
+          </a:prstGeom>
+          <a:noFill/>
+          <a:ln>
+            <a:noFill/>
+          </a:ln>
+        </p:spPr>
+        <p:txBody>
+          <a:bodyPr anchorCtr="0" anchor="ctr" bIns="91425" lIns="91425" spcFirstLastPara="1" rIns="91425" wrap="square" tIns="91425">
+            <a:noAutofit/>
+          </a:bodyPr>
+          <a:lstStyle/>
+          <a:p>
+            <a:pPr indent="0" lvl="0" marL="0" rtl="0" algn="l">
+              <a:spcBef>
+                <a:spcPts val="0"/>
+              </a:spcBef>
+              <a:spcAft>
+                <a:spcPts val="0"/>
+              </a:spcAft>
+              <a:buNone/>
+            </a:pPr>
+            <a:r>
+              <a:t/>
+            </a:r>
+            <a:endParaRPr/>
+          </a:p>
+        </p:txBody>
+      </p:sp>
+      <p:sp>
+        <p:nvSpPr>
+          <p:cNvPr id="682" name="Google Shape;682;p55"/>
+          <p:cNvSpPr/>
+          <p:nvPr/>
+        </p:nvSpPr>
+        <p:spPr>
+          <a:xfrm>
+            <a:off x="6938927" y="1362233"/>
+            <a:ext cx="76199" cy="76190"/>
+          </a:xfrm>
+          <a:prstGeom prst="roundRect">
+            <a:avLst>
+              <a:gd fmla="val 31500" name="adj"/>
+            </a:avLst>
+          </a:prstGeom>
+          <a:solidFill>
+            <a:srgbClr val="0077FF"/>
+          </a:solidFill>
+          <a:ln>
+            <a:noFill/>
+          </a:ln>
+        </p:spPr>
+        <p:txBody>
+          <a:bodyPr anchorCtr="0" anchor="ctr" bIns="91425" lIns="91425" spcFirstLastPara="1" rIns="91425" wrap="square" tIns="91425">
+            <a:noAutofit/>
+          </a:bodyPr>
+          <a:lstStyle/>
+          <a:p>
+            <a:pPr indent="0" lvl="0" marL="0" rtl="0" algn="l">
+              <a:spcBef>
+                <a:spcPts val="0"/>
+              </a:spcBef>
+              <a:spcAft>
+                <a:spcPts val="0"/>
+              </a:spcAft>
+              <a:buNone/>
+            </a:pPr>
+            <a:r>
+              <a:t/>
+            </a:r>
+            <a:endParaRPr/>
+          </a:p>
+        </p:txBody>
+      </p:sp>
+      <p:sp>
+        <p:nvSpPr>
+          <p:cNvPr id="683" name="title"/>
+          <p:cNvSpPr txBox="1"/>
+          <p:nvPr/>
+        </p:nvSpPr>
+        <p:spPr>
+          <a:xfrm>
+            <a:off x="274320" y="282943"/>
+            <a:ext cx="6792986" cy="932027"/>
+          </a:xfrm>
+          <a:prstGeom prst="rect">
+            <a:avLst/>
+          </a:prstGeom>
+          <a:noFill/>
+        </p:spPr>
+        <p:txBody>
+          <a:bodyPr wrap="square" lIns="76200" rIns="76200" tIns="50800" bIns="50800">
+            <a:spAutoFit/>
+          </a:bodyPr>
+          <a:lstStyle/>
+          <a:p>
+            <a:pPr algn="l">
+              <a:spcAft>
+                <a:spcPts val="300"/>
+              </a:spcAft>
+              <a:defRPr sz="2438">
+                <a:solidFill>
+                  <a:srgbClr val="000000"/>
+                </a:solidFill>
+                <a:latin typeface="Play"/>
+                <a:ea typeface="Play"/>
+                <a:cs typeface="Play"/>
+              </a:defRPr>
+            </a:pPr>
+            <a:r>
+              <a:rPr sz="2438">
+                <a:solidFill>
+                  <a:srgbClr val="000000"/>
+                </a:solidFill>
+                <a:latin typeface="Play"/>
+                <a:ea typeface="Play"/>
+                <a:cs typeface="Play"/>
+              </a:rPr>
+              <a:t>Возможность ускорить и стандартизировать процесс</a:t>
+            </a:r>
+          </a:p>
+        </p:txBody>
+      </p:sp>
+      <p:sp>
+        <p:nvSpPr>
+          <p:cNvPr id="684" name="card_0"/>
+          <p:cNvSpPr txBox="1"/>
+          <p:nvPr/>
+        </p:nvSpPr>
+        <p:spPr>
+          <a:xfrm>
+            <a:off x="582575" y="1963753"/>
+            <a:ext cx="1516144" cy="2001662"/>
+          </a:xfrm>
+          <a:prstGeom prst="rect">
+            <a:avLst/>
+          </a:prstGeom>
+          <a:noFill/>
+        </p:spPr>
+        <p:txBody>
+          <a:bodyPr wrap="square" lIns="76200" rIns="76200" tIns="50800" bIns="50800">
+            <a:spAutoFit/>
+          </a:bodyPr>
+          <a:lstStyle/>
+          <a:p>
+            <a:pPr algn="l">
+              <a:spcAft>
+                <a:spcPts val="300"/>
+              </a:spcAft>
+              <a:defRPr sz="1800" b="0">
+                <a:solidFill>
+                  <a:srgbClr val="000000"/>
+                </a:solidFill>
+                <a:latin typeface="Play"/>
+                <a:ea typeface="Play"/>
+                <a:cs typeface="Play"/>
+              </a:defRPr>
+            </a:pPr>
+            <a:r>
+              <a:rPr sz="1800" b="0">
+                <a:solidFill>
+                  <a:srgbClr val="000000"/>
+                </a:solidFill>
+                <a:latin typeface="Play"/>
+                <a:ea typeface="Play"/>
+                <a:cs typeface="Play"/>
+              </a:rPr>
+              <a:t>Сократить время сборки до 4 минут</a:t>
+            </a:r>
+          </a:p>
+        </p:txBody>
+      </p:sp>
+      <p:sp>
+        <p:nvSpPr>
+          <p:cNvPr id="685" name="card_1"/>
+          <p:cNvSpPr txBox="1"/>
+          <p:nvPr/>
+        </p:nvSpPr>
+        <p:spPr>
+          <a:xfrm>
+            <a:off x="2749428" y="1963753"/>
+            <a:ext cx="1516144" cy="2001662"/>
+          </a:xfrm>
+          <a:prstGeom prst="rect">
+            <a:avLst/>
+          </a:prstGeom>
+          <a:noFill/>
+        </p:spPr>
+        <p:txBody>
+          <a:bodyPr wrap="square" lIns="76200" rIns="76200" tIns="50800" bIns="50800">
+            <a:spAutoFit/>
+          </a:bodyPr>
+          <a:lstStyle/>
+          <a:p>
+            <a:pPr algn="l">
+              <a:spcAft>
+                <a:spcPts val="300"/>
+              </a:spcAft>
+              <a:defRPr sz="1800" b="0">
+                <a:solidFill>
+                  <a:srgbClr val="000000"/>
+                </a:solidFill>
+                <a:latin typeface="Play"/>
+                <a:ea typeface="Play"/>
+                <a:cs typeface="Play"/>
+              </a:defRPr>
+            </a:pPr>
+            <a:r>
+              <a:rPr sz="1800" b="0">
+                <a:solidFill>
+                  <a:srgbClr val="000000"/>
+                </a:solidFill>
+                <a:latin typeface="Play"/>
+                <a:ea typeface="Play"/>
+                <a:cs typeface="Play"/>
+              </a:rPr>
+              <a:t>Снизить время до первой версии с 6 дней до 1 дня</a:t>
+            </a:r>
+          </a:p>
+        </p:txBody>
+      </p:sp>
+      <p:sp>
+        <p:nvSpPr>
+          <p:cNvPr id="686" name="card_2"/>
+          <p:cNvSpPr txBox="1"/>
+          <p:nvPr/>
+        </p:nvSpPr>
+        <p:spPr>
+          <a:xfrm>
+            <a:off x="4916374" y="1963753"/>
+            <a:ext cx="1516144" cy="2001662"/>
+          </a:xfrm>
+          <a:prstGeom prst="rect">
+            <a:avLst/>
+          </a:prstGeom>
+          <a:noFill/>
+        </p:spPr>
+        <p:txBody>
+          <a:bodyPr wrap="square" lIns="76200" rIns="76200" tIns="50800" bIns="50800">
+            <a:spAutoFit/>
+          </a:bodyPr>
+          <a:lstStyle/>
+          <a:p>
+            <a:pPr algn="l">
+              <a:spcAft>
+                <a:spcPts val="300"/>
+              </a:spcAft>
+              <a:defRPr sz="1800" b="0">
+                <a:solidFill>
+                  <a:srgbClr val="000000"/>
+                </a:solidFill>
+                <a:latin typeface="Play"/>
+                <a:ea typeface="Play"/>
+                <a:cs typeface="Play"/>
+              </a:defRPr>
+            </a:pPr>
+            <a:r>
+              <a:rPr sz="1800" b="0">
+                <a:solidFill>
+                  <a:srgbClr val="000000"/>
+                </a:solidFill>
+                <a:latin typeface="Play"/>
+                <a:ea typeface="Play"/>
+                <a:cs typeface="Play"/>
+              </a:rPr>
+              <a:t>Снизить нарушения фирменного стиля до 3 %</a:t>
+            </a:r>
+          </a:p>
+        </p:txBody>
+      </p:sp>
+      <p:sp>
+        <p:nvSpPr>
+          <p:cNvPr id="687" name="card_3"/>
+          <p:cNvSpPr txBox="1"/>
+          <p:nvPr/>
+        </p:nvSpPr>
+        <p:spPr>
+          <a:xfrm>
+            <a:off x="7083319" y="1963753"/>
+            <a:ext cx="1516144" cy="2001662"/>
+          </a:xfrm>
+          <a:prstGeom prst="rect">
+            <a:avLst/>
+          </a:prstGeom>
+          <a:noFill/>
+        </p:spPr>
+        <p:txBody>
+          <a:bodyPr wrap="square" lIns="76200" rIns="76200" tIns="50800" bIns="50800">
+            <a:spAutoFit/>
+          </a:bodyPr>
+          <a:lstStyle/>
+          <a:p>
+            <a:pPr algn="l">
+              <a:spcAft>
+                <a:spcPts val="300"/>
+              </a:spcAft>
+              <a:defRPr sz="1800" b="0">
+                <a:solidFill>
+                  <a:srgbClr val="000000"/>
+                </a:solidFill>
+                <a:latin typeface="Play"/>
+                <a:ea typeface="Play"/>
+                <a:cs typeface="Play"/>
+              </a:defRPr>
+            </a:pPr>
+            <a:r>
+              <a:rPr sz="1800" b="0">
+                <a:solidFill>
+                  <a:srgbClr val="000000"/>
+                </a:solidFill>
+                <a:latin typeface="Play"/>
+                <a:ea typeface="Play"/>
+                <a:cs typeface="Play"/>
+              </a:rPr>
+              <a:t>Освободить дизайнеров от рутинных задач</a:t>
+            </a:r>
+          </a:p>
+        </p:txBody>
+      </p:sp>
+    </p:spTree>
+  </p:cSld>
+  <p:clrMapOvr>
+    <a:masterClrMapping/>
+  </p:clrMapOvr>
+</p:sld>
+</file>
+
+<file path=ppt/slides/slide58.xml><?xml version="1.0" encoding="utf-8"?>
+<p:sld xmlns:a="http://schemas.openxmlformats.org/drawingml/2006/main" xmlns:p="http://schemas.openxmlformats.org/presentationml/2006/main" xmlns:r="http://schemas.openxmlformats.org/officeDocument/2006/relationships">
+  <p:cSld>
+    <p:spTree>
+      <p:nvGrpSpPr>
+        <p:cNvPr id="1" name=""/>
+        <p:cNvGrpSpPr/>
+        <p:nvPr/>
+      </p:nvGrpSpPr>
+      <p:grpSpPr/>
+      <p:sp>
+        <p:nvSpPr>
+          <p:cNvPr id="532" name="Google Shape;532;p53"/>
+          <p:cNvSpPr/>
+          <p:nvPr/>
+        </p:nvSpPr>
+        <p:spPr>
+          <a:xfrm>
+            <a:off x="303214" y="1022533"/>
+            <a:ext cx="8451939" cy="1433588"/>
+          </a:xfrm>
+          <a:prstGeom prst="rect">
+            <a:avLst/>
+          </a:prstGeom>
+          <a:noFill/>
+          <a:ln>
+            <a:noFill/>
+          </a:ln>
+        </p:spPr>
+        <p:txBody>
+          <a:bodyPr anchorCtr="0" anchor="ctr" bIns="91425" lIns="91425" spcFirstLastPara="1" rIns="91425" wrap="square" tIns="91425">
+            <a:noAutofit/>
+          </a:bodyPr>
+          <a:lstStyle/>
+          <a:p>
+            <a:pPr indent="0" lvl="0" marL="0" rtl="0" algn="l">
+              <a:spcBef>
+                <a:spcPts val="0"/>
+              </a:spcBef>
+              <a:spcAft>
+                <a:spcPts val="0"/>
+              </a:spcAft>
+              <a:buNone/>
+            </a:pPr>
+            <a:r>
+              <a:t/>
+            </a:r>
+            <a:endParaRPr/>
+          </a:p>
+        </p:txBody>
+      </p:sp>
+      <p:sp>
+        <p:nvSpPr>
+          <p:cNvPr id="533" name="Google Shape;533;p53"/>
+          <p:cNvSpPr/>
+          <p:nvPr/>
+        </p:nvSpPr>
+        <p:spPr>
+          <a:xfrm>
+            <a:off x="303214" y="1022533"/>
+            <a:ext cx="1395256" cy="1433588"/>
+          </a:xfrm>
+          <a:prstGeom prst="rect">
+            <a:avLst/>
+          </a:prstGeom>
+          <a:noFill/>
+          <a:ln>
+            <a:noFill/>
+          </a:ln>
+        </p:spPr>
+        <p:txBody>
+          <a:bodyPr anchorCtr="0" anchor="ctr" bIns="91425" lIns="91425" spcFirstLastPara="1" rIns="91425" wrap="square" tIns="91425">
+            <a:noAutofit/>
+          </a:bodyPr>
+          <a:lstStyle/>
+          <a:p>
+            <a:pPr indent="0" lvl="0" marL="0" rtl="0" algn="l">
+              <a:spcBef>
+                <a:spcPts val="0"/>
+              </a:spcBef>
+              <a:spcAft>
+                <a:spcPts val="0"/>
+              </a:spcAft>
+              <a:buNone/>
+            </a:pPr>
+            <a:r>
+              <a:t/>
+            </a:r>
+            <a:endParaRPr/>
+          </a:p>
+        </p:txBody>
+      </p:sp>
+      <p:sp>
+        <p:nvSpPr>
+          <p:cNvPr id="537" name="Google Shape;537;p53"/>
+          <p:cNvSpPr/>
+          <p:nvPr/>
+        </p:nvSpPr>
+        <p:spPr>
+          <a:xfrm>
+            <a:off x="2067385" y="1022533"/>
+            <a:ext cx="1395256" cy="1433588"/>
+          </a:xfrm>
+          <a:prstGeom prst="rect">
+            <a:avLst/>
+          </a:prstGeom>
+          <a:noFill/>
+          <a:ln>
+            <a:noFill/>
+          </a:ln>
+        </p:spPr>
+        <p:txBody>
+          <a:bodyPr anchorCtr="0" anchor="ctr" bIns="91425" lIns="91425" spcFirstLastPara="1" rIns="91425" wrap="square" tIns="91425">
+            <a:noAutofit/>
+          </a:bodyPr>
+          <a:lstStyle/>
+          <a:p>
+            <a:pPr indent="0" lvl="0" marL="0" rtl="0" algn="l">
+              <a:spcBef>
+                <a:spcPts val="0"/>
+              </a:spcBef>
+              <a:spcAft>
+                <a:spcPts val="0"/>
+              </a:spcAft>
+              <a:buNone/>
+            </a:pPr>
+            <a:r>
+              <a:t/>
+            </a:r>
+            <a:endParaRPr/>
+          </a:p>
+        </p:txBody>
+      </p:sp>
+      <p:sp>
+        <p:nvSpPr>
+          <p:cNvPr id="541" name="Google Shape;541;p53"/>
+          <p:cNvSpPr/>
+          <p:nvPr/>
+        </p:nvSpPr>
+        <p:spPr>
+          <a:xfrm>
+            <a:off x="3831556" y="1022533"/>
+            <a:ext cx="1395256" cy="1433588"/>
+          </a:xfrm>
+          <a:prstGeom prst="rect">
+            <a:avLst/>
+          </a:prstGeom>
+          <a:noFill/>
+          <a:ln>
+            <a:noFill/>
+          </a:ln>
+        </p:spPr>
+        <p:txBody>
+          <a:bodyPr anchorCtr="0" anchor="ctr" bIns="91425" lIns="91425" spcFirstLastPara="1" rIns="91425" wrap="square" tIns="91425">
+            <a:noAutofit/>
+          </a:bodyPr>
+          <a:lstStyle/>
+          <a:p>
+            <a:pPr indent="0" lvl="0" marL="0" rtl="0" algn="l">
+              <a:spcBef>
+                <a:spcPts val="0"/>
+              </a:spcBef>
+              <a:spcAft>
+                <a:spcPts val="0"/>
+              </a:spcAft>
+              <a:buNone/>
+            </a:pPr>
+            <a:r>
+              <a:t/>
+            </a:r>
+            <a:endParaRPr/>
+          </a:p>
+        </p:txBody>
+      </p:sp>
+      <p:sp>
+        <p:nvSpPr>
+          <p:cNvPr id="545" name="Google Shape;545;p53"/>
+          <p:cNvSpPr/>
+          <p:nvPr/>
+        </p:nvSpPr>
+        <p:spPr>
+          <a:xfrm>
+            <a:off x="5595727" y="1022533"/>
+            <a:ext cx="1395256" cy="1433588"/>
+          </a:xfrm>
+          <a:prstGeom prst="rect">
+            <a:avLst/>
+          </a:prstGeom>
+          <a:noFill/>
+          <a:ln>
+            <a:noFill/>
+          </a:ln>
+        </p:spPr>
+        <p:txBody>
+          <a:bodyPr anchorCtr="0" anchor="ctr" bIns="91425" lIns="91425" spcFirstLastPara="1" rIns="91425" wrap="square" tIns="91425">
+            <a:noAutofit/>
+          </a:bodyPr>
+          <a:lstStyle/>
+          <a:p>
+            <a:pPr indent="0" lvl="0" marL="0" rtl="0" algn="l">
+              <a:spcBef>
+                <a:spcPts val="0"/>
+              </a:spcBef>
+              <a:spcAft>
+                <a:spcPts val="0"/>
+              </a:spcAft>
+              <a:buNone/>
+            </a:pPr>
+            <a:r>
+              <a:t/>
+            </a:r>
+            <a:endParaRPr/>
+          </a:p>
+        </p:txBody>
+      </p:sp>
+      <p:sp>
+        <p:nvSpPr>
+          <p:cNvPr id="549" name="Google Shape;549;p53"/>
+          <p:cNvSpPr/>
+          <p:nvPr/>
+        </p:nvSpPr>
+        <p:spPr>
+          <a:xfrm>
+            <a:off x="7359897" y="1022533"/>
+            <a:ext cx="1395256" cy="1433588"/>
+          </a:xfrm>
+          <a:prstGeom prst="rect">
+            <a:avLst/>
+          </a:prstGeom>
+          <a:noFill/>
+          <a:ln>
+            <a:noFill/>
+          </a:ln>
+        </p:spPr>
+        <p:txBody>
+          <a:bodyPr anchorCtr="0" anchor="ctr" bIns="91425" lIns="91425" spcFirstLastPara="1" rIns="91425" wrap="square" tIns="91425">
+            <a:noAutofit/>
+          </a:bodyPr>
+          <a:lstStyle/>
+          <a:p>
+            <a:pPr indent="0" lvl="0" marL="0" rtl="0" algn="l">
+              <a:spcBef>
+                <a:spcPts val="0"/>
+              </a:spcBef>
+              <a:spcAft>
+                <a:spcPts val="0"/>
+              </a:spcAft>
+              <a:buNone/>
+            </a:pPr>
+            <a:r>
+              <a:t/>
+            </a:r>
+            <a:endParaRPr/>
+          </a:p>
+        </p:txBody>
+      </p:sp>
+      <p:sp>
+        <p:nvSpPr>
+          <p:cNvPr id="553" name="Google Shape;553;p53"/>
+          <p:cNvSpPr/>
+          <p:nvPr/>
+        </p:nvSpPr>
+        <p:spPr>
+          <a:xfrm>
+            <a:off x="276488" y="2955549"/>
+            <a:ext cx="8451939" cy="1433588"/>
+          </a:xfrm>
+          <a:prstGeom prst="rect">
+            <a:avLst/>
+          </a:prstGeom>
+          <a:noFill/>
+          <a:ln>
+            <a:noFill/>
+          </a:ln>
+        </p:spPr>
+        <p:txBody>
+          <a:bodyPr anchorCtr="0" anchor="ctr" bIns="91425" lIns="91425" spcFirstLastPara="1" rIns="91425" wrap="square" tIns="91425">
+            <a:noAutofit/>
+          </a:bodyPr>
+          <a:lstStyle/>
+          <a:p>
+            <a:pPr indent="0" lvl="0" marL="0" rtl="0" algn="l">
+              <a:spcBef>
+                <a:spcPts val="0"/>
+              </a:spcBef>
+              <a:spcAft>
+                <a:spcPts val="0"/>
+              </a:spcAft>
+              <a:buNone/>
+            </a:pPr>
+            <a:r>
+              <a:t/>
+            </a:r>
+            <a:endParaRPr/>
+          </a:p>
+        </p:txBody>
+      </p:sp>
+      <p:sp>
+        <p:nvSpPr>
+          <p:cNvPr id="554" name="Google Shape;554;p53"/>
+          <p:cNvSpPr/>
+          <p:nvPr/>
+        </p:nvSpPr>
+        <p:spPr>
+          <a:xfrm>
+            <a:off x="303214" y="2797849"/>
+            <a:ext cx="8451939" cy="1433588"/>
+          </a:xfrm>
+          <a:prstGeom prst="rect">
+            <a:avLst/>
+          </a:prstGeom>
+          <a:noFill/>
+          <a:ln>
+            <a:noFill/>
+          </a:ln>
+        </p:spPr>
+        <p:txBody>
+          <a:bodyPr anchorCtr="0" anchor="ctr" bIns="91425" lIns="91425" spcFirstLastPara="1" rIns="91425" wrap="square" tIns="91425">
+            <a:noAutofit/>
+          </a:bodyPr>
+          <a:lstStyle/>
+          <a:p>
+            <a:pPr indent="0" lvl="0" marL="0" rtl="0" algn="l">
+              <a:spcBef>
+                <a:spcPts val="0"/>
+              </a:spcBef>
+              <a:spcAft>
+                <a:spcPts val="0"/>
+              </a:spcAft>
+              <a:buNone/>
+            </a:pPr>
+            <a:r>
+              <a:t/>
+            </a:r>
+            <a:endParaRPr/>
+          </a:p>
+        </p:txBody>
+      </p:sp>
+      <p:sp>
+        <p:nvSpPr>
+          <p:cNvPr id="555" name="Google Shape;555;p53"/>
+          <p:cNvSpPr/>
+          <p:nvPr/>
+        </p:nvSpPr>
+        <p:spPr>
+          <a:xfrm>
+            <a:off x="303214" y="2797849"/>
+            <a:ext cx="1395256" cy="1433588"/>
+          </a:xfrm>
+          <a:prstGeom prst="rect">
+            <a:avLst/>
+          </a:prstGeom>
+          <a:noFill/>
+          <a:ln>
+            <a:noFill/>
+          </a:ln>
+        </p:spPr>
+        <p:txBody>
+          <a:bodyPr anchorCtr="0" anchor="ctr" bIns="91425" lIns="91425" spcFirstLastPara="1" rIns="91425" wrap="square" tIns="91425">
+            <a:noAutofit/>
+          </a:bodyPr>
+          <a:lstStyle/>
+          <a:p>
+            <a:pPr indent="0" lvl="0" marL="0" rtl="0" algn="l">
+              <a:spcBef>
+                <a:spcPts val="0"/>
+              </a:spcBef>
+              <a:spcAft>
+                <a:spcPts val="0"/>
+              </a:spcAft>
+              <a:buNone/>
+            </a:pPr>
+            <a:r>
+              <a:t/>
+            </a:r>
+            <a:endParaRPr/>
+          </a:p>
+        </p:txBody>
+      </p:sp>
+      <p:sp>
+        <p:nvSpPr>
+          <p:cNvPr id="559" name="Google Shape;559;p53"/>
+          <p:cNvSpPr/>
+          <p:nvPr/>
+        </p:nvSpPr>
+        <p:spPr>
+          <a:xfrm>
+            <a:off x="2067385" y="2797849"/>
+            <a:ext cx="1395256" cy="1433588"/>
+          </a:xfrm>
+          <a:prstGeom prst="rect">
+            <a:avLst/>
+          </a:prstGeom>
+          <a:noFill/>
+          <a:ln>
+            <a:noFill/>
+          </a:ln>
+        </p:spPr>
+        <p:txBody>
+          <a:bodyPr anchorCtr="0" anchor="ctr" bIns="91425" lIns="91425" spcFirstLastPara="1" rIns="91425" wrap="square" tIns="91425">
+            <a:noAutofit/>
+          </a:bodyPr>
+          <a:lstStyle/>
+          <a:p>
+            <a:pPr indent="0" lvl="0" marL="0" rtl="0" algn="l">
+              <a:spcBef>
+                <a:spcPts val="0"/>
+              </a:spcBef>
+              <a:spcAft>
+                <a:spcPts val="0"/>
+              </a:spcAft>
+              <a:buNone/>
+            </a:pPr>
+            <a:r>
+              <a:t/>
+            </a:r>
+            <a:endParaRPr/>
+          </a:p>
+        </p:txBody>
+      </p:sp>
+      <p:sp>
+        <p:nvSpPr>
+          <p:cNvPr id="563" name="Google Shape;563;p53"/>
+          <p:cNvSpPr/>
+          <p:nvPr/>
+        </p:nvSpPr>
+        <p:spPr>
+          <a:xfrm>
+            <a:off x="3831556" y="2797849"/>
+            <a:ext cx="1395256" cy="1433588"/>
+          </a:xfrm>
+          <a:prstGeom prst="rect">
+            <a:avLst/>
+          </a:prstGeom>
+          <a:noFill/>
+          <a:ln>
+            <a:noFill/>
+          </a:ln>
+        </p:spPr>
+        <p:txBody>
+          <a:bodyPr anchorCtr="0" anchor="ctr" bIns="91425" lIns="91425" spcFirstLastPara="1" rIns="91425" wrap="square" tIns="91425">
+            <a:noAutofit/>
+          </a:bodyPr>
+          <a:lstStyle/>
+          <a:p>
+            <a:pPr indent="0" lvl="0" marL="0" rtl="0" algn="l">
+              <a:spcBef>
+                <a:spcPts val="0"/>
+              </a:spcBef>
+              <a:spcAft>
+                <a:spcPts val="0"/>
+              </a:spcAft>
+              <a:buNone/>
+            </a:pPr>
+            <a:r>
+              <a:t/>
+            </a:r>
+            <a:endParaRPr/>
+          </a:p>
+        </p:txBody>
+      </p:sp>
+      <p:sp>
+        <p:nvSpPr>
+          <p:cNvPr id="567" name="Google Shape;567;p53"/>
+          <p:cNvSpPr/>
+          <p:nvPr/>
+        </p:nvSpPr>
+        <p:spPr>
+          <a:xfrm>
+            <a:off x="5595727" y="2797849"/>
+            <a:ext cx="1395256" cy="1433588"/>
+          </a:xfrm>
+          <a:prstGeom prst="rect">
+            <a:avLst/>
+          </a:prstGeom>
+          <a:noFill/>
+          <a:ln>
+            <a:noFill/>
+          </a:ln>
+        </p:spPr>
+        <p:txBody>
+          <a:bodyPr anchorCtr="0" anchor="ctr" bIns="91425" lIns="91425" spcFirstLastPara="1" rIns="91425" wrap="square" tIns="91425">
+            <a:noAutofit/>
+          </a:bodyPr>
+          <a:lstStyle/>
+          <a:p>
+            <a:pPr indent="0" lvl="0" marL="0" rtl="0" algn="l">
+              <a:spcBef>
+                <a:spcPts val="0"/>
+              </a:spcBef>
+              <a:spcAft>
+                <a:spcPts val="0"/>
+              </a:spcAft>
+              <a:buNone/>
+            </a:pPr>
+            <a:r>
+              <a:t/>
+            </a:r>
+            <a:endParaRPr/>
+          </a:p>
+        </p:txBody>
+      </p:sp>
+      <p:sp>
+        <p:nvSpPr>
+          <p:cNvPr id="571" name="Google Shape;571;p53"/>
+          <p:cNvSpPr/>
+          <p:nvPr/>
+        </p:nvSpPr>
+        <p:spPr>
+          <a:xfrm>
+            <a:off x="7359897" y="2797849"/>
+            <a:ext cx="1395256" cy="1433588"/>
+          </a:xfrm>
+          <a:prstGeom prst="rect">
+            <a:avLst/>
+          </a:prstGeom>
+          <a:noFill/>
+          <a:ln>
+            <a:noFill/>
+          </a:ln>
+        </p:spPr>
+        <p:txBody>
+          <a:bodyPr anchorCtr="0" anchor="ctr" bIns="91425" lIns="91425" spcFirstLastPara="1" rIns="91425" wrap="square" tIns="91425">
+            <a:noAutofit/>
+          </a:bodyPr>
+          <a:lstStyle/>
+          <a:p>
+            <a:pPr indent="0" lvl="0" marL="0" rtl="0" algn="l">
+              <a:spcBef>
+                <a:spcPts val="0"/>
+              </a:spcBef>
+              <a:spcAft>
+                <a:spcPts val="0"/>
+              </a:spcAft>
+              <a:buNone/>
+            </a:pPr>
+            <a:r>
+              <a:t/>
+            </a:r>
+            <a:endParaRPr/>
+          </a:p>
+        </p:txBody>
+      </p:sp>
+      <p:sp>
+        <p:nvSpPr>
+          <p:cNvPr id="572" name="title"/>
+          <p:cNvSpPr txBox="1"/>
+          <p:nvPr/>
+        </p:nvSpPr>
+        <p:spPr>
+          <a:xfrm>
+            <a:off x="274320" y="282943"/>
+            <a:ext cx="6792986" cy="617220"/>
+          </a:xfrm>
+          <a:prstGeom prst="rect">
+            <a:avLst/>
+          </a:prstGeom>
+          <a:noFill/>
+        </p:spPr>
+        <p:txBody>
+          <a:bodyPr wrap="square" lIns="76200" rIns="76200" tIns="50800" bIns="50800">
+            <a:spAutoFit/>
+          </a:bodyPr>
+          <a:lstStyle/>
+          <a:p>
+            <a:pPr algn="l">
+              <a:spcAft>
+                <a:spcPts val="300"/>
+              </a:spcAft>
+              <a:defRPr sz="2438">
+                <a:solidFill>
+                  <a:srgbClr val="000000"/>
+                </a:solidFill>
+                <a:latin typeface="Play"/>
+                <a:ea typeface="Play"/>
+                <a:cs typeface="Play"/>
+              </a:defRPr>
+            </a:pPr>
+            <a:r>
+              <a:rPr sz="2438">
+                <a:solidFill>
+                  <a:srgbClr val="000000"/>
+                </a:solidFill>
+                <a:latin typeface="Play"/>
+                <a:ea typeface="Play"/>
+                <a:cs typeface="Play"/>
+              </a:rPr>
+              <a:t>Как работает сервис</a:t>
+            </a:r>
+          </a:p>
+        </p:txBody>
+      </p:sp>
+      <p:sp>
+        <p:nvSpPr>
+          <p:cNvPr id="573" name="body"/>
+          <p:cNvSpPr txBox="1"/>
+          <p:nvPr/>
+        </p:nvSpPr>
+        <p:spPr>
+          <a:xfrm>
+            <a:off x="274320" y="1935028"/>
+            <a:ext cx="8344814" cy="1290320"/>
+          </a:xfrm>
+          <a:prstGeom prst="rect">
+            <a:avLst/>
+          </a:prstGeom>
+          <a:noFill/>
+        </p:spPr>
+        <p:txBody>
+          <a:bodyPr wrap="square" lIns="76200" rIns="76200" tIns="50800" bIns="50800">
+            <a:spAutoFit/>
+          </a:bodyPr>
+          <a:lstStyle/>
+          <a:p>
+            <a:pPr algn="l">
+              <a:spcAft>
+                <a:spcPts val="300"/>
+              </a:spcAft>
+              <a:defRPr sz="1800">
+                <a:solidFill>
+                  <a:srgbClr val="000000"/>
+                </a:solidFill>
+                <a:latin typeface="Play"/>
+                <a:ea typeface="Play"/>
+                <a:cs typeface="Play"/>
+              </a:defRPr>
+            </a:pPr>
+            <a:r>
+              <a:rPr sz="1800">
+                <a:solidFill>
+                  <a:srgbClr val="000000"/>
+                </a:solidFill>
+                <a:latin typeface="Play"/>
+                <a:ea typeface="Play"/>
+                <a:cs typeface="Play"/>
+              </a:rPr>
+              <a:t>• Принимает шаблон pptx и материалы</a:t>
+            </a:r>
+          </a:p>
+          <a:p>
+            <a:pPr algn="l">
+              <a:spcAft>
+                <a:spcPts val="300"/>
+              </a:spcAft>
+              <a:defRPr sz="1800">
+                <a:solidFill>
+                  <a:srgbClr val="000000"/>
+                </a:solidFill>
+                <a:latin typeface="Play"/>
+                <a:ea typeface="Play"/>
+                <a:cs typeface="Play"/>
+              </a:defRPr>
+            </a:pPr>
+            <a:r>
+              <a:rPr sz="1800">
+                <a:solidFill>
+                  <a:srgbClr val="000000"/>
+                </a:solidFill>
+                <a:latin typeface="Play"/>
+                <a:ea typeface="Play"/>
+                <a:cs typeface="Play"/>
+              </a:rPr>
+              <a:t>• Автоматически формирует план колоды по дизайн-системе</a:t>
+            </a:r>
+          </a:p>
+          <a:p>
+            <a:pPr algn="l">
+              <a:spcAft>
+                <a:spcPts val="300"/>
+              </a:spcAft>
+              <a:defRPr sz="1800">
+                <a:solidFill>
+                  <a:srgbClr val="000000"/>
+                </a:solidFill>
+                <a:latin typeface="Play"/>
+                <a:ea typeface="Play"/>
+                <a:cs typeface="Play"/>
+              </a:defRPr>
+            </a:pPr>
+            <a:r>
+              <a:rPr sz="1800">
+                <a:solidFill>
+                  <a:srgbClr val="000000"/>
+                </a:solidFill>
+                <a:latin typeface="Play"/>
+                <a:ea typeface="Play"/>
+                <a:cs typeface="Play"/>
+              </a:rPr>
+              <a:t>• Вёрстка и аудит качества до выдачи</a:t>
+            </a:r>
+          </a:p>
+          <a:p>
+            <a:pPr algn="l">
+              <a:spcAft>
+                <a:spcPts val="300"/>
+              </a:spcAft>
+              <a:defRPr sz="1800">
+                <a:solidFill>
+                  <a:srgbClr val="000000"/>
+                </a:solidFill>
+                <a:latin typeface="Play"/>
+                <a:ea typeface="Play"/>
+                <a:cs typeface="Play"/>
+              </a:defRPr>
+            </a:pPr>
+            <a:r>
+              <a:rPr sz="1800">
+                <a:solidFill>
+                  <a:srgbClr val="000000"/>
+                </a:solidFill>
+                <a:latin typeface="Play"/>
+                <a:ea typeface="Play"/>
+                <a:cs typeface="Play"/>
+              </a:rPr>
+              <a:t>• Экспорт в pptx, pdf, html, слайды редактируемы</a:t>
+            </a:r>
+          </a:p>
+        </p:txBody>
+      </p:sp>
+    </p:spTree>
+  </p:cSld>
+  <p:clrMapOvr>
+    <a:masterClrMapping/>
+  </p:clrMapOvr>
+</p:sld>
+</file>
+
+<file path=ppt/slides/slide59.xml><?xml version="1.0" encoding="utf-8"?>
+<p:sld xmlns:a="http://schemas.openxmlformats.org/drawingml/2006/main" xmlns:p="http://schemas.openxmlformats.org/presentationml/2006/main" xmlns:r="http://schemas.openxmlformats.org/officeDocument/2006/relationships">
+  <p:cSld>
+    <p:spTree>
+      <p:nvGrpSpPr>
+        <p:cNvPr id="1" name=""/>
+        <p:cNvGrpSpPr/>
+        <p:nvPr/>
+      </p:nvGrpSpPr>
+      <p:grpSpPr/>
+      <p:sp>
+        <p:nvSpPr>
+          <p:cNvPr id="2" name="title"/>
+          <p:cNvSpPr txBox="1"/>
+          <p:nvPr/>
+        </p:nvSpPr>
+        <p:spPr>
+          <a:xfrm>
+            <a:off x="274320" y="282943"/>
+            <a:ext cx="6792986" cy="932027"/>
+          </a:xfrm>
+          <a:prstGeom prst="rect">
+            <a:avLst/>
+          </a:prstGeom>
+          <a:noFill/>
+        </p:spPr>
+        <p:txBody>
+          <a:bodyPr wrap="square" lIns="76200" rIns="76200" tIns="50800" bIns="50800">
+            <a:spAutoFit/>
+          </a:bodyPr>
+          <a:lstStyle/>
+          <a:p>
+            <a:pPr algn="l">
+              <a:spcAft>
+                <a:spcPts val="300"/>
+              </a:spcAft>
+              <a:defRPr sz="2438">
+                <a:solidFill>
+                  <a:srgbClr val="000000"/>
+                </a:solidFill>
+                <a:latin typeface="Play"/>
+                <a:ea typeface="Play"/>
+                <a:cs typeface="Play"/>
+              </a:defRPr>
+            </a:pPr>
+            <a:r>
+              <a:rPr sz="2438">
+                <a:solidFill>
+                  <a:srgbClr val="000000"/>
+                </a:solidFill>
+                <a:latin typeface="Play"/>
+                <a:ea typeface="Play"/>
+                <a:cs typeface="Play"/>
+              </a:rPr>
+              <a:t>Сокращение времени сборки: 186 → 4 минуты</a:t>
+            </a:r>
+          </a:p>
+        </p:txBody>
+      </p:sp>
+      <p:graphicFrame>
+        <p:nvGraphicFramePr>
+          <p:cNvPr id="3" name="Chart 2"/>
+          <p:cNvGraphicFramePr>
+            <a:graphicFrameLocks noGrp="1"/>
+          </p:cNvGraphicFramePr>
+          <p:nvPr/>
+        </p:nvGraphicFramePr>
+        <p:xfrm>
+          <a:off x="274320" y="1664127"/>
+          <a:ext cx="7189469" cy="2160270"/>
+        </p:xfrm>
+        <a:graphic>
+          <a:graphicData uri="http://schemas.openxmlformats.org/drawingml/2006/chart">
+            <c:chart xmlns:c="http://schemas.openxmlformats.org/drawingml/2006/chart" r:id="rId4"/>
+          </a:graphicData>
+        </a:graphic>
+      </p:graphicFrame>
+    </p:spTree>
+  </p:cSld>
+  <p:clrMapOvr>
+    <a:masterClrMapping/>
+  </p:clrMapOvr>
+</p:sld>
+</file>
+
+<file path=ppt/slides/slide60.xml><?xml version="1.0" encoding="utf-8"?>
+<p:sld xmlns:a="http://schemas.openxmlformats.org/drawingml/2006/main" xmlns:p="http://schemas.openxmlformats.org/presentationml/2006/main" xmlns:r="http://schemas.openxmlformats.org/officeDocument/2006/relationships">
+  <p:cSld>
+    <p:spTree>
+      <p:nvGrpSpPr>
+        <p:cNvPr id="1" name=""/>
+        <p:cNvGrpSpPr/>
+        <p:nvPr/>
+      </p:nvGrpSpPr>
+      <p:grpSpPr/>
+      <p:sp>
+        <p:nvSpPr>
+          <p:cNvPr id="2" name="title"/>
+          <p:cNvSpPr txBox="1"/>
+          <p:nvPr/>
+        </p:nvSpPr>
+        <p:spPr>
+          <a:xfrm>
+            <a:off x="274320" y="282943"/>
+            <a:ext cx="6792986" cy="932027"/>
+          </a:xfrm>
+          <a:prstGeom prst="rect">
+            <a:avLst/>
+          </a:prstGeom>
+          <a:noFill/>
+        </p:spPr>
+        <p:txBody>
+          <a:bodyPr wrap="square" lIns="76200" rIns="76200" tIns="50800" bIns="50800">
+            <a:spAutoFit/>
+          </a:bodyPr>
+          <a:lstStyle/>
+          <a:p>
+            <a:pPr algn="l">
+              <a:spcAft>
+                <a:spcPts val="300"/>
+              </a:spcAft>
+              <a:defRPr sz="2438">
+                <a:solidFill>
+                  <a:srgbClr val="000000"/>
+                </a:solidFill>
+                <a:latin typeface="Play"/>
+                <a:ea typeface="Play"/>
+                <a:cs typeface="Play"/>
+              </a:defRPr>
+            </a:pPr>
+            <a:r>
+              <a:rPr sz="2438">
+                <a:solidFill>
+                  <a:srgbClr val="000000"/>
+                </a:solidFill>
+                <a:latin typeface="Play"/>
+                <a:ea typeface="Play"/>
+                <a:cs typeface="Play"/>
+              </a:rPr>
+              <a:t>Снижение нарушений фирменного стиля: 19/42 → 2/68</a:t>
+            </a:r>
+          </a:p>
+        </p:txBody>
+      </p:sp>
+      <p:graphicFrame>
+        <p:nvGraphicFramePr>
+          <p:cNvPr id="3" name="Chart 2"/>
+          <p:cNvGraphicFramePr>
+            <a:graphicFrameLocks noGrp="1"/>
+          </p:cNvGraphicFramePr>
+          <p:nvPr/>
+        </p:nvGraphicFramePr>
+        <p:xfrm>
+          <a:off x="274320" y="1729321"/>
+          <a:ext cx="8344814" cy="2160270"/>
+        </p:xfrm>
+        <a:graphic>
+          <a:graphicData uri="http://schemas.openxmlformats.org/drawingml/2006/chart">
+            <c:chart xmlns:c="http://schemas.openxmlformats.org/drawingml/2006/chart" r:id="rId3"/>
+          </a:graphicData>
+        </a:graphic>
+      </p:graphicFrame>
+    </p:spTree>
+  </p:cSld>
+  <p:clrMapOvr>
+    <a:masterClrMapping/>
+  </p:clrMapOvr>
+</p:sld>
+</file>
+
+<file path=ppt/slides/slide61.xml><?xml version="1.0" encoding="utf-8"?>
+<p:sld xmlns:a="http://schemas.openxmlformats.org/drawingml/2006/main" xmlns:p="http://schemas.openxmlformats.org/presentationml/2006/main" xmlns:r="http://schemas.openxmlformats.org/officeDocument/2006/relationships">
+  <p:cSld>
+    <p:spTree>
+      <p:nvGrpSpPr>
+        <p:cNvPr id="1" name=""/>
+        <p:cNvGrpSpPr/>
+        <p:nvPr/>
+      </p:nvGrpSpPr>
+      <p:grpSpPr/>
+      <p:sp>
+        <p:nvSpPr>
+          <p:cNvPr id="1032" name="Google Shape;1032;p65"/>
+          <p:cNvSpPr/>
+          <p:nvPr/>
+        </p:nvSpPr>
+        <p:spPr>
+          <a:xfrm>
+            <a:off x="285748" y="286047"/>
+            <a:ext cx="8572456" cy="3938075"/>
+          </a:xfrm>
+          <a:prstGeom prst="rect">
+            <a:avLst/>
+          </a:prstGeom>
+          <a:noFill/>
+          <a:ln>
+            <a:noFill/>
+          </a:ln>
+        </p:spPr>
+        <p:txBody>
+          <a:bodyPr anchorCtr="0" anchor="ctr" bIns="91425" lIns="91425" spcFirstLastPara="1" rIns="91425" wrap="square" tIns="91425">
+            <a:noAutofit/>
+          </a:bodyPr>
+          <a:lstStyle/>
+          <a:p>
+            <a:pPr indent="0" lvl="0" marL="0" rtl="0" algn="l">
+              <a:spcBef>
+                <a:spcPts val="0"/>
+              </a:spcBef>
+              <a:spcAft>
+                <a:spcPts val="0"/>
+              </a:spcAft>
+              <a:buNone/>
+            </a:pPr>
+            <a:r>
+              <a:t/>
+            </a:r>
+            <a:endParaRPr/>
+          </a:p>
+        </p:txBody>
+      </p:sp>
+      <p:sp>
+        <p:nvSpPr>
+          <p:cNvPr id="1033" name="Google Shape;1033;p65"/>
+          <p:cNvSpPr/>
+          <p:nvPr/>
+        </p:nvSpPr>
+        <p:spPr>
+          <a:xfrm>
+            <a:off x="285748" y="1209852"/>
+            <a:ext cx="8572456" cy="3014270"/>
+          </a:xfrm>
+          <a:prstGeom prst="rect">
+            <a:avLst/>
+          </a:prstGeom>
+          <a:noFill/>
+          <a:ln>
+            <a:noFill/>
+          </a:ln>
+        </p:spPr>
+        <p:txBody>
+          <a:bodyPr anchorCtr="0" anchor="ctr" bIns="91425" lIns="91425" spcFirstLastPara="1" rIns="91425" wrap="square" tIns="91425">
+            <a:noAutofit/>
+          </a:bodyPr>
+          <a:lstStyle/>
+          <a:p>
+            <a:pPr indent="0" lvl="0" marL="0" rtl="0" algn="l">
+              <a:spcBef>
+                <a:spcPts val="0"/>
+              </a:spcBef>
+              <a:spcAft>
+                <a:spcPts val="0"/>
+              </a:spcAft>
+              <a:buNone/>
+            </a:pPr>
+            <a:r>
+              <a:t/>
+            </a:r>
+            <a:endParaRPr/>
+          </a:p>
+        </p:txBody>
+      </p:sp>
+      <p:sp>
+        <p:nvSpPr>
+          <p:cNvPr id="1035" name="Google Shape;1035;p65"/>
+          <p:cNvSpPr/>
+          <p:nvPr/>
+        </p:nvSpPr>
+        <p:spPr>
+          <a:xfrm>
+            <a:off x="476248" y="1400328"/>
+            <a:ext cx="76199" cy="76190"/>
+          </a:xfrm>
+          <a:prstGeom prst="roundRect">
+            <a:avLst>
+              <a:gd fmla="val 31500" name="adj"/>
+            </a:avLst>
+          </a:prstGeom>
+          <a:solidFill>
+            <a:srgbClr val="0077FF"/>
+          </a:solidFill>
+          <a:ln>
+            <a:noFill/>
+          </a:ln>
+        </p:spPr>
+        <p:txBody>
+          <a:bodyPr anchorCtr="0" anchor="ctr" bIns="91425" lIns="91425" spcFirstLastPara="1" rIns="91425" wrap="square" tIns="91425">
+            <a:noAutofit/>
+          </a:bodyPr>
+          <a:lstStyle/>
+          <a:p>
+            <a:pPr indent="0" lvl="0" marL="0" rtl="0" algn="l">
+              <a:spcBef>
+                <a:spcPts val="0"/>
+              </a:spcBef>
+              <a:spcAft>
+                <a:spcPts val="0"/>
+              </a:spcAft>
+              <a:buNone/>
+            </a:pPr>
+            <a:r>
+              <a:t/>
+            </a:r>
+            <a:endParaRPr/>
+          </a:p>
+        </p:txBody>
+      </p:sp>
+      <p:sp>
+        <p:nvSpPr>
+          <p:cNvPr id="1041" name="Google Shape;1041;p65"/>
+          <p:cNvSpPr/>
+          <p:nvPr/>
+        </p:nvSpPr>
+        <p:spPr>
+          <a:xfrm>
+            <a:off x="3365480" y="1400328"/>
+            <a:ext cx="76199" cy="76190"/>
+          </a:xfrm>
+          <a:prstGeom prst="roundRect">
+            <a:avLst>
+              <a:gd fmla="val 31500" name="adj"/>
+            </a:avLst>
+          </a:prstGeom>
+          <a:solidFill>
+            <a:srgbClr val="0077FF"/>
+          </a:solidFill>
+          <a:ln>
+            <a:noFill/>
+          </a:ln>
+        </p:spPr>
+        <p:txBody>
+          <a:bodyPr anchorCtr="0" anchor="ctr" bIns="91425" lIns="91425" spcFirstLastPara="1" rIns="91425" wrap="square" tIns="91425">
+            <a:noAutofit/>
+          </a:bodyPr>
+          <a:lstStyle/>
+          <a:p>
+            <a:pPr indent="0" lvl="0" marL="0" rtl="0" algn="l">
+              <a:spcBef>
+                <a:spcPts val="0"/>
+              </a:spcBef>
+              <a:spcAft>
+                <a:spcPts val="0"/>
+              </a:spcAft>
+              <a:buNone/>
+            </a:pPr>
+            <a:r>
+              <a:t/>
+            </a:r>
+            <a:endParaRPr/>
+          </a:p>
+        </p:txBody>
+      </p:sp>
+      <p:sp>
+        <p:nvSpPr>
+          <p:cNvPr id="1046" name="Google Shape;1046;p65"/>
+          <p:cNvSpPr/>
+          <p:nvPr/>
+        </p:nvSpPr>
+        <p:spPr>
+          <a:xfrm>
+            <a:off x="6254721" y="1400328"/>
+            <a:ext cx="76199" cy="76190"/>
+          </a:xfrm>
+          <a:prstGeom prst="roundRect">
+            <a:avLst>
+              <a:gd fmla="val 31500" name="adj"/>
+            </a:avLst>
+          </a:prstGeom>
+          <a:solidFill>
+            <a:srgbClr val="0077FF"/>
+          </a:solidFill>
+          <a:ln>
+            <a:noFill/>
+          </a:ln>
+        </p:spPr>
+        <p:txBody>
+          <a:bodyPr anchorCtr="0" anchor="ctr" bIns="91425" lIns="91425" spcFirstLastPara="1" rIns="91425" wrap="square" tIns="91425">
+            <a:noAutofit/>
+          </a:bodyPr>
+          <a:lstStyle/>
+          <a:p>
+            <a:pPr indent="0" lvl="0" marL="0" rtl="0" algn="l">
+              <a:spcBef>
+                <a:spcPts val="0"/>
+              </a:spcBef>
+              <a:spcAft>
+                <a:spcPts val="0"/>
+              </a:spcAft>
+              <a:buNone/>
+            </a:pPr>
+            <a:r>
+              <a:t/>
+            </a:r>
+            <a:endParaRPr/>
+          </a:p>
+        </p:txBody>
+      </p:sp>
+      <p:sp>
+        <p:nvSpPr>
+          <p:cNvPr id="1047" name="title"/>
+          <p:cNvSpPr txBox="1"/>
+          <p:nvPr/>
+        </p:nvSpPr>
+        <p:spPr>
+          <a:xfrm>
+            <a:off x="274320" y="282943"/>
+            <a:ext cx="6792986" cy="932027"/>
+          </a:xfrm>
+          <a:prstGeom prst="rect">
+            <a:avLst/>
+          </a:prstGeom>
+          <a:noFill/>
+        </p:spPr>
+        <p:txBody>
+          <a:bodyPr wrap="square" lIns="76200" rIns="76200" tIns="50800" bIns="50800">
+            <a:spAutoFit/>
+          </a:bodyPr>
+          <a:lstStyle/>
+          <a:p>
+            <a:pPr algn="l">
+              <a:spcAft>
+                <a:spcPts val="300"/>
+              </a:spcAft>
+              <a:defRPr sz="2438">
+                <a:solidFill>
+                  <a:srgbClr val="000000"/>
+                </a:solidFill>
+                <a:latin typeface="Play"/>
+                <a:ea typeface="Play"/>
+                <a:cs typeface="Play"/>
+              </a:defRPr>
+            </a:pPr>
+            <a:r>
+              <a:rPr sz="2438">
+                <a:solidFill>
+                  <a:srgbClr val="000000"/>
+                </a:solidFill>
+                <a:latin typeface="Play"/>
+                <a:ea typeface="Play"/>
+                <a:cs typeface="Play"/>
+              </a:rPr>
+              <a:t>Увеличение объёма работы дизайнеров: 11/нед → 38/6н</a:t>
+            </a:r>
+          </a:p>
+        </p:txBody>
+      </p:sp>
+      <p:graphicFrame>
+        <p:nvGraphicFramePr>
+          <p:cNvPr id="1048" name="Chart 1047"/>
+          <p:cNvGraphicFramePr>
+            <a:graphicFrameLocks noGrp="1"/>
+          </p:cNvGraphicFramePr>
+          <p:nvPr/>
+        </p:nvGraphicFramePr>
+        <p:xfrm>
+          <a:off x="274320" y="1628895"/>
+          <a:ext cx="8344814" cy="2160270"/>
+        </p:xfrm>
+        <a:graphic>
+          <a:graphicData uri="http://schemas.openxmlformats.org/drawingml/2006/chart">
+            <c:chart xmlns:c="http://schemas.openxmlformats.org/drawingml/2006/chart" r:id="rId4"/>
+          </a:graphicData>
+        </a:graphic>
+      </p:graphicFrame>
+    </p:spTree>
+  </p:cSld>
+  <p:clrMapOvr>
+    <a:masterClrMapping/>
+  </p:clrMapOvr>
+</p:sld>
+</file>
+
+<file path=ppt/slides/slide62.xml><?xml version="1.0" encoding="utf-8"?>
+<p:sld xmlns:a="http://schemas.openxmlformats.org/drawingml/2006/main" xmlns:p="http://schemas.openxmlformats.org/presentationml/2006/main" xmlns:r="http://schemas.openxmlformats.org/officeDocument/2006/relationships">
+  <p:cSld>
+    <p:spTree>
+      <p:nvGrpSpPr>
+        <p:cNvPr id="1" name=""/>
+        <p:cNvGrpSpPr/>
+        <p:nvPr/>
+      </p:nvGrpSpPr>
+      <p:grpSpPr/>
+      <p:pic>
+        <p:nvPicPr>
+          <p:cNvPr descr=" " id="2385" name="Google Shape;2385;p88"/>
+          <p:cNvPicPr preferRelativeResize="0"/>
+          <p:nvPr/>
+        </p:nvPicPr>
+        <p:blipFill rotWithShape="1">
+          <a:blip r:embed="rId2">
+            <a:alphaModFix/>
+          </a:blip>
+          <a:srcRect b="0" l="0" r="0" t="0"/>
+          <a:stretch/>
+        </p:blipFill>
+        <p:spPr>
+          <a:xfrm>
+            <a:off x="388142" y="2000324"/>
+            <a:ext cx="8755811" cy="9524"/>
+          </a:xfrm>
+          <a:prstGeom prst="rect">
+            <a:avLst/>
+          </a:prstGeom>
+          <a:noFill/>
+          <a:ln>
+            <a:noFill/>
+          </a:ln>
+        </p:spPr>
+      </p:pic>
+      <p:sp>
+        <p:nvSpPr>
+          <p:cNvPr id="2386" name="Google Shape;2386;p88"/>
+          <p:cNvSpPr/>
+          <p:nvPr/>
+        </p:nvSpPr>
+        <p:spPr>
+          <a:xfrm>
+            <a:off x="319086" y="1286042"/>
+            <a:ext cx="1690679" cy="1128566"/>
+          </a:xfrm>
+          <a:prstGeom prst="rect">
+            <a:avLst/>
+          </a:prstGeom>
+          <a:noFill/>
+          <a:ln>
+            <a:noFill/>
+          </a:ln>
+        </p:spPr>
+        <p:txBody>
+          <a:bodyPr anchorCtr="0" anchor="ctr" bIns="91425" lIns="91425" spcFirstLastPara="1" rIns="91425" wrap="square" tIns="91425">
+            <a:noAutofit/>
+          </a:bodyPr>
+          <a:lstStyle/>
+          <a:p>
+            <a:pPr indent="0" lvl="0" marL="0" rtl="0" algn="l">
+              <a:spcBef>
+                <a:spcPts val="0"/>
+              </a:spcBef>
+              <a:spcAft>
+                <a:spcPts val="0"/>
+              </a:spcAft>
+              <a:buNone/>
+            </a:pPr>
+            <a:r>
+              <a:t/>
+            </a:r>
+            <a:endParaRPr/>
+          </a:p>
+        </p:txBody>
+      </p:sp>
+      <p:sp>
+        <p:nvSpPr>
+          <p:cNvPr id="2388" name="Google Shape;2388;p88"/>
+          <p:cNvSpPr/>
+          <p:nvPr/>
+        </p:nvSpPr>
+        <p:spPr>
+          <a:xfrm>
+            <a:off x="2600312" y="1286042"/>
+            <a:ext cx="1690679" cy="1128566"/>
+          </a:xfrm>
+          <a:prstGeom prst="rect">
+            <a:avLst/>
+          </a:prstGeom>
+          <a:noFill/>
+          <a:ln>
+            <a:noFill/>
+          </a:ln>
+        </p:spPr>
+        <p:txBody>
+          <a:bodyPr anchorCtr="0" anchor="ctr" bIns="91425" lIns="91425" spcFirstLastPara="1" rIns="91425" wrap="square" tIns="91425">
+            <a:noAutofit/>
+          </a:bodyPr>
+          <a:lstStyle/>
+          <a:p>
+            <a:pPr indent="0" lvl="0" marL="0" rtl="0" algn="l">
+              <a:spcBef>
+                <a:spcPts val="0"/>
+              </a:spcBef>
+              <a:spcAft>
+                <a:spcPts val="0"/>
+              </a:spcAft>
+              <a:buNone/>
+            </a:pPr>
+            <a:r>
+              <a:t/>
+            </a:r>
+            <a:endParaRPr/>
+          </a:p>
+        </p:txBody>
+      </p:sp>
+      <p:sp>
+        <p:nvSpPr>
+          <p:cNvPr id="2390" name="Google Shape;2390;p88"/>
+          <p:cNvSpPr/>
+          <p:nvPr/>
+        </p:nvSpPr>
+        <p:spPr>
+          <a:xfrm>
+            <a:off x="4881537" y="1286042"/>
+            <a:ext cx="1690679" cy="1128566"/>
+          </a:xfrm>
+          <a:prstGeom prst="rect">
+            <a:avLst/>
+          </a:prstGeom>
+          <a:noFill/>
+          <a:ln>
+            <a:noFill/>
+          </a:ln>
+        </p:spPr>
+        <p:txBody>
+          <a:bodyPr anchorCtr="0" anchor="ctr" bIns="91425" lIns="91425" spcFirstLastPara="1" rIns="91425" wrap="square" tIns="91425">
+            <a:noAutofit/>
+          </a:bodyPr>
+          <a:lstStyle/>
+          <a:p>
+            <a:pPr indent="0" lvl="0" marL="0" rtl="0" algn="l">
+              <a:spcBef>
+                <a:spcPts val="0"/>
+              </a:spcBef>
+              <a:spcAft>
+                <a:spcPts val="0"/>
+              </a:spcAft>
+              <a:buNone/>
+            </a:pPr>
+            <a:r>
+              <a:t/>
+            </a:r>
+            <a:endParaRPr/>
+          </a:p>
+        </p:txBody>
+      </p:sp>
+      <p:sp>
+        <p:nvSpPr>
+          <p:cNvPr id="2392" name="Google Shape;2392;p88"/>
+          <p:cNvSpPr/>
+          <p:nvPr/>
+        </p:nvSpPr>
+        <p:spPr>
+          <a:xfrm>
+            <a:off x="7162763" y="1286042"/>
+            <a:ext cx="1690679" cy="1128566"/>
+          </a:xfrm>
+          <a:prstGeom prst="rect">
+            <a:avLst/>
+          </a:prstGeom>
+          <a:noFill/>
+          <a:ln>
+            <a:noFill/>
+          </a:ln>
+        </p:spPr>
+        <p:txBody>
+          <a:bodyPr anchorCtr="0" anchor="ctr" bIns="91425" lIns="91425" spcFirstLastPara="1" rIns="91425" wrap="square" tIns="91425">
+            <a:noAutofit/>
+          </a:bodyPr>
+          <a:lstStyle/>
+          <a:p>
+            <a:pPr indent="0" lvl="0" marL="0" rtl="0" algn="l">
+              <a:spcBef>
+                <a:spcPts val="0"/>
+              </a:spcBef>
+              <a:spcAft>
+                <a:spcPts val="0"/>
+              </a:spcAft>
+              <a:buNone/>
+            </a:pPr>
+            <a:r>
+              <a:t/>
+            </a:r>
+            <a:endParaRPr/>
+          </a:p>
+        </p:txBody>
+      </p:sp>
+      <p:sp>
+        <p:nvSpPr>
+          <p:cNvPr id="2393" name="title"/>
+          <p:cNvSpPr txBox="1"/>
+          <p:nvPr/>
+        </p:nvSpPr>
+        <p:spPr>
+          <a:xfrm>
+            <a:off x="274320" y="282943"/>
+            <a:ext cx="6792986" cy="932027"/>
+          </a:xfrm>
+          <a:prstGeom prst="rect">
+            <a:avLst/>
+          </a:prstGeom>
+          <a:noFill/>
+        </p:spPr>
+        <p:txBody>
+          <a:bodyPr wrap="square" lIns="76200" rIns="76200" tIns="50800" bIns="50800">
+            <a:spAutoFit/>
+          </a:bodyPr>
+          <a:lstStyle/>
+          <a:p>
+            <a:pPr algn="l">
+              <a:spcAft>
+                <a:spcPts val="300"/>
+              </a:spcAft>
+              <a:defRPr sz="2438">
+                <a:solidFill>
+                  <a:srgbClr val="000000"/>
+                </a:solidFill>
+                <a:latin typeface="Play"/>
+                <a:ea typeface="Play"/>
+                <a:cs typeface="Play"/>
+              </a:defRPr>
+            </a:pPr>
+            <a:r>
+              <a:rPr sz="2438">
+                <a:solidFill>
+                  <a:srgbClr val="000000"/>
+                </a:solidFill>
+                <a:latin typeface="Play"/>
+                <a:ea typeface="Play"/>
+                <a:cs typeface="Play"/>
+              </a:rPr>
+              <a:t>Стоимость пилота: 1 400 руб за 6 недель</a:t>
+            </a:r>
+          </a:p>
+        </p:txBody>
+      </p:sp>
+      <p:graphicFrame>
+        <p:nvGraphicFramePr>
+          <p:cNvPr id="2394" name="Chart 2393"/>
+          <p:cNvGraphicFramePr>
+            <a:graphicFrameLocks noGrp="1"/>
+          </p:cNvGraphicFramePr>
+          <p:nvPr/>
+        </p:nvGraphicFramePr>
+        <p:xfrm>
+          <a:off x="274320" y="2009822"/>
+          <a:ext cx="8344814" cy="2160270"/>
+        </p:xfrm>
+        <a:graphic>
+          <a:graphicData uri="http://schemas.openxmlformats.org/drawingml/2006/chart">
+            <c:chart xmlns:c="http://schemas.openxmlformats.org/drawingml/2006/chart" r:id="rId4"/>
+          </a:graphicData>
+        </a:graphic>
+      </p:graphicFrame>
+    </p:spTree>
+  </p:cSld>
+  <p:clrMapOvr>
+    <a:masterClrMapping/>
+  </p:clrMapOvr>
+</p:sld>
+</file>
+
+<file path=ppt/slides/slide63.xml><?xml version="1.0" encoding="utf-8"?>
 <p:sld xmlns:a="http://schemas.openxmlformats.org/drawingml/2006/main" xmlns:p="http://schemas.openxmlformats.org/presentationml/2006/main" xmlns:r="http://schemas.openxmlformats.org/officeDocument/2006/relationships">
   <p:cSld>
     <p:spTree>
@@ -6599,7 +9921,7 @@
                 <a:ea typeface="Play"/>
                 <a:cs typeface="Play"/>
               </a:rPr>
-              <a:t>Сейчас: 42 колоды, 186 мин сборки</a:t>
+              <a:t>Ключевые риски и меры</a:t>
             </a:r>
           </a:p>
         </p:txBody>
@@ -6630,7 +9952,7 @@
               <a:spcAft>
                 <a:spcPts val="300"/>
               </a:spcAft>
-              <a:defRPr sz="1400" b="0">
+              <a:defRPr sz="1200" b="0">
                 <a:solidFill>
                   <a:srgbClr val="000000"/>
                 </a:solidFill>
@@ -6640,7 +9962,7 @@
               </a:defRPr>
             </a:pPr>
             <a:r>
-              <a:rPr sz="1400" b="0">
+              <a:rPr sz="1200" b="0">
                 <a:solidFill>
                   <a:srgbClr val="000000"/>
                 </a:solidFill>
@@ -6648,7 +9970,7 @@
                 <a:ea typeface="Play"/>
                 <a:cs typeface="Play"/>
               </a:rPr>
-              <a:t>42 колоды, 186 мин сборки одной презентации</a:t>
+              <a:t>Модель может выдумать цифры – аудит проверяет</a:t>
             </a:r>
           </a:p>
         </p:txBody>
@@ -6679,7 +10001,7 @@
               <a:spcAft>
                 <a:spcPts val="300"/>
               </a:spcAft>
-              <a:defRPr sz="1600" b="0">
+              <a:defRPr sz="1200" b="0">
                 <a:solidFill>
                   <a:srgbClr val="000000"/>
                 </a:solidFill>
@@ -6689,7 +10011,7 @@
               </a:defRPr>
             </a:pPr>
             <a:r>
-              <a:rPr sz="1600" b="0">
+              <a:rPr sz="1200" b="0">
                 <a:solidFill>
                   <a:srgbClr val="000000"/>
                 </a:solidFill>
@@ -6697,7 +10019,7 @@
                 <a:ea typeface="Play"/>
                 <a:cs typeface="Play"/>
               </a:rPr>
-              <a:t>74 мин правок после ревью дизайнера</a:t>
+              <a:t>Плохой шаблон – сервис использует рабочую область</a:t>
             </a:r>
           </a:p>
         </p:txBody>
@@ -6746,4420 +10068,7 @@
                 <a:ea typeface="Play"/>
                 <a:cs typeface="Play"/>
               </a:rPr>
-              <a:t>19 из 42 колод нарушили фирменный стиль</a:t>
-            </a:r>
-          </a:p>
-        </p:txBody>
-      </p:sp>
-    </p:spTree>
-  </p:cSld>
-  <p:clrMapOvr>
-    <a:masterClrMapping/>
-  </p:clrMapOvr>
-</p:sld>
-</file>
-
-<file path=ppt/slides/slide57.xml><?xml version="1.0" encoding="utf-8"?>
-<p:sld xmlns:a="http://schemas.openxmlformats.org/drawingml/2006/main" xmlns:p="http://schemas.openxmlformats.org/presentationml/2006/main" xmlns:r="http://schemas.openxmlformats.org/officeDocument/2006/relationships">
-  <p:cSld>
-    <p:spTree>
-      <p:nvGrpSpPr>
-        <p:cNvPr id="1" name=""/>
-        <p:cNvGrpSpPr/>
-        <p:nvPr/>
-      </p:nvGrpSpPr>
-      <p:grpSpPr/>
-      <p:sp>
-        <p:nvSpPr>
-          <p:cNvPr id="532" name="Google Shape;532;p53"/>
-          <p:cNvSpPr/>
-          <p:nvPr/>
-        </p:nvSpPr>
-        <p:spPr>
-          <a:xfrm>
-            <a:off x="303214" y="1022533"/>
-            <a:ext cx="8451939" cy="1433588"/>
-          </a:xfrm>
-          <a:prstGeom prst="rect">
-            <a:avLst/>
-          </a:prstGeom>
-          <a:noFill/>
-          <a:ln>
-            <a:noFill/>
-          </a:ln>
-        </p:spPr>
-        <p:txBody>
-          <a:bodyPr anchorCtr="0" anchor="ctr" bIns="91425" lIns="91425" spcFirstLastPara="1" rIns="91425" wrap="square" tIns="91425">
-            <a:noAutofit/>
-          </a:bodyPr>
-          <a:lstStyle/>
-          <a:p>
-            <a:pPr indent="0" lvl="0" marL="0" rtl="0" algn="l">
-              <a:spcBef>
-                <a:spcPts val="0"/>
-              </a:spcBef>
-              <a:spcAft>
-                <a:spcPts val="0"/>
-              </a:spcAft>
-              <a:buNone/>
-            </a:pPr>
-            <a:r>
-              <a:t/>
-            </a:r>
-            <a:endParaRPr/>
-          </a:p>
-        </p:txBody>
-      </p:sp>
-      <p:sp>
-        <p:nvSpPr>
-          <p:cNvPr id="533" name="Google Shape;533;p53"/>
-          <p:cNvSpPr/>
-          <p:nvPr/>
-        </p:nvSpPr>
-        <p:spPr>
-          <a:xfrm>
-            <a:off x="303214" y="1022533"/>
-            <a:ext cx="1395256" cy="1433588"/>
-          </a:xfrm>
-          <a:prstGeom prst="rect">
-            <a:avLst/>
-          </a:prstGeom>
-          <a:noFill/>
-          <a:ln>
-            <a:noFill/>
-          </a:ln>
-        </p:spPr>
-        <p:txBody>
-          <a:bodyPr anchorCtr="0" anchor="ctr" bIns="91425" lIns="91425" spcFirstLastPara="1" rIns="91425" wrap="square" tIns="91425">
-            <a:noAutofit/>
-          </a:bodyPr>
-          <a:lstStyle/>
-          <a:p>
-            <a:pPr indent="0" lvl="0" marL="0" rtl="0" algn="l">
-              <a:spcBef>
-                <a:spcPts val="0"/>
-              </a:spcBef>
-              <a:spcAft>
-                <a:spcPts val="0"/>
-              </a:spcAft>
-              <a:buNone/>
-            </a:pPr>
-            <a:r>
-              <a:t/>
-            </a:r>
-            <a:endParaRPr/>
-          </a:p>
-        </p:txBody>
-      </p:sp>
-      <p:sp>
-        <p:nvSpPr>
-          <p:cNvPr id="537" name="Google Shape;537;p53"/>
-          <p:cNvSpPr/>
-          <p:nvPr/>
-        </p:nvSpPr>
-        <p:spPr>
-          <a:xfrm>
-            <a:off x="2067385" y="1022533"/>
-            <a:ext cx="1395256" cy="1433588"/>
-          </a:xfrm>
-          <a:prstGeom prst="rect">
-            <a:avLst/>
-          </a:prstGeom>
-          <a:noFill/>
-          <a:ln>
-            <a:noFill/>
-          </a:ln>
-        </p:spPr>
-        <p:txBody>
-          <a:bodyPr anchorCtr="0" anchor="ctr" bIns="91425" lIns="91425" spcFirstLastPara="1" rIns="91425" wrap="square" tIns="91425">
-            <a:noAutofit/>
-          </a:bodyPr>
-          <a:lstStyle/>
-          <a:p>
-            <a:pPr indent="0" lvl="0" marL="0" rtl="0" algn="l">
-              <a:spcBef>
-                <a:spcPts val="0"/>
-              </a:spcBef>
-              <a:spcAft>
-                <a:spcPts val="0"/>
-              </a:spcAft>
-              <a:buNone/>
-            </a:pPr>
-            <a:r>
-              <a:t/>
-            </a:r>
-            <a:endParaRPr/>
-          </a:p>
-        </p:txBody>
-      </p:sp>
-      <p:sp>
-        <p:nvSpPr>
-          <p:cNvPr id="541" name="Google Shape;541;p53"/>
-          <p:cNvSpPr/>
-          <p:nvPr/>
-        </p:nvSpPr>
-        <p:spPr>
-          <a:xfrm>
-            <a:off x="3831556" y="1022533"/>
-            <a:ext cx="1395256" cy="1433588"/>
-          </a:xfrm>
-          <a:prstGeom prst="rect">
-            <a:avLst/>
-          </a:prstGeom>
-          <a:noFill/>
-          <a:ln>
-            <a:noFill/>
-          </a:ln>
-        </p:spPr>
-        <p:txBody>
-          <a:bodyPr anchorCtr="0" anchor="ctr" bIns="91425" lIns="91425" spcFirstLastPara="1" rIns="91425" wrap="square" tIns="91425">
-            <a:noAutofit/>
-          </a:bodyPr>
-          <a:lstStyle/>
-          <a:p>
-            <a:pPr indent="0" lvl="0" marL="0" rtl="0" algn="l">
-              <a:spcBef>
-                <a:spcPts val="0"/>
-              </a:spcBef>
-              <a:spcAft>
-                <a:spcPts val="0"/>
-              </a:spcAft>
-              <a:buNone/>
-            </a:pPr>
-            <a:r>
-              <a:t/>
-            </a:r>
-            <a:endParaRPr/>
-          </a:p>
-        </p:txBody>
-      </p:sp>
-      <p:sp>
-        <p:nvSpPr>
-          <p:cNvPr id="545" name="Google Shape;545;p53"/>
-          <p:cNvSpPr/>
-          <p:nvPr/>
-        </p:nvSpPr>
-        <p:spPr>
-          <a:xfrm>
-            <a:off x="5595727" y="1022533"/>
-            <a:ext cx="1395256" cy="1433588"/>
-          </a:xfrm>
-          <a:prstGeom prst="rect">
-            <a:avLst/>
-          </a:prstGeom>
-          <a:noFill/>
-          <a:ln>
-            <a:noFill/>
-          </a:ln>
-        </p:spPr>
-        <p:txBody>
-          <a:bodyPr anchorCtr="0" anchor="ctr" bIns="91425" lIns="91425" spcFirstLastPara="1" rIns="91425" wrap="square" tIns="91425">
-            <a:noAutofit/>
-          </a:bodyPr>
-          <a:lstStyle/>
-          <a:p>
-            <a:pPr indent="0" lvl="0" marL="0" rtl="0" algn="l">
-              <a:spcBef>
-                <a:spcPts val="0"/>
-              </a:spcBef>
-              <a:spcAft>
-                <a:spcPts val="0"/>
-              </a:spcAft>
-              <a:buNone/>
-            </a:pPr>
-            <a:r>
-              <a:t/>
-            </a:r>
-            <a:endParaRPr/>
-          </a:p>
-        </p:txBody>
-      </p:sp>
-      <p:sp>
-        <p:nvSpPr>
-          <p:cNvPr id="549" name="Google Shape;549;p53"/>
-          <p:cNvSpPr/>
-          <p:nvPr/>
-        </p:nvSpPr>
-        <p:spPr>
-          <a:xfrm>
-            <a:off x="7359897" y="1022533"/>
-            <a:ext cx="1395256" cy="1433588"/>
-          </a:xfrm>
-          <a:prstGeom prst="rect">
-            <a:avLst/>
-          </a:prstGeom>
-          <a:noFill/>
-          <a:ln>
-            <a:noFill/>
-          </a:ln>
-        </p:spPr>
-        <p:txBody>
-          <a:bodyPr anchorCtr="0" anchor="ctr" bIns="91425" lIns="91425" spcFirstLastPara="1" rIns="91425" wrap="square" tIns="91425">
-            <a:noAutofit/>
-          </a:bodyPr>
-          <a:lstStyle/>
-          <a:p>
-            <a:pPr indent="0" lvl="0" marL="0" rtl="0" algn="l">
-              <a:spcBef>
-                <a:spcPts val="0"/>
-              </a:spcBef>
-              <a:spcAft>
-                <a:spcPts val="0"/>
-              </a:spcAft>
-              <a:buNone/>
-            </a:pPr>
-            <a:r>
-              <a:t/>
-            </a:r>
-            <a:endParaRPr/>
-          </a:p>
-        </p:txBody>
-      </p:sp>
-      <p:sp>
-        <p:nvSpPr>
-          <p:cNvPr id="553" name="Google Shape;553;p53"/>
-          <p:cNvSpPr/>
-          <p:nvPr/>
-        </p:nvSpPr>
-        <p:spPr>
-          <a:xfrm>
-            <a:off x="276488" y="2955549"/>
-            <a:ext cx="8451939" cy="1433588"/>
-          </a:xfrm>
-          <a:prstGeom prst="rect">
-            <a:avLst/>
-          </a:prstGeom>
-          <a:noFill/>
-          <a:ln>
-            <a:noFill/>
-          </a:ln>
-        </p:spPr>
-        <p:txBody>
-          <a:bodyPr anchorCtr="0" anchor="ctr" bIns="91425" lIns="91425" spcFirstLastPara="1" rIns="91425" wrap="square" tIns="91425">
-            <a:noAutofit/>
-          </a:bodyPr>
-          <a:lstStyle/>
-          <a:p>
-            <a:pPr indent="0" lvl="0" marL="0" rtl="0" algn="l">
-              <a:spcBef>
-                <a:spcPts val="0"/>
-              </a:spcBef>
-              <a:spcAft>
-                <a:spcPts val="0"/>
-              </a:spcAft>
-              <a:buNone/>
-            </a:pPr>
-            <a:r>
-              <a:t/>
-            </a:r>
-            <a:endParaRPr/>
-          </a:p>
-        </p:txBody>
-      </p:sp>
-      <p:sp>
-        <p:nvSpPr>
-          <p:cNvPr id="554" name="Google Shape;554;p53"/>
-          <p:cNvSpPr/>
-          <p:nvPr/>
-        </p:nvSpPr>
-        <p:spPr>
-          <a:xfrm>
-            <a:off x="303214" y="2797849"/>
-            <a:ext cx="8451939" cy="1433588"/>
-          </a:xfrm>
-          <a:prstGeom prst="rect">
-            <a:avLst/>
-          </a:prstGeom>
-          <a:noFill/>
-          <a:ln>
-            <a:noFill/>
-          </a:ln>
-        </p:spPr>
-        <p:txBody>
-          <a:bodyPr anchorCtr="0" anchor="ctr" bIns="91425" lIns="91425" spcFirstLastPara="1" rIns="91425" wrap="square" tIns="91425">
-            <a:noAutofit/>
-          </a:bodyPr>
-          <a:lstStyle/>
-          <a:p>
-            <a:pPr indent="0" lvl="0" marL="0" rtl="0" algn="l">
-              <a:spcBef>
-                <a:spcPts val="0"/>
-              </a:spcBef>
-              <a:spcAft>
-                <a:spcPts val="0"/>
-              </a:spcAft>
-              <a:buNone/>
-            </a:pPr>
-            <a:r>
-              <a:t/>
-            </a:r>
-            <a:endParaRPr/>
-          </a:p>
-        </p:txBody>
-      </p:sp>
-      <p:sp>
-        <p:nvSpPr>
-          <p:cNvPr id="555" name="Google Shape;555;p53"/>
-          <p:cNvSpPr/>
-          <p:nvPr/>
-        </p:nvSpPr>
-        <p:spPr>
-          <a:xfrm>
-            <a:off x="303214" y="2797849"/>
-            <a:ext cx="1395256" cy="1433588"/>
-          </a:xfrm>
-          <a:prstGeom prst="rect">
-            <a:avLst/>
-          </a:prstGeom>
-          <a:noFill/>
-          <a:ln>
-            <a:noFill/>
-          </a:ln>
-        </p:spPr>
-        <p:txBody>
-          <a:bodyPr anchorCtr="0" anchor="ctr" bIns="91425" lIns="91425" spcFirstLastPara="1" rIns="91425" wrap="square" tIns="91425">
-            <a:noAutofit/>
-          </a:bodyPr>
-          <a:lstStyle/>
-          <a:p>
-            <a:pPr indent="0" lvl="0" marL="0" rtl="0" algn="l">
-              <a:spcBef>
-                <a:spcPts val="0"/>
-              </a:spcBef>
-              <a:spcAft>
-                <a:spcPts val="0"/>
-              </a:spcAft>
-              <a:buNone/>
-            </a:pPr>
-            <a:r>
-              <a:t/>
-            </a:r>
-            <a:endParaRPr/>
-          </a:p>
-        </p:txBody>
-      </p:sp>
-      <p:sp>
-        <p:nvSpPr>
-          <p:cNvPr id="559" name="Google Shape;559;p53"/>
-          <p:cNvSpPr/>
-          <p:nvPr/>
-        </p:nvSpPr>
-        <p:spPr>
-          <a:xfrm>
-            <a:off x="2067385" y="2797849"/>
-            <a:ext cx="1395256" cy="1433588"/>
-          </a:xfrm>
-          <a:prstGeom prst="rect">
-            <a:avLst/>
-          </a:prstGeom>
-          <a:noFill/>
-          <a:ln>
-            <a:noFill/>
-          </a:ln>
-        </p:spPr>
-        <p:txBody>
-          <a:bodyPr anchorCtr="0" anchor="ctr" bIns="91425" lIns="91425" spcFirstLastPara="1" rIns="91425" wrap="square" tIns="91425">
-            <a:noAutofit/>
-          </a:bodyPr>
-          <a:lstStyle/>
-          <a:p>
-            <a:pPr indent="0" lvl="0" marL="0" rtl="0" algn="l">
-              <a:spcBef>
-                <a:spcPts val="0"/>
-              </a:spcBef>
-              <a:spcAft>
-                <a:spcPts val="0"/>
-              </a:spcAft>
-              <a:buNone/>
-            </a:pPr>
-            <a:r>
-              <a:t/>
-            </a:r>
-            <a:endParaRPr/>
-          </a:p>
-        </p:txBody>
-      </p:sp>
-      <p:sp>
-        <p:nvSpPr>
-          <p:cNvPr id="563" name="Google Shape;563;p53"/>
-          <p:cNvSpPr/>
-          <p:nvPr/>
-        </p:nvSpPr>
-        <p:spPr>
-          <a:xfrm>
-            <a:off x="3831556" y="2797849"/>
-            <a:ext cx="1395256" cy="1433588"/>
-          </a:xfrm>
-          <a:prstGeom prst="rect">
-            <a:avLst/>
-          </a:prstGeom>
-          <a:noFill/>
-          <a:ln>
-            <a:noFill/>
-          </a:ln>
-        </p:spPr>
-        <p:txBody>
-          <a:bodyPr anchorCtr="0" anchor="ctr" bIns="91425" lIns="91425" spcFirstLastPara="1" rIns="91425" wrap="square" tIns="91425">
-            <a:noAutofit/>
-          </a:bodyPr>
-          <a:lstStyle/>
-          <a:p>
-            <a:pPr indent="0" lvl="0" marL="0" rtl="0" algn="l">
-              <a:spcBef>
-                <a:spcPts val="0"/>
-              </a:spcBef>
-              <a:spcAft>
-                <a:spcPts val="0"/>
-              </a:spcAft>
-              <a:buNone/>
-            </a:pPr>
-            <a:r>
-              <a:t/>
-            </a:r>
-            <a:endParaRPr/>
-          </a:p>
-        </p:txBody>
-      </p:sp>
-      <p:sp>
-        <p:nvSpPr>
-          <p:cNvPr id="567" name="Google Shape;567;p53"/>
-          <p:cNvSpPr/>
-          <p:nvPr/>
-        </p:nvSpPr>
-        <p:spPr>
-          <a:xfrm>
-            <a:off x="5595727" y="2797849"/>
-            <a:ext cx="1395256" cy="1433588"/>
-          </a:xfrm>
-          <a:prstGeom prst="rect">
-            <a:avLst/>
-          </a:prstGeom>
-          <a:noFill/>
-          <a:ln>
-            <a:noFill/>
-          </a:ln>
-        </p:spPr>
-        <p:txBody>
-          <a:bodyPr anchorCtr="0" anchor="ctr" bIns="91425" lIns="91425" spcFirstLastPara="1" rIns="91425" wrap="square" tIns="91425">
-            <a:noAutofit/>
-          </a:bodyPr>
-          <a:lstStyle/>
-          <a:p>
-            <a:pPr indent="0" lvl="0" marL="0" rtl="0" algn="l">
-              <a:spcBef>
-                <a:spcPts val="0"/>
-              </a:spcBef>
-              <a:spcAft>
-                <a:spcPts val="0"/>
-              </a:spcAft>
-              <a:buNone/>
-            </a:pPr>
-            <a:r>
-              <a:t/>
-            </a:r>
-            <a:endParaRPr/>
-          </a:p>
-        </p:txBody>
-      </p:sp>
-      <p:sp>
-        <p:nvSpPr>
-          <p:cNvPr id="571" name="Google Shape;571;p53"/>
-          <p:cNvSpPr/>
-          <p:nvPr/>
-        </p:nvSpPr>
-        <p:spPr>
-          <a:xfrm>
-            <a:off x="7359897" y="2797849"/>
-            <a:ext cx="1395256" cy="1433588"/>
-          </a:xfrm>
-          <a:prstGeom prst="rect">
-            <a:avLst/>
-          </a:prstGeom>
-          <a:noFill/>
-          <a:ln>
-            <a:noFill/>
-          </a:ln>
-        </p:spPr>
-        <p:txBody>
-          <a:bodyPr anchorCtr="0" anchor="ctr" bIns="91425" lIns="91425" spcFirstLastPara="1" rIns="91425" wrap="square" tIns="91425">
-            <a:noAutofit/>
-          </a:bodyPr>
-          <a:lstStyle/>
-          <a:p>
-            <a:pPr indent="0" lvl="0" marL="0" rtl="0" algn="l">
-              <a:spcBef>
-                <a:spcPts val="0"/>
-              </a:spcBef>
-              <a:spcAft>
-                <a:spcPts val="0"/>
-              </a:spcAft>
-              <a:buNone/>
-            </a:pPr>
-            <a:r>
-              <a:t/>
-            </a:r>
-            <a:endParaRPr/>
-          </a:p>
-        </p:txBody>
-      </p:sp>
-      <p:sp>
-        <p:nvSpPr>
-          <p:cNvPr id="572" name="title"/>
-          <p:cNvSpPr txBox="1"/>
-          <p:nvPr/>
-        </p:nvSpPr>
-        <p:spPr>
-          <a:xfrm>
-            <a:off x="274320" y="282943"/>
-            <a:ext cx="6792986" cy="617220"/>
-          </a:xfrm>
-          <a:prstGeom prst="rect">
-            <a:avLst/>
-          </a:prstGeom>
-          <a:noFill/>
-        </p:spPr>
-        <p:txBody>
-          <a:bodyPr wrap="square" lIns="76200" rIns="76200" tIns="50800" bIns="50800">
-            <a:spAutoFit/>
-          </a:bodyPr>
-          <a:lstStyle/>
-          <a:p>
-            <a:pPr algn="l">
-              <a:spcAft>
-                <a:spcPts val="300"/>
-              </a:spcAft>
-              <a:defRPr sz="2438">
-                <a:solidFill>
-                  <a:srgbClr val="000000"/>
-                </a:solidFill>
-                <a:latin typeface="Play"/>
-                <a:ea typeface="Play"/>
-                <a:cs typeface="Play"/>
-              </a:defRPr>
-            </a:pPr>
-            <a:r>
-              <a:rPr sz="2438">
-                <a:solidFill>
-                  <a:srgbClr val="000000"/>
-                </a:solidFill>
-                <a:latin typeface="Play"/>
-                <a:ea typeface="Play"/>
-                <a:cs typeface="Play"/>
-              </a:rPr>
-              <a:t>Сервис: автоматическая вёрстка</a:t>
-            </a:r>
-          </a:p>
-        </p:txBody>
-      </p:sp>
-      <p:sp>
-        <p:nvSpPr>
-          <p:cNvPr id="573" name="body"/>
-          <p:cNvSpPr txBox="1"/>
-          <p:nvPr/>
-        </p:nvSpPr>
-        <p:spPr>
-          <a:xfrm>
-            <a:off x="274320" y="2034088"/>
-            <a:ext cx="8344814" cy="993140"/>
-          </a:xfrm>
-          <a:prstGeom prst="rect">
-            <a:avLst/>
-          </a:prstGeom>
-          <a:noFill/>
-        </p:spPr>
-        <p:txBody>
-          <a:bodyPr wrap="square" lIns="76200" rIns="76200" tIns="50800" bIns="50800">
-            <a:spAutoFit/>
-          </a:bodyPr>
-          <a:lstStyle/>
-          <a:p>
-            <a:pPr algn="l">
-              <a:spcAft>
-                <a:spcPts val="300"/>
-              </a:spcAft>
-              <a:defRPr sz="1800">
-                <a:solidFill>
-                  <a:srgbClr val="000000"/>
-                </a:solidFill>
-                <a:latin typeface="Play"/>
-                <a:ea typeface="Play"/>
-                <a:cs typeface="Play"/>
-              </a:defRPr>
-            </a:pPr>
-            <a:r>
-              <a:rPr sz="1800">
-                <a:solidFill>
-                  <a:srgbClr val="000000"/>
-                </a:solidFill>
-                <a:latin typeface="Play"/>
-                <a:ea typeface="Play"/>
-                <a:cs typeface="Play"/>
-              </a:rPr>
-              <a:t>• Принимает шаблон pptx и материалы</a:t>
-            </a:r>
-          </a:p>
-          <a:p>
-            <a:pPr algn="l">
-              <a:spcAft>
-                <a:spcPts val="300"/>
-              </a:spcAft>
-              <a:defRPr sz="1800">
-                <a:solidFill>
-                  <a:srgbClr val="000000"/>
-                </a:solidFill>
-                <a:latin typeface="Play"/>
-                <a:ea typeface="Play"/>
-                <a:cs typeface="Play"/>
-              </a:defRPr>
-            </a:pPr>
-            <a:r>
-              <a:rPr sz="1800">
-                <a:solidFill>
-                  <a:srgbClr val="000000"/>
-                </a:solidFill>
-                <a:latin typeface="Play"/>
-                <a:ea typeface="Play"/>
-                <a:cs typeface="Play"/>
-              </a:rPr>
-              <a:t>• Автоматически формирует дизайн-систему и план колоды</a:t>
-            </a:r>
-          </a:p>
-          <a:p>
-            <a:pPr algn="l">
-              <a:spcAft>
-                <a:spcPts val="300"/>
-              </a:spcAft>
-              <a:defRPr sz="1800">
-                <a:solidFill>
-                  <a:srgbClr val="000000"/>
-                </a:solidFill>
-                <a:latin typeface="Play"/>
-                <a:ea typeface="Play"/>
-                <a:cs typeface="Play"/>
-              </a:defRPr>
-            </a:pPr>
-            <a:r>
-              <a:rPr sz="1800">
-                <a:solidFill>
-                  <a:srgbClr val="000000"/>
-                </a:solidFill>
-                <a:latin typeface="Play"/>
-                <a:ea typeface="Play"/>
-                <a:cs typeface="Play"/>
-              </a:rPr>
-              <a:t>• Экспортирует pptx, pdf, html, слайды остаются редактируемыми</a:t>
-            </a:r>
-          </a:p>
-        </p:txBody>
-      </p:sp>
-    </p:spTree>
-  </p:cSld>
-  <p:clrMapOvr>
-    <a:masterClrMapping/>
-  </p:clrMapOvr>
-</p:sld>
-</file>
-
-<file path=ppt/slides/slide58.xml><?xml version="1.0" encoding="utf-8"?>
-<p:sld xmlns:a="http://schemas.openxmlformats.org/drawingml/2006/main" xmlns:p="http://schemas.openxmlformats.org/presentationml/2006/main" xmlns:r="http://schemas.openxmlformats.org/officeDocument/2006/relationships">
-  <p:cSld>
-    <p:spTree>
-      <p:nvGrpSpPr>
-        <p:cNvPr id="1" name=""/>
-        <p:cNvGrpSpPr/>
-        <p:nvPr/>
-      </p:nvGrpSpPr>
-      <p:grpSpPr/>
-      <p:sp>
-        <p:nvSpPr>
-          <p:cNvPr id="1027" name="Google Shape;1027;p65"/>
-          <p:cNvSpPr/>
-          <p:nvPr/>
-        </p:nvSpPr>
-        <p:spPr>
-          <a:xfrm>
-            <a:off x="6064222" y="1209852"/>
-            <a:ext cx="2793985" cy="3014270"/>
-          </a:xfrm>
-          <a:prstGeom prst="roundRect">
-            <a:avLst>
-              <a:gd fmla="val 3436" name="adj"/>
-            </a:avLst>
-          </a:prstGeom>
-          <a:solidFill>
-            <a:schemeClr val="lt2"/>
-          </a:solidFill>
-          <a:ln>
-            <a:noFill/>
-          </a:ln>
-        </p:spPr>
-        <p:txBody>
-          <a:bodyPr anchorCtr="0" anchor="ctr" bIns="91425" lIns="91425" spcFirstLastPara="1" rIns="91425" wrap="square" tIns="91425">
-            <a:noAutofit/>
-          </a:bodyPr>
-          <a:lstStyle/>
-          <a:p>
-            <a:pPr indent="0" lvl="0" marL="0" rtl="0" algn="l">
-              <a:spcBef>
-                <a:spcPts val="0"/>
-              </a:spcBef>
-              <a:spcAft>
-                <a:spcPts val="0"/>
-              </a:spcAft>
-              <a:buNone/>
-            </a:pPr>
-            <a:r>
-              <a:t/>
-            </a:r>
-            <a:endParaRPr/>
-          </a:p>
-        </p:txBody>
-      </p:sp>
-      <p:pic>
-        <p:nvPicPr>
-          <p:cNvPr descr=" " id="1028" name="Google Shape;1028;p65"/>
-          <p:cNvPicPr preferRelativeResize="0"/>
-          <p:nvPr/>
-        </p:nvPicPr>
-        <p:blipFill rotWithShape="1">
-          <a:blip r:embed="rId2">
-            <a:alphaModFix/>
-          </a:blip>
-          <a:srcRect b="0" l="0" r="0" t="0"/>
-          <a:stretch/>
-        </p:blipFill>
-        <p:spPr>
-          <a:xfrm>
-            <a:off x="8203313" y="3566983"/>
-            <a:ext cx="466723" cy="466664"/>
-          </a:xfrm>
-          <a:prstGeom prst="rect">
-            <a:avLst/>
-          </a:prstGeom>
-          <a:noFill/>
-          <a:ln>
-            <a:noFill/>
-          </a:ln>
-        </p:spPr>
-      </p:pic>
-      <p:sp>
-        <p:nvSpPr>
-          <p:cNvPr id="1029" name="Google Shape;1029;p65"/>
-          <p:cNvSpPr/>
-          <p:nvPr/>
-        </p:nvSpPr>
-        <p:spPr>
-          <a:xfrm>
-            <a:off x="3174981" y="1209852"/>
-            <a:ext cx="2793985" cy="3014270"/>
-          </a:xfrm>
-          <a:prstGeom prst="roundRect">
-            <a:avLst>
-              <a:gd fmla="val 3436" name="adj"/>
-            </a:avLst>
-          </a:prstGeom>
-          <a:solidFill>
-            <a:schemeClr val="lt2"/>
-          </a:solidFill>
-          <a:ln>
-            <a:noFill/>
-          </a:ln>
-        </p:spPr>
-        <p:txBody>
-          <a:bodyPr anchorCtr="0" anchor="ctr" bIns="91425" lIns="91425" spcFirstLastPara="1" rIns="91425" wrap="square" tIns="91425">
-            <a:noAutofit/>
-          </a:bodyPr>
-          <a:lstStyle/>
-          <a:p>
-            <a:pPr indent="0" lvl="0" marL="0" rtl="0" algn="l">
-              <a:spcBef>
-                <a:spcPts val="0"/>
-              </a:spcBef>
-              <a:spcAft>
-                <a:spcPts val="0"/>
-              </a:spcAft>
-              <a:buNone/>
-            </a:pPr>
-            <a:r>
-              <a:t/>
-            </a:r>
-            <a:endParaRPr/>
-          </a:p>
-        </p:txBody>
-      </p:sp>
-      <p:pic>
-        <p:nvPicPr>
-          <p:cNvPr descr=" " id="1030" name="Google Shape;1030;p65"/>
-          <p:cNvPicPr preferRelativeResize="0"/>
-          <p:nvPr/>
-        </p:nvPicPr>
-        <p:blipFill rotWithShape="1">
-          <a:blip r:embed="rId2">
-            <a:alphaModFix/>
-          </a:blip>
-          <a:srcRect b="0" l="0" r="0" t="0"/>
-          <a:stretch/>
-        </p:blipFill>
-        <p:spPr>
-          <a:xfrm>
-            <a:off x="5310249" y="3566983"/>
-            <a:ext cx="466723" cy="466664"/>
-          </a:xfrm>
-          <a:prstGeom prst="rect">
-            <a:avLst/>
-          </a:prstGeom>
-          <a:noFill/>
-          <a:ln>
-            <a:noFill/>
-          </a:ln>
-        </p:spPr>
-      </p:pic>
-      <p:sp>
-        <p:nvSpPr>
-          <p:cNvPr id="1031" name="Google Shape;1031;p65"/>
-          <p:cNvSpPr/>
-          <p:nvPr/>
-        </p:nvSpPr>
-        <p:spPr>
-          <a:xfrm>
-            <a:off x="285749" y="1209852"/>
-            <a:ext cx="2793985" cy="3014270"/>
-          </a:xfrm>
-          <a:prstGeom prst="roundRect">
-            <a:avLst>
-              <a:gd fmla="val 3436" name="adj"/>
-            </a:avLst>
-          </a:prstGeom>
-          <a:solidFill>
-            <a:schemeClr val="lt2"/>
-          </a:solidFill>
-          <a:ln>
-            <a:noFill/>
-          </a:ln>
-        </p:spPr>
-        <p:txBody>
-          <a:bodyPr anchorCtr="0" anchor="ctr" bIns="91425" lIns="91425" spcFirstLastPara="1" rIns="91425" wrap="square" tIns="91425">
-            <a:noAutofit/>
-          </a:bodyPr>
-          <a:lstStyle/>
-          <a:p>
-            <a:pPr indent="0" lvl="0" marL="0" rtl="0" algn="l">
-              <a:spcBef>
-                <a:spcPts val="0"/>
-              </a:spcBef>
-              <a:spcAft>
-                <a:spcPts val="0"/>
-              </a:spcAft>
-              <a:buNone/>
-            </a:pPr>
-            <a:r>
-              <a:t/>
-            </a:r>
-            <a:endParaRPr/>
-          </a:p>
-        </p:txBody>
-      </p:sp>
-      <p:sp>
-        <p:nvSpPr>
-          <p:cNvPr id="1032" name="Google Shape;1032;p65"/>
-          <p:cNvSpPr/>
-          <p:nvPr/>
-        </p:nvSpPr>
-        <p:spPr>
-          <a:xfrm>
-            <a:off x="285748" y="286047"/>
-            <a:ext cx="8572456" cy="3938075"/>
-          </a:xfrm>
-          <a:prstGeom prst="rect">
-            <a:avLst/>
-          </a:prstGeom>
-          <a:noFill/>
-          <a:ln>
-            <a:noFill/>
-          </a:ln>
-        </p:spPr>
-        <p:txBody>
-          <a:bodyPr anchorCtr="0" anchor="ctr" bIns="91425" lIns="91425" spcFirstLastPara="1" rIns="91425" wrap="square" tIns="91425">
-            <a:noAutofit/>
-          </a:bodyPr>
-          <a:lstStyle/>
-          <a:p>
-            <a:pPr indent="0" lvl="0" marL="0" rtl="0" algn="l">
-              <a:spcBef>
-                <a:spcPts val="0"/>
-              </a:spcBef>
-              <a:spcAft>
-                <a:spcPts val="0"/>
-              </a:spcAft>
-              <a:buNone/>
-            </a:pPr>
-            <a:r>
-              <a:t/>
-            </a:r>
-            <a:endParaRPr/>
-          </a:p>
-        </p:txBody>
-      </p:sp>
-      <p:sp>
-        <p:nvSpPr>
-          <p:cNvPr id="1033" name="Google Shape;1033;p65"/>
-          <p:cNvSpPr/>
-          <p:nvPr/>
-        </p:nvSpPr>
-        <p:spPr>
-          <a:xfrm>
-            <a:off x="285748" y="1209852"/>
-            <a:ext cx="8572456" cy="3014270"/>
-          </a:xfrm>
-          <a:prstGeom prst="rect">
-            <a:avLst/>
-          </a:prstGeom>
-          <a:noFill/>
-          <a:ln>
-            <a:noFill/>
-          </a:ln>
-        </p:spPr>
-        <p:txBody>
-          <a:bodyPr anchorCtr="0" anchor="ctr" bIns="91425" lIns="91425" spcFirstLastPara="1" rIns="91425" wrap="square" tIns="91425">
-            <a:noAutofit/>
-          </a:bodyPr>
-          <a:lstStyle/>
-          <a:p>
-            <a:pPr indent="0" lvl="0" marL="0" rtl="0" algn="l">
-              <a:spcBef>
-                <a:spcPts val="0"/>
-              </a:spcBef>
-              <a:spcAft>
-                <a:spcPts val="0"/>
-              </a:spcAft>
-              <a:buNone/>
-            </a:pPr>
-            <a:r>
-              <a:t/>
-            </a:r>
-            <a:endParaRPr/>
-          </a:p>
-        </p:txBody>
-      </p:sp>
-      <p:sp>
-        <p:nvSpPr>
-          <p:cNvPr id="1034" name="Google Shape;1034;p65"/>
-          <p:cNvSpPr/>
-          <p:nvPr/>
-        </p:nvSpPr>
-        <p:spPr>
-          <a:xfrm>
-            <a:off x="476248" y="1400327"/>
-            <a:ext cx="2412987" cy="1009519"/>
-          </a:xfrm>
-          <a:prstGeom prst="rect">
-            <a:avLst/>
-          </a:prstGeom>
-          <a:noFill/>
-          <a:ln>
-            <a:noFill/>
-          </a:ln>
-        </p:spPr>
-        <p:txBody>
-          <a:bodyPr anchorCtr="0" anchor="ctr" bIns="91425" lIns="91425" spcFirstLastPara="1" rIns="91425" wrap="square" tIns="91425">
-            <a:noAutofit/>
-          </a:bodyPr>
-          <a:lstStyle/>
-          <a:p>
-            <a:pPr indent="0" lvl="0" marL="0" rtl="0" algn="l">
-              <a:spcBef>
-                <a:spcPts val="0"/>
-              </a:spcBef>
-              <a:spcAft>
-                <a:spcPts val="0"/>
-              </a:spcAft>
-              <a:buNone/>
-            </a:pPr>
-            <a:r>
-              <a:t/>
-            </a:r>
-            <a:endParaRPr/>
-          </a:p>
-        </p:txBody>
-      </p:sp>
-      <p:sp>
-        <p:nvSpPr>
-          <p:cNvPr id="1035" name="Google Shape;1035;p65"/>
-          <p:cNvSpPr/>
-          <p:nvPr/>
-        </p:nvSpPr>
-        <p:spPr>
-          <a:xfrm>
-            <a:off x="476248" y="1400328"/>
-            <a:ext cx="76199" cy="76190"/>
-          </a:xfrm>
-          <a:prstGeom prst="roundRect">
-            <a:avLst>
-              <a:gd fmla="val 31500" name="adj"/>
-            </a:avLst>
-          </a:prstGeom>
-          <a:solidFill>
-            <a:srgbClr val="0077FF"/>
-          </a:solidFill>
-          <a:ln>
-            <a:noFill/>
-          </a:ln>
-        </p:spPr>
-        <p:txBody>
-          <a:bodyPr anchorCtr="0" anchor="ctr" bIns="91425" lIns="91425" spcFirstLastPara="1" rIns="91425" wrap="square" tIns="91425">
-            <a:noAutofit/>
-          </a:bodyPr>
-          <a:lstStyle/>
-          <a:p>
-            <a:pPr indent="0" lvl="0" marL="0" rtl="0" algn="l">
-              <a:spcBef>
-                <a:spcPts val="0"/>
-              </a:spcBef>
-              <a:spcAft>
-                <a:spcPts val="0"/>
-              </a:spcAft>
-              <a:buNone/>
-            </a:pPr>
-            <a:r>
-              <a:t/>
-            </a:r>
-            <a:endParaRPr/>
-          </a:p>
-        </p:txBody>
-      </p:sp>
-      <p:sp>
-        <p:nvSpPr>
-          <p:cNvPr id="1037" name="Google Shape;1037;p65"/>
-          <p:cNvSpPr/>
-          <p:nvPr/>
-        </p:nvSpPr>
-        <p:spPr>
-          <a:xfrm>
-            <a:off x="2422509" y="3566983"/>
-            <a:ext cx="466723" cy="466664"/>
-          </a:xfrm>
-          <a:prstGeom prst="rect">
-            <a:avLst/>
-          </a:prstGeom>
-          <a:noFill/>
-          <a:ln>
-            <a:noFill/>
-          </a:ln>
-        </p:spPr>
-        <p:txBody>
-          <a:bodyPr anchorCtr="0" anchor="ctr" bIns="91425" lIns="91425" spcFirstLastPara="1" rIns="91425" wrap="square" tIns="91425">
-            <a:noAutofit/>
-          </a:bodyPr>
-          <a:lstStyle/>
-          <a:p>
-            <a:pPr indent="0" lvl="0" marL="0" rtl="0" algn="l">
-              <a:spcBef>
-                <a:spcPts val="0"/>
-              </a:spcBef>
-              <a:spcAft>
-                <a:spcPts val="0"/>
-              </a:spcAft>
-              <a:buNone/>
-            </a:pPr>
-            <a:r>
-              <a:t/>
-            </a:r>
-            <a:endParaRPr/>
-          </a:p>
-        </p:txBody>
-      </p:sp>
-      <p:pic>
-        <p:nvPicPr>
-          <p:cNvPr descr=" " id="1038" name="Google Shape;1038;p65"/>
-          <p:cNvPicPr preferRelativeResize="0"/>
-          <p:nvPr/>
-        </p:nvPicPr>
-        <p:blipFill rotWithShape="1">
-          <a:blip r:embed="rId2">
-            <a:alphaModFix/>
-          </a:blip>
-          <a:srcRect b="0" l="0" r="0" t="0"/>
-          <a:stretch/>
-        </p:blipFill>
-        <p:spPr>
-          <a:xfrm>
-            <a:off x="2422506" y="3566983"/>
-            <a:ext cx="466723" cy="466664"/>
-          </a:xfrm>
-          <a:prstGeom prst="rect">
-            <a:avLst/>
-          </a:prstGeom>
-          <a:noFill/>
-          <a:ln>
-            <a:noFill/>
-          </a:ln>
-        </p:spPr>
-      </p:pic>
-      <p:pic>
-        <p:nvPicPr>
-          <p:cNvPr descr=" " id="1039" name="Google Shape;1039;p65"/>
-          <p:cNvPicPr preferRelativeResize="0"/>
-          <p:nvPr/>
-        </p:nvPicPr>
-        <p:blipFill rotWithShape="1">
-          <a:blip r:embed="rId3">
-            <a:alphaModFix/>
-          </a:blip>
-          <a:srcRect b="0" l="0" r="0" t="0"/>
-          <a:stretch/>
-        </p:blipFill>
-        <p:spPr>
-          <a:xfrm>
-            <a:off x="2555859" y="3700316"/>
-            <a:ext cx="200024" cy="199999"/>
-          </a:xfrm>
-          <a:prstGeom prst="rect">
-            <a:avLst/>
-          </a:prstGeom>
-          <a:noFill/>
-          <a:ln>
-            <a:noFill/>
-          </a:ln>
-        </p:spPr>
-      </p:pic>
-      <p:sp>
-        <p:nvSpPr>
-          <p:cNvPr id="1040" name="Google Shape;1040;p65"/>
-          <p:cNvSpPr/>
-          <p:nvPr/>
-        </p:nvSpPr>
-        <p:spPr>
-          <a:xfrm>
-            <a:off x="3365480" y="1400327"/>
-            <a:ext cx="2412987" cy="1009519"/>
-          </a:xfrm>
-          <a:prstGeom prst="rect">
-            <a:avLst/>
-          </a:prstGeom>
-          <a:noFill/>
-          <a:ln>
-            <a:noFill/>
-          </a:ln>
-        </p:spPr>
-        <p:txBody>
-          <a:bodyPr anchorCtr="0" anchor="ctr" bIns="91425" lIns="91425" spcFirstLastPara="1" rIns="91425" wrap="square" tIns="91425">
-            <a:noAutofit/>
-          </a:bodyPr>
-          <a:lstStyle/>
-          <a:p>
-            <a:pPr indent="0" lvl="0" marL="0" rtl="0" algn="l">
-              <a:spcBef>
-                <a:spcPts val="0"/>
-              </a:spcBef>
-              <a:spcAft>
-                <a:spcPts val="0"/>
-              </a:spcAft>
-              <a:buNone/>
-            </a:pPr>
-            <a:r>
-              <a:t/>
-            </a:r>
-            <a:endParaRPr/>
-          </a:p>
-        </p:txBody>
-      </p:sp>
-      <p:sp>
-        <p:nvSpPr>
-          <p:cNvPr id="1041" name="Google Shape;1041;p65"/>
-          <p:cNvSpPr/>
-          <p:nvPr/>
-        </p:nvSpPr>
-        <p:spPr>
-          <a:xfrm>
-            <a:off x="3365480" y="1400328"/>
-            <a:ext cx="76199" cy="76190"/>
-          </a:xfrm>
-          <a:prstGeom prst="roundRect">
-            <a:avLst>
-              <a:gd fmla="val 31500" name="adj"/>
-            </a:avLst>
-          </a:prstGeom>
-          <a:solidFill>
-            <a:srgbClr val="0077FF"/>
-          </a:solidFill>
-          <a:ln>
-            <a:noFill/>
-          </a:ln>
-        </p:spPr>
-        <p:txBody>
-          <a:bodyPr anchorCtr="0" anchor="ctr" bIns="91425" lIns="91425" spcFirstLastPara="1" rIns="91425" wrap="square" tIns="91425">
-            <a:noAutofit/>
-          </a:bodyPr>
-          <a:lstStyle/>
-          <a:p>
-            <a:pPr indent="0" lvl="0" marL="0" rtl="0" algn="l">
-              <a:spcBef>
-                <a:spcPts val="0"/>
-              </a:spcBef>
-              <a:spcAft>
-                <a:spcPts val="0"/>
-              </a:spcAft>
-              <a:buNone/>
-            </a:pPr>
-            <a:r>
-              <a:t/>
-            </a:r>
-            <a:endParaRPr/>
-          </a:p>
-        </p:txBody>
-      </p:sp>
-      <p:sp>
-        <p:nvSpPr>
-          <p:cNvPr id="1043" name="Google Shape;1043;p65"/>
-          <p:cNvSpPr/>
-          <p:nvPr/>
-        </p:nvSpPr>
-        <p:spPr>
-          <a:xfrm>
-            <a:off x="5311741" y="3566983"/>
-            <a:ext cx="466723" cy="466664"/>
-          </a:xfrm>
-          <a:prstGeom prst="rect">
-            <a:avLst/>
-          </a:prstGeom>
-          <a:noFill/>
-          <a:ln>
-            <a:noFill/>
-          </a:ln>
-        </p:spPr>
-        <p:txBody>
-          <a:bodyPr anchorCtr="0" anchor="ctr" bIns="91425" lIns="91425" spcFirstLastPara="1" rIns="91425" wrap="square" tIns="91425">
-            <a:noAutofit/>
-          </a:bodyPr>
-          <a:lstStyle/>
-          <a:p>
-            <a:pPr indent="0" lvl="0" marL="0" rtl="0" algn="l">
-              <a:spcBef>
-                <a:spcPts val="0"/>
-              </a:spcBef>
-              <a:spcAft>
-                <a:spcPts val="0"/>
-              </a:spcAft>
-              <a:buNone/>
-            </a:pPr>
-            <a:r>
-              <a:t/>
-            </a:r>
-            <a:endParaRPr/>
-          </a:p>
-        </p:txBody>
-      </p:sp>
-      <p:pic>
-        <p:nvPicPr>
-          <p:cNvPr descr=" " id="1044" name="Google Shape;1044;p65"/>
-          <p:cNvPicPr preferRelativeResize="0"/>
-          <p:nvPr/>
-        </p:nvPicPr>
-        <p:blipFill rotWithShape="1">
-          <a:blip r:embed="rId3">
-            <a:alphaModFix/>
-          </a:blip>
-          <a:srcRect b="0" l="0" r="0" t="0"/>
-          <a:stretch/>
-        </p:blipFill>
-        <p:spPr>
-          <a:xfrm>
-            <a:off x="5445091" y="3700316"/>
-            <a:ext cx="200024" cy="199999"/>
-          </a:xfrm>
-          <a:prstGeom prst="rect">
-            <a:avLst/>
-          </a:prstGeom>
-          <a:noFill/>
-          <a:ln>
-            <a:noFill/>
-          </a:ln>
-        </p:spPr>
-      </p:pic>
-      <p:sp>
-        <p:nvSpPr>
-          <p:cNvPr id="1045" name="Google Shape;1045;p65"/>
-          <p:cNvSpPr/>
-          <p:nvPr/>
-        </p:nvSpPr>
-        <p:spPr>
-          <a:xfrm>
-            <a:off x="6254721" y="1400327"/>
-            <a:ext cx="2412987" cy="1009519"/>
-          </a:xfrm>
-          <a:prstGeom prst="rect">
-            <a:avLst/>
-          </a:prstGeom>
-          <a:noFill/>
-          <a:ln>
-            <a:noFill/>
-          </a:ln>
-        </p:spPr>
-        <p:txBody>
-          <a:bodyPr anchorCtr="0" anchor="ctr" bIns="91425" lIns="91425" spcFirstLastPara="1" rIns="91425" wrap="square" tIns="91425">
-            <a:noAutofit/>
-          </a:bodyPr>
-          <a:lstStyle/>
-          <a:p>
-            <a:pPr indent="0" lvl="0" marL="0" rtl="0" algn="l">
-              <a:spcBef>
-                <a:spcPts val="0"/>
-              </a:spcBef>
-              <a:spcAft>
-                <a:spcPts val="0"/>
-              </a:spcAft>
-              <a:buNone/>
-            </a:pPr>
-            <a:r>
-              <a:t/>
-            </a:r>
-            <a:endParaRPr/>
-          </a:p>
-        </p:txBody>
-      </p:sp>
-      <p:sp>
-        <p:nvSpPr>
-          <p:cNvPr id="1046" name="Google Shape;1046;p65"/>
-          <p:cNvSpPr/>
-          <p:nvPr/>
-        </p:nvSpPr>
-        <p:spPr>
-          <a:xfrm>
-            <a:off x="6254721" y="1400328"/>
-            <a:ext cx="76199" cy="76190"/>
-          </a:xfrm>
-          <a:prstGeom prst="roundRect">
-            <a:avLst>
-              <a:gd fmla="val 31500" name="adj"/>
-            </a:avLst>
-          </a:prstGeom>
-          <a:solidFill>
-            <a:srgbClr val="0077FF"/>
-          </a:solidFill>
-          <a:ln>
-            <a:noFill/>
-          </a:ln>
-        </p:spPr>
-        <p:txBody>
-          <a:bodyPr anchorCtr="0" anchor="ctr" bIns="91425" lIns="91425" spcFirstLastPara="1" rIns="91425" wrap="square" tIns="91425">
-            <a:noAutofit/>
-          </a:bodyPr>
-          <a:lstStyle/>
-          <a:p>
-            <a:pPr indent="0" lvl="0" marL="0" rtl="0" algn="l">
-              <a:spcBef>
-                <a:spcPts val="0"/>
-              </a:spcBef>
-              <a:spcAft>
-                <a:spcPts val="0"/>
-              </a:spcAft>
-              <a:buNone/>
-            </a:pPr>
-            <a:r>
-              <a:t/>
-            </a:r>
-            <a:endParaRPr/>
-          </a:p>
-        </p:txBody>
-      </p:sp>
-      <p:sp>
-        <p:nvSpPr>
-          <p:cNvPr id="1048" name="Google Shape;1048;p65"/>
-          <p:cNvSpPr/>
-          <p:nvPr/>
-        </p:nvSpPr>
-        <p:spPr>
-          <a:xfrm>
-            <a:off x="8200982" y="3566983"/>
-            <a:ext cx="466723" cy="466664"/>
-          </a:xfrm>
-          <a:prstGeom prst="rect">
-            <a:avLst/>
-          </a:prstGeom>
-          <a:noFill/>
-          <a:ln>
-            <a:noFill/>
-          </a:ln>
-        </p:spPr>
-        <p:txBody>
-          <a:bodyPr anchorCtr="0" anchor="ctr" bIns="91425" lIns="91425" spcFirstLastPara="1" rIns="91425" wrap="square" tIns="91425">
-            <a:noAutofit/>
-          </a:bodyPr>
-          <a:lstStyle/>
-          <a:p>
-            <a:pPr indent="0" lvl="0" marL="0" rtl="0" algn="l">
-              <a:spcBef>
-                <a:spcPts val="0"/>
-              </a:spcBef>
-              <a:spcAft>
-                <a:spcPts val="0"/>
-              </a:spcAft>
-              <a:buNone/>
-            </a:pPr>
-            <a:r>
-              <a:t/>
-            </a:r>
-            <a:endParaRPr/>
-          </a:p>
-        </p:txBody>
-      </p:sp>
-      <p:pic>
-        <p:nvPicPr>
-          <p:cNvPr descr=" " id="1049" name="Google Shape;1049;p65"/>
-          <p:cNvPicPr preferRelativeResize="0"/>
-          <p:nvPr/>
-        </p:nvPicPr>
-        <p:blipFill rotWithShape="1">
-          <a:blip r:embed="rId3">
-            <a:alphaModFix/>
-          </a:blip>
-          <a:srcRect b="0" l="0" r="0" t="0"/>
-          <a:stretch/>
-        </p:blipFill>
-        <p:spPr>
-          <a:xfrm>
-            <a:off x="8334332" y="3700316"/>
-            <a:ext cx="200024" cy="199999"/>
-          </a:xfrm>
-          <a:prstGeom prst="rect">
-            <a:avLst/>
-          </a:prstGeom>
-          <a:noFill/>
-          <a:ln>
-            <a:noFill/>
-          </a:ln>
-        </p:spPr>
-      </p:pic>
-      <p:sp>
-        <p:nvSpPr>
-          <p:cNvPr id="1050" name="title"/>
-          <p:cNvSpPr txBox="1"/>
-          <p:nvPr/>
-        </p:nvSpPr>
-        <p:spPr>
-          <a:xfrm>
-            <a:off x="274320" y="282943"/>
-            <a:ext cx="6792986" cy="617220"/>
-          </a:xfrm>
-          <a:prstGeom prst="rect">
-            <a:avLst/>
-          </a:prstGeom>
-          <a:noFill/>
-        </p:spPr>
-        <p:txBody>
-          <a:bodyPr wrap="square" lIns="76200" rIns="76200" tIns="50800" bIns="50800">
-            <a:spAutoFit/>
-          </a:bodyPr>
-          <a:lstStyle/>
-          <a:p>
-            <a:pPr algn="l">
-              <a:spcAft>
-                <a:spcPts val="300"/>
-              </a:spcAft>
-              <a:defRPr sz="2438">
-                <a:solidFill>
-                  <a:srgbClr val="000000"/>
-                </a:solidFill>
-                <a:latin typeface="Play"/>
-                <a:ea typeface="Play"/>
-                <a:cs typeface="Play"/>
-              </a:defRPr>
-            </a:pPr>
-            <a:r>
-              <a:rPr sz="2438">
-                <a:solidFill>
-                  <a:srgbClr val="000000"/>
-                </a:solidFill>
-                <a:latin typeface="Play"/>
-                <a:ea typeface="Play"/>
-                <a:cs typeface="Play"/>
-              </a:rPr>
-              <a:t>Пилот: 68 колод, 4 мин сборки</a:t>
-            </a:r>
-          </a:p>
-        </p:txBody>
-      </p:sp>
-      <p:sp>
-        <p:nvSpPr>
-          <p:cNvPr id="1051" name="card_0"/>
-          <p:cNvSpPr txBox="1"/>
-          <p:nvPr/>
-        </p:nvSpPr>
-        <p:spPr>
-          <a:xfrm>
-            <a:off x="576030" y="1728705"/>
-            <a:ext cx="2264138" cy="632134"/>
-          </a:xfrm>
-          <a:prstGeom prst="rect">
-            <a:avLst/>
-          </a:prstGeom>
-          <a:noFill/>
-        </p:spPr>
-        <p:txBody>
-          <a:bodyPr wrap="square" lIns="76200" rIns="76200" tIns="50800" bIns="50800">
-            <a:spAutoFit/>
-          </a:bodyPr>
-          <a:lstStyle/>
-          <a:p>
-            <a:pPr algn="l">
-              <a:spcAft>
-                <a:spcPts val="300"/>
-              </a:spcAft>
-              <a:defRPr sz="1600" b="0">
-                <a:solidFill>
-                  <a:srgbClr val="000000"/>
-                </a:solidFill>
-                <a:latin typeface="Play"/>
-                <a:ea typeface="Play"/>
-                <a:cs typeface="Play"/>
-              </a:defRPr>
-            </a:pPr>
-            <a:r>
-              <a:rPr sz="1600" b="0">
-                <a:solidFill>
-                  <a:srgbClr val="000000"/>
-                </a:solidFill>
-                <a:latin typeface="Play"/>
-                <a:ea typeface="Play"/>
-                <a:cs typeface="Play"/>
-              </a:rPr>
-              <a:t>68 колод собраны за 6 недель</a:t>
-            </a:r>
-          </a:p>
-        </p:txBody>
-      </p:sp>
-      <p:sp>
-        <p:nvSpPr>
-          <p:cNvPr id="1052" name="card_1"/>
-          <p:cNvSpPr txBox="1"/>
-          <p:nvPr/>
-        </p:nvSpPr>
-        <p:spPr>
-          <a:xfrm>
-            <a:off x="3465259" y="1728705"/>
-            <a:ext cx="2264138" cy="632134"/>
-          </a:xfrm>
-          <a:prstGeom prst="rect">
-            <a:avLst/>
-          </a:prstGeom>
-          <a:noFill/>
-        </p:spPr>
-        <p:txBody>
-          <a:bodyPr wrap="square" lIns="76200" rIns="76200" tIns="50800" bIns="50800">
-            <a:spAutoFit/>
-          </a:bodyPr>
-          <a:lstStyle/>
-          <a:p>
-            <a:pPr algn="l">
-              <a:spcAft>
-                <a:spcPts val="300"/>
-              </a:spcAft>
-              <a:defRPr sz="1600" b="0">
-                <a:solidFill>
-                  <a:srgbClr val="000000"/>
-                </a:solidFill>
-                <a:latin typeface="Play"/>
-                <a:ea typeface="Play"/>
-                <a:cs typeface="Play"/>
-              </a:defRPr>
-            </a:pPr>
-            <a:r>
-              <a:rPr sz="1600" b="0">
-                <a:solidFill>
-                  <a:srgbClr val="000000"/>
-                </a:solidFill>
-                <a:latin typeface="Play"/>
-                <a:ea typeface="Play"/>
-                <a:cs typeface="Play"/>
-              </a:rPr>
-              <a:t>Среднее время сборки 4 мин вместо 186</a:t>
-            </a:r>
-          </a:p>
-        </p:txBody>
-      </p:sp>
-      <p:sp>
-        <p:nvSpPr>
-          <p:cNvPr id="1053" name="card_2"/>
-          <p:cNvSpPr txBox="1"/>
-          <p:nvPr/>
-        </p:nvSpPr>
-        <p:spPr>
-          <a:xfrm>
-            <a:off x="6354489" y="1728705"/>
-            <a:ext cx="2264138" cy="632134"/>
-          </a:xfrm>
-          <a:prstGeom prst="rect">
-            <a:avLst/>
-          </a:prstGeom>
-          <a:noFill/>
-        </p:spPr>
-        <p:txBody>
-          <a:bodyPr wrap="square" lIns="76200" rIns="76200" tIns="50800" bIns="50800">
-            <a:spAutoFit/>
-          </a:bodyPr>
-          <a:lstStyle/>
-          <a:p>
-            <a:pPr algn="l">
-              <a:spcAft>
-                <a:spcPts val="300"/>
-              </a:spcAft>
-              <a:defRPr sz="1200" b="0">
-                <a:solidFill>
-                  <a:srgbClr val="000000"/>
-                </a:solidFill>
-                <a:latin typeface="Play"/>
-                <a:ea typeface="Play"/>
-                <a:cs typeface="Play"/>
-              </a:defRPr>
-            </a:pPr>
-            <a:r>
-              <a:rPr sz="1200" b="0">
-                <a:solidFill>
-                  <a:srgbClr val="000000"/>
-                </a:solidFill>
-                <a:latin typeface="Play"/>
-                <a:ea typeface="Play"/>
-                <a:cs typeface="Play"/>
-              </a:rPr>
-              <a:t>Время до первой версии сократилось с 6 дней до 1</a:t>
-            </a:r>
-          </a:p>
-        </p:txBody>
-      </p:sp>
-    </p:spTree>
-  </p:cSld>
-  <p:clrMapOvr>
-    <a:masterClrMapping/>
-  </p:clrMapOvr>
-</p:sld>
-</file>
-
-<file path=ppt/slides/slide59.xml><?xml version="1.0" encoding="utf-8"?>
-<p:sld xmlns:a="http://schemas.openxmlformats.org/drawingml/2006/main" xmlns:p="http://schemas.openxmlformats.org/presentationml/2006/main" xmlns:r="http://schemas.openxmlformats.org/officeDocument/2006/relationships">
-  <p:cSld>
-    <p:spTree>
-      <p:nvGrpSpPr>
-        <p:cNvPr id="1" name=""/>
-        <p:cNvGrpSpPr/>
-        <p:nvPr/>
-      </p:nvGrpSpPr>
-      <p:grpSpPr/>
-      <p:pic>
-        <p:nvPicPr>
-          <p:cNvPr descr=" " id="2249" name="Google Shape;2249;p83"/>
-          <p:cNvPicPr preferRelativeResize="0"/>
-          <p:nvPr/>
-        </p:nvPicPr>
-        <p:blipFill rotWithShape="1">
-          <a:blip r:embed="rId2">
-            <a:alphaModFix/>
-          </a:blip>
-          <a:srcRect b="0" l="0" r="0" t="0"/>
-          <a:stretch/>
-        </p:blipFill>
-        <p:spPr>
-          <a:xfrm>
-            <a:off x="285748" y="3576507"/>
-            <a:ext cx="2381238" cy="28571"/>
-          </a:xfrm>
-          <a:prstGeom prst="rect">
-            <a:avLst/>
-          </a:prstGeom>
-          <a:noFill/>
-          <a:ln>
-            <a:noFill/>
-          </a:ln>
-        </p:spPr>
-      </p:pic>
-      <p:pic>
-        <p:nvPicPr>
-          <p:cNvPr descr=" " id="2250" name="Google Shape;2250;p83"/>
-          <p:cNvPicPr preferRelativeResize="0"/>
-          <p:nvPr/>
-        </p:nvPicPr>
-        <p:blipFill rotWithShape="1">
-          <a:blip r:embed="rId3">
-            <a:alphaModFix/>
-          </a:blip>
-          <a:srcRect b="0" l="0" r="0" t="0"/>
-          <a:stretch/>
-        </p:blipFill>
-        <p:spPr>
-          <a:xfrm>
-            <a:off x="3143234" y="3576507"/>
-            <a:ext cx="3762355" cy="28571"/>
-          </a:xfrm>
-          <a:prstGeom prst="rect">
-            <a:avLst/>
-          </a:prstGeom>
-          <a:noFill/>
-          <a:ln>
-            <a:noFill/>
-          </a:ln>
-        </p:spPr>
-      </p:pic>
-      <p:sp>
-        <p:nvSpPr>
-          <p:cNvPr id="2251" name="title"/>
-          <p:cNvSpPr txBox="1"/>
-          <p:nvPr/>
-        </p:nvSpPr>
-        <p:spPr>
-          <a:xfrm>
-            <a:off x="274320" y="282943"/>
-            <a:ext cx="6792986" cy="617220"/>
-          </a:xfrm>
-          <a:prstGeom prst="rect">
-            <a:avLst/>
-          </a:prstGeom>
-          <a:noFill/>
-        </p:spPr>
-        <p:txBody>
-          <a:bodyPr wrap="square" lIns="76200" rIns="76200" tIns="50800" bIns="50800">
-            <a:spAutoFit/>
-          </a:bodyPr>
-          <a:lstStyle/>
-          <a:p>
-            <a:pPr algn="l">
-              <a:spcAft>
-                <a:spcPts val="300"/>
-              </a:spcAft>
-              <a:defRPr sz="2438">
-                <a:solidFill>
-                  <a:srgbClr val="000000"/>
-                </a:solidFill>
-                <a:latin typeface="Play"/>
-                <a:ea typeface="Play"/>
-                <a:cs typeface="Play"/>
-              </a:defRPr>
-            </a:pPr>
-            <a:r>
-              <a:rPr sz="2438">
-                <a:solidFill>
-                  <a:srgbClr val="000000"/>
-                </a:solidFill>
-                <a:latin typeface="Play"/>
-                <a:ea typeface="Play"/>
-                <a:cs typeface="Play"/>
-              </a:rPr>
-              <a:t>Время сборки</a:t>
-            </a:r>
-          </a:p>
-        </p:txBody>
-      </p:sp>
-      <p:graphicFrame>
-        <p:nvGraphicFramePr>
-          <p:cNvPr id="2252" name="Chart 2251"/>
-          <p:cNvGraphicFramePr>
-            <a:graphicFrameLocks noGrp="1"/>
-          </p:cNvGraphicFramePr>
-          <p:nvPr/>
-        </p:nvGraphicFramePr>
-        <p:xfrm>
-          <a:off x="274320" y="1414513"/>
-          <a:ext cx="7189469" cy="2161967"/>
-        </p:xfrm>
-        <a:graphic>
-          <a:graphicData uri="http://schemas.openxmlformats.org/drawingml/2006/chart">
-            <c:chart xmlns:c="http://schemas.openxmlformats.org/drawingml/2006/chart" r:id="rId4"/>
-          </a:graphicData>
-        </a:graphic>
-      </p:graphicFrame>
-    </p:spTree>
-  </p:cSld>
-  <p:clrMapOvr>
-    <a:masterClrMapping/>
-  </p:clrMapOvr>
-</p:sld>
-</file>
-
-<file path=ppt/slides/slide60.xml><?xml version="1.0" encoding="utf-8"?>
-<p:sld xmlns:a="http://schemas.openxmlformats.org/drawingml/2006/main" xmlns:p="http://schemas.openxmlformats.org/presentationml/2006/main" xmlns:r="http://schemas.openxmlformats.org/officeDocument/2006/relationships">
-  <p:cSld>
-    <p:spTree>
-      <p:nvGrpSpPr>
-        <p:cNvPr id="1" name=""/>
-        <p:cNvGrpSpPr/>
-        <p:nvPr/>
-      </p:nvGrpSpPr>
-      <p:grpSpPr/>
-      <p:pic>
-        <p:nvPicPr>
-          <p:cNvPr descr=" " id="2385" name="Google Shape;2385;p88"/>
-          <p:cNvPicPr preferRelativeResize="0"/>
-          <p:nvPr/>
-        </p:nvPicPr>
-        <p:blipFill rotWithShape="1">
-          <a:blip r:embed="rId2">
-            <a:alphaModFix/>
-          </a:blip>
-          <a:srcRect b="0" l="0" r="0" t="0"/>
-          <a:stretch/>
-        </p:blipFill>
-        <p:spPr>
-          <a:xfrm>
-            <a:off x="388142" y="2000324"/>
-            <a:ext cx="8755811" cy="9524"/>
-          </a:xfrm>
-          <a:prstGeom prst="rect">
-            <a:avLst/>
-          </a:prstGeom>
-          <a:noFill/>
-          <a:ln>
-            <a:noFill/>
-          </a:ln>
-        </p:spPr>
-      </p:pic>
-      <p:sp>
-        <p:nvSpPr>
-          <p:cNvPr id="2386" name="Google Shape;2386;p88"/>
-          <p:cNvSpPr/>
-          <p:nvPr/>
-        </p:nvSpPr>
-        <p:spPr>
-          <a:xfrm>
-            <a:off x="319086" y="1286042"/>
-            <a:ext cx="1690679" cy="1128566"/>
-          </a:xfrm>
-          <a:prstGeom prst="rect">
-            <a:avLst/>
-          </a:prstGeom>
-          <a:noFill/>
-          <a:ln>
-            <a:noFill/>
-          </a:ln>
-        </p:spPr>
-        <p:txBody>
-          <a:bodyPr anchorCtr="0" anchor="ctr" bIns="91425" lIns="91425" spcFirstLastPara="1" rIns="91425" wrap="square" tIns="91425">
-            <a:noAutofit/>
-          </a:bodyPr>
-          <a:lstStyle/>
-          <a:p>
-            <a:pPr indent="0" lvl="0" marL="0" rtl="0" algn="l">
-              <a:spcBef>
-                <a:spcPts val="0"/>
-              </a:spcBef>
-              <a:spcAft>
-                <a:spcPts val="0"/>
-              </a:spcAft>
-              <a:buNone/>
-            </a:pPr>
-            <a:r>
-              <a:t/>
-            </a:r>
-            <a:endParaRPr/>
-          </a:p>
-        </p:txBody>
-      </p:sp>
-      <p:sp>
-        <p:nvSpPr>
-          <p:cNvPr id="2388" name="Google Shape;2388;p88"/>
-          <p:cNvSpPr/>
-          <p:nvPr/>
-        </p:nvSpPr>
-        <p:spPr>
-          <a:xfrm>
-            <a:off x="2600312" y="1286042"/>
-            <a:ext cx="1690679" cy="1128566"/>
-          </a:xfrm>
-          <a:prstGeom prst="rect">
-            <a:avLst/>
-          </a:prstGeom>
-          <a:noFill/>
-          <a:ln>
-            <a:noFill/>
-          </a:ln>
-        </p:spPr>
-        <p:txBody>
-          <a:bodyPr anchorCtr="0" anchor="ctr" bIns="91425" lIns="91425" spcFirstLastPara="1" rIns="91425" wrap="square" tIns="91425">
-            <a:noAutofit/>
-          </a:bodyPr>
-          <a:lstStyle/>
-          <a:p>
-            <a:pPr indent="0" lvl="0" marL="0" rtl="0" algn="l">
-              <a:spcBef>
-                <a:spcPts val="0"/>
-              </a:spcBef>
-              <a:spcAft>
-                <a:spcPts val="0"/>
-              </a:spcAft>
-              <a:buNone/>
-            </a:pPr>
-            <a:r>
-              <a:t/>
-            </a:r>
-            <a:endParaRPr/>
-          </a:p>
-        </p:txBody>
-      </p:sp>
-      <p:sp>
-        <p:nvSpPr>
-          <p:cNvPr id="2390" name="Google Shape;2390;p88"/>
-          <p:cNvSpPr/>
-          <p:nvPr/>
-        </p:nvSpPr>
-        <p:spPr>
-          <a:xfrm>
-            <a:off x="4881537" y="1286042"/>
-            <a:ext cx="1690679" cy="1128566"/>
-          </a:xfrm>
-          <a:prstGeom prst="rect">
-            <a:avLst/>
-          </a:prstGeom>
-          <a:noFill/>
-          <a:ln>
-            <a:noFill/>
-          </a:ln>
-        </p:spPr>
-        <p:txBody>
-          <a:bodyPr anchorCtr="0" anchor="ctr" bIns="91425" lIns="91425" spcFirstLastPara="1" rIns="91425" wrap="square" tIns="91425">
-            <a:noAutofit/>
-          </a:bodyPr>
-          <a:lstStyle/>
-          <a:p>
-            <a:pPr indent="0" lvl="0" marL="0" rtl="0" algn="l">
-              <a:spcBef>
-                <a:spcPts val="0"/>
-              </a:spcBef>
-              <a:spcAft>
-                <a:spcPts val="0"/>
-              </a:spcAft>
-              <a:buNone/>
-            </a:pPr>
-            <a:r>
-              <a:t/>
-            </a:r>
-            <a:endParaRPr/>
-          </a:p>
-        </p:txBody>
-      </p:sp>
-      <p:sp>
-        <p:nvSpPr>
-          <p:cNvPr id="2392" name="Google Shape;2392;p88"/>
-          <p:cNvSpPr/>
-          <p:nvPr/>
-        </p:nvSpPr>
-        <p:spPr>
-          <a:xfrm>
-            <a:off x="7162763" y="1286042"/>
-            <a:ext cx="1690679" cy="1128566"/>
-          </a:xfrm>
-          <a:prstGeom prst="rect">
-            <a:avLst/>
-          </a:prstGeom>
-          <a:noFill/>
-          <a:ln>
-            <a:noFill/>
-          </a:ln>
-        </p:spPr>
-        <p:txBody>
-          <a:bodyPr anchorCtr="0" anchor="ctr" bIns="91425" lIns="91425" spcFirstLastPara="1" rIns="91425" wrap="square" tIns="91425">
-            <a:noAutofit/>
-          </a:bodyPr>
-          <a:lstStyle/>
-          <a:p>
-            <a:pPr indent="0" lvl="0" marL="0" rtl="0" algn="l">
-              <a:spcBef>
-                <a:spcPts val="0"/>
-              </a:spcBef>
-              <a:spcAft>
-                <a:spcPts val="0"/>
-              </a:spcAft>
-              <a:buNone/>
-            </a:pPr>
-            <a:r>
-              <a:t/>
-            </a:r>
-            <a:endParaRPr/>
-          </a:p>
-        </p:txBody>
-      </p:sp>
-      <p:sp>
-        <p:nvSpPr>
-          <p:cNvPr id="2393" name="title"/>
-          <p:cNvSpPr txBox="1"/>
-          <p:nvPr/>
-        </p:nvSpPr>
-        <p:spPr>
-          <a:xfrm>
-            <a:off x="274320" y="282943"/>
-            <a:ext cx="6792986" cy="617220"/>
-          </a:xfrm>
-          <a:prstGeom prst="rect">
-            <a:avLst/>
-          </a:prstGeom>
-          <a:noFill/>
-        </p:spPr>
-        <p:txBody>
-          <a:bodyPr wrap="square" lIns="76200" rIns="76200" tIns="50800" bIns="50800">
-            <a:spAutoFit/>
-          </a:bodyPr>
-          <a:lstStyle/>
-          <a:p>
-            <a:pPr algn="l">
-              <a:spcAft>
-                <a:spcPts val="300"/>
-              </a:spcAft>
-              <a:defRPr sz="2438">
-                <a:solidFill>
-                  <a:srgbClr val="000000"/>
-                </a:solidFill>
-                <a:latin typeface="Play"/>
-                <a:ea typeface="Play"/>
-                <a:cs typeface="Play"/>
-              </a:defRPr>
-            </a:pPr>
-            <a:r>
-              <a:rPr sz="2438">
-                <a:solidFill>
-                  <a:srgbClr val="000000"/>
-                </a:solidFill>
-                <a:latin typeface="Play"/>
-                <a:ea typeface="Play"/>
-                <a:cs typeface="Play"/>
-              </a:rPr>
-              <a:t>Нарушения фирменного стиля</a:t>
-            </a:r>
-          </a:p>
-        </p:txBody>
-      </p:sp>
-      <p:graphicFrame>
-        <p:nvGraphicFramePr>
-          <p:cNvPr id="2394" name="Chart 2393"/>
-          <p:cNvGraphicFramePr>
-            <a:graphicFrameLocks noGrp="1"/>
-          </p:cNvGraphicFramePr>
-          <p:nvPr/>
-        </p:nvGraphicFramePr>
-        <p:xfrm>
-          <a:off x="274320" y="2009822"/>
-          <a:ext cx="8344814" cy="2160270"/>
-        </p:xfrm>
-        <a:graphic>
-          <a:graphicData uri="http://schemas.openxmlformats.org/drawingml/2006/chart">
-            <c:chart xmlns:c="http://schemas.openxmlformats.org/drawingml/2006/chart" r:id="rId4"/>
-          </a:graphicData>
-        </a:graphic>
-      </p:graphicFrame>
-    </p:spTree>
-  </p:cSld>
-  <p:clrMapOvr>
-    <a:masterClrMapping/>
-  </p:clrMapOvr>
-</p:sld>
-</file>
-
-<file path=ppt/slides/slide61.xml><?xml version="1.0" encoding="utf-8"?>
-<p:sld xmlns:a="http://schemas.openxmlformats.org/drawingml/2006/main" xmlns:p="http://schemas.openxmlformats.org/presentationml/2006/main" xmlns:r="http://schemas.openxmlformats.org/officeDocument/2006/relationships">
-  <p:cSld>
-    <p:spTree>
-      <p:nvGrpSpPr>
-        <p:cNvPr id="1" name=""/>
-        <p:cNvGrpSpPr/>
-        <p:nvPr/>
-      </p:nvGrpSpPr>
-      <p:grpSpPr/>
-      <p:pic>
-        <p:nvPicPr>
-          <p:cNvPr descr=" " id="2428" name="Google Shape;2428;p89"/>
-          <p:cNvPicPr preferRelativeResize="0"/>
-          <p:nvPr/>
-        </p:nvPicPr>
-        <p:blipFill rotWithShape="1">
-          <a:blip r:embed="rId2">
-            <a:alphaModFix/>
-          </a:blip>
-          <a:srcRect b="0" l="0" r="0" t="0"/>
-          <a:stretch/>
-        </p:blipFill>
-        <p:spPr>
-          <a:xfrm>
-            <a:off x="0" y="2732082"/>
-            <a:ext cx="8515008" cy="92615"/>
-          </a:xfrm>
-          <a:prstGeom prst="rect">
-            <a:avLst/>
-          </a:prstGeom>
-          <a:noFill/>
-          <a:ln>
-            <a:noFill/>
-          </a:ln>
-        </p:spPr>
-      </p:pic>
-      <p:sp>
-        <p:nvSpPr>
-          <p:cNvPr id="2429" name="Google Shape;2429;p89"/>
-          <p:cNvSpPr/>
-          <p:nvPr/>
-        </p:nvSpPr>
-        <p:spPr>
-          <a:xfrm>
-            <a:off x="553415" y="1828897"/>
-            <a:ext cx="2232516" cy="1490254"/>
-          </a:xfrm>
-          <a:prstGeom prst="rect">
-            <a:avLst/>
-          </a:prstGeom>
-          <a:noFill/>
-          <a:ln>
-            <a:noFill/>
-          </a:ln>
-        </p:spPr>
-        <p:txBody>
-          <a:bodyPr anchorCtr="0" anchor="ctr" bIns="91425" lIns="91425" spcFirstLastPara="1" rIns="91425" wrap="square" tIns="91425">
-            <a:noAutofit/>
-          </a:bodyPr>
-          <a:lstStyle/>
-          <a:p>
-            <a:pPr indent="0" lvl="0" marL="0" rtl="0" algn="l">
-              <a:spcBef>
-                <a:spcPts val="0"/>
-              </a:spcBef>
-              <a:spcAft>
-                <a:spcPts val="0"/>
-              </a:spcAft>
-              <a:buNone/>
-            </a:pPr>
-            <a:r>
-              <a:t/>
-            </a:r>
-            <a:endParaRPr/>
-          </a:p>
-        </p:txBody>
-      </p:sp>
-      <p:sp>
-        <p:nvSpPr>
-          <p:cNvPr id="2431" name="Google Shape;2431;p89"/>
-          <p:cNvSpPr/>
-          <p:nvPr/>
-        </p:nvSpPr>
-        <p:spPr>
-          <a:xfrm>
-            <a:off x="3565736" y="1828897"/>
-            <a:ext cx="2232516" cy="1490254"/>
-          </a:xfrm>
-          <a:prstGeom prst="rect">
-            <a:avLst/>
-          </a:prstGeom>
-          <a:noFill/>
-          <a:ln>
-            <a:noFill/>
-          </a:ln>
-        </p:spPr>
-        <p:txBody>
-          <a:bodyPr anchorCtr="0" anchor="ctr" bIns="91425" lIns="91425" spcFirstLastPara="1" rIns="91425" wrap="square" tIns="91425">
-            <a:noAutofit/>
-          </a:bodyPr>
-          <a:lstStyle/>
-          <a:p>
-            <a:pPr indent="0" lvl="0" marL="0" rtl="0" algn="l">
-              <a:spcBef>
-                <a:spcPts val="0"/>
-              </a:spcBef>
-              <a:spcAft>
-                <a:spcPts val="0"/>
-              </a:spcAft>
-              <a:buNone/>
-            </a:pPr>
-            <a:r>
-              <a:t/>
-            </a:r>
-            <a:endParaRPr/>
-          </a:p>
-        </p:txBody>
-      </p:sp>
-      <p:sp>
-        <p:nvSpPr>
-          <p:cNvPr id="2433" name="Google Shape;2433;p89"/>
-          <p:cNvSpPr/>
-          <p:nvPr/>
-        </p:nvSpPr>
-        <p:spPr>
-          <a:xfrm>
-            <a:off x="6578067" y="1828897"/>
-            <a:ext cx="2232516" cy="1490254"/>
-          </a:xfrm>
-          <a:prstGeom prst="rect">
-            <a:avLst/>
-          </a:prstGeom>
-          <a:noFill/>
-          <a:ln>
-            <a:noFill/>
-          </a:ln>
-        </p:spPr>
-        <p:txBody>
-          <a:bodyPr anchorCtr="0" anchor="ctr" bIns="91425" lIns="91425" spcFirstLastPara="1" rIns="91425" wrap="square" tIns="91425">
-            <a:noAutofit/>
-          </a:bodyPr>
-          <a:lstStyle/>
-          <a:p>
-            <a:pPr indent="0" lvl="0" marL="0" rtl="0" algn="l">
-              <a:spcBef>
-                <a:spcPts val="0"/>
-              </a:spcBef>
-              <a:spcAft>
-                <a:spcPts val="0"/>
-              </a:spcAft>
-              <a:buNone/>
-            </a:pPr>
-            <a:r>
-              <a:t/>
-            </a:r>
-            <a:endParaRPr/>
-          </a:p>
-        </p:txBody>
-      </p:sp>
-      <p:sp>
-        <p:nvSpPr>
-          <p:cNvPr id="2434" name="title"/>
-          <p:cNvSpPr txBox="1"/>
-          <p:nvPr/>
-        </p:nvSpPr>
-        <p:spPr>
-          <a:xfrm>
-            <a:off x="274320" y="282943"/>
-            <a:ext cx="6792986" cy="617220"/>
-          </a:xfrm>
-          <a:prstGeom prst="rect">
-            <a:avLst/>
-          </a:prstGeom>
-          <a:noFill/>
-        </p:spPr>
-        <p:txBody>
-          <a:bodyPr wrap="square" lIns="76200" rIns="76200" tIns="50800" bIns="50800">
-            <a:spAutoFit/>
-          </a:bodyPr>
-          <a:lstStyle/>
-          <a:p>
-            <a:pPr algn="l">
-              <a:spcAft>
-                <a:spcPts val="300"/>
-              </a:spcAft>
-              <a:defRPr sz="2438">
-                <a:solidFill>
-                  <a:srgbClr val="000000"/>
-                </a:solidFill>
-                <a:latin typeface="Play"/>
-                <a:ea typeface="Play"/>
-                <a:cs typeface="Play"/>
-              </a:defRPr>
-            </a:pPr>
-            <a:r>
-              <a:rPr sz="2438">
-                <a:solidFill>
-                  <a:srgbClr val="000000"/>
-                </a:solidFill>
-                <a:latin typeface="Play"/>
-                <a:ea typeface="Play"/>
-                <a:cs typeface="Play"/>
-              </a:rPr>
-              <a:t>Пилот: 6 недель, 2 команды</a:t>
-            </a:r>
-          </a:p>
-        </p:txBody>
-      </p:sp>
-      <p:sp>
-        <p:nvSpPr>
-          <p:cNvPr id="2435" name="body"/>
-          <p:cNvSpPr txBox="1"/>
-          <p:nvPr/>
-        </p:nvSpPr>
-        <p:spPr>
-          <a:xfrm>
-            <a:off x="274320" y="1414513"/>
-            <a:ext cx="8344814" cy="900430"/>
-          </a:xfrm>
-          <a:prstGeom prst="rect">
-            <a:avLst/>
-          </a:prstGeom>
-          <a:noFill/>
-        </p:spPr>
-        <p:txBody>
-          <a:bodyPr wrap="square" lIns="76200" rIns="76200" tIns="50800" bIns="50800">
-            <a:spAutoFit/>
-          </a:bodyPr>
-          <a:lstStyle/>
-          <a:p>
-            <a:pPr algn="l">
-              <a:spcAft>
-                <a:spcPts val="300"/>
-              </a:spcAft>
-              <a:defRPr sz="1200">
-                <a:solidFill>
-                  <a:srgbClr val="000000"/>
-                </a:solidFill>
-                <a:latin typeface="Play"/>
-                <a:ea typeface="Play"/>
-                <a:cs typeface="Play"/>
-              </a:defRPr>
-            </a:pPr>
-            <a:r>
-              <a:rPr sz="1200">
-                <a:solidFill>
-                  <a:srgbClr val="000000"/>
-                </a:solidFill>
-                <a:latin typeface="Play"/>
-                <a:ea typeface="Play"/>
-                <a:cs typeface="Play"/>
-              </a:rPr>
-              <a:t>• 2 недели подготовки и обучения команд</a:t>
-            </a:r>
-          </a:p>
-          <a:p>
-            <a:pPr algn="l">
-              <a:spcAft>
-                <a:spcPts val="300"/>
-              </a:spcAft>
-              <a:defRPr sz="1200">
-                <a:solidFill>
-                  <a:srgbClr val="000000"/>
-                </a:solidFill>
-                <a:latin typeface="Play"/>
-                <a:ea typeface="Play"/>
-                <a:cs typeface="Play"/>
-              </a:defRPr>
-            </a:pPr>
-            <a:r>
-              <a:rPr sz="1200">
-                <a:solidFill>
-                  <a:srgbClr val="000000"/>
-                </a:solidFill>
-                <a:latin typeface="Play"/>
-                <a:ea typeface="Play"/>
-                <a:cs typeface="Play"/>
-              </a:rPr>
-              <a:t>• Запуск пилота на 2 командах</a:t>
-            </a:r>
-          </a:p>
-          <a:p>
-            <a:pPr algn="l">
-              <a:spcAft>
-                <a:spcPts val="300"/>
-              </a:spcAft>
-              <a:defRPr sz="1200">
-                <a:solidFill>
-                  <a:srgbClr val="000000"/>
-                </a:solidFill>
-                <a:latin typeface="Play"/>
-                <a:ea typeface="Play"/>
-                <a:cs typeface="Play"/>
-              </a:defRPr>
-            </a:pPr>
-            <a:r>
-              <a:rPr sz="1200">
-                <a:solidFill>
-                  <a:srgbClr val="000000"/>
-                </a:solidFill>
-                <a:latin typeface="Play"/>
-                <a:ea typeface="Play"/>
-                <a:cs typeface="Play"/>
-              </a:rPr>
-              <a:t>• Аудит качества проверяет все числа</a:t>
-            </a:r>
-          </a:p>
-          <a:p>
-            <a:pPr algn="l">
-              <a:spcAft>
-                <a:spcPts val="300"/>
-              </a:spcAft>
-              <a:defRPr sz="1200">
-                <a:solidFill>
-                  <a:srgbClr val="000000"/>
-                </a:solidFill>
-                <a:latin typeface="Play"/>
-                <a:ea typeface="Play"/>
-                <a:cs typeface="Play"/>
-              </a:defRPr>
-            </a:pPr>
-            <a:r>
-              <a:rPr sz="1200">
-                <a:solidFill>
-                  <a:srgbClr val="000000"/>
-                </a:solidFill>
-                <a:latin typeface="Play"/>
-                <a:ea typeface="Play"/>
-                <a:cs typeface="Play"/>
-              </a:rPr>
-              <a:t>• Экспорт готовых колод в pptx, pdf, html</a:t>
-            </a:r>
-          </a:p>
-        </p:txBody>
-      </p:sp>
-      <p:sp>
-        <p:nvSpPr>
-          <p:cNvPr id="2436" name="Pentagon 2435"/>
-          <p:cNvSpPr/>
-          <p:nvPr/>
-        </p:nvSpPr>
-        <p:spPr>
-          <a:xfrm>
-            <a:off x="274320" y="2070125"/>
-            <a:ext cx="2011100" cy="661947"/>
-          </a:xfrm>
-          <a:prstGeom prst="homePlate">
-            <a:avLst/>
-          </a:prstGeom>
-          <a:solidFill>
-            <a:srgbClr val="0077FF"/>
-          </a:solidFill>
-          <a:ln>
-            <a:noFill/>
-          </a:ln>
-        </p:spPr>
-        <p:style>
-          <a:lnRef idx="1">
-            <a:schemeClr val="accent1"/>
-          </a:lnRef>
-          <a:fillRef idx="3">
-            <a:schemeClr val="accent1"/>
-          </a:fillRef>
-          <a:effectRef idx="2">
-            <a:schemeClr val="accent1"/>
-          </a:effectRef>
-          <a:fontRef idx="minor">
-            <a:schemeClr val="lt1"/>
-          </a:fontRef>
-        </p:style>
-        <p:txBody>
-          <a:bodyPr rtlCol="0" anchor="ctr" wrap="square" lIns="12700" rIns="12700" tIns="12700" bIns="12700"/>
-          <a:lstStyle/>
-          <a:p>
-            <a:pPr algn="ctr">
-              <a:defRPr sz="1336" b="0">
-                <a:solidFill>
-                  <a:srgbClr val="FFFFFF"/>
-                </a:solidFill>
-                <a:latin typeface="Play"/>
-                <a:ea typeface="Play"/>
-                <a:cs typeface="Play"/>
-              </a:defRPr>
-            </a:pPr>
-            <a:r>
-              <a:rPr sz="1336" b="0">
-                <a:solidFill>
-                  <a:srgbClr val="FFFFFF"/>
-                </a:solidFill>
-                <a:latin typeface="Play"/>
-                <a:ea typeface="Play"/>
-                <a:cs typeface="Play"/>
-              </a:rPr>
-              <a:t>Подготовка</a:t>
-            </a:r>
-          </a:p>
-        </p:txBody>
-      </p:sp>
-      <p:sp>
-        <p:nvSpPr>
-          <p:cNvPr id="2437" name="Chevron 2436"/>
-          <p:cNvSpPr/>
-          <p:nvPr/>
-        </p:nvSpPr>
-        <p:spPr>
-          <a:xfrm>
-            <a:off x="2385557" y="2070125"/>
-            <a:ext cx="2011100" cy="661947"/>
-          </a:xfrm>
-          <a:prstGeom prst="chevron">
-            <a:avLst/>
-          </a:prstGeom>
-          <a:solidFill>
-            <a:srgbClr val="0077FF"/>
-          </a:solidFill>
-          <a:ln>
-            <a:noFill/>
-          </a:ln>
-        </p:spPr>
-        <p:style>
-          <a:lnRef idx="1">
-            <a:schemeClr val="accent1"/>
-          </a:lnRef>
-          <a:fillRef idx="3">
-            <a:schemeClr val="accent1"/>
-          </a:fillRef>
-          <a:effectRef idx="2">
-            <a:schemeClr val="accent1"/>
-          </a:effectRef>
-          <a:fontRef idx="minor">
-            <a:schemeClr val="lt1"/>
-          </a:fontRef>
-        </p:style>
-        <p:txBody>
-          <a:bodyPr rtlCol="0" anchor="ctr" wrap="square" lIns="12700" rIns="12700" tIns="12700" bIns="12700"/>
-          <a:lstStyle/>
-          <a:p>
-            <a:pPr algn="ctr">
-              <a:defRPr sz="1336" b="0">
-                <a:solidFill>
-                  <a:srgbClr val="FFFFFF"/>
-                </a:solidFill>
-                <a:latin typeface="Play"/>
-                <a:ea typeface="Play"/>
-                <a:cs typeface="Play"/>
-              </a:defRPr>
-            </a:pPr>
-            <a:r>
-              <a:rPr sz="1336" b="0">
-                <a:solidFill>
-                  <a:srgbClr val="FFFFFF"/>
-                </a:solidFill>
-                <a:latin typeface="Play"/>
-                <a:ea typeface="Play"/>
-                <a:cs typeface="Play"/>
-              </a:rPr>
-              <a:t>Запуск</a:t>
-            </a:r>
-          </a:p>
-        </p:txBody>
-      </p:sp>
-      <p:sp>
-        <p:nvSpPr>
-          <p:cNvPr id="2438" name="Chevron 2437"/>
-          <p:cNvSpPr/>
-          <p:nvPr/>
-        </p:nvSpPr>
-        <p:spPr>
-          <a:xfrm>
-            <a:off x="4496795" y="2070125"/>
-            <a:ext cx="2011100" cy="661947"/>
-          </a:xfrm>
-          <a:prstGeom prst="chevron">
-            <a:avLst/>
-          </a:prstGeom>
-          <a:solidFill>
-            <a:srgbClr val="0077FF"/>
-          </a:solidFill>
-          <a:ln>
-            <a:noFill/>
-          </a:ln>
-        </p:spPr>
-        <p:style>
-          <a:lnRef idx="1">
-            <a:schemeClr val="accent1"/>
-          </a:lnRef>
-          <a:fillRef idx="3">
-            <a:schemeClr val="accent1"/>
-          </a:fillRef>
-          <a:effectRef idx="2">
-            <a:schemeClr val="accent1"/>
-          </a:effectRef>
-          <a:fontRef idx="minor">
-            <a:schemeClr val="lt1"/>
-          </a:fontRef>
-        </p:style>
-        <p:txBody>
-          <a:bodyPr rtlCol="0" anchor="ctr" wrap="square" lIns="12700" rIns="12700" tIns="12700" bIns="12700"/>
-          <a:lstStyle/>
-          <a:p>
-            <a:pPr algn="ctr">
-              <a:defRPr sz="1336" b="0">
-                <a:solidFill>
-                  <a:srgbClr val="FFFFFF"/>
-                </a:solidFill>
-                <a:latin typeface="Play"/>
-                <a:ea typeface="Play"/>
-                <a:cs typeface="Play"/>
-              </a:defRPr>
-            </a:pPr>
-            <a:r>
-              <a:rPr sz="1336" b="0">
-                <a:solidFill>
-                  <a:srgbClr val="FFFFFF"/>
-                </a:solidFill>
-                <a:latin typeface="Play"/>
-                <a:ea typeface="Play"/>
-                <a:cs typeface="Play"/>
-              </a:rPr>
-              <a:t>Аудит</a:t>
-            </a:r>
-          </a:p>
-        </p:txBody>
-      </p:sp>
-      <p:sp>
-        <p:nvSpPr>
-          <p:cNvPr id="2439" name="Chevron 2438"/>
-          <p:cNvSpPr/>
-          <p:nvPr/>
-        </p:nvSpPr>
-        <p:spPr>
-          <a:xfrm>
-            <a:off x="6608033" y="2070125"/>
-            <a:ext cx="2011100" cy="661947"/>
-          </a:xfrm>
-          <a:prstGeom prst="chevron">
-            <a:avLst/>
-          </a:prstGeom>
-          <a:solidFill>
-            <a:srgbClr val="0077FF"/>
-          </a:solidFill>
-          <a:ln>
-            <a:noFill/>
-          </a:ln>
-        </p:spPr>
-        <p:style>
-          <a:lnRef idx="1">
-            <a:schemeClr val="accent1"/>
-          </a:lnRef>
-          <a:fillRef idx="3">
-            <a:schemeClr val="accent1"/>
-          </a:fillRef>
-          <a:effectRef idx="2">
-            <a:schemeClr val="accent1"/>
-          </a:effectRef>
-          <a:fontRef idx="minor">
-            <a:schemeClr val="lt1"/>
-          </a:fontRef>
-        </p:style>
-        <p:txBody>
-          <a:bodyPr rtlCol="0" anchor="ctr" wrap="square" lIns="12700" rIns="12700" tIns="12700" bIns="12700"/>
-          <a:lstStyle/>
-          <a:p>
-            <a:pPr algn="ctr">
-              <a:defRPr sz="1336" b="0">
-                <a:solidFill>
-                  <a:srgbClr val="FFFFFF"/>
-                </a:solidFill>
-                <a:latin typeface="Play"/>
-                <a:ea typeface="Play"/>
-                <a:cs typeface="Play"/>
-              </a:defRPr>
-            </a:pPr>
-            <a:r>
-              <a:rPr sz="1336" b="0">
-                <a:solidFill>
-                  <a:srgbClr val="FFFFFF"/>
-                </a:solidFill>
-                <a:latin typeface="Play"/>
-                <a:ea typeface="Play"/>
-                <a:cs typeface="Play"/>
-              </a:rPr>
-              <a:t>Экспорт</a:t>
-            </a:r>
-          </a:p>
-        </p:txBody>
-      </p:sp>
-    </p:spTree>
-  </p:cSld>
-  <p:clrMapOvr>
-    <a:masterClrMapping/>
-  </p:clrMapOvr>
-</p:sld>
-</file>
-
-<file path=ppt/slides/slide62.xml><?xml version="1.0" encoding="utf-8"?>
-<p:sld xmlns:a="http://schemas.openxmlformats.org/drawingml/2006/main" xmlns:p="http://schemas.openxmlformats.org/presentationml/2006/main" xmlns:r="http://schemas.openxmlformats.org/officeDocument/2006/relationships">
-  <p:cSld>
-    <p:spTree>
-      <p:nvGrpSpPr>
-        <p:cNvPr id="1" name=""/>
-        <p:cNvGrpSpPr/>
-        <p:nvPr/>
-      </p:nvGrpSpPr>
-      <p:grpSpPr/>
-      <p:sp>
-        <p:nvSpPr>
-          <p:cNvPr id="532" name="Google Shape;532;p53"/>
-          <p:cNvSpPr/>
-          <p:nvPr/>
-        </p:nvSpPr>
-        <p:spPr>
-          <a:xfrm>
-            <a:off x="303214" y="1022533"/>
-            <a:ext cx="8451939" cy="1433588"/>
-          </a:xfrm>
-          <a:prstGeom prst="rect">
-            <a:avLst/>
-          </a:prstGeom>
-          <a:noFill/>
-          <a:ln>
-            <a:noFill/>
-          </a:ln>
-        </p:spPr>
-        <p:txBody>
-          <a:bodyPr anchorCtr="0" anchor="ctr" bIns="91425" lIns="91425" spcFirstLastPara="1" rIns="91425" wrap="square" tIns="91425">
-            <a:noAutofit/>
-          </a:bodyPr>
-          <a:lstStyle/>
-          <a:p>
-            <a:pPr indent="0" lvl="0" marL="0" rtl="0" algn="l">
-              <a:spcBef>
-                <a:spcPts val="0"/>
-              </a:spcBef>
-              <a:spcAft>
-                <a:spcPts val="0"/>
-              </a:spcAft>
-              <a:buNone/>
-            </a:pPr>
-            <a:r>
-              <a:t/>
-            </a:r>
-            <a:endParaRPr/>
-          </a:p>
-        </p:txBody>
-      </p:sp>
-      <p:sp>
-        <p:nvSpPr>
-          <p:cNvPr id="533" name="Google Shape;533;p53"/>
-          <p:cNvSpPr/>
-          <p:nvPr/>
-        </p:nvSpPr>
-        <p:spPr>
-          <a:xfrm>
-            <a:off x="303214" y="1022533"/>
-            <a:ext cx="1395256" cy="1433588"/>
-          </a:xfrm>
-          <a:prstGeom prst="rect">
-            <a:avLst/>
-          </a:prstGeom>
-          <a:noFill/>
-          <a:ln>
-            <a:noFill/>
-          </a:ln>
-        </p:spPr>
-        <p:txBody>
-          <a:bodyPr anchorCtr="0" anchor="ctr" bIns="91425" lIns="91425" spcFirstLastPara="1" rIns="91425" wrap="square" tIns="91425">
-            <a:noAutofit/>
-          </a:bodyPr>
-          <a:lstStyle/>
-          <a:p>
-            <a:pPr indent="0" lvl="0" marL="0" rtl="0" algn="l">
-              <a:spcBef>
-                <a:spcPts val="0"/>
-              </a:spcBef>
-              <a:spcAft>
-                <a:spcPts val="0"/>
-              </a:spcAft>
-              <a:buNone/>
-            </a:pPr>
-            <a:r>
-              <a:t/>
-            </a:r>
-            <a:endParaRPr/>
-          </a:p>
-        </p:txBody>
-      </p:sp>
-      <p:sp>
-        <p:nvSpPr>
-          <p:cNvPr id="537" name="Google Shape;537;p53"/>
-          <p:cNvSpPr/>
-          <p:nvPr/>
-        </p:nvSpPr>
-        <p:spPr>
-          <a:xfrm>
-            <a:off x="2067385" y="1022533"/>
-            <a:ext cx="1395256" cy="1433588"/>
-          </a:xfrm>
-          <a:prstGeom prst="rect">
-            <a:avLst/>
-          </a:prstGeom>
-          <a:noFill/>
-          <a:ln>
-            <a:noFill/>
-          </a:ln>
-        </p:spPr>
-        <p:txBody>
-          <a:bodyPr anchorCtr="0" anchor="ctr" bIns="91425" lIns="91425" spcFirstLastPara="1" rIns="91425" wrap="square" tIns="91425">
-            <a:noAutofit/>
-          </a:bodyPr>
-          <a:lstStyle/>
-          <a:p>
-            <a:pPr indent="0" lvl="0" marL="0" rtl="0" algn="l">
-              <a:spcBef>
-                <a:spcPts val="0"/>
-              </a:spcBef>
-              <a:spcAft>
-                <a:spcPts val="0"/>
-              </a:spcAft>
-              <a:buNone/>
-            </a:pPr>
-            <a:r>
-              <a:t/>
-            </a:r>
-            <a:endParaRPr/>
-          </a:p>
-        </p:txBody>
-      </p:sp>
-      <p:sp>
-        <p:nvSpPr>
-          <p:cNvPr id="541" name="Google Shape;541;p53"/>
-          <p:cNvSpPr/>
-          <p:nvPr/>
-        </p:nvSpPr>
-        <p:spPr>
-          <a:xfrm>
-            <a:off x="3831556" y="1022533"/>
-            <a:ext cx="1395256" cy="1433588"/>
-          </a:xfrm>
-          <a:prstGeom prst="rect">
-            <a:avLst/>
-          </a:prstGeom>
-          <a:noFill/>
-          <a:ln>
-            <a:noFill/>
-          </a:ln>
-        </p:spPr>
-        <p:txBody>
-          <a:bodyPr anchorCtr="0" anchor="ctr" bIns="91425" lIns="91425" spcFirstLastPara="1" rIns="91425" wrap="square" tIns="91425">
-            <a:noAutofit/>
-          </a:bodyPr>
-          <a:lstStyle/>
-          <a:p>
-            <a:pPr indent="0" lvl="0" marL="0" rtl="0" algn="l">
-              <a:spcBef>
-                <a:spcPts val="0"/>
-              </a:spcBef>
-              <a:spcAft>
-                <a:spcPts val="0"/>
-              </a:spcAft>
-              <a:buNone/>
-            </a:pPr>
-            <a:r>
-              <a:t/>
-            </a:r>
-            <a:endParaRPr/>
-          </a:p>
-        </p:txBody>
-      </p:sp>
-      <p:sp>
-        <p:nvSpPr>
-          <p:cNvPr id="545" name="Google Shape;545;p53"/>
-          <p:cNvSpPr/>
-          <p:nvPr/>
-        </p:nvSpPr>
-        <p:spPr>
-          <a:xfrm>
-            <a:off x="5595727" y="1022533"/>
-            <a:ext cx="1395256" cy="1433588"/>
-          </a:xfrm>
-          <a:prstGeom prst="rect">
-            <a:avLst/>
-          </a:prstGeom>
-          <a:noFill/>
-          <a:ln>
-            <a:noFill/>
-          </a:ln>
-        </p:spPr>
-        <p:txBody>
-          <a:bodyPr anchorCtr="0" anchor="ctr" bIns="91425" lIns="91425" spcFirstLastPara="1" rIns="91425" wrap="square" tIns="91425">
-            <a:noAutofit/>
-          </a:bodyPr>
-          <a:lstStyle/>
-          <a:p>
-            <a:pPr indent="0" lvl="0" marL="0" rtl="0" algn="l">
-              <a:spcBef>
-                <a:spcPts val="0"/>
-              </a:spcBef>
-              <a:spcAft>
-                <a:spcPts val="0"/>
-              </a:spcAft>
-              <a:buNone/>
-            </a:pPr>
-            <a:r>
-              <a:t/>
-            </a:r>
-            <a:endParaRPr/>
-          </a:p>
-        </p:txBody>
-      </p:sp>
-      <p:sp>
-        <p:nvSpPr>
-          <p:cNvPr id="549" name="Google Shape;549;p53"/>
-          <p:cNvSpPr/>
-          <p:nvPr/>
-        </p:nvSpPr>
-        <p:spPr>
-          <a:xfrm>
-            <a:off x="7359897" y="1022533"/>
-            <a:ext cx="1395256" cy="1433588"/>
-          </a:xfrm>
-          <a:prstGeom prst="rect">
-            <a:avLst/>
-          </a:prstGeom>
-          <a:noFill/>
-          <a:ln>
-            <a:noFill/>
-          </a:ln>
-        </p:spPr>
-        <p:txBody>
-          <a:bodyPr anchorCtr="0" anchor="ctr" bIns="91425" lIns="91425" spcFirstLastPara="1" rIns="91425" wrap="square" tIns="91425">
-            <a:noAutofit/>
-          </a:bodyPr>
-          <a:lstStyle/>
-          <a:p>
-            <a:pPr indent="0" lvl="0" marL="0" rtl="0" algn="l">
-              <a:spcBef>
-                <a:spcPts val="0"/>
-              </a:spcBef>
-              <a:spcAft>
-                <a:spcPts val="0"/>
-              </a:spcAft>
-              <a:buNone/>
-            </a:pPr>
-            <a:r>
-              <a:t/>
-            </a:r>
-            <a:endParaRPr/>
-          </a:p>
-        </p:txBody>
-      </p:sp>
-      <p:sp>
-        <p:nvSpPr>
-          <p:cNvPr id="553" name="Google Shape;553;p53"/>
-          <p:cNvSpPr/>
-          <p:nvPr/>
-        </p:nvSpPr>
-        <p:spPr>
-          <a:xfrm>
-            <a:off x="276488" y="2955549"/>
-            <a:ext cx="8451939" cy="1433588"/>
-          </a:xfrm>
-          <a:prstGeom prst="rect">
-            <a:avLst/>
-          </a:prstGeom>
-          <a:noFill/>
-          <a:ln>
-            <a:noFill/>
-          </a:ln>
-        </p:spPr>
-        <p:txBody>
-          <a:bodyPr anchorCtr="0" anchor="ctr" bIns="91425" lIns="91425" spcFirstLastPara="1" rIns="91425" wrap="square" tIns="91425">
-            <a:noAutofit/>
-          </a:bodyPr>
-          <a:lstStyle/>
-          <a:p>
-            <a:pPr indent="0" lvl="0" marL="0" rtl="0" algn="l">
-              <a:spcBef>
-                <a:spcPts val="0"/>
-              </a:spcBef>
-              <a:spcAft>
-                <a:spcPts val="0"/>
-              </a:spcAft>
-              <a:buNone/>
-            </a:pPr>
-            <a:r>
-              <a:t/>
-            </a:r>
-            <a:endParaRPr/>
-          </a:p>
-        </p:txBody>
-      </p:sp>
-      <p:sp>
-        <p:nvSpPr>
-          <p:cNvPr id="554" name="Google Shape;554;p53"/>
-          <p:cNvSpPr/>
-          <p:nvPr/>
-        </p:nvSpPr>
-        <p:spPr>
-          <a:xfrm>
-            <a:off x="303214" y="2797849"/>
-            <a:ext cx="8451939" cy="1433588"/>
-          </a:xfrm>
-          <a:prstGeom prst="rect">
-            <a:avLst/>
-          </a:prstGeom>
-          <a:noFill/>
-          <a:ln>
-            <a:noFill/>
-          </a:ln>
-        </p:spPr>
-        <p:txBody>
-          <a:bodyPr anchorCtr="0" anchor="ctr" bIns="91425" lIns="91425" spcFirstLastPara="1" rIns="91425" wrap="square" tIns="91425">
-            <a:noAutofit/>
-          </a:bodyPr>
-          <a:lstStyle/>
-          <a:p>
-            <a:pPr indent="0" lvl="0" marL="0" rtl="0" algn="l">
-              <a:spcBef>
-                <a:spcPts val="0"/>
-              </a:spcBef>
-              <a:spcAft>
-                <a:spcPts val="0"/>
-              </a:spcAft>
-              <a:buNone/>
-            </a:pPr>
-            <a:r>
-              <a:t/>
-            </a:r>
-            <a:endParaRPr/>
-          </a:p>
-        </p:txBody>
-      </p:sp>
-      <p:sp>
-        <p:nvSpPr>
-          <p:cNvPr id="555" name="Google Shape;555;p53"/>
-          <p:cNvSpPr/>
-          <p:nvPr/>
-        </p:nvSpPr>
-        <p:spPr>
-          <a:xfrm>
-            <a:off x="303214" y="2797849"/>
-            <a:ext cx="1395256" cy="1433588"/>
-          </a:xfrm>
-          <a:prstGeom prst="rect">
-            <a:avLst/>
-          </a:prstGeom>
-          <a:noFill/>
-          <a:ln>
-            <a:noFill/>
-          </a:ln>
-        </p:spPr>
-        <p:txBody>
-          <a:bodyPr anchorCtr="0" anchor="ctr" bIns="91425" lIns="91425" spcFirstLastPara="1" rIns="91425" wrap="square" tIns="91425">
-            <a:noAutofit/>
-          </a:bodyPr>
-          <a:lstStyle/>
-          <a:p>
-            <a:pPr indent="0" lvl="0" marL="0" rtl="0" algn="l">
-              <a:spcBef>
-                <a:spcPts val="0"/>
-              </a:spcBef>
-              <a:spcAft>
-                <a:spcPts val="0"/>
-              </a:spcAft>
-              <a:buNone/>
-            </a:pPr>
-            <a:r>
-              <a:t/>
-            </a:r>
-            <a:endParaRPr/>
-          </a:p>
-        </p:txBody>
-      </p:sp>
-      <p:sp>
-        <p:nvSpPr>
-          <p:cNvPr id="559" name="Google Shape;559;p53"/>
-          <p:cNvSpPr/>
-          <p:nvPr/>
-        </p:nvSpPr>
-        <p:spPr>
-          <a:xfrm>
-            <a:off x="2067385" y="2797849"/>
-            <a:ext cx="1395256" cy="1433588"/>
-          </a:xfrm>
-          <a:prstGeom prst="rect">
-            <a:avLst/>
-          </a:prstGeom>
-          <a:noFill/>
-          <a:ln>
-            <a:noFill/>
-          </a:ln>
-        </p:spPr>
-        <p:txBody>
-          <a:bodyPr anchorCtr="0" anchor="ctr" bIns="91425" lIns="91425" spcFirstLastPara="1" rIns="91425" wrap="square" tIns="91425">
-            <a:noAutofit/>
-          </a:bodyPr>
-          <a:lstStyle/>
-          <a:p>
-            <a:pPr indent="0" lvl="0" marL="0" rtl="0" algn="l">
-              <a:spcBef>
-                <a:spcPts val="0"/>
-              </a:spcBef>
-              <a:spcAft>
-                <a:spcPts val="0"/>
-              </a:spcAft>
-              <a:buNone/>
-            </a:pPr>
-            <a:r>
-              <a:t/>
-            </a:r>
-            <a:endParaRPr/>
-          </a:p>
-        </p:txBody>
-      </p:sp>
-      <p:sp>
-        <p:nvSpPr>
-          <p:cNvPr id="563" name="Google Shape;563;p53"/>
-          <p:cNvSpPr/>
-          <p:nvPr/>
-        </p:nvSpPr>
-        <p:spPr>
-          <a:xfrm>
-            <a:off x="3831556" y="2797849"/>
-            <a:ext cx="1395256" cy="1433588"/>
-          </a:xfrm>
-          <a:prstGeom prst="rect">
-            <a:avLst/>
-          </a:prstGeom>
-          <a:noFill/>
-          <a:ln>
-            <a:noFill/>
-          </a:ln>
-        </p:spPr>
-        <p:txBody>
-          <a:bodyPr anchorCtr="0" anchor="ctr" bIns="91425" lIns="91425" spcFirstLastPara="1" rIns="91425" wrap="square" tIns="91425">
-            <a:noAutofit/>
-          </a:bodyPr>
-          <a:lstStyle/>
-          <a:p>
-            <a:pPr indent="0" lvl="0" marL="0" rtl="0" algn="l">
-              <a:spcBef>
-                <a:spcPts val="0"/>
-              </a:spcBef>
-              <a:spcAft>
-                <a:spcPts val="0"/>
-              </a:spcAft>
-              <a:buNone/>
-            </a:pPr>
-            <a:r>
-              <a:t/>
-            </a:r>
-            <a:endParaRPr/>
-          </a:p>
-        </p:txBody>
-      </p:sp>
-      <p:sp>
-        <p:nvSpPr>
-          <p:cNvPr id="567" name="Google Shape;567;p53"/>
-          <p:cNvSpPr/>
-          <p:nvPr/>
-        </p:nvSpPr>
-        <p:spPr>
-          <a:xfrm>
-            <a:off x="5595727" y="2797849"/>
-            <a:ext cx="1395256" cy="1433588"/>
-          </a:xfrm>
-          <a:prstGeom prst="rect">
-            <a:avLst/>
-          </a:prstGeom>
-          <a:noFill/>
-          <a:ln>
-            <a:noFill/>
-          </a:ln>
-        </p:spPr>
-        <p:txBody>
-          <a:bodyPr anchorCtr="0" anchor="ctr" bIns="91425" lIns="91425" spcFirstLastPara="1" rIns="91425" wrap="square" tIns="91425">
-            <a:noAutofit/>
-          </a:bodyPr>
-          <a:lstStyle/>
-          <a:p>
-            <a:pPr indent="0" lvl="0" marL="0" rtl="0" algn="l">
-              <a:spcBef>
-                <a:spcPts val="0"/>
-              </a:spcBef>
-              <a:spcAft>
-                <a:spcPts val="0"/>
-              </a:spcAft>
-              <a:buNone/>
-            </a:pPr>
-            <a:r>
-              <a:t/>
-            </a:r>
-            <a:endParaRPr/>
-          </a:p>
-        </p:txBody>
-      </p:sp>
-      <p:sp>
-        <p:nvSpPr>
-          <p:cNvPr id="571" name="Google Shape;571;p53"/>
-          <p:cNvSpPr/>
-          <p:nvPr/>
-        </p:nvSpPr>
-        <p:spPr>
-          <a:xfrm>
-            <a:off x="7359897" y="2797849"/>
-            <a:ext cx="1395256" cy="1433588"/>
-          </a:xfrm>
-          <a:prstGeom prst="rect">
-            <a:avLst/>
-          </a:prstGeom>
-          <a:noFill/>
-          <a:ln>
-            <a:noFill/>
-          </a:ln>
-        </p:spPr>
-        <p:txBody>
-          <a:bodyPr anchorCtr="0" anchor="ctr" bIns="91425" lIns="91425" spcFirstLastPara="1" rIns="91425" wrap="square" tIns="91425">
-            <a:noAutofit/>
-          </a:bodyPr>
-          <a:lstStyle/>
-          <a:p>
-            <a:pPr indent="0" lvl="0" marL="0" rtl="0" algn="l">
-              <a:spcBef>
-                <a:spcPts val="0"/>
-              </a:spcBef>
-              <a:spcAft>
-                <a:spcPts val="0"/>
-              </a:spcAft>
-              <a:buNone/>
-            </a:pPr>
-            <a:r>
-              <a:t/>
-            </a:r>
-            <a:endParaRPr/>
-          </a:p>
-        </p:txBody>
-      </p:sp>
-      <p:sp>
-        <p:nvSpPr>
-          <p:cNvPr id="572" name="title"/>
-          <p:cNvSpPr txBox="1"/>
-          <p:nvPr/>
-        </p:nvSpPr>
-        <p:spPr>
-          <a:xfrm>
-            <a:off x="274320" y="282943"/>
-            <a:ext cx="6792986" cy="617220"/>
-          </a:xfrm>
-          <a:prstGeom prst="rect">
-            <a:avLst/>
-          </a:prstGeom>
-          <a:noFill/>
-        </p:spPr>
-        <p:txBody>
-          <a:bodyPr wrap="square" lIns="76200" rIns="76200" tIns="50800" bIns="50800">
-            <a:spAutoFit/>
-          </a:bodyPr>
-          <a:lstStyle/>
-          <a:p>
-            <a:pPr algn="l">
-              <a:spcAft>
-                <a:spcPts val="300"/>
-              </a:spcAft>
-              <a:defRPr sz="2438">
-                <a:solidFill>
-                  <a:srgbClr val="000000"/>
-                </a:solidFill>
-                <a:latin typeface="Play"/>
-                <a:ea typeface="Play"/>
-                <a:cs typeface="Play"/>
-              </a:defRPr>
-            </a:pPr>
-            <a:r>
-              <a:rPr sz="2438">
-                <a:solidFill>
-                  <a:srgbClr val="000000"/>
-                </a:solidFill>
-                <a:latin typeface="Play"/>
-                <a:ea typeface="Play"/>
-                <a:cs typeface="Play"/>
-              </a:rPr>
-              <a:t>Ресурсы и сроки</a:t>
-            </a:r>
-          </a:p>
-        </p:txBody>
-      </p:sp>
-      <p:sp>
-        <p:nvSpPr>
-          <p:cNvPr id="573" name="body"/>
-          <p:cNvSpPr txBox="1"/>
-          <p:nvPr/>
-        </p:nvSpPr>
-        <p:spPr>
-          <a:xfrm>
-            <a:off x="274320" y="1891002"/>
-            <a:ext cx="8344814" cy="1422400"/>
-          </a:xfrm>
-          <a:prstGeom prst="rect">
-            <a:avLst/>
-          </a:prstGeom>
-          <a:noFill/>
-        </p:spPr>
-        <p:txBody>
-          <a:bodyPr wrap="square" lIns="76200" rIns="76200" tIns="50800" bIns="50800">
-            <a:spAutoFit/>
-          </a:bodyPr>
-          <a:lstStyle/>
-          <a:p>
-            <a:pPr algn="l">
-              <a:spcAft>
-                <a:spcPts val="300"/>
-              </a:spcAft>
-              <a:defRPr sz="1600">
-                <a:solidFill>
-                  <a:srgbClr val="000000"/>
-                </a:solidFill>
-                <a:latin typeface="Play"/>
-                <a:ea typeface="Play"/>
-                <a:cs typeface="Play"/>
-              </a:defRPr>
-            </a:pPr>
-            <a:r>
-              <a:rPr sz="1600">
-                <a:solidFill>
-                  <a:srgbClr val="000000"/>
-                </a:solidFill>
-                <a:latin typeface="Play"/>
-                <a:ea typeface="Play"/>
-                <a:cs typeface="Play"/>
-              </a:rPr>
-              <a:t>• Сервис работает на 2 vCPU / 2 ГБ RAM</a:t>
-            </a:r>
-          </a:p>
-          <a:p>
-            <a:pPr algn="l">
-              <a:spcAft>
-                <a:spcPts val="300"/>
-              </a:spcAft>
-              <a:defRPr sz="1600">
-                <a:solidFill>
-                  <a:srgbClr val="000000"/>
-                </a:solidFill>
-                <a:latin typeface="Play"/>
-                <a:ea typeface="Play"/>
-                <a:cs typeface="Play"/>
-              </a:defRPr>
-            </a:pPr>
-            <a:r>
-              <a:rPr sz="1600">
-                <a:solidFill>
-                  <a:srgbClr val="000000"/>
-                </a:solidFill>
-                <a:latin typeface="Play"/>
-                <a:ea typeface="Play"/>
-                <a:cs typeface="Play"/>
-              </a:rPr>
-              <a:t>• Инференс за 6 недель стоит 1 400 руб</a:t>
-            </a:r>
-          </a:p>
-          <a:p>
-            <a:pPr algn="l">
-              <a:spcAft>
-                <a:spcPts val="300"/>
-              </a:spcAft>
-              <a:defRPr sz="1600">
-                <a:solidFill>
-                  <a:srgbClr val="000000"/>
-                </a:solidFill>
-                <a:latin typeface="Play"/>
-                <a:ea typeface="Play"/>
-                <a:cs typeface="Play"/>
-              </a:defRPr>
-            </a:pPr>
-            <a:r>
-              <a:rPr sz="1600">
-                <a:solidFill>
-                  <a:srgbClr val="000000"/>
-                </a:solidFill>
-                <a:latin typeface="Play"/>
-                <a:ea typeface="Play"/>
-                <a:cs typeface="Play"/>
-              </a:rPr>
-              <a:t>• План: Q3 2026 подключить 4 команды, домен и HTTPS</a:t>
-            </a:r>
-          </a:p>
-          <a:p>
-            <a:pPr algn="l">
-              <a:spcAft>
-                <a:spcPts val="300"/>
-              </a:spcAft>
-              <a:defRPr sz="1600">
-                <a:solidFill>
-                  <a:srgbClr val="000000"/>
-                </a:solidFill>
-                <a:latin typeface="Play"/>
-                <a:ea typeface="Play"/>
-                <a:cs typeface="Play"/>
-              </a:defRPr>
-            </a:pPr>
-            <a:r>
-              <a:rPr sz="1600">
-                <a:solidFill>
-                  <a:srgbClr val="000000"/>
-                </a:solidFill>
-                <a:latin typeface="Play"/>
-                <a:ea typeface="Play"/>
-                <a:cs typeface="Play"/>
-              </a:rPr>
-              <a:t>• Q4 2026 доступ для всей компании, интеграция с хранилищем</a:t>
-            </a:r>
-          </a:p>
-          <a:p>
-            <a:pPr algn="l">
-              <a:spcAft>
-                <a:spcPts val="300"/>
-              </a:spcAft>
-              <a:defRPr sz="1600">
-                <a:solidFill>
-                  <a:srgbClr val="000000"/>
-                </a:solidFill>
-                <a:latin typeface="Play"/>
-                <a:ea typeface="Play"/>
-                <a:cs typeface="Play"/>
-              </a:defRPr>
-            </a:pPr>
-            <a:r>
-              <a:rPr sz="1600">
-                <a:solidFill>
-                  <a:srgbClr val="000000"/>
-                </a:solidFill>
-                <a:latin typeface="Play"/>
-                <a:ea typeface="Play"/>
-                <a:cs typeface="Play"/>
-              </a:rPr>
-              <a:t>• Q1 2027 генерация иллюстраций под стиль шаблона</a:t>
-            </a:r>
-          </a:p>
-        </p:txBody>
-      </p:sp>
-    </p:spTree>
-  </p:cSld>
-  <p:clrMapOvr>
-    <a:masterClrMapping/>
-  </p:clrMapOvr>
-</p:sld>
-</file>
-
-<file path=ppt/slides/slide63.xml><?xml version="1.0" encoding="utf-8"?>
-<p:sld xmlns:a="http://schemas.openxmlformats.org/drawingml/2006/main" xmlns:p="http://schemas.openxmlformats.org/presentationml/2006/main" xmlns:r="http://schemas.openxmlformats.org/officeDocument/2006/relationships">
-  <p:cSld>
-    <p:spTree>
-      <p:nvGrpSpPr>
-        <p:cNvPr id="1" name=""/>
-        <p:cNvGrpSpPr/>
-        <p:nvPr/>
-      </p:nvGrpSpPr>
-      <p:grpSpPr/>
-      <p:sp>
-        <p:nvSpPr>
-          <p:cNvPr id="1027" name="Google Shape;1027;p65"/>
-          <p:cNvSpPr/>
-          <p:nvPr/>
-        </p:nvSpPr>
-        <p:spPr>
-          <a:xfrm>
-            <a:off x="6064222" y="1209852"/>
-            <a:ext cx="2793985" cy="3014270"/>
-          </a:xfrm>
-          <a:prstGeom prst="roundRect">
-            <a:avLst>
-              <a:gd fmla="val 3436" name="adj"/>
-            </a:avLst>
-          </a:prstGeom>
-          <a:solidFill>
-            <a:schemeClr val="lt2"/>
-          </a:solidFill>
-          <a:ln>
-            <a:noFill/>
-          </a:ln>
-        </p:spPr>
-        <p:txBody>
-          <a:bodyPr anchorCtr="0" anchor="ctr" bIns="91425" lIns="91425" spcFirstLastPara="1" rIns="91425" wrap="square" tIns="91425">
-            <a:noAutofit/>
-          </a:bodyPr>
-          <a:lstStyle/>
-          <a:p>
-            <a:pPr indent="0" lvl="0" marL="0" rtl="0" algn="l">
-              <a:spcBef>
-                <a:spcPts val="0"/>
-              </a:spcBef>
-              <a:spcAft>
-                <a:spcPts val="0"/>
-              </a:spcAft>
-              <a:buNone/>
-            </a:pPr>
-            <a:r>
-              <a:t/>
-            </a:r>
-            <a:endParaRPr/>
-          </a:p>
-        </p:txBody>
-      </p:sp>
-      <p:pic>
-        <p:nvPicPr>
-          <p:cNvPr descr=" " id="1028" name="Google Shape;1028;p65"/>
-          <p:cNvPicPr preferRelativeResize="0"/>
-          <p:nvPr/>
-        </p:nvPicPr>
-        <p:blipFill rotWithShape="1">
-          <a:blip r:embed="rId2">
-            <a:alphaModFix/>
-          </a:blip>
-          <a:srcRect b="0" l="0" r="0" t="0"/>
-          <a:stretch/>
-        </p:blipFill>
-        <p:spPr>
-          <a:xfrm>
-            <a:off x="8203313" y="3566983"/>
-            <a:ext cx="466723" cy="466664"/>
-          </a:xfrm>
-          <a:prstGeom prst="rect">
-            <a:avLst/>
-          </a:prstGeom>
-          <a:noFill/>
-          <a:ln>
-            <a:noFill/>
-          </a:ln>
-        </p:spPr>
-      </p:pic>
-      <p:sp>
-        <p:nvSpPr>
-          <p:cNvPr id="1029" name="Google Shape;1029;p65"/>
-          <p:cNvSpPr/>
-          <p:nvPr/>
-        </p:nvSpPr>
-        <p:spPr>
-          <a:xfrm>
-            <a:off x="3174981" y="1209852"/>
-            <a:ext cx="2793985" cy="3014270"/>
-          </a:xfrm>
-          <a:prstGeom prst="roundRect">
-            <a:avLst>
-              <a:gd fmla="val 3436" name="adj"/>
-            </a:avLst>
-          </a:prstGeom>
-          <a:solidFill>
-            <a:schemeClr val="lt2"/>
-          </a:solidFill>
-          <a:ln>
-            <a:noFill/>
-          </a:ln>
-        </p:spPr>
-        <p:txBody>
-          <a:bodyPr anchorCtr="0" anchor="ctr" bIns="91425" lIns="91425" spcFirstLastPara="1" rIns="91425" wrap="square" tIns="91425">
-            <a:noAutofit/>
-          </a:bodyPr>
-          <a:lstStyle/>
-          <a:p>
-            <a:pPr indent="0" lvl="0" marL="0" rtl="0" algn="l">
-              <a:spcBef>
-                <a:spcPts val="0"/>
-              </a:spcBef>
-              <a:spcAft>
-                <a:spcPts val="0"/>
-              </a:spcAft>
-              <a:buNone/>
-            </a:pPr>
-            <a:r>
-              <a:t/>
-            </a:r>
-            <a:endParaRPr/>
-          </a:p>
-        </p:txBody>
-      </p:sp>
-      <p:pic>
-        <p:nvPicPr>
-          <p:cNvPr descr=" " id="1030" name="Google Shape;1030;p65"/>
-          <p:cNvPicPr preferRelativeResize="0"/>
-          <p:nvPr/>
-        </p:nvPicPr>
-        <p:blipFill rotWithShape="1">
-          <a:blip r:embed="rId2">
-            <a:alphaModFix/>
-          </a:blip>
-          <a:srcRect b="0" l="0" r="0" t="0"/>
-          <a:stretch/>
-        </p:blipFill>
-        <p:spPr>
-          <a:xfrm>
-            <a:off x="5310249" y="3566983"/>
-            <a:ext cx="466723" cy="466664"/>
-          </a:xfrm>
-          <a:prstGeom prst="rect">
-            <a:avLst/>
-          </a:prstGeom>
-          <a:noFill/>
-          <a:ln>
-            <a:noFill/>
-          </a:ln>
-        </p:spPr>
-      </p:pic>
-      <p:sp>
-        <p:nvSpPr>
-          <p:cNvPr id="1031" name="Google Shape;1031;p65"/>
-          <p:cNvSpPr/>
-          <p:nvPr/>
-        </p:nvSpPr>
-        <p:spPr>
-          <a:xfrm>
-            <a:off x="285749" y="1209852"/>
-            <a:ext cx="2793985" cy="3014270"/>
-          </a:xfrm>
-          <a:prstGeom prst="roundRect">
-            <a:avLst>
-              <a:gd fmla="val 3436" name="adj"/>
-            </a:avLst>
-          </a:prstGeom>
-          <a:solidFill>
-            <a:schemeClr val="lt2"/>
-          </a:solidFill>
-          <a:ln>
-            <a:noFill/>
-          </a:ln>
-        </p:spPr>
-        <p:txBody>
-          <a:bodyPr anchorCtr="0" anchor="ctr" bIns="91425" lIns="91425" spcFirstLastPara="1" rIns="91425" wrap="square" tIns="91425">
-            <a:noAutofit/>
-          </a:bodyPr>
-          <a:lstStyle/>
-          <a:p>
-            <a:pPr indent="0" lvl="0" marL="0" rtl="0" algn="l">
-              <a:spcBef>
-                <a:spcPts val="0"/>
-              </a:spcBef>
-              <a:spcAft>
-                <a:spcPts val="0"/>
-              </a:spcAft>
-              <a:buNone/>
-            </a:pPr>
-            <a:r>
-              <a:t/>
-            </a:r>
-            <a:endParaRPr/>
-          </a:p>
-        </p:txBody>
-      </p:sp>
-      <p:sp>
-        <p:nvSpPr>
-          <p:cNvPr id="1032" name="Google Shape;1032;p65"/>
-          <p:cNvSpPr/>
-          <p:nvPr/>
-        </p:nvSpPr>
-        <p:spPr>
-          <a:xfrm>
-            <a:off x="285748" y="286047"/>
-            <a:ext cx="8572456" cy="3938075"/>
-          </a:xfrm>
-          <a:prstGeom prst="rect">
-            <a:avLst/>
-          </a:prstGeom>
-          <a:noFill/>
-          <a:ln>
-            <a:noFill/>
-          </a:ln>
-        </p:spPr>
-        <p:txBody>
-          <a:bodyPr anchorCtr="0" anchor="ctr" bIns="91425" lIns="91425" spcFirstLastPara="1" rIns="91425" wrap="square" tIns="91425">
-            <a:noAutofit/>
-          </a:bodyPr>
-          <a:lstStyle/>
-          <a:p>
-            <a:pPr indent="0" lvl="0" marL="0" rtl="0" algn="l">
-              <a:spcBef>
-                <a:spcPts val="0"/>
-              </a:spcBef>
-              <a:spcAft>
-                <a:spcPts val="0"/>
-              </a:spcAft>
-              <a:buNone/>
-            </a:pPr>
-            <a:r>
-              <a:t/>
-            </a:r>
-            <a:endParaRPr/>
-          </a:p>
-        </p:txBody>
-      </p:sp>
-      <p:sp>
-        <p:nvSpPr>
-          <p:cNvPr id="1033" name="Google Shape;1033;p65"/>
-          <p:cNvSpPr/>
-          <p:nvPr/>
-        </p:nvSpPr>
-        <p:spPr>
-          <a:xfrm>
-            <a:off x="285748" y="1209852"/>
-            <a:ext cx="8572456" cy="3014270"/>
-          </a:xfrm>
-          <a:prstGeom prst="rect">
-            <a:avLst/>
-          </a:prstGeom>
-          <a:noFill/>
-          <a:ln>
-            <a:noFill/>
-          </a:ln>
-        </p:spPr>
-        <p:txBody>
-          <a:bodyPr anchorCtr="0" anchor="ctr" bIns="91425" lIns="91425" spcFirstLastPara="1" rIns="91425" wrap="square" tIns="91425">
-            <a:noAutofit/>
-          </a:bodyPr>
-          <a:lstStyle/>
-          <a:p>
-            <a:pPr indent="0" lvl="0" marL="0" rtl="0" algn="l">
-              <a:spcBef>
-                <a:spcPts val="0"/>
-              </a:spcBef>
-              <a:spcAft>
-                <a:spcPts val="0"/>
-              </a:spcAft>
-              <a:buNone/>
-            </a:pPr>
-            <a:r>
-              <a:t/>
-            </a:r>
-            <a:endParaRPr/>
-          </a:p>
-        </p:txBody>
-      </p:sp>
-      <p:sp>
-        <p:nvSpPr>
-          <p:cNvPr id="1034" name="Google Shape;1034;p65"/>
-          <p:cNvSpPr/>
-          <p:nvPr/>
-        </p:nvSpPr>
-        <p:spPr>
-          <a:xfrm>
-            <a:off x="476248" y="1400327"/>
-            <a:ext cx="2412987" cy="1009519"/>
-          </a:xfrm>
-          <a:prstGeom prst="rect">
-            <a:avLst/>
-          </a:prstGeom>
-          <a:noFill/>
-          <a:ln>
-            <a:noFill/>
-          </a:ln>
-        </p:spPr>
-        <p:txBody>
-          <a:bodyPr anchorCtr="0" anchor="ctr" bIns="91425" lIns="91425" spcFirstLastPara="1" rIns="91425" wrap="square" tIns="91425">
-            <a:noAutofit/>
-          </a:bodyPr>
-          <a:lstStyle/>
-          <a:p>
-            <a:pPr indent="0" lvl="0" marL="0" rtl="0" algn="l">
-              <a:spcBef>
-                <a:spcPts val="0"/>
-              </a:spcBef>
-              <a:spcAft>
-                <a:spcPts val="0"/>
-              </a:spcAft>
-              <a:buNone/>
-            </a:pPr>
-            <a:r>
-              <a:t/>
-            </a:r>
-            <a:endParaRPr/>
-          </a:p>
-        </p:txBody>
-      </p:sp>
-      <p:sp>
-        <p:nvSpPr>
-          <p:cNvPr id="1035" name="Google Shape;1035;p65"/>
-          <p:cNvSpPr/>
-          <p:nvPr/>
-        </p:nvSpPr>
-        <p:spPr>
-          <a:xfrm>
-            <a:off x="476248" y="1400328"/>
-            <a:ext cx="76199" cy="76190"/>
-          </a:xfrm>
-          <a:prstGeom prst="roundRect">
-            <a:avLst>
-              <a:gd fmla="val 31500" name="adj"/>
-            </a:avLst>
-          </a:prstGeom>
-          <a:solidFill>
-            <a:srgbClr val="0077FF"/>
-          </a:solidFill>
-          <a:ln>
-            <a:noFill/>
-          </a:ln>
-        </p:spPr>
-        <p:txBody>
-          <a:bodyPr anchorCtr="0" anchor="ctr" bIns="91425" lIns="91425" spcFirstLastPara="1" rIns="91425" wrap="square" tIns="91425">
-            <a:noAutofit/>
-          </a:bodyPr>
-          <a:lstStyle/>
-          <a:p>
-            <a:pPr indent="0" lvl="0" marL="0" rtl="0" algn="l">
-              <a:spcBef>
-                <a:spcPts val="0"/>
-              </a:spcBef>
-              <a:spcAft>
-                <a:spcPts val="0"/>
-              </a:spcAft>
-              <a:buNone/>
-            </a:pPr>
-            <a:r>
-              <a:t/>
-            </a:r>
-            <a:endParaRPr/>
-          </a:p>
-        </p:txBody>
-      </p:sp>
-      <p:sp>
-        <p:nvSpPr>
-          <p:cNvPr id="1037" name="Google Shape;1037;p65"/>
-          <p:cNvSpPr/>
-          <p:nvPr/>
-        </p:nvSpPr>
-        <p:spPr>
-          <a:xfrm>
-            <a:off x="2422509" y="3566983"/>
-            <a:ext cx="466723" cy="466664"/>
-          </a:xfrm>
-          <a:prstGeom prst="rect">
-            <a:avLst/>
-          </a:prstGeom>
-          <a:noFill/>
-          <a:ln>
-            <a:noFill/>
-          </a:ln>
-        </p:spPr>
-        <p:txBody>
-          <a:bodyPr anchorCtr="0" anchor="ctr" bIns="91425" lIns="91425" spcFirstLastPara="1" rIns="91425" wrap="square" tIns="91425">
-            <a:noAutofit/>
-          </a:bodyPr>
-          <a:lstStyle/>
-          <a:p>
-            <a:pPr indent="0" lvl="0" marL="0" rtl="0" algn="l">
-              <a:spcBef>
-                <a:spcPts val="0"/>
-              </a:spcBef>
-              <a:spcAft>
-                <a:spcPts val="0"/>
-              </a:spcAft>
-              <a:buNone/>
-            </a:pPr>
-            <a:r>
-              <a:t/>
-            </a:r>
-            <a:endParaRPr/>
-          </a:p>
-        </p:txBody>
-      </p:sp>
-      <p:pic>
-        <p:nvPicPr>
-          <p:cNvPr descr=" " id="1038" name="Google Shape;1038;p65"/>
-          <p:cNvPicPr preferRelativeResize="0"/>
-          <p:nvPr/>
-        </p:nvPicPr>
-        <p:blipFill rotWithShape="1">
-          <a:blip r:embed="rId2">
-            <a:alphaModFix/>
-          </a:blip>
-          <a:srcRect b="0" l="0" r="0" t="0"/>
-          <a:stretch/>
-        </p:blipFill>
-        <p:spPr>
-          <a:xfrm>
-            <a:off x="2422506" y="3566983"/>
-            <a:ext cx="466723" cy="466664"/>
-          </a:xfrm>
-          <a:prstGeom prst="rect">
-            <a:avLst/>
-          </a:prstGeom>
-          <a:noFill/>
-          <a:ln>
-            <a:noFill/>
-          </a:ln>
-        </p:spPr>
-      </p:pic>
-      <p:pic>
-        <p:nvPicPr>
-          <p:cNvPr descr=" " id="1039" name="Google Shape;1039;p65"/>
-          <p:cNvPicPr preferRelativeResize="0"/>
-          <p:nvPr/>
-        </p:nvPicPr>
-        <p:blipFill rotWithShape="1">
-          <a:blip r:embed="rId3">
-            <a:alphaModFix/>
-          </a:blip>
-          <a:srcRect b="0" l="0" r="0" t="0"/>
-          <a:stretch/>
-        </p:blipFill>
-        <p:spPr>
-          <a:xfrm>
-            <a:off x="2555859" y="3700316"/>
-            <a:ext cx="200024" cy="199999"/>
-          </a:xfrm>
-          <a:prstGeom prst="rect">
-            <a:avLst/>
-          </a:prstGeom>
-          <a:noFill/>
-          <a:ln>
-            <a:noFill/>
-          </a:ln>
-        </p:spPr>
-      </p:pic>
-      <p:sp>
-        <p:nvSpPr>
-          <p:cNvPr id="1040" name="Google Shape;1040;p65"/>
-          <p:cNvSpPr/>
-          <p:nvPr/>
-        </p:nvSpPr>
-        <p:spPr>
-          <a:xfrm>
-            <a:off x="3365480" y="1400327"/>
-            <a:ext cx="2412987" cy="1009519"/>
-          </a:xfrm>
-          <a:prstGeom prst="rect">
-            <a:avLst/>
-          </a:prstGeom>
-          <a:noFill/>
-          <a:ln>
-            <a:noFill/>
-          </a:ln>
-        </p:spPr>
-        <p:txBody>
-          <a:bodyPr anchorCtr="0" anchor="ctr" bIns="91425" lIns="91425" spcFirstLastPara="1" rIns="91425" wrap="square" tIns="91425">
-            <a:noAutofit/>
-          </a:bodyPr>
-          <a:lstStyle/>
-          <a:p>
-            <a:pPr indent="0" lvl="0" marL="0" rtl="0" algn="l">
-              <a:spcBef>
-                <a:spcPts val="0"/>
-              </a:spcBef>
-              <a:spcAft>
-                <a:spcPts val="0"/>
-              </a:spcAft>
-              <a:buNone/>
-            </a:pPr>
-            <a:r>
-              <a:t/>
-            </a:r>
-            <a:endParaRPr/>
-          </a:p>
-        </p:txBody>
-      </p:sp>
-      <p:sp>
-        <p:nvSpPr>
-          <p:cNvPr id="1041" name="Google Shape;1041;p65"/>
-          <p:cNvSpPr/>
-          <p:nvPr/>
-        </p:nvSpPr>
-        <p:spPr>
-          <a:xfrm>
-            <a:off x="3365480" y="1400328"/>
-            <a:ext cx="76199" cy="76190"/>
-          </a:xfrm>
-          <a:prstGeom prst="roundRect">
-            <a:avLst>
-              <a:gd fmla="val 31500" name="adj"/>
-            </a:avLst>
-          </a:prstGeom>
-          <a:solidFill>
-            <a:srgbClr val="0077FF"/>
-          </a:solidFill>
-          <a:ln>
-            <a:noFill/>
-          </a:ln>
-        </p:spPr>
-        <p:txBody>
-          <a:bodyPr anchorCtr="0" anchor="ctr" bIns="91425" lIns="91425" spcFirstLastPara="1" rIns="91425" wrap="square" tIns="91425">
-            <a:noAutofit/>
-          </a:bodyPr>
-          <a:lstStyle/>
-          <a:p>
-            <a:pPr indent="0" lvl="0" marL="0" rtl="0" algn="l">
-              <a:spcBef>
-                <a:spcPts val="0"/>
-              </a:spcBef>
-              <a:spcAft>
-                <a:spcPts val="0"/>
-              </a:spcAft>
-              <a:buNone/>
-            </a:pPr>
-            <a:r>
-              <a:t/>
-            </a:r>
-            <a:endParaRPr/>
-          </a:p>
-        </p:txBody>
-      </p:sp>
-      <p:sp>
-        <p:nvSpPr>
-          <p:cNvPr id="1043" name="Google Shape;1043;p65"/>
-          <p:cNvSpPr/>
-          <p:nvPr/>
-        </p:nvSpPr>
-        <p:spPr>
-          <a:xfrm>
-            <a:off x="5311741" y="3566983"/>
-            <a:ext cx="466723" cy="466664"/>
-          </a:xfrm>
-          <a:prstGeom prst="rect">
-            <a:avLst/>
-          </a:prstGeom>
-          <a:noFill/>
-          <a:ln>
-            <a:noFill/>
-          </a:ln>
-        </p:spPr>
-        <p:txBody>
-          <a:bodyPr anchorCtr="0" anchor="ctr" bIns="91425" lIns="91425" spcFirstLastPara="1" rIns="91425" wrap="square" tIns="91425">
-            <a:noAutofit/>
-          </a:bodyPr>
-          <a:lstStyle/>
-          <a:p>
-            <a:pPr indent="0" lvl="0" marL="0" rtl="0" algn="l">
-              <a:spcBef>
-                <a:spcPts val="0"/>
-              </a:spcBef>
-              <a:spcAft>
-                <a:spcPts val="0"/>
-              </a:spcAft>
-              <a:buNone/>
-            </a:pPr>
-            <a:r>
-              <a:t/>
-            </a:r>
-            <a:endParaRPr/>
-          </a:p>
-        </p:txBody>
-      </p:sp>
-      <p:pic>
-        <p:nvPicPr>
-          <p:cNvPr descr=" " id="1044" name="Google Shape;1044;p65"/>
-          <p:cNvPicPr preferRelativeResize="0"/>
-          <p:nvPr/>
-        </p:nvPicPr>
-        <p:blipFill rotWithShape="1">
-          <a:blip r:embed="rId3">
-            <a:alphaModFix/>
-          </a:blip>
-          <a:srcRect b="0" l="0" r="0" t="0"/>
-          <a:stretch/>
-        </p:blipFill>
-        <p:spPr>
-          <a:xfrm>
-            <a:off x="5445091" y="3700316"/>
-            <a:ext cx="200024" cy="199999"/>
-          </a:xfrm>
-          <a:prstGeom prst="rect">
-            <a:avLst/>
-          </a:prstGeom>
-          <a:noFill/>
-          <a:ln>
-            <a:noFill/>
-          </a:ln>
-        </p:spPr>
-      </p:pic>
-      <p:sp>
-        <p:nvSpPr>
-          <p:cNvPr id="1045" name="Google Shape;1045;p65"/>
-          <p:cNvSpPr/>
-          <p:nvPr/>
-        </p:nvSpPr>
-        <p:spPr>
-          <a:xfrm>
-            <a:off x="6254721" y="1400327"/>
-            <a:ext cx="2412987" cy="1009519"/>
-          </a:xfrm>
-          <a:prstGeom prst="rect">
-            <a:avLst/>
-          </a:prstGeom>
-          <a:noFill/>
-          <a:ln>
-            <a:noFill/>
-          </a:ln>
-        </p:spPr>
-        <p:txBody>
-          <a:bodyPr anchorCtr="0" anchor="ctr" bIns="91425" lIns="91425" spcFirstLastPara="1" rIns="91425" wrap="square" tIns="91425">
-            <a:noAutofit/>
-          </a:bodyPr>
-          <a:lstStyle/>
-          <a:p>
-            <a:pPr indent="0" lvl="0" marL="0" rtl="0" algn="l">
-              <a:spcBef>
-                <a:spcPts val="0"/>
-              </a:spcBef>
-              <a:spcAft>
-                <a:spcPts val="0"/>
-              </a:spcAft>
-              <a:buNone/>
-            </a:pPr>
-            <a:r>
-              <a:t/>
-            </a:r>
-            <a:endParaRPr/>
-          </a:p>
-        </p:txBody>
-      </p:sp>
-      <p:sp>
-        <p:nvSpPr>
-          <p:cNvPr id="1046" name="Google Shape;1046;p65"/>
-          <p:cNvSpPr/>
-          <p:nvPr/>
-        </p:nvSpPr>
-        <p:spPr>
-          <a:xfrm>
-            <a:off x="6254721" y="1400328"/>
-            <a:ext cx="76199" cy="76190"/>
-          </a:xfrm>
-          <a:prstGeom prst="roundRect">
-            <a:avLst>
-              <a:gd fmla="val 31500" name="adj"/>
-            </a:avLst>
-          </a:prstGeom>
-          <a:solidFill>
-            <a:srgbClr val="0077FF"/>
-          </a:solidFill>
-          <a:ln>
-            <a:noFill/>
-          </a:ln>
-        </p:spPr>
-        <p:txBody>
-          <a:bodyPr anchorCtr="0" anchor="ctr" bIns="91425" lIns="91425" spcFirstLastPara="1" rIns="91425" wrap="square" tIns="91425">
-            <a:noAutofit/>
-          </a:bodyPr>
-          <a:lstStyle/>
-          <a:p>
-            <a:pPr indent="0" lvl="0" marL="0" rtl="0" algn="l">
-              <a:spcBef>
-                <a:spcPts val="0"/>
-              </a:spcBef>
-              <a:spcAft>
-                <a:spcPts val="0"/>
-              </a:spcAft>
-              <a:buNone/>
-            </a:pPr>
-            <a:r>
-              <a:t/>
-            </a:r>
-            <a:endParaRPr/>
-          </a:p>
-        </p:txBody>
-      </p:sp>
-      <p:sp>
-        <p:nvSpPr>
-          <p:cNvPr id="1048" name="Google Shape;1048;p65"/>
-          <p:cNvSpPr/>
-          <p:nvPr/>
-        </p:nvSpPr>
-        <p:spPr>
-          <a:xfrm>
-            <a:off x="8200982" y="3566983"/>
-            <a:ext cx="466723" cy="466664"/>
-          </a:xfrm>
-          <a:prstGeom prst="rect">
-            <a:avLst/>
-          </a:prstGeom>
-          <a:noFill/>
-          <a:ln>
-            <a:noFill/>
-          </a:ln>
-        </p:spPr>
-        <p:txBody>
-          <a:bodyPr anchorCtr="0" anchor="ctr" bIns="91425" lIns="91425" spcFirstLastPara="1" rIns="91425" wrap="square" tIns="91425">
-            <a:noAutofit/>
-          </a:bodyPr>
-          <a:lstStyle/>
-          <a:p>
-            <a:pPr indent="0" lvl="0" marL="0" rtl="0" algn="l">
-              <a:spcBef>
-                <a:spcPts val="0"/>
-              </a:spcBef>
-              <a:spcAft>
-                <a:spcPts val="0"/>
-              </a:spcAft>
-              <a:buNone/>
-            </a:pPr>
-            <a:r>
-              <a:t/>
-            </a:r>
-            <a:endParaRPr/>
-          </a:p>
-        </p:txBody>
-      </p:sp>
-      <p:pic>
-        <p:nvPicPr>
-          <p:cNvPr descr=" " id="1049" name="Google Shape;1049;p65"/>
-          <p:cNvPicPr preferRelativeResize="0"/>
-          <p:nvPr/>
-        </p:nvPicPr>
-        <p:blipFill rotWithShape="1">
-          <a:blip r:embed="rId3">
-            <a:alphaModFix/>
-          </a:blip>
-          <a:srcRect b="0" l="0" r="0" t="0"/>
-          <a:stretch/>
-        </p:blipFill>
-        <p:spPr>
-          <a:xfrm>
-            <a:off x="8334332" y="3700316"/>
-            <a:ext cx="200024" cy="199999"/>
-          </a:xfrm>
-          <a:prstGeom prst="rect">
-            <a:avLst/>
-          </a:prstGeom>
-          <a:noFill/>
-          <a:ln>
-            <a:noFill/>
-          </a:ln>
-        </p:spPr>
-      </p:pic>
-      <p:sp>
-        <p:nvSpPr>
-          <p:cNvPr id="1050" name="title"/>
-          <p:cNvSpPr txBox="1"/>
-          <p:nvPr/>
-        </p:nvSpPr>
-        <p:spPr>
-          <a:xfrm>
-            <a:off x="274320" y="282943"/>
-            <a:ext cx="6792986" cy="617220"/>
-          </a:xfrm>
-          <a:prstGeom prst="rect">
-            <a:avLst/>
-          </a:prstGeom>
-          <a:noFill/>
-        </p:spPr>
-        <p:txBody>
-          <a:bodyPr wrap="square" lIns="76200" rIns="76200" tIns="50800" bIns="50800">
-            <a:spAutoFit/>
-          </a:bodyPr>
-          <a:lstStyle/>
-          <a:p>
-            <a:pPr algn="l">
-              <a:spcAft>
-                <a:spcPts val="300"/>
-              </a:spcAft>
-              <a:defRPr sz="2438">
-                <a:solidFill>
-                  <a:srgbClr val="000000"/>
-                </a:solidFill>
-                <a:latin typeface="Play"/>
-                <a:ea typeface="Play"/>
-                <a:cs typeface="Play"/>
-              </a:defRPr>
-            </a:pPr>
-            <a:r>
-              <a:rPr sz="2438">
-                <a:solidFill>
-                  <a:srgbClr val="000000"/>
-                </a:solidFill>
-                <a:latin typeface="Play"/>
-                <a:ea typeface="Play"/>
-                <a:cs typeface="Play"/>
-              </a:rPr>
-              <a:t>Риски</a:t>
-            </a:r>
-          </a:p>
-        </p:txBody>
-      </p:sp>
-      <p:sp>
-        <p:nvSpPr>
-          <p:cNvPr id="1051" name="card_0"/>
-          <p:cNvSpPr txBox="1"/>
-          <p:nvPr/>
-        </p:nvSpPr>
-        <p:spPr>
-          <a:xfrm>
-            <a:off x="576030" y="1728705"/>
-            <a:ext cx="2264138" cy="632134"/>
-          </a:xfrm>
-          <a:prstGeom prst="rect">
-            <a:avLst/>
-          </a:prstGeom>
-          <a:noFill/>
-        </p:spPr>
-        <p:txBody>
-          <a:bodyPr wrap="square" lIns="76200" rIns="76200" tIns="50800" bIns="50800">
-            <a:spAutoFit/>
-          </a:bodyPr>
-          <a:lstStyle/>
-          <a:p>
-            <a:pPr algn="l">
-              <a:spcAft>
-                <a:spcPts val="300"/>
-              </a:spcAft>
-              <a:defRPr sz="1200" b="0">
-                <a:solidFill>
-                  <a:srgbClr val="000000"/>
-                </a:solidFill>
-                <a:latin typeface="Play"/>
-                <a:ea typeface="Play"/>
-                <a:cs typeface="Play"/>
-              </a:defRPr>
-            </a:pPr>
-            <a:r>
-              <a:rPr sz="1200" b="0">
-                <a:solidFill>
-                  <a:srgbClr val="000000"/>
-                </a:solidFill>
-                <a:latin typeface="Play"/>
-                <a:ea typeface="Play"/>
-                <a:cs typeface="Play"/>
-              </a:rPr>
-              <a:t>Модель может выдумать цифры, аудит проверяет источники</a:t>
-            </a:r>
-          </a:p>
-        </p:txBody>
-      </p:sp>
-      <p:sp>
-        <p:nvSpPr>
-          <p:cNvPr id="1052" name="card_1"/>
-          <p:cNvSpPr txBox="1"/>
-          <p:nvPr/>
-        </p:nvSpPr>
-        <p:spPr>
-          <a:xfrm>
-            <a:off x="3465259" y="1728705"/>
-            <a:ext cx="2264138" cy="632134"/>
-          </a:xfrm>
-          <a:prstGeom prst="rect">
-            <a:avLst/>
-          </a:prstGeom>
-          <a:noFill/>
-        </p:spPr>
-        <p:txBody>
-          <a:bodyPr wrap="square" lIns="76200" rIns="76200" tIns="50800" bIns="50800">
-            <a:spAutoFit/>
-          </a:bodyPr>
-          <a:lstStyle/>
-          <a:p>
-            <a:pPr algn="l">
-              <a:spcAft>
-                <a:spcPts val="300"/>
-              </a:spcAft>
-              <a:defRPr sz="1200" b="0">
-                <a:solidFill>
-                  <a:srgbClr val="000000"/>
-                </a:solidFill>
-                <a:latin typeface="Play"/>
-                <a:ea typeface="Play"/>
-                <a:cs typeface="Play"/>
-              </a:defRPr>
-            </a:pPr>
-            <a:r>
-              <a:rPr sz="1200" b="0">
-                <a:solidFill>
-                  <a:srgbClr val="000000"/>
-                </a:solidFill>
-                <a:latin typeface="Play"/>
-                <a:ea typeface="Play"/>
-                <a:cs typeface="Play"/>
-              </a:rPr>
-              <a:t>Плохой шаблон приводит к использованию рабочей области</a:t>
-            </a:r>
-          </a:p>
-        </p:txBody>
-      </p:sp>
-      <p:sp>
-        <p:nvSpPr>
-          <p:cNvPr id="1053" name="card_2"/>
-          <p:cNvSpPr txBox="1"/>
-          <p:nvPr/>
-        </p:nvSpPr>
-        <p:spPr>
-          <a:xfrm>
-            <a:off x="6354489" y="1728705"/>
-            <a:ext cx="2264138" cy="632134"/>
-          </a:xfrm>
-          <a:prstGeom prst="rect">
-            <a:avLst/>
-          </a:prstGeom>
-          <a:noFill/>
-        </p:spPr>
-        <p:txBody>
-          <a:bodyPr wrap="square" lIns="76200" rIns="76200" tIns="50800" bIns="50800">
-            <a:spAutoFit/>
-          </a:bodyPr>
-          <a:lstStyle/>
-          <a:p>
-            <a:pPr algn="l">
-              <a:spcAft>
-                <a:spcPts val="300"/>
-              </a:spcAft>
-              <a:defRPr sz="1200" b="0">
-                <a:solidFill>
-                  <a:srgbClr val="000000"/>
-                </a:solidFill>
-                <a:latin typeface="Play"/>
-                <a:ea typeface="Play"/>
-                <a:cs typeface="Play"/>
-              </a:defRPr>
-            </a:pPr>
-            <a:r>
-              <a:rPr sz="1200" b="0">
-                <a:solidFill>
-                  <a:srgbClr val="000000"/>
-                </a:solidFill>
-                <a:latin typeface="Play"/>
-                <a:ea typeface="Play"/>
-                <a:cs typeface="Play"/>
-              </a:rPr>
-              <a:t>Нагрузка выше 20 задач требует внешней очереди</a:t>
+              <a:t>Нагрузка &gt;20 задач – нужна внешняя очередь</a:t>
             </a:r>
           </a:p>
         </p:txBody>
@@ -11190,8 +10099,8 @@
         </p:nvSpPr>
         <p:spPr>
           <a:xfrm>
-            <a:off x="445963" y="1555901"/>
-            <a:ext cx="8300171" cy="2610802"/>
+            <a:off x="1543608" y="159030"/>
+            <a:ext cx="7202525" cy="3314394"/>
           </a:xfrm>
           <a:prstGeom prst="roundRect">
             <a:avLst/>
@@ -11236,8 +10145,8 @@
         </p:nvSpPr>
         <p:spPr>
           <a:xfrm>
-            <a:off x="572963" y="1682901"/>
-            <a:ext cx="4373118" cy="1183640"/>
+            <a:off x="1670608" y="286030"/>
+            <a:ext cx="6948525" cy="1183640"/>
           </a:xfrm>
           <a:prstGeom prst="rect">
             <a:avLst/>
@@ -11272,7 +10181,7 @@
                 <a:ea typeface="Play"/>
                 <a:cs typeface="Play"/>
               </a:rPr>
-              <a:t>Решение: запуск на всю компанию</a:t>
+              <a:t>Решение: запуск сервиса на всю компанию</a:t>
             </a:r>
           </a:p>
         </p:txBody>
@@ -11285,8 +10194,8 @@
         </p:nvSpPr>
         <p:spPr>
           <a:xfrm>
-            <a:off x="572963" y="3046564"/>
-            <a:ext cx="8046171" cy="1376845"/>
+            <a:off x="1670608" y="2188185"/>
+            <a:ext cx="6948525" cy="1158240"/>
           </a:xfrm>
           <a:prstGeom prst="rect">
             <a:avLst/>
@@ -11303,7 +10212,7 @@
               <a:spcAft>
                 <a:spcPts val="300"/>
               </a:spcAft>
-              <a:defRPr sz="1800">
+              <a:defRPr sz="1600">
                 <a:solidFill>
                   <a:srgbClr val="000000"/>
                 </a:solidFill>
@@ -11313,7 +10222,7 @@
               </a:defRPr>
             </a:pPr>
             <a:r>
-              <a:rPr sz="1800">
+              <a:rPr sz="1600">
                 <a:solidFill>
                   <a:srgbClr val="000000"/>
                 </a:solidFill>
@@ -11321,7 +10230,7 @@
                 <a:ea typeface="Play"/>
                 <a:cs typeface="Play"/>
               </a:rPr>
-              <a:t>• Попросить решение о запуске на всю компанию</a:t>
+              <a:t>• Q3 2026 подключить 4 команды, Q4 2026 доступ для всей компании, Q1 2027 генерация иллюстраций</a:t>
             </a:r>
           </a:p>
           <a:p>
@@ -11329,7 +10238,7 @@
               <a:spcAft>
                 <a:spcPts val="300"/>
               </a:spcAft>
-              <a:defRPr sz="1800">
+              <a:defRPr sz="1600">
                 <a:solidFill>
                   <a:srgbClr val="000000"/>
                 </a:solidFill>
@@ -11339,7 +10248,7 @@
               </a:defRPr>
             </a:pPr>
             <a:r>
-              <a:rPr sz="1800">
+              <a:rPr sz="1600">
                 <a:solidFill>
                   <a:srgbClr val="000000"/>
                 </a:solidFill>
@@ -11347,7 +10256,7 @@
                 <a:ea typeface="Play"/>
                 <a:cs typeface="Play"/>
               </a:rPr>
-              <a:t>• Ожидаем сокращения времени сборки до 4 мин</a:t>
+              <a:t>• Требуем одобрение запуска и ресурсы</a:t>
             </a:r>
           </a:p>
           <a:p>
@@ -11355,7 +10264,7 @@
               <a:spcAft>
                 <a:spcPts val="300"/>
               </a:spcAft>
-              <a:defRPr sz="1800">
+              <a:defRPr sz="1600">
                 <a:solidFill>
                   <a:srgbClr val="000000"/>
                 </a:solidFill>
@@ -11365,7 +10274,7 @@
               </a:defRPr>
             </a:pPr>
             <a:r>
-              <a:rPr sz="1800">
+              <a:rPr sz="1600">
                 <a:solidFill>
                   <a:srgbClr val="000000"/>
                 </a:solidFill>
@@ -11373,7 +10282,7 @@
                 <a:ea typeface="Play"/>
                 <a:cs typeface="Play"/>
               </a:rPr>
-              <a:t>• Планируем интеграцию с корпоративными системами</a:t>
+              <a:t>• Ожидаем ускорение и стандартизацию</a:t>
             </a:r>
           </a:p>
         </p:txBody>

--- a/samples/VK_Tech_шаблон__classic.pptx
+++ b/samples/VK_Tech_шаблон__classic.pptx
@@ -279,7 +279,7 @@
               <c:strCache>
                 <c:ptCount val="1"/>
                 <c:pt idx="0">
-                  <c:v>Время (мин)</c:v>
+                  <c:v>До</c:v>
                 </c:pt>
               </c:strCache>
             </c:strRef>
@@ -296,36 +296,114 @@
           </c:spPr>
           <c:cat>
             <c:strRef>
-              <c:f>Sheet1!$A$2:$A$3</c:f>
+              <c:f>Sheet1!$A$2:$A$5</c:f>
               <c:strCache>
-                <c:ptCount val="2"/>
+                <c:ptCount val="4"/>
                 <c:pt idx="0">
-                  <c:v>Текущее</c:v>
+                  <c:v>Время на колоду (мин)</c:v>
                 </c:pt>
                 <c:pt idx="1">
-                  <c:v>Пилот</c:v>
+                  <c:v>Время до первой версии (дн)</c:v>
+                </c:pt>
+                <c:pt idx="2">
+                  <c:v>Нарушения стиля</c:v>
+                </c:pt>
+                <c:pt idx="3">
+                  <c:v>Запросы закрыты/нед</c:v>
                 </c:pt>
               </c:strCache>
             </c:strRef>
           </c:cat>
           <c:val>
             <c:numRef>
-              <c:f>Sheet1!$B$2:$B$3</c:f>
+              <c:f>Sheet1!$B$2:$B$5</c:f>
               <c:numCache>
                 <c:formatCode>General</c:formatCode>
-                <c:ptCount val="2"/>
+                <c:ptCount val="4"/>
                 <c:pt idx="0">
                   <c:v>186.0</c:v>
                 </c:pt>
                 <c:pt idx="1">
+                  <c:v>6.0</c:v>
+                </c:pt>
+                <c:pt idx="2">
+                  <c:v>19.0</c:v>
+                </c:pt>
+                <c:pt idx="3">
+                  <c:v>11.0</c:v>
+                </c:pt>
+              </c:numCache>
+            </c:numRef>
+          </c:val>
+        </c:ser>
+        <c:ser>
+          <c:idx val="1"/>
+          <c:order val="1"/>
+          <c:tx>
+            <c:strRef>
+              <c:f>Sheet1!$C$1</c:f>
+              <c:strCache>
+                <c:ptCount val="1"/>
+                <c:pt idx="0">
+                  <c:v>После</c:v>
+                </c:pt>
+              </c:strCache>
+            </c:strRef>
+          </c:tx>
+          <c:spPr>
+            <a:solidFill>
+              <a:srgbClr val="FFD91D"/>
+            </a:solidFill>
+            <a:ln>
+              <a:solidFill>
+                <a:srgbClr val="FFD91D"/>
+              </a:solidFill>
+            </a:ln>
+          </c:spPr>
+          <c:cat>
+            <c:strRef>
+              <c:f>Sheet1!$A$2:$A$5</c:f>
+              <c:strCache>
+                <c:ptCount val="4"/>
+                <c:pt idx="0">
+                  <c:v>Время на колоду (мин)</c:v>
+                </c:pt>
+                <c:pt idx="1">
+                  <c:v>Время до первой версии (дн)</c:v>
+                </c:pt>
+                <c:pt idx="2">
+                  <c:v>Нарушения стиля</c:v>
+                </c:pt>
+                <c:pt idx="3">
+                  <c:v>Запросы закрыты/нед</c:v>
+                </c:pt>
+              </c:strCache>
+            </c:strRef>
+          </c:cat>
+          <c:val>
+            <c:numRef>
+              <c:f>Sheet1!$C$2:$C$5</c:f>
+              <c:numCache>
+                <c:formatCode>General</c:formatCode>
+                <c:ptCount val="4"/>
+                <c:pt idx="0">
                   <c:v>4.0</c:v>
+                </c:pt>
+                <c:pt idx="1">
+                  <c:v>1.0</c:v>
+                </c:pt>
+                <c:pt idx="2">
+                  <c:v>2.0</c:v>
+                </c:pt>
+                <c:pt idx="3">
+                  <c:v>38.0</c:v>
                 </c:pt>
               </c:numCache>
             </c:numRef>
           </c:val>
         </c:ser>
         <c:dLbls>
-          <c:numFmt formatCode="0&quot; мин&quot;" sourceLinked="0"/>
+          <c:numFmt formatCode="0" sourceLinked="0"/>
           <c:txPr>
             <a:bodyPr wrap="none"/>
             <a:lstStyle/>
@@ -402,31 +480,6 @@
             </a:ln>
           </c:spPr>
         </c:majorGridlines>
-        <c:title>
-          <c:tx>
-            <c:rich>
-              <a:bodyPr rot="0" vert="horz"/>
-              <a:lstStyle/>
-              <a:p>
-                <a:pPr>
-                  <a:defRPr sz="1100" b="0">
-                    <a:solidFill>
-                      <a:srgbClr val="000000"/>
-                    </a:solidFill>
-                    <a:latin typeface="Play"/>
-                    <a:ea typeface="Play"/>
-                    <a:cs typeface="Play"/>
-                  </a:defRPr>
-                </a:pPr>
-                <a:r>
-                  <a:t>Время (мин), мин</a:t>
-                </a:r>
-              </a:p>
-            </c:rich>
-          </c:tx>
-          <c:layout/>
-          <c:overlay val="0"/>
-        </c:title>
         <c:majorTickMark val="out"/>
         <c:minorTickMark val="none"/>
         <c:tickLblPos val="nextTo"/>
@@ -450,642 +503,10 @@
         <c:crosses val="autoZero"/>
       </c:valAx>
     </c:plotArea>
-    <c:dispBlanksAs val="gap"/>
-  </c:chart>
-  <c:txPr>
-    <a:bodyPr/>
-    <a:lstStyle/>
-    <a:p>
-      <a:pPr>
-        <a:defRPr sz="1200" b="0">
-          <a:solidFill>
-            <a:srgbClr val="000000"/>
-          </a:solidFill>
-          <a:latin typeface="Play"/>
-          <a:ea typeface="Play"/>
-          <a:cs typeface="Play"/>
-        </a:defRPr>
-      </a:pPr>
-      <a:endParaRPr lang="en-US"/>
-    </a:p>
-  </c:txPr>
-  <c:externalData r:id="rId1">
-    <c:autoUpdate val="0"/>
-  </c:externalData>
-</c:chartSpace>
-</file>
-
-<file path=ppt/charts/chart2.xml><?xml version="1.0" encoding="utf-8"?>
-<c:chartSpace xmlns:c="http://schemas.openxmlformats.org/drawingml/2006/chart" xmlns:a="http://schemas.openxmlformats.org/drawingml/2006/main" xmlns:r="http://schemas.openxmlformats.org/officeDocument/2006/relationships">
-  <c:date1904 val="0"/>
-  <c:chart>
-    <c:autoTitleDeleted val="1"/>
-    <c:plotArea>
-      <c:barChart>
-        <c:barDir val="col"/>
-        <c:grouping val="clustered"/>
-        <c:ser>
-          <c:idx val="0"/>
-          <c:order val="0"/>
-          <c:tx>
-            <c:strRef>
-              <c:f>Sheet1!$B$1</c:f>
-              <c:strCache>
-                <c:ptCount val="1"/>
-                <c:pt idx="0">
-                  <c:v>Нарушения</c:v>
-                </c:pt>
-              </c:strCache>
-            </c:strRef>
-          </c:tx>
-          <c:spPr>
-            <a:solidFill>
-              <a:srgbClr val="0077FF"/>
-            </a:solidFill>
-            <a:ln>
-              <a:solidFill>
-                <a:srgbClr val="0077FF"/>
-              </a:solidFill>
-            </a:ln>
-          </c:spPr>
-          <c:cat>
-            <c:strRef>
-              <c:f>Sheet1!$A$2:$A$3</c:f>
-              <c:strCache>
-                <c:ptCount val="2"/>
-                <c:pt idx="0">
-                  <c:v>Текущее</c:v>
-                </c:pt>
-                <c:pt idx="1">
-                  <c:v>Пилот</c:v>
-                </c:pt>
-              </c:strCache>
-            </c:strRef>
-          </c:cat>
-          <c:val>
-            <c:numRef>
-              <c:f>Sheet1!$B$2:$B$3</c:f>
-              <c:numCache>
-                <c:formatCode>General</c:formatCode>
-                <c:ptCount val="2"/>
-                <c:pt idx="0">
-                  <c:v>19.0</c:v>
-                </c:pt>
-                <c:pt idx="1">
-                  <c:v>2.0</c:v>
-                </c:pt>
-              </c:numCache>
-            </c:numRef>
-          </c:val>
-        </c:ser>
-        <c:dLbls>
-          <c:numFmt formatCode="0&quot; колоды&quot;" sourceLinked="0"/>
-          <c:txPr>
-            <a:bodyPr wrap="none"/>
-            <a:lstStyle/>
-            <a:p>
-              <a:pPr>
-                <a:defRPr sz="1100" b="0">
-                  <a:solidFill>
-                    <a:srgbClr val="000000"/>
-                  </a:solidFill>
-                  <a:latin typeface="Play"/>
-                  <a:ea typeface="Play"/>
-                  <a:cs typeface="Play"/>
-                </a:defRPr>
-              </a:pPr>
-            </a:p>
-          </c:txPr>
-          <c:dLblPos val="outEnd"/>
-          <c:showLegendKey val="0"/>
-          <c:showVal val="1"/>
-          <c:showCatName val="0"/>
-          <c:showSerName val="0"/>
-          <c:showPercent val="0"/>
-          <c:showBubbleSize val="0"/>
-          <c:showLeaderLines val="1"/>
-        </c:dLbls>
-        <c:gapWidth val="60"/>
-        <c:axId val="-2068027336"/>
-        <c:axId val="-2113994440"/>
-      </c:barChart>
-      <c:catAx>
-        <c:axId val="-2068027336"/>
-        <c:scaling>
-          <c:orientation val="minMax"/>
-        </c:scaling>
-        <c:delete val="0"/>
-        <c:axPos val="b"/>
-        <c:majorTickMark val="out"/>
-        <c:minorTickMark val="none"/>
-        <c:tickLblPos val="nextTo"/>
-        <c:txPr>
-          <a:bodyPr/>
-          <a:lstStyle/>
-          <a:p>
-            <a:pPr>
-              <a:defRPr sz="1100" b="0">
-                <a:solidFill>
-                  <a:srgbClr val="000000"/>
-                </a:solidFill>
-                <a:latin typeface="Play"/>
-                <a:ea typeface="Play"/>
-                <a:cs typeface="Play"/>
-              </a:defRPr>
-            </a:pPr>
-          </a:p>
-        </c:txPr>
-        <c:crossAx val="-2113994440"/>
-        <c:crosses val="autoZero"/>
-        <c:auto val="1"/>
-        <c:lblAlgn val="ctr"/>
-        <c:lblOffset val="100"/>
-        <c:noMultiLvlLbl val="0"/>
-      </c:catAx>
-      <c:valAx>
-        <c:axId val="-2113994440"/>
-        <c:scaling/>
-        <c:delete val="0"/>
-        <c:axPos val="l"/>
-        <c:majorGridlines>
-          <c:spPr>
-            <a:ln w="9525">
-              <a:solidFill>
-                <a:srgbClr val="D1D1D1"/>
-              </a:solidFill>
-            </a:ln>
-          </c:spPr>
-        </c:majorGridlines>
-        <c:title>
-          <c:tx>
-            <c:rich>
-              <a:bodyPr rot="0" vert="horz"/>
-              <a:lstStyle/>
-              <a:p>
-                <a:pPr>
-                  <a:defRPr sz="1100" b="0">
-                    <a:solidFill>
-                      <a:srgbClr val="000000"/>
-                    </a:solidFill>
-                    <a:latin typeface="Play"/>
-                    <a:ea typeface="Play"/>
-                    <a:cs typeface="Play"/>
-                  </a:defRPr>
-                </a:pPr>
-                <a:r>
-                  <a:t>Нарушения, колоды</a:t>
-                </a:r>
-              </a:p>
-            </c:rich>
-          </c:tx>
-          <c:layout/>
-          <c:overlay val="0"/>
-        </c:title>
-        <c:majorTickMark val="out"/>
-        <c:minorTickMark val="none"/>
-        <c:tickLblPos val="nextTo"/>
-        <c:txPr>
-          <a:bodyPr/>
-          <a:lstStyle/>
-          <a:p>
-            <a:pPr>
-              <a:defRPr sz="1100" b="0">
-                <a:solidFill>
-                  <a:srgbClr val="000000"/>
-                </a:solidFill>
-                <a:latin typeface="Play"/>
-                <a:ea typeface="Play"/>
-                <a:cs typeface="Play"/>
-              </a:defRPr>
-            </a:pPr>
-          </a:p>
-        </c:txPr>
-        <c:crossAx val="-2068027336"/>
-        <c:crosses val="autoZero"/>
-      </c:valAx>
-    </c:plotArea>
-    <c:dispBlanksAs val="gap"/>
-  </c:chart>
-  <c:txPr>
-    <a:bodyPr/>
-    <a:lstStyle/>
-    <a:p>
-      <a:pPr>
-        <a:defRPr sz="1200" b="0">
-          <a:solidFill>
-            <a:srgbClr val="000000"/>
-          </a:solidFill>
-          <a:latin typeface="Play"/>
-          <a:ea typeface="Play"/>
-          <a:cs typeface="Play"/>
-        </a:defRPr>
-      </a:pPr>
-      <a:endParaRPr lang="en-US"/>
-    </a:p>
-  </c:txPr>
-  <c:externalData r:id="rId1">
-    <c:autoUpdate val="0"/>
-  </c:externalData>
-</c:chartSpace>
-</file>
-
-<file path=ppt/charts/chart3.xml><?xml version="1.0" encoding="utf-8"?>
-<c:chartSpace xmlns:c="http://schemas.openxmlformats.org/drawingml/2006/chart" xmlns:a="http://schemas.openxmlformats.org/drawingml/2006/main" xmlns:r="http://schemas.openxmlformats.org/officeDocument/2006/relationships">
-  <c:date1904 val="0"/>
-  <c:chart>
-    <c:autoTitleDeleted val="1"/>
-    <c:plotArea>
-      <c:barChart>
-        <c:barDir val="col"/>
-        <c:grouping val="clustered"/>
-        <c:ser>
-          <c:idx val="0"/>
-          <c:order val="0"/>
-          <c:tx>
-            <c:strRef>
-              <c:f>Sheet1!$B$1</c:f>
-              <c:strCache>
-                <c:ptCount val="1"/>
-                <c:pt idx="0">
-                  <c:v>Запросы</c:v>
-                </c:pt>
-              </c:strCache>
-            </c:strRef>
-          </c:tx>
-          <c:spPr>
-            <a:solidFill>
-              <a:srgbClr val="0077FF"/>
-            </a:solidFill>
-            <a:ln>
-              <a:solidFill>
-                <a:srgbClr val="0077FF"/>
-              </a:solidFill>
-            </a:ln>
-          </c:spPr>
-          <c:cat>
-            <c:strRef>
-              <c:f>Sheet1!$A$2:$A$3</c:f>
-              <c:strCache>
-                <c:ptCount val="2"/>
-                <c:pt idx="0">
-                  <c:v>Текущее</c:v>
-                </c:pt>
-                <c:pt idx="1">
-                  <c:v>Пилот</c:v>
-                </c:pt>
-              </c:strCache>
-            </c:strRef>
-          </c:cat>
-          <c:val>
-            <c:numRef>
-              <c:f>Sheet1!$B$2:$B$3</c:f>
-              <c:numCache>
-                <c:formatCode>General</c:formatCode>
-                <c:ptCount val="2"/>
-                <c:pt idx="0">
-                  <c:v>11.0</c:v>
-                </c:pt>
-                <c:pt idx="1">
-                  <c:v>38.0</c:v>
-                </c:pt>
-              </c:numCache>
-            </c:numRef>
-          </c:val>
-        </c:ser>
-        <c:dLbls>
-          <c:numFmt formatCode="0&quot; запросов&quot;" sourceLinked="0"/>
-          <c:txPr>
-            <a:bodyPr wrap="none"/>
-            <a:lstStyle/>
-            <a:p>
-              <a:pPr>
-                <a:defRPr sz="1100" b="0">
-                  <a:solidFill>
-                    <a:srgbClr val="000000"/>
-                  </a:solidFill>
-                  <a:latin typeface="Play"/>
-                  <a:ea typeface="Play"/>
-                  <a:cs typeface="Play"/>
-                </a:defRPr>
-              </a:pPr>
-            </a:p>
-          </c:txPr>
-          <c:dLblPos val="outEnd"/>
-          <c:showLegendKey val="0"/>
-          <c:showVal val="1"/>
-          <c:showCatName val="0"/>
-          <c:showSerName val="0"/>
-          <c:showPercent val="0"/>
-          <c:showBubbleSize val="0"/>
-          <c:showLeaderLines val="1"/>
-        </c:dLbls>
-        <c:gapWidth val="60"/>
-        <c:axId val="-2068027336"/>
-        <c:axId val="-2113994440"/>
-      </c:barChart>
-      <c:catAx>
-        <c:axId val="-2068027336"/>
-        <c:scaling>
-          <c:orientation val="minMax"/>
-        </c:scaling>
-        <c:delete val="0"/>
-        <c:axPos val="b"/>
-        <c:majorTickMark val="out"/>
-        <c:minorTickMark val="none"/>
-        <c:tickLblPos val="nextTo"/>
-        <c:txPr>
-          <a:bodyPr/>
-          <a:lstStyle/>
-          <a:p>
-            <a:pPr>
-              <a:defRPr sz="1100" b="0">
-                <a:solidFill>
-                  <a:srgbClr val="000000"/>
-                </a:solidFill>
-                <a:latin typeface="Play"/>
-                <a:ea typeface="Play"/>
-                <a:cs typeface="Play"/>
-              </a:defRPr>
-            </a:pPr>
-          </a:p>
-        </c:txPr>
-        <c:crossAx val="-2113994440"/>
-        <c:crosses val="autoZero"/>
-        <c:auto val="1"/>
-        <c:lblAlgn val="ctr"/>
-        <c:lblOffset val="100"/>
-        <c:noMultiLvlLbl val="0"/>
-      </c:catAx>
-      <c:valAx>
-        <c:axId val="-2113994440"/>
-        <c:scaling/>
-        <c:delete val="0"/>
-        <c:axPos val="l"/>
-        <c:majorGridlines>
-          <c:spPr>
-            <a:ln w="9525">
-              <a:solidFill>
-                <a:srgbClr val="D1D1D1"/>
-              </a:solidFill>
-            </a:ln>
-          </c:spPr>
-        </c:majorGridlines>
-        <c:title>
-          <c:tx>
-            <c:rich>
-              <a:bodyPr rot="0" vert="horz"/>
-              <a:lstStyle/>
-              <a:p>
-                <a:pPr>
-                  <a:defRPr sz="1100" b="0">
-                    <a:solidFill>
-                      <a:srgbClr val="000000"/>
-                    </a:solidFill>
-                    <a:latin typeface="Play"/>
-                    <a:ea typeface="Play"/>
-                    <a:cs typeface="Play"/>
-                  </a:defRPr>
-                </a:pPr>
-                <a:r>
-                  <a:t>Запросы, запросов</a:t>
-                </a:r>
-              </a:p>
-            </c:rich>
-          </c:tx>
-          <c:layout/>
-          <c:overlay val="0"/>
-        </c:title>
-        <c:majorTickMark val="out"/>
-        <c:minorTickMark val="none"/>
-        <c:tickLblPos val="nextTo"/>
-        <c:txPr>
-          <a:bodyPr/>
-          <a:lstStyle/>
-          <a:p>
-            <a:pPr>
-              <a:defRPr sz="1100" b="0">
-                <a:solidFill>
-                  <a:srgbClr val="000000"/>
-                </a:solidFill>
-                <a:latin typeface="Play"/>
-                <a:ea typeface="Play"/>
-                <a:cs typeface="Play"/>
-              </a:defRPr>
-            </a:pPr>
-          </a:p>
-        </c:txPr>
-        <c:crossAx val="-2068027336"/>
-        <c:crosses val="autoZero"/>
-      </c:valAx>
-    </c:plotArea>
-    <c:dispBlanksAs val="gap"/>
-  </c:chart>
-  <c:txPr>
-    <a:bodyPr/>
-    <a:lstStyle/>
-    <a:p>
-      <a:pPr>
-        <a:defRPr sz="1200" b="0">
-          <a:solidFill>
-            <a:srgbClr val="000000"/>
-          </a:solidFill>
-          <a:latin typeface="Play"/>
-          <a:ea typeface="Play"/>
-          <a:cs typeface="Play"/>
-        </a:defRPr>
-      </a:pPr>
-      <a:endParaRPr lang="en-US"/>
-    </a:p>
-  </c:txPr>
-  <c:externalData r:id="rId1">
-    <c:autoUpdate val="0"/>
-  </c:externalData>
-</c:chartSpace>
-</file>
-
-<file path=ppt/charts/chart4.xml><?xml version="1.0" encoding="utf-8"?>
-<c:chartSpace xmlns:c="http://schemas.openxmlformats.org/drawingml/2006/chart" xmlns:a="http://schemas.openxmlformats.org/drawingml/2006/main" xmlns:r="http://schemas.openxmlformats.org/officeDocument/2006/relationships">
-  <c:date1904 val="0"/>
-  <c:chart>
-    <c:autoTitleDeleted val="1"/>
-    <c:plotArea>
-      <c:barChart>
-        <c:barDir val="col"/>
-        <c:grouping val="clustered"/>
-        <c:ser>
-          <c:idx val="0"/>
-          <c:order val="0"/>
-          <c:tx>
-            <c:strRef>
-              <c:f>Sheet1!$B$1</c:f>
-              <c:strCache>
-                <c:ptCount val="1"/>
-                <c:pt idx="0">
-                  <c:v>Стоимость (руб)</c:v>
-                </c:pt>
-              </c:strCache>
-            </c:strRef>
-          </c:tx>
-          <c:spPr>
-            <a:solidFill>
-              <a:srgbClr val="0077FF"/>
-            </a:solidFill>
-            <a:ln>
-              <a:solidFill>
-                <a:srgbClr val="0077FF"/>
-              </a:solidFill>
-            </a:ln>
-          </c:spPr>
-          <c:cat>
-            <c:strRef>
-              <c:f>Sheet1!$A$2:$A$2</c:f>
-              <c:strCache>
-                <c:ptCount val="1"/>
-                <c:pt idx="0">
-                  <c:v>Пилот</c:v>
-                </c:pt>
-              </c:strCache>
-            </c:strRef>
-          </c:cat>
-          <c:val>
-            <c:numRef>
-              <c:f>Sheet1!$B$2:$B$2</c:f>
-              <c:numCache>
-                <c:formatCode>General</c:formatCode>
-                <c:ptCount val="1"/>
-                <c:pt idx="0">
-                  <c:v>1400.0</c:v>
-                </c:pt>
-              </c:numCache>
-            </c:numRef>
-          </c:val>
-        </c:ser>
-        <c:dLbls>
-          <c:numFmt formatCode="0&quot; руб&quot;" sourceLinked="0"/>
-          <c:txPr>
-            <a:bodyPr wrap="none"/>
-            <a:lstStyle/>
-            <a:p>
-              <a:pPr>
-                <a:defRPr sz="1100" b="0">
-                  <a:solidFill>
-                    <a:srgbClr val="000000"/>
-                  </a:solidFill>
-                  <a:latin typeface="Play"/>
-                  <a:ea typeface="Play"/>
-                  <a:cs typeface="Play"/>
-                </a:defRPr>
-              </a:pPr>
-            </a:p>
-          </c:txPr>
-          <c:dLblPos val="outEnd"/>
-          <c:showLegendKey val="0"/>
-          <c:showVal val="1"/>
-          <c:showCatName val="0"/>
-          <c:showSerName val="0"/>
-          <c:showPercent val="0"/>
-          <c:showBubbleSize val="0"/>
-          <c:showLeaderLines val="1"/>
-        </c:dLbls>
-        <c:gapWidth val="60"/>
-        <c:axId val="-2068027336"/>
-        <c:axId val="-2113994440"/>
-      </c:barChart>
-      <c:catAx>
-        <c:axId val="-2068027336"/>
-        <c:scaling>
-          <c:orientation val="minMax"/>
-        </c:scaling>
-        <c:delete val="0"/>
-        <c:axPos val="b"/>
-        <c:majorTickMark val="out"/>
-        <c:minorTickMark val="none"/>
-        <c:tickLblPos val="nextTo"/>
-        <c:txPr>
-          <a:bodyPr/>
-          <a:lstStyle/>
-          <a:p>
-            <a:pPr>
-              <a:defRPr sz="1100" b="0">
-                <a:solidFill>
-                  <a:srgbClr val="000000"/>
-                </a:solidFill>
-                <a:latin typeface="Play"/>
-                <a:ea typeface="Play"/>
-                <a:cs typeface="Play"/>
-              </a:defRPr>
-            </a:pPr>
-          </a:p>
-        </c:txPr>
-        <c:crossAx val="-2113994440"/>
-        <c:crosses val="autoZero"/>
-        <c:auto val="1"/>
-        <c:lblAlgn val="ctr"/>
-        <c:lblOffset val="100"/>
-        <c:noMultiLvlLbl val="0"/>
-      </c:catAx>
-      <c:valAx>
-        <c:axId val="-2113994440"/>
-        <c:scaling/>
-        <c:delete val="0"/>
-        <c:axPos val="l"/>
-        <c:majorGridlines>
-          <c:spPr>
-            <a:ln w="9525">
-              <a:solidFill>
-                <a:srgbClr val="D1D1D1"/>
-              </a:solidFill>
-            </a:ln>
-          </c:spPr>
-        </c:majorGridlines>
-        <c:title>
-          <c:tx>
-            <c:rich>
-              <a:bodyPr rot="0" vert="horz"/>
-              <a:lstStyle/>
-              <a:p>
-                <a:pPr>
-                  <a:defRPr sz="1100" b="0">
-                    <a:solidFill>
-                      <a:srgbClr val="000000"/>
-                    </a:solidFill>
-                    <a:latin typeface="Play"/>
-                    <a:ea typeface="Play"/>
-                    <a:cs typeface="Play"/>
-                  </a:defRPr>
-                </a:pPr>
-                <a:r>
-                  <a:t>Стоимость (руб), руб</a:t>
-                </a:r>
-              </a:p>
-            </c:rich>
-          </c:tx>
-          <c:layout/>
-          <c:overlay val="0"/>
-        </c:title>
-        <c:majorTickMark val="out"/>
-        <c:minorTickMark val="none"/>
-        <c:tickLblPos val="nextTo"/>
-        <c:txPr>
-          <a:bodyPr/>
-          <a:lstStyle/>
-          <a:p>
-            <a:pPr>
-              <a:defRPr sz="1100" b="0">
-                <a:solidFill>
-                  <a:srgbClr val="000000"/>
-                </a:solidFill>
-                <a:latin typeface="Play"/>
-                <a:ea typeface="Play"/>
-                <a:cs typeface="Play"/>
-              </a:defRPr>
-            </a:pPr>
-          </a:p>
-        </c:txPr>
-        <c:crossAx val="-2068027336"/>
-        <c:crosses val="autoZero"/>
-      </c:valAx>
-    </c:plotArea>
+    <c:legend>
+      <c:legendPos val="b"/>
+      <c:overlay val="0"/>
+    </c:legend>
     <c:dispBlanksAs val="gap"/>
   </c:chart>
   <c:txPr>
@@ -6148,7 +5569,7 @@
                 <a:ea typeface="Play"/>
                 <a:cs typeface="Play"/>
               </a:rPr>
-              <a:t>Защита инициативы: сервис автоматической вёрстки презентаций</a:t>
+              <a:t>Автоматическая вёрстка презентаций: пилот и масштаб</a:t>
             </a:r>
           </a:p>
         </p:txBody>
@@ -6391,130 +5812,7 @@
       </p:pic>
       <p:sp>
         <p:nvSpPr>
-          <p:cNvPr id="2395" name="Google Shape;2395;p88"/>
-          <p:cNvSpPr/>
-          <p:nvPr/>
-        </p:nvSpPr>
-        <p:spPr>
-          <a:xfrm>
-            <a:off x="319086" y="3000319"/>
-            <a:ext cx="1690679" cy="1128566"/>
-          </a:xfrm>
-          <a:prstGeom prst="rect">
-            <a:avLst/>
-          </a:prstGeom>
-          <a:noFill/>
-          <a:ln>
-            <a:noFill/>
-          </a:ln>
-        </p:spPr>
-        <p:txBody>
-          <a:bodyPr anchorCtr="0" anchor="ctr" bIns="91425" lIns="91425" spcFirstLastPara="1" rIns="91425" wrap="square" tIns="91425">
-            <a:noAutofit/>
-          </a:bodyPr>
-          <a:lstStyle/>
-          <a:p>
-            <a:pPr indent="0" lvl="0" marL="0" rtl="0" algn="l">
-              <a:spcBef>
-                <a:spcPts val="0"/>
-              </a:spcBef>
-              <a:spcAft>
-                <a:spcPts val="0"/>
-              </a:spcAft>
-              <a:buNone/>
-            </a:pPr>
-            <a:r>
-              <a:t/>
-            </a:r>
-            <a:endParaRPr/>
-          </a:p>
-        </p:txBody>
-      </p:sp>
-      <p:sp>
-        <p:nvSpPr>
-          <p:cNvPr id="2397" name="Google Shape;2397;p88"/>
-          <p:cNvSpPr/>
-          <p:nvPr/>
-        </p:nvSpPr>
-        <p:spPr>
-          <a:xfrm>
-            <a:off x="2600312" y="3000319"/>
-            <a:ext cx="1690679" cy="1128566"/>
-          </a:xfrm>
-          <a:prstGeom prst="rect">
-            <a:avLst/>
-          </a:prstGeom>
-          <a:noFill/>
-          <a:ln>
-            <a:noFill/>
-          </a:ln>
-        </p:spPr>
-        <p:txBody>
-          <a:bodyPr anchorCtr="0" anchor="ctr" bIns="91425" lIns="91425" spcFirstLastPara="1" rIns="91425" wrap="square" tIns="91425">
-            <a:noAutofit/>
-          </a:bodyPr>
-          <a:lstStyle/>
-          <a:p>
-            <a:pPr indent="0" lvl="0" marL="0" rtl="0" algn="l">
-              <a:spcBef>
-                <a:spcPts val="0"/>
-              </a:spcBef>
-              <a:spcAft>
-                <a:spcPts val="0"/>
-              </a:spcAft>
-              <a:buNone/>
-            </a:pPr>
-            <a:r>
-              <a:t/>
-            </a:r>
-            <a:endParaRPr/>
-          </a:p>
-        </p:txBody>
-      </p:sp>
-      <p:sp>
-        <p:nvSpPr>
-          <p:cNvPr id="2399" name="Google Shape;2399;p88"/>
-          <p:cNvSpPr/>
-          <p:nvPr/>
-        </p:nvSpPr>
-        <p:spPr>
-          <a:xfrm>
-            <a:off x="4881537" y="3000319"/>
-            <a:ext cx="1690679" cy="1128566"/>
-          </a:xfrm>
-          <a:prstGeom prst="rect">
-            <a:avLst/>
-          </a:prstGeom>
-          <a:noFill/>
-          <a:ln>
-            <a:noFill/>
-          </a:ln>
-        </p:spPr>
-        <p:txBody>
-          <a:bodyPr anchorCtr="0" anchor="ctr" bIns="91425" lIns="91425" spcFirstLastPara="1" rIns="91425" wrap="square" tIns="91425">
-            <a:noAutofit/>
-          </a:bodyPr>
-          <a:lstStyle/>
-          <a:p>
-            <a:pPr indent="0" lvl="0" marL="0" rtl="0" algn="l">
-              <a:spcBef>
-                <a:spcPts val="0"/>
-              </a:spcBef>
-              <a:spcAft>
-                <a:spcPts val="0"/>
-              </a:spcAft>
-              <a:buNone/>
-            </a:pPr>
-            <a:r>
-              <a:t/>
-            </a:r>
-            <a:endParaRPr/>
-          </a:p>
-        </p:txBody>
-      </p:sp>
-      <p:sp>
-        <p:nvSpPr>
-          <p:cNvPr id="2400" name="title"/>
+          <p:cNvPr id="2395" name="title"/>
           <p:cNvSpPr txBox="1"/>
           <p:nvPr/>
         </p:nvSpPr>
@@ -6556,21 +5854,21 @@
                 <a:ea typeface="Play"/>
                 <a:cs typeface="Play"/>
               </a:rPr>
-              <a:t>Текущие трудности в создании презентаций</a:t>
+              <a:t>Текущие трудности в сборке презентаций</a:t>
             </a:r>
           </a:p>
         </p:txBody>
       </p:sp>
       <p:sp>
         <p:nvSpPr>
-          <p:cNvPr id="2401" name="body"/>
+          <p:cNvPr id="2396" name="body"/>
           <p:cNvSpPr txBox="1"/>
           <p:nvPr/>
         </p:nvSpPr>
         <p:spPr>
           <a:xfrm>
             <a:off x="274320" y="2086975"/>
-            <a:ext cx="8344814" cy="1257300"/>
+            <a:ext cx="8344814" cy="1422400"/>
           </a:xfrm>
           <a:prstGeom prst="rect">
             <a:avLst/>
@@ -6587,7 +5885,7 @@
               <a:spcAft>
                 <a:spcPts val="300"/>
               </a:spcAft>
-              <a:defRPr sz="1400">
+              <a:defRPr sz="1600">
                 <a:solidFill>
                   <a:srgbClr val="000000"/>
                 </a:solidFill>
@@ -6597,7 +5895,7 @@
               </a:defRPr>
             </a:pPr>
             <a:r>
-              <a:rPr sz="1400">
+              <a:rPr sz="1600">
                 <a:solidFill>
                   <a:srgbClr val="000000"/>
                 </a:solidFill>
@@ -6605,7 +5903,7 @@
                 <a:ea typeface="Play"/>
                 <a:cs typeface="Play"/>
               </a:rPr>
-              <a:t>• 42 колоды за квартал, 12 слайдов каждая, 186 минут сборки</a:t>
+              <a:t>• 42 колоды, 186 мин на одну 12-слайдовую презентацию</a:t>
             </a:r>
           </a:p>
           <a:p>
@@ -6613,7 +5911,7 @@
               <a:spcAft>
                 <a:spcPts val="300"/>
               </a:spcAft>
-              <a:defRPr sz="1400">
+              <a:defRPr sz="1600">
                 <a:solidFill>
                   <a:srgbClr val="000000"/>
                 </a:solidFill>
@@ -6623,7 +5921,7 @@
               </a:defRPr>
             </a:pPr>
             <a:r>
-              <a:rPr sz="1400">
+              <a:rPr sz="1600">
                 <a:solidFill>
                   <a:srgbClr val="000000"/>
                 </a:solidFill>
@@ -6631,7 +5929,7 @@
                 <a:ea typeface="Play"/>
                 <a:cs typeface="Play"/>
               </a:rPr>
-              <a:t>• 74 минуты на правки после ревью дизайнера</a:t>
+              <a:t>• 74 мин на правки после ревью</a:t>
             </a:r>
           </a:p>
           <a:p>
@@ -6639,7 +5937,7 @@
               <a:spcAft>
                 <a:spcPts val="300"/>
               </a:spcAft>
-              <a:defRPr sz="1400">
+              <a:defRPr sz="1600">
                 <a:solidFill>
                   <a:srgbClr val="000000"/>
                 </a:solidFill>
@@ -6649,7 +5947,7 @@
               </a:defRPr>
             </a:pPr>
             <a:r>
-              <a:rPr sz="1400">
+              <a:rPr sz="1600">
                 <a:solidFill>
                   <a:srgbClr val="000000"/>
                 </a:solidFill>
@@ -6657,7 +5955,7 @@
                 <a:ea typeface="Play"/>
                 <a:cs typeface="Play"/>
               </a:rPr>
-              <a:t>• 19 из 42 колод нарушили фирменный стиль</a:t>
+              <a:t>• 19 колод нарушили фирменный стиль</a:t>
             </a:r>
           </a:p>
           <a:p>
@@ -6665,7 +5963,7 @@
               <a:spcAft>
                 <a:spcPts val="300"/>
               </a:spcAft>
-              <a:defRPr sz="1400">
+              <a:defRPr sz="1600">
                 <a:solidFill>
                   <a:srgbClr val="000000"/>
                 </a:solidFill>
@@ -6675,7 +5973,7 @@
               </a:defRPr>
             </a:pPr>
             <a:r>
-              <a:rPr sz="1400">
+              <a:rPr sz="1600">
                 <a:solidFill>
                   <a:srgbClr val="000000"/>
                 </a:solidFill>
@@ -6683,7 +5981,7 @@
                 <a:ea typeface="Play"/>
                 <a:cs typeface="Play"/>
               </a:rPr>
-              <a:t>• Дизайнеры 4 человека закрывают 11 запросов/неделю из 27</a:t>
+              <a:t>• Дизайн-отдел закрывает 11 запросов/неделю из 27</a:t>
             </a:r>
           </a:p>
           <a:p>
@@ -6691,7 +5989,7 @@
               <a:spcAft>
                 <a:spcPts val="300"/>
               </a:spcAft>
-              <a:defRPr sz="1400">
+              <a:defRPr sz="1600">
                 <a:solidFill>
                   <a:srgbClr val="000000"/>
                 </a:solidFill>
@@ -6701,7 +5999,7 @@
               </a:defRPr>
             </a:pPr>
             <a:r>
-              <a:rPr sz="1400">
+              <a:rPr sz="1600">
                 <a:solidFill>
                   <a:srgbClr val="000000"/>
                 </a:solidFill>
@@ -7423,7 +6721,7 @@
                 <a:ea typeface="Play"/>
                 <a:cs typeface="Play"/>
               </a:rPr>
-              <a:t>Возможность ускорить и стандартизировать процесс</a:t>
+              <a:t>Предлагаемый сервис автоматической вёрстки</a:t>
             </a:r>
           </a:p>
         </p:txBody>
@@ -7454,7 +6752,7 @@
               <a:spcAft>
                 <a:spcPts val="300"/>
               </a:spcAft>
-              <a:defRPr sz="1800" b="0">
+              <a:defRPr sz="1600" b="0">
                 <a:solidFill>
                   <a:srgbClr val="000000"/>
                 </a:solidFill>
@@ -7464,7 +6762,7 @@
               </a:defRPr>
             </a:pPr>
             <a:r>
-              <a:rPr sz="1800" b="0">
+              <a:rPr sz="1600" b="0">
                 <a:solidFill>
                   <a:srgbClr val="000000"/>
                 </a:solidFill>
@@ -7472,7 +6770,7 @@
                 <a:ea typeface="Play"/>
                 <a:cs typeface="Play"/>
               </a:rPr>
-              <a:t>Сократить время сборки до 4 минут</a:t>
+              <a:t>Принимает шаблон pptx и материалы, автоматически строит дизайн-систему</a:t>
             </a:r>
           </a:p>
         </p:txBody>
@@ -7503,7 +6801,7 @@
               <a:spcAft>
                 <a:spcPts val="300"/>
               </a:spcAft>
-              <a:defRPr sz="1800" b="0">
+              <a:defRPr sz="1600" b="0">
                 <a:solidFill>
                   <a:srgbClr val="000000"/>
                 </a:solidFill>
@@ -7513,7 +6811,7 @@
               </a:defRPr>
             </a:pPr>
             <a:r>
-              <a:rPr sz="1800" b="0">
+              <a:rPr sz="1600" b="0">
                 <a:solidFill>
                   <a:srgbClr val="000000"/>
                 </a:solidFill>
@@ -7521,7 +6819,7 @@
                 <a:ea typeface="Play"/>
                 <a:cs typeface="Play"/>
               </a:rPr>
-              <a:t>Снизить время до первой версии с 6 дней до 1 дня</a:t>
+              <a:t>Генерирует план колоды и вёрстку по ролям страниц</a:t>
             </a:r>
           </a:p>
         </p:txBody>
@@ -7552,7 +6850,7 @@
               <a:spcAft>
                 <a:spcPts val="300"/>
               </a:spcAft>
-              <a:defRPr sz="1800" b="0">
+              <a:defRPr sz="1600" b="0">
                 <a:solidFill>
                   <a:srgbClr val="000000"/>
                 </a:solidFill>
@@ -7562,7 +6860,7 @@
               </a:defRPr>
             </a:pPr>
             <a:r>
-              <a:rPr sz="1800" b="0">
+              <a:rPr sz="1600" b="0">
                 <a:solidFill>
                   <a:srgbClr val="000000"/>
                 </a:solidFill>
@@ -7570,7 +6868,7 @@
                 <a:ea typeface="Play"/>
                 <a:cs typeface="Play"/>
               </a:rPr>
-              <a:t>Снизить нарушения фирменного стиля до 3 %</a:t>
+              <a:t>Аудит качества проверяет стиль и данные до выдачи</a:t>
             </a:r>
           </a:p>
         </p:txBody>
@@ -7601,7 +6899,7 @@
               <a:spcAft>
                 <a:spcPts val="300"/>
               </a:spcAft>
-              <a:defRPr sz="1800" b="0">
+              <a:defRPr sz="1600" b="0">
                 <a:solidFill>
                   <a:srgbClr val="000000"/>
                 </a:solidFill>
@@ -7611,7 +6909,7 @@
               </a:defRPr>
             </a:pPr>
             <a:r>
-              <a:rPr sz="1800" b="0">
+              <a:rPr sz="1600" b="0">
                 <a:solidFill>
                   <a:srgbClr val="000000"/>
                 </a:solidFill>
@@ -7619,7 +6917,7 @@
                 <a:ea typeface="Play"/>
                 <a:cs typeface="Play"/>
               </a:rPr>
-              <a:t>Освободить дизайнеров от рутинных задач</a:t>
+              <a:t>Экспорт в pptx, pdf, html, слайды остаются редактируемыми</a:t>
             </a:r>
           </a:p>
         </p:txBody>
@@ -7685,14 +6983,14 @@
       </p:sp>
       <p:sp>
         <p:nvSpPr>
-          <p:cNvPr id="533" name="Google Shape;533;p53"/>
+          <p:cNvPr id="553" name="Google Shape;553;p53"/>
           <p:cNvSpPr/>
           <p:nvPr/>
         </p:nvSpPr>
         <p:spPr>
           <a:xfrm>
-            <a:off x="303214" y="1022533"/>
-            <a:ext cx="1395256" cy="1433588"/>
+            <a:off x="276488" y="2955549"/>
+            <a:ext cx="8451939" cy="1433588"/>
           </a:xfrm>
           <a:prstGeom prst="rect">
             <a:avLst/>
@@ -7726,14 +7024,14 @@
       </p:sp>
       <p:sp>
         <p:nvSpPr>
-          <p:cNvPr id="537" name="Google Shape;537;p53"/>
+          <p:cNvPr id="554" name="Google Shape;554;p53"/>
           <p:cNvSpPr/>
           <p:nvPr/>
         </p:nvSpPr>
         <p:spPr>
           <a:xfrm>
-            <a:off x="2067385" y="1022533"/>
-            <a:ext cx="1395256" cy="1433588"/>
+            <a:off x="303214" y="2797849"/>
+            <a:ext cx="8451939" cy="1433588"/>
           </a:xfrm>
           <a:prstGeom prst="rect">
             <a:avLst/>
@@ -7767,417 +7065,7 @@
       </p:sp>
       <p:sp>
         <p:nvSpPr>
-          <p:cNvPr id="541" name="Google Shape;541;p53"/>
-          <p:cNvSpPr/>
-          <p:nvPr/>
-        </p:nvSpPr>
-        <p:spPr>
-          <a:xfrm>
-            <a:off x="3831556" y="1022533"/>
-            <a:ext cx="1395256" cy="1433588"/>
-          </a:xfrm>
-          <a:prstGeom prst="rect">
-            <a:avLst/>
-          </a:prstGeom>
-          <a:noFill/>
-          <a:ln>
-            <a:noFill/>
-          </a:ln>
-        </p:spPr>
-        <p:txBody>
-          <a:bodyPr anchorCtr="0" anchor="ctr" bIns="91425" lIns="91425" spcFirstLastPara="1" rIns="91425" wrap="square" tIns="91425">
-            <a:noAutofit/>
-          </a:bodyPr>
-          <a:lstStyle/>
-          <a:p>
-            <a:pPr indent="0" lvl="0" marL="0" rtl="0" algn="l">
-              <a:spcBef>
-                <a:spcPts val="0"/>
-              </a:spcBef>
-              <a:spcAft>
-                <a:spcPts val="0"/>
-              </a:spcAft>
-              <a:buNone/>
-            </a:pPr>
-            <a:r>
-              <a:t/>
-            </a:r>
-            <a:endParaRPr/>
-          </a:p>
-        </p:txBody>
-      </p:sp>
-      <p:sp>
-        <p:nvSpPr>
-          <p:cNvPr id="545" name="Google Shape;545;p53"/>
-          <p:cNvSpPr/>
-          <p:nvPr/>
-        </p:nvSpPr>
-        <p:spPr>
-          <a:xfrm>
-            <a:off x="5595727" y="1022533"/>
-            <a:ext cx="1395256" cy="1433588"/>
-          </a:xfrm>
-          <a:prstGeom prst="rect">
-            <a:avLst/>
-          </a:prstGeom>
-          <a:noFill/>
-          <a:ln>
-            <a:noFill/>
-          </a:ln>
-        </p:spPr>
-        <p:txBody>
-          <a:bodyPr anchorCtr="0" anchor="ctr" bIns="91425" lIns="91425" spcFirstLastPara="1" rIns="91425" wrap="square" tIns="91425">
-            <a:noAutofit/>
-          </a:bodyPr>
-          <a:lstStyle/>
-          <a:p>
-            <a:pPr indent="0" lvl="0" marL="0" rtl="0" algn="l">
-              <a:spcBef>
-                <a:spcPts val="0"/>
-              </a:spcBef>
-              <a:spcAft>
-                <a:spcPts val="0"/>
-              </a:spcAft>
-              <a:buNone/>
-            </a:pPr>
-            <a:r>
-              <a:t/>
-            </a:r>
-            <a:endParaRPr/>
-          </a:p>
-        </p:txBody>
-      </p:sp>
-      <p:sp>
-        <p:nvSpPr>
-          <p:cNvPr id="549" name="Google Shape;549;p53"/>
-          <p:cNvSpPr/>
-          <p:nvPr/>
-        </p:nvSpPr>
-        <p:spPr>
-          <a:xfrm>
-            <a:off x="7359897" y="1022533"/>
-            <a:ext cx="1395256" cy="1433588"/>
-          </a:xfrm>
-          <a:prstGeom prst="rect">
-            <a:avLst/>
-          </a:prstGeom>
-          <a:noFill/>
-          <a:ln>
-            <a:noFill/>
-          </a:ln>
-        </p:spPr>
-        <p:txBody>
-          <a:bodyPr anchorCtr="0" anchor="ctr" bIns="91425" lIns="91425" spcFirstLastPara="1" rIns="91425" wrap="square" tIns="91425">
-            <a:noAutofit/>
-          </a:bodyPr>
-          <a:lstStyle/>
-          <a:p>
-            <a:pPr indent="0" lvl="0" marL="0" rtl="0" algn="l">
-              <a:spcBef>
-                <a:spcPts val="0"/>
-              </a:spcBef>
-              <a:spcAft>
-                <a:spcPts val="0"/>
-              </a:spcAft>
-              <a:buNone/>
-            </a:pPr>
-            <a:r>
-              <a:t/>
-            </a:r>
-            <a:endParaRPr/>
-          </a:p>
-        </p:txBody>
-      </p:sp>
-      <p:sp>
-        <p:nvSpPr>
-          <p:cNvPr id="553" name="Google Shape;553;p53"/>
-          <p:cNvSpPr/>
-          <p:nvPr/>
-        </p:nvSpPr>
-        <p:spPr>
-          <a:xfrm>
-            <a:off x="276488" y="2955549"/>
-            <a:ext cx="8451939" cy="1433588"/>
-          </a:xfrm>
-          <a:prstGeom prst="rect">
-            <a:avLst/>
-          </a:prstGeom>
-          <a:noFill/>
-          <a:ln>
-            <a:noFill/>
-          </a:ln>
-        </p:spPr>
-        <p:txBody>
-          <a:bodyPr anchorCtr="0" anchor="ctr" bIns="91425" lIns="91425" spcFirstLastPara="1" rIns="91425" wrap="square" tIns="91425">
-            <a:noAutofit/>
-          </a:bodyPr>
-          <a:lstStyle/>
-          <a:p>
-            <a:pPr indent="0" lvl="0" marL="0" rtl="0" algn="l">
-              <a:spcBef>
-                <a:spcPts val="0"/>
-              </a:spcBef>
-              <a:spcAft>
-                <a:spcPts val="0"/>
-              </a:spcAft>
-              <a:buNone/>
-            </a:pPr>
-            <a:r>
-              <a:t/>
-            </a:r>
-            <a:endParaRPr/>
-          </a:p>
-        </p:txBody>
-      </p:sp>
-      <p:sp>
-        <p:nvSpPr>
-          <p:cNvPr id="554" name="Google Shape;554;p53"/>
-          <p:cNvSpPr/>
-          <p:nvPr/>
-        </p:nvSpPr>
-        <p:spPr>
-          <a:xfrm>
-            <a:off x="303214" y="2797849"/>
-            <a:ext cx="8451939" cy="1433588"/>
-          </a:xfrm>
-          <a:prstGeom prst="rect">
-            <a:avLst/>
-          </a:prstGeom>
-          <a:noFill/>
-          <a:ln>
-            <a:noFill/>
-          </a:ln>
-        </p:spPr>
-        <p:txBody>
-          <a:bodyPr anchorCtr="0" anchor="ctr" bIns="91425" lIns="91425" spcFirstLastPara="1" rIns="91425" wrap="square" tIns="91425">
-            <a:noAutofit/>
-          </a:bodyPr>
-          <a:lstStyle/>
-          <a:p>
-            <a:pPr indent="0" lvl="0" marL="0" rtl="0" algn="l">
-              <a:spcBef>
-                <a:spcPts val="0"/>
-              </a:spcBef>
-              <a:spcAft>
-                <a:spcPts val="0"/>
-              </a:spcAft>
-              <a:buNone/>
-            </a:pPr>
-            <a:r>
-              <a:t/>
-            </a:r>
-            <a:endParaRPr/>
-          </a:p>
-        </p:txBody>
-      </p:sp>
-      <p:sp>
-        <p:nvSpPr>
-          <p:cNvPr id="555" name="Google Shape;555;p53"/>
-          <p:cNvSpPr/>
-          <p:nvPr/>
-        </p:nvSpPr>
-        <p:spPr>
-          <a:xfrm>
-            <a:off x="303214" y="2797849"/>
-            <a:ext cx="1395256" cy="1433588"/>
-          </a:xfrm>
-          <a:prstGeom prst="rect">
-            <a:avLst/>
-          </a:prstGeom>
-          <a:noFill/>
-          <a:ln>
-            <a:noFill/>
-          </a:ln>
-        </p:spPr>
-        <p:txBody>
-          <a:bodyPr anchorCtr="0" anchor="ctr" bIns="91425" lIns="91425" spcFirstLastPara="1" rIns="91425" wrap="square" tIns="91425">
-            <a:noAutofit/>
-          </a:bodyPr>
-          <a:lstStyle/>
-          <a:p>
-            <a:pPr indent="0" lvl="0" marL="0" rtl="0" algn="l">
-              <a:spcBef>
-                <a:spcPts val="0"/>
-              </a:spcBef>
-              <a:spcAft>
-                <a:spcPts val="0"/>
-              </a:spcAft>
-              <a:buNone/>
-            </a:pPr>
-            <a:r>
-              <a:t/>
-            </a:r>
-            <a:endParaRPr/>
-          </a:p>
-        </p:txBody>
-      </p:sp>
-      <p:sp>
-        <p:nvSpPr>
-          <p:cNvPr id="559" name="Google Shape;559;p53"/>
-          <p:cNvSpPr/>
-          <p:nvPr/>
-        </p:nvSpPr>
-        <p:spPr>
-          <a:xfrm>
-            <a:off x="2067385" y="2797849"/>
-            <a:ext cx="1395256" cy="1433588"/>
-          </a:xfrm>
-          <a:prstGeom prst="rect">
-            <a:avLst/>
-          </a:prstGeom>
-          <a:noFill/>
-          <a:ln>
-            <a:noFill/>
-          </a:ln>
-        </p:spPr>
-        <p:txBody>
-          <a:bodyPr anchorCtr="0" anchor="ctr" bIns="91425" lIns="91425" spcFirstLastPara="1" rIns="91425" wrap="square" tIns="91425">
-            <a:noAutofit/>
-          </a:bodyPr>
-          <a:lstStyle/>
-          <a:p>
-            <a:pPr indent="0" lvl="0" marL="0" rtl="0" algn="l">
-              <a:spcBef>
-                <a:spcPts val="0"/>
-              </a:spcBef>
-              <a:spcAft>
-                <a:spcPts val="0"/>
-              </a:spcAft>
-              <a:buNone/>
-            </a:pPr>
-            <a:r>
-              <a:t/>
-            </a:r>
-            <a:endParaRPr/>
-          </a:p>
-        </p:txBody>
-      </p:sp>
-      <p:sp>
-        <p:nvSpPr>
-          <p:cNvPr id="563" name="Google Shape;563;p53"/>
-          <p:cNvSpPr/>
-          <p:nvPr/>
-        </p:nvSpPr>
-        <p:spPr>
-          <a:xfrm>
-            <a:off x="3831556" y="2797849"/>
-            <a:ext cx="1395256" cy="1433588"/>
-          </a:xfrm>
-          <a:prstGeom prst="rect">
-            <a:avLst/>
-          </a:prstGeom>
-          <a:noFill/>
-          <a:ln>
-            <a:noFill/>
-          </a:ln>
-        </p:spPr>
-        <p:txBody>
-          <a:bodyPr anchorCtr="0" anchor="ctr" bIns="91425" lIns="91425" spcFirstLastPara="1" rIns="91425" wrap="square" tIns="91425">
-            <a:noAutofit/>
-          </a:bodyPr>
-          <a:lstStyle/>
-          <a:p>
-            <a:pPr indent="0" lvl="0" marL="0" rtl="0" algn="l">
-              <a:spcBef>
-                <a:spcPts val="0"/>
-              </a:spcBef>
-              <a:spcAft>
-                <a:spcPts val="0"/>
-              </a:spcAft>
-              <a:buNone/>
-            </a:pPr>
-            <a:r>
-              <a:t/>
-            </a:r>
-            <a:endParaRPr/>
-          </a:p>
-        </p:txBody>
-      </p:sp>
-      <p:sp>
-        <p:nvSpPr>
-          <p:cNvPr id="567" name="Google Shape;567;p53"/>
-          <p:cNvSpPr/>
-          <p:nvPr/>
-        </p:nvSpPr>
-        <p:spPr>
-          <a:xfrm>
-            <a:off x="5595727" y="2797849"/>
-            <a:ext cx="1395256" cy="1433588"/>
-          </a:xfrm>
-          <a:prstGeom prst="rect">
-            <a:avLst/>
-          </a:prstGeom>
-          <a:noFill/>
-          <a:ln>
-            <a:noFill/>
-          </a:ln>
-        </p:spPr>
-        <p:txBody>
-          <a:bodyPr anchorCtr="0" anchor="ctr" bIns="91425" lIns="91425" spcFirstLastPara="1" rIns="91425" wrap="square" tIns="91425">
-            <a:noAutofit/>
-          </a:bodyPr>
-          <a:lstStyle/>
-          <a:p>
-            <a:pPr indent="0" lvl="0" marL="0" rtl="0" algn="l">
-              <a:spcBef>
-                <a:spcPts val="0"/>
-              </a:spcBef>
-              <a:spcAft>
-                <a:spcPts val="0"/>
-              </a:spcAft>
-              <a:buNone/>
-            </a:pPr>
-            <a:r>
-              <a:t/>
-            </a:r>
-            <a:endParaRPr/>
-          </a:p>
-        </p:txBody>
-      </p:sp>
-      <p:sp>
-        <p:nvSpPr>
-          <p:cNvPr id="571" name="Google Shape;571;p53"/>
-          <p:cNvSpPr/>
-          <p:nvPr/>
-        </p:nvSpPr>
-        <p:spPr>
-          <a:xfrm>
-            <a:off x="7359897" y="2797849"/>
-            <a:ext cx="1395256" cy="1433588"/>
-          </a:xfrm>
-          <a:prstGeom prst="rect">
-            <a:avLst/>
-          </a:prstGeom>
-          <a:noFill/>
-          <a:ln>
-            <a:noFill/>
-          </a:ln>
-        </p:spPr>
-        <p:txBody>
-          <a:bodyPr anchorCtr="0" anchor="ctr" bIns="91425" lIns="91425" spcFirstLastPara="1" rIns="91425" wrap="square" tIns="91425">
-            <a:noAutofit/>
-          </a:bodyPr>
-          <a:lstStyle/>
-          <a:p>
-            <a:pPr indent="0" lvl="0" marL="0" rtl="0" algn="l">
-              <a:spcBef>
-                <a:spcPts val="0"/>
-              </a:spcBef>
-              <a:spcAft>
-                <a:spcPts val="0"/>
-              </a:spcAft>
-              <a:buNone/>
-            </a:pPr>
-            <a:r>
-              <a:t/>
-            </a:r>
-            <a:endParaRPr/>
-          </a:p>
-        </p:txBody>
-      </p:sp>
-      <p:sp>
-        <p:nvSpPr>
-          <p:cNvPr id="572" name="title"/>
+          <p:cNvPr id="555" name="title"/>
           <p:cNvSpPr txBox="1"/>
           <p:nvPr/>
         </p:nvSpPr>
@@ -8219,138 +7107,29 @@
                 <a:ea typeface="Play"/>
                 <a:cs typeface="Play"/>
               </a:rPr>
-              <a:t>Как работает сервис</a:t>
+              <a:t>Результаты пилота за 6 недель</a:t>
             </a:r>
           </a:p>
         </p:txBody>
       </p:sp>
-      <p:sp>
-        <p:nvSpPr>
-          <p:cNvPr id="573" name="body"/>
-          <p:cNvSpPr txBox="1"/>
-          <p:nvPr/>
-        </p:nvSpPr>
-        <p:spPr>
-          <a:xfrm>
-            <a:off x="274320" y="1935028"/>
-            <a:ext cx="8344814" cy="1290320"/>
-          </a:xfrm>
-          <a:prstGeom prst="rect">
-            <a:avLst/>
-          </a:prstGeom>
-          <a:noFill/>
-        </p:spPr>
-        <p:txBody>
-          <a:bodyPr wrap="square" lIns="76200" rIns="76200" tIns="50800" bIns="50800">
-            <a:spAutoFit/>
-          </a:bodyPr>
-          <a:lstStyle/>
-          <a:p>
-            <a:pPr algn="l">
-              <a:spcAft>
-                <a:spcPts val="300"/>
-              </a:spcAft>
-              <a:defRPr sz="1800">
-                <a:solidFill>
-                  <a:srgbClr val="000000"/>
-                </a:solidFill>
-                <a:latin typeface="Play"/>
-                <a:ea typeface="Play"/>
-                <a:cs typeface="Play"/>
-              </a:defRPr>
-            </a:pPr>
-            <a:r>
-              <a:rPr sz="1800">
-                <a:solidFill>
-                  <a:srgbClr val="000000"/>
-                </a:solidFill>
-                <a:latin typeface="Play"/>
-                <a:ea typeface="Play"/>
-                <a:cs typeface="Play"/>
-              </a:rPr>
-              <a:t>• Принимает шаблон pptx и материалы</a:t>
-            </a:r>
-          </a:p>
-          <a:p>
-            <a:pPr algn="l">
-              <a:spcAft>
-                <a:spcPts val="300"/>
-              </a:spcAft>
-              <a:defRPr sz="1800">
-                <a:solidFill>
-                  <a:srgbClr val="000000"/>
-                </a:solidFill>
-                <a:latin typeface="Play"/>
-                <a:ea typeface="Play"/>
-                <a:cs typeface="Play"/>
-              </a:defRPr>
-            </a:pPr>
-            <a:r>
-              <a:rPr sz="1800">
-                <a:solidFill>
-                  <a:srgbClr val="000000"/>
-                </a:solidFill>
-                <a:latin typeface="Play"/>
-                <a:ea typeface="Play"/>
-                <a:cs typeface="Play"/>
-              </a:rPr>
-              <a:t>• Автоматически формирует план колоды по дизайн-системе</a:t>
-            </a:r>
-          </a:p>
-          <a:p>
-            <a:pPr algn="l">
-              <a:spcAft>
-                <a:spcPts val="300"/>
-              </a:spcAft>
-              <a:defRPr sz="1800">
-                <a:solidFill>
-                  <a:srgbClr val="000000"/>
-                </a:solidFill>
-                <a:latin typeface="Play"/>
-                <a:ea typeface="Play"/>
-                <a:cs typeface="Play"/>
-              </a:defRPr>
-            </a:pPr>
-            <a:r>
-              <a:rPr sz="1800">
-                <a:solidFill>
-                  <a:srgbClr val="000000"/>
-                </a:solidFill>
-                <a:latin typeface="Play"/>
-                <a:ea typeface="Play"/>
-                <a:cs typeface="Play"/>
-              </a:rPr>
-              <a:t>• Вёрстка и аудит качества до выдачи</a:t>
-            </a:r>
-          </a:p>
-          <a:p>
-            <a:pPr algn="l">
-              <a:spcAft>
-                <a:spcPts val="300"/>
-              </a:spcAft>
-              <a:defRPr sz="1800">
-                <a:solidFill>
-                  <a:srgbClr val="000000"/>
-                </a:solidFill>
-                <a:latin typeface="Play"/>
-                <a:ea typeface="Play"/>
-                <a:cs typeface="Play"/>
-              </a:defRPr>
-            </a:pPr>
-            <a:r>
-              <a:rPr sz="1800">
-                <a:solidFill>
-                  <a:srgbClr val="000000"/>
-                </a:solidFill>
-                <a:latin typeface="Play"/>
-                <a:ea typeface="Play"/>
-                <a:cs typeface="Play"/>
-              </a:rPr>
-              <a:t>• Экспорт в pptx, pdf, html, слайды редактируемы</a:t>
-            </a:r>
-          </a:p>
-        </p:txBody>
-      </p:sp>
+      <p:graphicFrame>
+        <p:nvGraphicFramePr>
+          <p:cNvPr id="556" name="Chart 555"/>
+          <p:cNvGraphicFramePr>
+            <a:graphicFrameLocks noGrp="1"/>
+          </p:cNvGraphicFramePr>
+          <p:nvPr/>
+        </p:nvGraphicFramePr>
+        <p:xfrm>
+          <a:off x="274320" y="1414513"/>
+          <a:ext cx="8344814" cy="2851865"/>
+        </p:xfrm>
+        <a:graphic>
+          <a:graphicData uri="http://schemas.openxmlformats.org/drawingml/2006/chart">
+            <c:chart xmlns:c="http://schemas.openxmlformats.org/drawingml/2006/chart" r:id="rId2"/>
+          </a:graphicData>
+        </a:graphic>
+      </p:graphicFrame>
     </p:spTree>
   </p:cSld>
   <p:clrMapOvr>
@@ -8378,7 +7157,7 @@
         <p:spPr>
           <a:xfrm>
             <a:off x="274320" y="282943"/>
-            <a:ext cx="6792986" cy="932027"/>
+            <a:ext cx="6792986" cy="617220"/>
           </a:xfrm>
           <a:prstGeom prst="rect">
             <a:avLst/>
@@ -8413,29 +7192,164 @@
                 <a:ea typeface="Play"/>
                 <a:cs typeface="Play"/>
               </a:rPr>
-              <a:t>Сокращение времени сборки: 186 → 4 минуты</a:t>
+              <a:t>Ожидаемый эффект</a:t>
             </a:r>
           </a:p>
         </p:txBody>
       </p:sp>
-      <p:graphicFrame>
-        <p:nvGraphicFramePr>
-          <p:cNvPr id="3" name="Chart 2"/>
-          <p:cNvGraphicFramePr>
-            <a:graphicFrameLocks noGrp="1"/>
-          </p:cNvGraphicFramePr>
-          <p:nvPr/>
-        </p:nvGraphicFramePr>
-        <p:xfrm>
-          <a:off x="274320" y="1664127"/>
-          <a:ext cx="7189469" cy="2160270"/>
-        </p:xfrm>
-        <a:graphic>
-          <a:graphicData uri="http://schemas.openxmlformats.org/drawingml/2006/chart">
-            <c:chart xmlns:c="http://schemas.openxmlformats.org/drawingml/2006/chart" r:id="rId4"/>
-          </a:graphicData>
-        </a:graphic>
-      </p:graphicFrame>
+      <p:sp>
+        <p:nvSpPr>
+          <p:cNvPr id="3" name="body"/>
+          <p:cNvSpPr txBox="1"/>
+          <p:nvPr/>
+        </p:nvSpPr>
+        <p:spPr>
+          <a:xfrm>
+            <a:off x="274320" y="1414513"/>
+            <a:ext cx="7189469" cy="2602405"/>
+          </a:xfrm>
+          <a:prstGeom prst="rect">
+            <a:avLst/>
+          </a:prstGeom>
+          <a:noFill/>
+        </p:spPr>
+        <p:txBody>
+          <a:bodyPr wrap="square" lIns="76200" rIns="76200" tIns="50800" bIns="50800">
+            <a:spAutoFit/>
+          </a:bodyPr>
+          <a:lstStyle/>
+          <a:p>
+            <a:pPr algn="l">
+              <a:spcAft>
+                <a:spcPts val="300"/>
+              </a:spcAft>
+              <a:defRPr sz="1800" b="1">
+                <a:solidFill>
+                  <a:srgbClr val="000000"/>
+                </a:solidFill>
+                <a:latin typeface="Play"/>
+                <a:ea typeface="Play"/>
+                <a:cs typeface="Play"/>
+              </a:defRPr>
+            </a:pPr>
+            <a:r>
+              <a:rPr sz="1800" b="1">
+                <a:solidFill>
+                  <a:srgbClr val="000000"/>
+                </a:solidFill>
+                <a:latin typeface="Play"/>
+                <a:ea typeface="Play"/>
+                <a:cs typeface="Play"/>
+              </a:rPr>
+              <a:t>• Сокращение времени сборки с 186 до 4 минут</a:t>
+            </a:r>
+          </a:p>
+          <a:p>
+            <a:pPr algn="l">
+              <a:spcAft>
+                <a:spcPts val="300"/>
+              </a:spcAft>
+              <a:defRPr sz="1800" b="1">
+                <a:solidFill>
+                  <a:srgbClr val="000000"/>
+                </a:solidFill>
+                <a:latin typeface="Play"/>
+                <a:ea typeface="Play"/>
+                <a:cs typeface="Play"/>
+              </a:defRPr>
+            </a:pPr>
+            <a:r>
+              <a:rPr sz="1800" b="1">
+                <a:solidFill>
+                  <a:srgbClr val="000000"/>
+                </a:solidFill>
+                <a:latin typeface="Play"/>
+                <a:ea typeface="Play"/>
+                <a:cs typeface="Play"/>
+              </a:rPr>
+              <a:t>• Сокращение времени до первой версии с 6 до 1 дня</a:t>
+            </a:r>
+          </a:p>
+          <a:p>
+            <a:pPr algn="l">
+              <a:spcAft>
+                <a:spcPts val="300"/>
+              </a:spcAft>
+              <a:defRPr sz="1800" b="1">
+                <a:solidFill>
+                  <a:srgbClr val="000000"/>
+                </a:solidFill>
+                <a:latin typeface="Play"/>
+                <a:ea typeface="Play"/>
+                <a:cs typeface="Play"/>
+              </a:defRPr>
+            </a:pPr>
+            <a:r>
+              <a:rPr sz="1800" b="1">
+                <a:solidFill>
+                  <a:srgbClr val="000000"/>
+                </a:solidFill>
+                <a:latin typeface="Play"/>
+                <a:ea typeface="Play"/>
+                <a:cs typeface="Play"/>
+              </a:rPr>
+              <a:t>• Снижение нарушений стиля до 2 из 68 колод</a:t>
+            </a:r>
+          </a:p>
+          <a:p>
+            <a:pPr algn="l">
+              <a:spcAft>
+                <a:spcPts val="300"/>
+              </a:spcAft>
+              <a:defRPr sz="1800" b="1">
+                <a:solidFill>
+                  <a:srgbClr val="000000"/>
+                </a:solidFill>
+                <a:latin typeface="Play"/>
+                <a:ea typeface="Play"/>
+                <a:cs typeface="Play"/>
+              </a:defRPr>
+            </a:pPr>
+            <a:r>
+              <a:rPr sz="1800" b="1">
+                <a:solidFill>
+                  <a:srgbClr val="000000"/>
+                </a:solidFill>
+                <a:latin typeface="Play"/>
+                <a:ea typeface="Play"/>
+                <a:cs typeface="Play"/>
+              </a:rPr>
+              <a:t>• Увеличение объёма закрытых запросов до 38/нед</a:t>
+            </a:r>
+          </a:p>
+          <a:p>
+            <a:pPr algn="l">
+              <a:spcAft>
+                <a:spcPts val="300"/>
+              </a:spcAft>
+              <a:defRPr sz="1800" b="1">
+                <a:solidFill>
+                  <a:srgbClr val="000000"/>
+                </a:solidFill>
+                <a:latin typeface="Play"/>
+                <a:ea typeface="Play"/>
+                <a:cs typeface="Play"/>
+              </a:defRPr>
+            </a:pPr>
+            <a:r>
+              <a:rPr sz="1800" b="1">
+                <a:solidFill>
+                  <a:srgbClr val="000000"/>
+                </a:solidFill>
+                <a:latin typeface="Play"/>
+                <a:ea typeface="Play"/>
+                <a:cs typeface="Play"/>
+              </a:rPr>
+              <a:t>• Стоимость инференса за пилот – 1400 руб</a:t>
+            </a:r>
+          </a:p>
+        </p:txBody>
+      </p:sp>
     </p:spTree>
   </p:cSld>
   <p:clrMapOvr>
@@ -8463,7 +7377,7 @@
         <p:spPr>
           <a:xfrm>
             <a:off x="274320" y="282943"/>
-            <a:ext cx="6792986" cy="932027"/>
+            <a:ext cx="6792986" cy="617220"/>
           </a:xfrm>
           <a:prstGeom prst="rect">
             <a:avLst/>
@@ -8498,29 +7412,164 @@
                 <a:ea typeface="Play"/>
                 <a:cs typeface="Play"/>
               </a:rPr>
-              <a:t>Снижение нарушений фирменного стиля: 19/42 → 2/68</a:t>
+              <a:t>Ресурсы и сроки</a:t>
             </a:r>
           </a:p>
         </p:txBody>
       </p:sp>
-      <p:graphicFrame>
-        <p:nvGraphicFramePr>
-          <p:cNvPr id="3" name="Chart 2"/>
-          <p:cNvGraphicFramePr>
-            <a:graphicFrameLocks noGrp="1"/>
-          </p:cNvGraphicFramePr>
-          <p:nvPr/>
-        </p:nvGraphicFramePr>
-        <p:xfrm>
-          <a:off x="274320" y="1729321"/>
-          <a:ext cx="8344814" cy="2160270"/>
-        </p:xfrm>
-        <a:graphic>
-          <a:graphicData uri="http://schemas.openxmlformats.org/drawingml/2006/chart">
-            <c:chart xmlns:c="http://schemas.openxmlformats.org/drawingml/2006/chart" r:id="rId3"/>
-          </a:graphicData>
-        </a:graphic>
-      </p:graphicFrame>
+      <p:sp>
+        <p:nvSpPr>
+          <p:cNvPr id="3" name="body"/>
+          <p:cNvSpPr txBox="1"/>
+          <p:nvPr/>
+        </p:nvSpPr>
+        <p:spPr>
+          <a:xfrm>
+            <a:off x="274320" y="1414513"/>
+            <a:ext cx="8344814" cy="1790812"/>
+          </a:xfrm>
+          <a:prstGeom prst="rect">
+            <a:avLst/>
+          </a:prstGeom>
+          <a:noFill/>
+        </p:spPr>
+        <p:txBody>
+          <a:bodyPr wrap="square" lIns="76200" rIns="76200" tIns="50800" bIns="50800">
+            <a:spAutoFit/>
+          </a:bodyPr>
+          <a:lstStyle/>
+          <a:p>
+            <a:pPr algn="l">
+              <a:spcAft>
+                <a:spcPts val="300"/>
+              </a:spcAft>
+              <a:defRPr sz="1800">
+                <a:solidFill>
+                  <a:srgbClr val="000000"/>
+                </a:solidFill>
+                <a:latin typeface="Play"/>
+                <a:ea typeface="Play"/>
+                <a:cs typeface="Play"/>
+              </a:defRPr>
+            </a:pPr>
+            <a:r>
+              <a:rPr sz="1800">
+                <a:solidFill>
+                  <a:srgbClr val="000000"/>
+                </a:solidFill>
+                <a:latin typeface="Play"/>
+                <a:ea typeface="Play"/>
+                <a:cs typeface="Play"/>
+              </a:rPr>
+              <a:t>• Сервис работает на 2 vCPU / 2 ГБ RAM</a:t>
+            </a:r>
+          </a:p>
+          <a:p>
+            <a:pPr algn="l">
+              <a:spcAft>
+                <a:spcPts val="300"/>
+              </a:spcAft>
+              <a:defRPr sz="1800">
+                <a:solidFill>
+                  <a:srgbClr val="000000"/>
+                </a:solidFill>
+                <a:latin typeface="Play"/>
+                <a:ea typeface="Play"/>
+                <a:cs typeface="Play"/>
+              </a:defRPr>
+            </a:pPr>
+            <a:r>
+              <a:rPr sz="1800">
+                <a:solidFill>
+                  <a:srgbClr val="000000"/>
+                </a:solidFill>
+                <a:latin typeface="Play"/>
+                <a:ea typeface="Play"/>
+                <a:cs typeface="Play"/>
+              </a:rPr>
+              <a:t>• Модель gpt-oss-20b через OpenAI-совместимый протокол</a:t>
+            </a:r>
+          </a:p>
+          <a:p>
+            <a:pPr algn="l">
+              <a:spcAft>
+                <a:spcPts val="300"/>
+              </a:spcAft>
+              <a:defRPr sz="1800">
+                <a:solidFill>
+                  <a:srgbClr val="000000"/>
+                </a:solidFill>
+                <a:latin typeface="Play"/>
+                <a:ea typeface="Play"/>
+                <a:cs typeface="Play"/>
+              </a:defRPr>
+            </a:pPr>
+            <a:r>
+              <a:rPr sz="1800">
+                <a:solidFill>
+                  <a:srgbClr val="000000"/>
+                </a:solidFill>
+                <a:latin typeface="Play"/>
+                <a:ea typeface="Play"/>
+                <a:cs typeface="Play"/>
+              </a:rPr>
+              <a:t>• План: Q3 2026 – подключение 4 команд, домен и HTTPS</a:t>
+            </a:r>
+          </a:p>
+          <a:p>
+            <a:pPr algn="l">
+              <a:spcAft>
+                <a:spcPts val="300"/>
+              </a:spcAft>
+              <a:defRPr sz="1800">
+                <a:solidFill>
+                  <a:srgbClr val="000000"/>
+                </a:solidFill>
+                <a:latin typeface="Play"/>
+                <a:ea typeface="Play"/>
+                <a:cs typeface="Play"/>
+              </a:defRPr>
+            </a:pPr>
+            <a:r>
+              <a:rPr sz="1800">
+                <a:solidFill>
+                  <a:srgbClr val="000000"/>
+                </a:solidFill>
+                <a:latin typeface="Play"/>
+                <a:ea typeface="Play"/>
+                <a:cs typeface="Play"/>
+              </a:rPr>
+              <a:t>• Q4 2026 – доступ для всей компании, интеграция с хранилищем</a:t>
+            </a:r>
+          </a:p>
+          <a:p>
+            <a:pPr algn="l">
+              <a:spcAft>
+                <a:spcPts val="300"/>
+              </a:spcAft>
+              <a:defRPr sz="1800">
+                <a:solidFill>
+                  <a:srgbClr val="000000"/>
+                </a:solidFill>
+                <a:latin typeface="Play"/>
+                <a:ea typeface="Play"/>
+                <a:cs typeface="Play"/>
+              </a:defRPr>
+            </a:pPr>
+            <a:r>
+              <a:rPr sz="1800">
+                <a:solidFill>
+                  <a:srgbClr val="000000"/>
+                </a:solidFill>
+                <a:latin typeface="Play"/>
+                <a:ea typeface="Play"/>
+                <a:cs typeface="Play"/>
+              </a:rPr>
+              <a:t>• Q1 2027 – генерация иллюстраций под стиль шаблона</a:t>
+            </a:r>
+          </a:p>
+        </p:txBody>
+      </p:sp>
     </p:spTree>
   </p:cSld>
   <p:clrMapOvr>
@@ -8541,19 +7590,23 @@
       <p:grpSpPr/>
       <p:sp>
         <p:nvSpPr>
-          <p:cNvPr id="1032" name="Google Shape;1032;p65"/>
+          <p:cNvPr id="1027" name="Google Shape;1027;p65"/>
           <p:cNvSpPr/>
           <p:nvPr/>
         </p:nvSpPr>
         <p:spPr>
           <a:xfrm>
-            <a:off x="285748" y="286047"/>
-            <a:ext cx="8572456" cy="3938075"/>
-          </a:xfrm>
-          <a:prstGeom prst="rect">
-            <a:avLst/>
-          </a:prstGeom>
-          <a:noFill/>
+            <a:off x="6064222" y="1209852"/>
+            <a:ext cx="2793985" cy="3014270"/>
+          </a:xfrm>
+          <a:prstGeom prst="roundRect">
+            <a:avLst>
+              <a:gd fmla="val 3436" name="adj"/>
+            </a:avLst>
+          </a:prstGeom>
+          <a:solidFill>
+            <a:schemeClr val="lt2"/>
+          </a:solidFill>
           <a:ln>
             <a:noFill/>
           </a:ln>
@@ -8580,21 +7633,52 @@
           </a:p>
         </p:txBody>
       </p:sp>
-      <p:sp>
-        <p:nvSpPr>
-          <p:cNvPr id="1033" name="Google Shape;1033;p65"/>
-          <p:cNvSpPr/>
-          <p:nvPr/>
-        </p:nvSpPr>
-        <p:spPr>
-          <a:xfrm>
-            <a:off x="285748" y="1209852"/>
-            <a:ext cx="8572456" cy="3014270"/>
+      <p:pic>
+        <p:nvPicPr>
+          <p:cNvPr descr=" " id="1028" name="Google Shape;1028;p65"/>
+          <p:cNvPicPr preferRelativeResize="0"/>
+          <p:nvPr/>
+        </p:nvPicPr>
+        <p:blipFill rotWithShape="1">
+          <a:blip r:embed="rId2">
+            <a:alphaModFix/>
+          </a:blip>
+          <a:srcRect b="0" l="0" r="0" t="0"/>
+          <a:stretch/>
+        </p:blipFill>
+        <p:spPr>
+          <a:xfrm>
+            <a:off x="8203313" y="3566983"/>
+            <a:ext cx="466723" cy="466664"/>
           </a:xfrm>
           <a:prstGeom prst="rect">
             <a:avLst/>
           </a:prstGeom>
           <a:noFill/>
+          <a:ln>
+            <a:noFill/>
+          </a:ln>
+        </p:spPr>
+      </p:pic>
+      <p:sp>
+        <p:nvSpPr>
+          <p:cNvPr id="1029" name="Google Shape;1029;p65"/>
+          <p:cNvSpPr/>
+          <p:nvPr/>
+        </p:nvSpPr>
+        <p:spPr>
+          <a:xfrm>
+            <a:off x="3174981" y="1209852"/>
+            <a:ext cx="2793985" cy="3014270"/>
+          </a:xfrm>
+          <a:prstGeom prst="roundRect">
+            <a:avLst>
+              <a:gd fmla="val 3436" name="adj"/>
+            </a:avLst>
+          </a:prstGeom>
+          <a:solidFill>
+            <a:schemeClr val="lt2"/>
+          </a:solidFill>
           <a:ln>
             <a:noFill/>
           </a:ln>
@@ -8621,6 +7705,201 @@
           </a:p>
         </p:txBody>
       </p:sp>
+      <p:pic>
+        <p:nvPicPr>
+          <p:cNvPr descr=" " id="1030" name="Google Shape;1030;p65"/>
+          <p:cNvPicPr preferRelativeResize="0"/>
+          <p:nvPr/>
+        </p:nvPicPr>
+        <p:blipFill rotWithShape="1">
+          <a:blip r:embed="rId2">
+            <a:alphaModFix/>
+          </a:blip>
+          <a:srcRect b="0" l="0" r="0" t="0"/>
+          <a:stretch/>
+        </p:blipFill>
+        <p:spPr>
+          <a:xfrm>
+            <a:off x="5310249" y="3566983"/>
+            <a:ext cx="466723" cy="466664"/>
+          </a:xfrm>
+          <a:prstGeom prst="rect">
+            <a:avLst/>
+          </a:prstGeom>
+          <a:noFill/>
+          <a:ln>
+            <a:noFill/>
+          </a:ln>
+        </p:spPr>
+      </p:pic>
+      <p:sp>
+        <p:nvSpPr>
+          <p:cNvPr id="1031" name="Google Shape;1031;p65"/>
+          <p:cNvSpPr/>
+          <p:nvPr/>
+        </p:nvSpPr>
+        <p:spPr>
+          <a:xfrm>
+            <a:off x="285749" y="1209852"/>
+            <a:ext cx="2793985" cy="3014270"/>
+          </a:xfrm>
+          <a:prstGeom prst="roundRect">
+            <a:avLst>
+              <a:gd fmla="val 3436" name="adj"/>
+            </a:avLst>
+          </a:prstGeom>
+          <a:solidFill>
+            <a:schemeClr val="lt2"/>
+          </a:solidFill>
+          <a:ln>
+            <a:noFill/>
+          </a:ln>
+        </p:spPr>
+        <p:txBody>
+          <a:bodyPr anchorCtr="0" anchor="ctr" bIns="91425" lIns="91425" spcFirstLastPara="1" rIns="91425" wrap="square" tIns="91425">
+            <a:noAutofit/>
+          </a:bodyPr>
+          <a:lstStyle/>
+          <a:p>
+            <a:pPr indent="0" lvl="0" marL="0" rtl="0" algn="l">
+              <a:spcBef>
+                <a:spcPts val="0"/>
+              </a:spcBef>
+              <a:spcAft>
+                <a:spcPts val="0"/>
+              </a:spcAft>
+              <a:buNone/>
+            </a:pPr>
+            <a:r>
+              <a:t/>
+            </a:r>
+            <a:endParaRPr/>
+          </a:p>
+        </p:txBody>
+      </p:sp>
+      <p:sp>
+        <p:nvSpPr>
+          <p:cNvPr id="1032" name="Google Shape;1032;p65"/>
+          <p:cNvSpPr/>
+          <p:nvPr/>
+        </p:nvSpPr>
+        <p:spPr>
+          <a:xfrm>
+            <a:off x="285748" y="286047"/>
+            <a:ext cx="8572456" cy="3938075"/>
+          </a:xfrm>
+          <a:prstGeom prst="rect">
+            <a:avLst/>
+          </a:prstGeom>
+          <a:noFill/>
+          <a:ln>
+            <a:noFill/>
+          </a:ln>
+        </p:spPr>
+        <p:txBody>
+          <a:bodyPr anchorCtr="0" anchor="ctr" bIns="91425" lIns="91425" spcFirstLastPara="1" rIns="91425" wrap="square" tIns="91425">
+            <a:noAutofit/>
+          </a:bodyPr>
+          <a:lstStyle/>
+          <a:p>
+            <a:pPr indent="0" lvl="0" marL="0" rtl="0" algn="l">
+              <a:spcBef>
+                <a:spcPts val="0"/>
+              </a:spcBef>
+              <a:spcAft>
+                <a:spcPts val="0"/>
+              </a:spcAft>
+              <a:buNone/>
+            </a:pPr>
+            <a:r>
+              <a:t/>
+            </a:r>
+            <a:endParaRPr/>
+          </a:p>
+        </p:txBody>
+      </p:sp>
+      <p:sp>
+        <p:nvSpPr>
+          <p:cNvPr id="1033" name="Google Shape;1033;p65"/>
+          <p:cNvSpPr/>
+          <p:nvPr/>
+        </p:nvSpPr>
+        <p:spPr>
+          <a:xfrm>
+            <a:off x="285748" y="1209852"/>
+            <a:ext cx="8572456" cy="3014270"/>
+          </a:xfrm>
+          <a:prstGeom prst="rect">
+            <a:avLst/>
+          </a:prstGeom>
+          <a:noFill/>
+          <a:ln>
+            <a:noFill/>
+          </a:ln>
+        </p:spPr>
+        <p:txBody>
+          <a:bodyPr anchorCtr="0" anchor="ctr" bIns="91425" lIns="91425" spcFirstLastPara="1" rIns="91425" wrap="square" tIns="91425">
+            <a:noAutofit/>
+          </a:bodyPr>
+          <a:lstStyle/>
+          <a:p>
+            <a:pPr indent="0" lvl="0" marL="0" rtl="0" algn="l">
+              <a:spcBef>
+                <a:spcPts val="0"/>
+              </a:spcBef>
+              <a:spcAft>
+                <a:spcPts val="0"/>
+              </a:spcAft>
+              <a:buNone/>
+            </a:pPr>
+            <a:r>
+              <a:t/>
+            </a:r>
+            <a:endParaRPr/>
+          </a:p>
+        </p:txBody>
+      </p:sp>
+      <p:sp>
+        <p:nvSpPr>
+          <p:cNvPr id="1034" name="Google Shape;1034;p65"/>
+          <p:cNvSpPr/>
+          <p:nvPr/>
+        </p:nvSpPr>
+        <p:spPr>
+          <a:xfrm>
+            <a:off x="476248" y="1400327"/>
+            <a:ext cx="2412987" cy="1009519"/>
+          </a:xfrm>
+          <a:prstGeom prst="rect">
+            <a:avLst/>
+          </a:prstGeom>
+          <a:noFill/>
+          <a:ln>
+            <a:noFill/>
+          </a:ln>
+        </p:spPr>
+        <p:txBody>
+          <a:bodyPr anchorCtr="0" anchor="ctr" bIns="91425" lIns="91425" spcFirstLastPara="1" rIns="91425" wrap="square" tIns="91425">
+            <a:noAutofit/>
+          </a:bodyPr>
+          <a:lstStyle/>
+          <a:p>
+            <a:pPr indent="0" lvl="0" marL="0" rtl="0" algn="l">
+              <a:spcBef>
+                <a:spcPts val="0"/>
+              </a:spcBef>
+              <a:spcAft>
+                <a:spcPts val="0"/>
+              </a:spcAft>
+              <a:buNone/>
+            </a:pPr>
+            <a:r>
+              <a:t/>
+            </a:r>
+            <a:endParaRPr/>
+          </a:p>
+        </p:txBody>
+      </p:sp>
       <p:sp>
         <p:nvSpPr>
           <p:cNvPr id="1035" name="Google Shape;1035;p65"/>
@@ -8668,6 +7947,142 @@
       </p:sp>
       <p:sp>
         <p:nvSpPr>
+          <p:cNvPr id="1037" name="Google Shape;1037;p65"/>
+          <p:cNvSpPr/>
+          <p:nvPr/>
+        </p:nvSpPr>
+        <p:spPr>
+          <a:xfrm>
+            <a:off x="2422509" y="3566983"/>
+            <a:ext cx="466723" cy="466664"/>
+          </a:xfrm>
+          <a:prstGeom prst="rect">
+            <a:avLst/>
+          </a:prstGeom>
+          <a:noFill/>
+          <a:ln>
+            <a:noFill/>
+          </a:ln>
+        </p:spPr>
+        <p:txBody>
+          <a:bodyPr anchorCtr="0" anchor="ctr" bIns="91425" lIns="91425" spcFirstLastPara="1" rIns="91425" wrap="square" tIns="91425">
+            <a:noAutofit/>
+          </a:bodyPr>
+          <a:lstStyle/>
+          <a:p>
+            <a:pPr indent="0" lvl="0" marL="0" rtl="0" algn="l">
+              <a:spcBef>
+                <a:spcPts val="0"/>
+              </a:spcBef>
+              <a:spcAft>
+                <a:spcPts val="0"/>
+              </a:spcAft>
+              <a:buNone/>
+            </a:pPr>
+            <a:r>
+              <a:t/>
+            </a:r>
+            <a:endParaRPr/>
+          </a:p>
+        </p:txBody>
+      </p:sp>
+      <p:pic>
+        <p:nvPicPr>
+          <p:cNvPr descr=" " id="1038" name="Google Shape;1038;p65"/>
+          <p:cNvPicPr preferRelativeResize="0"/>
+          <p:nvPr/>
+        </p:nvPicPr>
+        <p:blipFill rotWithShape="1">
+          <a:blip r:embed="rId2">
+            <a:alphaModFix/>
+          </a:blip>
+          <a:srcRect b="0" l="0" r="0" t="0"/>
+          <a:stretch/>
+        </p:blipFill>
+        <p:spPr>
+          <a:xfrm>
+            <a:off x="2422506" y="3566983"/>
+            <a:ext cx="466723" cy="466664"/>
+          </a:xfrm>
+          <a:prstGeom prst="rect">
+            <a:avLst/>
+          </a:prstGeom>
+          <a:noFill/>
+          <a:ln>
+            <a:noFill/>
+          </a:ln>
+        </p:spPr>
+      </p:pic>
+      <p:pic>
+        <p:nvPicPr>
+          <p:cNvPr descr=" " id="1039" name="Google Shape;1039;p65"/>
+          <p:cNvPicPr preferRelativeResize="0"/>
+          <p:nvPr/>
+        </p:nvPicPr>
+        <p:blipFill rotWithShape="1">
+          <a:blip r:embed="rId3">
+            <a:alphaModFix/>
+          </a:blip>
+          <a:srcRect b="0" l="0" r="0" t="0"/>
+          <a:stretch/>
+        </p:blipFill>
+        <p:spPr>
+          <a:xfrm>
+            <a:off x="2555859" y="3700316"/>
+            <a:ext cx="200024" cy="199999"/>
+          </a:xfrm>
+          <a:prstGeom prst="rect">
+            <a:avLst/>
+          </a:prstGeom>
+          <a:noFill/>
+          <a:ln>
+            <a:noFill/>
+          </a:ln>
+        </p:spPr>
+      </p:pic>
+      <p:sp>
+        <p:nvSpPr>
+          <p:cNvPr id="1040" name="Google Shape;1040;p65"/>
+          <p:cNvSpPr/>
+          <p:nvPr/>
+        </p:nvSpPr>
+        <p:spPr>
+          <a:xfrm>
+            <a:off x="3365480" y="1400327"/>
+            <a:ext cx="2412987" cy="1009519"/>
+          </a:xfrm>
+          <a:prstGeom prst="rect">
+            <a:avLst/>
+          </a:prstGeom>
+          <a:noFill/>
+          <a:ln>
+            <a:noFill/>
+          </a:ln>
+        </p:spPr>
+        <p:txBody>
+          <a:bodyPr anchorCtr="0" anchor="ctr" bIns="91425" lIns="91425" spcFirstLastPara="1" rIns="91425" wrap="square" tIns="91425">
+            <a:noAutofit/>
+          </a:bodyPr>
+          <a:lstStyle/>
+          <a:p>
+            <a:pPr indent="0" lvl="0" marL="0" rtl="0" algn="l">
+              <a:spcBef>
+                <a:spcPts val="0"/>
+              </a:spcBef>
+              <a:spcAft>
+                <a:spcPts val="0"/>
+              </a:spcAft>
+              <a:buNone/>
+            </a:pPr>
+            <a:r>
+              <a:t/>
+            </a:r>
+            <a:endParaRPr/>
+          </a:p>
+        </p:txBody>
+      </p:sp>
+      <p:sp>
+        <p:nvSpPr>
           <p:cNvPr id="1041" name="Google Shape;1041;p65"/>
           <p:cNvSpPr/>
           <p:nvPr/>
@@ -8713,6 +8128,115 @@
       </p:sp>
       <p:sp>
         <p:nvSpPr>
+          <p:cNvPr id="1043" name="Google Shape;1043;p65"/>
+          <p:cNvSpPr/>
+          <p:nvPr/>
+        </p:nvSpPr>
+        <p:spPr>
+          <a:xfrm>
+            <a:off x="5311741" y="3566983"/>
+            <a:ext cx="466723" cy="466664"/>
+          </a:xfrm>
+          <a:prstGeom prst="rect">
+            <a:avLst/>
+          </a:prstGeom>
+          <a:noFill/>
+          <a:ln>
+            <a:noFill/>
+          </a:ln>
+        </p:spPr>
+        <p:txBody>
+          <a:bodyPr anchorCtr="0" anchor="ctr" bIns="91425" lIns="91425" spcFirstLastPara="1" rIns="91425" wrap="square" tIns="91425">
+            <a:noAutofit/>
+          </a:bodyPr>
+          <a:lstStyle/>
+          <a:p>
+            <a:pPr indent="0" lvl="0" marL="0" rtl="0" algn="l">
+              <a:spcBef>
+                <a:spcPts val="0"/>
+              </a:spcBef>
+              <a:spcAft>
+                <a:spcPts val="0"/>
+              </a:spcAft>
+              <a:buNone/>
+            </a:pPr>
+            <a:r>
+              <a:t/>
+            </a:r>
+            <a:endParaRPr/>
+          </a:p>
+        </p:txBody>
+      </p:sp>
+      <p:pic>
+        <p:nvPicPr>
+          <p:cNvPr descr=" " id="1044" name="Google Shape;1044;p65"/>
+          <p:cNvPicPr preferRelativeResize="0"/>
+          <p:nvPr/>
+        </p:nvPicPr>
+        <p:blipFill rotWithShape="1">
+          <a:blip r:embed="rId3">
+            <a:alphaModFix/>
+          </a:blip>
+          <a:srcRect b="0" l="0" r="0" t="0"/>
+          <a:stretch/>
+        </p:blipFill>
+        <p:spPr>
+          <a:xfrm>
+            <a:off x="5445091" y="3700316"/>
+            <a:ext cx="200024" cy="199999"/>
+          </a:xfrm>
+          <a:prstGeom prst="rect">
+            <a:avLst/>
+          </a:prstGeom>
+          <a:noFill/>
+          <a:ln>
+            <a:noFill/>
+          </a:ln>
+        </p:spPr>
+      </p:pic>
+      <p:sp>
+        <p:nvSpPr>
+          <p:cNvPr id="1045" name="Google Shape;1045;p65"/>
+          <p:cNvSpPr/>
+          <p:nvPr/>
+        </p:nvSpPr>
+        <p:spPr>
+          <a:xfrm>
+            <a:off x="6254721" y="1400327"/>
+            <a:ext cx="2412987" cy="1009519"/>
+          </a:xfrm>
+          <a:prstGeom prst="rect">
+            <a:avLst/>
+          </a:prstGeom>
+          <a:noFill/>
+          <a:ln>
+            <a:noFill/>
+          </a:ln>
+        </p:spPr>
+        <p:txBody>
+          <a:bodyPr anchorCtr="0" anchor="ctr" bIns="91425" lIns="91425" spcFirstLastPara="1" rIns="91425" wrap="square" tIns="91425">
+            <a:noAutofit/>
+          </a:bodyPr>
+          <a:lstStyle/>
+          <a:p>
+            <a:pPr indent="0" lvl="0" marL="0" rtl="0" algn="l">
+              <a:spcBef>
+                <a:spcPts val="0"/>
+              </a:spcBef>
+              <a:spcAft>
+                <a:spcPts val="0"/>
+              </a:spcAft>
+              <a:buNone/>
+            </a:pPr>
+            <a:r>
+              <a:t/>
+            </a:r>
+            <a:endParaRPr/>
+          </a:p>
+        </p:txBody>
+      </p:sp>
+      <p:sp>
+        <p:nvSpPr>
           <p:cNvPr id="1046" name="Google Shape;1046;p65"/>
           <p:cNvSpPr/>
           <p:nvPr/>
@@ -8758,14 +8282,82 @@
       </p:sp>
       <p:sp>
         <p:nvSpPr>
-          <p:cNvPr id="1047" name="title"/>
+          <p:cNvPr id="1048" name="Google Shape;1048;p65"/>
+          <p:cNvSpPr/>
+          <p:nvPr/>
+        </p:nvSpPr>
+        <p:spPr>
+          <a:xfrm>
+            <a:off x="8200982" y="3566983"/>
+            <a:ext cx="466723" cy="466664"/>
+          </a:xfrm>
+          <a:prstGeom prst="rect">
+            <a:avLst/>
+          </a:prstGeom>
+          <a:noFill/>
+          <a:ln>
+            <a:noFill/>
+          </a:ln>
+        </p:spPr>
+        <p:txBody>
+          <a:bodyPr anchorCtr="0" anchor="ctr" bIns="91425" lIns="91425" spcFirstLastPara="1" rIns="91425" wrap="square" tIns="91425">
+            <a:noAutofit/>
+          </a:bodyPr>
+          <a:lstStyle/>
+          <a:p>
+            <a:pPr indent="0" lvl="0" marL="0" rtl="0" algn="l">
+              <a:spcBef>
+                <a:spcPts val="0"/>
+              </a:spcBef>
+              <a:spcAft>
+                <a:spcPts val="0"/>
+              </a:spcAft>
+              <a:buNone/>
+            </a:pPr>
+            <a:r>
+              <a:t/>
+            </a:r>
+            <a:endParaRPr/>
+          </a:p>
+        </p:txBody>
+      </p:sp>
+      <p:pic>
+        <p:nvPicPr>
+          <p:cNvPr descr=" " id="1049" name="Google Shape;1049;p65"/>
+          <p:cNvPicPr preferRelativeResize="0"/>
+          <p:nvPr/>
+        </p:nvPicPr>
+        <p:blipFill rotWithShape="1">
+          <a:blip r:embed="rId3">
+            <a:alphaModFix/>
+          </a:blip>
+          <a:srcRect b="0" l="0" r="0" t="0"/>
+          <a:stretch/>
+        </p:blipFill>
+        <p:spPr>
+          <a:xfrm>
+            <a:off x="8334332" y="3700316"/>
+            <a:ext cx="200024" cy="199999"/>
+          </a:xfrm>
+          <a:prstGeom prst="rect">
+            <a:avLst/>
+          </a:prstGeom>
+          <a:noFill/>
+          <a:ln>
+            <a:noFill/>
+          </a:ln>
+        </p:spPr>
+      </p:pic>
+      <p:sp>
+        <p:nvSpPr>
+          <p:cNvPr id="1050" name="title"/>
           <p:cNvSpPr txBox="1"/>
           <p:nvPr/>
         </p:nvSpPr>
         <p:spPr>
           <a:xfrm>
             <a:off x="274320" y="282943"/>
-            <a:ext cx="6792986" cy="932027"/>
+            <a:ext cx="6792986" cy="617220"/>
           </a:xfrm>
           <a:prstGeom prst="rect">
             <a:avLst/>
@@ -8800,29 +8392,158 @@
                 <a:ea typeface="Play"/>
                 <a:cs typeface="Play"/>
               </a:rPr>
-              <a:t>Увеличение объёма работы дизайнеров: 11/нед → 38/6н</a:t>
+              <a:t>Риски</a:t>
             </a:r>
           </a:p>
         </p:txBody>
       </p:sp>
-      <p:graphicFrame>
-        <p:nvGraphicFramePr>
-          <p:cNvPr id="1048" name="Chart 1047"/>
-          <p:cNvGraphicFramePr>
-            <a:graphicFrameLocks noGrp="1"/>
-          </p:cNvGraphicFramePr>
-          <p:nvPr/>
-        </p:nvGraphicFramePr>
-        <p:xfrm>
-          <a:off x="274320" y="1628895"/>
-          <a:ext cx="8344814" cy="2160270"/>
-        </p:xfrm>
-        <a:graphic>
-          <a:graphicData uri="http://schemas.openxmlformats.org/drawingml/2006/chart">
-            <c:chart xmlns:c="http://schemas.openxmlformats.org/drawingml/2006/chart" r:id="rId4"/>
-          </a:graphicData>
-        </a:graphic>
-      </p:graphicFrame>
+      <p:sp>
+        <p:nvSpPr>
+          <p:cNvPr id="1051" name="card_0"/>
+          <p:cNvSpPr txBox="1"/>
+          <p:nvPr/>
+        </p:nvSpPr>
+        <p:spPr>
+          <a:xfrm>
+            <a:off x="576030" y="1728705"/>
+            <a:ext cx="2264138" cy="632134"/>
+          </a:xfrm>
+          <a:prstGeom prst="rect">
+            <a:avLst/>
+          </a:prstGeom>
+          <a:noFill/>
+        </p:spPr>
+        <p:txBody>
+          <a:bodyPr wrap="square" lIns="76200" rIns="76200" tIns="50800" bIns="50800">
+            <a:spAutoFit/>
+          </a:bodyPr>
+          <a:lstStyle/>
+          <a:p>
+            <a:pPr algn="l">
+              <a:spcAft>
+                <a:spcPts val="300"/>
+              </a:spcAft>
+              <a:defRPr sz="1200" b="0">
+                <a:solidFill>
+                  <a:srgbClr val="000000"/>
+                </a:solidFill>
+                <a:latin typeface="Play"/>
+                <a:ea typeface="Play"/>
+                <a:cs typeface="Play"/>
+              </a:defRPr>
+            </a:pPr>
+            <a:r>
+              <a:rPr sz="1200" b="0">
+                <a:solidFill>
+                  <a:srgbClr val="000000"/>
+                </a:solidFill>
+                <a:latin typeface="Play"/>
+                <a:ea typeface="Play"/>
+                <a:cs typeface="Play"/>
+              </a:rPr>
+              <a:t>Слабая модель может выдумать неверные цифры – аудит проверяет</a:t>
+            </a:r>
+          </a:p>
+        </p:txBody>
+      </p:sp>
+      <p:sp>
+        <p:nvSpPr>
+          <p:cNvPr id="1052" name="card_1"/>
+          <p:cNvSpPr txBox="1"/>
+          <p:nvPr/>
+        </p:nvSpPr>
+        <p:spPr>
+          <a:xfrm>
+            <a:off x="3465259" y="1728705"/>
+            <a:ext cx="2264138" cy="632134"/>
+          </a:xfrm>
+          <a:prstGeom prst="rect">
+            <a:avLst/>
+          </a:prstGeom>
+          <a:noFill/>
+        </p:spPr>
+        <p:txBody>
+          <a:bodyPr wrap="square" lIns="76200" rIns="76200" tIns="50800" bIns="50800">
+            <a:spAutoFit/>
+          </a:bodyPr>
+          <a:lstStyle/>
+          <a:p>
+            <a:pPr algn="l">
+              <a:spcAft>
+                <a:spcPts val="300"/>
+              </a:spcAft>
+              <a:defRPr sz="1200" b="0">
+                <a:solidFill>
+                  <a:srgbClr val="000000"/>
+                </a:solidFill>
+                <a:latin typeface="Play"/>
+                <a:ea typeface="Play"/>
+                <a:cs typeface="Play"/>
+              </a:defRPr>
+            </a:pPr>
+            <a:r>
+              <a:rPr sz="1200" b="0">
+                <a:solidFill>
+                  <a:srgbClr val="000000"/>
+                </a:solidFill>
+                <a:latin typeface="Play"/>
+                <a:ea typeface="Play"/>
+                <a:cs typeface="Play"/>
+              </a:rPr>
+              <a:t>Плохой шаблон приводит к использованию рабочей области вместо готовых страниц</a:t>
+            </a:r>
+          </a:p>
+        </p:txBody>
+      </p:sp>
+      <p:sp>
+        <p:nvSpPr>
+          <p:cNvPr id="1053" name="card_2"/>
+          <p:cNvSpPr txBox="1"/>
+          <p:nvPr/>
+        </p:nvSpPr>
+        <p:spPr>
+          <a:xfrm>
+            <a:off x="6354489" y="1728705"/>
+            <a:ext cx="2264138" cy="632134"/>
+          </a:xfrm>
+          <a:prstGeom prst="rect">
+            <a:avLst/>
+          </a:prstGeom>
+          <a:noFill/>
+        </p:spPr>
+        <p:txBody>
+          <a:bodyPr wrap="square" lIns="76200" rIns="76200" tIns="50800" bIns="50800">
+            <a:spAutoFit/>
+          </a:bodyPr>
+          <a:lstStyle/>
+          <a:p>
+            <a:pPr algn="l">
+              <a:spcAft>
+                <a:spcPts val="300"/>
+              </a:spcAft>
+              <a:defRPr sz="1200" b="0">
+                <a:solidFill>
+                  <a:srgbClr val="000000"/>
+                </a:solidFill>
+                <a:latin typeface="Play"/>
+                <a:ea typeface="Play"/>
+                <a:cs typeface="Play"/>
+              </a:defRPr>
+            </a:pPr>
+            <a:r>
+              <a:rPr sz="1200" b="0">
+                <a:solidFill>
+                  <a:srgbClr val="000000"/>
+                </a:solidFill>
+                <a:latin typeface="Play"/>
+                <a:ea typeface="Play"/>
+                <a:cs typeface="Play"/>
+              </a:rPr>
+              <a:t>Нагрузка выше 20 одновременных задач требует внешней очереди</a:t>
+            </a:r>
+          </a:p>
+        </p:txBody>
+      </p:sp>
     </p:spTree>
   </p:cSld>
   <p:clrMapOvr>
@@ -8841,43 +8562,16 @@
         <p:nvPr/>
       </p:nvGrpSpPr>
       <p:grpSpPr/>
-      <p:pic>
-        <p:nvPicPr>
-          <p:cNvPr descr=" " id="2385" name="Google Shape;2385;p88"/>
-          <p:cNvPicPr preferRelativeResize="0"/>
-          <p:nvPr/>
-        </p:nvPicPr>
-        <p:blipFill rotWithShape="1">
-          <a:blip r:embed="rId2">
-            <a:alphaModFix/>
-          </a:blip>
-          <a:srcRect b="0" l="0" r="0" t="0"/>
-          <a:stretch/>
-        </p:blipFill>
-        <p:spPr>
-          <a:xfrm>
-            <a:off x="388142" y="2000324"/>
-            <a:ext cx="8755811" cy="9524"/>
-          </a:xfrm>
-          <a:prstGeom prst="rect">
-            <a:avLst/>
-          </a:prstGeom>
-          <a:noFill/>
-          <a:ln>
-            <a:noFill/>
-          </a:ln>
-        </p:spPr>
-      </p:pic>
-      <p:sp>
-        <p:nvSpPr>
-          <p:cNvPr id="2386" name="Google Shape;2386;p88"/>
+      <p:sp>
+        <p:nvSpPr>
+          <p:cNvPr id="662" name="Google Shape;662;p55"/>
           <p:cNvSpPr/>
           <p:nvPr/>
         </p:nvSpPr>
         <p:spPr>
           <a:xfrm>
-            <a:off x="319086" y="1286042"/>
-            <a:ext cx="1690679" cy="1128566"/>
+            <a:off x="8667705" y="4666977"/>
+            <a:ext cx="190499" cy="190475"/>
           </a:xfrm>
           <a:prstGeom prst="rect">
             <a:avLst/>
@@ -8911,14 +8605,14 @@
       </p:sp>
       <p:sp>
         <p:nvSpPr>
-          <p:cNvPr id="2388" name="Google Shape;2388;p88"/>
+          <p:cNvPr id="663" name="Google Shape;663;p55"/>
           <p:cNvSpPr/>
           <p:nvPr/>
         </p:nvSpPr>
         <p:spPr>
           <a:xfrm>
-            <a:off x="2600312" y="1286042"/>
-            <a:ext cx="1690679" cy="1128566"/>
+            <a:off x="285748" y="286047"/>
+            <a:ext cx="8572456" cy="3938075"/>
           </a:xfrm>
           <a:prstGeom prst="rect">
             <a:avLst/>
@@ -8952,14 +8646,14 @@
       </p:sp>
       <p:sp>
         <p:nvSpPr>
-          <p:cNvPr id="2390" name="Google Shape;2390;p88"/>
+          <p:cNvPr id="664" name="Google Shape;664;p55"/>
           <p:cNvSpPr/>
           <p:nvPr/>
         </p:nvSpPr>
         <p:spPr>
           <a:xfrm>
-            <a:off x="4881537" y="1286042"/>
-            <a:ext cx="1690679" cy="1128566"/>
+            <a:off x="285748" y="1209852"/>
+            <a:ext cx="8572456" cy="3014270"/>
           </a:xfrm>
           <a:prstGeom prst="rect">
             <a:avLst/>
@@ -8993,19 +8687,23 @@
       </p:sp>
       <p:sp>
         <p:nvSpPr>
-          <p:cNvPr id="2392" name="Google Shape;2392;p88"/>
+          <p:cNvPr id="665" name="Google Shape;665;p55"/>
           <p:cNvSpPr/>
           <p:nvPr/>
         </p:nvSpPr>
         <p:spPr>
           <a:xfrm>
-            <a:off x="7162763" y="1286042"/>
-            <a:ext cx="1690679" cy="1128566"/>
-          </a:xfrm>
-          <a:prstGeom prst="rect">
-            <a:avLst/>
-          </a:prstGeom>
-          <a:noFill/>
+            <a:off x="285749" y="1209852"/>
+            <a:ext cx="2071677" cy="3014270"/>
+          </a:xfrm>
+          <a:prstGeom prst="roundRect">
+            <a:avLst>
+              <a:gd fmla="val 4634" name="adj"/>
+            </a:avLst>
+          </a:prstGeom>
+          <a:solidFill>
+            <a:schemeClr val="lt2"/>
+          </a:solidFill>
           <a:ln>
             <a:noFill/>
           </a:ln>
@@ -9034,14 +8732,493 @@
       </p:sp>
       <p:sp>
         <p:nvSpPr>
-          <p:cNvPr id="2393" name="title"/>
+          <p:cNvPr id="666" name="Google Shape;666;p55"/>
+          <p:cNvSpPr/>
+          <p:nvPr/>
+        </p:nvSpPr>
+        <p:spPr>
+          <a:xfrm>
+            <a:off x="438148" y="1362233"/>
+            <a:ext cx="1766878" cy="342855"/>
+          </a:xfrm>
+          <a:prstGeom prst="rect">
+            <a:avLst/>
+          </a:prstGeom>
+          <a:noFill/>
+          <a:ln>
+            <a:noFill/>
+          </a:ln>
+        </p:spPr>
+        <p:txBody>
+          <a:bodyPr anchorCtr="0" anchor="ctr" bIns="91425" lIns="91425" spcFirstLastPara="1" rIns="91425" wrap="square" tIns="91425">
+            <a:noAutofit/>
+          </a:bodyPr>
+          <a:lstStyle/>
+          <a:p>
+            <a:pPr indent="0" lvl="0" marL="0" rtl="0" algn="l">
+              <a:spcBef>
+                <a:spcPts val="0"/>
+              </a:spcBef>
+              <a:spcAft>
+                <a:spcPts val="0"/>
+              </a:spcAft>
+              <a:buNone/>
+            </a:pPr>
+            <a:r>
+              <a:t/>
+            </a:r>
+            <a:endParaRPr/>
+          </a:p>
+        </p:txBody>
+      </p:sp>
+      <p:sp>
+        <p:nvSpPr>
+          <p:cNvPr id="667" name="Google Shape;667;p55"/>
+          <p:cNvSpPr/>
+          <p:nvPr/>
+        </p:nvSpPr>
+        <p:spPr>
+          <a:xfrm>
+            <a:off x="438148" y="1362233"/>
+            <a:ext cx="76199" cy="76190"/>
+          </a:xfrm>
+          <a:prstGeom prst="roundRect">
+            <a:avLst>
+              <a:gd fmla="val 31500" name="adj"/>
+            </a:avLst>
+          </a:prstGeom>
+          <a:solidFill>
+            <a:srgbClr val="0077FF"/>
+          </a:solidFill>
+          <a:ln>
+            <a:noFill/>
+          </a:ln>
+        </p:spPr>
+        <p:txBody>
+          <a:bodyPr anchorCtr="0" anchor="ctr" bIns="91425" lIns="91425" spcFirstLastPara="1" rIns="91425" wrap="square" tIns="91425">
+            <a:noAutofit/>
+          </a:bodyPr>
+          <a:lstStyle/>
+          <a:p>
+            <a:pPr indent="0" lvl="0" marL="0" rtl="0" algn="l">
+              <a:spcBef>
+                <a:spcPts val="0"/>
+              </a:spcBef>
+              <a:spcAft>
+                <a:spcPts val="0"/>
+              </a:spcAft>
+              <a:buNone/>
+            </a:pPr>
+            <a:r>
+              <a:t/>
+            </a:r>
+            <a:endParaRPr/>
+          </a:p>
+        </p:txBody>
+      </p:sp>
+      <p:sp>
+        <p:nvSpPr>
+          <p:cNvPr id="670" name="Google Shape;670;p55"/>
+          <p:cNvSpPr/>
+          <p:nvPr/>
+        </p:nvSpPr>
+        <p:spPr>
+          <a:xfrm>
+            <a:off x="2452675" y="1209852"/>
+            <a:ext cx="2071677" cy="3014270"/>
+          </a:xfrm>
+          <a:prstGeom prst="roundRect">
+            <a:avLst>
+              <a:gd fmla="val 4634" name="adj"/>
+            </a:avLst>
+          </a:prstGeom>
+          <a:solidFill>
+            <a:schemeClr val="lt2"/>
+          </a:solidFill>
+          <a:ln>
+            <a:noFill/>
+          </a:ln>
+        </p:spPr>
+        <p:txBody>
+          <a:bodyPr anchorCtr="0" anchor="ctr" bIns="91425" lIns="91425" spcFirstLastPara="1" rIns="91425" wrap="square" tIns="91425">
+            <a:noAutofit/>
+          </a:bodyPr>
+          <a:lstStyle/>
+          <a:p>
+            <a:pPr indent="0" lvl="0" marL="0" rtl="0" algn="l">
+              <a:spcBef>
+                <a:spcPts val="0"/>
+              </a:spcBef>
+              <a:spcAft>
+                <a:spcPts val="0"/>
+              </a:spcAft>
+              <a:buNone/>
+            </a:pPr>
+            <a:r>
+              <a:t/>
+            </a:r>
+            <a:endParaRPr/>
+          </a:p>
+        </p:txBody>
+      </p:sp>
+      <p:sp>
+        <p:nvSpPr>
+          <p:cNvPr id="671" name="Google Shape;671;p55"/>
+          <p:cNvSpPr/>
+          <p:nvPr/>
+        </p:nvSpPr>
+        <p:spPr>
+          <a:xfrm>
+            <a:off x="2605074" y="1362233"/>
+            <a:ext cx="1766878" cy="342855"/>
+          </a:xfrm>
+          <a:prstGeom prst="rect">
+            <a:avLst/>
+          </a:prstGeom>
+          <a:noFill/>
+          <a:ln>
+            <a:noFill/>
+          </a:ln>
+        </p:spPr>
+        <p:txBody>
+          <a:bodyPr anchorCtr="0" anchor="ctr" bIns="91425" lIns="91425" spcFirstLastPara="1" rIns="91425" wrap="square" tIns="91425">
+            <a:noAutofit/>
+          </a:bodyPr>
+          <a:lstStyle/>
+          <a:p>
+            <a:pPr indent="0" lvl="0" marL="0" rtl="0" algn="l">
+              <a:spcBef>
+                <a:spcPts val="0"/>
+              </a:spcBef>
+              <a:spcAft>
+                <a:spcPts val="0"/>
+              </a:spcAft>
+              <a:buNone/>
+            </a:pPr>
+            <a:r>
+              <a:t/>
+            </a:r>
+            <a:endParaRPr/>
+          </a:p>
+        </p:txBody>
+      </p:sp>
+      <p:sp>
+        <p:nvSpPr>
+          <p:cNvPr id="672" name="Google Shape;672;p55"/>
+          <p:cNvSpPr/>
+          <p:nvPr/>
+        </p:nvSpPr>
+        <p:spPr>
+          <a:xfrm>
+            <a:off x="2605074" y="1362233"/>
+            <a:ext cx="76199" cy="76190"/>
+          </a:xfrm>
+          <a:prstGeom prst="roundRect">
+            <a:avLst>
+              <a:gd fmla="val 31500" name="adj"/>
+            </a:avLst>
+          </a:prstGeom>
+          <a:solidFill>
+            <a:srgbClr val="0077FF"/>
+          </a:solidFill>
+          <a:ln>
+            <a:noFill/>
+          </a:ln>
+        </p:spPr>
+        <p:txBody>
+          <a:bodyPr anchorCtr="0" anchor="ctr" bIns="91425" lIns="91425" spcFirstLastPara="1" rIns="91425" wrap="square" tIns="91425">
+            <a:noAutofit/>
+          </a:bodyPr>
+          <a:lstStyle/>
+          <a:p>
+            <a:pPr indent="0" lvl="0" marL="0" rtl="0" algn="l">
+              <a:spcBef>
+                <a:spcPts val="0"/>
+              </a:spcBef>
+              <a:spcAft>
+                <a:spcPts val="0"/>
+              </a:spcAft>
+              <a:buNone/>
+            </a:pPr>
+            <a:r>
+              <a:t/>
+            </a:r>
+            <a:endParaRPr/>
+          </a:p>
+        </p:txBody>
+      </p:sp>
+      <p:sp>
+        <p:nvSpPr>
+          <p:cNvPr id="675" name="Google Shape;675;p55"/>
+          <p:cNvSpPr/>
+          <p:nvPr/>
+        </p:nvSpPr>
+        <p:spPr>
+          <a:xfrm>
+            <a:off x="4619601" y="1209852"/>
+            <a:ext cx="2071677" cy="3014270"/>
+          </a:xfrm>
+          <a:prstGeom prst="roundRect">
+            <a:avLst>
+              <a:gd fmla="val 4634" name="adj"/>
+            </a:avLst>
+          </a:prstGeom>
+          <a:solidFill>
+            <a:schemeClr val="lt2"/>
+          </a:solidFill>
+          <a:ln>
+            <a:noFill/>
+          </a:ln>
+        </p:spPr>
+        <p:txBody>
+          <a:bodyPr anchorCtr="0" anchor="ctr" bIns="91425" lIns="91425" spcFirstLastPara="1" rIns="91425" wrap="square" tIns="91425">
+            <a:noAutofit/>
+          </a:bodyPr>
+          <a:lstStyle/>
+          <a:p>
+            <a:pPr indent="0" lvl="0" marL="0" rtl="0" algn="l">
+              <a:spcBef>
+                <a:spcPts val="0"/>
+              </a:spcBef>
+              <a:spcAft>
+                <a:spcPts val="0"/>
+              </a:spcAft>
+              <a:buNone/>
+            </a:pPr>
+            <a:r>
+              <a:t/>
+            </a:r>
+            <a:endParaRPr/>
+          </a:p>
+        </p:txBody>
+      </p:sp>
+      <p:sp>
+        <p:nvSpPr>
+          <p:cNvPr id="676" name="Google Shape;676;p55"/>
+          <p:cNvSpPr/>
+          <p:nvPr/>
+        </p:nvSpPr>
+        <p:spPr>
+          <a:xfrm>
+            <a:off x="4772001" y="1362233"/>
+            <a:ext cx="1766878" cy="342855"/>
+          </a:xfrm>
+          <a:prstGeom prst="rect">
+            <a:avLst/>
+          </a:prstGeom>
+          <a:noFill/>
+          <a:ln>
+            <a:noFill/>
+          </a:ln>
+        </p:spPr>
+        <p:txBody>
+          <a:bodyPr anchorCtr="0" anchor="ctr" bIns="91425" lIns="91425" spcFirstLastPara="1" rIns="91425" wrap="square" tIns="91425">
+            <a:noAutofit/>
+          </a:bodyPr>
+          <a:lstStyle/>
+          <a:p>
+            <a:pPr indent="0" lvl="0" marL="0" rtl="0" algn="l">
+              <a:spcBef>
+                <a:spcPts val="0"/>
+              </a:spcBef>
+              <a:spcAft>
+                <a:spcPts val="0"/>
+              </a:spcAft>
+              <a:buNone/>
+            </a:pPr>
+            <a:r>
+              <a:t/>
+            </a:r>
+            <a:endParaRPr/>
+          </a:p>
+        </p:txBody>
+      </p:sp>
+      <p:sp>
+        <p:nvSpPr>
+          <p:cNvPr id="677" name="Google Shape;677;p55"/>
+          <p:cNvSpPr/>
+          <p:nvPr/>
+        </p:nvSpPr>
+        <p:spPr>
+          <a:xfrm>
+            <a:off x="4772001" y="1362233"/>
+            <a:ext cx="76199" cy="76190"/>
+          </a:xfrm>
+          <a:prstGeom prst="roundRect">
+            <a:avLst>
+              <a:gd fmla="val 31500" name="adj"/>
+            </a:avLst>
+          </a:prstGeom>
+          <a:solidFill>
+            <a:srgbClr val="0077FF"/>
+          </a:solidFill>
+          <a:ln>
+            <a:noFill/>
+          </a:ln>
+        </p:spPr>
+        <p:txBody>
+          <a:bodyPr anchorCtr="0" anchor="ctr" bIns="91425" lIns="91425" spcFirstLastPara="1" rIns="91425" wrap="square" tIns="91425">
+            <a:noAutofit/>
+          </a:bodyPr>
+          <a:lstStyle/>
+          <a:p>
+            <a:pPr indent="0" lvl="0" marL="0" rtl="0" algn="l">
+              <a:spcBef>
+                <a:spcPts val="0"/>
+              </a:spcBef>
+              <a:spcAft>
+                <a:spcPts val="0"/>
+              </a:spcAft>
+              <a:buNone/>
+            </a:pPr>
+            <a:r>
+              <a:t/>
+            </a:r>
+            <a:endParaRPr/>
+          </a:p>
+        </p:txBody>
+      </p:sp>
+      <p:sp>
+        <p:nvSpPr>
+          <p:cNvPr id="680" name="Google Shape;680;p55"/>
+          <p:cNvSpPr/>
+          <p:nvPr/>
+        </p:nvSpPr>
+        <p:spPr>
+          <a:xfrm>
+            <a:off x="6786527" y="1209852"/>
+            <a:ext cx="2071677" cy="3014270"/>
+          </a:xfrm>
+          <a:prstGeom prst="roundRect">
+            <a:avLst>
+              <a:gd fmla="val 4634" name="adj"/>
+            </a:avLst>
+          </a:prstGeom>
+          <a:solidFill>
+            <a:schemeClr val="lt2"/>
+          </a:solidFill>
+          <a:ln>
+            <a:noFill/>
+          </a:ln>
+        </p:spPr>
+        <p:txBody>
+          <a:bodyPr anchorCtr="0" anchor="ctr" bIns="91425" lIns="91425" spcFirstLastPara="1" rIns="91425" wrap="square" tIns="91425">
+            <a:noAutofit/>
+          </a:bodyPr>
+          <a:lstStyle/>
+          <a:p>
+            <a:pPr indent="0" lvl="0" marL="0" rtl="0" algn="l">
+              <a:spcBef>
+                <a:spcPts val="0"/>
+              </a:spcBef>
+              <a:spcAft>
+                <a:spcPts val="0"/>
+              </a:spcAft>
+              <a:buNone/>
+            </a:pPr>
+            <a:r>
+              <a:t/>
+            </a:r>
+            <a:endParaRPr/>
+          </a:p>
+        </p:txBody>
+      </p:sp>
+      <p:sp>
+        <p:nvSpPr>
+          <p:cNvPr id="681" name="Google Shape;681;p55"/>
+          <p:cNvSpPr/>
+          <p:nvPr/>
+        </p:nvSpPr>
+        <p:spPr>
+          <a:xfrm>
+            <a:off x="6938927" y="1362233"/>
+            <a:ext cx="1766878" cy="342855"/>
+          </a:xfrm>
+          <a:prstGeom prst="rect">
+            <a:avLst/>
+          </a:prstGeom>
+          <a:noFill/>
+          <a:ln>
+            <a:noFill/>
+          </a:ln>
+        </p:spPr>
+        <p:txBody>
+          <a:bodyPr anchorCtr="0" anchor="ctr" bIns="91425" lIns="91425" spcFirstLastPara="1" rIns="91425" wrap="square" tIns="91425">
+            <a:noAutofit/>
+          </a:bodyPr>
+          <a:lstStyle/>
+          <a:p>
+            <a:pPr indent="0" lvl="0" marL="0" rtl="0" algn="l">
+              <a:spcBef>
+                <a:spcPts val="0"/>
+              </a:spcBef>
+              <a:spcAft>
+                <a:spcPts val="0"/>
+              </a:spcAft>
+              <a:buNone/>
+            </a:pPr>
+            <a:r>
+              <a:t/>
+            </a:r>
+            <a:endParaRPr/>
+          </a:p>
+        </p:txBody>
+      </p:sp>
+      <p:sp>
+        <p:nvSpPr>
+          <p:cNvPr id="682" name="Google Shape;682;p55"/>
+          <p:cNvSpPr/>
+          <p:nvPr/>
+        </p:nvSpPr>
+        <p:spPr>
+          <a:xfrm>
+            <a:off x="6938927" y="1362233"/>
+            <a:ext cx="76199" cy="76190"/>
+          </a:xfrm>
+          <a:prstGeom prst="roundRect">
+            <a:avLst>
+              <a:gd fmla="val 31500" name="adj"/>
+            </a:avLst>
+          </a:prstGeom>
+          <a:solidFill>
+            <a:srgbClr val="0077FF"/>
+          </a:solidFill>
+          <a:ln>
+            <a:noFill/>
+          </a:ln>
+        </p:spPr>
+        <p:txBody>
+          <a:bodyPr anchorCtr="0" anchor="ctr" bIns="91425" lIns="91425" spcFirstLastPara="1" rIns="91425" wrap="square" tIns="91425">
+            <a:noAutofit/>
+          </a:bodyPr>
+          <a:lstStyle/>
+          <a:p>
+            <a:pPr indent="0" lvl="0" marL="0" rtl="0" algn="l">
+              <a:spcBef>
+                <a:spcPts val="0"/>
+              </a:spcBef>
+              <a:spcAft>
+                <a:spcPts val="0"/>
+              </a:spcAft>
+              <a:buNone/>
+            </a:pPr>
+            <a:r>
+              <a:t/>
+            </a:r>
+            <a:endParaRPr/>
+          </a:p>
+        </p:txBody>
+      </p:sp>
+      <p:sp>
+        <p:nvSpPr>
+          <p:cNvPr id="683" name="title"/>
           <p:cNvSpPr txBox="1"/>
           <p:nvPr/>
         </p:nvSpPr>
         <p:spPr>
           <a:xfrm>
             <a:off x="274320" y="282943"/>
-            <a:ext cx="6792986" cy="932027"/>
+            <a:ext cx="6792986" cy="617220"/>
           </a:xfrm>
           <a:prstGeom prst="rect">
             <a:avLst/>
@@ -9076,29 +9253,207 @@
                 <a:ea typeface="Play"/>
                 <a:cs typeface="Play"/>
               </a:rPr>
-              <a:t>Стоимость пилота: 1 400 руб за 6 недель</a:t>
+              <a:t>План пилота</a:t>
             </a:r>
           </a:p>
         </p:txBody>
       </p:sp>
-      <p:graphicFrame>
-        <p:nvGraphicFramePr>
-          <p:cNvPr id="2394" name="Chart 2393"/>
-          <p:cNvGraphicFramePr>
-            <a:graphicFrameLocks noGrp="1"/>
-          </p:cNvGraphicFramePr>
-          <p:nvPr/>
-        </p:nvGraphicFramePr>
-        <p:xfrm>
-          <a:off x="274320" y="2009822"/>
-          <a:ext cx="8344814" cy="2160270"/>
-        </p:xfrm>
-        <a:graphic>
-          <a:graphicData uri="http://schemas.openxmlformats.org/drawingml/2006/chart">
-            <c:chart xmlns:c="http://schemas.openxmlformats.org/drawingml/2006/chart" r:id="rId4"/>
-          </a:graphicData>
-        </a:graphic>
-      </p:graphicFrame>
+      <p:sp>
+        <p:nvSpPr>
+          <p:cNvPr id="684" name="card_0"/>
+          <p:cNvSpPr txBox="1"/>
+          <p:nvPr/>
+        </p:nvSpPr>
+        <p:spPr>
+          <a:xfrm>
+            <a:off x="582575" y="1963753"/>
+            <a:ext cx="1516144" cy="2001662"/>
+          </a:xfrm>
+          <a:prstGeom prst="rect">
+            <a:avLst/>
+          </a:prstGeom>
+          <a:noFill/>
+        </p:spPr>
+        <p:txBody>
+          <a:bodyPr wrap="square" lIns="76200" rIns="76200" tIns="50800" bIns="50800">
+            <a:spAutoFit/>
+          </a:bodyPr>
+          <a:lstStyle/>
+          <a:p>
+            <a:pPr algn="l">
+              <a:spcAft>
+                <a:spcPts val="300"/>
+              </a:spcAft>
+              <a:defRPr sz="1800" b="0">
+                <a:solidFill>
+                  <a:srgbClr val="000000"/>
+                </a:solidFill>
+                <a:latin typeface="Play"/>
+                <a:ea typeface="Play"/>
+                <a:cs typeface="Play"/>
+              </a:defRPr>
+            </a:pPr>
+            <a:r>
+              <a:rPr sz="1800" b="0">
+                <a:solidFill>
+                  <a:srgbClr val="000000"/>
+                </a:solidFill>
+                <a:latin typeface="Play"/>
+                <a:ea typeface="Play"/>
+                <a:cs typeface="Play"/>
+              </a:rPr>
+              <a:t>Подключить ещё 4 команды в Q3 2026</a:t>
+            </a:r>
+          </a:p>
+        </p:txBody>
+      </p:sp>
+      <p:sp>
+        <p:nvSpPr>
+          <p:cNvPr id="685" name="card_1"/>
+          <p:cNvSpPr txBox="1"/>
+          <p:nvPr/>
+        </p:nvSpPr>
+        <p:spPr>
+          <a:xfrm>
+            <a:off x="2749428" y="1963753"/>
+            <a:ext cx="1516144" cy="2001662"/>
+          </a:xfrm>
+          <a:prstGeom prst="rect">
+            <a:avLst/>
+          </a:prstGeom>
+          <a:noFill/>
+        </p:spPr>
+        <p:txBody>
+          <a:bodyPr wrap="square" lIns="76200" rIns="76200" tIns="50800" bIns="50800">
+            <a:spAutoFit/>
+          </a:bodyPr>
+          <a:lstStyle/>
+          <a:p>
+            <a:pPr algn="l">
+              <a:spcAft>
+                <a:spcPts val="300"/>
+              </a:spcAft>
+              <a:defRPr sz="1800" b="0">
+                <a:solidFill>
+                  <a:srgbClr val="000000"/>
+                </a:solidFill>
+                <a:latin typeface="Play"/>
+                <a:ea typeface="Play"/>
+                <a:cs typeface="Play"/>
+              </a:defRPr>
+            </a:pPr>
+            <a:r>
+              <a:rPr sz="1800" b="0">
+                <a:solidFill>
+                  <a:srgbClr val="000000"/>
+                </a:solidFill>
+                <a:latin typeface="Play"/>
+                <a:ea typeface="Play"/>
+                <a:cs typeface="Play"/>
+              </a:rPr>
+              <a:t>Настроить домен и HTTPS</a:t>
+            </a:r>
+          </a:p>
+        </p:txBody>
+      </p:sp>
+      <p:sp>
+        <p:nvSpPr>
+          <p:cNvPr id="686" name="card_2"/>
+          <p:cNvSpPr txBox="1"/>
+          <p:nvPr/>
+        </p:nvSpPr>
+        <p:spPr>
+          <a:xfrm>
+            <a:off x="4916374" y="1963753"/>
+            <a:ext cx="1516144" cy="2001662"/>
+          </a:xfrm>
+          <a:prstGeom prst="rect">
+            <a:avLst/>
+          </a:prstGeom>
+          <a:noFill/>
+        </p:spPr>
+        <p:txBody>
+          <a:bodyPr wrap="square" lIns="76200" rIns="76200" tIns="50800" bIns="50800">
+            <a:spAutoFit/>
+          </a:bodyPr>
+          <a:lstStyle/>
+          <a:p>
+            <a:pPr algn="l">
+              <a:spcAft>
+                <a:spcPts val="300"/>
+              </a:spcAft>
+              <a:defRPr sz="1800" b="0">
+                <a:solidFill>
+                  <a:srgbClr val="000000"/>
+                </a:solidFill>
+                <a:latin typeface="Play"/>
+                <a:ea typeface="Play"/>
+                <a:cs typeface="Play"/>
+              </a:defRPr>
+            </a:pPr>
+            <a:r>
+              <a:rPr sz="1800" b="0">
+                <a:solidFill>
+                  <a:srgbClr val="000000"/>
+                </a:solidFill>
+                <a:latin typeface="Play"/>
+                <a:ea typeface="Play"/>
+                <a:cs typeface="Play"/>
+              </a:rPr>
+              <a:t>Интегрировать с корпоративным хранилищем документов</a:t>
+            </a:r>
+          </a:p>
+        </p:txBody>
+      </p:sp>
+      <p:sp>
+        <p:nvSpPr>
+          <p:cNvPr id="687" name="card_3"/>
+          <p:cNvSpPr txBox="1"/>
+          <p:nvPr/>
+        </p:nvSpPr>
+        <p:spPr>
+          <a:xfrm>
+            <a:off x="7083319" y="1963753"/>
+            <a:ext cx="1516144" cy="2001662"/>
+          </a:xfrm>
+          <a:prstGeom prst="rect">
+            <a:avLst/>
+          </a:prstGeom>
+          <a:noFill/>
+        </p:spPr>
+        <p:txBody>
+          <a:bodyPr wrap="square" lIns="76200" rIns="76200" tIns="50800" bIns="50800">
+            <a:spAutoFit/>
+          </a:bodyPr>
+          <a:lstStyle/>
+          <a:p>
+            <a:pPr algn="l">
+              <a:spcAft>
+                <a:spcPts val="300"/>
+              </a:spcAft>
+              <a:defRPr sz="1800" b="0">
+                <a:solidFill>
+                  <a:srgbClr val="000000"/>
+                </a:solidFill>
+                <a:latin typeface="Play"/>
+                <a:ea typeface="Play"/>
+                <a:cs typeface="Play"/>
+              </a:defRPr>
+            </a:pPr>
+            <a:r>
+              <a:rPr sz="1800" b="0">
+                <a:solidFill>
+                  <a:srgbClr val="000000"/>
+                </a:solidFill>
+                <a:latin typeface="Play"/>
+                <a:ea typeface="Play"/>
+                <a:cs typeface="Play"/>
+              </a:rPr>
+              <a:t>В Q1 2027 добавить генерацию иллюстраций</a:t>
+            </a:r>
+          </a:p>
+        </p:txBody>
+      </p:sp>
     </p:spTree>
   </p:cSld>
   <p:clrMapOvr>
@@ -9921,7 +10276,7 @@
                 <a:ea typeface="Play"/>
                 <a:cs typeface="Play"/>
               </a:rPr>
-              <a:t>Ключевые риски и меры</a:t>
+              <a:t>Что мы просим решить</a:t>
             </a:r>
           </a:p>
         </p:txBody>
@@ -9935,6 +10290,55 @@
         <p:spPr>
           <a:xfrm>
             <a:off x="576030" y="1728705"/>
+            <a:ext cx="2264138" cy="632134"/>
+          </a:xfrm>
+          <a:prstGeom prst="rect">
+            <a:avLst/>
+          </a:prstGeom>
+          <a:noFill/>
+        </p:spPr>
+        <p:txBody>
+          <a:bodyPr wrap="square" lIns="76200" rIns="76200" tIns="50800" bIns="50800">
+            <a:spAutoFit/>
+          </a:bodyPr>
+          <a:lstStyle/>
+          <a:p>
+            <a:pPr algn="l">
+              <a:spcAft>
+                <a:spcPts val="300"/>
+              </a:spcAft>
+              <a:defRPr sz="1400" b="0">
+                <a:solidFill>
+                  <a:srgbClr val="000000"/>
+                </a:solidFill>
+                <a:latin typeface="Play"/>
+                <a:ea typeface="Play"/>
+                <a:cs typeface="Play"/>
+              </a:defRPr>
+            </a:pPr>
+            <a:r>
+              <a:rPr sz="1400" b="0">
+                <a:solidFill>
+                  <a:srgbClr val="000000"/>
+                </a:solidFill>
+                <a:latin typeface="Play"/>
+                <a:ea typeface="Play"/>
+                <a:cs typeface="Play"/>
+              </a:rPr>
+              <a:t>Одобрить запуск сервиса на всю компанию</a:t>
+            </a:r>
+          </a:p>
+        </p:txBody>
+      </p:sp>
+      <p:sp>
+        <p:nvSpPr>
+          <p:cNvPr id="1052" name="card_1"/>
+          <p:cNvSpPr txBox="1"/>
+          <p:nvPr/>
+        </p:nvSpPr>
+        <p:spPr>
+          <a:xfrm>
+            <a:off x="3465259" y="1728705"/>
             <a:ext cx="2264138" cy="632134"/>
           </a:xfrm>
           <a:prstGeom prst="rect">
@@ -9970,20 +10374,20 @@
                 <a:ea typeface="Play"/>
                 <a:cs typeface="Play"/>
               </a:rPr>
-              <a:t>Модель может выдумать цифры – аудит проверяет</a:t>
+              <a:t>Предоставить ресурсы для масштабирования (серверы, лицензии)</a:t>
             </a:r>
           </a:p>
         </p:txBody>
       </p:sp>
       <p:sp>
         <p:nvSpPr>
-          <p:cNvPr id="1052" name="card_1"/>
+          <p:cNvPr id="1053" name="card_2"/>
           <p:cNvSpPr txBox="1"/>
           <p:nvPr/>
         </p:nvSpPr>
         <p:spPr>
           <a:xfrm>
-            <a:off x="3465259" y="1728705"/>
+            <a:off x="6354489" y="1728705"/>
             <a:ext cx="2264138" cy="632134"/>
           </a:xfrm>
           <a:prstGeom prst="rect">
@@ -10019,56 +10423,7 @@
                 <a:ea typeface="Play"/>
                 <a:cs typeface="Play"/>
               </a:rPr>
-              <a:t>Плохой шаблон – сервис использует рабочую область</a:t>
-            </a:r>
-          </a:p>
-        </p:txBody>
-      </p:sp>
-      <p:sp>
-        <p:nvSpPr>
-          <p:cNvPr id="1053" name="card_2"/>
-          <p:cNvSpPr txBox="1"/>
-          <p:nvPr/>
-        </p:nvSpPr>
-        <p:spPr>
-          <a:xfrm>
-            <a:off x="6354489" y="1728705"/>
-            <a:ext cx="2264138" cy="632134"/>
-          </a:xfrm>
-          <a:prstGeom prst="rect">
-            <a:avLst/>
-          </a:prstGeom>
-          <a:noFill/>
-        </p:spPr>
-        <p:txBody>
-          <a:bodyPr wrap="square" lIns="76200" rIns="76200" tIns="50800" bIns="50800">
-            <a:spAutoFit/>
-          </a:bodyPr>
-          <a:lstStyle/>
-          <a:p>
-            <a:pPr algn="l">
-              <a:spcAft>
-                <a:spcPts val="300"/>
-              </a:spcAft>
-              <a:defRPr sz="1400" b="0">
-                <a:solidFill>
-                  <a:srgbClr val="000000"/>
-                </a:solidFill>
-                <a:latin typeface="Play"/>
-                <a:ea typeface="Play"/>
-                <a:cs typeface="Play"/>
-              </a:defRPr>
-            </a:pPr>
-            <a:r>
-              <a:rPr sz="1400" b="0">
-                <a:solidFill>
-                  <a:srgbClr val="000000"/>
-                </a:solidFill>
-                <a:latin typeface="Play"/>
-                <a:ea typeface="Play"/>
-                <a:cs typeface="Play"/>
-              </a:rPr>
-              <a:t>Нагрузка &gt;20 задач – нужна внешняя очередь</a:t>
+              <a:t>Согласовать сроки и ответственных за интеграцию</a:t>
             </a:r>
           </a:p>
         </p:txBody>
@@ -10100,7 +10455,7 @@
         <p:spPr>
           <a:xfrm>
             <a:off x="1543608" y="159030"/>
-            <a:ext cx="7202525" cy="3314394"/>
+            <a:ext cx="7202525" cy="3282246"/>
           </a:xfrm>
           <a:prstGeom prst="roundRect">
             <a:avLst/>
@@ -10146,7 +10501,7 @@
         <p:spPr>
           <a:xfrm>
             <a:off x="1670608" y="286030"/>
-            <a:ext cx="6948525" cy="1183640"/>
+            <a:ext cx="6948525" cy="655320"/>
           </a:xfrm>
           <a:prstGeom prst="rect">
             <a:avLst/>
@@ -10181,7 +10536,7 @@
                 <a:ea typeface="Play"/>
                 <a:cs typeface="Play"/>
               </a:rPr>
-              <a:t>Решение: запуск сервиса на всю компанию</a:t>
+              <a:t>Вывод</a:t>
             </a:r>
           </a:p>
         </p:txBody>
@@ -10194,8 +10549,8 @@
         </p:nvSpPr>
         <p:spPr>
           <a:xfrm>
-            <a:off x="1670608" y="2188185"/>
-            <a:ext cx="6948525" cy="1158240"/>
+            <a:off x="1670608" y="1891876"/>
+            <a:ext cx="6948525" cy="1422400"/>
           </a:xfrm>
           <a:prstGeom prst="rect">
             <a:avLst/>
@@ -10230,7 +10585,7 @@
                 <a:ea typeface="Play"/>
                 <a:cs typeface="Play"/>
               </a:rPr>
-              <a:t>• Q3 2026 подключить 4 команды, Q4 2026 доступ для всей компании, Q1 2027 генерация иллюстраций</a:t>
+              <a:t>• Автоматизация вёрстки повышает скорость, качество и экономит ресурсы</a:t>
             </a:r>
           </a:p>
           <a:p>
@@ -10256,7 +10611,7 @@
                 <a:ea typeface="Play"/>
                 <a:cs typeface="Play"/>
               </a:rPr>
-              <a:t>• Требуем одобрение запуска и ресурсы</a:t>
+              <a:t>• Пилот показал значительный рост эффективности</a:t>
             </a:r>
           </a:p>
           <a:p>
@@ -10282,7 +10637,7 @@
                 <a:ea typeface="Play"/>
                 <a:cs typeface="Play"/>
               </a:rPr>
-              <a:t>• Ожидаем ускорение и стандартизацию</a:t>
+              <a:t>• Запуск на всю компанию – стратегический шаг к цифровой трансформации</a:t>
             </a:r>
           </a:p>
         </p:txBody>

--- a/samples/VK_Tech_шаблон__classic.pptx
+++ b/samples/VK_Tech_шаблон__classic.pptx
@@ -281,220 +281,6 @@
               <c:strCache>
                 <c:ptCount val="1"/>
                 <c:pt idx="0">
-                  <c:v>Кол-во</c:v>
-                </c:pt>
-              </c:strCache>
-            </c:strRef>
-          </c:tx>
-          <c:spPr>
-            <a:solidFill>
-              <a:srgbClr val="0077FF"/>
-            </a:solidFill>
-            <a:ln>
-              <a:solidFill>
-                <a:srgbClr val="0077FF"/>
-              </a:solidFill>
-            </a:ln>
-          </c:spPr>
-          <c:cat>
-            <c:strRef>
-              <c:f>Sheet1!$A$2:$A$3</c:f>
-              <c:strCache>
-                <c:ptCount val="2"/>
-                <c:pt idx="0">
-                  <c:v>Запросы</c:v>
-                </c:pt>
-                <c:pt idx="1">
-                  <c:v>Закрыто</c:v>
-                </c:pt>
-              </c:strCache>
-            </c:strRef>
-          </c:cat>
-          <c:val>
-            <c:numRef>
-              <c:f>Sheet1!$B$2:$B$3</c:f>
-              <c:numCache>
-                <c:formatCode>General</c:formatCode>
-                <c:ptCount val="2"/>
-                <c:pt idx="0">
-                  <c:v>27.0</c:v>
-                </c:pt>
-                <c:pt idx="1">
-                  <c:v>11.0</c:v>
-                </c:pt>
-              </c:numCache>
-            </c:numRef>
-          </c:val>
-        </c:ser>
-        <c:dLbls>
-          <c:numFmt formatCode="0&quot; запросов&quot;" sourceLinked="0"/>
-          <c:txPr>
-            <a:bodyPr wrap="none"/>
-            <a:lstStyle/>
-            <a:p>
-              <a:pPr>
-                <a:defRPr sz="1100" b="0">
-                  <a:solidFill>
-                    <a:srgbClr val="000000"/>
-                  </a:solidFill>
-                  <a:latin typeface="Play"/>
-                  <a:ea typeface="Play"/>
-                  <a:cs typeface="Play"/>
-                </a:defRPr>
-              </a:pPr>
-            </a:p>
-          </c:txPr>
-          <c:dLblPos val="outEnd"/>
-          <c:showLegendKey val="0"/>
-          <c:showVal val="1"/>
-          <c:showCatName val="0"/>
-          <c:showSerName val="0"/>
-          <c:showPercent val="0"/>
-          <c:showBubbleSize val="0"/>
-          <c:showLeaderLines val="1"/>
-        </c:dLbls>
-        <c:gapWidth val="60"/>
-        <c:axId val="-2068027336"/>
-        <c:axId val="-2113994440"/>
-      </c:barChart>
-      <c:catAx>
-        <c:axId val="-2068027336"/>
-        <c:scaling>
-          <c:orientation val="minMax"/>
-        </c:scaling>
-        <c:delete val="0"/>
-        <c:axPos val="b"/>
-        <c:majorTickMark val="out"/>
-        <c:minorTickMark val="none"/>
-        <c:tickLblPos val="nextTo"/>
-        <c:txPr>
-          <a:bodyPr/>
-          <a:lstStyle/>
-          <a:p>
-            <a:pPr>
-              <a:defRPr sz="1100" b="0">
-                <a:solidFill>
-                  <a:srgbClr val="000000"/>
-                </a:solidFill>
-                <a:latin typeface="Play"/>
-                <a:ea typeface="Play"/>
-                <a:cs typeface="Play"/>
-              </a:defRPr>
-            </a:pPr>
-          </a:p>
-        </c:txPr>
-        <c:crossAx val="-2113994440"/>
-        <c:crosses val="autoZero"/>
-        <c:auto val="1"/>
-        <c:lblAlgn val="ctr"/>
-        <c:lblOffset val="100"/>
-        <c:noMultiLvlLbl val="0"/>
-      </c:catAx>
-      <c:valAx>
-        <c:axId val="-2113994440"/>
-        <c:scaling/>
-        <c:delete val="0"/>
-        <c:axPos val="l"/>
-        <c:majorGridlines>
-          <c:spPr>
-            <a:ln w="9525">
-              <a:solidFill>
-                <a:srgbClr val="D1D1D1"/>
-              </a:solidFill>
-            </a:ln>
-          </c:spPr>
-        </c:majorGridlines>
-        <c:title>
-          <c:tx>
-            <c:rich>
-              <a:bodyPr rot="0" vert="horz"/>
-              <a:lstStyle/>
-              <a:p>
-                <a:pPr>
-                  <a:defRPr sz="1100" b="0">
-                    <a:solidFill>
-                      <a:srgbClr val="000000"/>
-                    </a:solidFill>
-                    <a:latin typeface="Play"/>
-                    <a:ea typeface="Play"/>
-                    <a:cs typeface="Play"/>
-                  </a:defRPr>
-                </a:pPr>
-                <a:r>
-                  <a:t>Кол-во, запросов</a:t>
-                </a:r>
-              </a:p>
-            </c:rich>
-          </c:tx>
-          <c:layout/>
-          <c:overlay val="0"/>
-        </c:title>
-        <c:majorTickMark val="out"/>
-        <c:minorTickMark val="none"/>
-        <c:tickLblPos val="nextTo"/>
-        <c:txPr>
-          <a:bodyPr/>
-          <a:lstStyle/>
-          <a:p>
-            <a:pPr>
-              <a:defRPr sz="1100" b="0">
-                <a:solidFill>
-                  <a:srgbClr val="000000"/>
-                </a:solidFill>
-                <a:latin typeface="Play"/>
-                <a:ea typeface="Play"/>
-                <a:cs typeface="Play"/>
-              </a:defRPr>
-            </a:pPr>
-          </a:p>
-        </c:txPr>
-        <c:crossAx val="-2068027336"/>
-        <c:crosses val="autoZero"/>
-      </c:valAx>
-    </c:plotArea>
-    <c:dispBlanksAs val="gap"/>
-  </c:chart>
-  <c:txPr>
-    <a:bodyPr/>
-    <a:lstStyle/>
-    <a:p>
-      <a:pPr>
-        <a:defRPr sz="1200" b="0">
-          <a:solidFill>
-            <a:srgbClr val="000000"/>
-          </a:solidFill>
-          <a:latin typeface="Play"/>
-          <a:ea typeface="Play"/>
-          <a:cs typeface="Play"/>
-        </a:defRPr>
-      </a:pPr>
-      <a:endParaRPr lang="en-US"/>
-    </a:p>
-  </c:txPr>
-  <c:externalData r:id="rId1">
-    <c:autoUpdate val="0"/>
-  </c:externalData>
-</c:chartSpace>
-</file>
-
-<file path=ppt/charts/chart2.xml><?xml version="1.0" encoding="utf-8"?>
-<c:chartSpace xmlns:c="http://schemas.openxmlformats.org/drawingml/2006/chart" xmlns:a="http://schemas.openxmlformats.org/drawingml/2006/main" xmlns:r="http://schemas.openxmlformats.org/officeDocument/2006/relationships">
-  <c:date1904 val="0"/>
-  <c:chart>
-    <c:autoTitleDeleted val="1"/>
-    <c:plotArea>
-      <c:barChart>
-        <c:barDir val="col"/>
-        <c:grouping val="clustered"/>
-        <c:ser>
-          <c:idx val="0"/>
-          <c:order val="0"/>
-          <c:tx>
-            <c:strRef>
-              <c:f>Sheet1!$B$1</c:f>
-              <c:strCache>
-                <c:ptCount val="1"/>
-                <c:pt idx="0">
                   <c:v>Время</c:v>
                 </c:pt>
               </c:strCache>
@@ -516,7 +302,7 @@
               <c:strCache>
                 <c:ptCount val="2"/>
                 <c:pt idx="0">
-                  <c:v>Сейчас</c:v>
+                  <c:v>Ручная</c:v>
                 </c:pt>
                 <c:pt idx="1">
                   <c:v>Сервис</c:v>
@@ -636,6 +422,220 @@
                 </a:pPr>
                 <a:r>
                   <a:t>Время, мин</a:t>
+                </a:r>
+              </a:p>
+            </c:rich>
+          </c:tx>
+          <c:layout/>
+          <c:overlay val="0"/>
+        </c:title>
+        <c:majorTickMark val="out"/>
+        <c:minorTickMark val="none"/>
+        <c:tickLblPos val="nextTo"/>
+        <c:txPr>
+          <a:bodyPr/>
+          <a:lstStyle/>
+          <a:p>
+            <a:pPr>
+              <a:defRPr sz="1100" b="0">
+                <a:solidFill>
+                  <a:srgbClr val="000000"/>
+                </a:solidFill>
+                <a:latin typeface="Play"/>
+                <a:ea typeface="Play"/>
+                <a:cs typeface="Play"/>
+              </a:defRPr>
+            </a:pPr>
+          </a:p>
+        </c:txPr>
+        <c:crossAx val="-2068027336"/>
+        <c:crosses val="autoZero"/>
+      </c:valAx>
+    </c:plotArea>
+    <c:dispBlanksAs val="gap"/>
+  </c:chart>
+  <c:txPr>
+    <a:bodyPr/>
+    <a:lstStyle/>
+    <a:p>
+      <a:pPr>
+        <a:defRPr sz="1200" b="0">
+          <a:solidFill>
+            <a:srgbClr val="000000"/>
+          </a:solidFill>
+          <a:latin typeface="Play"/>
+          <a:ea typeface="Play"/>
+          <a:cs typeface="Play"/>
+        </a:defRPr>
+      </a:pPr>
+      <a:endParaRPr lang="en-US"/>
+    </a:p>
+  </c:txPr>
+  <c:externalData r:id="rId1">
+    <c:autoUpdate val="0"/>
+  </c:externalData>
+</c:chartSpace>
+</file>
+
+<file path=ppt/charts/chart2.xml><?xml version="1.0" encoding="utf-8"?>
+<c:chartSpace xmlns:c="http://schemas.openxmlformats.org/drawingml/2006/chart" xmlns:a="http://schemas.openxmlformats.org/drawingml/2006/main" xmlns:r="http://schemas.openxmlformats.org/officeDocument/2006/relationships">
+  <c:date1904 val="0"/>
+  <c:chart>
+    <c:autoTitleDeleted val="1"/>
+    <c:plotArea>
+      <c:barChart>
+        <c:barDir val="col"/>
+        <c:grouping val="clustered"/>
+        <c:ser>
+          <c:idx val="0"/>
+          <c:order val="0"/>
+          <c:tx>
+            <c:strRef>
+              <c:f>Sheet1!$B$1</c:f>
+              <c:strCache>
+                <c:ptCount val="1"/>
+                <c:pt idx="0">
+                  <c:v>Срок</c:v>
+                </c:pt>
+              </c:strCache>
+            </c:strRef>
+          </c:tx>
+          <c:spPr>
+            <a:solidFill>
+              <a:srgbClr val="0077FF"/>
+            </a:solidFill>
+            <a:ln>
+              <a:solidFill>
+                <a:srgbClr val="0077FF"/>
+              </a:solidFill>
+            </a:ln>
+          </c:spPr>
+          <c:cat>
+            <c:strRef>
+              <c:f>Sheet1!$A$2:$A$3</c:f>
+              <c:strCache>
+                <c:ptCount val="2"/>
+                <c:pt idx="0">
+                  <c:v>6 дней</c:v>
+                </c:pt>
+                <c:pt idx="1">
+                  <c:v>1 день</c:v>
+                </c:pt>
+              </c:strCache>
+            </c:strRef>
+          </c:cat>
+          <c:val>
+            <c:numRef>
+              <c:f>Sheet1!$B$2:$B$3</c:f>
+              <c:numCache>
+                <c:formatCode>General</c:formatCode>
+                <c:ptCount val="2"/>
+                <c:pt idx="0">
+                  <c:v>6.0</c:v>
+                </c:pt>
+                <c:pt idx="1">
+                  <c:v>1.0</c:v>
+                </c:pt>
+              </c:numCache>
+            </c:numRef>
+          </c:val>
+        </c:ser>
+        <c:dLbls>
+          <c:numFmt formatCode="0&quot; дней&quot;" sourceLinked="0"/>
+          <c:txPr>
+            <a:bodyPr wrap="none"/>
+            <a:lstStyle/>
+            <a:p>
+              <a:pPr>
+                <a:defRPr sz="1100" b="0">
+                  <a:solidFill>
+                    <a:srgbClr val="000000"/>
+                  </a:solidFill>
+                  <a:latin typeface="Play"/>
+                  <a:ea typeface="Play"/>
+                  <a:cs typeface="Play"/>
+                </a:defRPr>
+              </a:pPr>
+            </a:p>
+          </c:txPr>
+          <c:dLblPos val="outEnd"/>
+          <c:showLegendKey val="0"/>
+          <c:showVal val="1"/>
+          <c:showCatName val="0"/>
+          <c:showSerName val="0"/>
+          <c:showPercent val="0"/>
+          <c:showBubbleSize val="0"/>
+          <c:showLeaderLines val="1"/>
+        </c:dLbls>
+        <c:gapWidth val="60"/>
+        <c:axId val="-2068027336"/>
+        <c:axId val="-2113994440"/>
+      </c:barChart>
+      <c:catAx>
+        <c:axId val="-2068027336"/>
+        <c:scaling>
+          <c:orientation val="minMax"/>
+        </c:scaling>
+        <c:delete val="0"/>
+        <c:axPos val="b"/>
+        <c:majorTickMark val="out"/>
+        <c:minorTickMark val="none"/>
+        <c:tickLblPos val="nextTo"/>
+        <c:txPr>
+          <a:bodyPr/>
+          <a:lstStyle/>
+          <a:p>
+            <a:pPr>
+              <a:defRPr sz="1100" b="0">
+                <a:solidFill>
+                  <a:srgbClr val="000000"/>
+                </a:solidFill>
+                <a:latin typeface="Play"/>
+                <a:ea typeface="Play"/>
+                <a:cs typeface="Play"/>
+              </a:defRPr>
+            </a:pPr>
+          </a:p>
+        </c:txPr>
+        <c:crossAx val="-2113994440"/>
+        <c:crosses val="autoZero"/>
+        <c:auto val="1"/>
+        <c:lblAlgn val="ctr"/>
+        <c:lblOffset val="100"/>
+        <c:noMultiLvlLbl val="0"/>
+      </c:catAx>
+      <c:valAx>
+        <c:axId val="-2113994440"/>
+        <c:scaling/>
+        <c:delete val="0"/>
+        <c:axPos val="l"/>
+        <c:majorGridlines>
+          <c:spPr>
+            <a:ln w="9525">
+              <a:solidFill>
+                <a:srgbClr val="D1D1D1"/>
+              </a:solidFill>
+            </a:ln>
+          </c:spPr>
+        </c:majorGridlines>
+        <c:title>
+          <c:tx>
+            <c:rich>
+              <a:bodyPr rot="0" vert="horz"/>
+              <a:lstStyle/>
+              <a:p>
+                <a:pPr>
+                  <a:defRPr sz="1100" b="0">
+                    <a:solidFill>
+                      <a:srgbClr val="000000"/>
+                    </a:solidFill>
+                    <a:latin typeface="Play"/>
+                    <a:ea typeface="Play"/>
+                    <a:cs typeface="Play"/>
+                  </a:defRPr>
+                </a:pPr>
+                <a:r>
+                  <a:t>Срок, дней</a:t>
                 </a:r>
               </a:p>
             </c:rich>
@@ -730,7 +730,7 @@
               <c:strCache>
                 <c:ptCount val="2"/>
                 <c:pt idx="0">
-                  <c:v>Сейчас</c:v>
+                  <c:v>Ручная</c:v>
                 </c:pt>
                 <c:pt idx="1">
                   <c:v>Сервис</c:v>
@@ -850,220 +850,6 @@
                 </a:pPr>
                 <a:r>
                   <a:t>Нарушения, колод</a:t>
-                </a:r>
-              </a:p>
-            </c:rich>
-          </c:tx>
-          <c:layout/>
-          <c:overlay val="0"/>
-        </c:title>
-        <c:majorTickMark val="out"/>
-        <c:minorTickMark val="none"/>
-        <c:tickLblPos val="nextTo"/>
-        <c:txPr>
-          <a:bodyPr/>
-          <a:lstStyle/>
-          <a:p>
-            <a:pPr>
-              <a:defRPr sz="1100" b="0">
-                <a:solidFill>
-                  <a:srgbClr val="000000"/>
-                </a:solidFill>
-                <a:latin typeface="Play"/>
-                <a:ea typeface="Play"/>
-                <a:cs typeface="Play"/>
-              </a:defRPr>
-            </a:pPr>
-          </a:p>
-        </c:txPr>
-        <c:crossAx val="-2068027336"/>
-        <c:crosses val="autoZero"/>
-      </c:valAx>
-    </c:plotArea>
-    <c:dispBlanksAs val="gap"/>
-  </c:chart>
-  <c:txPr>
-    <a:bodyPr/>
-    <a:lstStyle/>
-    <a:p>
-      <a:pPr>
-        <a:defRPr sz="1200" b="0">
-          <a:solidFill>
-            <a:srgbClr val="000000"/>
-          </a:solidFill>
-          <a:latin typeface="Play"/>
-          <a:ea typeface="Play"/>
-          <a:cs typeface="Play"/>
-        </a:defRPr>
-      </a:pPr>
-      <a:endParaRPr lang="en-US"/>
-    </a:p>
-  </c:txPr>
-  <c:externalData r:id="rId1">
-    <c:autoUpdate val="0"/>
-  </c:externalData>
-</c:chartSpace>
-</file>
-
-<file path=ppt/charts/chart4.xml><?xml version="1.0" encoding="utf-8"?>
-<c:chartSpace xmlns:c="http://schemas.openxmlformats.org/drawingml/2006/chart" xmlns:a="http://schemas.openxmlformats.org/drawingml/2006/main" xmlns:r="http://schemas.openxmlformats.org/officeDocument/2006/relationships">
-  <c:date1904 val="0"/>
-  <c:chart>
-    <c:autoTitleDeleted val="1"/>
-    <c:plotArea>
-      <c:barChart>
-        <c:barDir val="col"/>
-        <c:grouping val="clustered"/>
-        <c:ser>
-          <c:idx val="0"/>
-          <c:order val="0"/>
-          <c:tx>
-            <c:strRef>
-              <c:f>Sheet1!$B$1</c:f>
-              <c:strCache>
-                <c:ptCount val="1"/>
-                <c:pt idx="0">
-                  <c:v>Запросы</c:v>
-                </c:pt>
-              </c:strCache>
-            </c:strRef>
-          </c:tx>
-          <c:spPr>
-            <a:solidFill>
-              <a:srgbClr val="0077FF"/>
-            </a:solidFill>
-            <a:ln>
-              <a:solidFill>
-                <a:srgbClr val="0077FF"/>
-              </a:solidFill>
-            </a:ln>
-          </c:spPr>
-          <c:cat>
-            <c:strRef>
-              <c:f>Sheet1!$A$2:$A$3</c:f>
-              <c:strCache>
-                <c:ptCount val="2"/>
-                <c:pt idx="0">
-                  <c:v>Сейчас</c:v>
-                </c:pt>
-                <c:pt idx="1">
-                  <c:v>Сервис</c:v>
-                </c:pt>
-              </c:strCache>
-            </c:strRef>
-          </c:cat>
-          <c:val>
-            <c:numRef>
-              <c:f>Sheet1!$B$2:$B$3</c:f>
-              <c:numCache>
-                <c:formatCode>General</c:formatCode>
-                <c:ptCount val="2"/>
-                <c:pt idx="0">
-                  <c:v>11.0</c:v>
-                </c:pt>
-                <c:pt idx="1">
-                  <c:v>38.0</c:v>
-                </c:pt>
-              </c:numCache>
-            </c:numRef>
-          </c:val>
-        </c:ser>
-        <c:dLbls>
-          <c:numFmt formatCode="0&quot; запросов&quot;" sourceLinked="0"/>
-          <c:txPr>
-            <a:bodyPr wrap="none"/>
-            <a:lstStyle/>
-            <a:p>
-              <a:pPr>
-                <a:defRPr sz="1100" b="0">
-                  <a:solidFill>
-                    <a:srgbClr val="000000"/>
-                  </a:solidFill>
-                  <a:latin typeface="Play"/>
-                  <a:ea typeface="Play"/>
-                  <a:cs typeface="Play"/>
-                </a:defRPr>
-              </a:pPr>
-            </a:p>
-          </c:txPr>
-          <c:dLblPos val="outEnd"/>
-          <c:showLegendKey val="0"/>
-          <c:showVal val="1"/>
-          <c:showCatName val="0"/>
-          <c:showSerName val="0"/>
-          <c:showPercent val="0"/>
-          <c:showBubbleSize val="0"/>
-          <c:showLeaderLines val="1"/>
-        </c:dLbls>
-        <c:gapWidth val="60"/>
-        <c:axId val="-2068027336"/>
-        <c:axId val="-2113994440"/>
-      </c:barChart>
-      <c:catAx>
-        <c:axId val="-2068027336"/>
-        <c:scaling>
-          <c:orientation val="minMax"/>
-        </c:scaling>
-        <c:delete val="0"/>
-        <c:axPos val="b"/>
-        <c:majorTickMark val="out"/>
-        <c:minorTickMark val="none"/>
-        <c:tickLblPos val="nextTo"/>
-        <c:txPr>
-          <a:bodyPr/>
-          <a:lstStyle/>
-          <a:p>
-            <a:pPr>
-              <a:defRPr sz="1100" b="0">
-                <a:solidFill>
-                  <a:srgbClr val="000000"/>
-                </a:solidFill>
-                <a:latin typeface="Play"/>
-                <a:ea typeface="Play"/>
-                <a:cs typeface="Play"/>
-              </a:defRPr>
-            </a:pPr>
-          </a:p>
-        </c:txPr>
-        <c:crossAx val="-2113994440"/>
-        <c:crosses val="autoZero"/>
-        <c:auto val="1"/>
-        <c:lblAlgn val="ctr"/>
-        <c:lblOffset val="100"/>
-        <c:noMultiLvlLbl val="0"/>
-      </c:catAx>
-      <c:valAx>
-        <c:axId val="-2113994440"/>
-        <c:scaling/>
-        <c:delete val="0"/>
-        <c:axPos val="l"/>
-        <c:majorGridlines>
-          <c:spPr>
-            <a:ln w="9525">
-              <a:solidFill>
-                <a:srgbClr val="D1D1D1"/>
-              </a:solidFill>
-            </a:ln>
-          </c:spPr>
-        </c:majorGridlines>
-        <c:title>
-          <c:tx>
-            <c:rich>
-              <a:bodyPr rot="0" vert="horz"/>
-              <a:lstStyle/>
-              <a:p>
-                <a:pPr>
-                  <a:defRPr sz="1100" b="0">
-                    <a:solidFill>
-                      <a:srgbClr val="000000"/>
-                    </a:solidFill>
-                    <a:latin typeface="Play"/>
-                    <a:ea typeface="Play"/>
-                    <a:cs typeface="Play"/>
-                  </a:defRPr>
-                </a:pPr>
-                <a:r>
-                  <a:t>Запросы, запросов</a:t>
                 </a:r>
               </a:p>
             </c:rich>
@@ -6253,7 +6039,7 @@
         <p:spPr>
           <a:xfrm>
             <a:off x="2473726" y="1370485"/>
-            <a:ext cx="4288261" cy="800071"/>
+            <a:ext cx="4288261" cy="1887982"/>
           </a:xfrm>
           <a:prstGeom prst="rect">
             <a:avLst/>
@@ -6270,7 +6056,7 @@
               <a:spcAft>
                 <a:spcPts val="300"/>
               </a:spcAft>
-              <a:defRPr sz="1800" b="0">
+              <a:defRPr sz="2705" b="0">
                 <a:solidFill>
                   <a:srgbClr val="FFFFFF"/>
                 </a:solidFill>
@@ -6280,7 +6066,7 @@
               </a:defRPr>
             </a:pPr>
             <a:r>
-              <a:rPr sz="1800" b="0">
+              <a:rPr sz="2705" b="0">
                 <a:solidFill>
                   <a:srgbClr val="FFFFFF"/>
                 </a:solidFill>
@@ -6288,7 +6074,7 @@
                 <a:ea typeface="Play"/>
                 <a:cs typeface="Play"/>
               </a:rPr>
-              <a:t>Автоматическая вёрстка презентаций: инициатива запуска</a:t>
+              <a:t>Автоматическая вёрстка презентаций Защита инициативы перед руководством</a:t>
             </a:r>
           </a:p>
         </p:txBody>
@@ -6355,70 +6141,21 @@
                 <a:ea typeface="Play"/>
                 <a:cs typeface="Play"/>
               </a:rPr>
-              <a:t>Контекст и возможность: ручная сборка 42 колод</a:t>
+              <a:t>Сейчас: ручная сборка занимает 186 мин</a:t>
             </a:r>
           </a:p>
         </p:txBody>
       </p:sp>
       <p:sp>
         <p:nvSpPr>
-          <p:cNvPr id="3" name="body"/>
-          <p:cNvSpPr txBox="1"/>
-          <p:nvPr/>
-        </p:nvSpPr>
-        <p:spPr>
-          <a:xfrm>
-            <a:off x="274320" y="1394994"/>
-            <a:ext cx="8344814" cy="398780"/>
-          </a:xfrm>
-          <a:prstGeom prst="rect">
-            <a:avLst/>
-          </a:prstGeom>
-          <a:noFill/>
-        </p:spPr>
-        <p:txBody>
-          <a:bodyPr wrap="square" lIns="76200" rIns="76200" tIns="50800" bIns="50800">
-            <a:spAutoFit/>
-          </a:bodyPr>
-          <a:lstStyle/>
-          <a:p>
-            <a:pPr algn="l">
-              <a:spcAft>
-                <a:spcPts val="300"/>
-              </a:spcAft>
-              <a:defRPr sz="1800">
-                <a:solidFill>
-                  <a:srgbClr val="000000"/>
-                </a:solidFill>
-                <a:latin typeface="Play"/>
-                <a:ea typeface="Play"/>
-                <a:cs typeface="Play"/>
-              </a:defRPr>
-            </a:pPr>
-            <a:r>
-              <a:rPr sz="1800">
-                <a:solidFill>
-                  <a:srgbClr val="000000"/>
-                </a:solidFill>
-                <a:latin typeface="Play"/>
-                <a:ea typeface="Play"/>
-                <a:cs typeface="Play"/>
-              </a:rPr>
-              <a:t>Средний срок ожидания в очереди – 6 рабочих дней</a:t>
-            </a:r>
-          </a:p>
-        </p:txBody>
-      </p:sp>
-      <p:sp>
-        <p:nvSpPr>
-          <p:cNvPr id="4" name="stat_0:bar"/>
+          <p:cNvPr id="3" name="stat_0:bar"/>
           <p:cNvSpPr/>
           <p:nvPr/>
         </p:nvSpPr>
         <p:spPr>
           <a:xfrm>
-            <a:off x="274320" y="2009915"/>
-            <a:ext cx="50800" cy="2252262"/>
+            <a:off x="274320" y="1977238"/>
+            <a:ext cx="50800" cy="1427988"/>
           </a:xfrm>
           <a:prstGeom prst="rect">
             <a:avLst/>
@@ -6455,14 +6192,14 @@
       </p:sp>
       <p:sp>
         <p:nvSpPr>
-          <p:cNvPr id="5" name="stat_0"/>
+          <p:cNvPr id="4" name="stat_0"/>
           <p:cNvSpPr txBox="1"/>
           <p:nvPr/>
         </p:nvSpPr>
         <p:spPr>
           <a:xfrm>
-            <a:off x="452119" y="1948079"/>
-            <a:ext cx="1658059" cy="2314098"/>
+            <a:off x="452119" y="1904086"/>
+            <a:ext cx="2381276" cy="1501140"/>
           </a:xfrm>
           <a:prstGeom prst="rect">
             <a:avLst/>
@@ -6482,7 +6219,7 @@
               <a:spcAft>
                 <a:spcPts val="200"/>
               </a:spcAft>
-              <a:defRPr sz="2705" b="1">
+              <a:defRPr sz="3200" b="1">
                 <a:solidFill>
                   <a:srgbClr val="0077FF"/>
                 </a:solidFill>
@@ -6492,7 +6229,7 @@
               </a:defRPr>
             </a:pPr>
             <a:r>
-              <a:rPr sz="2705" b="1">
+              <a:rPr sz="3200" b="1">
                 <a:solidFill>
                   <a:srgbClr val="0077FF"/>
                 </a:solidFill>
@@ -6526,21 +6263,21 @@
                 <a:ea typeface="Play"/>
                 <a:cs typeface="Play"/>
               </a:rPr>
-              <a:t>42 колоды за квартал: 186 мин на сборку 12-слайдной презентации</a:t>
+              <a:t>42 колоды, 12 слайдов, 186 мин сборки</a:t>
             </a:r>
           </a:p>
         </p:txBody>
       </p:sp>
       <p:sp>
         <p:nvSpPr>
-          <p:cNvPr id="6" name="stat_1:bar"/>
+          <p:cNvPr id="5" name="stat_1:bar"/>
           <p:cNvSpPr/>
           <p:nvPr/>
         </p:nvSpPr>
         <p:spPr>
           <a:xfrm>
-            <a:off x="2443971" y="2009915"/>
-            <a:ext cx="50800" cy="1657902"/>
+            <a:off x="3167188" y="1977238"/>
+            <a:ext cx="50800" cy="1130808"/>
           </a:xfrm>
           <a:prstGeom prst="rect">
             <a:avLst/>
@@ -6577,14 +6314,14 @@
       </p:sp>
       <p:sp>
         <p:nvSpPr>
-          <p:cNvPr id="7" name="stat_1"/>
+          <p:cNvPr id="6" name="stat_1"/>
           <p:cNvSpPr txBox="1"/>
           <p:nvPr/>
         </p:nvSpPr>
         <p:spPr>
           <a:xfrm>
-            <a:off x="2621771" y="1948079"/>
-            <a:ext cx="1658059" cy="1719738"/>
+            <a:off x="3344988" y="1904086"/>
+            <a:ext cx="2381276" cy="1203960"/>
           </a:xfrm>
           <a:prstGeom prst="rect">
             <a:avLst/>
@@ -6604,7 +6341,7 @@
               <a:spcAft>
                 <a:spcPts val="200"/>
               </a:spcAft>
-              <a:defRPr sz="2705" b="1">
+              <a:defRPr sz="3200" b="1">
                 <a:solidFill>
                   <a:srgbClr val="0077FF"/>
                 </a:solidFill>
@@ -6614,7 +6351,7 @@
               </a:defRPr>
             </a:pPr>
             <a:r>
-              <a:rPr sz="2705" b="1">
+              <a:rPr sz="3200" b="1">
                 <a:solidFill>
                   <a:srgbClr val="0077FF"/>
                 </a:solidFill>
@@ -6648,21 +6385,21 @@
                 <a:ea typeface="Play"/>
                 <a:cs typeface="Play"/>
               </a:rPr>
-              <a:t>74 мин на правки после ревью дизайнера</a:t>
+              <a:t>74 мин правки после ревью</a:t>
             </a:r>
           </a:p>
         </p:txBody>
       </p:sp>
       <p:sp>
         <p:nvSpPr>
-          <p:cNvPr id="8" name="stat_2:bar"/>
+          <p:cNvPr id="7" name="stat_2:bar"/>
           <p:cNvSpPr/>
           <p:nvPr/>
         </p:nvSpPr>
         <p:spPr>
           <a:xfrm>
-            <a:off x="4613623" y="2009915"/>
-            <a:ext cx="50800" cy="2252262"/>
+            <a:off x="6060057" y="1977238"/>
+            <a:ext cx="50800" cy="1130808"/>
           </a:xfrm>
           <a:prstGeom prst="rect">
             <a:avLst/>
@@ -6699,14 +6436,14 @@
       </p:sp>
       <p:sp>
         <p:nvSpPr>
-          <p:cNvPr id="9" name="stat_2"/>
+          <p:cNvPr id="8" name="stat_2"/>
           <p:cNvSpPr txBox="1"/>
           <p:nvPr/>
         </p:nvSpPr>
         <p:spPr>
           <a:xfrm>
-            <a:off x="4791423" y="1948079"/>
-            <a:ext cx="1658059" cy="2314098"/>
+            <a:off x="6237857" y="1904086"/>
+            <a:ext cx="2381276" cy="1203960"/>
           </a:xfrm>
           <a:prstGeom prst="rect">
             <a:avLst/>
@@ -6726,7 +6463,7 @@
               <a:spcAft>
                 <a:spcPts val="200"/>
               </a:spcAft>
-              <a:defRPr sz="2705" b="1">
+              <a:defRPr sz="3200" b="1">
                 <a:solidFill>
                   <a:srgbClr val="0077FF"/>
                 </a:solidFill>
@@ -6736,7 +6473,7 @@
               </a:defRPr>
             </a:pPr>
             <a:r>
-              <a:rPr sz="2705" b="1">
+              <a:rPr sz="3200" b="1">
                 <a:solidFill>
                   <a:srgbClr val="0077FF"/>
                 </a:solidFill>
@@ -6770,21 +6507,260 @@
                 <a:ea typeface="Play"/>
                 <a:cs typeface="Play"/>
               </a:rPr>
-              <a:t>19 колод нарушили фирменный стиль (неправильные гарнитуры, цвета)</a:t>
+              <a:t>19 колод нарушили фирменный стиль</a:t>
+            </a:r>
+          </a:p>
+        </p:txBody>
+      </p:sp>
+    </p:spTree>
+  </p:cSld>
+  <p:clrMapOvr>
+    <a:masterClrMapping/>
+  </p:clrMapOvr>
+</p:sld>
+</file>
+
+<file path=ppt/slides/slide57.xml><?xml version="1.0" encoding="utf-8"?>
+<p:sld xmlns:a="http://schemas.openxmlformats.org/drawingml/2006/main" xmlns:p="http://schemas.openxmlformats.org/presentationml/2006/main" xmlns:r="http://schemas.openxmlformats.org/officeDocument/2006/relationships">
+  <p:cSld>
+    <p:spTree>
+      <p:nvGrpSpPr>
+        <p:cNvPr id="1" name=""/>
+        <p:cNvGrpSpPr/>
+        <p:nvPr/>
+      </p:nvGrpSpPr>
+      <p:grpSpPr/>
+      <p:sp>
+        <p:nvSpPr>
+          <p:cNvPr id="532" name="Google Shape;532;p53"/>
+          <p:cNvSpPr/>
+          <p:nvPr/>
+        </p:nvSpPr>
+        <p:spPr>
+          <a:xfrm>
+            <a:off x="303214" y="1022533"/>
+            <a:ext cx="8451939" cy="1433588"/>
+          </a:xfrm>
+          <a:prstGeom prst="rect">
+            <a:avLst/>
+          </a:prstGeom>
+          <a:noFill/>
+          <a:ln>
+            <a:noFill/>
+          </a:ln>
+        </p:spPr>
+        <p:txBody>
+          <a:bodyPr anchorCtr="0" anchor="ctr" bIns="91425" lIns="91425" spcFirstLastPara="1" rIns="91425" wrap="square" tIns="91425">
+            <a:noAutofit/>
+          </a:bodyPr>
+          <a:lstStyle/>
+          <a:p>
+            <a:pPr indent="0" lvl="0" marL="0" rtl="0" algn="l">
+              <a:spcBef>
+                <a:spcPts val="0"/>
+              </a:spcBef>
+              <a:spcAft>
+                <a:spcPts val="0"/>
+              </a:spcAft>
+              <a:buNone/>
+            </a:pPr>
+            <a:r>
+              <a:t/>
+            </a:r>
+            <a:endParaRPr/>
+          </a:p>
+        </p:txBody>
+      </p:sp>
+      <p:sp>
+        <p:nvSpPr>
+          <p:cNvPr id="553" name="Google Shape;553;p53"/>
+          <p:cNvSpPr/>
+          <p:nvPr/>
+        </p:nvSpPr>
+        <p:spPr>
+          <a:xfrm>
+            <a:off x="276488" y="2955549"/>
+            <a:ext cx="8451939" cy="1433588"/>
+          </a:xfrm>
+          <a:prstGeom prst="rect">
+            <a:avLst/>
+          </a:prstGeom>
+          <a:noFill/>
+          <a:ln>
+            <a:noFill/>
+          </a:ln>
+        </p:spPr>
+        <p:txBody>
+          <a:bodyPr anchorCtr="0" anchor="ctr" bIns="91425" lIns="91425" spcFirstLastPara="1" rIns="91425" wrap="square" tIns="91425">
+            <a:noAutofit/>
+          </a:bodyPr>
+          <a:lstStyle/>
+          <a:p>
+            <a:pPr indent="0" lvl="0" marL="0" rtl="0" algn="l">
+              <a:spcBef>
+                <a:spcPts val="0"/>
+              </a:spcBef>
+              <a:spcAft>
+                <a:spcPts val="0"/>
+              </a:spcAft>
+              <a:buNone/>
+            </a:pPr>
+            <a:r>
+              <a:t/>
+            </a:r>
+            <a:endParaRPr/>
+          </a:p>
+        </p:txBody>
+      </p:sp>
+      <p:sp>
+        <p:nvSpPr>
+          <p:cNvPr id="554" name="Google Shape;554;p53"/>
+          <p:cNvSpPr/>
+          <p:nvPr/>
+        </p:nvSpPr>
+        <p:spPr>
+          <a:xfrm>
+            <a:off x="303214" y="2797849"/>
+            <a:ext cx="8451939" cy="1433588"/>
+          </a:xfrm>
+          <a:prstGeom prst="rect">
+            <a:avLst/>
+          </a:prstGeom>
+          <a:noFill/>
+          <a:ln>
+            <a:noFill/>
+          </a:ln>
+        </p:spPr>
+        <p:txBody>
+          <a:bodyPr anchorCtr="0" anchor="ctr" bIns="91425" lIns="91425" spcFirstLastPara="1" rIns="91425" wrap="square" tIns="91425">
+            <a:noAutofit/>
+          </a:bodyPr>
+          <a:lstStyle/>
+          <a:p>
+            <a:pPr indent="0" lvl="0" marL="0" rtl="0" algn="l">
+              <a:spcBef>
+                <a:spcPts val="0"/>
+              </a:spcBef>
+              <a:spcAft>
+                <a:spcPts val="0"/>
+              </a:spcAft>
+              <a:buNone/>
+            </a:pPr>
+            <a:r>
+              <a:t/>
+            </a:r>
+            <a:endParaRPr/>
+          </a:p>
+        </p:txBody>
+      </p:sp>
+      <p:sp>
+        <p:nvSpPr>
+          <p:cNvPr id="555" name="title"/>
+          <p:cNvSpPr txBox="1"/>
+          <p:nvPr/>
+        </p:nvSpPr>
+        <p:spPr>
+          <a:xfrm>
+            <a:off x="274320" y="282943"/>
+            <a:ext cx="6792986" cy="932027"/>
+          </a:xfrm>
+          <a:prstGeom prst="rect">
+            <a:avLst/>
+          </a:prstGeom>
+          <a:noFill/>
+        </p:spPr>
+        <p:txBody>
+          <a:bodyPr wrap="square" lIns="76200" rIns="76200" tIns="50800" bIns="50800">
+            <a:spAutoFit/>
+          </a:bodyPr>
+          <a:lstStyle/>
+          <a:p>
+            <a:pPr algn="l">
+              <a:spcAft>
+                <a:spcPts val="300"/>
+              </a:spcAft>
+              <a:defRPr sz="2438">
+                <a:solidFill>
+                  <a:srgbClr val="000000"/>
+                </a:solidFill>
+                <a:latin typeface="Play"/>
+                <a:ea typeface="Play"/>
+                <a:cs typeface="Play"/>
+              </a:defRPr>
+            </a:pPr>
+            <a:r>
+              <a:rPr sz="2438">
+                <a:solidFill>
+                  <a:srgbClr val="000000"/>
+                </a:solidFill>
+                <a:latin typeface="Play"/>
+                <a:ea typeface="Play"/>
+                <a:cs typeface="Play"/>
+              </a:rPr>
+              <a:t>Дизайнеры ждут 6 дней, закрывают 11 запросов</a:t>
             </a:r>
           </a:p>
         </p:txBody>
       </p:sp>
       <p:sp>
         <p:nvSpPr>
-          <p:cNvPr id="10" name="stat_3:bar"/>
+          <p:cNvPr id="556" name="body"/>
+          <p:cNvSpPr txBox="1"/>
+          <p:nvPr/>
+        </p:nvSpPr>
+        <p:spPr>
+          <a:xfrm>
+            <a:off x="274320" y="1394994"/>
+            <a:ext cx="8344814" cy="398780"/>
+          </a:xfrm>
+          <a:prstGeom prst="rect">
+            <a:avLst/>
+          </a:prstGeom>
+          <a:noFill/>
+        </p:spPr>
+        <p:txBody>
+          <a:bodyPr wrap="square" lIns="76200" rIns="76200" tIns="50800" bIns="50800">
+            <a:spAutoFit/>
+          </a:bodyPr>
+          <a:lstStyle/>
+          <a:p>
+            <a:pPr algn="l">
+              <a:spcAft>
+                <a:spcPts val="300"/>
+              </a:spcAft>
+              <a:defRPr sz="1800">
+                <a:solidFill>
+                  <a:srgbClr val="000000"/>
+                </a:solidFill>
+                <a:latin typeface="Play"/>
+                <a:ea typeface="Play"/>
+                <a:cs typeface="Play"/>
+              </a:defRPr>
+            </a:pPr>
+            <a:r>
+              <a:rPr sz="1800">
+                <a:solidFill>
+                  <a:srgbClr val="000000"/>
+                </a:solidFill>
+                <a:latin typeface="Play"/>
+                <a:ea typeface="Play"/>
+                <a:cs typeface="Play"/>
+              </a:rPr>
+              <a:t>Средний срок ожидания 6 рабочих дней</a:t>
+            </a:r>
+          </a:p>
+        </p:txBody>
+      </p:sp>
+      <p:sp>
+        <p:nvSpPr>
+          <p:cNvPr id="557" name="stat_0:bar"/>
           <p:cNvSpPr/>
           <p:nvPr/>
         </p:nvSpPr>
         <p:spPr>
           <a:xfrm>
-            <a:off x="6783275" y="2009915"/>
-            <a:ext cx="50800" cy="1657902"/>
+            <a:off x="274320" y="2021231"/>
+            <a:ext cx="50800" cy="1130808"/>
           </a:xfrm>
           <a:prstGeom prst="rect">
             <a:avLst/>
@@ -6821,14 +6797,14 @@
       </p:sp>
       <p:sp>
         <p:nvSpPr>
-          <p:cNvPr id="11" name="stat_3"/>
+          <p:cNvPr id="558" name="stat_0"/>
           <p:cNvSpPr txBox="1"/>
           <p:nvPr/>
         </p:nvSpPr>
         <p:spPr>
           <a:xfrm>
-            <a:off x="6961075" y="1948079"/>
-            <a:ext cx="1658059" cy="1719738"/>
+            <a:off x="452119" y="1948079"/>
+            <a:ext cx="3827710" cy="1203960"/>
           </a:xfrm>
           <a:prstGeom prst="rect">
             <a:avLst/>
@@ -6848,7 +6824,7 @@
               <a:spcAft>
                 <a:spcPts val="200"/>
               </a:spcAft>
-              <a:defRPr sz="2705" b="1">
+              <a:defRPr sz="3200" b="1">
                 <a:solidFill>
                   <a:srgbClr val="0077FF"/>
                 </a:solidFill>
@@ -6858,7 +6834,7 @@
               </a:defRPr>
             </a:pPr>
             <a:r>
-              <a:rPr sz="2705" b="1">
+              <a:rPr sz="3200" b="1">
                 <a:solidFill>
                   <a:srgbClr val="0077FF"/>
                 </a:solidFill>
@@ -6892,39 +6868,65 @@
                 <a:ea typeface="Play"/>
                 <a:cs typeface="Play"/>
               </a:rPr>
-              <a:t>Дизайнеры закрывают 11 запросов из 27 в неделю</a:t>
+              <a:t>4 дизайнера закрывают 11 запросов/неделю</a:t>
             </a:r>
           </a:p>
         </p:txBody>
       </p:sp>
-    </p:spTree>
-  </p:cSld>
-  <p:clrMapOvr>
-    <a:masterClrMapping/>
-  </p:clrMapOvr>
-</p:sld>
-</file>
-
-<file path=ppt/slides/slide57.xml><?xml version="1.0" encoding="utf-8"?>
-<p:sld xmlns:a="http://schemas.openxmlformats.org/drawingml/2006/main" xmlns:p="http://schemas.openxmlformats.org/presentationml/2006/main" xmlns:r="http://schemas.openxmlformats.org/officeDocument/2006/relationships">
-  <p:cSld>
-    <p:spTree>
-      <p:nvGrpSpPr>
-        <p:cNvPr id="1" name=""/>
-        <p:cNvGrpSpPr/>
-        <p:nvPr/>
-      </p:nvGrpSpPr>
-      <p:grpSpPr/>
       <p:sp>
         <p:nvSpPr>
-          <p:cNvPr id="2" name="title"/>
+          <p:cNvPr id="559" name="stat_1:bar"/>
+          <p:cNvSpPr/>
+          <p:nvPr/>
+        </p:nvSpPr>
+        <p:spPr>
+          <a:xfrm>
+            <a:off x="4613623" y="2021231"/>
+            <a:ext cx="50800" cy="833628"/>
+          </a:xfrm>
+          <a:prstGeom prst="rect">
+            <a:avLst/>
+          </a:prstGeom>
+          <a:solidFill>
+            <a:srgbClr val="0077FF"/>
+          </a:solidFill>
+          <a:ln>
+            <a:noFill/>
+          </a:ln>
+          <a:effectLst/>
+        </p:spPr>
+        <p:style>
+          <a:lnRef idx="1">
+            <a:schemeClr val="accent1"/>
+          </a:lnRef>
+          <a:fillRef idx="3">
+            <a:schemeClr val="accent1"/>
+          </a:fillRef>
+          <a:effectRef idx="2">
+            <a:schemeClr val="accent1"/>
+          </a:effectRef>
+          <a:fontRef idx="minor">
+            <a:schemeClr val="lt1"/>
+          </a:fontRef>
+        </p:style>
+        <p:txBody>
+          <a:bodyPr rtlCol="0" anchor="ctr"/>
+          <a:lstStyle/>
+          <a:p>
+            <a:pPr algn="ctr"/>
+          </a:p>
+        </p:txBody>
+      </p:sp>
+      <p:sp>
+        <p:nvSpPr>
+          <p:cNvPr id="560" name="stat_1"/>
           <p:cNvSpPr txBox="1"/>
           <p:nvPr/>
         </p:nvSpPr>
         <p:spPr>
           <a:xfrm>
-            <a:off x="274320" y="282943"/>
-            <a:ext cx="6792986" cy="932027"/>
+            <a:off x="4791423" y="1948079"/>
+            <a:ext cx="3827710" cy="906780"/>
           </a:xfrm>
           <a:prstGeom prst="rect">
             <a:avLst/>
@@ -6932,18 +6934,21 @@
           <a:noFill/>
         </p:spPr>
         <p:txBody>
-          <a:bodyPr wrap="square" lIns="76200" rIns="76200" tIns="50800" bIns="50800">
+          <a:bodyPr wrap="square" lIns="76200" rIns="76200" tIns="0" bIns="0">
             <a:spAutoFit/>
           </a:bodyPr>
           <a:lstStyle/>
           <a:p>
-            <a:pPr algn="l">
-              <a:spcAft>
-                <a:spcPts val="300"/>
-              </a:spcAft>
-              <a:defRPr sz="2438">
-                <a:solidFill>
-                  <a:srgbClr val="000000"/>
+            <a:pPr>
+              <a:lnSpc>
+                <a:spcPct val="100000"/>
+              </a:lnSpc>
+              <a:spcAft>
+                <a:spcPts val="200"/>
+              </a:spcAft>
+              <a:defRPr sz="3200" b="1">
+                <a:solidFill>
+                  <a:srgbClr val="0077FF"/>
                 </a:solidFill>
                 <a:latin typeface="Play"/>
                 <a:ea typeface="Play"/>
@@ -6951,37 +6956,45 @@
               </a:defRPr>
             </a:pPr>
             <a:r>
-              <a:rPr sz="2438">
-                <a:solidFill>
-                  <a:srgbClr val="000000"/>
+              <a:rPr sz="3200" b="1">
+                <a:solidFill>
+                  <a:srgbClr val="0077FF"/>
                 </a:solidFill>
                 <a:latin typeface="Play"/>
                 <a:ea typeface="Play"/>
                 <a:cs typeface="Play"/>
               </a:rPr>
-              <a:t>Нагрузка дизайнеров: 27 запросов, 11 закрыто</a:t>
+              <a:t>27</a:t>
+            </a:r>
+          </a:p>
+          <a:p>
+            <a:pPr>
+              <a:spcAft>
+                <a:spcPts val="300"/>
+              </a:spcAft>
+              <a:defRPr sz="1800" b="0">
+                <a:solidFill>
+                  <a:srgbClr val="000000"/>
+                </a:solidFill>
+                <a:latin typeface="Play"/>
+                <a:ea typeface="Play"/>
+                <a:cs typeface="Play"/>
+              </a:defRPr>
+            </a:pPr>
+            <a:r>
+              <a:rPr sz="1800" b="0">
+                <a:solidFill>
+                  <a:srgbClr val="000000"/>
+                </a:solidFill>
+                <a:latin typeface="Play"/>
+                <a:ea typeface="Play"/>
+                <a:cs typeface="Play"/>
+              </a:rPr>
+              <a:t>27 запросов поступает</a:t>
             </a:r>
           </a:p>
         </p:txBody>
       </p:sp>
-      <p:graphicFrame>
-        <p:nvGraphicFramePr>
-          <p:cNvPr id="3" name="Chart 2"/>
-          <p:cNvGraphicFramePr>
-            <a:graphicFrameLocks noGrp="1"/>
-          </p:cNvGraphicFramePr>
-          <p:nvPr/>
-        </p:nvGraphicFramePr>
-        <p:xfrm>
-          <a:off x="274320" y="1394994"/>
-          <a:ext cx="8344814" cy="3028415"/>
-        </p:xfrm>
-        <a:graphic>
-          <a:graphicData uri="http://schemas.openxmlformats.org/drawingml/2006/chart">
-            <c:chart xmlns:c="http://schemas.openxmlformats.org/drawingml/2006/chart" r:id="rId2"/>
-          </a:graphicData>
-        </a:graphic>
-      </p:graphicFrame>
     </p:spTree>
   </p:cSld>
   <p:clrMapOvr>
@@ -7044,135 +7057,41 @@
                 <a:ea typeface="Play"/>
                 <a:cs typeface="Play"/>
               </a:rPr>
-              <a:t>Предложение: сервис принимает шаблон и материалы</a:t>
+              <a:t>Сервис автоматической вёрстки: ускоряет сборку и устраняет ошибки</a:t>
             </a:r>
           </a:p>
         </p:txBody>
       </p:sp>
       <p:grpSp>
         <p:nvGrpSpPr>
-          <p:cNvPr id="3" name="icon:builtin-document"/>
+          <p:cNvPr id="3" name="icon:builtin-layout"/>
           <p:cNvGrpSpPr/>
           <p:nvPr/>
         </p:nvGrpSpPr>
         <p:grpSpPr>
           <a:xfrm>
-            <a:off x="365402" y="1546004"/>
-            <a:ext cx="255032" cy="327898"/>
-            <a:chOff x="365402" y="1546004"/>
-            <a:chExt cx="255032" cy="327898"/>
+            <a:off x="328969" y="1449643"/>
+            <a:ext cx="327898" cy="327898"/>
+            <a:chOff x="328969" y="1449643"/>
+            <a:chExt cx="327898" cy="327898"/>
           </a:xfrm>
         </p:grpSpPr>
         <p:sp>
           <p:nvSpPr>
-            <p:cNvPr id="4" name="Freeform 3"/>
+            <p:cNvPr id="4" name="Rounded Rectangle 3"/>
             <p:cNvSpPr/>
             <p:nvPr/>
           </p:nvSpPr>
           <p:spPr>
             <a:xfrm>
-              <a:off x="365402" y="1546004"/>
-              <a:ext cx="255032" cy="327898"/>
+              <a:off x="328969" y="1449643"/>
+              <a:ext cx="327897" cy="327897"/>
             </a:xfrm>
-            <a:custGeom>
-              <a:avLst/>
-              <a:gdLst/>
-              <a:ahLst/>
-              <a:cxnLst/>
-              <a:rect l="l" t="t" r="r" b="b"/>
-              <a:pathLst>
-                <a:path w="255032" h="327898">
-                  <a:moveTo>
-                    <a:pt x="163949" y="0"/>
-                  </a:moveTo>
-                  <a:lnTo>
-                    <a:pt x="36433" y="0"/>
-                  </a:lnTo>
-                  <a:lnTo>
-                    <a:pt x="29329" y="692"/>
-                  </a:lnTo>
-                  <a:lnTo>
-                    <a:pt x="22498" y="2769"/>
-                  </a:lnTo>
-                  <a:lnTo>
-                    <a:pt x="16195" y="6139"/>
-                  </a:lnTo>
-                  <a:lnTo>
-                    <a:pt x="10675" y="10675"/>
-                  </a:lnTo>
-                  <a:lnTo>
-                    <a:pt x="6139" y="16195"/>
-                  </a:lnTo>
-                  <a:lnTo>
-                    <a:pt x="2769" y="22498"/>
-                  </a:lnTo>
-                  <a:lnTo>
-                    <a:pt x="692" y="29329"/>
-                  </a:lnTo>
-                  <a:lnTo>
-                    <a:pt x="0" y="36433"/>
-                  </a:lnTo>
-                  <a:lnTo>
-                    <a:pt x="0" y="291465"/>
-                  </a:lnTo>
-                  <a:lnTo>
-                    <a:pt x="692" y="298569"/>
-                  </a:lnTo>
-                  <a:lnTo>
-                    <a:pt x="2769" y="305400"/>
-                  </a:lnTo>
-                  <a:lnTo>
-                    <a:pt x="6139" y="311703"/>
-                  </a:lnTo>
-                  <a:lnTo>
-                    <a:pt x="10675" y="317223"/>
-                  </a:lnTo>
-                  <a:lnTo>
-                    <a:pt x="16195" y="321759"/>
-                  </a:lnTo>
-                  <a:lnTo>
-                    <a:pt x="22498" y="325129"/>
-                  </a:lnTo>
-                  <a:lnTo>
-                    <a:pt x="29329" y="327206"/>
-                  </a:lnTo>
-                  <a:lnTo>
-                    <a:pt x="36433" y="327898"/>
-                  </a:lnTo>
-                  <a:lnTo>
-                    <a:pt x="218599" y="327898"/>
-                  </a:lnTo>
-                  <a:lnTo>
-                    <a:pt x="225703" y="327206"/>
-                  </a:lnTo>
-                  <a:lnTo>
-                    <a:pt x="232534" y="325129"/>
-                  </a:lnTo>
-                  <a:lnTo>
-                    <a:pt x="238837" y="321759"/>
-                  </a:lnTo>
-                  <a:lnTo>
-                    <a:pt x="244357" y="317223"/>
-                  </a:lnTo>
-                  <a:lnTo>
-                    <a:pt x="248893" y="311703"/>
-                  </a:lnTo>
-                  <a:lnTo>
-                    <a:pt x="252263" y="305400"/>
-                  </a:lnTo>
-                  <a:lnTo>
-                    <a:pt x="254340" y="298569"/>
-                  </a:lnTo>
-                  <a:lnTo>
-                    <a:pt x="255032" y="291465"/>
-                  </a:lnTo>
-                  <a:lnTo>
-                    <a:pt x="255032" y="91083"/>
-                  </a:lnTo>
-                  <a:close/>
-                </a:path>
-              </a:pathLst>
-            </a:custGeom>
+            <a:prstGeom prst="roundRect">
+              <a:avLst>
+                <a:gd name="adj" fmla="val 11111"/>
+              </a:avLst>
+            </a:prstGeom>
             <a:noFill/>
             <a:ln w="36433" cap="rnd">
               <a:solidFill>
@@ -7212,8 +7131,8 @@
           </p:nvSpPr>
           <p:spPr>
             <a:xfrm>
-              <a:off x="529351" y="1546004"/>
-              <a:ext cx="91083" cy="91083"/>
+              <a:off x="328969" y="1558942"/>
+              <a:ext cx="327898" cy="0"/>
             </a:xfrm>
             <a:custGeom>
               <a:avLst/>
@@ -7222,15 +7141,12 @@
               <a:cxnLst/>
               <a:rect l="l" t="t" r="r" b="b"/>
               <a:pathLst>
-                <a:path w="91083" h="91083">
+                <a:path w="327898" h="0">
                   <a:moveTo>
                     <a:pt x="0" y="0"/>
                   </a:moveTo>
                   <a:lnTo>
-                    <a:pt x="0" y="91083"/>
-                  </a:lnTo>
-                  <a:lnTo>
-                    <a:pt x="91083" y="91083"/>
+                    <a:pt x="327898" y="0"/>
                   </a:lnTo>
                 </a:path>
               </a:pathLst>
@@ -7274,8 +7190,8 @@
           </p:nvSpPr>
           <p:spPr>
             <a:xfrm>
-              <a:off x="438268" y="1728170"/>
-              <a:ext cx="109300" cy="0"/>
+              <a:off x="438268" y="1558942"/>
+              <a:ext cx="0" cy="218599"/>
             </a:xfrm>
             <a:custGeom>
               <a:avLst/>
@@ -7284,71 +7200,12 @@
               <a:cxnLst/>
               <a:rect l="l" t="t" r="r" b="b"/>
               <a:pathLst>
-                <a:path w="109300" h="0">
+                <a:path w="0" h="218599">
                   <a:moveTo>
                     <a:pt x="0" y="0"/>
                   </a:moveTo>
                   <a:lnTo>
-                    <a:pt x="109300" y="0"/>
-                  </a:lnTo>
-                </a:path>
-              </a:pathLst>
-            </a:custGeom>
-            <a:noFill/>
-            <a:ln w="36433" cap="rnd">
-              <a:solidFill>
-                <a:srgbClr val="0077FF"/>
-              </a:solidFill>
-              <a:round/>
-            </a:ln>
-            <a:effectLst/>
-          </p:spPr>
-          <p:style>
-            <a:lnRef idx="1">
-              <a:schemeClr val="accent1"/>
-            </a:lnRef>
-            <a:fillRef idx="3">
-              <a:schemeClr val="accent1"/>
-            </a:fillRef>
-            <a:effectRef idx="2">
-              <a:schemeClr val="accent1"/>
-            </a:effectRef>
-            <a:fontRef idx="minor">
-              <a:schemeClr val="lt1"/>
-            </a:fontRef>
-          </p:style>
-          <p:txBody>
-            <a:bodyPr rtlCol="0" anchor="ctr"/>
-            <a:lstStyle/>
-            <a:p>
-              <a:pPr algn="ctr"/>
-            </a:p>
-          </p:txBody>
-        </p:sp>
-        <p:sp>
-          <p:nvSpPr>
-            <p:cNvPr id="7" name="Freeform 6"/>
-            <p:cNvSpPr/>
-            <p:nvPr/>
-          </p:nvSpPr>
-          <p:spPr>
-            <a:xfrm>
-              <a:off x="438268" y="1801036"/>
-              <a:ext cx="72867" cy="0"/>
-            </a:xfrm>
-            <a:custGeom>
-              <a:avLst/>
-              <a:gdLst/>
-              <a:ahLst/>
-              <a:cxnLst/>
-              <a:rect l="l" t="t" r="r" b="b"/>
-              <a:pathLst>
-                <a:path w="72867" h="0">
-                  <a:moveTo>
-                    <a:pt x="0" y="0"/>
-                  </a:moveTo>
-                  <a:lnTo>
-                    <a:pt x="72867" y="0"/>
+                    <a:pt x="0" y="218599"/>
                   </a:lnTo>
                 </a:path>
               </a:pathLst>
@@ -7387,14 +7244,14 @@
       </p:grpSp>
       <p:sp>
         <p:nvSpPr>
-          <p:cNvPr id="8" name="item_0"/>
+          <p:cNvPr id="7" name="item_0"/>
           <p:cNvSpPr txBox="1"/>
           <p:nvPr/>
         </p:nvSpPr>
         <p:spPr>
           <a:xfrm>
-            <a:off x="908256" y="1394994"/>
-            <a:ext cx="7710878" cy="654233"/>
+            <a:off x="908256" y="1414202"/>
+            <a:ext cx="7710878" cy="887393"/>
           </a:xfrm>
           <a:prstGeom prst="rect">
             <a:avLst/>
@@ -7411,7 +7268,7 @@
               <a:spcAft>
                 <a:spcPts val="300"/>
               </a:spcAft>
-              <a:defRPr sz="1600">
+              <a:defRPr sz="1800">
                 <a:solidFill>
                   <a:srgbClr val="000000"/>
                 </a:solidFill>
@@ -7421,7 +7278,7 @@
               </a:defRPr>
             </a:pPr>
             <a:r>
-              <a:rPr sz="1600">
+              <a:rPr sz="1800">
                 <a:solidFill>
                   <a:srgbClr val="000000"/>
                 </a:solidFill>
@@ -7429,512 +7286,34 @@
                 <a:ea typeface="Play"/>
                 <a:cs typeface="Play"/>
               </a:rPr>
-              <a:t>Сервис принимает pptx шаблон и материалы (документы, таблицы, заметки)</a:t>
+              <a:t>Принимает шаблон pptx и материалы</a:t>
             </a:r>
           </a:p>
         </p:txBody>
       </p:sp>
       <p:grpSp>
         <p:nvGrpSpPr>
-          <p:cNvPr id="9" name="icon:builtin-palette"/>
+          <p:cNvPr id="8" name="icon:builtin-next"/>
           <p:cNvGrpSpPr/>
           <p:nvPr/>
         </p:nvGrpSpPr>
         <p:grpSpPr>
           <a:xfrm>
-            <a:off x="328969" y="2284892"/>
-            <a:ext cx="327898" cy="346114"/>
-            <a:chOff x="328969" y="2284892"/>
-            <a:chExt cx="327898" cy="346114"/>
+            <a:off x="328969" y="2459115"/>
+            <a:ext cx="327897" cy="327897"/>
+            <a:chOff x="328969" y="2459115"/>
+            <a:chExt cx="327897" cy="327897"/>
           </a:xfrm>
         </p:grpSpPr>
         <p:sp>
           <p:nvSpPr>
-            <p:cNvPr id="10" name="Freeform 9"/>
+            <p:cNvPr id="9" name="Oval 8"/>
             <p:cNvSpPr/>
             <p:nvPr/>
           </p:nvSpPr>
           <p:spPr>
             <a:xfrm>
-              <a:off x="328969" y="2284892"/>
-              <a:ext cx="327898" cy="346114"/>
-            </a:xfrm>
-            <a:custGeom>
-              <a:avLst/>
-              <a:gdLst/>
-              <a:ahLst/>
-              <a:cxnLst/>
-              <a:rect l="l" t="t" r="r" b="b"/>
-              <a:pathLst>
-                <a:path w="327898" h="346114">
-                  <a:moveTo>
-                    <a:pt x="163949" y="18216"/>
-                  </a:moveTo>
-                  <a:lnTo>
-                    <a:pt x="131961" y="21368"/>
-                  </a:lnTo>
-                  <a:lnTo>
-                    <a:pt x="101211" y="30694"/>
-                  </a:lnTo>
-                  <a:lnTo>
-                    <a:pt x="72866" y="45851"/>
-                  </a:lnTo>
-                  <a:lnTo>
-                    <a:pt x="48019" y="66235"/>
-                  </a:lnTo>
-                  <a:lnTo>
-                    <a:pt x="27635" y="91082"/>
-                  </a:lnTo>
-                  <a:lnTo>
-                    <a:pt x="12478" y="119427"/>
-                  </a:lnTo>
-                  <a:lnTo>
-                    <a:pt x="3152" y="150177"/>
-                  </a:lnTo>
-                  <a:lnTo>
-                    <a:pt x="0" y="182165"/>
-                  </a:lnTo>
-                  <a:lnTo>
-                    <a:pt x="3152" y="214153"/>
-                  </a:lnTo>
-                  <a:lnTo>
-                    <a:pt x="12478" y="244903"/>
-                  </a:lnTo>
-                  <a:lnTo>
-                    <a:pt x="27635" y="273248"/>
-                  </a:lnTo>
-                  <a:lnTo>
-                    <a:pt x="48019" y="298095"/>
-                  </a:lnTo>
-                  <a:lnTo>
-                    <a:pt x="72866" y="318479"/>
-                  </a:lnTo>
-                  <a:lnTo>
-                    <a:pt x="101211" y="333636"/>
-                  </a:lnTo>
-                  <a:lnTo>
-                    <a:pt x="131961" y="342962"/>
-                  </a:lnTo>
-                  <a:lnTo>
-                    <a:pt x="163949" y="346114"/>
-                  </a:lnTo>
-                  <a:lnTo>
-                    <a:pt x="169742" y="345695"/>
-                  </a:lnTo>
-                  <a:lnTo>
-                    <a:pt x="175061" y="344456"/>
-                  </a:lnTo>
-                  <a:lnTo>
-                    <a:pt x="179870" y="342471"/>
-                  </a:lnTo>
-                  <a:lnTo>
-                    <a:pt x="184151" y="339811"/>
-                  </a:lnTo>
-                  <a:lnTo>
-                    <a:pt x="187849" y="336550"/>
-                  </a:lnTo>
-                  <a:lnTo>
-                    <a:pt x="190964" y="332743"/>
-                  </a:lnTo>
-                  <a:lnTo>
-                    <a:pt x="193442" y="328444"/>
-                  </a:lnTo>
-                  <a:lnTo>
-                    <a:pt x="195245" y="323726"/>
-                  </a:lnTo>
-                  <a:lnTo>
-                    <a:pt x="196356" y="318662"/>
-                  </a:lnTo>
-                  <a:lnTo>
-                    <a:pt x="196739" y="313324"/>
-                  </a:lnTo>
-                  <a:lnTo>
-                    <a:pt x="196629" y="310646"/>
-                  </a:lnTo>
-                  <a:lnTo>
-                    <a:pt x="196320" y="308078"/>
-                  </a:lnTo>
-                  <a:lnTo>
-                    <a:pt x="195810" y="305619"/>
-                  </a:lnTo>
-                  <a:lnTo>
-                    <a:pt x="195099" y="303269"/>
-                  </a:lnTo>
-                  <a:lnTo>
-                    <a:pt x="194225" y="301028"/>
-                  </a:lnTo>
-                  <a:lnTo>
-                    <a:pt x="193205" y="298897"/>
-                  </a:lnTo>
-                  <a:lnTo>
-                    <a:pt x="192002" y="296875"/>
-                  </a:lnTo>
-                  <a:lnTo>
-                    <a:pt x="190673" y="294962"/>
-                  </a:lnTo>
-                  <a:lnTo>
-                    <a:pt x="189215" y="293158"/>
-                  </a:lnTo>
-                  <a:lnTo>
-                    <a:pt x="187631" y="291464"/>
-                  </a:lnTo>
-                  <a:lnTo>
-                    <a:pt x="186046" y="289715"/>
-                  </a:lnTo>
-                  <a:lnTo>
-                    <a:pt x="184588" y="287785"/>
-                  </a:lnTo>
-                  <a:lnTo>
-                    <a:pt x="183259" y="285708"/>
-                  </a:lnTo>
-                  <a:lnTo>
-                    <a:pt x="182056" y="283504"/>
-                  </a:lnTo>
-                  <a:lnTo>
-                    <a:pt x="181036" y="281227"/>
-                  </a:lnTo>
-                  <a:lnTo>
-                    <a:pt x="180162" y="278877"/>
-                  </a:lnTo>
-                  <a:lnTo>
-                    <a:pt x="179451" y="276508"/>
-                  </a:lnTo>
-                  <a:lnTo>
-                    <a:pt x="178941" y="274159"/>
-                  </a:lnTo>
-                  <a:lnTo>
-                    <a:pt x="178632" y="271845"/>
-                  </a:lnTo>
-                  <a:lnTo>
-                    <a:pt x="178522" y="269604"/>
-                  </a:lnTo>
-                  <a:lnTo>
-                    <a:pt x="178941" y="264267"/>
-                  </a:lnTo>
-                  <a:lnTo>
-                    <a:pt x="180180" y="259203"/>
-                  </a:lnTo>
-                  <a:lnTo>
-                    <a:pt x="182166" y="254485"/>
-                  </a:lnTo>
-                  <a:lnTo>
-                    <a:pt x="184825" y="250186"/>
-                  </a:lnTo>
-                  <a:lnTo>
-                    <a:pt x="188086" y="246378"/>
-                  </a:lnTo>
-                  <a:lnTo>
-                    <a:pt x="191893" y="243118"/>
-                  </a:lnTo>
-                  <a:lnTo>
-                    <a:pt x="196192" y="240458"/>
-                  </a:lnTo>
-                  <a:lnTo>
-                    <a:pt x="200910" y="238472"/>
-                  </a:lnTo>
-                  <a:lnTo>
-                    <a:pt x="205975" y="237234"/>
-                  </a:lnTo>
-                  <a:lnTo>
-                    <a:pt x="211312" y="236815"/>
-                  </a:lnTo>
-                  <a:lnTo>
-                    <a:pt x="236815" y="236815"/>
-                  </a:lnTo>
-                  <a:lnTo>
-                    <a:pt x="254576" y="235066"/>
-                  </a:lnTo>
-                  <a:lnTo>
-                    <a:pt x="271663" y="229874"/>
-                  </a:lnTo>
-                  <a:lnTo>
-                    <a:pt x="287421" y="221458"/>
-                  </a:lnTo>
-                  <a:lnTo>
-                    <a:pt x="301229" y="210146"/>
-                  </a:lnTo>
-                  <a:lnTo>
-                    <a:pt x="312541" y="196337"/>
-                  </a:lnTo>
-                  <a:lnTo>
-                    <a:pt x="320957" y="180580"/>
-                  </a:lnTo>
-                  <a:lnTo>
-                    <a:pt x="326149" y="163493"/>
-                  </a:lnTo>
-                  <a:lnTo>
-                    <a:pt x="327898" y="145732"/>
-                  </a:lnTo>
-                  <a:lnTo>
-                    <a:pt x="325767" y="122178"/>
-                  </a:lnTo>
-                  <a:lnTo>
-                    <a:pt x="319591" y="99790"/>
-                  </a:lnTo>
-                  <a:lnTo>
-                    <a:pt x="309700" y="78914"/>
-                  </a:lnTo>
-                  <a:lnTo>
-                    <a:pt x="296420" y="59804"/>
-                  </a:lnTo>
-                  <a:lnTo>
-                    <a:pt x="280079" y="42808"/>
-                  </a:lnTo>
-                  <a:lnTo>
-                    <a:pt x="261007" y="28217"/>
-                  </a:lnTo>
-                  <a:lnTo>
-                    <a:pt x="239529" y="16322"/>
-                  </a:lnTo>
-                  <a:lnTo>
-                    <a:pt x="215975" y="7468"/>
-                  </a:lnTo>
-                  <a:lnTo>
-                    <a:pt x="190673" y="1912"/>
-                  </a:lnTo>
-                  <a:lnTo>
-                    <a:pt x="163949" y="0"/>
-                  </a:lnTo>
-                  <a:close/>
-                </a:path>
-              </a:pathLst>
-            </a:custGeom>
-            <a:noFill/>
-            <a:ln w="36433" cap="rnd">
-              <a:solidFill>
-                <a:srgbClr val="0077FF"/>
-              </a:solidFill>
-              <a:round/>
-            </a:ln>
-            <a:effectLst/>
-          </p:spPr>
-          <p:style>
-            <a:lnRef idx="1">
-              <a:schemeClr val="accent1"/>
-            </a:lnRef>
-            <a:fillRef idx="3">
-              <a:schemeClr val="accent1"/>
-            </a:fillRef>
-            <a:effectRef idx="2">
-              <a:schemeClr val="accent1"/>
-            </a:effectRef>
-            <a:fontRef idx="minor">
-              <a:schemeClr val="lt1"/>
-            </a:fontRef>
-          </p:style>
-          <p:txBody>
-            <a:bodyPr rtlCol="0" anchor="ctr"/>
-            <a:lstStyle/>
-            <a:p>
-              <a:pPr algn="ctr"/>
-            </a:p>
-          </p:txBody>
-        </p:sp>
-        <p:sp>
-          <p:nvSpPr>
-            <p:cNvPr id="11" name="Oval 10"/>
-            <p:cNvSpPr/>
-            <p:nvPr/>
-          </p:nvSpPr>
-          <p:spPr>
-            <a:xfrm>
-              <a:off x="389084" y="2436089"/>
-              <a:ext cx="43719" cy="43719"/>
-            </a:xfrm>
-            <a:prstGeom prst="ellipse">
-              <a:avLst/>
-            </a:prstGeom>
-            <a:solidFill>
-              <a:srgbClr val="0077FF"/>
-            </a:solidFill>
-            <a:ln>
-              <a:noFill/>
-            </a:ln>
-            <a:effectLst/>
-          </p:spPr>
-          <p:style>
-            <a:lnRef idx="1">
-              <a:schemeClr val="accent1"/>
-            </a:lnRef>
-            <a:fillRef idx="3">
-              <a:schemeClr val="accent1"/>
-            </a:fillRef>
-            <a:effectRef idx="2">
-              <a:schemeClr val="accent1"/>
-            </a:effectRef>
-            <a:fontRef idx="minor">
-              <a:schemeClr val="lt1"/>
-            </a:fontRef>
-          </p:style>
-          <p:txBody>
-            <a:bodyPr rtlCol="0" anchor="ctr"/>
-            <a:lstStyle/>
-            <a:p>
-              <a:pPr algn="ctr"/>
-            </a:p>
-          </p:txBody>
-        </p:sp>
-        <p:sp>
-          <p:nvSpPr>
-            <p:cNvPr id="12" name="Oval 11"/>
-            <p:cNvSpPr/>
-            <p:nvPr/>
-          </p:nvSpPr>
-          <p:spPr>
-            <a:xfrm>
-              <a:off x="434625" y="2363223"/>
-              <a:ext cx="43719" cy="43719"/>
-            </a:xfrm>
-            <a:prstGeom prst="ellipse">
-              <a:avLst/>
-            </a:prstGeom>
-            <a:solidFill>
-              <a:srgbClr val="0077FF"/>
-            </a:solidFill>
-            <a:ln>
-              <a:noFill/>
-            </a:ln>
-            <a:effectLst/>
-          </p:spPr>
-          <p:style>
-            <a:lnRef idx="1">
-              <a:schemeClr val="accent1"/>
-            </a:lnRef>
-            <a:fillRef idx="3">
-              <a:schemeClr val="accent1"/>
-            </a:fillRef>
-            <a:effectRef idx="2">
-              <a:schemeClr val="accent1"/>
-            </a:effectRef>
-            <a:fontRef idx="minor">
-              <a:schemeClr val="lt1"/>
-            </a:fontRef>
-          </p:style>
-          <p:txBody>
-            <a:bodyPr rtlCol="0" anchor="ctr"/>
-            <a:lstStyle/>
-            <a:p>
-              <a:pPr algn="ctr"/>
-            </a:p>
-          </p:txBody>
-        </p:sp>
-        <p:sp>
-          <p:nvSpPr>
-            <p:cNvPr id="13" name="Oval 12"/>
-            <p:cNvSpPr/>
-            <p:nvPr/>
-          </p:nvSpPr>
-          <p:spPr>
-            <a:xfrm>
-              <a:off x="516600" y="2363223"/>
-              <a:ext cx="43719" cy="43719"/>
-            </a:xfrm>
-            <a:prstGeom prst="ellipse">
-              <a:avLst/>
-            </a:prstGeom>
-            <a:solidFill>
-              <a:srgbClr val="0077FF"/>
-            </a:solidFill>
-            <a:ln>
-              <a:noFill/>
-            </a:ln>
-            <a:effectLst/>
-          </p:spPr>
-          <p:style>
-            <a:lnRef idx="1">
-              <a:schemeClr val="accent1"/>
-            </a:lnRef>
-            <a:fillRef idx="3">
-              <a:schemeClr val="accent1"/>
-            </a:fillRef>
-            <a:effectRef idx="2">
-              <a:schemeClr val="accent1"/>
-            </a:effectRef>
-            <a:fontRef idx="minor">
-              <a:schemeClr val="lt1"/>
-            </a:fontRef>
-          </p:style>
-          <p:txBody>
-            <a:bodyPr rtlCol="0" anchor="ctr"/>
-            <a:lstStyle/>
-            <a:p>
-              <a:pPr algn="ctr"/>
-            </a:p>
-          </p:txBody>
-        </p:sp>
-      </p:grpSp>
-      <p:sp>
-        <p:nvSpPr>
-          <p:cNvPr id="14" name="item_1"/>
-          <p:cNvSpPr txBox="1"/>
-          <p:nvPr/>
-        </p:nvSpPr>
-        <p:spPr>
-          <a:xfrm>
-            <a:off x="908256" y="2152098"/>
-            <a:ext cx="7710878" cy="654233"/>
-          </a:xfrm>
-          <a:prstGeom prst="rect">
-            <a:avLst/>
-          </a:prstGeom>
-          <a:noFill/>
-        </p:spPr>
-        <p:txBody>
-          <a:bodyPr wrap="square" lIns="76200" rIns="76200" tIns="50800" bIns="50800">
-            <a:spAutoFit/>
-          </a:bodyPr>
-          <a:lstStyle/>
-          <a:p>
-            <a:pPr algn="l">
-              <a:spcAft>
-                <a:spcPts val="300"/>
-              </a:spcAft>
-              <a:defRPr sz="1600">
-                <a:solidFill>
-                  <a:srgbClr val="000000"/>
-                </a:solidFill>
-                <a:latin typeface="Play"/>
-                <a:ea typeface="Play"/>
-                <a:cs typeface="Play"/>
-              </a:defRPr>
-            </a:pPr>
-            <a:r>
-              <a:rPr sz="1600">
-                <a:solidFill>
-                  <a:srgbClr val="000000"/>
-                </a:solidFill>
-                <a:latin typeface="Play"/>
-                <a:ea typeface="Play"/>
-                <a:cs typeface="Play"/>
-              </a:rPr>
-              <a:t>Автоматически преобразует шаблон в дизайн-систему (гарнитуры, шкала, палитра)</a:t>
-            </a:r>
-          </a:p>
-        </p:txBody>
-      </p:sp>
-      <p:grpSp>
-        <p:nvGrpSpPr>
-          <p:cNvPr id="15" name="icon:builtin-next"/>
-          <p:cNvGrpSpPr/>
-          <p:nvPr/>
-        </p:nvGrpSpPr>
-        <p:grpSpPr>
-          <a:xfrm>
-            <a:off x="328969" y="2963851"/>
-            <a:ext cx="327897" cy="327897"/>
-            <a:chOff x="328969" y="2963851"/>
-            <a:chExt cx="327897" cy="327897"/>
-          </a:xfrm>
-        </p:grpSpPr>
-        <p:sp>
-          <p:nvSpPr>
-            <p:cNvPr id="16" name="Oval 15"/>
-            <p:cNvSpPr/>
-            <p:nvPr/>
-          </p:nvSpPr>
-          <p:spPr>
-            <a:xfrm>
-              <a:off x="328969" y="2963851"/>
+              <a:off x="328969" y="2459115"/>
               <a:ext cx="327897" cy="327897"/>
             </a:xfrm>
             <a:prstGeom prst="ellipse">
@@ -7973,13 +7352,13 @@
         </p:sp>
         <p:sp>
           <p:nvSpPr>
-            <p:cNvPr id="17" name="Freeform 16"/>
+            <p:cNvPr id="10" name="Freeform 9"/>
             <p:cNvSpPr/>
             <p:nvPr/>
           </p:nvSpPr>
           <p:spPr>
             <a:xfrm>
-              <a:off x="420052" y="3127800"/>
+              <a:off x="420052" y="2623064"/>
               <a:ext cx="145732" cy="0"/>
             </a:xfrm>
             <a:custGeom>
@@ -8032,13 +7411,13 @@
         </p:sp>
         <p:sp>
           <p:nvSpPr>
-            <p:cNvPr id="18" name="Freeform 17"/>
+            <p:cNvPr id="11" name="Freeform 10"/>
             <p:cNvSpPr/>
             <p:nvPr/>
           </p:nvSpPr>
           <p:spPr>
             <a:xfrm>
-              <a:off x="492918" y="3054934"/>
+              <a:off x="492918" y="2550198"/>
               <a:ext cx="72866" cy="145732"/>
             </a:xfrm>
             <a:custGeom>
@@ -8095,14 +7474,14 @@
       </p:grpSp>
       <p:sp>
         <p:nvSpPr>
-          <p:cNvPr id="19" name="item_2"/>
+          <p:cNvPr id="12" name="item_1"/>
           <p:cNvSpPr txBox="1"/>
           <p:nvPr/>
         </p:nvSpPr>
         <p:spPr>
           <a:xfrm>
-            <a:off x="908256" y="2928410"/>
-            <a:ext cx="7710878" cy="635025"/>
+            <a:off x="908256" y="2423674"/>
+            <a:ext cx="7710878" cy="887393"/>
           </a:xfrm>
           <a:prstGeom prst="rect">
             <a:avLst/>
@@ -8137,82 +7516,35 @@
                 <a:ea typeface="Play"/>
                 <a:cs typeface="Play"/>
               </a:rPr>
-              <a:t>Генерирует план колоды и вёрстку по ролям страниц</a:t>
+              <a:t>Генерирует план колоды и вёрстку по дизайн-системе</a:t>
             </a:r>
           </a:p>
         </p:txBody>
       </p:sp>
       <p:grpSp>
         <p:nvGrpSpPr>
-          <p:cNvPr id="20" name="icon:builtin-presentation"/>
+          <p:cNvPr id="13" name="icon:builtin-download"/>
           <p:cNvGrpSpPr/>
           <p:nvPr/>
         </p:nvGrpSpPr>
         <p:grpSpPr>
           <a:xfrm>
-            <a:off x="328969" y="3739172"/>
-            <a:ext cx="327897" cy="291464"/>
-            <a:chOff x="328969" y="3739172"/>
-            <a:chExt cx="327897" cy="291464"/>
+            <a:off x="365402" y="3468587"/>
+            <a:ext cx="255032" cy="327898"/>
+            <a:chOff x="365402" y="3468587"/>
+            <a:chExt cx="255032" cy="327898"/>
           </a:xfrm>
         </p:grpSpPr>
         <p:sp>
           <p:nvSpPr>
-            <p:cNvPr id="21" name="Rounded Rectangle 20"/>
+            <p:cNvPr id="14" name="Freeform 13"/>
             <p:cNvSpPr/>
             <p:nvPr/>
           </p:nvSpPr>
           <p:spPr>
             <a:xfrm>
-              <a:off x="328969" y="3739172"/>
-              <a:ext cx="327897" cy="218598"/>
-            </a:xfrm>
-            <a:prstGeom prst="roundRect">
-              <a:avLst>
-                <a:gd name="adj" fmla="val 12500"/>
-              </a:avLst>
-            </a:prstGeom>
-            <a:noFill/>
-            <a:ln w="36433" cap="rnd">
-              <a:solidFill>
-                <a:srgbClr val="0077FF"/>
-              </a:solidFill>
-              <a:round/>
-            </a:ln>
-            <a:effectLst/>
-          </p:spPr>
-          <p:style>
-            <a:lnRef idx="1">
-              <a:schemeClr val="accent1"/>
-            </a:lnRef>
-            <a:fillRef idx="3">
-              <a:schemeClr val="accent1"/>
-            </a:fillRef>
-            <a:effectRef idx="2">
-              <a:schemeClr val="accent1"/>
-            </a:effectRef>
-            <a:fontRef idx="minor">
-              <a:schemeClr val="lt1"/>
-            </a:fontRef>
-          </p:style>
-          <p:txBody>
-            <a:bodyPr rtlCol="0" anchor="ctr"/>
-            <a:lstStyle/>
-            <a:p>
-              <a:pPr algn="ctr"/>
-            </a:p>
-          </p:txBody>
-        </p:sp>
-        <p:sp>
-          <p:nvSpPr>
-            <p:cNvPr id="22" name="Freeform 21"/>
-            <p:cNvSpPr/>
-            <p:nvPr/>
-          </p:nvSpPr>
-          <p:spPr>
-            <a:xfrm>
-              <a:off x="492918" y="3957770"/>
-              <a:ext cx="0" cy="72866"/>
+              <a:off x="492918" y="3468587"/>
+              <a:ext cx="0" cy="218599"/>
             </a:xfrm>
             <a:custGeom>
               <a:avLst/>
@@ -8221,12 +7553,12 @@
               <a:cxnLst/>
               <a:rect l="l" t="t" r="r" b="b"/>
               <a:pathLst>
-                <a:path w="0" h="72866">
+                <a:path w="0" h="218599">
                   <a:moveTo>
                     <a:pt x="0" y="0"/>
                   </a:moveTo>
                   <a:lnTo>
-                    <a:pt x="0" y="72866"/>
+                    <a:pt x="0" y="218599"/>
                   </a:lnTo>
                 </a:path>
               </a:pathLst>
@@ -8264,72 +7596,13 @@
         </p:sp>
         <p:sp>
           <p:nvSpPr>
-            <p:cNvPr id="23" name="Freeform 22"/>
+            <p:cNvPr id="15" name="Freeform 14"/>
             <p:cNvSpPr/>
             <p:nvPr/>
           </p:nvSpPr>
           <p:spPr>
             <a:xfrm>
-              <a:off x="420052" y="4030636"/>
-              <a:ext cx="145732" cy="0"/>
-            </a:xfrm>
-            <a:custGeom>
-              <a:avLst/>
-              <a:gdLst/>
-              <a:ahLst/>
-              <a:cxnLst/>
-              <a:rect l="l" t="t" r="r" b="b"/>
-              <a:pathLst>
-                <a:path w="145732" h="0">
-                  <a:moveTo>
-                    <a:pt x="0" y="0"/>
-                  </a:moveTo>
-                  <a:lnTo>
-                    <a:pt x="145732" y="0"/>
-                  </a:lnTo>
-                </a:path>
-              </a:pathLst>
-            </a:custGeom>
-            <a:noFill/>
-            <a:ln w="36433" cap="rnd">
-              <a:solidFill>
-                <a:srgbClr val="0077FF"/>
-              </a:solidFill>
-              <a:round/>
-            </a:ln>
-            <a:effectLst/>
-          </p:spPr>
-          <p:style>
-            <a:lnRef idx="1">
-              <a:schemeClr val="accent1"/>
-            </a:lnRef>
-            <a:fillRef idx="3">
-              <a:schemeClr val="accent1"/>
-            </a:fillRef>
-            <a:effectRef idx="2">
-              <a:schemeClr val="accent1"/>
-            </a:effectRef>
-            <a:fontRef idx="minor">
-              <a:schemeClr val="lt1"/>
-            </a:fontRef>
-          </p:style>
-          <p:txBody>
-            <a:bodyPr rtlCol="0" anchor="ctr"/>
-            <a:lstStyle/>
-            <a:p>
-              <a:pPr algn="ctr"/>
-            </a:p>
-          </p:txBody>
-        </p:sp>
-        <p:sp>
-          <p:nvSpPr>
-            <p:cNvPr id="24" name="Freeform 23"/>
-            <p:cNvSpPr/>
-            <p:nvPr/>
-          </p:nvSpPr>
-          <p:spPr>
-            <a:xfrm>
-              <a:off x="401835" y="3793821"/>
+              <a:off x="401835" y="3596103"/>
               <a:ext cx="182166" cy="91083"/>
             </a:xfrm>
             <a:custGeom>
@@ -8341,13 +7614,10 @@
               <a:pathLst>
                 <a:path w="182166" h="91083">
                   <a:moveTo>
-                    <a:pt x="0" y="91083"/>
+                    <a:pt x="0" y="0"/>
                   </a:moveTo>
                   <a:lnTo>
-                    <a:pt x="54650" y="36433"/>
-                  </a:lnTo>
-                  <a:lnTo>
-                    <a:pt x="109300" y="72866"/>
+                    <a:pt x="91083" y="91083"/>
                   </a:lnTo>
                   <a:lnTo>
                     <a:pt x="182166" y="0"/>
@@ -8386,315 +7656,16 @@
             </a:p>
           </p:txBody>
         </p:sp>
-      </p:grpSp>
-      <p:sp>
-        <p:nvSpPr>
-          <p:cNvPr id="25" name="item_3"/>
-          <p:cNvSpPr txBox="1"/>
-          <p:nvPr/>
-        </p:nvSpPr>
-        <p:spPr>
-          <a:xfrm>
-            <a:off x="908256" y="3685514"/>
-            <a:ext cx="7710878" cy="635025"/>
-          </a:xfrm>
-          <a:prstGeom prst="rect">
-            <a:avLst/>
-          </a:prstGeom>
-          <a:noFill/>
-        </p:spPr>
-        <p:txBody>
-          <a:bodyPr wrap="square" lIns="76200" rIns="76200" tIns="50800" bIns="50800">
-            <a:spAutoFit/>
-          </a:bodyPr>
-          <a:lstStyle/>
-          <a:p>
-            <a:pPr algn="l">
-              <a:spcAft>
-                <a:spcPts val="300"/>
-              </a:spcAft>
-              <a:defRPr sz="1800">
-                <a:solidFill>
-                  <a:srgbClr val="000000"/>
-                </a:solidFill>
-                <a:latin typeface="Play"/>
-                <a:ea typeface="Play"/>
-                <a:cs typeface="Play"/>
-              </a:defRPr>
-            </a:pPr>
-            <a:r>
-              <a:rPr sz="1800">
-                <a:solidFill>
-                  <a:srgbClr val="000000"/>
-                </a:solidFill>
-                <a:latin typeface="Play"/>
-                <a:ea typeface="Play"/>
-                <a:cs typeface="Play"/>
-              </a:rPr>
-              <a:t>Экспорт в pptx, pdf, html с редактируемыми слайдами</a:t>
-            </a:r>
-          </a:p>
-        </p:txBody>
-      </p:sp>
-    </p:spTree>
-  </p:cSld>
-  <p:clrMapOvr>
-    <a:masterClrMapping/>
-  </p:clrMapOvr>
-</p:sld>
-</file>
-
-<file path=ppt/slides/slide59.xml><?xml version="1.0" encoding="utf-8"?>
-<p:sld xmlns:a="http://schemas.openxmlformats.org/drawingml/2006/main" xmlns:p="http://schemas.openxmlformats.org/presentationml/2006/main" xmlns:r="http://schemas.openxmlformats.org/officeDocument/2006/relationships">
-  <p:cSld>
-    <p:spTree>
-      <p:nvGrpSpPr>
-        <p:cNvPr id="1" name=""/>
-        <p:cNvGrpSpPr/>
-        <p:nvPr/>
-      </p:nvGrpSpPr>
-      <p:grpSpPr/>
-      <p:sp>
-        <p:nvSpPr>
-          <p:cNvPr id="2429" name="Google Shape;2429;p89"/>
-          <p:cNvSpPr/>
-          <p:nvPr/>
-        </p:nvSpPr>
-        <p:spPr>
-          <a:xfrm>
-            <a:off x="553415" y="1828897"/>
-            <a:ext cx="2232516" cy="1490254"/>
-          </a:xfrm>
-          <a:prstGeom prst="rect">
-            <a:avLst/>
-          </a:prstGeom>
-          <a:noFill/>
-          <a:ln>
-            <a:noFill/>
-          </a:ln>
-        </p:spPr>
-        <p:txBody>
-          <a:bodyPr anchorCtr="0" anchor="ctr" bIns="91425" lIns="91425" spcFirstLastPara="1" rIns="91425" wrap="square" tIns="91425">
-            <a:noAutofit/>
-          </a:bodyPr>
-          <a:lstStyle/>
-          <a:p>
-            <a:pPr indent="0" lvl="0" marL="0" rtl="0" algn="l">
-              <a:spcBef>
-                <a:spcPts val="0"/>
-              </a:spcBef>
-              <a:spcAft>
-                <a:spcPts val="0"/>
-              </a:spcAft>
-              <a:buNone/>
-            </a:pPr>
-            <a:r>
-              <a:t/>
-            </a:r>
-            <a:endParaRPr/>
-          </a:p>
-        </p:txBody>
-      </p:sp>
-      <p:sp>
-        <p:nvSpPr>
-          <p:cNvPr id="2431" name="Google Shape;2431;p89"/>
-          <p:cNvSpPr/>
-          <p:nvPr/>
-        </p:nvSpPr>
-        <p:spPr>
-          <a:xfrm>
-            <a:off x="3565736" y="1828897"/>
-            <a:ext cx="2232516" cy="1490254"/>
-          </a:xfrm>
-          <a:prstGeom prst="rect">
-            <a:avLst/>
-          </a:prstGeom>
-          <a:noFill/>
-          <a:ln>
-            <a:noFill/>
-          </a:ln>
-        </p:spPr>
-        <p:txBody>
-          <a:bodyPr anchorCtr="0" anchor="ctr" bIns="91425" lIns="91425" spcFirstLastPara="1" rIns="91425" wrap="square" tIns="91425">
-            <a:noAutofit/>
-          </a:bodyPr>
-          <a:lstStyle/>
-          <a:p>
-            <a:pPr indent="0" lvl="0" marL="0" rtl="0" algn="l">
-              <a:spcBef>
-                <a:spcPts val="0"/>
-              </a:spcBef>
-              <a:spcAft>
-                <a:spcPts val="0"/>
-              </a:spcAft>
-              <a:buNone/>
-            </a:pPr>
-            <a:r>
-              <a:t/>
-            </a:r>
-            <a:endParaRPr/>
-          </a:p>
-        </p:txBody>
-      </p:sp>
-      <p:sp>
-        <p:nvSpPr>
-          <p:cNvPr id="2433" name="Google Shape;2433;p89"/>
-          <p:cNvSpPr/>
-          <p:nvPr/>
-        </p:nvSpPr>
-        <p:spPr>
-          <a:xfrm>
-            <a:off x="6578067" y="1828897"/>
-            <a:ext cx="2232516" cy="1490254"/>
-          </a:xfrm>
-          <a:prstGeom prst="rect">
-            <a:avLst/>
-          </a:prstGeom>
-          <a:noFill/>
-          <a:ln>
-            <a:noFill/>
-          </a:ln>
-        </p:spPr>
-        <p:txBody>
-          <a:bodyPr anchorCtr="0" anchor="ctr" bIns="91425" lIns="91425" spcFirstLastPara="1" rIns="91425" wrap="square" tIns="91425">
-            <a:noAutofit/>
-          </a:bodyPr>
-          <a:lstStyle/>
-          <a:p>
-            <a:pPr indent="0" lvl="0" marL="0" rtl="0" algn="l">
-              <a:spcBef>
-                <a:spcPts val="0"/>
-              </a:spcBef>
-              <a:spcAft>
-                <a:spcPts val="0"/>
-              </a:spcAft>
-              <a:buNone/>
-            </a:pPr>
-            <a:r>
-              <a:t/>
-            </a:r>
-            <a:endParaRPr/>
-          </a:p>
-        </p:txBody>
-      </p:sp>
-      <p:sp>
-        <p:nvSpPr>
-          <p:cNvPr id="2434" name="title"/>
-          <p:cNvSpPr txBox="1"/>
-          <p:nvPr/>
-        </p:nvSpPr>
-        <p:spPr>
-          <a:xfrm>
-            <a:off x="274320" y="282943"/>
-            <a:ext cx="6792986" cy="932027"/>
-          </a:xfrm>
-          <a:prstGeom prst="rect">
-            <a:avLst/>
-          </a:prstGeom>
-          <a:noFill/>
-        </p:spPr>
-        <p:txBody>
-          <a:bodyPr wrap="square" lIns="76200" rIns="76200" tIns="50800" bIns="50800">
-            <a:spAutoFit/>
-          </a:bodyPr>
-          <a:lstStyle/>
-          <a:p>
-            <a:pPr algn="l">
-              <a:spcAft>
-                <a:spcPts val="300"/>
-              </a:spcAft>
-              <a:defRPr sz="2438">
-                <a:solidFill>
-                  <a:srgbClr val="000000"/>
-                </a:solidFill>
-                <a:latin typeface="Play"/>
-                <a:ea typeface="Play"/>
-                <a:cs typeface="Play"/>
-              </a:defRPr>
-            </a:pPr>
-            <a:r>
-              <a:rPr sz="2438">
-                <a:solidFill>
-                  <a:srgbClr val="000000"/>
-                </a:solidFill>
-                <a:latin typeface="Play"/>
-                <a:ea typeface="Play"/>
-                <a:cs typeface="Play"/>
-              </a:rPr>
-              <a:t>Предложение: аудит и автоматические правки</a:t>
-            </a:r>
-          </a:p>
-        </p:txBody>
-      </p:sp>
-      <p:grpSp>
-        <p:nvGrpSpPr>
-          <p:cNvPr id="2" name="icon:builtin-search"/>
-          <p:cNvGrpSpPr/>
-          <p:nvPr/>
-        </p:nvGrpSpPr>
-        <p:grpSpPr>
-          <a:xfrm>
-            <a:off x="347186" y="1467860"/>
-            <a:ext cx="309681" cy="309681"/>
-            <a:chOff x="347186" y="1467860"/>
-            <a:chExt cx="309681" cy="309681"/>
-          </a:xfrm>
-        </p:grpSpPr>
         <p:sp>
           <p:nvSpPr>
-            <p:cNvPr id="2435" name="Oval 2434"/>
+            <p:cNvPr id="16" name="Freeform 15"/>
             <p:cNvSpPr/>
             <p:nvPr/>
           </p:nvSpPr>
           <p:spPr>
             <a:xfrm>
-              <a:off x="347186" y="1467860"/>
-              <a:ext cx="255031" cy="255031"/>
-            </a:xfrm>
-            <a:prstGeom prst="ellipse">
-              <a:avLst/>
-            </a:prstGeom>
-            <a:noFill/>
-            <a:ln w="36433" cap="rnd">
-              <a:solidFill>
-                <a:srgbClr val="0077FF"/>
-              </a:solidFill>
-              <a:round/>
-            </a:ln>
-            <a:effectLst/>
-          </p:spPr>
-          <p:style>
-            <a:lnRef idx="1">
-              <a:schemeClr val="accent1"/>
-            </a:lnRef>
-            <a:fillRef idx="3">
-              <a:schemeClr val="accent1"/>
-            </a:fillRef>
-            <a:effectRef idx="2">
-              <a:schemeClr val="accent1"/>
-            </a:effectRef>
-            <a:fontRef idx="minor">
-              <a:schemeClr val="lt1"/>
-            </a:fontRef>
-          </p:style>
-          <p:txBody>
-            <a:bodyPr rtlCol="0" anchor="ctr"/>
-            <a:lstStyle/>
-            <a:p>
-              <a:pPr algn="ctr"/>
-            </a:p>
-          </p:txBody>
-        </p:sp>
-        <p:sp>
-          <p:nvSpPr>
-            <p:cNvPr id="3" name="Freeform 2"/>
-            <p:cNvSpPr/>
-            <p:nvPr/>
-          </p:nvSpPr>
-          <p:spPr>
-            <a:xfrm>
-              <a:off x="569427" y="1690101"/>
-              <a:ext cx="87440" cy="87440"/>
+              <a:off x="365402" y="3796485"/>
+              <a:ext cx="255032" cy="0"/>
             </a:xfrm>
             <a:custGeom>
               <a:avLst/>
@@ -8703,12 +7674,12 @@
               <a:cxnLst/>
               <a:rect l="l" t="t" r="r" b="b"/>
               <a:pathLst>
-                <a:path w="87440" h="87440">
+                <a:path w="255032" h="0">
                   <a:moveTo>
                     <a:pt x="0" y="0"/>
                   </a:moveTo>
                   <a:lnTo>
-                    <a:pt x="87440" y="87440"/>
+                    <a:pt x="255032" y="0"/>
                   </a:lnTo>
                 </a:path>
               </a:pathLst>
@@ -8747,14 +7718,14 @@
       </p:grpSp>
       <p:sp>
         <p:nvSpPr>
-          <p:cNvPr id="2436" name="item_0"/>
+          <p:cNvPr id="17" name="item_2"/>
           <p:cNvSpPr txBox="1"/>
           <p:nvPr/>
         </p:nvSpPr>
         <p:spPr>
           <a:xfrm>
-            <a:off x="908256" y="1414202"/>
-            <a:ext cx="7710878" cy="635025"/>
+            <a:off x="908256" y="3433146"/>
+            <a:ext cx="7710878" cy="887393"/>
           </a:xfrm>
           <a:prstGeom prst="rect">
             <a:avLst/>
@@ -8789,224 +7760,39 @@
                 <a:ea typeface="Play"/>
                 <a:cs typeface="Play"/>
               </a:rPr>
-              <a:t>Аудит качества до выдачи результата</a:t>
+              <a:t>Экспорт в pptx, pdf, html</a:t>
             </a:r>
           </a:p>
         </p:txBody>
       </p:sp>
-      <p:grpSp>
-        <p:nvGrpSpPr>
-          <p:cNvPr id="4" name="icon:builtin-shield"/>
-          <p:cNvGrpSpPr/>
-          <p:nvPr/>
-        </p:nvGrpSpPr>
-        <p:grpSpPr>
-          <a:xfrm>
-            <a:off x="365402" y="2206747"/>
-            <a:ext cx="255032" cy="327898"/>
-            <a:chOff x="365402" y="2206747"/>
-            <a:chExt cx="255032" cy="327898"/>
-          </a:xfrm>
-        </p:grpSpPr>
-        <p:sp>
-          <p:nvSpPr>
-            <p:cNvPr id="5" name="Freeform 4"/>
-            <p:cNvSpPr/>
-            <p:nvPr/>
-          </p:nvSpPr>
-          <p:spPr>
-            <a:xfrm>
-              <a:off x="365402" y="2206747"/>
-              <a:ext cx="255032" cy="327898"/>
-            </a:xfrm>
-            <a:custGeom>
-              <a:avLst/>
-              <a:gdLst/>
-              <a:ahLst/>
-              <a:cxnLst/>
-              <a:rect l="l" t="t" r="r" b="b"/>
-              <a:pathLst>
-                <a:path w="255032" h="327898">
-                  <a:moveTo>
-                    <a:pt x="127516" y="0"/>
-                  </a:moveTo>
-                  <a:lnTo>
-                    <a:pt x="255032" y="54650"/>
-                  </a:lnTo>
-                  <a:lnTo>
-                    <a:pt x="255032" y="145732"/>
-                  </a:lnTo>
-                  <a:lnTo>
-                    <a:pt x="253429" y="170015"/>
-                  </a:lnTo>
-                  <a:lnTo>
-                    <a:pt x="248765" y="193533"/>
-                  </a:lnTo>
-                  <a:lnTo>
-                    <a:pt x="241260" y="216067"/>
-                  </a:lnTo>
-                  <a:lnTo>
-                    <a:pt x="231132" y="237398"/>
-                  </a:lnTo>
-                  <a:lnTo>
-                    <a:pt x="218599" y="257309"/>
-                  </a:lnTo>
-                  <a:lnTo>
-                    <a:pt x="203880" y="275580"/>
-                  </a:lnTo>
-                  <a:lnTo>
-                    <a:pt x="187193" y="291993"/>
-                  </a:lnTo>
-                  <a:lnTo>
-                    <a:pt x="168758" y="306329"/>
-                  </a:lnTo>
-                  <a:lnTo>
-                    <a:pt x="148793" y="318371"/>
-                  </a:lnTo>
-                  <a:lnTo>
-                    <a:pt x="127516" y="327898"/>
-                  </a:lnTo>
-                  <a:lnTo>
-                    <a:pt x="106239" y="318371"/>
-                  </a:lnTo>
-                  <a:lnTo>
-                    <a:pt x="86274" y="306329"/>
-                  </a:lnTo>
-                  <a:lnTo>
-                    <a:pt x="67839" y="291993"/>
-                  </a:lnTo>
-                  <a:lnTo>
-                    <a:pt x="51152" y="275580"/>
-                  </a:lnTo>
-                  <a:lnTo>
-                    <a:pt x="36433" y="257309"/>
-                  </a:lnTo>
-                  <a:lnTo>
-                    <a:pt x="23900" y="237398"/>
-                  </a:lnTo>
-                  <a:lnTo>
-                    <a:pt x="13772" y="216067"/>
-                  </a:lnTo>
-                  <a:lnTo>
-                    <a:pt x="6267" y="193533"/>
-                  </a:lnTo>
-                  <a:lnTo>
-                    <a:pt x="1603" y="170015"/>
-                  </a:lnTo>
-                  <a:lnTo>
-                    <a:pt x="0" y="145732"/>
-                  </a:lnTo>
-                  <a:lnTo>
-                    <a:pt x="0" y="54650"/>
-                  </a:lnTo>
-                  <a:close/>
-                </a:path>
-              </a:pathLst>
-            </a:custGeom>
-            <a:noFill/>
-            <a:ln w="36433" cap="rnd">
-              <a:solidFill>
-                <a:srgbClr val="0077FF"/>
-              </a:solidFill>
-              <a:round/>
-            </a:ln>
-            <a:effectLst/>
-          </p:spPr>
-          <p:style>
-            <a:lnRef idx="1">
-              <a:schemeClr val="accent1"/>
-            </a:lnRef>
-            <a:fillRef idx="3">
-              <a:schemeClr val="accent1"/>
-            </a:fillRef>
-            <a:effectRef idx="2">
-              <a:schemeClr val="accent1"/>
-            </a:effectRef>
-            <a:fontRef idx="minor">
-              <a:schemeClr val="lt1"/>
-            </a:fontRef>
-          </p:style>
-          <p:txBody>
-            <a:bodyPr rtlCol="0" anchor="ctr"/>
-            <a:lstStyle/>
-            <a:p>
-              <a:pPr algn="ctr"/>
-            </a:p>
-          </p:txBody>
-        </p:sp>
-        <p:sp>
-          <p:nvSpPr>
-            <p:cNvPr id="6" name="Freeform 5"/>
-            <p:cNvSpPr/>
-            <p:nvPr/>
-          </p:nvSpPr>
-          <p:spPr>
-            <a:xfrm>
-              <a:off x="438268" y="2334263"/>
-              <a:ext cx="109300" cy="72866"/>
-            </a:xfrm>
-            <a:custGeom>
-              <a:avLst/>
-              <a:gdLst/>
-              <a:ahLst/>
-              <a:cxnLst/>
-              <a:rect l="l" t="t" r="r" b="b"/>
-              <a:pathLst>
-                <a:path w="109300" h="72866">
-                  <a:moveTo>
-                    <a:pt x="0" y="36433"/>
-                  </a:moveTo>
-                  <a:lnTo>
-                    <a:pt x="36433" y="72866"/>
-                  </a:lnTo>
-                  <a:lnTo>
-                    <a:pt x="109300" y="0"/>
-                  </a:lnTo>
-                </a:path>
-              </a:pathLst>
-            </a:custGeom>
-            <a:noFill/>
-            <a:ln w="36433" cap="rnd">
-              <a:solidFill>
-                <a:srgbClr val="0077FF"/>
-              </a:solidFill>
-              <a:round/>
-            </a:ln>
-            <a:effectLst/>
-          </p:spPr>
-          <p:style>
-            <a:lnRef idx="1">
-              <a:schemeClr val="accent1"/>
-            </a:lnRef>
-            <a:fillRef idx="3">
-              <a:schemeClr val="accent1"/>
-            </a:fillRef>
-            <a:effectRef idx="2">
-              <a:schemeClr val="accent1"/>
-            </a:effectRef>
-            <a:fontRef idx="minor">
-              <a:schemeClr val="lt1"/>
-            </a:fontRef>
-          </p:style>
-          <p:txBody>
-            <a:bodyPr rtlCol="0" anchor="ctr"/>
-            <a:lstStyle/>
-            <a:p>
-              <a:pPr algn="ctr"/>
-            </a:p>
-          </p:txBody>
-        </p:sp>
-      </p:grpSp>
+    </p:spTree>
+  </p:cSld>
+  <p:clrMapOvr>
+    <a:masterClrMapping/>
+  </p:clrMapOvr>
+</p:sld>
+</file>
+
+<file path=ppt/slides/slide59.xml><?xml version="1.0" encoding="utf-8"?>
+<p:sld xmlns:a="http://schemas.openxmlformats.org/drawingml/2006/main" xmlns:p="http://schemas.openxmlformats.org/presentationml/2006/main" xmlns:r="http://schemas.openxmlformats.org/officeDocument/2006/relationships">
+  <p:cSld>
+    <p:spTree>
+      <p:nvGrpSpPr>
+        <p:cNvPr id="1" name=""/>
+        <p:cNvGrpSpPr/>
+        <p:nvPr/>
+      </p:nvGrpSpPr>
+      <p:grpSpPr/>
       <p:sp>
         <p:nvSpPr>
-          <p:cNvPr id="2437" name="item_1"/>
+          <p:cNvPr id="2" name="title"/>
           <p:cNvSpPr txBox="1"/>
           <p:nvPr/>
         </p:nvSpPr>
         <p:spPr>
           <a:xfrm>
-            <a:off x="908256" y="2171306"/>
-            <a:ext cx="7710878" cy="635025"/>
+            <a:off x="274320" y="282943"/>
+            <a:ext cx="6792986" cy="617220"/>
           </a:xfrm>
           <a:prstGeom prst="rect">
             <a:avLst/>
@@ -9023,7 +7809,7 @@
               <a:spcAft>
                 <a:spcPts val="300"/>
               </a:spcAft>
-              <a:defRPr sz="1800">
+              <a:defRPr sz="2438">
                 <a:solidFill>
                   <a:srgbClr val="000000"/>
                 </a:solidFill>
@@ -9033,7 +7819,7 @@
               </a:defRPr>
             </a:pPr>
             <a:r>
-              <a:rPr sz="1800">
+              <a:rPr sz="2438">
                 <a:solidFill>
                   <a:srgbClr val="000000"/>
                 </a:solidFill>
@@ -9041,638 +7827,29 @@
                 <a:ea typeface="Play"/>
                 <a:cs typeface="Play"/>
               </a:rPr>
-              <a:t>Автоматические правки нарушений фирменного стиля</a:t>
+              <a:t>Сборка колоды за 4 мин вместо 186</a:t>
             </a:r>
           </a:p>
         </p:txBody>
       </p:sp>
-      <p:grpSp>
-        <p:nvGrpSpPr>
-          <p:cNvPr id="7" name="icon:builtin-edit"/>
-          <p:cNvGrpSpPr/>
+      <p:graphicFrame>
+        <p:nvGraphicFramePr>
+          <p:cNvPr id="3" name="Chart 2"/>
+          <p:cNvGraphicFramePr>
+            <a:graphicFrameLocks noGrp="1"/>
+          </p:cNvGraphicFramePr>
           <p:nvPr/>
-        </p:nvGrpSpPr>
-        <p:grpSpPr>
-          <a:xfrm>
-            <a:off x="347186" y="3007188"/>
-            <a:ext cx="284560" cy="266344"/>
-            <a:chOff x="347186" y="3007188"/>
-            <a:chExt cx="284560" cy="266344"/>
-          </a:xfrm>
-        </p:grpSpPr>
-        <p:sp>
-          <p:nvSpPr>
-            <p:cNvPr id="8" name="Freeform 7"/>
-            <p:cNvSpPr/>
-            <p:nvPr/>
-          </p:nvSpPr>
-          <p:spPr>
-            <a:xfrm>
-              <a:off x="347186" y="3007188"/>
-              <a:ext cx="284560" cy="266344"/>
-            </a:xfrm>
-            <a:custGeom>
-              <a:avLst/>
-              <a:gdLst/>
-              <a:ahLst/>
-              <a:cxnLst/>
-              <a:rect l="l" t="t" r="r" b="b"/>
-              <a:pathLst>
-                <a:path w="284560" h="266344">
-                  <a:moveTo>
-                    <a:pt x="0" y="266344"/>
-                  </a:moveTo>
-                  <a:lnTo>
-                    <a:pt x="72866" y="266344"/>
-                  </a:lnTo>
-                  <a:lnTo>
-                    <a:pt x="273248" y="65962"/>
-                  </a:lnTo>
-                  <a:lnTo>
-                    <a:pt x="278057" y="60115"/>
-                  </a:lnTo>
-                  <a:lnTo>
-                    <a:pt x="281627" y="53429"/>
-                  </a:lnTo>
-                  <a:lnTo>
-                    <a:pt x="283832" y="46179"/>
-                  </a:lnTo>
-                  <a:lnTo>
-                    <a:pt x="284560" y="38638"/>
-                  </a:lnTo>
-                  <a:lnTo>
-                    <a:pt x="283832" y="31096"/>
-                  </a:lnTo>
-                  <a:lnTo>
-                    <a:pt x="281627" y="23846"/>
-                  </a:lnTo>
-                  <a:lnTo>
-                    <a:pt x="278057" y="17160"/>
-                  </a:lnTo>
-                  <a:lnTo>
-                    <a:pt x="273248" y="11313"/>
-                  </a:lnTo>
-                  <a:lnTo>
-                    <a:pt x="267400" y="6504"/>
-                  </a:lnTo>
-                  <a:lnTo>
-                    <a:pt x="260715" y="2933"/>
-                  </a:lnTo>
-                  <a:lnTo>
-                    <a:pt x="253465" y="729"/>
-                  </a:lnTo>
-                  <a:lnTo>
-                    <a:pt x="245923" y="0"/>
-                  </a:lnTo>
-                  <a:lnTo>
-                    <a:pt x="238381" y="729"/>
-                  </a:lnTo>
-                  <a:lnTo>
-                    <a:pt x="231131" y="2933"/>
-                  </a:lnTo>
-                  <a:lnTo>
-                    <a:pt x="224446" y="6504"/>
-                  </a:lnTo>
-                  <a:lnTo>
-                    <a:pt x="218598" y="11313"/>
-                  </a:lnTo>
-                  <a:lnTo>
-                    <a:pt x="18216" y="211695"/>
-                  </a:lnTo>
-                  <a:close/>
-                </a:path>
-              </a:pathLst>
-            </a:custGeom>
-            <a:noFill/>
-            <a:ln w="36433" cap="rnd">
-              <a:solidFill>
-                <a:srgbClr val="0077FF"/>
-              </a:solidFill>
-              <a:round/>
-            </a:ln>
-            <a:effectLst/>
-          </p:spPr>
-          <p:style>
-            <a:lnRef idx="1">
-              <a:schemeClr val="accent1"/>
-            </a:lnRef>
-            <a:fillRef idx="3">
-              <a:schemeClr val="accent1"/>
-            </a:fillRef>
-            <a:effectRef idx="2">
-              <a:schemeClr val="accent1"/>
-            </a:effectRef>
-            <a:fontRef idx="minor">
-              <a:schemeClr val="lt1"/>
-            </a:fontRef>
-          </p:style>
-          <p:txBody>
-            <a:bodyPr rtlCol="0" anchor="ctr"/>
-            <a:lstStyle/>
-            <a:p>
-              <a:pPr algn="ctr"/>
-            </a:p>
-          </p:txBody>
-        </p:sp>
-        <p:sp>
-          <p:nvSpPr>
-            <p:cNvPr id="9" name="Freeform 8"/>
-            <p:cNvSpPr/>
-            <p:nvPr/>
-          </p:nvSpPr>
-          <p:spPr>
-            <a:xfrm>
-              <a:off x="529351" y="3054934"/>
-              <a:ext cx="54650" cy="54649"/>
-            </a:xfrm>
-            <a:custGeom>
-              <a:avLst/>
-              <a:gdLst/>
-              <a:ahLst/>
-              <a:cxnLst/>
-              <a:rect l="l" t="t" r="r" b="b"/>
-              <a:pathLst>
-                <a:path w="54650" h="54649">
-                  <a:moveTo>
-                    <a:pt x="0" y="0"/>
-                  </a:moveTo>
-                  <a:lnTo>
-                    <a:pt x="54650" y="54649"/>
-                  </a:lnTo>
-                </a:path>
-              </a:pathLst>
-            </a:custGeom>
-            <a:noFill/>
-            <a:ln w="36433" cap="rnd">
-              <a:solidFill>
-                <a:srgbClr val="0077FF"/>
-              </a:solidFill>
-              <a:round/>
-            </a:ln>
-            <a:effectLst/>
-          </p:spPr>
-          <p:style>
-            <a:lnRef idx="1">
-              <a:schemeClr val="accent1"/>
-            </a:lnRef>
-            <a:fillRef idx="3">
-              <a:schemeClr val="accent1"/>
-            </a:fillRef>
-            <a:effectRef idx="2">
-              <a:schemeClr val="accent1"/>
-            </a:effectRef>
-            <a:fontRef idx="minor">
-              <a:schemeClr val="lt1"/>
-            </a:fontRef>
-          </p:style>
-          <p:txBody>
-            <a:bodyPr rtlCol="0" anchor="ctr"/>
-            <a:lstStyle/>
-            <a:p>
-              <a:pPr algn="ctr"/>
-            </a:p>
-          </p:txBody>
-        </p:sp>
-      </p:grpSp>
-      <p:sp>
-        <p:nvSpPr>
-          <p:cNvPr id="2438" name="item_2"/>
-          <p:cNvSpPr txBox="1"/>
-          <p:nvPr/>
-        </p:nvSpPr>
-        <p:spPr>
-          <a:xfrm>
-            <a:off x="908256" y="2928410"/>
-            <a:ext cx="7710878" cy="635025"/>
-          </a:xfrm>
-          <a:prstGeom prst="rect">
-            <a:avLst/>
-          </a:prstGeom>
-          <a:noFill/>
-        </p:spPr>
-        <p:txBody>
-          <a:bodyPr wrap="square" lIns="76200" rIns="76200" tIns="50800" bIns="50800">
-            <a:spAutoFit/>
-          </a:bodyPr>
-          <a:lstStyle/>
-          <a:p>
-            <a:pPr algn="l">
-              <a:spcAft>
-                <a:spcPts val="300"/>
-              </a:spcAft>
-              <a:defRPr sz="1800">
-                <a:solidFill>
-                  <a:srgbClr val="000000"/>
-                </a:solidFill>
-                <a:latin typeface="Play"/>
-                <a:ea typeface="Play"/>
-                <a:cs typeface="Play"/>
-              </a:defRPr>
-            </a:pPr>
-            <a:r>
-              <a:rPr sz="1800">
-                <a:solidFill>
-                  <a:srgbClr val="000000"/>
-                </a:solidFill>
-                <a:latin typeface="Play"/>
-                <a:ea typeface="Play"/>
-                <a:cs typeface="Play"/>
-              </a:rPr>
-              <a:t>Слайды остаются редактируемыми, без картинок</a:t>
-            </a:r>
-          </a:p>
-        </p:txBody>
-      </p:sp>
-      <p:grpSp>
-        <p:nvGrpSpPr>
-          <p:cNvPr id="10" name="icon:builtin-support"/>
-          <p:cNvGrpSpPr/>
-          <p:nvPr/>
-        </p:nvGrpSpPr>
-        <p:grpSpPr>
-          <a:xfrm>
-            <a:off x="328969" y="3720955"/>
-            <a:ext cx="327897" cy="327897"/>
-            <a:chOff x="328969" y="3720955"/>
-            <a:chExt cx="327897" cy="327897"/>
-          </a:xfrm>
-        </p:grpSpPr>
-        <p:sp>
-          <p:nvSpPr>
-            <p:cNvPr id="2439" name="Oval 2438"/>
-            <p:cNvSpPr/>
-            <p:nvPr/>
-          </p:nvSpPr>
-          <p:spPr>
-            <a:xfrm>
-              <a:off x="328969" y="3720955"/>
-              <a:ext cx="327897" cy="327897"/>
-            </a:xfrm>
-            <a:prstGeom prst="ellipse">
-              <a:avLst/>
-            </a:prstGeom>
-            <a:noFill/>
-            <a:ln w="36433" cap="rnd">
-              <a:solidFill>
-                <a:srgbClr val="0077FF"/>
-              </a:solidFill>
-              <a:round/>
-            </a:ln>
-            <a:effectLst/>
-          </p:spPr>
-          <p:style>
-            <a:lnRef idx="1">
-              <a:schemeClr val="accent1"/>
-            </a:lnRef>
-            <a:fillRef idx="3">
-              <a:schemeClr val="accent1"/>
-            </a:fillRef>
-            <a:effectRef idx="2">
-              <a:schemeClr val="accent1"/>
-            </a:effectRef>
-            <a:fontRef idx="minor">
-              <a:schemeClr val="lt1"/>
-            </a:fontRef>
-          </p:style>
-          <p:txBody>
-            <a:bodyPr rtlCol="0" anchor="ctr"/>
-            <a:lstStyle/>
-            <a:p>
-              <a:pPr algn="ctr"/>
-            </a:p>
-          </p:txBody>
-        </p:sp>
-        <p:sp>
-          <p:nvSpPr>
-            <p:cNvPr id="2440" name="Oval 2439"/>
-            <p:cNvSpPr/>
-            <p:nvPr/>
-          </p:nvSpPr>
-          <p:spPr>
-            <a:xfrm>
-              <a:off x="420052" y="3812038"/>
-              <a:ext cx="145732" cy="145732"/>
-            </a:xfrm>
-            <a:prstGeom prst="ellipse">
-              <a:avLst/>
-            </a:prstGeom>
-            <a:noFill/>
-            <a:ln w="36433" cap="rnd">
-              <a:solidFill>
-                <a:srgbClr val="0077FF"/>
-              </a:solidFill>
-              <a:round/>
-            </a:ln>
-            <a:effectLst/>
-          </p:spPr>
-          <p:style>
-            <a:lnRef idx="1">
-              <a:schemeClr val="accent1"/>
-            </a:lnRef>
-            <a:fillRef idx="3">
-              <a:schemeClr val="accent1"/>
-            </a:fillRef>
-            <a:effectRef idx="2">
-              <a:schemeClr val="accent1"/>
-            </a:effectRef>
-            <a:fontRef idx="minor">
-              <a:schemeClr val="lt1"/>
-            </a:fontRef>
-          </p:style>
-          <p:txBody>
-            <a:bodyPr rtlCol="0" anchor="ctr"/>
-            <a:lstStyle/>
-            <a:p>
-              <a:pPr algn="ctr"/>
-            </a:p>
-          </p:txBody>
-        </p:sp>
-        <p:sp>
-          <p:nvSpPr>
-            <p:cNvPr id="11" name="Freeform 10"/>
-            <p:cNvSpPr/>
-            <p:nvPr/>
-          </p:nvSpPr>
-          <p:spPr>
-            <a:xfrm>
-              <a:off x="376332" y="3768318"/>
-              <a:ext cx="65580" cy="65580"/>
-            </a:xfrm>
-            <a:custGeom>
-              <a:avLst/>
-              <a:gdLst/>
-              <a:ahLst/>
-              <a:cxnLst/>
-              <a:rect l="l" t="t" r="r" b="b"/>
-              <a:pathLst>
-                <a:path w="65580" h="65580">
-                  <a:moveTo>
-                    <a:pt x="0" y="0"/>
-                  </a:moveTo>
-                  <a:lnTo>
-                    <a:pt x="65580" y="65580"/>
-                  </a:lnTo>
-                </a:path>
-              </a:pathLst>
-            </a:custGeom>
-            <a:noFill/>
-            <a:ln w="36433" cap="rnd">
-              <a:solidFill>
-                <a:srgbClr val="0077FF"/>
-              </a:solidFill>
-              <a:round/>
-            </a:ln>
-            <a:effectLst/>
-          </p:spPr>
-          <p:style>
-            <a:lnRef idx="1">
-              <a:schemeClr val="accent1"/>
-            </a:lnRef>
-            <a:fillRef idx="3">
-              <a:schemeClr val="accent1"/>
-            </a:fillRef>
-            <a:effectRef idx="2">
-              <a:schemeClr val="accent1"/>
-            </a:effectRef>
-            <a:fontRef idx="minor">
-              <a:schemeClr val="lt1"/>
-            </a:fontRef>
-          </p:style>
-          <p:txBody>
-            <a:bodyPr rtlCol="0" anchor="ctr"/>
-            <a:lstStyle/>
-            <a:p>
-              <a:pPr algn="ctr"/>
-            </a:p>
-          </p:txBody>
-        </p:sp>
-        <p:sp>
-          <p:nvSpPr>
-            <p:cNvPr id="12" name="Freeform 11"/>
-            <p:cNvSpPr/>
-            <p:nvPr/>
-          </p:nvSpPr>
-          <p:spPr>
-            <a:xfrm>
-              <a:off x="543924" y="3935910"/>
-              <a:ext cx="65580" cy="65580"/>
-            </a:xfrm>
-            <a:custGeom>
-              <a:avLst/>
-              <a:gdLst/>
-              <a:ahLst/>
-              <a:cxnLst/>
-              <a:rect l="l" t="t" r="r" b="b"/>
-              <a:pathLst>
-                <a:path w="65580" h="65580">
-                  <a:moveTo>
-                    <a:pt x="0" y="0"/>
-                  </a:moveTo>
-                  <a:lnTo>
-                    <a:pt x="65580" y="65580"/>
-                  </a:lnTo>
-                </a:path>
-              </a:pathLst>
-            </a:custGeom>
-            <a:noFill/>
-            <a:ln w="36433" cap="rnd">
-              <a:solidFill>
-                <a:srgbClr val="0077FF"/>
-              </a:solidFill>
-              <a:round/>
-            </a:ln>
-            <a:effectLst/>
-          </p:spPr>
-          <p:style>
-            <a:lnRef idx="1">
-              <a:schemeClr val="accent1"/>
-            </a:lnRef>
-            <a:fillRef idx="3">
-              <a:schemeClr val="accent1"/>
-            </a:fillRef>
-            <a:effectRef idx="2">
-              <a:schemeClr val="accent1"/>
-            </a:effectRef>
-            <a:fontRef idx="minor">
-              <a:schemeClr val="lt1"/>
-            </a:fontRef>
-          </p:style>
-          <p:txBody>
-            <a:bodyPr rtlCol="0" anchor="ctr"/>
-            <a:lstStyle/>
-            <a:p>
-              <a:pPr algn="ctr"/>
-            </a:p>
-          </p:txBody>
-        </p:sp>
-        <p:sp>
-          <p:nvSpPr>
-            <p:cNvPr id="13" name="Freeform 12"/>
-            <p:cNvSpPr/>
-            <p:nvPr/>
-          </p:nvSpPr>
-          <p:spPr>
-            <a:xfrm>
-              <a:off x="543924" y="3768318"/>
-              <a:ext cx="65580" cy="65580"/>
-            </a:xfrm>
-            <a:custGeom>
-              <a:avLst/>
-              <a:gdLst/>
-              <a:ahLst/>
-              <a:cxnLst/>
-              <a:rect l="l" t="t" r="r" b="b"/>
-              <a:pathLst>
-                <a:path w="65580" h="65580">
-                  <a:moveTo>
-                    <a:pt x="0" y="65580"/>
-                  </a:moveTo>
-                  <a:lnTo>
-                    <a:pt x="65580" y="0"/>
-                  </a:lnTo>
-                </a:path>
-              </a:pathLst>
-            </a:custGeom>
-            <a:noFill/>
-            <a:ln w="36433" cap="rnd">
-              <a:solidFill>
-                <a:srgbClr val="0077FF"/>
-              </a:solidFill>
-              <a:round/>
-            </a:ln>
-            <a:effectLst/>
-          </p:spPr>
-          <p:style>
-            <a:lnRef idx="1">
-              <a:schemeClr val="accent1"/>
-            </a:lnRef>
-            <a:fillRef idx="3">
-              <a:schemeClr val="accent1"/>
-            </a:fillRef>
-            <a:effectRef idx="2">
-              <a:schemeClr val="accent1"/>
-            </a:effectRef>
-            <a:fontRef idx="minor">
-              <a:schemeClr val="lt1"/>
-            </a:fontRef>
-          </p:style>
-          <p:txBody>
-            <a:bodyPr rtlCol="0" anchor="ctr"/>
-            <a:lstStyle/>
-            <a:p>
-              <a:pPr algn="ctr"/>
-            </a:p>
-          </p:txBody>
-        </p:sp>
-        <p:sp>
-          <p:nvSpPr>
-            <p:cNvPr id="14" name="Freeform 13"/>
-            <p:cNvSpPr/>
-            <p:nvPr/>
-          </p:nvSpPr>
-          <p:spPr>
-            <a:xfrm>
-              <a:off x="376332" y="3935910"/>
-              <a:ext cx="65580" cy="65580"/>
-            </a:xfrm>
-            <a:custGeom>
-              <a:avLst/>
-              <a:gdLst/>
-              <a:ahLst/>
-              <a:cxnLst/>
-              <a:rect l="l" t="t" r="r" b="b"/>
-              <a:pathLst>
-                <a:path w="65580" h="65580">
-                  <a:moveTo>
-                    <a:pt x="0" y="65580"/>
-                  </a:moveTo>
-                  <a:lnTo>
-                    <a:pt x="65580" y="0"/>
-                  </a:lnTo>
-                </a:path>
-              </a:pathLst>
-            </a:custGeom>
-            <a:noFill/>
-            <a:ln w="36433" cap="rnd">
-              <a:solidFill>
-                <a:srgbClr val="0077FF"/>
-              </a:solidFill>
-              <a:round/>
-            </a:ln>
-            <a:effectLst/>
-          </p:spPr>
-          <p:style>
-            <a:lnRef idx="1">
-              <a:schemeClr val="accent1"/>
-            </a:lnRef>
-            <a:fillRef idx="3">
-              <a:schemeClr val="accent1"/>
-            </a:fillRef>
-            <a:effectRef idx="2">
-              <a:schemeClr val="accent1"/>
-            </a:effectRef>
-            <a:fontRef idx="minor">
-              <a:schemeClr val="lt1"/>
-            </a:fontRef>
-          </p:style>
-          <p:txBody>
-            <a:bodyPr rtlCol="0" anchor="ctr"/>
-            <a:lstStyle/>
-            <a:p>
-              <a:pPr algn="ctr"/>
-            </a:p>
-          </p:txBody>
-        </p:sp>
-      </p:grpSp>
-      <p:sp>
-        <p:nvSpPr>
-          <p:cNvPr id="2441" name="item_3"/>
-          <p:cNvSpPr txBox="1"/>
-          <p:nvPr/>
-        </p:nvSpPr>
-        <p:spPr>
-          <a:xfrm>
-            <a:off x="908256" y="3685514"/>
-            <a:ext cx="7710878" cy="635025"/>
-          </a:xfrm>
-          <a:prstGeom prst="rect">
-            <a:avLst/>
-          </a:prstGeom>
-          <a:noFill/>
-        </p:spPr>
-        <p:txBody>
-          <a:bodyPr wrap="square" lIns="76200" rIns="76200" tIns="50800" bIns="50800">
-            <a:spAutoFit/>
-          </a:bodyPr>
-          <a:lstStyle/>
-          <a:p>
-            <a:pPr algn="l">
-              <a:spcAft>
-                <a:spcPts val="300"/>
-              </a:spcAft>
-              <a:defRPr sz="1800">
-                <a:solidFill>
-                  <a:srgbClr val="000000"/>
-                </a:solidFill>
-                <a:latin typeface="Play"/>
-                <a:ea typeface="Play"/>
-                <a:cs typeface="Play"/>
-              </a:defRPr>
-            </a:pPr>
-            <a:r>
-              <a:rPr sz="1800">
-                <a:solidFill>
-                  <a:srgbClr val="000000"/>
-                </a:solidFill>
-                <a:latin typeface="Play"/>
-                <a:ea typeface="Play"/>
-                <a:cs typeface="Play"/>
-              </a:rPr>
-              <a:t>Поддержка OpenAI-совместимых моделей (gpt-oss-20b)</a:t>
-            </a:r>
-          </a:p>
-        </p:txBody>
-      </p:sp>
+        </p:nvGraphicFramePr>
+        <p:xfrm>
+          <a:off x="274320" y="1337310"/>
+          <a:ext cx="8344814" cy="3086100"/>
+        </p:xfrm>
+        <a:graphic>
+          <a:graphicData uri="http://schemas.openxmlformats.org/drawingml/2006/chart">
+            <c:chart xmlns:c="http://schemas.openxmlformats.org/drawingml/2006/chart" r:id="rId3"/>
+          </a:graphicData>
+        </a:graphic>
+      </p:graphicFrame>
     </p:spTree>
   </p:cSld>
   <p:clrMapOvr>
@@ -9817,7 +7994,7 @@
                 <a:ea typeface="Play"/>
                 <a:cs typeface="Play"/>
               </a:rPr>
-              <a:t>Ожидаемый эффект: сокращение времени сборки</a:t>
+              <a:t>Время до первой версии 1 день вместо 6</a:t>
             </a:r>
           </a:p>
         </p:txBody>
@@ -9867,7 +8044,7 @@
         <p:spPr>
           <a:xfrm>
             <a:off x="274320" y="282943"/>
-            <a:ext cx="6792986" cy="932027"/>
+            <a:ext cx="6792986" cy="617220"/>
           </a:xfrm>
           <a:prstGeom prst="rect">
             <a:avLst/>
@@ -9902,7 +8079,7 @@
                 <a:ea typeface="Play"/>
                 <a:cs typeface="Play"/>
               </a:rPr>
-              <a:t>Ожидаемый эффект: снижение нарушений фирменного стиля</a:t>
+              <a:t>Нарушения стиля 2/68 вместо 19/42</a:t>
             </a:r>
           </a:p>
         </p:txBody>
@@ -9916,8 +8093,8 @@
           <p:nvPr/>
         </p:nvGraphicFramePr>
         <p:xfrm>
-          <a:off x="274320" y="1394994"/>
-          <a:ext cx="8344814" cy="3028415"/>
+          <a:off x="274320" y="1337310"/>
+          <a:ext cx="8344814" cy="3086100"/>
         </p:xfrm>
         <a:graphic>
           <a:graphicData uri="http://schemas.openxmlformats.org/drawingml/2006/chart">
@@ -9945,7 +8122,130 @@
       <p:grpSpPr/>
       <p:sp>
         <p:nvSpPr>
-          <p:cNvPr id="2" name="title"/>
+          <p:cNvPr id="532" name="Google Shape;532;p53"/>
+          <p:cNvSpPr/>
+          <p:nvPr/>
+        </p:nvSpPr>
+        <p:spPr>
+          <a:xfrm>
+            <a:off x="303214" y="1022533"/>
+            <a:ext cx="8451939" cy="1433588"/>
+          </a:xfrm>
+          <a:prstGeom prst="rect">
+            <a:avLst/>
+          </a:prstGeom>
+          <a:noFill/>
+          <a:ln>
+            <a:noFill/>
+          </a:ln>
+        </p:spPr>
+        <p:txBody>
+          <a:bodyPr anchorCtr="0" anchor="ctr" bIns="91425" lIns="91425" spcFirstLastPara="1" rIns="91425" wrap="square" tIns="91425">
+            <a:noAutofit/>
+          </a:bodyPr>
+          <a:lstStyle/>
+          <a:p>
+            <a:pPr indent="0" lvl="0" marL="0" rtl="0" algn="l">
+              <a:spcBef>
+                <a:spcPts val="0"/>
+              </a:spcBef>
+              <a:spcAft>
+                <a:spcPts val="0"/>
+              </a:spcAft>
+              <a:buNone/>
+            </a:pPr>
+            <a:r>
+              <a:t/>
+            </a:r>
+            <a:endParaRPr/>
+          </a:p>
+        </p:txBody>
+      </p:sp>
+      <p:sp>
+        <p:nvSpPr>
+          <p:cNvPr id="553" name="Google Shape;553;p53"/>
+          <p:cNvSpPr/>
+          <p:nvPr/>
+        </p:nvSpPr>
+        <p:spPr>
+          <a:xfrm>
+            <a:off x="276488" y="2955549"/>
+            <a:ext cx="8451939" cy="1433588"/>
+          </a:xfrm>
+          <a:prstGeom prst="rect">
+            <a:avLst/>
+          </a:prstGeom>
+          <a:noFill/>
+          <a:ln>
+            <a:noFill/>
+          </a:ln>
+        </p:spPr>
+        <p:txBody>
+          <a:bodyPr anchorCtr="0" anchor="ctr" bIns="91425" lIns="91425" spcFirstLastPara="1" rIns="91425" wrap="square" tIns="91425">
+            <a:noAutofit/>
+          </a:bodyPr>
+          <a:lstStyle/>
+          <a:p>
+            <a:pPr indent="0" lvl="0" marL="0" rtl="0" algn="l">
+              <a:spcBef>
+                <a:spcPts val="0"/>
+              </a:spcBef>
+              <a:spcAft>
+                <a:spcPts val="0"/>
+              </a:spcAft>
+              <a:buNone/>
+            </a:pPr>
+            <a:r>
+              <a:t/>
+            </a:r>
+            <a:endParaRPr/>
+          </a:p>
+        </p:txBody>
+      </p:sp>
+      <p:sp>
+        <p:nvSpPr>
+          <p:cNvPr id="554" name="Google Shape;554;p53"/>
+          <p:cNvSpPr/>
+          <p:nvPr/>
+        </p:nvSpPr>
+        <p:spPr>
+          <a:xfrm>
+            <a:off x="303214" y="2797849"/>
+            <a:ext cx="8451939" cy="1433588"/>
+          </a:xfrm>
+          <a:prstGeom prst="rect">
+            <a:avLst/>
+          </a:prstGeom>
+          <a:noFill/>
+          <a:ln>
+            <a:noFill/>
+          </a:ln>
+        </p:spPr>
+        <p:txBody>
+          <a:bodyPr anchorCtr="0" anchor="ctr" bIns="91425" lIns="91425" spcFirstLastPara="1" rIns="91425" wrap="square" tIns="91425">
+            <a:noAutofit/>
+          </a:bodyPr>
+          <a:lstStyle/>
+          <a:p>
+            <a:pPr indent="0" lvl="0" marL="0" rtl="0" algn="l">
+              <a:spcBef>
+                <a:spcPts val="0"/>
+              </a:spcBef>
+              <a:spcAft>
+                <a:spcPts val="0"/>
+              </a:spcAft>
+              <a:buNone/>
+            </a:pPr>
+            <a:r>
+              <a:t/>
+            </a:r>
+            <a:endParaRPr/>
+          </a:p>
+        </p:txBody>
+      </p:sp>
+      <p:sp>
+        <p:nvSpPr>
+          <p:cNvPr id="555" name="title"/>
           <p:cNvSpPr txBox="1"/>
           <p:nvPr/>
         </p:nvSpPr>
@@ -9987,29 +8287,304 @@
                 <a:ea typeface="Play"/>
                 <a:cs typeface="Play"/>
               </a:rPr>
-              <a:t>Ожидаемый эффект: рост закрытых запросов</a:t>
+              <a:t>Ресурсы: 1 машина 2 vCPU/2 GB RAM, 1400 руб инференса</a:t>
             </a:r>
           </a:p>
         </p:txBody>
       </p:sp>
-      <p:graphicFrame>
-        <p:nvGraphicFramePr>
-          <p:cNvPr id="3" name="Chart 2"/>
-          <p:cNvGraphicFramePr>
-            <a:graphicFrameLocks noGrp="1"/>
-          </p:cNvGraphicFramePr>
+      <p:sp>
+        <p:nvSpPr>
+          <p:cNvPr id="556" name="body"/>
+          <p:cNvSpPr txBox="1"/>
           <p:nvPr/>
-        </p:nvGraphicFramePr>
-        <p:xfrm>
-          <a:off x="274320" y="1394994"/>
-          <a:ext cx="8344814" cy="3028415"/>
-        </p:xfrm>
-        <a:graphic>
-          <a:graphicData uri="http://schemas.openxmlformats.org/drawingml/2006/chart">
-            <c:chart xmlns:c="http://schemas.openxmlformats.org/drawingml/2006/chart" r:id="rId2"/>
-          </a:graphicData>
-        </a:graphic>
-      </p:graphicFrame>
+        </p:nvSpPr>
+        <p:spPr>
+          <a:xfrm>
+            <a:off x="274320" y="1917844"/>
+            <a:ext cx="8344814" cy="398780"/>
+          </a:xfrm>
+          <a:prstGeom prst="rect">
+            <a:avLst/>
+          </a:prstGeom>
+          <a:noFill/>
+        </p:spPr>
+        <p:txBody>
+          <a:bodyPr wrap="square" lIns="76200" rIns="76200" tIns="50800" bIns="50800">
+            <a:spAutoFit/>
+          </a:bodyPr>
+          <a:lstStyle/>
+          <a:p>
+            <a:pPr algn="l">
+              <a:spcAft>
+                <a:spcPts val="300"/>
+              </a:spcAft>
+              <a:defRPr sz="1800">
+                <a:solidFill>
+                  <a:srgbClr val="000000"/>
+                </a:solidFill>
+                <a:latin typeface="Play"/>
+                <a:ea typeface="Play"/>
+                <a:cs typeface="Play"/>
+              </a:defRPr>
+            </a:pPr>
+            <a:r>
+              <a:rPr sz="1800">
+                <a:solidFill>
+                  <a:srgbClr val="000000"/>
+                </a:solidFill>
+                <a:latin typeface="Play"/>
+                <a:ea typeface="Play"/>
+                <a:cs typeface="Play"/>
+              </a:rPr>
+              <a:t>Модель gpt-oss-20b</a:t>
+            </a:r>
+          </a:p>
+        </p:txBody>
+      </p:sp>
+      <p:sp>
+        <p:nvSpPr>
+          <p:cNvPr id="557" name="stat_0:bar"/>
+          <p:cNvSpPr/>
+          <p:nvPr/>
+        </p:nvSpPr>
+        <p:spPr>
+          <a:xfrm>
+            <a:off x="274320" y="2544081"/>
+            <a:ext cx="50800" cy="833628"/>
+          </a:xfrm>
+          <a:prstGeom prst="rect">
+            <a:avLst/>
+          </a:prstGeom>
+          <a:solidFill>
+            <a:srgbClr val="0077FF"/>
+          </a:solidFill>
+          <a:ln>
+            <a:noFill/>
+          </a:ln>
+          <a:effectLst/>
+        </p:spPr>
+        <p:style>
+          <a:lnRef idx="1">
+            <a:schemeClr val="accent1"/>
+          </a:lnRef>
+          <a:fillRef idx="3">
+            <a:schemeClr val="accent1"/>
+          </a:fillRef>
+          <a:effectRef idx="2">
+            <a:schemeClr val="accent1"/>
+          </a:effectRef>
+          <a:fontRef idx="minor">
+            <a:schemeClr val="lt1"/>
+          </a:fontRef>
+        </p:style>
+        <p:txBody>
+          <a:bodyPr rtlCol="0" anchor="ctr"/>
+          <a:lstStyle/>
+          <a:p>
+            <a:pPr algn="ctr"/>
+          </a:p>
+        </p:txBody>
+      </p:sp>
+      <p:sp>
+        <p:nvSpPr>
+          <p:cNvPr id="558" name="stat_0"/>
+          <p:cNvSpPr txBox="1"/>
+          <p:nvPr/>
+        </p:nvSpPr>
+        <p:spPr>
+          <a:xfrm>
+            <a:off x="452119" y="2470929"/>
+            <a:ext cx="3827710" cy="906780"/>
+          </a:xfrm>
+          <a:prstGeom prst="rect">
+            <a:avLst/>
+          </a:prstGeom>
+          <a:noFill/>
+        </p:spPr>
+        <p:txBody>
+          <a:bodyPr wrap="square" lIns="76200" rIns="76200" tIns="0" bIns="0">
+            <a:spAutoFit/>
+          </a:bodyPr>
+          <a:lstStyle/>
+          <a:p>
+            <a:pPr>
+              <a:lnSpc>
+                <a:spcPct val="100000"/>
+              </a:lnSpc>
+              <a:spcAft>
+                <a:spcPts val="200"/>
+              </a:spcAft>
+              <a:defRPr sz="3200" b="1">
+                <a:solidFill>
+                  <a:srgbClr val="0077FF"/>
+                </a:solidFill>
+                <a:latin typeface="Play"/>
+                <a:ea typeface="Play"/>
+                <a:cs typeface="Play"/>
+              </a:defRPr>
+            </a:pPr>
+            <a:r>
+              <a:rPr sz="3200" b="1">
+                <a:solidFill>
+                  <a:srgbClr val="0077FF"/>
+                </a:solidFill>
+                <a:latin typeface="Play"/>
+                <a:ea typeface="Play"/>
+                <a:cs typeface="Play"/>
+              </a:rPr>
+              <a:t>2 vCPU</a:t>
+            </a:r>
+          </a:p>
+          <a:p>
+            <a:pPr>
+              <a:spcAft>
+                <a:spcPts val="300"/>
+              </a:spcAft>
+              <a:defRPr sz="1800" b="0">
+                <a:solidFill>
+                  <a:srgbClr val="000000"/>
+                </a:solidFill>
+                <a:latin typeface="Play"/>
+                <a:ea typeface="Play"/>
+                <a:cs typeface="Play"/>
+              </a:defRPr>
+            </a:pPr>
+            <a:r>
+              <a:rPr sz="1800" b="0">
+                <a:solidFill>
+                  <a:srgbClr val="000000"/>
+                </a:solidFill>
+                <a:latin typeface="Play"/>
+                <a:ea typeface="Play"/>
+                <a:cs typeface="Play"/>
+              </a:rPr>
+              <a:t>1 машина 2 vCPU / 2 GB RAM</a:t>
+            </a:r>
+          </a:p>
+        </p:txBody>
+      </p:sp>
+      <p:sp>
+        <p:nvSpPr>
+          <p:cNvPr id="559" name="stat_1:bar"/>
+          <p:cNvSpPr/>
+          <p:nvPr/>
+        </p:nvSpPr>
+        <p:spPr>
+          <a:xfrm>
+            <a:off x="4613623" y="2544081"/>
+            <a:ext cx="50800" cy="833628"/>
+          </a:xfrm>
+          <a:prstGeom prst="rect">
+            <a:avLst/>
+          </a:prstGeom>
+          <a:solidFill>
+            <a:srgbClr val="0077FF"/>
+          </a:solidFill>
+          <a:ln>
+            <a:noFill/>
+          </a:ln>
+          <a:effectLst/>
+        </p:spPr>
+        <p:style>
+          <a:lnRef idx="1">
+            <a:schemeClr val="accent1"/>
+          </a:lnRef>
+          <a:fillRef idx="3">
+            <a:schemeClr val="accent1"/>
+          </a:fillRef>
+          <a:effectRef idx="2">
+            <a:schemeClr val="accent1"/>
+          </a:effectRef>
+          <a:fontRef idx="minor">
+            <a:schemeClr val="lt1"/>
+          </a:fontRef>
+        </p:style>
+        <p:txBody>
+          <a:bodyPr rtlCol="0" anchor="ctr"/>
+          <a:lstStyle/>
+          <a:p>
+            <a:pPr algn="ctr"/>
+          </a:p>
+        </p:txBody>
+      </p:sp>
+      <p:sp>
+        <p:nvSpPr>
+          <p:cNvPr id="560" name="stat_1"/>
+          <p:cNvSpPr txBox="1"/>
+          <p:nvPr/>
+        </p:nvSpPr>
+        <p:spPr>
+          <a:xfrm>
+            <a:off x="4791423" y="2470929"/>
+            <a:ext cx="3827710" cy="906780"/>
+          </a:xfrm>
+          <a:prstGeom prst="rect">
+            <a:avLst/>
+          </a:prstGeom>
+          <a:noFill/>
+        </p:spPr>
+        <p:txBody>
+          <a:bodyPr wrap="square" lIns="76200" rIns="76200" tIns="0" bIns="0">
+            <a:spAutoFit/>
+          </a:bodyPr>
+          <a:lstStyle/>
+          <a:p>
+            <a:pPr>
+              <a:lnSpc>
+                <a:spcPct val="100000"/>
+              </a:lnSpc>
+              <a:spcAft>
+                <a:spcPts val="200"/>
+              </a:spcAft>
+              <a:defRPr sz="3200" b="1">
+                <a:solidFill>
+                  <a:srgbClr val="0077FF"/>
+                </a:solidFill>
+                <a:latin typeface="Play"/>
+                <a:ea typeface="Play"/>
+                <a:cs typeface="Play"/>
+              </a:defRPr>
+            </a:pPr>
+            <a:r>
+              <a:rPr sz="3200" b="1">
+                <a:solidFill>
+                  <a:srgbClr val="0077FF"/>
+                </a:solidFill>
+                <a:latin typeface="Play"/>
+                <a:ea typeface="Play"/>
+                <a:cs typeface="Play"/>
+              </a:rPr>
+              <a:t>6 нед.</a:t>
+            </a:r>
+          </a:p>
+          <a:p>
+            <a:pPr>
+              <a:spcAft>
+                <a:spcPts val="300"/>
+              </a:spcAft>
+              <a:defRPr sz="1800" b="0">
+                <a:solidFill>
+                  <a:srgbClr val="000000"/>
+                </a:solidFill>
+                <a:latin typeface="Play"/>
+                <a:ea typeface="Play"/>
+                <a:cs typeface="Play"/>
+              </a:defRPr>
+            </a:pPr>
+            <a:r>
+              <a:rPr sz="1800" b="0">
+                <a:solidFill>
+                  <a:srgbClr val="000000"/>
+                </a:solidFill>
+                <a:latin typeface="Play"/>
+                <a:ea typeface="Play"/>
+                <a:cs typeface="Play"/>
+              </a:rPr>
+              <a:t>Инференс 6 недель 1400 руб</a:t>
+            </a:r>
+          </a:p>
+        </p:txBody>
+      </p:sp>
     </p:spTree>
   </p:cSld>
   <p:clrMapOvr>
@@ -10153,187 +8728,7 @@
       </p:sp>
       <p:sp>
         <p:nvSpPr>
-          <p:cNvPr id="665" name="Google Shape;665;p55"/>
-          <p:cNvSpPr/>
-          <p:nvPr/>
-        </p:nvSpPr>
-        <p:spPr>
-          <a:xfrm>
-            <a:off x="285749" y="1209852"/>
-            <a:ext cx="2071677" cy="3014270"/>
-          </a:xfrm>
-          <a:prstGeom prst="roundRect">
-            <a:avLst>
-              <a:gd fmla="val 4634" name="adj"/>
-            </a:avLst>
-          </a:prstGeom>
-          <a:solidFill>
-            <a:schemeClr val="lt2"/>
-          </a:solidFill>
-          <a:ln>
-            <a:noFill/>
-          </a:ln>
-        </p:spPr>
-        <p:txBody>
-          <a:bodyPr anchorCtr="0" anchor="ctr" bIns="91425" lIns="91425" spcFirstLastPara="1" rIns="91425" wrap="square" tIns="91425">
-            <a:noAutofit/>
-          </a:bodyPr>
-          <a:lstStyle/>
-          <a:p>
-            <a:pPr indent="0" lvl="0" marL="0" rtl="0" algn="l">
-              <a:spcBef>
-                <a:spcPts val="0"/>
-              </a:spcBef>
-              <a:spcAft>
-                <a:spcPts val="0"/>
-              </a:spcAft>
-              <a:buNone/>
-            </a:pPr>
-            <a:r>
-              <a:t/>
-            </a:r>
-            <a:endParaRPr/>
-          </a:p>
-        </p:txBody>
-      </p:sp>
-      <p:sp>
-        <p:nvSpPr>
-          <p:cNvPr id="670" name="Google Shape;670;p55"/>
-          <p:cNvSpPr/>
-          <p:nvPr/>
-        </p:nvSpPr>
-        <p:spPr>
-          <a:xfrm>
-            <a:off x="2452675" y="1209852"/>
-            <a:ext cx="2071677" cy="3014270"/>
-          </a:xfrm>
-          <a:prstGeom prst="roundRect">
-            <a:avLst>
-              <a:gd fmla="val 4634" name="adj"/>
-            </a:avLst>
-          </a:prstGeom>
-          <a:solidFill>
-            <a:schemeClr val="lt2"/>
-          </a:solidFill>
-          <a:ln>
-            <a:noFill/>
-          </a:ln>
-        </p:spPr>
-        <p:txBody>
-          <a:bodyPr anchorCtr="0" anchor="ctr" bIns="91425" lIns="91425" spcFirstLastPara="1" rIns="91425" wrap="square" tIns="91425">
-            <a:noAutofit/>
-          </a:bodyPr>
-          <a:lstStyle/>
-          <a:p>
-            <a:pPr indent="0" lvl="0" marL="0" rtl="0" algn="l">
-              <a:spcBef>
-                <a:spcPts val="0"/>
-              </a:spcBef>
-              <a:spcAft>
-                <a:spcPts val="0"/>
-              </a:spcAft>
-              <a:buNone/>
-            </a:pPr>
-            <a:r>
-              <a:t/>
-            </a:r>
-            <a:endParaRPr/>
-          </a:p>
-        </p:txBody>
-      </p:sp>
-      <p:sp>
-        <p:nvSpPr>
-          <p:cNvPr id="675" name="Google Shape;675;p55"/>
-          <p:cNvSpPr/>
-          <p:nvPr/>
-        </p:nvSpPr>
-        <p:spPr>
-          <a:xfrm>
-            <a:off x="4619601" y="1209852"/>
-            <a:ext cx="2071677" cy="3014270"/>
-          </a:xfrm>
-          <a:prstGeom prst="roundRect">
-            <a:avLst>
-              <a:gd fmla="val 4634" name="adj"/>
-            </a:avLst>
-          </a:prstGeom>
-          <a:solidFill>
-            <a:schemeClr val="lt2"/>
-          </a:solidFill>
-          <a:ln>
-            <a:noFill/>
-          </a:ln>
-        </p:spPr>
-        <p:txBody>
-          <a:bodyPr anchorCtr="0" anchor="ctr" bIns="91425" lIns="91425" spcFirstLastPara="1" rIns="91425" wrap="square" tIns="91425">
-            <a:noAutofit/>
-          </a:bodyPr>
-          <a:lstStyle/>
-          <a:p>
-            <a:pPr indent="0" lvl="0" marL="0" rtl="0" algn="l">
-              <a:spcBef>
-                <a:spcPts val="0"/>
-              </a:spcBef>
-              <a:spcAft>
-                <a:spcPts val="0"/>
-              </a:spcAft>
-              <a:buNone/>
-            </a:pPr>
-            <a:r>
-              <a:t/>
-            </a:r>
-            <a:endParaRPr/>
-          </a:p>
-        </p:txBody>
-      </p:sp>
-      <p:sp>
-        <p:nvSpPr>
-          <p:cNvPr id="680" name="Google Shape;680;p55"/>
-          <p:cNvSpPr/>
-          <p:nvPr/>
-        </p:nvSpPr>
-        <p:spPr>
-          <a:xfrm>
-            <a:off x="6786527" y="1209852"/>
-            <a:ext cx="2071677" cy="3014270"/>
-          </a:xfrm>
-          <a:prstGeom prst="roundRect">
-            <a:avLst>
-              <a:gd fmla="val 4634" name="adj"/>
-            </a:avLst>
-          </a:prstGeom>
-          <a:solidFill>
-            <a:schemeClr val="lt2"/>
-          </a:solidFill>
-          <a:ln>
-            <a:noFill/>
-          </a:ln>
-        </p:spPr>
-        <p:txBody>
-          <a:bodyPr anchorCtr="0" anchor="ctr" bIns="91425" lIns="91425" spcFirstLastPara="1" rIns="91425" wrap="square" tIns="91425">
-            <a:noAutofit/>
-          </a:bodyPr>
-          <a:lstStyle/>
-          <a:p>
-            <a:pPr indent="0" lvl="0" marL="0" rtl="0" algn="l">
-              <a:spcBef>
-                <a:spcPts val="0"/>
-              </a:spcBef>
-              <a:spcAft>
-                <a:spcPts val="0"/>
-              </a:spcAft>
-              <a:buNone/>
-            </a:pPr>
-            <a:r>
-              <a:t/>
-            </a:r>
-            <a:endParaRPr/>
-          </a:p>
-        </p:txBody>
-      </p:sp>
-      <p:sp>
-        <p:nvSpPr>
-          <p:cNvPr id="681" name="title"/>
+          <p:cNvPr id="665" name="title"/>
           <p:cNvSpPr txBox="1"/>
           <p:nvPr/>
         </p:nvSpPr>
@@ -10375,21 +8770,21 @@
                 <a:ea typeface="Play"/>
                 <a:cs typeface="Play"/>
               </a:rPr>
-              <a:t>Что потребуется: ресурсы и сроки</a:t>
+              <a:t>Пилот 6 недель, 68 презентаций</a:t>
             </a:r>
           </a:p>
         </p:txBody>
       </p:sp>
       <p:sp>
         <p:nvSpPr>
-          <p:cNvPr id="682" name="stat_0:bar"/>
+          <p:cNvPr id="666" name="Rectangle 665"/>
           <p:cNvSpPr/>
           <p:nvPr/>
         </p:nvSpPr>
         <p:spPr>
           <a:xfrm>
-            <a:off x="274320" y="1410462"/>
-            <a:ext cx="50800" cy="1725168"/>
+            <a:off x="274320" y="2756916"/>
+            <a:ext cx="8344814" cy="92583"/>
           </a:xfrm>
           <a:prstGeom prst="rect">
             <a:avLst/>
@@ -10400,7 +8795,6 @@
           <a:ln>
             <a:noFill/>
           </a:ln>
-          <a:effectLst/>
         </p:spPr>
         <p:style>
           <a:lnRef idx="1">
@@ -10426,94 +8820,16 @@
       </p:sp>
       <p:sp>
         <p:nvSpPr>
-          <p:cNvPr id="683" name="stat_0"/>
-          <p:cNvSpPr txBox="1"/>
-          <p:nvPr/>
-        </p:nvSpPr>
-        <p:spPr>
-          <a:xfrm>
-            <a:off x="452119" y="1337310"/>
-            <a:ext cx="1658059" cy="1798320"/>
-          </a:xfrm>
-          <a:prstGeom prst="rect">
-            <a:avLst/>
-          </a:prstGeom>
-          <a:noFill/>
-        </p:spPr>
-        <p:txBody>
-          <a:bodyPr wrap="square" lIns="76200" rIns="76200" tIns="0" bIns="0">
-            <a:spAutoFit/>
-          </a:bodyPr>
-          <a:lstStyle/>
-          <a:p>
-            <a:pPr>
-              <a:lnSpc>
-                <a:spcPct val="100000"/>
-              </a:lnSpc>
-              <a:spcAft>
-                <a:spcPts val="200"/>
-              </a:spcAft>
-              <a:defRPr sz="3200" b="1">
-                <a:solidFill>
-                  <a:srgbClr val="0077FF"/>
-                </a:solidFill>
-                <a:latin typeface="Play"/>
-                <a:ea typeface="Play"/>
-                <a:cs typeface="Play"/>
-              </a:defRPr>
-            </a:pPr>
-            <a:r>
-              <a:rPr sz="3200" b="1">
-                <a:solidFill>
-                  <a:srgbClr val="0077FF"/>
-                </a:solidFill>
-                <a:latin typeface="Play"/>
-                <a:ea typeface="Play"/>
-                <a:cs typeface="Play"/>
-              </a:rPr>
-              <a:t>2 vCPU</a:t>
-            </a:r>
-          </a:p>
-          <a:p>
-            <a:pPr>
-              <a:spcAft>
-                <a:spcPts val="300"/>
-              </a:spcAft>
-              <a:defRPr sz="1800" b="0">
-                <a:solidFill>
-                  <a:srgbClr val="000000"/>
-                </a:solidFill>
-                <a:latin typeface="Play"/>
-                <a:ea typeface="Play"/>
-                <a:cs typeface="Play"/>
-              </a:defRPr>
-            </a:pPr>
-            <a:r>
-              <a:rPr sz="1800" b="0">
-                <a:solidFill>
-                  <a:srgbClr val="000000"/>
-                </a:solidFill>
-                <a:latin typeface="Play"/>
-                <a:ea typeface="Play"/>
-                <a:cs typeface="Play"/>
-              </a:rPr>
-              <a:t>Сервис работает на машине 2 vCPU / 2 ГБ RAM</a:t>
-            </a:r>
-          </a:p>
-        </p:txBody>
-      </p:sp>
-      <p:sp>
-        <p:nvSpPr>
-          <p:cNvPr id="684" name="stat_1:bar"/>
+          <p:cNvPr id="667" name="Oval 666"/>
           <p:cNvSpPr/>
           <p:nvPr/>
         </p:nvSpPr>
         <p:spPr>
           <a:xfrm>
-            <a:off x="2443971" y="1410462"/>
-            <a:ext cx="50800" cy="1725168"/>
+            <a:off x="1325651" y="2463736"/>
+            <a:ext cx="678942" cy="678942"/>
           </a:xfrm>
-          <a:prstGeom prst="rect">
+          <a:prstGeom prst="ellipse">
             <a:avLst/>
           </a:prstGeom>
           <a:solidFill>
@@ -10522,7 +8838,6 @@
           <a:ln>
             <a:noFill/>
           </a:ln>
-          <a:effectLst/>
         </p:spPr>
         <p:style>
           <a:lnRef idx="1">
@@ -10548,14 +8863,14 @@
       </p:sp>
       <p:sp>
         <p:nvSpPr>
-          <p:cNvPr id="685" name="stat_1"/>
+          <p:cNvPr id="668" name="TextBox 667"/>
           <p:cNvSpPr txBox="1"/>
           <p:nvPr/>
         </p:nvSpPr>
         <p:spPr>
           <a:xfrm>
-            <a:off x="2621771" y="1337310"/>
-            <a:ext cx="1658059" cy="1798320"/>
+            <a:off x="274320" y="1337310"/>
+            <a:ext cx="4172407" cy="1172718"/>
           </a:xfrm>
           <a:prstGeom prst="rect">
             <a:avLst/>
@@ -10563,21 +8878,15 @@
           <a:noFill/>
         </p:spPr>
         <p:txBody>
-          <a:bodyPr wrap="square" lIns="76200" rIns="76200" tIns="0" bIns="0">
+          <a:bodyPr wrap="square" lIns="12700" rIns="12700" tIns="12700" bIns="12700">
             <a:spAutoFit/>
           </a:bodyPr>
           <a:lstStyle/>
           <a:p>
-            <a:pPr>
-              <a:lnSpc>
-                <a:spcPct val="100000"/>
-              </a:lnSpc>
-              <a:spcAft>
-                <a:spcPts val="200"/>
-              </a:spcAft>
-              <a:defRPr sz="3200" b="1">
-                <a:solidFill>
-                  <a:srgbClr val="0077FF"/>
+            <a:pPr algn="ctr">
+              <a:defRPr sz="1400" b="0">
+                <a:solidFill>
+                  <a:srgbClr val="000000"/>
                 </a:solidFill>
                 <a:latin typeface="Play"/>
                 <a:ea typeface="Play"/>
@@ -10585,57 +8894,31 @@
               </a:defRPr>
             </a:pPr>
             <a:r>
-              <a:rPr sz="3200" b="1">
-                <a:solidFill>
-                  <a:srgbClr val="0077FF"/>
+              <a:rPr sz="1400" b="0">
+                <a:solidFill>
+                  <a:srgbClr val="000000"/>
                 </a:solidFill>
                 <a:latin typeface="Play"/>
                 <a:ea typeface="Play"/>
                 <a:cs typeface="Play"/>
               </a:rPr>
-              <a:t>6 нед.</a:t>
-            </a:r>
-          </a:p>
-          <a:p>
-            <a:pPr>
-              <a:spcAft>
-                <a:spcPts val="300"/>
-              </a:spcAft>
-              <a:defRPr sz="1800" b="0">
-                <a:solidFill>
-                  <a:srgbClr val="000000"/>
-                </a:solidFill>
-                <a:latin typeface="Play"/>
-                <a:ea typeface="Play"/>
-                <a:cs typeface="Play"/>
-              </a:defRPr>
-            </a:pPr>
-            <a:r>
-              <a:rPr sz="1800" b="0">
-                <a:solidFill>
-                  <a:srgbClr val="000000"/>
-                </a:solidFill>
-                <a:latin typeface="Play"/>
-                <a:ea typeface="Play"/>
-                <a:cs typeface="Play"/>
-              </a:rPr>
-              <a:t>Стоимость инференса за 6 недель – 1 400 руб</a:t>
+              <a:t>Начало пилота</a:t>
             </a:r>
           </a:p>
         </p:txBody>
       </p:sp>
       <p:sp>
         <p:nvSpPr>
-          <p:cNvPr id="686" name="stat_2:bar"/>
+          <p:cNvPr id="669" name="Oval 668"/>
           <p:cNvSpPr/>
           <p:nvPr/>
         </p:nvSpPr>
         <p:spPr>
           <a:xfrm>
-            <a:off x="4613623" y="1410462"/>
-            <a:ext cx="50800" cy="1427988"/>
+            <a:off x="4107256" y="2463736"/>
+            <a:ext cx="678942" cy="678942"/>
           </a:xfrm>
-          <a:prstGeom prst="rect">
+          <a:prstGeom prst="ellipse">
             <a:avLst/>
           </a:prstGeom>
           <a:solidFill>
@@ -10644,7 +8927,6 @@
           <a:ln>
             <a:noFill/>
           </a:ln>
-          <a:effectLst/>
         </p:spPr>
         <p:style>
           <a:lnRef idx="1">
@@ -10670,14 +8952,14 @@
       </p:sp>
       <p:sp>
         <p:nvSpPr>
-          <p:cNvPr id="687" name="stat_2"/>
+          <p:cNvPr id="670" name="TextBox 669"/>
           <p:cNvSpPr txBox="1"/>
           <p:nvPr/>
         </p:nvSpPr>
         <p:spPr>
           <a:xfrm>
-            <a:off x="4791423" y="1337310"/>
-            <a:ext cx="1658059" cy="1501140"/>
+            <a:off x="2360523" y="3435858"/>
+            <a:ext cx="4172407" cy="1172718"/>
           </a:xfrm>
           <a:prstGeom prst="rect">
             <a:avLst/>
@@ -10685,21 +8967,15 @@
           <a:noFill/>
         </p:spPr>
         <p:txBody>
-          <a:bodyPr wrap="square" lIns="76200" rIns="76200" tIns="0" bIns="0">
+          <a:bodyPr wrap="square" lIns="12700" rIns="12700" tIns="12700" bIns="12700">
             <a:spAutoFit/>
           </a:bodyPr>
           <a:lstStyle/>
           <a:p>
-            <a:pPr>
-              <a:lnSpc>
-                <a:spcPct val="100000"/>
-              </a:lnSpc>
-              <a:spcAft>
-                <a:spcPts val="200"/>
-              </a:spcAft>
-              <a:defRPr sz="3200" b="1">
-                <a:solidFill>
-                  <a:srgbClr val="0077FF"/>
+            <a:pPr algn="ctr">
+              <a:defRPr sz="1400" b="0">
+                <a:solidFill>
+                  <a:srgbClr val="000000"/>
                 </a:solidFill>
                 <a:latin typeface="Play"/>
                 <a:ea typeface="Play"/>
@@ -10707,57 +8983,31 @@
               </a:defRPr>
             </a:pPr>
             <a:r>
-              <a:rPr sz="3200" b="1">
-                <a:solidFill>
-                  <a:srgbClr val="0077FF"/>
+              <a:rPr sz="1400" b="0">
+                <a:solidFill>
+                  <a:srgbClr val="000000"/>
                 </a:solidFill>
                 <a:latin typeface="Play"/>
                 <a:ea typeface="Play"/>
                 <a:cs typeface="Play"/>
               </a:rPr>
-              <a:t>2026</a:t>
-            </a:r>
-          </a:p>
-          <a:p>
-            <a:pPr>
-              <a:spcAft>
-                <a:spcPts val="300"/>
-              </a:spcAft>
-              <a:defRPr sz="1800" b="0">
-                <a:solidFill>
-                  <a:srgbClr val="000000"/>
-                </a:solidFill>
-                <a:latin typeface="Play"/>
-                <a:ea typeface="Play"/>
-                <a:cs typeface="Play"/>
-              </a:defRPr>
-            </a:pPr>
-            <a:r>
-              <a:rPr sz="1800" b="0">
-                <a:solidFill>
-                  <a:srgbClr val="000000"/>
-                </a:solidFill>
-                <a:latin typeface="Play"/>
-                <a:ea typeface="Play"/>
-                <a:cs typeface="Play"/>
-              </a:rPr>
-              <a:t>Подключение 4 команд в Q3 2026</a:t>
+              <a:t>Конец пилота</a:t>
             </a:r>
           </a:p>
         </p:txBody>
       </p:sp>
       <p:sp>
         <p:nvSpPr>
-          <p:cNvPr id="688" name="stat_3:bar"/>
+          <p:cNvPr id="671" name="Oval 670"/>
           <p:cNvSpPr/>
           <p:nvPr/>
         </p:nvSpPr>
         <p:spPr>
           <a:xfrm>
-            <a:off x="6783275" y="1410462"/>
-            <a:ext cx="50800" cy="1427988"/>
+            <a:off x="6888860" y="2463736"/>
+            <a:ext cx="678942" cy="678942"/>
           </a:xfrm>
-          <a:prstGeom prst="rect">
+          <a:prstGeom prst="ellipse">
             <a:avLst/>
           </a:prstGeom>
           <a:solidFill>
@@ -10766,7 +9016,6 @@
           <a:ln>
             <a:noFill/>
           </a:ln>
-          <a:effectLst/>
         </p:spPr>
         <p:style>
           <a:lnRef idx="1">
@@ -10792,14 +9041,14 @@
       </p:sp>
       <p:sp>
         <p:nvSpPr>
-          <p:cNvPr id="689" name="stat_3"/>
+          <p:cNvPr id="672" name="TextBox 671"/>
           <p:cNvSpPr txBox="1"/>
           <p:nvPr/>
         </p:nvSpPr>
         <p:spPr>
           <a:xfrm>
-            <a:off x="6961075" y="1337310"/>
-            <a:ext cx="1658059" cy="1501140"/>
+            <a:off x="4446727" y="1337310"/>
+            <a:ext cx="4172407" cy="1172718"/>
           </a:xfrm>
           <a:prstGeom prst="rect">
             <a:avLst/>
@@ -10807,21 +9056,15 @@
           <a:noFill/>
         </p:spPr>
         <p:txBody>
-          <a:bodyPr wrap="square" lIns="76200" rIns="76200" tIns="0" bIns="0">
+          <a:bodyPr wrap="square" lIns="12700" rIns="12700" tIns="12700" bIns="12700">
             <a:spAutoFit/>
           </a:bodyPr>
           <a:lstStyle/>
           <a:p>
-            <a:pPr>
-              <a:lnSpc>
-                <a:spcPct val="100000"/>
-              </a:lnSpc>
-              <a:spcAft>
-                <a:spcPts val="200"/>
-              </a:spcAft>
-              <a:defRPr sz="3200" b="1">
-                <a:solidFill>
-                  <a:srgbClr val="0077FF"/>
+            <a:pPr algn="ctr">
+              <a:defRPr sz="1400" b="0">
+                <a:solidFill>
+                  <a:srgbClr val="000000"/>
                 </a:solidFill>
                 <a:latin typeface="Play"/>
                 <a:ea typeface="Play"/>
@@ -10829,41 +9072,15 @@
               </a:defRPr>
             </a:pPr>
             <a:r>
-              <a:rPr sz="3200" b="1">
-                <a:solidFill>
-                  <a:srgbClr val="0077FF"/>
+              <a:rPr sz="1400" b="0">
+                <a:solidFill>
+                  <a:srgbClr val="000000"/>
                 </a:solidFill>
                 <a:latin typeface="Play"/>
                 <a:ea typeface="Play"/>
                 <a:cs typeface="Play"/>
               </a:rPr>
-              <a:t>2026</a:t>
-            </a:r>
-          </a:p>
-          <a:p>
-            <a:pPr>
-              <a:spcAft>
-                <a:spcPts val="300"/>
-              </a:spcAft>
-              <a:defRPr sz="1800" b="0">
-                <a:solidFill>
-                  <a:srgbClr val="000000"/>
-                </a:solidFill>
-                <a:latin typeface="Play"/>
-                <a:ea typeface="Play"/>
-                <a:cs typeface="Play"/>
-              </a:defRPr>
-            </a:pPr>
-            <a:r>
-              <a:rPr sz="1800" b="0">
-                <a:solidFill>
-                  <a:srgbClr val="000000"/>
-                </a:solidFill>
-                <a:latin typeface="Play"/>
-                <a:ea typeface="Play"/>
-                <a:cs typeface="Play"/>
-              </a:rPr>
-              <a:t>Запуск для всей компании в Q4 2026</a:t>
+              <a:t>Обзор результатов</a:t>
             </a:r>
           </a:p>
         </p:txBody>
@@ -10930,23 +9147,23 @@
                 <a:ea typeface="Play"/>
                 <a:cs typeface="Play"/>
               </a:rPr>
-              <a:t>План пилота: 6 недель, 2 команды</a:t>
+              <a:t>Расширение: Q3 2026 – Q1 2027</a:t>
             </a:r>
           </a:p>
         </p:txBody>
       </p:sp>
       <p:sp>
         <p:nvSpPr>
-          <p:cNvPr id="3" name="Pentagon 2"/>
+          <p:cNvPr id="3" name="Rectangle 2"/>
           <p:cNvSpPr/>
           <p:nvPr/>
         </p:nvSpPr>
         <p:spPr>
           <a:xfrm>
-            <a:off x="274320" y="1373314"/>
-            <a:ext cx="8344814" cy="442341"/>
+            <a:off x="274320" y="2756916"/>
+            <a:ext cx="8344814" cy="92583"/>
           </a:xfrm>
-          <a:prstGeom prst="homePlate">
+          <a:prstGeom prst="rect">
             <a:avLst/>
           </a:prstGeom>
           <a:solidFill>
@@ -10971,45 +9188,25 @@
           </a:fontRef>
         </p:style>
         <p:txBody>
-          <a:bodyPr rtlCol="0" anchor="ctr" wrap="square" lIns="12700" rIns="12700" tIns="12700" bIns="12700"/>
+          <a:bodyPr rtlCol="0" anchor="ctr"/>
           <a:lstStyle/>
           <a:p>
-            <a:pPr algn="ctr">
-              <a:defRPr sz="1400" b="0">
-                <a:solidFill>
-                  <a:srgbClr val="FFFFFF"/>
-                </a:solidFill>
-                <a:latin typeface="Play"/>
-                <a:ea typeface="Play"/>
-                <a:cs typeface="Play"/>
-              </a:defRPr>
-            </a:pPr>
-            <a:r>
-              <a:rPr sz="1400" b="0">
-                <a:solidFill>
-                  <a:srgbClr val="FFFFFF"/>
-                </a:solidFill>
-                <a:latin typeface="Play"/>
-                <a:ea typeface="Play"/>
-                <a:cs typeface="Play"/>
-              </a:rPr>
-              <a:t>Неделя 1</a:t>
-            </a:r>
+            <a:pPr algn="ctr"/>
           </a:p>
         </p:txBody>
       </p:sp>
       <p:sp>
         <p:nvSpPr>
-          <p:cNvPr id="4" name="Chevron 3"/>
+          <p:cNvPr id="4" name="Oval 3"/>
           <p:cNvSpPr/>
           <p:nvPr/>
         </p:nvSpPr>
         <p:spPr>
           <a:xfrm>
-            <a:off x="274320" y="1887664"/>
-            <a:ext cx="8344814" cy="442341"/>
+            <a:off x="1325651" y="2463736"/>
+            <a:ext cx="678942" cy="678942"/>
           </a:xfrm>
-          <a:prstGeom prst="chevron">
+          <a:prstGeom prst="ellipse">
             <a:avLst/>
           </a:prstGeom>
           <a:solidFill>
@@ -11034,13 +9231,39 @@
           </a:fontRef>
         </p:style>
         <p:txBody>
-          <a:bodyPr rtlCol="0" anchor="ctr" wrap="square" lIns="12700" rIns="12700" tIns="12700" bIns="12700"/>
+          <a:bodyPr rtlCol="0" anchor="ctr"/>
+          <a:lstStyle/>
+          <a:p>
+            <a:pPr algn="ctr"/>
+          </a:p>
+        </p:txBody>
+      </p:sp>
+      <p:sp>
+        <p:nvSpPr>
+          <p:cNvPr id="5" name="TextBox 4"/>
+          <p:cNvSpPr txBox="1"/>
+          <p:nvPr/>
+        </p:nvSpPr>
+        <p:spPr>
+          <a:xfrm>
+            <a:off x="274320" y="1337310"/>
+            <a:ext cx="4172407" cy="1172718"/>
+          </a:xfrm>
+          <a:prstGeom prst="rect">
+            <a:avLst/>
+          </a:prstGeom>
+          <a:noFill/>
+        </p:spPr>
+        <p:txBody>
+          <a:bodyPr wrap="square" lIns="12700" rIns="12700" tIns="12700" bIns="12700">
+            <a:spAutoFit/>
+          </a:bodyPr>
           <a:lstStyle/>
           <a:p>
             <a:pPr algn="ctr">
               <a:defRPr sz="1400" b="0">
                 <a:solidFill>
-                  <a:srgbClr val="FFFFFF"/>
+                  <a:srgbClr val="000000"/>
                 </a:solidFill>
                 <a:latin typeface="Play"/>
                 <a:ea typeface="Play"/>
@@ -11050,29 +9273,29 @@
             <a:r>
               <a:rPr sz="1400" b="0">
                 <a:solidFill>
-                  <a:srgbClr val="FFFFFF"/>
+                  <a:srgbClr val="000000"/>
                 </a:solidFill>
                 <a:latin typeface="Play"/>
                 <a:ea typeface="Play"/>
                 <a:cs typeface="Play"/>
               </a:rPr>
-              <a:t>Неделя 2</a:t>
+              <a:t>Q3 2026: подключение 4 команд</a:t>
             </a:r>
           </a:p>
         </p:txBody>
       </p:sp>
       <p:sp>
         <p:nvSpPr>
-          <p:cNvPr id="5" name="Chevron 4"/>
+          <p:cNvPr id="6" name="Oval 5"/>
           <p:cNvSpPr/>
           <p:nvPr/>
         </p:nvSpPr>
         <p:spPr>
           <a:xfrm>
-            <a:off x="274320" y="2402014"/>
-            <a:ext cx="8344814" cy="442341"/>
+            <a:off x="4107256" y="2463736"/>
+            <a:ext cx="678942" cy="678942"/>
           </a:xfrm>
-          <a:prstGeom prst="chevron">
+          <a:prstGeom prst="ellipse">
             <a:avLst/>
           </a:prstGeom>
           <a:solidFill>
@@ -11097,13 +9320,39 @@
           </a:fontRef>
         </p:style>
         <p:txBody>
-          <a:bodyPr rtlCol="0" anchor="ctr" wrap="square" lIns="12700" rIns="12700" tIns="12700" bIns="12700"/>
+          <a:bodyPr rtlCol="0" anchor="ctr"/>
+          <a:lstStyle/>
+          <a:p>
+            <a:pPr algn="ctr"/>
+          </a:p>
+        </p:txBody>
+      </p:sp>
+      <p:sp>
+        <p:nvSpPr>
+          <p:cNvPr id="7" name="TextBox 6"/>
+          <p:cNvSpPr txBox="1"/>
+          <p:nvPr/>
+        </p:nvSpPr>
+        <p:spPr>
+          <a:xfrm>
+            <a:off x="2360523" y="3435858"/>
+            <a:ext cx="4172407" cy="1172718"/>
+          </a:xfrm>
+          <a:prstGeom prst="rect">
+            <a:avLst/>
+          </a:prstGeom>
+          <a:noFill/>
+        </p:spPr>
+        <p:txBody>
+          <a:bodyPr wrap="square" lIns="12700" rIns="12700" tIns="12700" bIns="12700">
+            <a:spAutoFit/>
+          </a:bodyPr>
           <a:lstStyle/>
           <a:p>
             <a:pPr algn="ctr">
               <a:defRPr sz="1400" b="0">
                 <a:solidFill>
-                  <a:srgbClr val="FFFFFF"/>
+                  <a:srgbClr val="000000"/>
                 </a:solidFill>
                 <a:latin typeface="Play"/>
                 <a:ea typeface="Play"/>
@@ -11113,29 +9362,29 @@
             <a:r>
               <a:rPr sz="1400" b="0">
                 <a:solidFill>
-                  <a:srgbClr val="FFFFFF"/>
+                  <a:srgbClr val="000000"/>
                 </a:solidFill>
                 <a:latin typeface="Play"/>
                 <a:ea typeface="Play"/>
                 <a:cs typeface="Play"/>
               </a:rPr>
-              <a:t>Неделя 3</a:t>
+              <a:t>Q4 2026: доступ для всей компании</a:t>
             </a:r>
           </a:p>
         </p:txBody>
       </p:sp>
       <p:sp>
         <p:nvSpPr>
-          <p:cNvPr id="6" name="Chevron 5"/>
+          <p:cNvPr id="8" name="Oval 7"/>
           <p:cNvSpPr/>
           <p:nvPr/>
         </p:nvSpPr>
         <p:spPr>
           <a:xfrm>
-            <a:off x="274320" y="2916364"/>
-            <a:ext cx="8344814" cy="442341"/>
+            <a:off x="6888860" y="2463736"/>
+            <a:ext cx="678942" cy="678942"/>
           </a:xfrm>
-          <a:prstGeom prst="chevron">
+          <a:prstGeom prst="ellipse">
             <a:avLst/>
           </a:prstGeom>
           <a:solidFill>
@@ -11160,13 +9409,39 @@
           </a:fontRef>
         </p:style>
         <p:txBody>
-          <a:bodyPr rtlCol="0" anchor="ctr" wrap="square" lIns="12700" rIns="12700" tIns="12700" bIns="12700"/>
+          <a:bodyPr rtlCol="0" anchor="ctr"/>
+          <a:lstStyle/>
+          <a:p>
+            <a:pPr algn="ctr"/>
+          </a:p>
+        </p:txBody>
+      </p:sp>
+      <p:sp>
+        <p:nvSpPr>
+          <p:cNvPr id="9" name="TextBox 8"/>
+          <p:cNvSpPr txBox="1"/>
+          <p:nvPr/>
+        </p:nvSpPr>
+        <p:spPr>
+          <a:xfrm>
+            <a:off x="4446727" y="1337310"/>
+            <a:ext cx="4172407" cy="1172718"/>
+          </a:xfrm>
+          <a:prstGeom prst="rect">
+            <a:avLst/>
+          </a:prstGeom>
+          <a:noFill/>
+        </p:spPr>
+        <p:txBody>
+          <a:bodyPr wrap="square" lIns="12700" rIns="12700" tIns="12700" bIns="12700">
+            <a:spAutoFit/>
+          </a:bodyPr>
           <a:lstStyle/>
           <a:p>
             <a:pPr algn="ctr">
               <a:defRPr sz="1400" b="0">
                 <a:solidFill>
-                  <a:srgbClr val="FFFFFF"/>
+                  <a:srgbClr val="000000"/>
                 </a:solidFill>
                 <a:latin typeface="Play"/>
                 <a:ea typeface="Play"/>
@@ -11176,139 +9451,13 @@
             <a:r>
               <a:rPr sz="1400" b="0">
                 <a:solidFill>
-                  <a:srgbClr val="FFFFFF"/>
+                  <a:srgbClr val="000000"/>
                 </a:solidFill>
                 <a:latin typeface="Play"/>
                 <a:ea typeface="Play"/>
                 <a:cs typeface="Play"/>
               </a:rPr>
-              <a:t>Неделя 4</a:t>
-            </a:r>
-          </a:p>
-        </p:txBody>
-      </p:sp>
-      <p:sp>
-        <p:nvSpPr>
-          <p:cNvPr id="7" name="Chevron 6"/>
-          <p:cNvSpPr/>
-          <p:nvPr/>
-        </p:nvSpPr>
-        <p:spPr>
-          <a:xfrm>
-            <a:off x="274320" y="3430714"/>
-            <a:ext cx="8344814" cy="442341"/>
-          </a:xfrm>
-          <a:prstGeom prst="chevron">
-            <a:avLst/>
-          </a:prstGeom>
-          <a:solidFill>
-            <a:srgbClr val="0077FF"/>
-          </a:solidFill>
-          <a:ln>
-            <a:noFill/>
-          </a:ln>
-        </p:spPr>
-        <p:style>
-          <a:lnRef idx="1">
-            <a:schemeClr val="accent1"/>
-          </a:lnRef>
-          <a:fillRef idx="3">
-            <a:schemeClr val="accent1"/>
-          </a:fillRef>
-          <a:effectRef idx="2">
-            <a:schemeClr val="accent1"/>
-          </a:effectRef>
-          <a:fontRef idx="minor">
-            <a:schemeClr val="lt1"/>
-          </a:fontRef>
-        </p:style>
-        <p:txBody>
-          <a:bodyPr rtlCol="0" anchor="ctr" wrap="square" lIns="12700" rIns="12700" tIns="12700" bIns="12700"/>
-          <a:lstStyle/>
-          <a:p>
-            <a:pPr algn="ctr">
-              <a:defRPr sz="1400" b="0">
-                <a:solidFill>
-                  <a:srgbClr val="FFFFFF"/>
-                </a:solidFill>
-                <a:latin typeface="Play"/>
-                <a:ea typeface="Play"/>
-                <a:cs typeface="Play"/>
-              </a:defRPr>
-            </a:pPr>
-            <a:r>
-              <a:rPr sz="1400" b="0">
-                <a:solidFill>
-                  <a:srgbClr val="FFFFFF"/>
-                </a:solidFill>
-                <a:latin typeface="Play"/>
-                <a:ea typeface="Play"/>
-                <a:cs typeface="Play"/>
-              </a:rPr>
-              <a:t>Неделя 5</a:t>
-            </a:r>
-          </a:p>
-        </p:txBody>
-      </p:sp>
-      <p:sp>
-        <p:nvSpPr>
-          <p:cNvPr id="8" name="Chevron 7"/>
-          <p:cNvSpPr/>
-          <p:nvPr/>
-        </p:nvSpPr>
-        <p:spPr>
-          <a:xfrm>
-            <a:off x="274320" y="3945064"/>
-            <a:ext cx="8344814" cy="442341"/>
-          </a:xfrm>
-          <a:prstGeom prst="chevron">
-            <a:avLst/>
-          </a:prstGeom>
-          <a:solidFill>
-            <a:srgbClr val="0077FF"/>
-          </a:solidFill>
-          <a:ln>
-            <a:noFill/>
-          </a:ln>
-        </p:spPr>
-        <p:style>
-          <a:lnRef idx="1">
-            <a:schemeClr val="accent1"/>
-          </a:lnRef>
-          <a:fillRef idx="3">
-            <a:schemeClr val="accent1"/>
-          </a:fillRef>
-          <a:effectRef idx="2">
-            <a:schemeClr val="accent1"/>
-          </a:effectRef>
-          <a:fontRef idx="minor">
-            <a:schemeClr val="lt1"/>
-          </a:fontRef>
-        </p:style>
-        <p:txBody>
-          <a:bodyPr rtlCol="0" anchor="ctr" wrap="square" lIns="12700" rIns="12700" tIns="12700" bIns="12700"/>
-          <a:lstStyle/>
-          <a:p>
-            <a:pPr algn="ctr">
-              <a:defRPr sz="1400" b="0">
-                <a:solidFill>
-                  <a:srgbClr val="FFFFFF"/>
-                </a:solidFill>
-                <a:latin typeface="Play"/>
-                <a:ea typeface="Play"/>
-                <a:cs typeface="Play"/>
-              </a:defRPr>
-            </a:pPr>
-            <a:r>
-              <a:rPr sz="1400" b="0">
-                <a:solidFill>
-                  <a:srgbClr val="FFFFFF"/>
-                </a:solidFill>
-                <a:latin typeface="Play"/>
-                <a:ea typeface="Play"/>
-                <a:cs typeface="Play"/>
-              </a:rPr>
-              <a:t>Неделя 6</a:t>
+              <a:t>Q1 2027: генерация иллюстраций</a:t>
             </a:r>
           </a:p>
         </p:txBody>
@@ -11502,358 +9651,562 @@
                 <a:ea typeface="Play"/>
                 <a:cs typeface="Play"/>
               </a:rPr>
-              <a:t>Результаты пилота: эффективность</a:t>
+              <a:t>Запрос запуска на всю компанию</a:t>
             </a:r>
           </a:p>
         </p:txBody>
       </p:sp>
-      <p:graphicFrame>
-        <p:nvGraphicFramePr>
-          <p:cNvPr id="1060" name="Table 1059"/>
-          <p:cNvGraphicFramePr>
-            <a:graphicFrameLocks noGrp="1"/>
-          </p:cNvGraphicFramePr>
+      <p:grpSp>
+        <p:nvGrpSpPr>
+          <p:cNvPr id="2" name="icon:builtin-check"/>
+          <p:cNvGrpSpPr/>
           <p:nvPr/>
-        </p:nvGraphicFramePr>
-        <p:xfrm>
-          <a:off x="274320" y="1394994"/>
-          <a:ext cx="8344814" cy="3028415"/>
-        </p:xfrm>
-        <a:graphic>
-          <a:graphicData uri="http://schemas.openxmlformats.org/drawingml/2006/table">
-            <a:tbl>
-              <a:tblPr firstRow="1" bandRow="1">
-                <a:tableStyleId>{5C22544A-7EE6-4342-B048-85BDC9FD1C3A}</a:tableStyleId>
-              </a:tblPr>
-              <a:tblGrid>
-                <a:gridCol w="2781604"/>
-                <a:gridCol w="2781604"/>
-                <a:gridCol w="2781606"/>
-              </a:tblGrid>
-              <a:tr h="757103">
-                <a:tc>
-                  <a:txBody>
-                    <a:bodyPr/>
-                    <a:lstStyle/>
-                    <a:p>
-                      <a:pPr>
-                        <a:defRPr sz="1300" b="1">
-                          <a:solidFill>
-                            <a:srgbClr val="FFFFFF"/>
-                          </a:solidFill>
-                          <a:latin typeface="Play"/>
-                          <a:ea typeface="Play"/>
-                          <a:cs typeface="Play"/>
-                        </a:defRPr>
-                      </a:pPr>
-                      <a:r>
-                        <a:t>Показатель</a:t>
-                      </a:r>
-                    </a:p>
-                  </a:txBody>
-                  <a:tcPr>
-                    <a:solidFill>
-                      <a:srgbClr val="0077FF"/>
-                    </a:solidFill>
-                  </a:tcPr>
-                </a:tc>
-                <a:tc>
-                  <a:txBody>
-                    <a:bodyPr/>
-                    <a:lstStyle/>
-                    <a:p>
-                      <a:pPr>
-                        <a:defRPr sz="1300" b="1">
-                          <a:solidFill>
-                            <a:srgbClr val="FFFFFF"/>
-                          </a:solidFill>
-                          <a:latin typeface="Play"/>
-                          <a:ea typeface="Play"/>
-                          <a:cs typeface="Play"/>
-                        </a:defRPr>
-                      </a:pPr>
-                      <a:r>
-                        <a:t>Сейчас</a:t>
-                      </a:r>
-                    </a:p>
-                  </a:txBody>
-                  <a:tcPr>
-                    <a:solidFill>
-                      <a:srgbClr val="0077FF"/>
-                    </a:solidFill>
-                  </a:tcPr>
-                </a:tc>
-                <a:tc>
-                  <a:txBody>
-                    <a:bodyPr/>
-                    <a:lstStyle/>
-                    <a:p>
-                      <a:pPr>
-                        <a:defRPr sz="1300" b="1">
-                          <a:solidFill>
-                            <a:srgbClr val="FFFFFF"/>
-                          </a:solidFill>
-                          <a:latin typeface="Play"/>
-                          <a:ea typeface="Play"/>
-                          <a:cs typeface="Play"/>
-                        </a:defRPr>
-                      </a:pPr>
-                      <a:r>
-                        <a:t>Сервис</a:t>
-                      </a:r>
-                    </a:p>
-                  </a:txBody>
-                  <a:tcPr>
-                    <a:solidFill>
-                      <a:srgbClr val="0077FF"/>
-                    </a:solidFill>
-                  </a:tcPr>
-                </a:tc>
-              </a:tr>
-              <a:tr h="757103">
-                <a:tc>
-                  <a:txBody>
-                    <a:bodyPr/>
-                    <a:lstStyle/>
-                    <a:p>
-                      <a:pPr>
-                        <a:defRPr sz="1300" b="0">
-                          <a:solidFill>
-                            <a:srgbClr val="000000"/>
-                          </a:solidFill>
-                          <a:latin typeface="Play"/>
-                          <a:ea typeface="Play"/>
-                          <a:cs typeface="Play"/>
-                        </a:defRPr>
-                      </a:pPr>
-                      <a:r>
-                        <a:t>Время, мин</a:t>
-                      </a:r>
-                    </a:p>
-                  </a:txBody>
-                  <a:tcPr>
-                    <a:solidFill>
-                      <a:srgbClr val="FFFFFF"/>
-                    </a:solidFill>
-                  </a:tcPr>
-                </a:tc>
-                <a:tc>
-                  <a:txBody>
-                    <a:bodyPr/>
-                    <a:lstStyle/>
-                    <a:p>
-                      <a:pPr>
-                        <a:defRPr sz="1300" b="0">
-                          <a:solidFill>
-                            <a:srgbClr val="000000"/>
-                          </a:solidFill>
-                          <a:latin typeface="Play"/>
-                          <a:ea typeface="Play"/>
-                          <a:cs typeface="Play"/>
-                        </a:defRPr>
-                      </a:pPr>
-                      <a:r>
-                        <a:t>186</a:t>
-                      </a:r>
-                    </a:p>
-                  </a:txBody>
-                  <a:tcPr>
-                    <a:solidFill>
-                      <a:srgbClr val="FFFFFF"/>
-                    </a:solidFill>
-                  </a:tcPr>
-                </a:tc>
-                <a:tc>
-                  <a:txBody>
-                    <a:bodyPr/>
-                    <a:lstStyle/>
-                    <a:p>
-                      <a:pPr>
-                        <a:defRPr sz="1300" b="0">
-                          <a:solidFill>
-                            <a:srgbClr val="000000"/>
-                          </a:solidFill>
-                          <a:latin typeface="Play"/>
-                          <a:ea typeface="Play"/>
-                          <a:cs typeface="Play"/>
-                        </a:defRPr>
-                      </a:pPr>
-                      <a:r>
-                        <a:t>4</a:t>
-                      </a:r>
-                    </a:p>
-                  </a:txBody>
-                  <a:tcPr>
-                    <a:solidFill>
-                      <a:srgbClr val="FFFFFF"/>
-                    </a:solidFill>
-                  </a:tcPr>
-                </a:tc>
-              </a:tr>
-              <a:tr h="757103">
-                <a:tc>
-                  <a:txBody>
-                    <a:bodyPr/>
-                    <a:lstStyle/>
-                    <a:p>
-                      <a:pPr>
-                        <a:defRPr sz="1300" b="0">
-                          <a:solidFill>
-                            <a:srgbClr val="000000"/>
-                          </a:solidFill>
-                          <a:latin typeface="Play"/>
-                          <a:ea typeface="Play"/>
-                          <a:cs typeface="Play"/>
-                        </a:defRPr>
-                      </a:pPr>
-                      <a:r>
-                        <a:t>Нарушения колод</a:t>
-                      </a:r>
-                    </a:p>
-                  </a:txBody>
-                  <a:tcPr>
-                    <a:solidFill>
-                      <a:srgbClr val="FFFFFF"/>
-                    </a:solidFill>
-                  </a:tcPr>
-                </a:tc>
-                <a:tc>
-                  <a:txBody>
-                    <a:bodyPr/>
-                    <a:lstStyle/>
-                    <a:p>
-                      <a:pPr>
-                        <a:defRPr sz="1300" b="0">
-                          <a:solidFill>
-                            <a:srgbClr val="000000"/>
-                          </a:solidFill>
-                          <a:latin typeface="Play"/>
-                          <a:ea typeface="Play"/>
-                          <a:cs typeface="Play"/>
-                        </a:defRPr>
-                      </a:pPr>
-                      <a:r>
-                        <a:t>19</a:t>
-                      </a:r>
-                    </a:p>
-                  </a:txBody>
-                  <a:tcPr>
-                    <a:solidFill>
-                      <a:srgbClr val="FFFFFF"/>
-                    </a:solidFill>
-                  </a:tcPr>
-                </a:tc>
-                <a:tc>
-                  <a:txBody>
-                    <a:bodyPr/>
-                    <a:lstStyle/>
-                    <a:p>
-                      <a:pPr>
-                        <a:defRPr sz="1300" b="0">
-                          <a:solidFill>
-                            <a:srgbClr val="000000"/>
-                          </a:solidFill>
-                          <a:latin typeface="Play"/>
-                          <a:ea typeface="Play"/>
-                          <a:cs typeface="Play"/>
-                        </a:defRPr>
-                      </a:pPr>
-                      <a:r>
-                        <a:t>2</a:t>
-                      </a:r>
-                    </a:p>
-                  </a:txBody>
-                  <a:tcPr>
-                    <a:solidFill>
-                      <a:srgbClr val="FFFFFF"/>
-                    </a:solidFill>
-                  </a:tcPr>
-                </a:tc>
-              </a:tr>
-              <a:tr h="757106">
-                <a:tc>
-                  <a:txBody>
-                    <a:bodyPr/>
-                    <a:lstStyle/>
-                    <a:p>
-                      <a:pPr>
-                        <a:defRPr sz="1300" b="0">
-                          <a:solidFill>
-                            <a:srgbClr val="000000"/>
-                          </a:solidFill>
-                          <a:latin typeface="Play"/>
-                          <a:ea typeface="Play"/>
-                          <a:cs typeface="Play"/>
-                        </a:defRPr>
-                      </a:pPr>
-                      <a:r>
-                        <a:t>Запросы, кол-во</a:t>
-                      </a:r>
-                    </a:p>
-                  </a:txBody>
-                  <a:tcPr>
-                    <a:solidFill>
-                      <a:srgbClr val="FFFFFF"/>
-                    </a:solidFill>
-                  </a:tcPr>
-                </a:tc>
-                <a:tc>
-                  <a:txBody>
-                    <a:bodyPr/>
-                    <a:lstStyle/>
-                    <a:p>
-                      <a:pPr>
-                        <a:defRPr sz="1300" b="0">
-                          <a:solidFill>
-                            <a:srgbClr val="000000"/>
-                          </a:solidFill>
-                          <a:latin typeface="Play"/>
-                          <a:ea typeface="Play"/>
-                          <a:cs typeface="Play"/>
-                        </a:defRPr>
-                      </a:pPr>
-                      <a:r>
-                        <a:t>11</a:t>
-                      </a:r>
-                    </a:p>
-                  </a:txBody>
-                  <a:tcPr>
-                    <a:solidFill>
-                      <a:srgbClr val="FFFFFF"/>
-                    </a:solidFill>
-                  </a:tcPr>
-                </a:tc>
-                <a:tc>
-                  <a:txBody>
-                    <a:bodyPr/>
-                    <a:lstStyle/>
-                    <a:p>
-                      <a:pPr>
-                        <a:defRPr sz="1300" b="0">
-                          <a:solidFill>
-                            <a:srgbClr val="000000"/>
-                          </a:solidFill>
-                          <a:latin typeface="Play"/>
-                          <a:ea typeface="Play"/>
-                          <a:cs typeface="Play"/>
-                        </a:defRPr>
-                      </a:pPr>
-                      <a:r>
-                        <a:t>38</a:t>
-                      </a:r>
-                    </a:p>
-                  </a:txBody>
-                  <a:tcPr>
-                    <a:solidFill>
-                      <a:srgbClr val="FFFFFF"/>
-                    </a:solidFill>
-                  </a:tcPr>
-                </a:tc>
-              </a:tr>
-            </a:tbl>
-          </a:graphicData>
-        </a:graphic>
-      </p:graphicFrame>
+        </p:nvGrpSpPr>
+        <p:grpSpPr>
+          <a:xfrm>
+            <a:off x="328969" y="1449643"/>
+            <a:ext cx="327897" cy="327897"/>
+            <a:chOff x="328969" y="1449643"/>
+            <a:chExt cx="327897" cy="327897"/>
+          </a:xfrm>
+        </p:grpSpPr>
+        <p:sp>
+          <p:nvSpPr>
+            <p:cNvPr id="1060" name="Oval 1059"/>
+            <p:cNvSpPr/>
+            <p:nvPr/>
+          </p:nvSpPr>
+          <p:spPr>
+            <a:xfrm>
+              <a:off x="328969" y="1449643"/>
+              <a:ext cx="327897" cy="327897"/>
+            </a:xfrm>
+            <a:prstGeom prst="ellipse">
+              <a:avLst/>
+            </a:prstGeom>
+            <a:noFill/>
+            <a:ln w="36433" cap="rnd">
+              <a:solidFill>
+                <a:srgbClr val="0077FF"/>
+              </a:solidFill>
+              <a:round/>
+            </a:ln>
+            <a:effectLst/>
+          </p:spPr>
+          <p:style>
+            <a:lnRef idx="1">
+              <a:schemeClr val="accent1"/>
+            </a:lnRef>
+            <a:fillRef idx="3">
+              <a:schemeClr val="accent1"/>
+            </a:fillRef>
+            <a:effectRef idx="2">
+              <a:schemeClr val="accent1"/>
+            </a:effectRef>
+            <a:fontRef idx="minor">
+              <a:schemeClr val="lt1"/>
+            </a:fontRef>
+          </p:style>
+          <p:txBody>
+            <a:bodyPr rtlCol="0" anchor="ctr"/>
+            <a:lstStyle/>
+            <a:p>
+              <a:pPr algn="ctr"/>
+            </a:p>
+          </p:txBody>
+        </p:sp>
+        <p:sp>
+          <p:nvSpPr>
+            <p:cNvPr id="3" name="Freeform 2"/>
+            <p:cNvSpPr/>
+            <p:nvPr/>
+          </p:nvSpPr>
+          <p:spPr>
+            <a:xfrm>
+              <a:off x="420052" y="1558942"/>
+              <a:ext cx="145732" cy="109300"/>
+            </a:xfrm>
+            <a:custGeom>
+              <a:avLst/>
+              <a:gdLst/>
+              <a:ahLst/>
+              <a:cxnLst/>
+              <a:rect l="l" t="t" r="r" b="b"/>
+              <a:pathLst>
+                <a:path w="145732" h="109300">
+                  <a:moveTo>
+                    <a:pt x="0" y="54650"/>
+                  </a:moveTo>
+                  <a:lnTo>
+                    <a:pt x="54649" y="109300"/>
+                  </a:lnTo>
+                  <a:lnTo>
+                    <a:pt x="145732" y="0"/>
+                  </a:lnTo>
+                </a:path>
+              </a:pathLst>
+            </a:custGeom>
+            <a:noFill/>
+            <a:ln w="36433" cap="rnd">
+              <a:solidFill>
+                <a:srgbClr val="0077FF"/>
+              </a:solidFill>
+              <a:round/>
+            </a:ln>
+            <a:effectLst/>
+          </p:spPr>
+          <p:style>
+            <a:lnRef idx="1">
+              <a:schemeClr val="accent1"/>
+            </a:lnRef>
+            <a:fillRef idx="3">
+              <a:schemeClr val="accent1"/>
+            </a:fillRef>
+            <a:effectRef idx="2">
+              <a:schemeClr val="accent1"/>
+            </a:effectRef>
+            <a:fontRef idx="minor">
+              <a:schemeClr val="lt1"/>
+            </a:fontRef>
+          </p:style>
+          <p:txBody>
+            <a:bodyPr rtlCol="0" anchor="ctr"/>
+            <a:lstStyle/>
+            <a:p>
+              <a:pPr algn="ctr"/>
+            </a:p>
+          </p:txBody>
+        </p:sp>
+      </p:grpSp>
+      <p:sp>
+        <p:nvSpPr>
+          <p:cNvPr id="1061" name="item_0"/>
+          <p:cNvSpPr txBox="1"/>
+          <p:nvPr/>
+        </p:nvSpPr>
+        <p:spPr>
+          <a:xfrm>
+            <a:off x="908256" y="1414202"/>
+            <a:ext cx="7710878" cy="1392129"/>
+          </a:xfrm>
+          <a:prstGeom prst="rect">
+            <a:avLst/>
+          </a:prstGeom>
+          <a:noFill/>
+        </p:spPr>
+        <p:txBody>
+          <a:bodyPr wrap="square" lIns="76200" rIns="76200" tIns="50800" bIns="50800">
+            <a:spAutoFit/>
+          </a:bodyPr>
+          <a:lstStyle/>
+          <a:p>
+            <a:pPr algn="l">
+              <a:spcAft>
+                <a:spcPts val="300"/>
+              </a:spcAft>
+              <a:defRPr sz="1800">
+                <a:solidFill>
+                  <a:srgbClr val="000000"/>
+                </a:solidFill>
+                <a:latin typeface="Play"/>
+                <a:ea typeface="Play"/>
+                <a:cs typeface="Play"/>
+              </a:defRPr>
+            </a:pPr>
+            <a:r>
+              <a:rPr sz="1800">
+                <a:solidFill>
+                  <a:srgbClr val="000000"/>
+                </a:solidFill>
+                <a:latin typeface="Play"/>
+                <a:ea typeface="Play"/>
+                <a:cs typeface="Play"/>
+              </a:rPr>
+              <a:t>Попросить одобрение запуска</a:t>
+            </a:r>
+          </a:p>
+        </p:txBody>
+      </p:sp>
+      <p:grpSp>
+        <p:nvGrpSpPr>
+          <p:cNvPr id="4" name="icon:builtin-idea"/>
+          <p:cNvGrpSpPr/>
+          <p:nvPr/>
+        </p:nvGrpSpPr>
+        <p:grpSpPr>
+          <a:xfrm>
+            <a:off x="383018" y="2963851"/>
+            <a:ext cx="219800" cy="327898"/>
+            <a:chOff x="383018" y="2963851"/>
+            <a:chExt cx="219800" cy="327898"/>
+          </a:xfrm>
+        </p:grpSpPr>
+        <p:sp>
+          <p:nvSpPr>
+            <p:cNvPr id="5" name="Freeform 4"/>
+            <p:cNvSpPr/>
+            <p:nvPr/>
+          </p:nvSpPr>
+          <p:spPr>
+            <a:xfrm>
+              <a:off x="438268" y="3237099"/>
+              <a:ext cx="109300" cy="0"/>
+            </a:xfrm>
+            <a:custGeom>
+              <a:avLst/>
+              <a:gdLst/>
+              <a:ahLst/>
+              <a:cxnLst/>
+              <a:rect l="l" t="t" r="r" b="b"/>
+              <a:pathLst>
+                <a:path w="109300" h="0">
+                  <a:moveTo>
+                    <a:pt x="0" y="0"/>
+                  </a:moveTo>
+                  <a:lnTo>
+                    <a:pt x="109300" y="0"/>
+                  </a:lnTo>
+                </a:path>
+              </a:pathLst>
+            </a:custGeom>
+            <a:noFill/>
+            <a:ln w="36433" cap="rnd">
+              <a:solidFill>
+                <a:srgbClr val="0077FF"/>
+              </a:solidFill>
+              <a:round/>
+            </a:ln>
+            <a:effectLst/>
+          </p:spPr>
+          <p:style>
+            <a:lnRef idx="1">
+              <a:schemeClr val="accent1"/>
+            </a:lnRef>
+            <a:fillRef idx="3">
+              <a:schemeClr val="accent1"/>
+            </a:fillRef>
+            <a:effectRef idx="2">
+              <a:schemeClr val="accent1"/>
+            </a:effectRef>
+            <a:fontRef idx="minor">
+              <a:schemeClr val="lt1"/>
+            </a:fontRef>
+          </p:style>
+          <p:txBody>
+            <a:bodyPr rtlCol="0" anchor="ctr"/>
+            <a:lstStyle/>
+            <a:p>
+              <a:pPr algn="ctr"/>
+            </a:p>
+          </p:txBody>
+        </p:sp>
+        <p:sp>
+          <p:nvSpPr>
+            <p:cNvPr id="6" name="Freeform 5"/>
+            <p:cNvSpPr/>
+            <p:nvPr/>
+          </p:nvSpPr>
+          <p:spPr>
+            <a:xfrm>
+              <a:off x="456485" y="3291749"/>
+              <a:ext cx="72866" cy="0"/>
+            </a:xfrm>
+            <a:custGeom>
+              <a:avLst/>
+              <a:gdLst/>
+              <a:ahLst/>
+              <a:cxnLst/>
+              <a:rect l="l" t="t" r="r" b="b"/>
+              <a:pathLst>
+                <a:path w="72866" h="0">
+                  <a:moveTo>
+                    <a:pt x="0" y="0"/>
+                  </a:moveTo>
+                  <a:lnTo>
+                    <a:pt x="72866" y="0"/>
+                  </a:lnTo>
+                </a:path>
+              </a:pathLst>
+            </a:custGeom>
+            <a:noFill/>
+            <a:ln w="36433" cap="rnd">
+              <a:solidFill>
+                <a:srgbClr val="0077FF"/>
+              </a:solidFill>
+              <a:round/>
+            </a:ln>
+            <a:effectLst/>
+          </p:spPr>
+          <p:style>
+            <a:lnRef idx="1">
+              <a:schemeClr val="accent1"/>
+            </a:lnRef>
+            <a:fillRef idx="3">
+              <a:schemeClr val="accent1"/>
+            </a:fillRef>
+            <a:effectRef idx="2">
+              <a:schemeClr val="accent1"/>
+            </a:effectRef>
+            <a:fontRef idx="minor">
+              <a:schemeClr val="lt1"/>
+            </a:fontRef>
+          </p:style>
+          <p:txBody>
+            <a:bodyPr rtlCol="0" anchor="ctr"/>
+            <a:lstStyle/>
+            <a:p>
+              <a:pPr algn="ctr"/>
+            </a:p>
+          </p:txBody>
+        </p:sp>
+        <p:sp>
+          <p:nvSpPr>
+            <p:cNvPr id="7" name="Freeform 6"/>
+            <p:cNvSpPr/>
+            <p:nvPr/>
+          </p:nvSpPr>
+          <p:spPr>
+            <a:xfrm>
+              <a:off x="383018" y="2963851"/>
+              <a:ext cx="219800" cy="236815"/>
+            </a:xfrm>
+            <a:custGeom>
+              <a:avLst/>
+              <a:gdLst/>
+              <a:ahLst/>
+              <a:cxnLst/>
+              <a:rect l="l" t="t" r="r" b="b"/>
+              <a:pathLst>
+                <a:path w="219800" h="236815">
+                  <a:moveTo>
+                    <a:pt x="109900" y="0"/>
+                  </a:moveTo>
+                  <a:lnTo>
+                    <a:pt x="89388" y="1767"/>
+                  </a:lnTo>
+                  <a:lnTo>
+                    <a:pt x="69569" y="7360"/>
+                  </a:lnTo>
+                  <a:lnTo>
+                    <a:pt x="51152" y="16577"/>
+                  </a:lnTo>
+                  <a:lnTo>
+                    <a:pt x="34793" y="29074"/>
+                  </a:lnTo>
+                  <a:lnTo>
+                    <a:pt x="21076" y="44412"/>
+                  </a:lnTo>
+                  <a:lnTo>
+                    <a:pt x="10456" y="62064"/>
+                  </a:lnTo>
+                  <a:lnTo>
+                    <a:pt x="3351" y="81392"/>
+                  </a:lnTo>
+                  <a:lnTo>
+                    <a:pt x="0" y="101703"/>
+                  </a:lnTo>
+                  <a:lnTo>
+                    <a:pt x="510" y="122288"/>
+                  </a:lnTo>
+                  <a:lnTo>
+                    <a:pt x="4863" y="142399"/>
+                  </a:lnTo>
+                  <a:lnTo>
+                    <a:pt x="12915" y="161344"/>
+                  </a:lnTo>
+                  <a:lnTo>
+                    <a:pt x="24392" y="178449"/>
+                  </a:lnTo>
+                  <a:lnTo>
+                    <a:pt x="38855" y="193095"/>
+                  </a:lnTo>
+                  <a:lnTo>
+                    <a:pt x="41971" y="196484"/>
+                  </a:lnTo>
+                  <a:lnTo>
+                    <a:pt x="44758" y="200091"/>
+                  </a:lnTo>
+                  <a:lnTo>
+                    <a:pt x="47217" y="203916"/>
+                  </a:lnTo>
+                  <a:lnTo>
+                    <a:pt x="49348" y="207960"/>
+                  </a:lnTo>
+                  <a:lnTo>
+                    <a:pt x="51152" y="212223"/>
+                  </a:lnTo>
+                  <a:lnTo>
+                    <a:pt x="52627" y="216704"/>
+                  </a:lnTo>
+                  <a:lnTo>
+                    <a:pt x="53775" y="221404"/>
+                  </a:lnTo>
+                  <a:lnTo>
+                    <a:pt x="54595" y="226322"/>
+                  </a:lnTo>
+                  <a:lnTo>
+                    <a:pt x="55086" y="231460"/>
+                  </a:lnTo>
+                  <a:lnTo>
+                    <a:pt x="55250" y="236815"/>
+                  </a:lnTo>
+                  <a:lnTo>
+                    <a:pt x="164550" y="236815"/>
+                  </a:lnTo>
+                  <a:lnTo>
+                    <a:pt x="164714" y="231460"/>
+                  </a:lnTo>
+                  <a:lnTo>
+                    <a:pt x="165205" y="226322"/>
+                  </a:lnTo>
+                  <a:lnTo>
+                    <a:pt x="166025" y="221404"/>
+                  </a:lnTo>
+                  <a:lnTo>
+                    <a:pt x="167173" y="216704"/>
+                  </a:lnTo>
+                  <a:lnTo>
+                    <a:pt x="168648" y="212223"/>
+                  </a:lnTo>
+                  <a:lnTo>
+                    <a:pt x="170452" y="207960"/>
+                  </a:lnTo>
+                  <a:lnTo>
+                    <a:pt x="172583" y="203916"/>
+                  </a:lnTo>
+                  <a:lnTo>
+                    <a:pt x="175042" y="200091"/>
+                  </a:lnTo>
+                  <a:lnTo>
+                    <a:pt x="177829" y="196484"/>
+                  </a:lnTo>
+                  <a:lnTo>
+                    <a:pt x="180945" y="193095"/>
+                  </a:lnTo>
+                  <a:lnTo>
+                    <a:pt x="195408" y="178449"/>
+                  </a:lnTo>
+                  <a:lnTo>
+                    <a:pt x="206885" y="161344"/>
+                  </a:lnTo>
+                  <a:lnTo>
+                    <a:pt x="214937" y="142399"/>
+                  </a:lnTo>
+                  <a:lnTo>
+                    <a:pt x="219290" y="122288"/>
+                  </a:lnTo>
+                  <a:lnTo>
+                    <a:pt x="219800" y="101703"/>
+                  </a:lnTo>
+                  <a:lnTo>
+                    <a:pt x="216449" y="81392"/>
+                  </a:lnTo>
+                  <a:lnTo>
+                    <a:pt x="209344" y="62064"/>
+                  </a:lnTo>
+                  <a:lnTo>
+                    <a:pt x="198724" y="44412"/>
+                  </a:lnTo>
+                  <a:lnTo>
+                    <a:pt x="185007" y="29074"/>
+                  </a:lnTo>
+                  <a:lnTo>
+                    <a:pt x="168648" y="16577"/>
+                  </a:lnTo>
+                  <a:lnTo>
+                    <a:pt x="150231" y="7360"/>
+                  </a:lnTo>
+                  <a:lnTo>
+                    <a:pt x="130412" y="1767"/>
+                  </a:lnTo>
+                  <a:lnTo>
+                    <a:pt x="109900" y="0"/>
+                  </a:lnTo>
+                  <a:close/>
+                </a:path>
+              </a:pathLst>
+            </a:custGeom>
+            <a:noFill/>
+            <a:ln w="36433" cap="rnd">
+              <a:solidFill>
+                <a:srgbClr val="0077FF"/>
+              </a:solidFill>
+              <a:round/>
+            </a:ln>
+            <a:effectLst/>
+          </p:spPr>
+          <p:style>
+            <a:lnRef idx="1">
+              <a:schemeClr val="accent1"/>
+            </a:lnRef>
+            <a:fillRef idx="3">
+              <a:schemeClr val="accent1"/>
+            </a:fillRef>
+            <a:effectRef idx="2">
+              <a:schemeClr val="accent1"/>
+            </a:effectRef>
+            <a:fontRef idx="minor">
+              <a:schemeClr val="lt1"/>
+            </a:fontRef>
+          </p:style>
+          <p:txBody>
+            <a:bodyPr rtlCol="0" anchor="ctr"/>
+            <a:lstStyle/>
+            <a:p>
+              <a:pPr algn="ctr"/>
+            </a:p>
+          </p:txBody>
+        </p:sp>
+      </p:grpSp>
+      <p:sp>
+        <p:nvSpPr>
+          <p:cNvPr id="1062" name="item_1"/>
+          <p:cNvSpPr txBox="1"/>
+          <p:nvPr/>
+        </p:nvSpPr>
+        <p:spPr>
+          <a:xfrm>
+            <a:off x="908256" y="2928410"/>
+            <a:ext cx="7710878" cy="1392129"/>
+          </a:xfrm>
+          <a:prstGeom prst="rect">
+            <a:avLst/>
+          </a:prstGeom>
+          <a:noFill/>
+        </p:spPr>
+        <p:txBody>
+          <a:bodyPr wrap="square" lIns="76200" rIns="76200" tIns="50800" bIns="50800">
+            <a:spAutoFit/>
+          </a:bodyPr>
+          <a:lstStyle/>
+          <a:p>
+            <a:pPr algn="l">
+              <a:spcAft>
+                <a:spcPts val="300"/>
+              </a:spcAft>
+              <a:defRPr sz="1800">
+                <a:solidFill>
+                  <a:srgbClr val="000000"/>
+                </a:solidFill>
+                <a:latin typeface="Play"/>
+                <a:ea typeface="Play"/>
+                <a:cs typeface="Play"/>
+              </a:defRPr>
+            </a:pPr>
+            <a:r>
+              <a:rPr sz="1800">
+                <a:solidFill>
+                  <a:srgbClr val="000000"/>
+                </a:solidFill>
+                <a:latin typeface="Play"/>
+                <a:ea typeface="Play"/>
+                <a:cs typeface="Play"/>
+              </a:rPr>
+              <a:t>Предложить интеграцию с хранилищем документов</a:t>
+            </a:r>
+          </a:p>
+        </p:txBody>
+      </p:sp>
     </p:spTree>
   </p:cSld>
   <p:clrMapOvr>
@@ -11881,7 +10234,7 @@
         <p:spPr>
           <a:xfrm>
             <a:off x="1543608" y="159030"/>
-            <a:ext cx="7202525" cy="3204328"/>
+            <a:ext cx="7202525" cy="3006208"/>
           </a:xfrm>
           <a:prstGeom prst="roundRect">
             <a:avLst/>
@@ -11962,7 +10315,7 @@
                 <a:ea typeface="Play"/>
                 <a:cs typeface="Play"/>
               </a:rPr>
-              <a:t>Что мы просим решить: запуск на всю компанию</a:t>
+              <a:t>Экономия времени и повышение качества</a:t>
             </a:r>
           </a:p>
         </p:txBody>
@@ -11975,8 +10328,8 @@
         </p:nvSpPr>
         <p:spPr>
           <a:xfrm>
-            <a:off x="1670608" y="2243218"/>
-            <a:ext cx="6948525" cy="993140"/>
+            <a:off x="1670608" y="2342278"/>
+            <a:ext cx="6948525" cy="695960"/>
           </a:xfrm>
           <a:prstGeom prst="rect">
             <a:avLst/>
@@ -12011,7 +10364,7 @@
                 <a:ea typeface="Play"/>
                 <a:cs typeface="Play"/>
               </a:rPr>
-              <a:t>• Решение о запуске сервиса на всю компанию</a:t>
+              <a:t>• Сборка колоды сократилась до 4 мин</a:t>
             </a:r>
           </a:p>
           <a:p>
@@ -12037,7 +10390,7 @@
                 <a:ea typeface="Play"/>
                 <a:cs typeface="Play"/>
               </a:rPr>
-              <a:t>• Поддержка интеграции с корпоративным хранилищем документов</a:t>
+              <a:t>• Нарушения стиля уменьшились до 2/68</a:t>
             </a:r>
           </a:p>
         </p:txBody>
